--- a/第八週(10-29)/第八週_第1節_簡報.pptx
+++ b/第八週(10-29)/第八週_第1節_簡報.pptx
@@ -4492,11 +4492,11 @@
                 <a:spcPts val="0"/>
               </a:spcBef>
               <a:spcAft>
-                <a:spcPts val="192"/>
+                <a:spcPts val="167"/>
               </a:spcAft>
             </a:pPr>
             <a:r>
-              <a:rPr sz="1150" b="1" lang="zh-TW" dirty="0">
+              <a:rPr sz="1000" b="1" lang="zh-TW" dirty="0">
                 <a:solidFill>
                   <a:srgbClr val="000000"/>
                 </a:solidFill>
@@ -4507,7 +4507,7 @@
               <a:t>這一張的目的：</a:t>
             </a:r>
             <a:r>
-              <a:rPr sz="1150" lang="zh-TW" dirty="0">
+              <a:rPr sz="1000" lang="zh-TW" dirty="0">
                 <a:solidFill>
                   <a:srgbClr val="000000"/>
                 </a:solidFill>
@@ -4525,11 +4525,11 @@
                 <a:spcPts val="0"/>
               </a:spcBef>
               <a:spcAft>
-                <a:spcPts val="192"/>
+                <a:spcPts val="167"/>
               </a:spcAft>
             </a:pPr>
             <a:r>
-              <a:rPr sz="1150" lang="zh-TW" dirty="0">
+              <a:rPr sz="1000" lang="zh-TW" dirty="0">
                 <a:solidFill>
                   <a:srgbClr val="000000"/>
                 </a:solidFill>
@@ -4547,11 +4547,11 @@
                 <a:spcPts val="0"/>
               </a:spcBef>
               <a:spcAft>
-                <a:spcPts val="192"/>
+                <a:spcPts val="167"/>
               </a:spcAft>
             </a:pPr>
             <a:r>
-              <a:rPr sz="1150" lang="zh-TW" dirty="0">
+              <a:rPr sz="1000" lang="zh-TW" dirty="0">
                 <a:solidFill>
                   <a:srgbClr val="000000"/>
                 </a:solidFill>
@@ -4562,7 +4562,7 @@
               <a:t>相機裡面有一塊</a:t>
             </a:r>
             <a:r>
-              <a:rPr sz="1150" b="1" lang="zh-TW" dirty="0">
+              <a:rPr sz="1000" b="1" lang="zh-TW" dirty="0">
                 <a:solidFill>
                   <a:srgbClr val="000000"/>
                 </a:solidFill>
@@ -4573,7 +4573,7 @@
               <a:t>影像感測器</a:t>
             </a:r>
             <a:r>
-              <a:rPr sz="1150" lang="zh-TW" dirty="0">
+              <a:rPr sz="1000" lang="zh-TW" dirty="0">
                 <a:solidFill>
                   <a:srgbClr val="000000"/>
                 </a:solidFill>
@@ -4584,7 +4584,7 @@
               <a:t>，第五週讀過它的規格表。nuScenes 用的是 1/1.8 吋的 CMOS 感測器，照片是 1600 乘 900 個像素。可以把它想成</a:t>
             </a:r>
             <a:r>
-              <a:rPr sz="1150" b="1" lang="zh-TW" dirty="0">
+              <a:rPr sz="1000" b="1" lang="zh-TW" dirty="0">
                 <a:solidFill>
                   <a:srgbClr val="000000"/>
                 </a:solidFill>
@@ -4595,7 +4595,7 @@
               <a:t>一大片排得整整齊齊的小水桶</a:t>
             </a:r>
             <a:r>
-              <a:rPr sz="1150" lang="zh-TW" dirty="0">
+              <a:rPr sz="1000" lang="zh-TW" dirty="0">
                 <a:solidFill>
                   <a:srgbClr val="000000"/>
                 </a:solidFill>
@@ -4613,11 +4613,11 @@
                 <a:spcPts val="0"/>
               </a:spcBef>
               <a:spcAft>
-                <a:spcPts val="192"/>
+                <a:spcPts val="167"/>
               </a:spcAft>
             </a:pPr>
             <a:r>
-              <a:rPr sz="1150" lang="zh-TW" dirty="0">
+              <a:rPr sz="1000" lang="zh-TW" dirty="0">
                 <a:solidFill>
                   <a:srgbClr val="000000"/>
                 </a:solidFill>
@@ -4628,7 +4628,7 @@
               <a:t>按下快門，也就是</a:t>
             </a:r>
             <a:r>
-              <a:rPr sz="1150" b="1" lang="zh-TW" dirty="0">
+              <a:rPr sz="1000" b="1" lang="zh-TW" dirty="0">
                 <a:solidFill>
                   <a:srgbClr val="000000"/>
                 </a:solidFill>
@@ -4639,7 +4639,7 @@
               <a:t>曝光</a:t>
             </a:r>
             <a:r>
-              <a:rPr sz="1150" lang="zh-TW" dirty="0">
+              <a:rPr sz="1000" lang="zh-TW" dirty="0">
                 <a:solidFill>
                   <a:srgbClr val="000000"/>
                 </a:solidFill>
@@ -4650,7 +4650,7 @@
               <a:t>的那一小段時間，光照進來，就像下雨，每個小水桶接光。光愈多，桶子裡接到的電就愈多；曝光結束，晶片把每一桶的電量</a:t>
             </a:r>
             <a:r>
-              <a:rPr sz="1150" b="1" lang="zh-TW" dirty="0">
+              <a:rPr sz="1000" b="1" lang="zh-TW" dirty="0">
                 <a:solidFill>
                   <a:srgbClr val="000000"/>
                 </a:solidFill>
@@ -4661,7 +4661,7 @@
               <a:t>換算成一個數字</a:t>
             </a:r>
             <a:r>
-              <a:rPr sz="1150" lang="zh-TW" dirty="0">
+              <a:rPr sz="1000" lang="zh-TW" dirty="0">
                 <a:solidFill>
                   <a:srgbClr val="000000"/>
                 </a:solidFill>
@@ -4679,11 +4679,11 @@
                 <a:spcPts val="0"/>
               </a:spcBef>
               <a:spcAft>
-                <a:spcPts val="192"/>
+                <a:spcPts val="167"/>
               </a:spcAft>
             </a:pPr>
             <a:r>
-              <a:rPr sz="1150" lang="zh-TW" dirty="0">
+              <a:rPr sz="1000" lang="zh-TW" dirty="0">
                 <a:solidFill>
                   <a:srgbClr val="000000"/>
                 </a:solidFill>
@@ -4694,7 +4694,7 @@
               <a:t>可是請注意，小水桶</a:t>
             </a:r>
             <a:r>
-              <a:rPr sz="1150" b="1" lang="zh-TW" dirty="0">
+              <a:rPr sz="1000" b="1" lang="zh-TW" dirty="0">
                 <a:solidFill>
                   <a:srgbClr val="000000"/>
                 </a:solidFill>
@@ -4705,7 +4705,7 @@
               <a:t>只分得出接到多少光，分不出是什麼顏色</a:t>
             </a:r>
             <a:r>
-              <a:rPr sz="1150" lang="zh-TW" dirty="0">
+              <a:rPr sz="1000" lang="zh-TW" dirty="0">
                 <a:solidFill>
                   <a:srgbClr val="000000"/>
                 </a:solidFill>
@@ -4723,11 +4723,11 @@
                 <a:spcPts val="0"/>
               </a:spcBef>
               <a:spcAft>
-                <a:spcPts val="192"/>
+                <a:spcPts val="167"/>
               </a:spcAft>
             </a:pPr>
             <a:r>
-              <a:rPr sz="1150" lang="zh-TW" dirty="0">
+              <a:rPr sz="1000" lang="zh-TW" dirty="0">
                 <a:solidFill>
                   <a:srgbClr val="000000"/>
                 </a:solidFill>
@@ -4738,7 +4738,7 @@
               <a:t>那顏色怎麼來？在每一個小水桶上面，</a:t>
             </a:r>
             <a:r>
-              <a:rPr sz="1150" b="1" lang="zh-TW" dirty="0">
+              <a:rPr sz="1000" b="1" lang="zh-TW" dirty="0">
                 <a:solidFill>
                   <a:srgbClr val="000000"/>
                 </a:solidFill>
@@ -4749,7 +4749,7 @@
               <a:t>貼一片很小的濾色片</a:t>
             </a:r>
             <a:r>
-              <a:rPr sz="1150" lang="zh-TW" dirty="0">
+              <a:rPr sz="1000" lang="zh-TW" dirty="0">
                 <a:solidFill>
                   <a:srgbClr val="000000"/>
                 </a:solidFill>
@@ -4760,7 +4760,7 @@
               <a:t>：紅的、綠的、藍的，排成固定的花樣，最常見的是兩乘兩一組，一個紅、兩個綠、一個藍。貼了紅色濾色片的那一格，就只量得到紅光有多少。這就是中間那一格：每個像素</a:t>
             </a:r>
             <a:r>
-              <a:rPr sz="1150" b="1" lang="zh-TW" dirty="0">
+              <a:rPr sz="1000" b="1" lang="zh-TW" dirty="0">
                 <a:solidFill>
                   <a:srgbClr val="000000"/>
                 </a:solidFill>
@@ -4771,7 +4771,7 @@
               <a:t>只有一種顏色的數字</a:t>
             </a:r>
             <a:r>
-              <a:rPr sz="1150" lang="zh-TW" dirty="0">
+              <a:rPr sz="1000" lang="zh-TW" dirty="0">
                 <a:solidFill>
                   <a:srgbClr val="000000"/>
                 </a:solidFill>
@@ -4789,41 +4789,85 @@
                 <a:spcPts val="0"/>
               </a:spcBef>
               <a:spcAft>
-                <a:spcPts val="192"/>
+                <a:spcPts val="167"/>
               </a:spcAft>
             </a:pPr>
             <a:r>
-              <a:rPr sz="1150" lang="zh-TW" dirty="0">
-                <a:solidFill>
-                  <a:srgbClr val="000000"/>
-                </a:solidFill>
-                <a:latin typeface="Arial Unicode MS"/>
-                <a:ea typeface="Arial Unicode MS"/>
-                <a:cs typeface="Arial Unicode MS"/>
-              </a:rPr>
-              <a:t>可是一個像素只量到一種顏色，另外兩種怎麼辦？相機的晶片會看旁邊的格子，把缺的兩個顏色</a:t>
-            </a:r>
-            <a:r>
-              <a:rPr sz="1150" b="1" lang="zh-TW" dirty="0">
-                <a:solidFill>
-                  <a:srgbClr val="000000"/>
-                </a:solidFill>
-                <a:latin typeface="Arial Unicode MS"/>
-                <a:ea typeface="Arial Unicode MS"/>
-                <a:cs typeface="Arial Unicode MS"/>
-              </a:rPr>
-              <a:t>估出來補上</a:t>
-            </a:r>
-            <a:r>
-              <a:rPr sz="1150" lang="zh-TW" dirty="0">
-                <a:solidFill>
-                  <a:srgbClr val="000000"/>
-                </a:solidFill>
-                <a:latin typeface="Arial Unicode MS"/>
-                <a:ea typeface="Arial Unicode MS"/>
-                <a:cs typeface="Arial Unicode MS"/>
-              </a:rPr>
-              <a:t>。補完，每個像素都有紅、綠、藍三個數字，就是右邊這一格，也就是上一張那六十四格。
+              <a:rPr sz="1000" lang="zh-TW" dirty="0">
+                <a:solidFill>
+                  <a:srgbClr val="000000"/>
+                </a:solidFill>
+                <a:latin typeface="Arial Unicode MS"/>
+                <a:ea typeface="Arial Unicode MS"/>
+                <a:cs typeface="Arial Unicode MS"/>
+              </a:rPr>
+              <a:t>為什麼綠色要兩個？因為</a:t>
+            </a:r>
+            <a:r>
+              <a:rPr sz="1000" b="1" lang="zh-TW" dirty="0">
+                <a:solidFill>
+                  <a:srgbClr val="000000"/>
+                </a:solidFill>
+                <a:latin typeface="Arial Unicode MS"/>
+                <a:ea typeface="Arial Unicode MS"/>
+                <a:cs typeface="Arial Unicode MS"/>
+              </a:rPr>
+              <a:t>人的眼睛對綠光最敏感</a:t>
+            </a:r>
+            <a:r>
+              <a:rPr sz="1000" lang="zh-TW" dirty="0">
+                <a:solidFill>
+                  <a:srgbClr val="000000"/>
+                </a:solidFill>
+                <a:latin typeface="Arial Unicode MS"/>
+                <a:ea typeface="Arial Unicode MS"/>
+                <a:cs typeface="Arial Unicode MS"/>
+              </a:rPr>
+              <a:t>，我們看到的「亮暗和細節」，大部分來自綠色。把一張彩色照片換成黑白時，常用的算法裡綠色就佔了將近六成（紅 0.30、綠 0.59、藍 0.11），左邊第一格就是這樣算的。所以多放一倍的綠，照片的</a:t>
+            </a:r>
+            <a:r>
+              <a:rPr sz="1000" b="1" lang="zh-TW" dirty="0">
+                <a:solidFill>
+                  <a:srgbClr val="000000"/>
+                </a:solidFill>
+                <a:latin typeface="Arial Unicode MS"/>
+                <a:ea typeface="Arial Unicode MS"/>
+                <a:cs typeface="Arial Unicode MS"/>
+              </a:rPr>
+              <a:t>清晰度</a:t>
+            </a:r>
+            <a:r>
+              <a:rPr sz="1000" lang="zh-TW" dirty="0">
+                <a:solidFill>
+                  <a:srgbClr val="000000"/>
+                </a:solidFill>
+                <a:latin typeface="Arial Unicode MS"/>
+                <a:ea typeface="Arial Unicode MS"/>
+                <a:cs typeface="Arial Unicode MS"/>
+              </a:rPr>
+              <a:t>比較好、雜訊比較少。代價是紅和藍各只佔四分之一，</a:t>
+            </a:r>
+            <a:r>
+              <a:rPr sz="1000" b="1" lang="zh-TW" dirty="0">
+                <a:solidFill>
+                  <a:srgbClr val="000000"/>
+                </a:solidFill>
+                <a:latin typeface="Arial Unicode MS"/>
+                <a:ea typeface="Arial Unicode MS"/>
+                <a:cs typeface="Arial Unicode MS"/>
+              </a:rPr>
+              <a:t>顏色的細節比較粗</a:t>
+            </a:r>
+            <a:r>
+              <a:rPr sz="1000" lang="zh-TW" dirty="0">
+                <a:solidFill>
+                  <a:srgbClr val="000000"/>
+                </a:solidFill>
+                <a:latin typeface="Arial Unicode MS"/>
+                <a:ea typeface="Arial Unicode MS"/>
+                <a:cs typeface="Arial Unicode MS"/>
+              </a:rPr>
+              <a:t>：很細的條紋邊緣可能出現假顏色；遠處很小的紅燈、煞車燈，落在上面的紅色格子比較少。車用相機有時會換成別的排列，例如把綠色換成不加濾色片的「透明格」，晚上收得到更多光，但顏色就分得沒那麼準。
 </a:t>
             </a:r>
           </a:p>
@@ -4833,63 +4877,41 @@
                 <a:spcPts val="0"/>
               </a:spcBef>
               <a:spcAft>
-                <a:spcPts val="192"/>
+                <a:spcPts val="167"/>
               </a:spcAft>
             </a:pPr>
             <a:r>
-              <a:rPr sz="1150" lang="zh-TW" dirty="0">
-                <a:solidFill>
-                  <a:srgbClr val="000000"/>
-                </a:solidFill>
-                <a:latin typeface="Arial Unicode MS"/>
-                <a:ea typeface="Arial Unicode MS"/>
-                <a:cs typeface="Arial Unicode MS"/>
-              </a:rPr>
-              <a:t>最後存成 JPEG 檔的時候，每種顏色用 </a:t>
-            </a:r>
-            <a:r>
-              <a:rPr sz="1150" b="1" lang="zh-TW" dirty="0">
-                <a:solidFill>
-                  <a:srgbClr val="000000"/>
-                </a:solidFill>
-                <a:latin typeface="Arial Unicode MS"/>
-                <a:ea typeface="Arial Unicode MS"/>
-                <a:cs typeface="Arial Unicode MS"/>
-              </a:rPr>
-              <a:t>8 個位元</a:t>
-            </a:r>
-            <a:r>
-              <a:rPr sz="1150" lang="zh-TW" dirty="0">
-                <a:solidFill>
-                  <a:srgbClr val="000000"/>
-                </a:solidFill>
-                <a:latin typeface="Arial Unicode MS"/>
-                <a:ea typeface="Arial Unicode MS"/>
-                <a:cs typeface="Arial Unicode MS"/>
-              </a:rPr>
-              <a:t>來記。8 個位元可以記 2 的 8 次方，256 種，所以數字是 </a:t>
-            </a:r>
-            <a:r>
-              <a:rPr sz="1150" b="1" lang="zh-TW" dirty="0">
-                <a:solidFill>
-                  <a:srgbClr val="000000"/>
-                </a:solidFill>
-                <a:latin typeface="Arial Unicode MS"/>
-                <a:ea typeface="Arial Unicode MS"/>
-                <a:cs typeface="Arial Unicode MS"/>
-              </a:rPr>
-              <a:t>0 到 255</a:t>
-            </a:r>
-            <a:r>
-              <a:rPr sz="1150" lang="zh-TW" dirty="0">
-                <a:solidFill>
-                  <a:srgbClr val="000000"/>
-                </a:solidFill>
-                <a:latin typeface="Arial Unicode MS"/>
-                <a:ea typeface="Arial Unicode MS"/>
-                <a:cs typeface="Arial Unicode MS"/>
-              </a:rPr>
-              <a:t>。
+              <a:rPr sz="1000" lang="zh-TW" dirty="0">
+                <a:solidFill>
+                  <a:srgbClr val="000000"/>
+                </a:solidFill>
+                <a:latin typeface="Arial Unicode MS"/>
+                <a:ea typeface="Arial Unicode MS"/>
+                <a:cs typeface="Arial Unicode MS"/>
+              </a:rPr>
+              <a:t>可是一個像素只量到一種顏色，另外兩種怎麼辦？相機的晶片會看旁邊的格子，把缺的兩個顏色</a:t>
+            </a:r>
+            <a:r>
+              <a:rPr sz="1000" b="1" lang="zh-TW" dirty="0">
+                <a:solidFill>
+                  <a:srgbClr val="000000"/>
+                </a:solidFill>
+                <a:latin typeface="Arial Unicode MS"/>
+                <a:ea typeface="Arial Unicode MS"/>
+                <a:cs typeface="Arial Unicode MS"/>
+              </a:rPr>
+              <a:t>估出來補上</a:t>
+            </a:r>
+            <a:r>
+              <a:rPr sz="1000" lang="zh-TW" dirty="0">
+                <a:solidFill>
+                  <a:srgbClr val="000000"/>
+                </a:solidFill>
+                <a:latin typeface="Arial Unicode MS"/>
+                <a:ea typeface="Arial Unicode MS"/>
+                <a:cs typeface="Arial Unicode MS"/>
+              </a:rPr>
+              <a:t>。補完，每個像素都有紅、綠、藍三個數字，就是右邊這一格，也就是上一張那六十四格。
 </a:t>
             </a:r>
           </a:p>
@@ -4899,63 +4921,63 @@
                 <a:spcPts val="0"/>
               </a:spcBef>
               <a:spcAft>
-                <a:spcPts val="192"/>
+                <a:spcPts val="167"/>
               </a:spcAft>
             </a:pPr>
             <a:r>
-              <a:rPr sz="1150" lang="zh-TW" dirty="0">
-                <a:solidFill>
-                  <a:srgbClr val="000000"/>
-                </a:solidFill>
-                <a:latin typeface="Arial Unicode MS"/>
-                <a:ea typeface="Arial Unicode MS"/>
-                <a:cs typeface="Arial Unicode MS"/>
-              </a:rPr>
-              <a:t>兩件事順便記一下。第一，nuScenes 的相機是</a:t>
-            </a:r>
-            <a:r>
-              <a:rPr sz="1150" b="1" lang="zh-TW" dirty="0">
-                <a:solidFill>
-                  <a:srgbClr val="000000"/>
-                </a:solidFill>
-                <a:latin typeface="Arial Unicode MS"/>
-                <a:ea typeface="Arial Unicode MS"/>
-                <a:cs typeface="Arial Unicode MS"/>
-              </a:rPr>
-              <a:t>自動曝光</a:t>
-            </a:r>
-            <a:r>
-              <a:rPr sz="1150" lang="zh-TW" dirty="0">
-                <a:solidFill>
-                  <a:srgbClr val="000000"/>
-                </a:solidFill>
-                <a:latin typeface="Arial Unicode MS"/>
-                <a:ea typeface="Arial Unicode MS"/>
-                <a:cs typeface="Arial Unicode MS"/>
-              </a:rPr>
-              <a:t>：太暗就讓水桶多接一點時間，太亮就少接一點。所以同一條白線，在不同照片裡數字不一定一樣。第二，桶子有大小，光太強就</a:t>
-            </a:r>
-            <a:r>
-              <a:rPr sz="1150" b="1" lang="zh-TW" dirty="0">
-                <a:solidFill>
-                  <a:srgbClr val="000000"/>
-                </a:solidFill>
-                <a:latin typeface="Arial Unicode MS"/>
-                <a:ea typeface="Arial Unicode MS"/>
-                <a:cs typeface="Arial Unicode MS"/>
-              </a:rPr>
-              <a:t>滿出來</a:t>
-            </a:r>
-            <a:r>
-              <a:rPr sz="1150" lang="zh-TW" dirty="0">
-                <a:solidFill>
-                  <a:srgbClr val="000000"/>
-                </a:solidFill>
-                <a:latin typeface="Arial Unicode MS"/>
-                <a:ea typeface="Arial Unicode MS"/>
-                <a:cs typeface="Arial Unicode MS"/>
-              </a:rPr>
-              <a:t>，數字頂到 255，那一塊就變成一片白，什麼細節都沒有了，這就是過曝。第五週講的「動態範圍」，就是一張照片裡，最亮和最暗能同時量得清楚的範圍。
+              <a:rPr sz="1000" lang="zh-TW" dirty="0">
+                <a:solidFill>
+                  <a:srgbClr val="000000"/>
+                </a:solidFill>
+                <a:latin typeface="Arial Unicode MS"/>
+                <a:ea typeface="Arial Unicode MS"/>
+                <a:cs typeface="Arial Unicode MS"/>
+              </a:rPr>
+              <a:t>最後存成 JPEG 檔的時候，每種顏色用 </a:t>
+            </a:r>
+            <a:r>
+              <a:rPr sz="1000" b="1" lang="zh-TW" dirty="0">
+                <a:solidFill>
+                  <a:srgbClr val="000000"/>
+                </a:solidFill>
+                <a:latin typeface="Arial Unicode MS"/>
+                <a:ea typeface="Arial Unicode MS"/>
+                <a:cs typeface="Arial Unicode MS"/>
+              </a:rPr>
+              <a:t>8 個位元</a:t>
+            </a:r>
+            <a:r>
+              <a:rPr sz="1000" lang="zh-TW" dirty="0">
+                <a:solidFill>
+                  <a:srgbClr val="000000"/>
+                </a:solidFill>
+                <a:latin typeface="Arial Unicode MS"/>
+                <a:ea typeface="Arial Unicode MS"/>
+                <a:cs typeface="Arial Unicode MS"/>
+              </a:rPr>
+              <a:t>來記。8 個位元可以記 2 的 8 次方，256 種，所以數字是 </a:t>
+            </a:r>
+            <a:r>
+              <a:rPr sz="1000" b="1" lang="zh-TW" dirty="0">
+                <a:solidFill>
+                  <a:srgbClr val="000000"/>
+                </a:solidFill>
+                <a:latin typeface="Arial Unicode MS"/>
+                <a:ea typeface="Arial Unicode MS"/>
+                <a:cs typeface="Arial Unicode MS"/>
+              </a:rPr>
+              <a:t>0 到 255</a:t>
+            </a:r>
+            <a:r>
+              <a:rPr sz="1000" lang="zh-TW" dirty="0">
+                <a:solidFill>
+                  <a:srgbClr val="000000"/>
+                </a:solidFill>
+                <a:latin typeface="Arial Unicode MS"/>
+                <a:ea typeface="Arial Unicode MS"/>
+                <a:cs typeface="Arial Unicode MS"/>
+              </a:rPr>
+              <a:t>。
 </a:t>
             </a:r>
           </a:p>
@@ -4965,11 +4987,77 @@
                 <a:spcPts val="0"/>
               </a:spcBef>
               <a:spcAft>
-                <a:spcPts val="192"/>
+                <a:spcPts val="167"/>
               </a:spcAft>
             </a:pPr>
             <a:r>
-              <a:rPr sz="1150" lang="zh-TW" dirty="0">
+              <a:rPr sz="1000" lang="zh-TW" dirty="0">
+                <a:solidFill>
+                  <a:srgbClr val="000000"/>
+                </a:solidFill>
+                <a:latin typeface="Arial Unicode MS"/>
+                <a:ea typeface="Arial Unicode MS"/>
+                <a:cs typeface="Arial Unicode MS"/>
+              </a:rPr>
+              <a:t>兩件事順便記一下。第一，nuScenes 的相機是</a:t>
+            </a:r>
+            <a:r>
+              <a:rPr sz="1000" b="1" lang="zh-TW" dirty="0">
+                <a:solidFill>
+                  <a:srgbClr val="000000"/>
+                </a:solidFill>
+                <a:latin typeface="Arial Unicode MS"/>
+                <a:ea typeface="Arial Unicode MS"/>
+                <a:cs typeface="Arial Unicode MS"/>
+              </a:rPr>
+              <a:t>自動曝光</a:t>
+            </a:r>
+            <a:r>
+              <a:rPr sz="1000" lang="zh-TW" dirty="0">
+                <a:solidFill>
+                  <a:srgbClr val="000000"/>
+                </a:solidFill>
+                <a:latin typeface="Arial Unicode MS"/>
+                <a:ea typeface="Arial Unicode MS"/>
+                <a:cs typeface="Arial Unicode MS"/>
+              </a:rPr>
+              <a:t>：太暗就讓水桶多接一點時間，太亮就少接一點。所以同一條白線，在不同照片裡數字不一定一樣。第二，桶子有大小，光太強就</a:t>
+            </a:r>
+            <a:r>
+              <a:rPr sz="1000" b="1" lang="zh-TW" dirty="0">
+                <a:solidFill>
+                  <a:srgbClr val="000000"/>
+                </a:solidFill>
+                <a:latin typeface="Arial Unicode MS"/>
+                <a:ea typeface="Arial Unicode MS"/>
+                <a:cs typeface="Arial Unicode MS"/>
+              </a:rPr>
+              <a:t>滿出來</a:t>
+            </a:r>
+            <a:r>
+              <a:rPr sz="1000" lang="zh-TW" dirty="0">
+                <a:solidFill>
+                  <a:srgbClr val="000000"/>
+                </a:solidFill>
+                <a:latin typeface="Arial Unicode MS"/>
+                <a:ea typeface="Arial Unicode MS"/>
+                <a:cs typeface="Arial Unicode MS"/>
+              </a:rPr>
+              <a:t>，數字頂到 255，那一塊就變成一片白，什麼細節都沒有了，這就是過曝。第五週講的「動態範圍」，就是一張照片裡，最亮和最暗能同時量得清楚的範圍。
+</a:t>
+            </a:r>
+          </a:p>
+          <a:p>
+            <a:pPr algn="l">
+              <a:spcBef>
+                <a:spcPts val="0"/>
+              </a:spcBef>
+              <a:spcAft>
+                <a:spcPts val="167"/>
+              </a:spcAft>
+            </a:pPr>
+            <a:r>
+              <a:rPr sz="1000" lang="zh-TW" dirty="0">
                 <a:solidFill>
                   <a:srgbClr val="000000"/>
                 </a:solidFill>

--- a/第八週(10-29)/第八週_第1節_簡報.pptx
+++ b/第八週(10-29)/第八週_第1節_簡報.pptx
@@ -1944,11 +1944,11 @@
                 <a:spcPts val="0"/>
               </a:spcBef>
               <a:spcAft>
-                <a:spcPts val="267"/>
+                <a:spcPts val="250"/>
               </a:spcAft>
             </a:pPr>
             <a:r>
-              <a:rPr sz="1600" b="1" lang="zh-TW" dirty="0">
+              <a:rPr sz="1500" b="1" lang="zh-TW" dirty="0">
                 <a:solidFill>
                   <a:srgbClr val="000000"/>
                 </a:solidFill>
@@ -1959,7 +1959,7 @@
               <a:t>這一張的目的：</a:t>
             </a:r>
             <a:r>
-              <a:rPr sz="1600" lang="zh-TW" dirty="0">
+              <a:rPr sz="1500" lang="zh-TW" dirty="0">
                 <a:solidFill>
                   <a:srgbClr val="000000"/>
                 </a:solidFill>
@@ -1977,22 +1977,22 @@
                 <a:spcPts val="0"/>
               </a:spcBef>
               <a:spcAft>
-                <a:spcPts val="267"/>
+                <a:spcPts val="250"/>
               </a:spcAft>
             </a:pPr>
             <a:r>
-              <a:rPr sz="1600" lang="zh-TW" dirty="0">
-                <a:solidFill>
-                  <a:srgbClr val="000000"/>
-                </a:solidFill>
-                <a:latin typeface="Arial Unicode MS"/>
-                <a:ea typeface="Arial Unicode MS"/>
-                <a:cs typeface="Arial Unicode MS"/>
-              </a:rPr>
-              <a:t>把右邊那張放大來看。這種工作叫</a:t>
-            </a:r>
-            <a:r>
-              <a:rPr sz="1600" b="1" lang="zh-TW" dirty="0">
+              <a:rPr sz="1500" lang="zh-TW" dirty="0">
+                <a:solidFill>
+                  <a:srgbClr val="000000"/>
+                </a:solidFill>
+                <a:latin typeface="Arial Unicode MS"/>
+                <a:ea typeface="Arial Unicode MS"/>
+                <a:cs typeface="Arial Unicode MS"/>
+              </a:rPr>
+              <a:t>上一張最後一層之後，再接上偵測的那一層，就得到這張：YOLOX 在斑馬線那張照片上真的跑出來的結果。這種工作叫</a:t>
+            </a:r>
+            <a:r>
+              <a:rPr sz="1500" b="1" lang="zh-TW" dirty="0">
                 <a:solidFill>
                   <a:srgbClr val="000000"/>
                 </a:solidFill>
@@ -2003,7 +2003,7 @@
               <a:t>物件偵測</a:t>
             </a:r>
             <a:r>
-              <a:rPr sz="1600" lang="zh-TW" dirty="0">
+              <a:rPr sz="1500" lang="zh-TW" dirty="0">
                 <a:solidFill>
                   <a:srgbClr val="000000"/>
                 </a:solidFill>
@@ -2021,11 +2021,11 @@
                 <a:spcPts val="0"/>
               </a:spcBef>
               <a:spcAft>
-                <a:spcPts val="267"/>
+                <a:spcPts val="250"/>
               </a:spcAft>
             </a:pPr>
             <a:r>
-              <a:rPr sz="1600" b="1" lang="zh-TW" dirty="0">
+              <a:rPr sz="1500" b="1" lang="zh-TW" dirty="0">
                 <a:solidFill>
                   <a:srgbClr val="000000"/>
                 </a:solidFill>
@@ -2036,7 +2036,7 @@
               <a:t>第一，框。</a:t>
             </a:r>
             <a:r>
-              <a:rPr sz="1600" lang="zh-TW" dirty="0">
+              <a:rPr sz="1500" lang="zh-TW" dirty="0">
                 <a:solidFill>
                   <a:srgbClr val="000000"/>
                 </a:solidFill>
@@ -2047,7 +2047,7 @@
               <a:t>一個長方形，告訴你東西在照片的哪裡。注意，這是照片上的框，只知道在照片的左邊還是右邊、上面還是下面，</a:t>
             </a:r>
             <a:r>
-              <a:rPr sz="1600" b="1" lang="zh-TW" dirty="0">
+              <a:rPr sz="1500" b="1" lang="zh-TW" dirty="0">
                 <a:solidFill>
                   <a:srgbClr val="000000"/>
                 </a:solidFill>
@@ -2058,7 +2058,7 @@
               <a:t>不知道它離車子幾公尺</a:t>
             </a:r>
             <a:r>
-              <a:rPr sz="1600" lang="zh-TW" dirty="0">
+              <a:rPr sz="1500" lang="zh-TW" dirty="0">
                 <a:solidFill>
                   <a:srgbClr val="000000"/>
                 </a:solidFill>
@@ -2076,11 +2076,11 @@
                 <a:spcPts val="0"/>
               </a:spcBef>
               <a:spcAft>
-                <a:spcPts val="267"/>
+                <a:spcPts val="250"/>
               </a:spcAft>
             </a:pPr>
             <a:r>
-              <a:rPr sz="1600" b="1" lang="zh-TW" dirty="0">
+              <a:rPr sz="1500" b="1" lang="zh-TW" dirty="0">
                 <a:solidFill>
                   <a:srgbClr val="000000"/>
                 </a:solidFill>
@@ -2091,7 +2091,7 @@
               <a:t>第二，類別。</a:t>
             </a:r>
             <a:r>
-              <a:rPr sz="1600" lang="zh-TW" dirty="0">
+              <a:rPr sz="1500" lang="zh-TW" dirty="0">
                 <a:solidFill>
                   <a:srgbClr val="000000"/>
                 </a:solidFill>
@@ -2109,11 +2109,11 @@
                 <a:spcPts val="0"/>
               </a:spcBef>
               <a:spcAft>
-                <a:spcPts val="267"/>
+                <a:spcPts val="250"/>
               </a:spcAft>
             </a:pPr>
             <a:r>
-              <a:rPr sz="1600" b="1" lang="zh-TW" dirty="0">
+              <a:rPr sz="1500" b="1" lang="zh-TW" dirty="0">
                 <a:solidFill>
                   <a:srgbClr val="000000"/>
                 </a:solidFill>
@@ -2124,7 +2124,7 @@
               <a:t>第三，分數。</a:t>
             </a:r>
             <a:r>
-              <a:rPr sz="1600" lang="zh-TW" dirty="0">
+              <a:rPr sz="1500" lang="zh-TW" dirty="0">
                 <a:solidFill>
                   <a:srgbClr val="000000"/>
                 </a:solidFill>
@@ -2142,11 +2142,11 @@
                 <a:spcPts val="0"/>
               </a:spcBef>
               <a:spcAft>
-                <a:spcPts val="267"/>
+                <a:spcPts val="250"/>
               </a:spcAft>
             </a:pPr>
             <a:r>
-              <a:rPr sz="1600" lang="zh-TW" dirty="0">
+              <a:rPr sz="1500" lang="zh-TW" dirty="0">
                 <a:solidFill>
                   <a:srgbClr val="000000"/>
                 </a:solidFill>
@@ -2164,11 +2164,11 @@
                 <a:spcPts val="0"/>
               </a:spcBef>
               <a:spcAft>
-                <a:spcPts val="267"/>
+                <a:spcPts val="250"/>
               </a:spcAft>
             </a:pPr>
             <a:r>
-              <a:rPr sz="1600" lang="zh-TW" dirty="0">
+              <a:rPr sz="1500" lang="zh-TW" dirty="0">
                 <a:solidFill>
                   <a:srgbClr val="000000"/>
                 </a:solidFill>
@@ -2179,7 +2179,7 @@
               <a:t>有一個常見的誤會：</a:t>
             </a:r>
             <a:r>
-              <a:rPr sz="1600" b="1" lang="zh-TW" dirty="0">
+              <a:rPr sz="1500" b="1" lang="zh-TW" dirty="0">
                 <a:solidFill>
                   <a:srgbClr val="000000"/>
                 </a:solidFill>
@@ -2190,7 +2190,7 @@
               <a:t>0.91 不等於「百分之九十一一定對」。</a:t>
             </a:r>
             <a:r>
-              <a:rPr sz="1600" lang="zh-TW" dirty="0">
+              <a:rPr sz="1500" lang="zh-TW" dirty="0">
                 <a:solidFill>
                   <a:srgbClr val="000000"/>
                 </a:solidFill>
@@ -2201,7 +2201,7 @@
               <a:t>它比較像考試的時候，答案旁邊自己寫「我有幾分把握」，有人寫九分的也會錯。這個分數真正的用途，是拿來排序、拿來切一刀：低於某個分數的框就不要了。這一刀叫</a:t>
             </a:r>
             <a:r>
-              <a:rPr sz="1600" b="1" lang="zh-TW" dirty="0">
+              <a:rPr sz="1500" b="1" lang="zh-TW" dirty="0">
                 <a:solidFill>
                   <a:srgbClr val="000000"/>
                 </a:solidFill>
@@ -2212,7 +2212,7 @@
               <a:t>門檻</a:t>
             </a:r>
             <a:r>
-              <a:rPr sz="1600" lang="zh-TW" dirty="0">
+              <a:rPr sz="1500" lang="zh-TW" dirty="0">
                 <a:solidFill>
                   <a:srgbClr val="000000"/>
                 </a:solidFill>
@@ -8412,11 +8412,11 @@
                 <a:spcPts val="0"/>
               </a:spcBef>
               <a:spcAft>
-                <a:spcPts val="208"/>
+                <a:spcPts val="200"/>
               </a:spcAft>
             </a:pPr>
             <a:r>
-              <a:rPr sz="1250" b="1" lang="zh-TW" dirty="0">
+              <a:rPr sz="1200" b="1" lang="zh-TW" dirty="0">
                 <a:solidFill>
                   <a:srgbClr val="000000"/>
                 </a:solidFill>
@@ -8427,7 +8427,7 @@
               <a:t>這一張的目的：</a:t>
             </a:r>
             <a:r>
-              <a:rPr sz="1250" lang="zh-TW" dirty="0">
+              <a:rPr sz="1200" lang="zh-TW" dirty="0">
                 <a:solidFill>
                   <a:srgbClr val="000000"/>
                 </a:solidFill>
@@ -8445,11 +8445,11 @@
                 <a:spcPts val="0"/>
               </a:spcBef>
               <a:spcAft>
-                <a:spcPts val="208"/>
+                <a:spcPts val="200"/>
               </a:spcAft>
             </a:pPr>
             <a:r>
-              <a:rPr sz="1250" lang="zh-TW" dirty="0">
+              <a:rPr sz="1200" lang="zh-TW" dirty="0">
                 <a:solidFill>
                   <a:srgbClr val="000000"/>
                 </a:solidFill>
@@ -8460,7 +8460,7 @@
               <a:t>這張表要直著讀，一欄一種做法。但最重要的是先橫著讀</a:t>
             </a:r>
             <a:r>
-              <a:rPr sz="1250" b="1" lang="zh-TW" dirty="0">
+              <a:rPr sz="1200" b="1" lang="zh-TW" dirty="0">
                 <a:solidFill>
                   <a:srgbClr val="000000"/>
                 </a:solidFill>
@@ -8471,7 +8471,7 @@
               <a:t>第一列</a:t>
             </a:r>
             <a:r>
-              <a:rPr sz="1250" lang="zh-TW" dirty="0">
+              <a:rPr sz="1200" lang="zh-TW" dirty="0">
                 <a:solidFill>
                   <a:srgbClr val="000000"/>
                 </a:solidFill>
@@ -8489,11 +8489,11 @@
                 <a:spcPts val="0"/>
               </a:spcBef>
               <a:spcAft>
-                <a:spcPts val="208"/>
+                <a:spcPts val="200"/>
               </a:spcAft>
             </a:pPr>
             <a:r>
-              <a:rPr sz="1250" lang="zh-TW" dirty="0">
+              <a:rPr sz="1200" lang="zh-TW" dirty="0">
                 <a:solidFill>
                   <a:srgbClr val="000000"/>
                 </a:solidFill>
@@ -8504,7 +8504,7 @@
               <a:t>要認出一個東西，其實有兩個問題。第一個問題：</a:t>
             </a:r>
             <a:r>
-              <a:rPr sz="1250" b="1" lang="zh-TW" dirty="0">
+              <a:rPr sz="1200" b="1" lang="zh-TW" dirty="0">
                 <a:solidFill>
                   <a:srgbClr val="000000"/>
                 </a:solidFill>
@@ -8515,7 +8515,7 @@
               <a:t>看什麼</a:t>
             </a:r>
             <a:r>
-              <a:rPr sz="1250" lang="zh-TW" dirty="0">
+              <a:rPr sz="1200" lang="zh-TW" dirty="0">
                 <a:solidFill>
                   <a:srgbClr val="000000"/>
                 </a:solidFill>
@@ -8526,7 +8526,7 @@
               <a:t>？也就是要觀察照片的哪一種性質，專業的說法叫「</a:t>
             </a:r>
             <a:r>
-              <a:rPr sz="1250" b="1" lang="zh-TW" dirty="0">
+              <a:rPr sz="1200" b="1" lang="zh-TW" dirty="0">
                 <a:solidFill>
                   <a:srgbClr val="000000"/>
                 </a:solidFill>
@@ -8537,7 +8537,7 @@
               <a:t>特徵</a:t>
             </a:r>
             <a:r>
-              <a:rPr sz="1250" lang="zh-TW" dirty="0">
+              <a:rPr sz="1200" lang="zh-TW" dirty="0">
                 <a:solidFill>
                   <a:srgbClr val="000000"/>
                 </a:solidFill>
@@ -8548,7 +8548,7 @@
               <a:t>」。例如框是瘦高還是矮寬、顏色偏紅還是偏綠、邊緣是直的還是彎的。第二個問題：</a:t>
             </a:r>
             <a:r>
-              <a:rPr sz="1250" b="1" lang="zh-TW" dirty="0">
+              <a:rPr sz="1200" b="1" lang="zh-TW" dirty="0">
                 <a:solidFill>
                   <a:srgbClr val="000000"/>
                 </a:solidFill>
@@ -8559,7 +8559,7 @@
               <a:t>怎麼判斷</a:t>
             </a:r>
             <a:r>
-              <a:rPr sz="1250" lang="zh-TW" dirty="0">
+              <a:rPr sz="1200" lang="zh-TW" dirty="0">
                 <a:solidFill>
                   <a:srgbClr val="000000"/>
                 </a:solidFill>
@@ -8577,11 +8577,11 @@
                 <a:spcPts val="0"/>
               </a:spcBef>
               <a:spcAft>
-                <a:spcPts val="208"/>
+                <a:spcPts val="200"/>
               </a:spcAft>
             </a:pPr>
             <a:r>
-              <a:rPr sz="1250" b="1" lang="zh-TW" dirty="0">
+              <a:rPr sz="1200" b="1" lang="zh-TW" dirty="0">
                 <a:solidFill>
                   <a:srgbClr val="000000"/>
                 </a:solidFill>
@@ -8592,7 +8592,7 @@
               <a:t>寫規則</a:t>
             </a:r>
             <a:r>
-              <a:rPr sz="1250" lang="zh-TW" dirty="0">
+              <a:rPr sz="1200" lang="zh-TW" dirty="0">
                 <a:solidFill>
                   <a:srgbClr val="000000"/>
                 </a:solidFill>
@@ -8610,11 +8610,11 @@
                 <a:spcPts val="0"/>
               </a:spcBef>
               <a:spcAft>
-                <a:spcPts val="208"/>
+                <a:spcPts val="200"/>
               </a:spcAft>
             </a:pPr>
             <a:r>
-              <a:rPr sz="1250" b="1" lang="zh-TW" dirty="0">
+              <a:rPr sz="1200" b="1" lang="zh-TW" dirty="0">
                 <a:solidFill>
                   <a:srgbClr val="000000"/>
                 </a:solidFill>
@@ -8625,7 +8625,7 @@
               <a:t>傳統的機器學習</a:t>
             </a:r>
             <a:r>
-              <a:rPr sz="1250" lang="zh-TW" dirty="0">
+              <a:rPr sz="1200" lang="zh-TW" dirty="0">
                 <a:solidFill>
                   <a:srgbClr val="000000"/>
                 </a:solidFill>
@@ -8636,7 +8636,7 @@
               <a:t>：第一個問題「看什麼」還是</a:t>
             </a:r>
             <a:r>
-              <a:rPr sz="1250" b="1" lang="zh-TW" dirty="0">
+              <a:rPr sz="1200" b="1" lang="zh-TW" dirty="0">
                 <a:solidFill>
                   <a:srgbClr val="000000"/>
                 </a:solidFill>
@@ -8647,7 +8647,7 @@
               <a:t>人</a:t>
             </a:r>
             <a:r>
-              <a:rPr sz="1250" lang="zh-TW" dirty="0">
+              <a:rPr sz="1200" lang="zh-TW" dirty="0">
                 <a:solidFill>
                   <a:srgbClr val="000000"/>
                 </a:solidFill>
@@ -8658,7 +8658,7 @@
               <a:t>決定，第二個問題「怎麼判斷」交給</a:t>
             </a:r>
             <a:r>
-              <a:rPr sz="1250" b="1" lang="zh-TW" dirty="0">
+              <a:rPr sz="1200" b="1" lang="zh-TW" dirty="0">
                 <a:solidFill>
                   <a:srgbClr val="000000"/>
                 </a:solidFill>
@@ -8669,7 +8669,7 @@
               <a:t>電腦從例子學</a:t>
             </a:r>
             <a:r>
-              <a:rPr sz="1250" lang="zh-TW" dirty="0">
+              <a:rPr sz="1200" lang="zh-TW" dirty="0">
                 <a:solidFill>
                   <a:srgbClr val="000000"/>
                 </a:solidFill>
@@ -8687,11 +8687,11 @@
                 <a:spcPts val="0"/>
               </a:spcBef>
               <a:spcAft>
-                <a:spcPts val="208"/>
+                <a:spcPts val="200"/>
               </a:spcAft>
             </a:pPr>
             <a:r>
-              <a:rPr sz="1250" b="1" lang="zh-TW" dirty="0">
+              <a:rPr sz="1200" b="1" lang="zh-TW" dirty="0">
                 <a:solidFill>
                   <a:srgbClr val="000000"/>
                 </a:solidFill>
@@ -8702,7 +8702,7 @@
               <a:t>深度學習</a:t>
             </a:r>
             <a:r>
-              <a:rPr sz="1250" lang="zh-TW" dirty="0">
+              <a:rPr sz="1200" lang="zh-TW" dirty="0">
                 <a:solidFill>
                   <a:srgbClr val="000000"/>
                 </a:solidFill>
@@ -8713,7 +8713,7 @@
               <a:t>：連第一個問題「看什麼」都</a:t>
             </a:r>
             <a:r>
-              <a:rPr sz="1250" b="1" lang="zh-TW" dirty="0">
+              <a:rPr sz="1200" b="1" lang="zh-TW" dirty="0">
                 <a:solidFill>
                   <a:srgbClr val="000000"/>
                 </a:solidFill>
@@ -8724,18 +8724,40 @@
               <a:t>交給電腦</a:t>
             </a:r>
             <a:r>
-              <a:rPr sz="1250" lang="zh-TW" dirty="0">
-                <a:solidFill>
-                  <a:srgbClr val="000000"/>
-                </a:solidFill>
-                <a:latin typeface="Arial Unicode MS"/>
-                <a:ea typeface="Arial Unicode MS"/>
-                <a:cs typeface="Arial Unicode MS"/>
-              </a:rPr>
-              <a:t>。給它的就是原始的像素，四百多萬個數字，它自己從例子裡學出要看什麼。上一節用的 YOLOX，裡面大約有</a:t>
-            </a:r>
-            <a:r>
-              <a:rPr sz="1250" b="1" lang="zh-TW" dirty="0">
+              <a:rPr sz="1200" lang="zh-TW" dirty="0">
+                <a:solidFill>
+                  <a:srgbClr val="000000"/>
+                </a:solidFill>
+                <a:latin typeface="Arial Unicode MS"/>
+                <a:ea typeface="Arial Unicode MS"/>
+                <a:cs typeface="Arial Unicode MS"/>
+              </a:rPr>
+              <a:t>。給它的就是原始的像素，四百多萬個數字，它自己從例子裡學出要看什麼。這一節後面會一直用到一個深度學習的模型，叫 </a:t>
+            </a:r>
+            <a:r>
+              <a:rPr sz="1200" b="1" lang="zh-TW" dirty="0">
+                <a:solidFill>
+                  <a:srgbClr val="000000"/>
+                </a:solidFill>
+                <a:latin typeface="Arial Unicode MS"/>
+                <a:ea typeface="Arial Unicode MS"/>
+                <a:cs typeface="Arial Unicode MS"/>
+              </a:rPr>
+              <a:t>YOLOX</a:t>
+            </a:r>
+            <a:r>
+              <a:rPr sz="1200" lang="zh-TW" dirty="0">
+                <a:solidFill>
+                  <a:srgbClr val="000000"/>
+                </a:solidFill>
+                <a:latin typeface="Arial Unicode MS"/>
+                <a:ea typeface="Arial Unicode MS"/>
+                <a:cs typeface="Arial Unicode MS"/>
+              </a:rPr>
+              <a:t>。它是專門找物體的模型，2021 年由一家中國的 AI 公司（曠視，Megvii）公開，任何人都可以免費下載使用。我把它下載下來，在上週那份 nuScenes 資料的四百零四張前方照片上全部跑過一次，後面投影片上的框、分數和統計，都是它真的跑出來的。YOLOX 裡面大約有</a:t>
+            </a:r>
+            <a:r>
+              <a:rPr sz="1200" b="1" lang="zh-TW" dirty="0">
                 <a:solidFill>
                   <a:srgbClr val="000000"/>
                 </a:solidFill>
@@ -8746,7 +8768,7 @@
               <a:t>九百萬個數字</a:t>
             </a:r>
             <a:r>
-              <a:rPr sz="1250" lang="zh-TW" dirty="0">
+              <a:rPr sz="1200" lang="zh-TW" dirty="0">
                 <a:solidFill>
                   <a:srgbClr val="000000"/>
                 </a:solidFill>
@@ -8764,11 +8786,11 @@
                 <a:spcPts val="0"/>
               </a:spcBef>
               <a:spcAft>
-                <a:spcPts val="208"/>
+                <a:spcPts val="200"/>
               </a:spcAft>
             </a:pPr>
             <a:r>
-              <a:rPr sz="1250" lang="zh-TW" dirty="0">
+              <a:rPr sz="1200" lang="zh-TW" dirty="0">
                 <a:solidFill>
                   <a:srgbClr val="000000"/>
                 </a:solidFill>
@@ -8779,7 +8801,7 @@
               <a:t>所以三者的差別，一句話：</a:t>
             </a:r>
             <a:r>
-              <a:rPr sz="1250" b="1" lang="zh-TW" dirty="0">
+              <a:rPr sz="1200" b="1" lang="zh-TW" dirty="0">
                 <a:solidFill>
                   <a:srgbClr val="000000"/>
                 </a:solidFill>
@@ -8790,7 +8812,7 @@
               <a:t>寫規則，人決定看什麼也決定怎麼判斷；機器學習，人決定看什麼，電腦學怎麼判斷；深度學習，兩個都是電腦學。</a:t>
             </a:r>
             <a:r>
-              <a:rPr sz="1250" lang="zh-TW" dirty="0">
+              <a:rPr sz="1200" lang="zh-TW" dirty="0">
                 <a:solidFill>
                   <a:srgbClr val="000000"/>
                 </a:solidFill>
@@ -8808,11 +8830,11 @@
                 <a:spcPts val="0"/>
               </a:spcBef>
               <a:spcAft>
-                <a:spcPts val="208"/>
+                <a:spcPts val="200"/>
               </a:spcAft>
             </a:pPr>
             <a:r>
-              <a:rPr sz="1250" lang="zh-TW" dirty="0">
+              <a:rPr sz="1200" lang="zh-TW" dirty="0">
                 <a:solidFill>
                   <a:srgbClr val="000000"/>
                 </a:solidFill>

--- a/第八週(10-29)/第八週_第1節_簡報.pptx
+++ b/第八週(10-29)/第八週_第1節_簡報.pptx
@@ -5,7 +5,7 @@
     <p:sldMasterId id="2147483648" r:id="rId1"/>
   </p:sldMasterIdLst>
   <p:notesMasterIdLst>
-    <p:notesMasterId r:id="rId24"/>
+    <p:notesMasterId r:id="rId25"/>
   </p:notesMasterIdLst>
   <p:sldIdLst>
     <p:sldId id="256" r:id="rId2"/>
@@ -30,6 +30,7 @@
     <p:sldId id="275" r:id="rId21"/>
     <p:sldId id="276" r:id="rId22"/>
     <p:sldId id="277" r:id="rId23"/>
+    <p:sldId id="278" r:id="rId24"/>
   </p:sldIdLst>
   <p:sldSz cx="9144000" cy="5143500"/>
   <p:notesSz cx="7560000" cy="10692000"/>
@@ -878,7 +879,7 @@
                 <a:ea typeface="Arial Unicode MS"/>
                 <a:cs typeface="Arial Unicode MS"/>
               </a:rPr>
-              <a:t>，不是一次改到對。
+              <a:t>，不是一次改到對。為什麼只改一點點？下一張用真的資料示範。
 </a:t>
             </a:r>
           </a:p>
@@ -1086,11 +1087,11 @@
                 <a:spcPts val="0"/>
               </a:spcBef>
               <a:spcAft>
-                <a:spcPts val="233"/>
+                <a:spcPts val="158"/>
               </a:spcAft>
             </a:pPr>
             <a:r>
-              <a:rPr sz="1400" b="1" lang="zh-TW" dirty="0">
+              <a:rPr sz="950" b="1" lang="zh-TW" dirty="0">
                 <a:solidFill>
                   <a:srgbClr val="000000"/>
                 </a:solidFill>
@@ -1101,15 +1102,15 @@
               <a:t>這一張的目的：</a:t>
             </a:r>
             <a:r>
-              <a:rPr sz="1400" lang="zh-TW" dirty="0">
-                <a:solidFill>
-                  <a:srgbClr val="000000"/>
-                </a:solidFill>
-                <a:latin typeface="Arial Unicode MS"/>
-                <a:ea typeface="Arial Unicode MS"/>
-                <a:cs typeface="Arial Unicode MS"/>
-              </a:rPr>
-              <a:t>讓大家親眼看到深度學習「自己學出來的特徵」長什麼樣子：第一層學到的，就是顏色、邊和小點。
+              <a:rPr sz="950" lang="zh-TW" dirty="0">
+                <a:solidFill>
+                  <a:srgbClr val="000000"/>
+                </a:solidFill>
+                <a:latin typeface="Arial Unicode MS"/>
+                <a:ea typeface="Arial Unicode MS"/>
+                <a:cs typeface="Arial Unicode MS"/>
+              </a:rPr>
+              <a:t>讓大家知道為什麼每次只改一點點：電腦算得出往哪邊改比較好，算不出要改多少；改太多會跳過頭，而且會把從別的照片學到的東西弄壞。
 </a:t>
             </a:r>
           </a:p>
@@ -1119,19 +1120,19 @@
                 <a:spcPts val="0"/>
               </a:spcBef>
               <a:spcAft>
-                <a:spcPts val="233"/>
+                <a:spcPts val="158"/>
               </a:spcAft>
             </a:pPr>
             <a:r>
-              <a:rPr sz="1400" lang="zh-TW" dirty="0">
-                <a:solidFill>
-                  <a:srgbClr val="000000"/>
-                </a:solidFill>
-                <a:latin typeface="Arial Unicode MS"/>
-                <a:ea typeface="Arial Unicode MS"/>
-                <a:cs typeface="Arial Unicode MS"/>
-              </a:rPr>
-              <a:t>上一張說，深度學習連「看什麼」都自己學。學出來的東西長什麼樣子？這張是真的。
+              <a:rPr sz="950" lang="zh-TW" dirty="0">
+                <a:solidFill>
+                  <a:srgbClr val="000000"/>
+                </a:solidFill>
+                <a:latin typeface="Arial Unicode MS"/>
+                <a:ea typeface="Arial Unicode MS"/>
+                <a:cs typeface="Arial Unicode MS"/>
+              </a:rPr>
+              <a:t>上一張說「改一點點」，為什麼不一次改到對？有兩個理由。
 </a:t>
             </a:r>
           </a:p>
@@ -1141,41 +1142,30 @@
                 <a:spcPts val="0"/>
               </a:spcBef>
               <a:spcAft>
-                <a:spcPts val="233"/>
+                <a:spcPts val="158"/>
               </a:spcAft>
             </a:pPr>
             <a:r>
-              <a:rPr sz="1400" lang="zh-TW" dirty="0">
-                <a:solidFill>
-                  <a:srgbClr val="000000"/>
-                </a:solidFill>
-                <a:latin typeface="Arial Unicode MS"/>
-                <a:ea typeface="Arial Unicode MS"/>
-                <a:cs typeface="Arial Unicode MS"/>
-              </a:rPr>
-              <a:t>這是 YOLOX 第一層的 </a:t>
-            </a:r>
-            <a:r>
-              <a:rPr sz="1400" b="1" lang="zh-TW" dirty="0">
-                <a:solidFill>
-                  <a:srgbClr val="000000"/>
-                </a:solidFill>
-                <a:latin typeface="Arial Unicode MS"/>
-                <a:ea typeface="Arial Unicode MS"/>
-                <a:cs typeface="Arial Unicode MS"/>
-              </a:rPr>
-              <a:t>32 個小濾鏡</a:t>
-            </a:r>
-            <a:r>
-              <a:rPr sz="1400" lang="zh-TW" dirty="0">
-                <a:solidFill>
-                  <a:srgbClr val="000000"/>
-                </a:solidFill>
-                <a:latin typeface="Arial Unicode MS"/>
-                <a:ea typeface="Arial Unicode MS"/>
-                <a:cs typeface="Arial Unicode MS"/>
-              </a:rPr>
-              <a:t>，每一個都是一組數字，從模型檔案裡直接拿出來，畫成小方塊。每個濾鏡會在照片上一格一格滑過去，每次看一小塊 6×6 個像素，問一個問題：「這一小塊，像不像我？」像，就亮；不像，就暗。
+              <a:rPr sz="950" b="1" lang="zh-TW" dirty="0">
+                <a:solidFill>
+                  <a:srgbClr val="000000"/>
+                </a:solidFill>
+                <a:latin typeface="Arial Unicode MS"/>
+                <a:ea typeface="Arial Unicode MS"/>
+                <a:cs typeface="Arial Unicode MS"/>
+              </a:rPr>
+              <a:t>第一個理由：電腦只知道方向，不知道距離。</a:t>
+            </a:r>
+            <a:r>
+              <a:rPr sz="950" lang="zh-TW" dirty="0">
+                <a:solidFill>
+                  <a:srgbClr val="000000"/>
+                </a:solidFill>
+                <a:latin typeface="Arial Unicode MS"/>
+                <a:ea typeface="Arial Unicode MS"/>
+                <a:cs typeface="Arial Unicode MS"/>
+              </a:rPr>
+              <a:t>
 </a:t>
             </a:r>
           </a:p>
@@ -1185,19 +1175,41 @@
                 <a:spcPts val="0"/>
               </a:spcBef>
               <a:spcAft>
-                <a:spcPts val="233"/>
+                <a:spcPts val="158"/>
               </a:spcAft>
             </a:pPr>
             <a:r>
-              <a:rPr sz="1400" lang="zh-TW" dirty="0">
-                <a:solidFill>
-                  <a:srgbClr val="000000"/>
-                </a:solidFill>
-                <a:latin typeface="Arial Unicode MS"/>
-                <a:ea typeface="Arial Unicode MS"/>
-                <a:cs typeface="Arial Unicode MS"/>
-              </a:rPr>
-              <a:t>看它們長什麼樣子：
+              <a:rPr sz="950" lang="zh-TW" dirty="0">
+                <a:solidFill>
+                  <a:srgbClr val="000000"/>
+                </a:solidFill>
+                <a:latin typeface="Arial Unicode MS"/>
+                <a:ea typeface="Arial Unicode MS"/>
+                <a:cs typeface="Arial Unicode MS"/>
+              </a:rPr>
+              <a:t>想像大霧裡下山，看不到山谷在哪裡，只摸得到</a:t>
+            </a:r>
+            <a:r>
+              <a:rPr sz="950" b="1" lang="zh-TW" dirty="0">
+                <a:solidFill>
+                  <a:srgbClr val="000000"/>
+                </a:solidFill>
+                <a:latin typeface="Arial Unicode MS"/>
+                <a:ea typeface="Arial Unicode MS"/>
+                <a:cs typeface="Arial Unicode MS"/>
+              </a:rPr>
+              <a:t>腳下是往哪邊斜</a:t>
+            </a:r>
+            <a:r>
+              <a:rPr sz="950" lang="zh-TW" dirty="0">
+                <a:solidFill>
+                  <a:srgbClr val="000000"/>
+                </a:solidFill>
+                <a:latin typeface="Arial Unicode MS"/>
+                <a:ea typeface="Arial Unicode MS"/>
+                <a:cs typeface="Arial Unicode MS"/>
+              </a:rPr>
+              <a:t>。最安全的做法是：往下坡的方向走一小步，停下來再摸一次，再走一小步。如果你一看到往下，就往那個方向大跳一百公尺，很可能直接跳過山谷，落在對面的山坡上。
 </a:t>
             </a:r>
           </a:p>
@@ -1207,41 +1219,63 @@
                 <a:spcPts val="0"/>
               </a:spcBef>
               <a:spcAft>
-                <a:spcPts val="233"/>
+                <a:spcPts val="158"/>
               </a:spcAft>
             </a:pPr>
             <a:r>
-              <a:rPr sz="1400" lang="zh-TW" dirty="0">
-                <a:solidFill>
-                  <a:srgbClr val="000000"/>
-                </a:solidFill>
-                <a:latin typeface="Arial Unicode MS"/>
-                <a:ea typeface="Arial Unicode MS"/>
-                <a:cs typeface="Arial Unicode MS"/>
-              </a:rPr>
-              <a:t>有的是</a:t>
-            </a:r>
-            <a:r>
-              <a:rPr sz="1400" b="1" lang="zh-TW" dirty="0">
-                <a:solidFill>
-                  <a:srgbClr val="000000"/>
-                </a:solidFill>
-                <a:latin typeface="Arial Unicode MS"/>
-                <a:ea typeface="Arial Unicode MS"/>
-                <a:cs typeface="Arial Unicode MS"/>
-              </a:rPr>
-              <a:t>一整塊顏色</a:t>
-            </a:r>
-            <a:r>
-              <a:rPr sz="1400" lang="zh-TW" dirty="0">
-                <a:solidFill>
-                  <a:srgbClr val="000000"/>
-                </a:solidFill>
-                <a:latin typeface="Arial Unicode MS"/>
-                <a:ea typeface="Arial Unicode MS"/>
-                <a:cs typeface="Arial Unicode MS"/>
-              </a:rPr>
-              <a:t>：一塊紅、一塊綠、一塊紫。它在問：「這裡是不是這個顏色？」
+              <a:rPr sz="950" lang="zh-TW" dirty="0">
+                <a:solidFill>
+                  <a:srgbClr val="000000"/>
+                </a:solidFill>
+                <a:latin typeface="Arial Unicode MS"/>
+                <a:ea typeface="Arial Unicode MS"/>
+                <a:cs typeface="Arial Unicode MS"/>
+              </a:rPr>
+              <a:t>電腦學東西就是這樣。對完答案，它算得出「門檻往小一點，錯會變少」，這是方向；可是它不知道要往小</a:t>
+            </a:r>
+            <a:r>
+              <a:rPr sz="950" b="1" lang="zh-TW" dirty="0">
+                <a:solidFill>
+                  <a:srgbClr val="000000"/>
+                </a:solidFill>
+                <a:latin typeface="Arial Unicode MS"/>
+                <a:ea typeface="Arial Unicode MS"/>
+                <a:cs typeface="Arial Unicode MS"/>
+              </a:rPr>
+              <a:t>多少</a:t>
+            </a:r>
+            <a:r>
+              <a:rPr sz="950" lang="zh-TW" dirty="0">
+                <a:solidFill>
+                  <a:srgbClr val="000000"/>
+                </a:solidFill>
+                <a:latin typeface="Arial Unicode MS"/>
+                <a:ea typeface="Arial Unicode MS"/>
+                <a:cs typeface="Arial Unicode MS"/>
+              </a:rPr>
+              <a:t>。每次走多大一步，是人事先設定的，這個數字叫</a:t>
+            </a:r>
+            <a:r>
+              <a:rPr sz="950" b="1" lang="zh-TW" dirty="0">
+                <a:solidFill>
+                  <a:srgbClr val="000000"/>
+                </a:solidFill>
+                <a:latin typeface="Arial Unicode MS"/>
+                <a:ea typeface="Arial Unicode MS"/>
+                <a:cs typeface="Arial Unicode MS"/>
+              </a:rPr>
+              <a:t>學習率</a:t>
+            </a:r>
+            <a:r>
+              <a:rPr sz="950" lang="zh-TW" dirty="0">
+                <a:solidFill>
+                  <a:srgbClr val="000000"/>
+                </a:solidFill>
+                <a:latin typeface="Arial Unicode MS"/>
+                <a:ea typeface="Arial Unicode MS"/>
+                <a:cs typeface="Arial Unicode MS"/>
+              </a:rPr>
+              <a:t>。
 </a:t>
             </a:r>
           </a:p>
@@ -1251,85 +1285,19 @@
                 <a:spcPts val="0"/>
               </a:spcBef>
               <a:spcAft>
-                <a:spcPts val="233"/>
+                <a:spcPts val="158"/>
               </a:spcAft>
             </a:pPr>
             <a:r>
-              <a:rPr sz="1400" lang="zh-TW" dirty="0">
-                <a:solidFill>
-                  <a:srgbClr val="000000"/>
-                </a:solidFill>
-                <a:latin typeface="Arial Unicode MS"/>
-                <a:ea typeface="Arial Unicode MS"/>
-                <a:cs typeface="Arial Unicode MS"/>
-              </a:rPr>
-              <a:t>有的是</a:t>
-            </a:r>
-            <a:r>
-              <a:rPr sz="1400" b="1" lang="zh-TW" dirty="0">
-                <a:solidFill>
-                  <a:srgbClr val="000000"/>
-                </a:solidFill>
-                <a:latin typeface="Arial Unicode MS"/>
-                <a:ea typeface="Arial Unicode MS"/>
-                <a:cs typeface="Arial Unicode MS"/>
-              </a:rPr>
-              <a:t>上半亮、下半暗</a:t>
-            </a:r>
-            <a:r>
-              <a:rPr sz="1400" lang="zh-TW" dirty="0">
-                <a:solidFill>
-                  <a:srgbClr val="000000"/>
-                </a:solidFill>
-                <a:latin typeface="Arial Unicode MS"/>
-                <a:ea typeface="Arial Unicode MS"/>
-                <a:cs typeface="Arial Unicode MS"/>
-              </a:rPr>
-              <a:t>，或</a:t>
-            </a:r>
-            <a:r>
-              <a:rPr sz="1400" b="1" lang="zh-TW" dirty="0">
-                <a:solidFill>
-                  <a:srgbClr val="000000"/>
-                </a:solidFill>
-                <a:latin typeface="Arial Unicode MS"/>
-                <a:ea typeface="Arial Unicode MS"/>
-                <a:cs typeface="Arial Unicode MS"/>
-              </a:rPr>
-              <a:t>左亮右暗</a:t>
-            </a:r>
-            <a:r>
-              <a:rPr sz="1400" lang="zh-TW" dirty="0">
-                <a:solidFill>
-                  <a:srgbClr val="000000"/>
-                </a:solidFill>
-                <a:latin typeface="Arial Unicode MS"/>
-                <a:ea typeface="Arial Unicode MS"/>
-                <a:cs typeface="Arial Unicode MS"/>
-              </a:rPr>
-              <a:t>：它在找</a:t>
-            </a:r>
-            <a:r>
-              <a:rPr sz="1400" b="1" lang="zh-TW" dirty="0">
-                <a:solidFill>
-                  <a:srgbClr val="000000"/>
-                </a:solidFill>
-                <a:latin typeface="Arial Unicode MS"/>
-                <a:ea typeface="Arial Unicode MS"/>
-                <a:cs typeface="Arial Unicode MS"/>
-              </a:rPr>
-              <a:t>邊</a:t>
-            </a:r>
-            <a:r>
-              <a:rPr sz="1400" lang="zh-TW" dirty="0">
-                <a:solidFill>
-                  <a:srgbClr val="000000"/>
-                </a:solidFill>
-                <a:latin typeface="Arial Unicode MS"/>
-                <a:ea typeface="Arial Unicode MS"/>
-                <a:cs typeface="Arial Unicode MS"/>
-              </a:rPr>
-              <a:t>，橫的邊、直的邊。
+              <a:rPr sz="950" lang="zh-TW" dirty="0">
+                <a:solidFill>
+                  <a:srgbClr val="000000"/>
+                </a:solidFill>
+                <a:latin typeface="Arial Unicode MS"/>
+                <a:ea typeface="Arial Unicode MS"/>
+                <a:cs typeface="Arial Unicode MS"/>
+              </a:rPr>
+              <a:t>看這張圖，是真的。我拿第 9 張那 627 個例子，讓電腦用這種「摸斜坡、走一步」的方式學門檻，從 2.6 出發，試三種步伐。橫軸是第幾次修改，縱軸是門檻。淺綠色那一條帶，是分得對的範圍：汽車最高到 1.02，大人最低 1.25，門檻放在中間就全部分對。
 </a:t>
             </a:r>
           </a:p>
@@ -1339,41 +1307,30 @@
                 <a:spcPts val="0"/>
               </a:spcBef>
               <a:spcAft>
-                <a:spcPts val="233"/>
+                <a:spcPts val="158"/>
               </a:spcAft>
             </a:pPr>
             <a:r>
-              <a:rPr sz="1400" lang="zh-TW" dirty="0">
-                <a:solidFill>
-                  <a:srgbClr val="000000"/>
-                </a:solidFill>
-                <a:latin typeface="Arial Unicode MS"/>
-                <a:ea typeface="Arial Unicode MS"/>
-                <a:cs typeface="Arial Unicode MS"/>
-              </a:rPr>
-              <a:t>有的是</a:t>
-            </a:r>
-            <a:r>
-              <a:rPr sz="1400" b="1" lang="zh-TW" dirty="0">
-                <a:solidFill>
-                  <a:srgbClr val="000000"/>
-                </a:solidFill>
-                <a:latin typeface="Arial Unicode MS"/>
-                <a:ea typeface="Arial Unicode MS"/>
-                <a:cs typeface="Arial Unicode MS"/>
-              </a:rPr>
-              <a:t>中間一個小點</a:t>
-            </a:r>
-            <a:r>
-              <a:rPr sz="1400" lang="zh-TW" dirty="0">
-                <a:solidFill>
-                  <a:srgbClr val="000000"/>
-                </a:solidFill>
-                <a:latin typeface="Arial Unicode MS"/>
-                <a:ea typeface="Arial Unicode MS"/>
-                <a:cs typeface="Arial Unicode MS"/>
-              </a:rPr>
-              <a:t>：它在找很小的亮點或暗點。
+              <a:rPr sz="950" b="1" lang="zh-TW" dirty="0">
+                <a:solidFill>
+                  <a:srgbClr val="000000"/>
+                </a:solidFill>
+                <a:latin typeface="Arial Unicode MS"/>
+                <a:ea typeface="Arial Unicode MS"/>
+                <a:cs typeface="Arial Unicode MS"/>
+              </a:rPr>
+              <a:t>綠線，步伐剛好</a:t>
+            </a:r>
+            <a:r>
+              <a:rPr sz="950" lang="zh-TW" dirty="0">
+                <a:solidFill>
+                  <a:srgbClr val="000000"/>
+                </a:solidFill>
+                <a:latin typeface="Arial Unicode MS"/>
+                <a:ea typeface="Arial Unicode MS"/>
+                <a:cs typeface="Arial Unicode MS"/>
+              </a:rPr>
+              <a:t>：改第一次就到 1.38，第三次就走進淺綠帶，之後停在 1.17，全部分對。
 </a:t>
             </a:r>
           </a:p>
@@ -1383,41 +1340,30 @@
                 <a:spcPts val="0"/>
               </a:spcBef>
               <a:spcAft>
-                <a:spcPts val="233"/>
+                <a:spcPts val="158"/>
               </a:spcAft>
             </a:pPr>
             <a:r>
-              <a:rPr sz="1400" lang="zh-TW" dirty="0">
-                <a:solidFill>
-                  <a:srgbClr val="000000"/>
-                </a:solidFill>
-                <a:latin typeface="Arial Unicode MS"/>
-                <a:ea typeface="Arial Unicode MS"/>
-                <a:cs typeface="Arial Unicode MS"/>
-              </a:rPr>
-              <a:t>重點是：</a:t>
-            </a:r>
-            <a:r>
-              <a:rPr sz="1400" b="1" lang="zh-TW" dirty="0">
-                <a:solidFill>
-                  <a:srgbClr val="000000"/>
-                </a:solidFill>
-                <a:latin typeface="Arial Unicode MS"/>
-                <a:ea typeface="Arial Unicode MS"/>
-                <a:cs typeface="Arial Unicode MS"/>
-              </a:rPr>
-              <a:t>這 32 個濾鏡沒有一個是人畫的。</a:t>
-            </a:r>
-            <a:r>
-              <a:rPr sz="1400" lang="zh-TW" dirty="0">
-                <a:solidFill>
-                  <a:srgbClr val="000000"/>
-                </a:solidFill>
-                <a:latin typeface="Arial Unicode MS"/>
-                <a:ea typeface="Arial Unicode MS"/>
-                <a:cs typeface="Arial Unicode MS"/>
-              </a:rPr>
-              <a:t>一開始全部是亂數，在「猜、對答案、改一點點」的過程中，慢慢被調成這個樣子。電腦自己發現：要認車、認人，先找顏色、找邊，是有用的。
+              <a:rPr sz="950" b="1" lang="zh-TW" dirty="0">
+                <a:solidFill>
+                  <a:srgbClr val="000000"/>
+                </a:solidFill>
+                <a:latin typeface="Arial Unicode MS"/>
+                <a:ea typeface="Arial Unicode MS"/>
+                <a:cs typeface="Arial Unicode MS"/>
+              </a:rPr>
+              <a:t>灰線，步伐太小</a:t>
+            </a:r>
+            <a:r>
+              <a:rPr sz="950" lang="zh-TW" dirty="0">
+                <a:solidFill>
+                  <a:srgbClr val="000000"/>
+                </a:solidFill>
+                <a:latin typeface="Arial Unicode MS"/>
+                <a:ea typeface="Arial Unicode MS"/>
+                <a:cs typeface="Arial Unicode MS"/>
+              </a:rPr>
+              <a:t>：方向是對的，可是走得很慢，改了 30 次才到 1.32，還差一點才進淺綠帶。
 </a:t>
             </a:r>
           </a:p>
@@ -1427,19 +1373,151 @@
                 <a:spcPts val="0"/>
               </a:spcBef>
               <a:spcAft>
-                <a:spcPts val="233"/>
+                <a:spcPts val="158"/>
               </a:spcAft>
             </a:pPr>
             <a:r>
-              <a:rPr sz="1400" lang="zh-TW" dirty="0">
-                <a:solidFill>
-                  <a:srgbClr val="000000"/>
-                </a:solidFill>
-                <a:latin typeface="Arial Unicode MS"/>
-                <a:ea typeface="Arial Unicode MS"/>
-                <a:cs typeface="Arial Unicode MS"/>
-              </a:rPr>
-              <a:t>這跟傳統機器學習剛好相反：傳統的做法，是人先想好「看邊的方向」，再把它寫成程式；深度學習是給它像素，它自己長出這些。</a:t>
+              <a:rPr sz="950" b="1" lang="zh-TW" dirty="0">
+                <a:solidFill>
+                  <a:srgbClr val="000000"/>
+                </a:solidFill>
+                <a:latin typeface="Arial Unicode MS"/>
+                <a:ea typeface="Arial Unicode MS"/>
+                <a:cs typeface="Arial Unicode MS"/>
+              </a:rPr>
+              <a:t>紅線，步伐太大</a:t>
+            </a:r>
+            <a:r>
+              <a:rPr sz="950" lang="zh-TW" dirty="0">
+                <a:solidFill>
+                  <a:srgbClr val="000000"/>
+                </a:solidFill>
+                <a:latin typeface="Arial Unicode MS"/>
+                <a:ea typeface="Arial Unicode MS"/>
+                <a:cs typeface="Arial Unicode MS"/>
+              </a:rPr>
+              <a:t>：第一次就從 2.6 跳到負 2.5，跳過頭了；下一次又跳回 2，再跳到負 1……一直在兩邊亂跳，改了 30 次只分對一半。
+</a:t>
+            </a:r>
+          </a:p>
+          <a:p>
+            <a:pPr algn="l">
+              <a:spcBef>
+                <a:spcPts val="0"/>
+              </a:spcBef>
+              <a:spcAft>
+                <a:spcPts val="158"/>
+              </a:spcAft>
+            </a:pPr>
+            <a:r>
+              <a:rPr sz="950" lang="zh-TW" dirty="0">
+                <a:solidFill>
+                  <a:srgbClr val="000000"/>
+                </a:solidFill>
+                <a:latin typeface="Arial Unicode MS"/>
+                <a:ea typeface="Arial Unicode MS"/>
+                <a:cs typeface="Arial Unicode MS"/>
+              </a:rPr>
+              <a:t>就像洗澡調水溫：太冷，水龍頭一下轉到底，變太燙；再一下轉回去，又太冷。慢慢轉一點點，等一下，再轉一點點，才調得到剛好。
+</a:t>
+            </a:r>
+          </a:p>
+          <a:p>
+            <a:pPr algn="l">
+              <a:spcBef>
+                <a:spcPts val="0"/>
+              </a:spcBef>
+              <a:spcAft>
+                <a:spcPts val="158"/>
+              </a:spcAft>
+            </a:pPr>
+            <a:r>
+              <a:rPr sz="950" lang="zh-TW" dirty="0">
+                <a:solidFill>
+                  <a:srgbClr val="000000"/>
+                </a:solidFill>
+                <a:latin typeface="Arial Unicode MS"/>
+                <a:ea typeface="Arial Unicode MS"/>
+                <a:cs typeface="Arial Unicode MS"/>
+              </a:rPr>
+              <a:t>（注意：這裡學出來是 1.17，第 9 張是 1.03。兩個都在淺綠帶裡，都能全部分對；用的方法不一樣，停的位置就不一樣。）
+</a:t>
+            </a:r>
+          </a:p>
+          <a:p>
+            <a:pPr algn="l">
+              <a:spcBef>
+                <a:spcPts val="0"/>
+              </a:spcBef>
+              <a:spcAft>
+                <a:spcPts val="158"/>
+              </a:spcAft>
+            </a:pPr>
+            <a:r>
+              <a:rPr sz="950" b="1" lang="zh-TW" dirty="0">
+                <a:solidFill>
+                  <a:srgbClr val="000000"/>
+                </a:solidFill>
+                <a:latin typeface="Arial Unicode MS"/>
+                <a:ea typeface="Arial Unicode MS"/>
+                <a:cs typeface="Arial Unicode MS"/>
+              </a:rPr>
+              <a:t>第二個理由：每次只看到一部分照片。</a:t>
+            </a:r>
+            <a:r>
+              <a:rPr sz="950" lang="zh-TW" dirty="0">
+                <a:solidFill>
+                  <a:srgbClr val="000000"/>
+                </a:solidFill>
+                <a:latin typeface="Arial Unicode MS"/>
+                <a:ea typeface="Arial Unicode MS"/>
+                <a:cs typeface="Arial Unicode MS"/>
+              </a:rPr>
+              <a:t>
+</a:t>
+            </a:r>
+          </a:p>
+          <a:p>
+            <a:pPr algn="l">
+              <a:spcBef>
+                <a:spcPts val="0"/>
+              </a:spcBef>
+              <a:spcAft>
+                <a:spcPts val="158"/>
+              </a:spcAft>
+            </a:pPr>
+            <a:r>
+              <a:rPr sz="950" lang="zh-TW" dirty="0">
+                <a:solidFill>
+                  <a:srgbClr val="000000"/>
+                </a:solidFill>
+                <a:latin typeface="Arial Unicode MS"/>
+                <a:ea typeface="Arial Unicode MS"/>
+                <a:cs typeface="Arial Unicode MS"/>
+              </a:rPr>
+              <a:t>真的訓練深度學習，照片有好幾萬張，電腦沒辦法每改一次就看完全部，通常一次只看幾張到幾十張。如果每看幾張就大改，模型會變成「只記得剛剛那幾張」，前面從其他照片學到的就被蓋掉了。就像準備考試，不能因為剛剛那一題錯了，就把整本筆記改掉；每一題錯了，筆記只修一點點，寫夠多題，筆記才會對所有題目都好用。
+</a:t>
+            </a:r>
+          </a:p>
+          <a:p>
+            <a:pPr algn="l">
+              <a:spcBef>
+                <a:spcPts val="0"/>
+              </a:spcBef>
+              <a:spcAft>
+                <a:spcPts val="158"/>
+              </a:spcAft>
+            </a:pPr>
+            <a:r>
+              <a:rPr sz="950" lang="zh-TW" dirty="0">
+                <a:solidFill>
+                  <a:srgbClr val="000000"/>
+                </a:solidFill>
+                <a:latin typeface="Arial Unicode MS"/>
+                <a:ea typeface="Arial Unicode MS"/>
+                <a:cs typeface="Arial Unicode MS"/>
+              </a:rPr>
+              <a:t>YOLOX 有九百萬個小旋鈕，每個都要這樣一點一點調，所以訓練要跑很多輪、要很強的電腦。第十週訓練模型的時候，各位會親眼看到學習率這個設定。</a:t>
             </a:r>
           </a:p>
         </p:txBody>
@@ -1571,7 +1649,7 @@
                 <a:ea typeface="Arial Unicode MS"/>
                 <a:cs typeface="Arial Unicode MS"/>
               </a:rPr>
-              <a:t>讓大家看到模型真的是一層一層組起來的：前面看邊，後面看到整個人。
+              <a:t>讓大家親眼看到深度學習「自己學出來的特徵」長什麼樣子：第一層學到的，就是顏色、邊和小點。
 </a:t>
             </a:r>
           </a:p>
@@ -1593,29 +1671,7 @@
                 <a:ea typeface="Arial Unicode MS"/>
                 <a:cs typeface="Arial Unicode MS"/>
               </a:rPr>
-              <a:t>上一張是第一層的「濾鏡」本身，這一張是把斑馬線那張照片送進去，</a:t>
-            </a:r>
-            <a:r>
-              <a:rPr sz="1400" b="1" lang="zh-TW" dirty="0">
-                <a:solidFill>
-                  <a:srgbClr val="000000"/>
-                </a:solidFill>
-                <a:latin typeface="Arial Unicode MS"/>
-                <a:ea typeface="Arial Unicode MS"/>
-                <a:cs typeface="Arial Unicode MS"/>
-              </a:rPr>
-              <a:t>每一層真的算出來的結果</a:t>
-            </a:r>
-            <a:r>
-              <a:rPr sz="1400" lang="zh-TW" dirty="0">
-                <a:solidFill>
-                  <a:srgbClr val="000000"/>
-                </a:solidFill>
-                <a:latin typeface="Arial Unicode MS"/>
-                <a:ea typeface="Arial Unicode MS"/>
-                <a:cs typeface="Arial Unicode MS"/>
-              </a:rPr>
-              <a:t>。亮的地方，就是那一層「有反應」的地方。
+              <a:t>上一張說，深度學習連「看什麼」都自己學。學出來的東西長什麼樣子？這張是真的。
 </a:t>
             </a:r>
           </a:p>
@@ -1629,6 +1685,17 @@
               </a:spcAft>
             </a:pPr>
             <a:r>
+              <a:rPr sz="1400" lang="zh-TW" dirty="0">
+                <a:solidFill>
+                  <a:srgbClr val="000000"/>
+                </a:solidFill>
+                <a:latin typeface="Arial Unicode MS"/>
+                <a:ea typeface="Arial Unicode MS"/>
+                <a:cs typeface="Arial Unicode MS"/>
+              </a:rPr>
+              <a:t>這是 YOLOX 第一層的 </a:t>
+            </a:r>
+            <a:r>
               <a:rPr sz="1400" b="1" lang="zh-TW" dirty="0">
                 <a:solidFill>
                   <a:srgbClr val="000000"/>
@@ -1637,7 +1704,7 @@
                 <a:ea typeface="Arial Unicode MS"/>
                 <a:cs typeface="Arial Unicode MS"/>
               </a:rPr>
-              <a:t>最左邊</a:t>
+              <a:t>32 個小濾鏡</a:t>
             </a:r>
             <a:r>
               <a:rPr sz="1400" lang="zh-TW" dirty="0">
@@ -1648,7 +1715,7 @@
                 <a:ea typeface="Arial Unicode MS"/>
                 <a:cs typeface="Arial Unicode MS"/>
               </a:rPr>
-              <a:t>是原本的照片。
+              <a:t>，每一個都是一組數字，從模型檔案裡直接拿出來，畫成小方塊。每個濾鏡會在照片上一格一格滑過去，每次看一小塊 6×6 個像素，問一個問題：「這一小塊，像不像我？」像，就亮；不像，就暗。
 </a:t>
             </a:r>
           </a:p>
@@ -1662,17 +1729,6 @@
               </a:spcAft>
             </a:pPr>
             <a:r>
-              <a:rPr sz="1400" b="1" lang="zh-TW" dirty="0">
-                <a:solidFill>
-                  <a:srgbClr val="000000"/>
-                </a:solidFill>
-                <a:latin typeface="Arial Unicode MS"/>
-                <a:ea typeface="Arial Unicode MS"/>
-                <a:cs typeface="Arial Unicode MS"/>
-              </a:rPr>
-              <a:t>第 1 層</a:t>
-            </a:r>
-            <a:r>
               <a:rPr sz="1400" lang="zh-TW" dirty="0">
                 <a:solidFill>
                   <a:srgbClr val="000000"/>
@@ -1681,7 +1737,7 @@
                 <a:ea typeface="Arial Unicode MS"/>
                 <a:cs typeface="Arial Unicode MS"/>
               </a:rPr>
-              <a:t>：整張照片變成線條。斑馬線、人行道的邊、建築物的輪廓，都亮起來。這就是上一張那些「找邊」的濾鏡算出來的。
+              <a:t>看它們長什麼樣子：
 </a:t>
             </a:r>
           </a:p>
@@ -1695,6 +1751,17 @@
               </a:spcAft>
             </a:pPr>
             <a:r>
+              <a:rPr sz="1400" lang="zh-TW" dirty="0">
+                <a:solidFill>
+                  <a:srgbClr val="000000"/>
+                </a:solidFill>
+                <a:latin typeface="Arial Unicode MS"/>
+                <a:ea typeface="Arial Unicode MS"/>
+                <a:cs typeface="Arial Unicode MS"/>
+              </a:rPr>
+              <a:t>有的是</a:t>
+            </a:r>
+            <a:r>
               <a:rPr sz="1400" b="1" lang="zh-TW" dirty="0">
                 <a:solidFill>
                   <a:srgbClr val="000000"/>
@@ -1703,7 +1770,7 @@
                 <a:ea typeface="Arial Unicode MS"/>
                 <a:cs typeface="Arial Unicode MS"/>
               </a:rPr>
-              <a:t>第 2 段</a:t>
+              <a:t>一整塊顏色</a:t>
             </a:r>
             <a:r>
               <a:rPr sz="1400" lang="zh-TW" dirty="0">
@@ -1714,7 +1781,7 @@
                 <a:ea typeface="Arial Unicode MS"/>
                 <a:cs typeface="Arial Unicode MS"/>
               </a:rPr>
-              <a:t>：再往後幾層，看到的東西更細、更雜，像紋理、小零件：牆上的格子、人身上衣服的紋路。
+              <a:t>：一塊紅、一塊綠、一塊紫。它在問：「這裡是不是這個顏色？」
 </a:t>
             </a:r>
           </a:p>
@@ -1728,6 +1795,17 @@
               </a:spcAft>
             </a:pPr>
             <a:r>
+              <a:rPr sz="1400" lang="zh-TW" dirty="0">
+                <a:solidFill>
+                  <a:srgbClr val="000000"/>
+                </a:solidFill>
+                <a:latin typeface="Arial Unicode MS"/>
+                <a:ea typeface="Arial Unicode MS"/>
+                <a:cs typeface="Arial Unicode MS"/>
+              </a:rPr>
+              <a:t>有的是</a:t>
+            </a:r>
+            <a:r>
               <a:rPr sz="1400" b="1" lang="zh-TW" dirty="0">
                 <a:solidFill>
                   <a:srgbClr val="000000"/>
@@ -1736,7 +1814,7 @@
                 <a:ea typeface="Arial Unicode MS"/>
                 <a:cs typeface="Arial Unicode MS"/>
               </a:rPr>
-              <a:t>後段</a:t>
+              <a:t>上半亮、下半暗</a:t>
             </a:r>
             <a:r>
               <a:rPr sz="1400" lang="zh-TW" dirty="0">
@@ -1747,7 +1825,7 @@
                 <a:ea typeface="Arial Unicode MS"/>
                 <a:cs typeface="Arial Unicode MS"/>
               </a:rPr>
-              <a:t>：再往後，畫面變得很粗，一格代表照片上的一大塊。可是請看，</a:t>
+              <a:t>，或</a:t>
             </a:r>
             <a:r>
               <a:rPr sz="1400" b="1" lang="zh-TW" dirty="0">
@@ -1758,7 +1836,7 @@
                 <a:ea typeface="Arial Unicode MS"/>
                 <a:cs typeface="Arial Unicode MS"/>
               </a:rPr>
-              <a:t>五個行人的位置整個亮起來</a:t>
+              <a:t>左亮右暗</a:t>
             </a:r>
             <a:r>
               <a:rPr sz="1400" lang="zh-TW" dirty="0">
@@ -1769,7 +1847,29 @@
                 <a:ea typeface="Arial Unicode MS"/>
                 <a:cs typeface="Arial Unicode MS"/>
               </a:rPr>
-              <a:t>，其他地方幾乎全暗。這一層已經不在看邊了，它在看「這裡像不像一個人」。
+              <a:t>：它在找</a:t>
+            </a:r>
+            <a:r>
+              <a:rPr sz="1400" b="1" lang="zh-TW" dirty="0">
+                <a:solidFill>
+                  <a:srgbClr val="000000"/>
+                </a:solidFill>
+                <a:latin typeface="Arial Unicode MS"/>
+                <a:ea typeface="Arial Unicode MS"/>
+                <a:cs typeface="Arial Unicode MS"/>
+              </a:rPr>
+              <a:t>邊</a:t>
+            </a:r>
+            <a:r>
+              <a:rPr sz="1400" lang="zh-TW" dirty="0">
+                <a:solidFill>
+                  <a:srgbClr val="000000"/>
+                </a:solidFill>
+                <a:latin typeface="Arial Unicode MS"/>
+                <a:ea typeface="Arial Unicode MS"/>
+                <a:cs typeface="Arial Unicode MS"/>
+              </a:rPr>
+              <a:t>，橫的邊、直的邊。
 </a:t>
             </a:r>
           </a:p>
@@ -1791,7 +1891,7 @@
                 <a:ea typeface="Arial Unicode MS"/>
                 <a:cs typeface="Arial Unicode MS"/>
               </a:rPr>
-              <a:t>所以「一層一層」不是比喻，是真的：</a:t>
+              <a:t>有的是</a:t>
             </a:r>
             <a:r>
               <a:rPr sz="1400" b="1" lang="zh-TW" dirty="0">
@@ -1802,7 +1902,7 @@
                 <a:ea typeface="Arial Unicode MS"/>
                 <a:cs typeface="Arial Unicode MS"/>
               </a:rPr>
-              <a:t>前面的層看簡單的東西，後面的層把前面的結果組起來，看愈來愈完整的東西。</a:t>
+              <a:t>中間一個小點</a:t>
             </a:r>
             <a:r>
               <a:rPr sz="1400" lang="zh-TW" dirty="0">
@@ -1813,7 +1913,7 @@
                 <a:ea typeface="Arial Unicode MS"/>
                 <a:cs typeface="Arial Unicode MS"/>
               </a:rPr>
-              <a:t>最後再接上偵測的那一層，就變成下一張的框、類別和分數。
+              <a:t>：它在找很小的亮點或暗點。
 </a:t>
             </a:r>
           </a:p>
@@ -1835,7 +1935,51 @@
                 <a:ea typeface="Arial Unicode MS"/>
                 <a:cs typeface="Arial Unicode MS"/>
               </a:rPr>
-              <a:t>要說明一下怎麼挑的：每一層有幾十到一百多個通道，每個通道各看一種東西，不可能全部放上來。第 1 層我挑變化最大的一個；後面兩個，我挑「在行人身上比背景亮最多」的那一個，所以後段那張是刻意挑出來看人的通道，其他通道有的看車、有的看路。</a:t>
+              <a:t>重點是：</a:t>
+            </a:r>
+            <a:r>
+              <a:rPr sz="1400" b="1" lang="zh-TW" dirty="0">
+                <a:solidFill>
+                  <a:srgbClr val="000000"/>
+                </a:solidFill>
+                <a:latin typeface="Arial Unicode MS"/>
+                <a:ea typeface="Arial Unicode MS"/>
+                <a:cs typeface="Arial Unicode MS"/>
+              </a:rPr>
+              <a:t>這 32 個濾鏡沒有一個是人畫的。</a:t>
+            </a:r>
+            <a:r>
+              <a:rPr sz="1400" lang="zh-TW" dirty="0">
+                <a:solidFill>
+                  <a:srgbClr val="000000"/>
+                </a:solidFill>
+                <a:latin typeface="Arial Unicode MS"/>
+                <a:ea typeface="Arial Unicode MS"/>
+                <a:cs typeface="Arial Unicode MS"/>
+              </a:rPr>
+              <a:t>一開始全部是亂數，在「猜、對答案、改一點點」的過程中，慢慢被調成這個樣子。電腦自己發現：要認車、認人，先找顏色、找邊，是有用的。
+</a:t>
+            </a:r>
+          </a:p>
+          <a:p>
+            <a:pPr algn="l">
+              <a:spcBef>
+                <a:spcPts val="0"/>
+              </a:spcBef>
+              <a:spcAft>
+                <a:spcPts val="233"/>
+              </a:spcAft>
+            </a:pPr>
+            <a:r>
+              <a:rPr sz="1400" lang="zh-TW" dirty="0">
+                <a:solidFill>
+                  <a:srgbClr val="000000"/>
+                </a:solidFill>
+                <a:latin typeface="Arial Unicode MS"/>
+                <a:ea typeface="Arial Unicode MS"/>
+                <a:cs typeface="Arial Unicode MS"/>
+              </a:rPr>
+              <a:t>這跟傳統機器學習剛好相反：傳統的做法，是人先想好「看邊的方向」，再把它寫成程式；深度學習是給它像素，它自己長出這些。</a:t>
             </a:r>
           </a:p>
         </p:txBody>
@@ -1944,11 +2088,11 @@
                 <a:spcPts val="0"/>
               </a:spcBef>
               <a:spcAft>
-                <a:spcPts val="250"/>
+                <a:spcPts val="233"/>
               </a:spcAft>
             </a:pPr>
             <a:r>
-              <a:rPr sz="1500" b="1" lang="zh-TW" dirty="0">
+              <a:rPr sz="1400" b="1" lang="zh-TW" dirty="0">
                 <a:solidFill>
                   <a:srgbClr val="000000"/>
                 </a:solidFill>
@@ -1959,15 +2103,15 @@
               <a:t>這一張的目的：</a:t>
             </a:r>
             <a:r>
-              <a:rPr sz="1500" lang="zh-TW" dirty="0">
-                <a:solidFill>
-                  <a:srgbClr val="000000"/>
-                </a:solidFill>
-                <a:latin typeface="Arial Unicode MS"/>
-                <a:ea typeface="Arial Unicode MS"/>
-                <a:cs typeface="Arial Unicode MS"/>
-              </a:rPr>
-              <a:t>讓大家會讀物件偵測的輸出：每個框有三樣東西，框、類別、分數。
+              <a:rPr sz="1400" lang="zh-TW" dirty="0">
+                <a:solidFill>
+                  <a:srgbClr val="000000"/>
+                </a:solidFill>
+                <a:latin typeface="Arial Unicode MS"/>
+                <a:ea typeface="Arial Unicode MS"/>
+                <a:cs typeface="Arial Unicode MS"/>
+              </a:rPr>
+              <a:t>讓大家看到模型真的是一層一層組起來的：前面看邊，後面看到整個人。
 </a:t>
             </a:r>
           </a:p>
@@ -1977,41 +2121,41 @@
                 <a:spcPts val="0"/>
               </a:spcBef>
               <a:spcAft>
-                <a:spcPts val="250"/>
+                <a:spcPts val="233"/>
               </a:spcAft>
             </a:pPr>
             <a:r>
-              <a:rPr sz="1500" lang="zh-TW" dirty="0">
-                <a:solidFill>
-                  <a:srgbClr val="000000"/>
-                </a:solidFill>
-                <a:latin typeface="Arial Unicode MS"/>
-                <a:ea typeface="Arial Unicode MS"/>
-                <a:cs typeface="Arial Unicode MS"/>
-              </a:rPr>
-              <a:t>上一張最後一層之後，再接上偵測的那一層，就得到這張：YOLOX 在斑馬線那張照片上真的跑出來的結果。這種工作叫</a:t>
-            </a:r>
-            <a:r>
-              <a:rPr sz="1500" b="1" lang="zh-TW" dirty="0">
-                <a:solidFill>
-                  <a:srgbClr val="000000"/>
-                </a:solidFill>
-                <a:latin typeface="Arial Unicode MS"/>
-                <a:ea typeface="Arial Unicode MS"/>
-                <a:cs typeface="Arial Unicode MS"/>
-              </a:rPr>
-              <a:t>物件偵測</a:t>
-            </a:r>
-            <a:r>
-              <a:rPr sz="1500" lang="zh-TW" dirty="0">
-                <a:solidFill>
-                  <a:srgbClr val="000000"/>
-                </a:solidFill>
-                <a:latin typeface="Arial Unicode MS"/>
-                <a:ea typeface="Arial Unicode MS"/>
-                <a:cs typeface="Arial Unicode MS"/>
-              </a:rPr>
-              <a:t>，它對每一個找到的東西，給三樣資訊。
+              <a:rPr sz="1400" lang="zh-TW" dirty="0">
+                <a:solidFill>
+                  <a:srgbClr val="000000"/>
+                </a:solidFill>
+                <a:latin typeface="Arial Unicode MS"/>
+                <a:ea typeface="Arial Unicode MS"/>
+                <a:cs typeface="Arial Unicode MS"/>
+              </a:rPr>
+              <a:t>上一張是第一層的「濾鏡」本身，這一張是把斑馬線那張照片送進去，</a:t>
+            </a:r>
+            <a:r>
+              <a:rPr sz="1400" b="1" lang="zh-TW" dirty="0">
+                <a:solidFill>
+                  <a:srgbClr val="000000"/>
+                </a:solidFill>
+                <a:latin typeface="Arial Unicode MS"/>
+                <a:ea typeface="Arial Unicode MS"/>
+                <a:cs typeface="Arial Unicode MS"/>
+              </a:rPr>
+              <a:t>每一層真的算出來的結果</a:t>
+            </a:r>
+            <a:r>
+              <a:rPr sz="1400" lang="zh-TW" dirty="0">
+                <a:solidFill>
+                  <a:srgbClr val="000000"/>
+                </a:solidFill>
+                <a:latin typeface="Arial Unicode MS"/>
+                <a:ea typeface="Arial Unicode MS"/>
+                <a:cs typeface="Arial Unicode MS"/>
+              </a:rPr>
+              <a:t>。亮的地方，就是那一層「有反應」的地方。
 </a:t>
             </a:r>
           </a:p>
@@ -2021,52 +2165,30 @@
                 <a:spcPts val="0"/>
               </a:spcBef>
               <a:spcAft>
-                <a:spcPts val="250"/>
+                <a:spcPts val="233"/>
               </a:spcAft>
             </a:pPr>
             <a:r>
-              <a:rPr sz="1500" b="1" lang="zh-TW" dirty="0">
-                <a:solidFill>
-                  <a:srgbClr val="000000"/>
-                </a:solidFill>
-                <a:latin typeface="Arial Unicode MS"/>
-                <a:ea typeface="Arial Unicode MS"/>
-                <a:cs typeface="Arial Unicode MS"/>
-              </a:rPr>
-              <a:t>第一，框。</a:t>
-            </a:r>
-            <a:r>
-              <a:rPr sz="1500" lang="zh-TW" dirty="0">
-                <a:solidFill>
-                  <a:srgbClr val="000000"/>
-                </a:solidFill>
-                <a:latin typeface="Arial Unicode MS"/>
-                <a:ea typeface="Arial Unicode MS"/>
-                <a:cs typeface="Arial Unicode MS"/>
-              </a:rPr>
-              <a:t>一個長方形，告訴你東西在照片的哪裡。注意，這是照片上的框，只知道在照片的左邊還是右邊、上面還是下面，</a:t>
-            </a:r>
-            <a:r>
-              <a:rPr sz="1500" b="1" lang="zh-TW" dirty="0">
-                <a:solidFill>
-                  <a:srgbClr val="000000"/>
-                </a:solidFill>
-                <a:latin typeface="Arial Unicode MS"/>
-                <a:ea typeface="Arial Unicode MS"/>
-                <a:cs typeface="Arial Unicode MS"/>
-              </a:rPr>
-              <a:t>不知道它離車子幾公尺</a:t>
-            </a:r>
-            <a:r>
-              <a:rPr sz="1500" lang="zh-TW" dirty="0">
-                <a:solidFill>
-                  <a:srgbClr val="000000"/>
-                </a:solidFill>
-                <a:latin typeface="Arial Unicode MS"/>
-                <a:ea typeface="Arial Unicode MS"/>
-                <a:cs typeface="Arial Unicode MS"/>
-              </a:rPr>
-              <a:t>。這一點等一下會再回來。
+              <a:rPr sz="1400" b="1" lang="zh-TW" dirty="0">
+                <a:solidFill>
+                  <a:srgbClr val="000000"/>
+                </a:solidFill>
+                <a:latin typeface="Arial Unicode MS"/>
+                <a:ea typeface="Arial Unicode MS"/>
+                <a:cs typeface="Arial Unicode MS"/>
+              </a:rPr>
+              <a:t>最左邊</a:t>
+            </a:r>
+            <a:r>
+              <a:rPr sz="1400" lang="zh-TW" dirty="0">
+                <a:solidFill>
+                  <a:srgbClr val="000000"/>
+                </a:solidFill>
+                <a:latin typeface="Arial Unicode MS"/>
+                <a:ea typeface="Arial Unicode MS"/>
+                <a:cs typeface="Arial Unicode MS"/>
+              </a:rPr>
+              <a:t>是原本的照片。
 </a:t>
             </a:r>
           </a:p>
@@ -2076,30 +2198,30 @@
                 <a:spcPts val="0"/>
               </a:spcBef>
               <a:spcAft>
-                <a:spcPts val="250"/>
+                <a:spcPts val="233"/>
               </a:spcAft>
             </a:pPr>
             <a:r>
-              <a:rPr sz="1500" b="1" lang="zh-TW" dirty="0">
-                <a:solidFill>
-                  <a:srgbClr val="000000"/>
-                </a:solidFill>
-                <a:latin typeface="Arial Unicode MS"/>
-                <a:ea typeface="Arial Unicode MS"/>
-                <a:cs typeface="Arial Unicode MS"/>
-              </a:rPr>
-              <a:t>第二，類別。</a:t>
-            </a:r>
-            <a:r>
-              <a:rPr sz="1500" lang="zh-TW" dirty="0">
-                <a:solidFill>
-                  <a:srgbClr val="000000"/>
-                </a:solidFill>
-                <a:latin typeface="Arial Unicode MS"/>
-                <a:ea typeface="Arial Unicode MS"/>
-                <a:cs typeface="Arial Unicode MS"/>
-              </a:rPr>
-              <a:t>是人、是車、是卡車。
+              <a:rPr sz="1400" b="1" lang="zh-TW" dirty="0">
+                <a:solidFill>
+                  <a:srgbClr val="000000"/>
+                </a:solidFill>
+                <a:latin typeface="Arial Unicode MS"/>
+                <a:ea typeface="Arial Unicode MS"/>
+                <a:cs typeface="Arial Unicode MS"/>
+              </a:rPr>
+              <a:t>第 1 層</a:t>
+            </a:r>
+            <a:r>
+              <a:rPr sz="1400" lang="zh-TW" dirty="0">
+                <a:solidFill>
+                  <a:srgbClr val="000000"/>
+                </a:solidFill>
+                <a:latin typeface="Arial Unicode MS"/>
+                <a:ea typeface="Arial Unicode MS"/>
+                <a:cs typeface="Arial Unicode MS"/>
+              </a:rPr>
+              <a:t>：整張照片變成線條。斑馬線、人行道的邊、建築物的輪廓，都亮起來。這就是上一張那些「找邊」的濾鏡算出來的。
 </a:t>
             </a:r>
           </a:p>
@@ -2109,30 +2231,30 @@
                 <a:spcPts val="0"/>
               </a:spcBef>
               <a:spcAft>
-                <a:spcPts val="250"/>
+                <a:spcPts val="233"/>
               </a:spcAft>
             </a:pPr>
             <a:r>
-              <a:rPr sz="1500" b="1" lang="zh-TW" dirty="0">
-                <a:solidFill>
-                  <a:srgbClr val="000000"/>
-                </a:solidFill>
-                <a:latin typeface="Arial Unicode MS"/>
-                <a:ea typeface="Arial Unicode MS"/>
-                <a:cs typeface="Arial Unicode MS"/>
-              </a:rPr>
-              <a:t>第三，分數。</a:t>
-            </a:r>
-            <a:r>
-              <a:rPr sz="1500" lang="zh-TW" dirty="0">
-                <a:solidFill>
-                  <a:srgbClr val="000000"/>
-                </a:solidFill>
-                <a:latin typeface="Arial Unicode MS"/>
-                <a:ea typeface="Arial Unicode MS"/>
-                <a:cs typeface="Arial Unicode MS"/>
-              </a:rPr>
-              <a:t>零到一之間。「人 0.91」，意思是模型對「這裡有一個人」很有把握。
+              <a:rPr sz="1400" b="1" lang="zh-TW" dirty="0">
+                <a:solidFill>
+                  <a:srgbClr val="000000"/>
+                </a:solidFill>
+                <a:latin typeface="Arial Unicode MS"/>
+                <a:ea typeface="Arial Unicode MS"/>
+                <a:cs typeface="Arial Unicode MS"/>
+              </a:rPr>
+              <a:t>第 2 段</a:t>
+            </a:r>
+            <a:r>
+              <a:rPr sz="1400" lang="zh-TW" dirty="0">
+                <a:solidFill>
+                  <a:srgbClr val="000000"/>
+                </a:solidFill>
+                <a:latin typeface="Arial Unicode MS"/>
+                <a:ea typeface="Arial Unicode MS"/>
+                <a:cs typeface="Arial Unicode MS"/>
+              </a:rPr>
+              <a:t>：再往後幾層，看到的東西更細、更雜，像紋理、小零件：牆上的格子、人身上衣服的紋路。
 </a:t>
             </a:r>
           </a:p>
@@ -2142,19 +2264,52 @@
                 <a:spcPts val="0"/>
               </a:spcBef>
               <a:spcAft>
-                <a:spcPts val="250"/>
+                <a:spcPts val="233"/>
               </a:spcAft>
             </a:pPr>
             <a:r>
-              <a:rPr sz="1500" lang="zh-TW" dirty="0">
-                <a:solidFill>
-                  <a:srgbClr val="000000"/>
-                </a:solidFill>
-                <a:latin typeface="Arial Unicode MS"/>
-                <a:ea typeface="Arial Unicode MS"/>
-                <a:cs typeface="Arial Unicode MS"/>
-              </a:rPr>
-              <a:t>看遠處那台「卡車 0.52」，它其實是一台公車，官方標註寫的是公車。類別錯了，分數也比較低。模型沒把握的時候，分數就低。
+              <a:rPr sz="1400" b="1" lang="zh-TW" dirty="0">
+                <a:solidFill>
+                  <a:srgbClr val="000000"/>
+                </a:solidFill>
+                <a:latin typeface="Arial Unicode MS"/>
+                <a:ea typeface="Arial Unicode MS"/>
+                <a:cs typeface="Arial Unicode MS"/>
+              </a:rPr>
+              <a:t>後段</a:t>
+            </a:r>
+            <a:r>
+              <a:rPr sz="1400" lang="zh-TW" dirty="0">
+                <a:solidFill>
+                  <a:srgbClr val="000000"/>
+                </a:solidFill>
+                <a:latin typeface="Arial Unicode MS"/>
+                <a:ea typeface="Arial Unicode MS"/>
+                <a:cs typeface="Arial Unicode MS"/>
+              </a:rPr>
+              <a:t>：再往後，畫面變得很粗，一格代表照片上的一大塊。可是請看，</a:t>
+            </a:r>
+            <a:r>
+              <a:rPr sz="1400" b="1" lang="zh-TW" dirty="0">
+                <a:solidFill>
+                  <a:srgbClr val="000000"/>
+                </a:solidFill>
+                <a:latin typeface="Arial Unicode MS"/>
+                <a:ea typeface="Arial Unicode MS"/>
+                <a:cs typeface="Arial Unicode MS"/>
+              </a:rPr>
+              <a:t>五個行人的位置整個亮起來</a:t>
+            </a:r>
+            <a:r>
+              <a:rPr sz="1400" lang="zh-TW" dirty="0">
+                <a:solidFill>
+                  <a:srgbClr val="000000"/>
+                </a:solidFill>
+                <a:latin typeface="Arial Unicode MS"/>
+                <a:ea typeface="Arial Unicode MS"/>
+                <a:cs typeface="Arial Unicode MS"/>
+              </a:rPr>
+              <a:t>，其他地方幾乎全暗。這一層已經不在看邊了，它在看「這裡像不像一個人」。
 </a:t>
             </a:r>
           </a:p>
@@ -2164,63 +2319,63 @@
                 <a:spcPts val="0"/>
               </a:spcBef>
               <a:spcAft>
-                <a:spcPts val="250"/>
+                <a:spcPts val="233"/>
               </a:spcAft>
             </a:pPr>
             <a:r>
-              <a:rPr sz="1500" lang="zh-TW" dirty="0">
-                <a:solidFill>
-                  <a:srgbClr val="000000"/>
-                </a:solidFill>
-                <a:latin typeface="Arial Unicode MS"/>
-                <a:ea typeface="Arial Unicode MS"/>
-                <a:cs typeface="Arial Unicode MS"/>
-              </a:rPr>
-              <a:t>有一個常見的誤會：</a:t>
-            </a:r>
-            <a:r>
-              <a:rPr sz="1500" b="1" lang="zh-TW" dirty="0">
-                <a:solidFill>
-                  <a:srgbClr val="000000"/>
-                </a:solidFill>
-                <a:latin typeface="Arial Unicode MS"/>
-                <a:ea typeface="Arial Unicode MS"/>
-                <a:cs typeface="Arial Unicode MS"/>
-              </a:rPr>
-              <a:t>0.91 不等於「百分之九十一一定對」。</a:t>
-            </a:r>
-            <a:r>
-              <a:rPr sz="1500" lang="zh-TW" dirty="0">
-                <a:solidFill>
-                  <a:srgbClr val="000000"/>
-                </a:solidFill>
-                <a:latin typeface="Arial Unicode MS"/>
-                <a:ea typeface="Arial Unicode MS"/>
-                <a:cs typeface="Arial Unicode MS"/>
-              </a:rPr>
-              <a:t>它比較像考試的時候，答案旁邊自己寫「我有幾分把握」，有人寫九分的也會錯。這個分數真正的用途，是拿來排序、拿來切一刀：低於某個分數的框就不要了。這一刀叫</a:t>
-            </a:r>
-            <a:r>
-              <a:rPr sz="1500" b="1" lang="zh-TW" dirty="0">
-                <a:solidFill>
-                  <a:srgbClr val="000000"/>
-                </a:solidFill>
-                <a:latin typeface="Arial Unicode MS"/>
-                <a:ea typeface="Arial Unicode MS"/>
-                <a:cs typeface="Arial Unicode MS"/>
-              </a:rPr>
-              <a:t>門檻</a:t>
-            </a:r>
-            <a:r>
-              <a:rPr sz="1500" lang="zh-TW" dirty="0">
-                <a:solidFill>
-                  <a:srgbClr val="000000"/>
-                </a:solidFill>
-                <a:latin typeface="Arial Unicode MS"/>
-                <a:ea typeface="Arial Unicode MS"/>
-                <a:cs typeface="Arial Unicode MS"/>
-              </a:rPr>
-              <a:t>，下下張會看到，門檻切在哪裡，影響非常大。</a:t>
+              <a:rPr sz="1400" lang="zh-TW" dirty="0">
+                <a:solidFill>
+                  <a:srgbClr val="000000"/>
+                </a:solidFill>
+                <a:latin typeface="Arial Unicode MS"/>
+                <a:ea typeface="Arial Unicode MS"/>
+                <a:cs typeface="Arial Unicode MS"/>
+              </a:rPr>
+              <a:t>所以「一層一層」不是比喻，是真的：</a:t>
+            </a:r>
+            <a:r>
+              <a:rPr sz="1400" b="1" lang="zh-TW" dirty="0">
+                <a:solidFill>
+                  <a:srgbClr val="000000"/>
+                </a:solidFill>
+                <a:latin typeface="Arial Unicode MS"/>
+                <a:ea typeface="Arial Unicode MS"/>
+                <a:cs typeface="Arial Unicode MS"/>
+              </a:rPr>
+              <a:t>前面的層看簡單的東西，後面的層把前面的結果組起來，看愈來愈完整的東西。</a:t>
+            </a:r>
+            <a:r>
+              <a:rPr sz="1400" lang="zh-TW" dirty="0">
+                <a:solidFill>
+                  <a:srgbClr val="000000"/>
+                </a:solidFill>
+                <a:latin typeface="Arial Unicode MS"/>
+                <a:ea typeface="Arial Unicode MS"/>
+                <a:cs typeface="Arial Unicode MS"/>
+              </a:rPr>
+              <a:t>最後再接上偵測的那一層，就變成下一張的框、類別和分數。
+</a:t>
+            </a:r>
+          </a:p>
+          <a:p>
+            <a:pPr algn="l">
+              <a:spcBef>
+                <a:spcPts val="0"/>
+              </a:spcBef>
+              <a:spcAft>
+                <a:spcPts val="233"/>
+              </a:spcAft>
+            </a:pPr>
+            <a:r>
+              <a:rPr sz="1400" lang="zh-TW" dirty="0">
+                <a:solidFill>
+                  <a:srgbClr val="000000"/>
+                </a:solidFill>
+                <a:latin typeface="Arial Unicode MS"/>
+                <a:ea typeface="Arial Unicode MS"/>
+                <a:cs typeface="Arial Unicode MS"/>
+              </a:rPr>
+              <a:t>要說明一下怎麼挑的：每一層有幾十到一百多個通道，每個通道各看一種東西，不可能全部放上來。第 1 層我挑變化最大的一個；後面兩個，我挑「在行人身上比背景亮最多」的那一個，所以後段那張是刻意挑出來看人的通道，其他通道有的看車、有的看路。</a:t>
             </a:r>
           </a:p>
         </p:txBody>
@@ -2329,11 +2484,11 @@
                 <a:spcPts val="0"/>
               </a:spcBef>
               <a:spcAft>
-                <a:spcPts val="267"/>
+                <a:spcPts val="250"/>
               </a:spcAft>
             </a:pPr>
             <a:r>
-              <a:rPr sz="1600" b="1" lang="zh-TW" dirty="0">
+              <a:rPr sz="1500" b="1" lang="zh-TW" dirty="0">
                 <a:solidFill>
                   <a:srgbClr val="000000"/>
                 </a:solidFill>
@@ -2344,15 +2499,15 @@
               <a:t>這一張的目的：</a:t>
             </a:r>
             <a:r>
-              <a:rPr sz="1600" lang="zh-TW" dirty="0">
-                <a:solidFill>
-                  <a:srgbClr val="000000"/>
-                </a:solidFill>
-                <a:latin typeface="Arial Unicode MS"/>
-                <a:ea typeface="Arial Unicode MS"/>
-                <a:cs typeface="Arial Unicode MS"/>
-              </a:rPr>
-              <a:t>讓大家分得清三種常見的視覺工作：分類、偵測、分割，各自回答什麼問題。
+              <a:rPr sz="1500" lang="zh-TW" dirty="0">
+                <a:solidFill>
+                  <a:srgbClr val="000000"/>
+                </a:solidFill>
+                <a:latin typeface="Arial Unicode MS"/>
+                <a:ea typeface="Arial Unicode MS"/>
+                <a:cs typeface="Arial Unicode MS"/>
+              </a:rPr>
+              <a:t>讓大家會讀物件偵測的輸出：每個框有三樣東西，框、類別、分數。
 </a:t>
             </a:r>
           </a:p>
@@ -2362,19 +2517,41 @@
                 <a:spcPts val="0"/>
               </a:spcBef>
               <a:spcAft>
-                <a:spcPts val="267"/>
+                <a:spcPts val="250"/>
               </a:spcAft>
             </a:pPr>
             <a:r>
-              <a:rPr sz="1600" lang="zh-TW" dirty="0">
-                <a:solidFill>
-                  <a:srgbClr val="000000"/>
-                </a:solidFill>
-                <a:latin typeface="Arial Unicode MS"/>
-                <a:ea typeface="Arial Unicode MS"/>
-                <a:cs typeface="Arial Unicode MS"/>
-              </a:rPr>
-              <a:t>剛剛那種「框出來」的工作叫偵測。其實電腦看照片，常見的有三種工作，差在問的問題不一樣。
+              <a:rPr sz="1500" lang="zh-TW" dirty="0">
+                <a:solidFill>
+                  <a:srgbClr val="000000"/>
+                </a:solidFill>
+                <a:latin typeface="Arial Unicode MS"/>
+                <a:ea typeface="Arial Unicode MS"/>
+                <a:cs typeface="Arial Unicode MS"/>
+              </a:rPr>
+              <a:t>上一張最後一層之後，再接上偵測的那一層，就得到這張：YOLOX 在斑馬線那張照片上真的跑出來的結果。這種工作叫</a:t>
+            </a:r>
+            <a:r>
+              <a:rPr sz="1500" b="1" lang="zh-TW" dirty="0">
+                <a:solidFill>
+                  <a:srgbClr val="000000"/>
+                </a:solidFill>
+                <a:latin typeface="Arial Unicode MS"/>
+                <a:ea typeface="Arial Unicode MS"/>
+                <a:cs typeface="Arial Unicode MS"/>
+              </a:rPr>
+              <a:t>物件偵測</a:t>
+            </a:r>
+            <a:r>
+              <a:rPr sz="1500" lang="zh-TW" dirty="0">
+                <a:solidFill>
+                  <a:srgbClr val="000000"/>
+                </a:solidFill>
+                <a:latin typeface="Arial Unicode MS"/>
+                <a:ea typeface="Arial Unicode MS"/>
+                <a:cs typeface="Arial Unicode MS"/>
+              </a:rPr>
+              <a:t>，它對每一個找到的東西，給三樣資訊。
 </a:t>
             </a:r>
           </a:p>
@@ -2384,52 +2561,52 @@
                 <a:spcPts val="0"/>
               </a:spcBef>
               <a:spcAft>
-                <a:spcPts val="267"/>
+                <a:spcPts val="250"/>
               </a:spcAft>
             </a:pPr>
             <a:r>
-              <a:rPr sz="1600" b="1" lang="zh-TW" dirty="0">
-                <a:solidFill>
-                  <a:srgbClr val="000000"/>
-                </a:solidFill>
-                <a:latin typeface="Arial Unicode MS"/>
-                <a:ea typeface="Arial Unicode MS"/>
-                <a:cs typeface="Arial Unicode MS"/>
-              </a:rPr>
-              <a:t>分類</a:t>
-            </a:r>
-            <a:r>
-              <a:rPr sz="1600" lang="zh-TW" dirty="0">
-                <a:solidFill>
-                  <a:srgbClr val="000000"/>
-                </a:solidFill>
-                <a:latin typeface="Arial Unicode MS"/>
-                <a:ea typeface="Arial Unicode MS"/>
-                <a:cs typeface="Arial Unicode MS"/>
-              </a:rPr>
-              <a:t>：問「這張照片裡</a:t>
-            </a:r>
-            <a:r>
-              <a:rPr sz="1600" b="1" lang="zh-TW" dirty="0">
-                <a:solidFill>
-                  <a:srgbClr val="000000"/>
-                </a:solidFill>
-                <a:latin typeface="Arial Unicode MS"/>
-                <a:ea typeface="Arial Unicode MS"/>
-                <a:cs typeface="Arial Unicode MS"/>
-              </a:rPr>
-              <a:t>有沒有</a:t>
-            </a:r>
-            <a:r>
-              <a:rPr sz="1600" lang="zh-TW" dirty="0">
-                <a:solidFill>
-                  <a:srgbClr val="000000"/>
-                </a:solidFill>
-                <a:latin typeface="Arial Unicode MS"/>
-                <a:ea typeface="Arial Unicode MS"/>
-                <a:cs typeface="Arial Unicode MS"/>
-              </a:rPr>
-              <a:t>人？」整張照片只給一個答案。車上可以用它判斷：現在是不是在下雨、是白天還是晚上。
+              <a:rPr sz="1500" b="1" lang="zh-TW" dirty="0">
+                <a:solidFill>
+                  <a:srgbClr val="000000"/>
+                </a:solidFill>
+                <a:latin typeface="Arial Unicode MS"/>
+                <a:ea typeface="Arial Unicode MS"/>
+                <a:cs typeface="Arial Unicode MS"/>
+              </a:rPr>
+              <a:t>第一，框。</a:t>
+            </a:r>
+            <a:r>
+              <a:rPr sz="1500" lang="zh-TW" dirty="0">
+                <a:solidFill>
+                  <a:srgbClr val="000000"/>
+                </a:solidFill>
+                <a:latin typeface="Arial Unicode MS"/>
+                <a:ea typeface="Arial Unicode MS"/>
+                <a:cs typeface="Arial Unicode MS"/>
+              </a:rPr>
+              <a:t>一個長方形，告訴你東西在照片的哪裡。注意，這是照片上的框，只知道在照片的左邊還是右邊、上面還是下面，</a:t>
+            </a:r>
+            <a:r>
+              <a:rPr sz="1500" b="1" lang="zh-TW" dirty="0">
+                <a:solidFill>
+                  <a:srgbClr val="000000"/>
+                </a:solidFill>
+                <a:latin typeface="Arial Unicode MS"/>
+                <a:ea typeface="Arial Unicode MS"/>
+                <a:cs typeface="Arial Unicode MS"/>
+              </a:rPr>
+              <a:t>不知道它離車子幾公尺</a:t>
+            </a:r>
+            <a:r>
+              <a:rPr sz="1500" lang="zh-TW" dirty="0">
+                <a:solidFill>
+                  <a:srgbClr val="000000"/>
+                </a:solidFill>
+                <a:latin typeface="Arial Unicode MS"/>
+                <a:ea typeface="Arial Unicode MS"/>
+                <a:cs typeface="Arial Unicode MS"/>
+              </a:rPr>
+              <a:t>。這一點等一下會再回來。
 </a:t>
             </a:r>
           </a:p>
@@ -2439,52 +2616,30 @@
                 <a:spcPts val="0"/>
               </a:spcBef>
               <a:spcAft>
-                <a:spcPts val="267"/>
+                <a:spcPts val="250"/>
               </a:spcAft>
             </a:pPr>
             <a:r>
-              <a:rPr sz="1600" b="1" lang="zh-TW" dirty="0">
-                <a:solidFill>
-                  <a:srgbClr val="000000"/>
-                </a:solidFill>
-                <a:latin typeface="Arial Unicode MS"/>
-                <a:ea typeface="Arial Unicode MS"/>
-                <a:cs typeface="Arial Unicode MS"/>
-              </a:rPr>
-              <a:t>物件偵測</a:t>
-            </a:r>
-            <a:r>
-              <a:rPr sz="1600" lang="zh-TW" dirty="0">
-                <a:solidFill>
-                  <a:srgbClr val="000000"/>
-                </a:solidFill>
-                <a:latin typeface="Arial Unicode MS"/>
-                <a:ea typeface="Arial Unicode MS"/>
-                <a:cs typeface="Arial Unicode MS"/>
-              </a:rPr>
-              <a:t>：問「人</a:t>
-            </a:r>
-            <a:r>
-              <a:rPr sz="1600" b="1" lang="zh-TW" dirty="0">
-                <a:solidFill>
-                  <a:srgbClr val="000000"/>
-                </a:solidFill>
-                <a:latin typeface="Arial Unicode MS"/>
-                <a:ea typeface="Arial Unicode MS"/>
-                <a:cs typeface="Arial Unicode MS"/>
-              </a:rPr>
-              <a:t>在哪裡</a:t>
-            </a:r>
-            <a:r>
-              <a:rPr sz="1600" lang="zh-TW" dirty="0">
-                <a:solidFill>
-                  <a:srgbClr val="000000"/>
-                </a:solidFill>
-                <a:latin typeface="Arial Unicode MS"/>
-                <a:ea typeface="Arial Unicode MS"/>
-                <a:cs typeface="Arial Unicode MS"/>
-              </a:rPr>
-              <a:t>、有幾個？」答案就是剛剛那種，一個東西一個框，加上類別和分數。車、人、機車、紅綠燈，都是用它找。
+              <a:rPr sz="1500" b="1" lang="zh-TW" dirty="0">
+                <a:solidFill>
+                  <a:srgbClr val="000000"/>
+                </a:solidFill>
+                <a:latin typeface="Arial Unicode MS"/>
+                <a:ea typeface="Arial Unicode MS"/>
+                <a:cs typeface="Arial Unicode MS"/>
+              </a:rPr>
+              <a:t>第二，類別。</a:t>
+            </a:r>
+            <a:r>
+              <a:rPr sz="1500" lang="zh-TW" dirty="0">
+                <a:solidFill>
+                  <a:srgbClr val="000000"/>
+                </a:solidFill>
+                <a:latin typeface="Arial Unicode MS"/>
+                <a:ea typeface="Arial Unicode MS"/>
+                <a:cs typeface="Arial Unicode MS"/>
+              </a:rPr>
+              <a:t>是人、是車、是卡車。
 </a:t>
             </a:r>
           </a:p>
@@ -2494,52 +2649,30 @@
                 <a:spcPts val="0"/>
               </a:spcBef>
               <a:spcAft>
-                <a:spcPts val="267"/>
+                <a:spcPts val="250"/>
               </a:spcAft>
             </a:pPr>
             <a:r>
-              <a:rPr sz="1600" b="1" lang="zh-TW" dirty="0">
-                <a:solidFill>
-                  <a:srgbClr val="000000"/>
-                </a:solidFill>
-                <a:latin typeface="Arial Unicode MS"/>
-                <a:ea typeface="Arial Unicode MS"/>
-                <a:cs typeface="Arial Unicode MS"/>
-              </a:rPr>
-              <a:t>分割</a:t>
-            </a:r>
-            <a:r>
-              <a:rPr sz="1600" lang="zh-TW" dirty="0">
-                <a:solidFill>
-                  <a:srgbClr val="000000"/>
-                </a:solidFill>
-                <a:latin typeface="Arial Unicode MS"/>
-                <a:ea typeface="Arial Unicode MS"/>
-                <a:cs typeface="Arial Unicode MS"/>
-              </a:rPr>
-              <a:t>：問得最細，「</a:t>
-            </a:r>
-            <a:r>
-              <a:rPr sz="1600" b="1" lang="zh-TW" dirty="0">
-                <a:solidFill>
-                  <a:srgbClr val="000000"/>
-                </a:solidFill>
-                <a:latin typeface="Arial Unicode MS"/>
-                <a:ea typeface="Arial Unicode MS"/>
-                <a:cs typeface="Arial Unicode MS"/>
-              </a:rPr>
-              <a:t>每一個像素</a:t>
-            </a:r>
-            <a:r>
-              <a:rPr sz="1600" lang="zh-TW" dirty="0">
-                <a:solidFill>
-                  <a:srgbClr val="000000"/>
-                </a:solidFill>
-                <a:latin typeface="Arial Unicode MS"/>
-                <a:ea typeface="Arial Unicode MS"/>
-                <a:cs typeface="Arial Unicode MS"/>
-              </a:rPr>
-              <a:t>是什麼？」這個像素是路、那個像素是人行道、那個是車道線。車上用它找出「哪裡是可以開的路面」。
+              <a:rPr sz="1500" b="1" lang="zh-TW" dirty="0">
+                <a:solidFill>
+                  <a:srgbClr val="000000"/>
+                </a:solidFill>
+                <a:latin typeface="Arial Unicode MS"/>
+                <a:ea typeface="Arial Unicode MS"/>
+                <a:cs typeface="Arial Unicode MS"/>
+              </a:rPr>
+              <a:t>第三，分數。</a:t>
+            </a:r>
+            <a:r>
+              <a:rPr sz="1500" lang="zh-TW" dirty="0">
+                <a:solidFill>
+                  <a:srgbClr val="000000"/>
+                </a:solidFill>
+                <a:latin typeface="Arial Unicode MS"/>
+                <a:ea typeface="Arial Unicode MS"/>
+                <a:cs typeface="Arial Unicode MS"/>
+              </a:rPr>
+              <a:t>零到一之間。「人 0.91」，意思是模型對「這裡有一個人」很有把握。
 </a:t>
             </a:r>
           </a:p>
@@ -2549,19 +2682,19 @@
                 <a:spcPts val="0"/>
               </a:spcBef>
               <a:spcAft>
-                <a:spcPts val="267"/>
+                <a:spcPts val="250"/>
               </a:spcAft>
             </a:pPr>
             <a:r>
-              <a:rPr sz="1600" lang="zh-TW" dirty="0">
-                <a:solidFill>
-                  <a:srgbClr val="000000"/>
-                </a:solidFill>
-                <a:latin typeface="Arial Unicode MS"/>
-                <a:ea typeface="Arial Unicode MS"/>
-                <a:cs typeface="Arial Unicode MS"/>
-              </a:rPr>
-              <a:t>三種愈往右愈細，要算的也愈多，要標的標準答案也愈費工：分類只要寫一個字，偵測要畫框，分割要一個像素一個像素塗顏色。
+              <a:rPr sz="1500" lang="zh-TW" dirty="0">
+                <a:solidFill>
+                  <a:srgbClr val="000000"/>
+                </a:solidFill>
+                <a:latin typeface="Arial Unicode MS"/>
+                <a:ea typeface="Arial Unicode MS"/>
+                <a:cs typeface="Arial Unicode MS"/>
+              </a:rPr>
+              <a:t>看遠處那台「卡車 0.52」，它其實是一台公車，官方標註寫的是公車。類別錯了，分數也比較低。模型沒把握的時候，分數就低。
 </a:t>
             </a:r>
           </a:p>
@@ -2571,19 +2704,63 @@
                 <a:spcPts val="0"/>
               </a:spcBef>
               <a:spcAft>
-                <a:spcPts val="267"/>
+                <a:spcPts val="250"/>
               </a:spcAft>
             </a:pPr>
             <a:r>
-              <a:rPr sz="1600" lang="zh-TW" dirty="0">
-                <a:solidFill>
-                  <a:srgbClr val="000000"/>
-                </a:solidFill>
-                <a:latin typeface="Arial Unicode MS"/>
-                <a:ea typeface="Arial Unicode MS"/>
-                <a:cs typeface="Arial Unicode MS"/>
-              </a:rPr>
-              <a:t>今天專講中間這種，物件偵測，因為它是避免撞到東西最主要的那一塊。第二節各位標的，也是偵測用的框。</a:t>
+              <a:rPr sz="1500" lang="zh-TW" dirty="0">
+                <a:solidFill>
+                  <a:srgbClr val="000000"/>
+                </a:solidFill>
+                <a:latin typeface="Arial Unicode MS"/>
+                <a:ea typeface="Arial Unicode MS"/>
+                <a:cs typeface="Arial Unicode MS"/>
+              </a:rPr>
+              <a:t>有一個常見的誤會：</a:t>
+            </a:r>
+            <a:r>
+              <a:rPr sz="1500" b="1" lang="zh-TW" dirty="0">
+                <a:solidFill>
+                  <a:srgbClr val="000000"/>
+                </a:solidFill>
+                <a:latin typeface="Arial Unicode MS"/>
+                <a:ea typeface="Arial Unicode MS"/>
+                <a:cs typeface="Arial Unicode MS"/>
+              </a:rPr>
+              <a:t>0.91 不等於「百分之九十一一定對」。</a:t>
+            </a:r>
+            <a:r>
+              <a:rPr sz="1500" lang="zh-TW" dirty="0">
+                <a:solidFill>
+                  <a:srgbClr val="000000"/>
+                </a:solidFill>
+                <a:latin typeface="Arial Unicode MS"/>
+                <a:ea typeface="Arial Unicode MS"/>
+                <a:cs typeface="Arial Unicode MS"/>
+              </a:rPr>
+              <a:t>它比較像考試的時候，答案旁邊自己寫「我有幾分把握」，有人寫九分的也會錯。這個分數真正的用途，是拿來排序、拿來切一刀：低於某個分數的框就不要了。這一刀叫</a:t>
+            </a:r>
+            <a:r>
+              <a:rPr sz="1500" b="1" lang="zh-TW" dirty="0">
+                <a:solidFill>
+                  <a:srgbClr val="000000"/>
+                </a:solidFill>
+                <a:latin typeface="Arial Unicode MS"/>
+                <a:ea typeface="Arial Unicode MS"/>
+                <a:cs typeface="Arial Unicode MS"/>
+              </a:rPr>
+              <a:t>門檻</a:t>
+            </a:r>
+            <a:r>
+              <a:rPr sz="1500" lang="zh-TW" dirty="0">
+                <a:solidFill>
+                  <a:srgbClr val="000000"/>
+                </a:solidFill>
+                <a:latin typeface="Arial Unicode MS"/>
+                <a:ea typeface="Arial Unicode MS"/>
+                <a:cs typeface="Arial Unicode MS"/>
+              </a:rPr>
+              <a:t>，下下張會看到，門檻切在哪裡，影響非常大。</a:t>
             </a:r>
           </a:p>
         </p:txBody>
@@ -2715,7 +2892,7 @@
                 <a:ea typeface="Arial Unicode MS"/>
                 <a:cs typeface="Arial Unicode MS"/>
               </a:rPr>
-              <a:t>讓大家知道，門檻切在哪裡是一種取捨：低了多報，高了漏掉，沒有一個門檻兩邊都好。
+              <a:t>讓大家分得清三種常見的視覺工作：分類、偵測、分割，各自回答什麼問題。
 </a:t>
             </a:r>
           </a:p>
@@ -2737,7 +2914,7 @@
                 <a:ea typeface="Arial Unicode MS"/>
                 <a:cs typeface="Arial Unicode MS"/>
               </a:rPr>
-              <a:t>同一張照片，新加坡，晚上剛下過雨。兩邊只差一件事：門檻。
+              <a:t>剛剛那種「框出來」的工作叫偵測。其實電腦看照片，常見的有三種工作，差在問的問題不一樣。
 </a:t>
             </a:r>
           </a:p>
@@ -2759,7 +2936,7 @@
                 <a:ea typeface="Arial Unicode MS"/>
                 <a:cs typeface="Arial Unicode MS"/>
               </a:rPr>
-              <a:t>左邊，門檻 0.3</a:t>
+              <a:t>分類</a:t>
             </a:r>
             <a:r>
               <a:rPr sz="1600" lang="zh-TW" dirty="0">
@@ -2770,7 +2947,29 @@
                 <a:ea typeface="Arial Unicode MS"/>
                 <a:cs typeface="Arial Unicode MS"/>
               </a:rPr>
-              <a:t>：分數 0.3 以上的框全部留下。路口那幾個行人都抓到了，右邊路口等紅燈的人也抓到了。可是請看右上角，商場玻璃門裡面那兩個「人 0.44」：真的是人，但他們在商場裡面，不在路上，官方也沒有標。對開車來說，這種框是多餘的。
+              <a:t>：問「這張照片裡</a:t>
+            </a:r>
+            <a:r>
+              <a:rPr sz="1600" b="1" lang="zh-TW" dirty="0">
+                <a:solidFill>
+                  <a:srgbClr val="000000"/>
+                </a:solidFill>
+                <a:latin typeface="Arial Unicode MS"/>
+                <a:ea typeface="Arial Unicode MS"/>
+                <a:cs typeface="Arial Unicode MS"/>
+              </a:rPr>
+              <a:t>有沒有</a:t>
+            </a:r>
+            <a:r>
+              <a:rPr sz="1600" lang="zh-TW" dirty="0">
+                <a:solidFill>
+                  <a:srgbClr val="000000"/>
+                </a:solidFill>
+                <a:latin typeface="Arial Unicode MS"/>
+                <a:ea typeface="Arial Unicode MS"/>
+                <a:cs typeface="Arial Unicode MS"/>
+              </a:rPr>
+              <a:t>人？」整張照片只給一個答案。車上可以用它判斷：現在是不是在下雨、是白天還是晚上。
 </a:t>
             </a:r>
           </a:p>
@@ -2792,7 +2991,7 @@
                 <a:ea typeface="Arial Unicode MS"/>
                 <a:cs typeface="Arial Unicode MS"/>
               </a:rPr>
-              <a:t>右邊，門檻 0.7</a:t>
+              <a:t>物件偵測</a:t>
             </a:r>
             <a:r>
               <a:rPr sz="1600" lang="zh-TW" dirty="0">
@@ -2803,7 +3002,7 @@
                 <a:ea typeface="Arial Unicode MS"/>
                 <a:cs typeface="Arial Unicode MS"/>
               </a:rPr>
-              <a:t>：只留分數 0.7 以上的。畫面很乾淨，可是請看那些</a:t>
+              <a:t>：問「人</a:t>
             </a:r>
             <a:r>
               <a:rPr sz="1600" b="1" lang="zh-TW" dirty="0">
@@ -2814,7 +3013,7 @@
                 <a:ea typeface="Arial Unicode MS"/>
                 <a:cs typeface="Arial Unicode MS"/>
               </a:rPr>
-              <a:t>白色虛線框</a:t>
+              <a:t>在哪裡</a:t>
             </a:r>
             <a:r>
               <a:rPr sz="1600" lang="zh-TW" dirty="0">
@@ -2825,7 +3024,7 @@
                 <a:ea typeface="Arial Unicode MS"/>
                 <a:cs typeface="Arial Unicode MS"/>
               </a:rPr>
-              <a:t>：那是官方標註裡有、這個門檻下沒被抓到的行人。路口中間、離車子最近的那群人，只剩一個框。
+              <a:t>、有幾個？」答案就是剛剛那種，一個東西一個框，加上類別和分數。車、人、機車、紅綠燈，都是用它找。
 </a:t>
             </a:r>
           </a:p>
@@ -2839,6 +3038,17 @@
               </a:spcAft>
             </a:pPr>
             <a:r>
+              <a:rPr sz="1600" b="1" lang="zh-TW" dirty="0">
+                <a:solidFill>
+                  <a:srgbClr val="000000"/>
+                </a:solidFill>
+                <a:latin typeface="Arial Unicode MS"/>
+                <a:ea typeface="Arial Unicode MS"/>
+                <a:cs typeface="Arial Unicode MS"/>
+              </a:rPr>
+              <a:t>分割</a:t>
+            </a:r>
+            <a:r>
               <a:rPr sz="1600" lang="zh-TW" dirty="0">
                 <a:solidFill>
                   <a:srgbClr val="000000"/>
@@ -2847,7 +3057,29 @@
                 <a:ea typeface="Arial Unicode MS"/>
                 <a:cs typeface="Arial Unicode MS"/>
               </a:rPr>
-              <a:t>用火災警報器來想。太敏感，炒個菜就響，大家就把它拔掉了；太遲鈍，真的失火了也不響。
+              <a:t>：問得最細，「</a:t>
+            </a:r>
+            <a:r>
+              <a:rPr sz="1600" b="1" lang="zh-TW" dirty="0">
+                <a:solidFill>
+                  <a:srgbClr val="000000"/>
+                </a:solidFill>
+                <a:latin typeface="Arial Unicode MS"/>
+                <a:ea typeface="Arial Unicode MS"/>
+                <a:cs typeface="Arial Unicode MS"/>
+              </a:rPr>
+              <a:t>每一個像素</a:t>
+            </a:r>
+            <a:r>
+              <a:rPr sz="1600" lang="zh-TW" dirty="0">
+                <a:solidFill>
+                  <a:srgbClr val="000000"/>
+                </a:solidFill>
+                <a:latin typeface="Arial Unicode MS"/>
+                <a:ea typeface="Arial Unicode MS"/>
+                <a:cs typeface="Arial Unicode MS"/>
+              </a:rPr>
+              <a:t>是什麼？」這個像素是路、那個像素是人行道、那個是車道線。車上用它找出「哪裡是可以開的路面」。
 </a:t>
             </a:r>
           </a:p>
@@ -2869,19 +3101,19 @@
                 <a:ea typeface="Arial Unicode MS"/>
                 <a:cs typeface="Arial Unicode MS"/>
               </a:rPr>
-              <a:t>放到車上：</a:t>
-            </a:r>
-            <a:r>
-              <a:rPr sz="1600" b="1" lang="zh-TW" dirty="0">
-                <a:solidFill>
-                  <a:srgbClr val="000000"/>
-                </a:solidFill>
-                <a:latin typeface="Arial Unicode MS"/>
-                <a:ea typeface="Arial Unicode MS"/>
-                <a:cs typeface="Arial Unicode MS"/>
-              </a:rPr>
-              <a:t>多報</a:t>
-            </a:r>
+              <a:t>三種愈往右愈細，要算的也愈多，要標的標準答案也愈費工：分類只要寫一個字，偵測要畫框，分割要一個像素一個像素塗顏色。
+</a:t>
+            </a:r>
+          </a:p>
+          <a:p>
+            <a:pPr algn="l">
+              <a:spcBef>
+                <a:spcPts val="0"/>
+              </a:spcBef>
+              <a:spcAft>
+                <a:spcPts val="267"/>
+              </a:spcAft>
+            </a:pPr>
             <a:r>
               <a:rPr sz="1600" lang="zh-TW" dirty="0">
                 <a:solidFill>
@@ -2891,29 +3123,7 @@
                 <a:ea typeface="Arial Unicode MS"/>
                 <a:cs typeface="Arial Unicode MS"/>
               </a:rPr>
-              <a:t>，車子會為了不存在的東西煞車，就是上週講的幽靈煞車；</a:t>
-            </a:r>
-            <a:r>
-              <a:rPr sz="1600" b="1" lang="zh-TW" dirty="0">
-                <a:solidFill>
-                  <a:srgbClr val="000000"/>
-                </a:solidFill>
-                <a:latin typeface="Arial Unicode MS"/>
-                <a:ea typeface="Arial Unicode MS"/>
-                <a:cs typeface="Arial Unicode MS"/>
-              </a:rPr>
-              <a:t>漏掉</a:t>
-            </a:r>
-            <a:r>
-              <a:rPr sz="1600" lang="zh-TW" dirty="0">
-                <a:solidFill>
-                  <a:srgbClr val="000000"/>
-                </a:solidFill>
-                <a:latin typeface="Arial Unicode MS"/>
-                <a:ea typeface="Arial Unicode MS"/>
-                <a:cs typeface="Arial Unicode MS"/>
-              </a:rPr>
-              <a:t>，前面明明有人，車子不煞。哪一種比較嚴重？漏掉人當然比較嚴重，所以行人通常門檻會設得比較低，多出來的框，再靠光達、雷達、追蹤去確認。這就是上週講的融合派上用場的地方。</a:t>
+              <a:t>今天專講中間這種，物件偵測，因為它是避免撞到東西最主要的那一塊。第二節各位標的，也是偵測用的框。</a:t>
             </a:r>
           </a:p>
         </p:txBody>
@@ -3022,11 +3232,11 @@
                 <a:spcPts val="0"/>
               </a:spcBef>
               <a:spcAft>
-                <a:spcPts val="233"/>
+                <a:spcPts val="267"/>
               </a:spcAft>
             </a:pPr>
             <a:r>
-              <a:rPr sz="1400" b="1" lang="zh-TW" dirty="0">
+              <a:rPr sz="1600" b="1" lang="zh-TW" dirty="0">
                 <a:solidFill>
                   <a:srgbClr val="000000"/>
                 </a:solidFill>
@@ -3037,15 +3247,15 @@
               <a:t>這一張的目的：</a:t>
             </a:r>
             <a:r>
-              <a:rPr sz="1400" lang="zh-TW" dirty="0">
-                <a:solidFill>
-                  <a:srgbClr val="000000"/>
-                </a:solidFill>
-                <a:latin typeface="Arial Unicode MS"/>
-                <a:ea typeface="Arial Unicode MS"/>
-                <a:cs typeface="Arial Unicode MS"/>
-              </a:rPr>
-              <a:t>讓大家用真的數字看見門檻的取捨：多報少了，漏掉的就多了，兩欄一起動。
+              <a:rPr sz="1600" lang="zh-TW" dirty="0">
+                <a:solidFill>
+                  <a:srgbClr val="000000"/>
+                </a:solidFill>
+                <a:latin typeface="Arial Unicode MS"/>
+                <a:ea typeface="Arial Unicode MS"/>
+                <a:cs typeface="Arial Unicode MS"/>
+              </a:rPr>
+              <a:t>讓大家知道，門檻切在哪裡是一種取捨：低了多報，高了漏掉，沒有一個門檻兩邊都好。
 </a:t>
             </a:r>
           </a:p>
@@ -3055,19 +3265,19 @@
                 <a:spcPts val="0"/>
               </a:spcBef>
               <a:spcAft>
-                <a:spcPts val="233"/>
+                <a:spcPts val="267"/>
               </a:spcAft>
             </a:pPr>
             <a:r>
-              <a:rPr sz="1400" lang="zh-TW" dirty="0">
-                <a:solidFill>
-                  <a:srgbClr val="000000"/>
-                </a:solidFill>
-                <a:latin typeface="Arial Unicode MS"/>
-                <a:ea typeface="Arial Unicode MS"/>
-                <a:cs typeface="Arial Unicode MS"/>
-              </a:rPr>
-              <a:t>上一張是一張照片，這一張是全部四百零四張前方照片加起來，白天、晚上都有。我把門檻從 0.1 一路拉到 0.9，每一列算一次。
+              <a:rPr sz="1600" lang="zh-TW" dirty="0">
+                <a:solidFill>
+                  <a:srgbClr val="000000"/>
+                </a:solidFill>
+                <a:latin typeface="Arial Unicode MS"/>
+                <a:ea typeface="Arial Unicode MS"/>
+                <a:cs typeface="Arial Unicode MS"/>
+              </a:rPr>
+              <a:t>同一張照片，新加坡，晚上剛下過雨。兩邊只差一件事：門檻。
 </a:t>
             </a:r>
           </a:p>
@@ -3077,41 +3287,30 @@
                 <a:spcPts val="0"/>
               </a:spcBef>
               <a:spcAft>
-                <a:spcPts val="233"/>
+                <a:spcPts val="267"/>
               </a:spcAft>
             </a:pPr>
             <a:r>
-              <a:rPr sz="1400" lang="zh-TW" dirty="0">
-                <a:solidFill>
-                  <a:srgbClr val="000000"/>
-                </a:solidFill>
-                <a:latin typeface="Arial Unicode MS"/>
-                <a:ea typeface="Arial Unicode MS"/>
-                <a:cs typeface="Arial Unicode MS"/>
-              </a:rPr>
-              <a:t>先看第三欄，「</a:t>
-            </a:r>
-            <a:r>
-              <a:rPr sz="1400" b="1" lang="zh-TW" dirty="0">
-                <a:solidFill>
-                  <a:srgbClr val="000000"/>
-                </a:solidFill>
-                <a:latin typeface="Arial Unicode MS"/>
-                <a:ea typeface="Arial Unicode MS"/>
-                <a:cs typeface="Arial Unicode MS"/>
-              </a:rPr>
-              <a:t>對不到任何標註的框</a:t>
-            </a:r>
-            <a:r>
-              <a:rPr sz="1400" lang="zh-TW" dirty="0">
-                <a:solidFill>
-                  <a:srgbClr val="000000"/>
-                </a:solidFill>
-                <a:latin typeface="Arial Unicode MS"/>
-                <a:ea typeface="Arial Unicode MS"/>
-                <a:cs typeface="Arial Unicode MS"/>
-              </a:rPr>
-              <a:t>」，就是框框住的地方，官方標註裡什麼都沒有。門檻 0.1 有七百八十一個；0.3 剩兩百八十四；0.7 剩三十五；0.9 一個都沒有。門檻愈高，多報愈少。
+              <a:rPr sz="1600" b="1" lang="zh-TW" dirty="0">
+                <a:solidFill>
+                  <a:srgbClr val="000000"/>
+                </a:solidFill>
+                <a:latin typeface="Arial Unicode MS"/>
+                <a:ea typeface="Arial Unicode MS"/>
+                <a:cs typeface="Arial Unicode MS"/>
+              </a:rPr>
+              <a:t>左邊，門檻 0.3</a:t>
+            </a:r>
+            <a:r>
+              <a:rPr sz="1600" lang="zh-TW" dirty="0">
+                <a:solidFill>
+                  <a:srgbClr val="000000"/>
+                </a:solidFill>
+                <a:latin typeface="Arial Unicode MS"/>
+                <a:ea typeface="Arial Unicode MS"/>
+                <a:cs typeface="Arial Unicode MS"/>
+              </a:rPr>
+              <a:t>：分數 0.3 以上的框全部留下。路口那幾個行人都抓到了，右邊路口等紅燈的人也抓到了。可是請看右上角，商場玻璃門裡面那兩個「人 0.44」：真的是人，但他們在商場裡面，不在路上，官方也沒有標。對開車來說，這種框是多餘的。
 </a:t>
             </a:r>
           </a:p>
@@ -3121,41 +3320,52 @@
                 <a:spcPts val="0"/>
               </a:spcBef>
               <a:spcAft>
-                <a:spcPts val="233"/>
+                <a:spcPts val="267"/>
               </a:spcAft>
             </a:pPr>
             <a:r>
-              <a:rPr sz="1400" lang="zh-TW" dirty="0">
-                <a:solidFill>
-                  <a:srgbClr val="000000"/>
-                </a:solidFill>
-                <a:latin typeface="Arial Unicode MS"/>
-                <a:ea typeface="Arial Unicode MS"/>
-                <a:cs typeface="Arial Unicode MS"/>
-              </a:rPr>
-              <a:t>再看後面三欄，「</a:t>
-            </a:r>
-            <a:r>
-              <a:rPr sz="1400" b="1" lang="zh-TW" dirty="0">
-                <a:solidFill>
-                  <a:srgbClr val="000000"/>
-                </a:solidFill>
-                <a:latin typeface="Arial Unicode MS"/>
-                <a:ea typeface="Arial Unicode MS"/>
-                <a:cs typeface="Arial Unicode MS"/>
-              </a:rPr>
-              <a:t>抓到</a:t>
-            </a:r>
-            <a:r>
-              <a:rPr sz="1400" lang="zh-TW" dirty="0">
-                <a:solidFill>
-                  <a:srgbClr val="000000"/>
-                </a:solidFill>
-                <a:latin typeface="Arial Unicode MS"/>
-                <a:ea typeface="Arial Unicode MS"/>
-                <a:cs typeface="Arial Unicode MS"/>
-              </a:rPr>
-              <a:t>」的比例：官方標註的車、人、二輪，有多少被框到了。門檻 0.1，車 87%、行人 63%；門檻 0.9，車剩 18%，行人剩 2%，幾乎全部漏光。
+              <a:rPr sz="1600" b="1" lang="zh-TW" dirty="0">
+                <a:solidFill>
+                  <a:srgbClr val="000000"/>
+                </a:solidFill>
+                <a:latin typeface="Arial Unicode MS"/>
+                <a:ea typeface="Arial Unicode MS"/>
+                <a:cs typeface="Arial Unicode MS"/>
+              </a:rPr>
+              <a:t>右邊，門檻 0.7</a:t>
+            </a:r>
+            <a:r>
+              <a:rPr sz="1600" lang="zh-TW" dirty="0">
+                <a:solidFill>
+                  <a:srgbClr val="000000"/>
+                </a:solidFill>
+                <a:latin typeface="Arial Unicode MS"/>
+                <a:ea typeface="Arial Unicode MS"/>
+                <a:cs typeface="Arial Unicode MS"/>
+              </a:rPr>
+              <a:t>：只留分數 0.7 以上的。畫面很乾淨，可是請看那些</a:t>
+            </a:r>
+            <a:r>
+              <a:rPr sz="1600" b="1" lang="zh-TW" dirty="0">
+                <a:solidFill>
+                  <a:srgbClr val="000000"/>
+                </a:solidFill>
+                <a:latin typeface="Arial Unicode MS"/>
+                <a:ea typeface="Arial Unicode MS"/>
+                <a:cs typeface="Arial Unicode MS"/>
+              </a:rPr>
+              <a:t>白色虛線框</a:t>
+            </a:r>
+            <a:r>
+              <a:rPr sz="1600" lang="zh-TW" dirty="0">
+                <a:solidFill>
+                  <a:srgbClr val="000000"/>
+                </a:solidFill>
+                <a:latin typeface="Arial Unicode MS"/>
+                <a:ea typeface="Arial Unicode MS"/>
+                <a:cs typeface="Arial Unicode MS"/>
+              </a:rPr>
+              <a:t>：那是官方標註裡有、這個門檻下沒被抓到的行人。路口中間、離車子最近的那群人，只剩一個框。
 </a:t>
             </a:r>
           </a:p>
@@ -3165,41 +3375,19 @@
                 <a:spcPts val="0"/>
               </a:spcBef>
               <a:spcAft>
-                <a:spcPts val="233"/>
+                <a:spcPts val="267"/>
               </a:spcAft>
             </a:pPr>
             <a:r>
-              <a:rPr sz="1400" lang="zh-TW" dirty="0">
-                <a:solidFill>
-                  <a:srgbClr val="000000"/>
-                </a:solidFill>
-                <a:latin typeface="Arial Unicode MS"/>
-                <a:ea typeface="Arial Unicode MS"/>
-                <a:cs typeface="Arial Unicode MS"/>
-              </a:rPr>
-              <a:t>兩件事一起看：</a:t>
-            </a:r>
-            <a:r>
-              <a:rPr sz="1400" b="1" lang="zh-TW" dirty="0">
-                <a:solidFill>
-                  <a:srgbClr val="000000"/>
-                </a:solidFill>
-                <a:latin typeface="Arial Unicode MS"/>
-                <a:ea typeface="Arial Unicode MS"/>
-                <a:cs typeface="Arial Unicode MS"/>
-              </a:rPr>
-              <a:t>要多報少，就要接受漏得多；要漏得少，就要接受多報。</a:t>
-            </a:r>
-            <a:r>
-              <a:rPr sz="1400" lang="zh-TW" dirty="0">
-                <a:solidFill>
-                  <a:srgbClr val="000000"/>
-                </a:solidFill>
-                <a:latin typeface="Arial Unicode MS"/>
-                <a:ea typeface="Arial Unicode MS"/>
-                <a:cs typeface="Arial Unicode MS"/>
-              </a:rPr>
-              <a:t>沒有一列兩邊都好。
+              <a:rPr sz="1600" lang="zh-TW" dirty="0">
+                <a:solidFill>
+                  <a:srgbClr val="000000"/>
+                </a:solidFill>
+                <a:latin typeface="Arial Unicode MS"/>
+                <a:ea typeface="Arial Unicode MS"/>
+                <a:cs typeface="Arial Unicode MS"/>
+              </a:rPr>
+              <a:t>用火災警報器來想。太敏感，炒個菜就響，大家就把它拔掉了；太遲鈍，真的失火了也不響。
 </a:t>
             </a:r>
           </a:p>
@@ -3209,63 +3397,63 @@
                 <a:spcPts val="0"/>
               </a:spcBef>
               <a:spcAft>
-                <a:spcPts val="233"/>
+                <a:spcPts val="267"/>
               </a:spcAft>
             </a:pPr>
             <a:r>
-              <a:rPr sz="1400" lang="zh-TW" dirty="0">
-                <a:solidFill>
-                  <a:srgbClr val="000000"/>
-                </a:solidFill>
-                <a:latin typeface="Arial Unicode MS"/>
-                <a:ea typeface="Arial Unicode MS"/>
-                <a:cs typeface="Arial Unicode MS"/>
-              </a:rPr>
-              <a:t>另外兩個細節。
-</a:t>
-            </a:r>
-          </a:p>
-          <a:p>
-            <a:pPr algn="l">
-              <a:spcBef>
-                <a:spcPts val="0"/>
-              </a:spcBef>
-              <a:spcAft>
-                <a:spcPts val="233"/>
-              </a:spcAft>
-            </a:pPr>
-            <a:r>
-              <a:rPr sz="1400" lang="zh-TW" dirty="0">
-                <a:solidFill>
-                  <a:srgbClr val="000000"/>
-                </a:solidFill>
-                <a:latin typeface="Arial Unicode MS"/>
-                <a:ea typeface="Arial Unicode MS"/>
-                <a:cs typeface="Arial Unicode MS"/>
-              </a:rPr>
-              <a:t>第一，「對不到標註」不一定都是錯的。上一張商場裡的人就是例子：真的有人，只是官方沒標。所以這一欄是「最多有這麼多個多報」。
-</a:t>
-            </a:r>
-          </a:p>
-          <a:p>
-            <a:pPr algn="l">
-              <a:spcBef>
-                <a:spcPts val="0"/>
-              </a:spcBef>
-              <a:spcAft>
-                <a:spcPts val="233"/>
-              </a:spcAft>
-            </a:pPr>
-            <a:r>
-              <a:rPr sz="1400" lang="zh-TW" dirty="0">
-                <a:solidFill>
-                  <a:srgbClr val="000000"/>
-                </a:solidFill>
-                <a:latin typeface="Arial Unicode MS"/>
-                <a:ea typeface="Arial Unicode MS"/>
-                <a:cs typeface="Arial Unicode MS"/>
-              </a:rPr>
-              <a:t>第二，同一個門檻，行人比車差很多，機車、腳踏車更差：門檻 0.3，車 82%、行人 53%、二輪只有 27%。人和機車比車小，下一張會看到，一遠就更明顯。</a:t>
+              <a:rPr sz="1600" lang="zh-TW" dirty="0">
+                <a:solidFill>
+                  <a:srgbClr val="000000"/>
+                </a:solidFill>
+                <a:latin typeface="Arial Unicode MS"/>
+                <a:ea typeface="Arial Unicode MS"/>
+                <a:cs typeface="Arial Unicode MS"/>
+              </a:rPr>
+              <a:t>放到車上：</a:t>
+            </a:r>
+            <a:r>
+              <a:rPr sz="1600" b="1" lang="zh-TW" dirty="0">
+                <a:solidFill>
+                  <a:srgbClr val="000000"/>
+                </a:solidFill>
+                <a:latin typeface="Arial Unicode MS"/>
+                <a:ea typeface="Arial Unicode MS"/>
+                <a:cs typeface="Arial Unicode MS"/>
+              </a:rPr>
+              <a:t>多報</a:t>
+            </a:r>
+            <a:r>
+              <a:rPr sz="1600" lang="zh-TW" dirty="0">
+                <a:solidFill>
+                  <a:srgbClr val="000000"/>
+                </a:solidFill>
+                <a:latin typeface="Arial Unicode MS"/>
+                <a:ea typeface="Arial Unicode MS"/>
+                <a:cs typeface="Arial Unicode MS"/>
+              </a:rPr>
+              <a:t>，車子會為了不存在的東西煞車，就是上週講的幽靈煞車；</a:t>
+            </a:r>
+            <a:r>
+              <a:rPr sz="1600" b="1" lang="zh-TW" dirty="0">
+                <a:solidFill>
+                  <a:srgbClr val="000000"/>
+                </a:solidFill>
+                <a:latin typeface="Arial Unicode MS"/>
+                <a:ea typeface="Arial Unicode MS"/>
+                <a:cs typeface="Arial Unicode MS"/>
+              </a:rPr>
+              <a:t>漏掉</a:t>
+            </a:r>
+            <a:r>
+              <a:rPr sz="1600" lang="zh-TW" dirty="0">
+                <a:solidFill>
+                  <a:srgbClr val="000000"/>
+                </a:solidFill>
+                <a:latin typeface="Arial Unicode MS"/>
+                <a:ea typeface="Arial Unicode MS"/>
+                <a:cs typeface="Arial Unicode MS"/>
+              </a:rPr>
+              <a:t>，前面明明有人，車子不煞。哪一種比較嚴重？漏掉人當然比較嚴重，所以行人通常門檻會設得比較低，多出來的框，再靠光達、雷達、追蹤去確認。這就是上週講的融合派上用場的地方。</a:t>
             </a:r>
           </a:p>
         </p:txBody>
@@ -3397,7 +3585,7 @@
                 <a:ea typeface="Arial Unicode MS"/>
                 <a:cs typeface="Arial Unicode MS"/>
               </a:rPr>
-              <a:t>讓大家知道，相機的偵測也是一遠就漏，而且人和機車比車掉得快很多。
+              <a:t>讓大家用真的數字看見門檻的取捨：多報少了，漏掉的就多了，兩欄一起動。
 </a:t>
             </a:r>
           </a:p>
@@ -3419,7 +3607,7 @@
                 <a:ea typeface="Arial Unicode MS"/>
                 <a:cs typeface="Arial Unicode MS"/>
               </a:rPr>
-              <a:t>這張是白天的照片，只算看得到六成以上的物體，門檻 0.3。橫軸是距離，每十公尺一組；柱子是抓到的比例。
+              <a:t>上一張是一張照片，這一張是全部四百零四張前方照片加起來，白天、晚上都有。我把門檻從 0.1 一路拉到 0.9，每一列算一次。
 </a:t>
             </a:r>
           </a:p>
@@ -3433,6 +3621,17 @@
               </a:spcAft>
             </a:pPr>
             <a:r>
+              <a:rPr sz="1400" lang="zh-TW" dirty="0">
+                <a:solidFill>
+                  <a:srgbClr val="000000"/>
+                </a:solidFill>
+                <a:latin typeface="Arial Unicode MS"/>
+                <a:ea typeface="Arial Unicode MS"/>
+                <a:cs typeface="Arial Unicode MS"/>
+              </a:rPr>
+              <a:t>先看第三欄，「</a:t>
+            </a:r>
+            <a:r>
               <a:rPr sz="1400" b="1" lang="zh-TW" dirty="0">
                 <a:solidFill>
                   <a:srgbClr val="000000"/>
@@ -3441,7 +3640,7 @@
                 <a:ea typeface="Arial Unicode MS"/>
                 <a:cs typeface="Arial Unicode MS"/>
               </a:rPr>
-              <a:t>綠色是車</a:t>
+              <a:t>對不到任何標註的框</a:t>
             </a:r>
             <a:r>
               <a:rPr sz="1400" lang="zh-TW" dirty="0">
@@ -3452,7 +3651,7 @@
                 <a:ea typeface="Arial Unicode MS"/>
                 <a:cs typeface="Arial Unicode MS"/>
               </a:rPr>
-              <a:t>：十到二十公尺 94%，到四十到五十公尺還有 83%，掉得很少。最左邊十公尺內只有 64%，我一台一台查過，沒抓到的那十台，全部都是太近、有一部分跑出畫面外面，被邊框切掉的。
+              <a:t>」，就是框框住的地方，官方標註裡什麼都沒有。門檻 0.1 有七百八十一個；0.3 剩兩百八十四；0.7 剩三十五；0.9 一個都沒有。門檻愈高，多報愈少。
 </a:t>
             </a:r>
           </a:p>
@@ -3466,6 +3665,17 @@
               </a:spcAft>
             </a:pPr>
             <a:r>
+              <a:rPr sz="1400" lang="zh-TW" dirty="0">
+                <a:solidFill>
+                  <a:srgbClr val="000000"/>
+                </a:solidFill>
+                <a:latin typeface="Arial Unicode MS"/>
+                <a:ea typeface="Arial Unicode MS"/>
+                <a:cs typeface="Arial Unicode MS"/>
+              </a:rPr>
+              <a:t>再看後面三欄，「</a:t>
+            </a:r>
+            <a:r>
               <a:rPr sz="1400" b="1" lang="zh-TW" dirty="0">
                 <a:solidFill>
                   <a:srgbClr val="000000"/>
@@ -3474,7 +3684,7 @@
                 <a:ea typeface="Arial Unicode MS"/>
                 <a:cs typeface="Arial Unicode MS"/>
               </a:rPr>
-              <a:t>紅色是行人</a:t>
+              <a:t>抓到</a:t>
             </a:r>
             <a:r>
               <a:rPr sz="1400" lang="zh-TW" dirty="0">
@@ -3485,29 +3695,7 @@
                 <a:ea typeface="Arial Unicode MS"/>
                 <a:cs typeface="Arial Unicode MS"/>
               </a:rPr>
-              <a:t>：十公尺內 82%，然後一路往下：66%、60%、37%，到四十到五十公尺，</a:t>
-            </a:r>
-            <a:r>
-              <a:rPr sz="1400" b="1" lang="zh-TW" dirty="0">
-                <a:solidFill>
-                  <a:srgbClr val="000000"/>
-                </a:solidFill>
-                <a:latin typeface="Arial Unicode MS"/>
-                <a:ea typeface="Arial Unicode MS"/>
-                <a:cs typeface="Arial Unicode MS"/>
-              </a:rPr>
-              <a:t>只剩 3%</a:t>
-            </a:r>
-            <a:r>
-              <a:rPr sz="1400" lang="zh-TW" dirty="0">
-                <a:solidFill>
-                  <a:srgbClr val="000000"/>
-                </a:solidFill>
-                <a:latin typeface="Arial Unicode MS"/>
-                <a:ea typeface="Arial Unicode MS"/>
-                <a:cs typeface="Arial Unicode MS"/>
-              </a:rPr>
-              <a:t>，三十九個人只抓到一個。
+              <a:t>」的比例：官方標註的車、人、二輪，有多少被框到了。門檻 0.1，車 87%、行人 63%；門檻 0.9，車剩 18%，行人剩 2%，幾乎全部漏光。
 </a:t>
             </a:r>
           </a:p>
@@ -3521,6 +3709,17 @@
               </a:spcAft>
             </a:pPr>
             <a:r>
+              <a:rPr sz="1400" lang="zh-TW" dirty="0">
+                <a:solidFill>
+                  <a:srgbClr val="000000"/>
+                </a:solidFill>
+                <a:latin typeface="Arial Unicode MS"/>
+                <a:ea typeface="Arial Unicode MS"/>
+                <a:cs typeface="Arial Unicode MS"/>
+              </a:rPr>
+              <a:t>兩件事一起看：</a:t>
+            </a:r>
+            <a:r>
               <a:rPr sz="1400" b="1" lang="zh-TW" dirty="0">
                 <a:solidFill>
                   <a:srgbClr val="000000"/>
@@ -3529,7 +3728,7 @@
                 <a:ea typeface="Arial Unicode MS"/>
                 <a:cs typeface="Arial Unicode MS"/>
               </a:rPr>
-              <a:t>黃色是機車和腳踏車</a:t>
+              <a:t>要多報少，就要接受漏得多；要漏得少，就要接受多報。</a:t>
             </a:r>
             <a:r>
               <a:rPr sz="1400" lang="zh-TW" dirty="0">
@@ -3540,7 +3739,7 @@
                 <a:ea typeface="Arial Unicode MS"/>
                 <a:cs typeface="Arial Unicode MS"/>
               </a:rPr>
-              <a:t>，比行人還差：二十到三十公尺就只剩 21%。
+              <a:t>沒有一列兩邊都好。
 </a:t>
             </a:r>
           </a:p>
@@ -3562,51 +3761,7 @@
                 <a:ea typeface="Arial Unicode MS"/>
                 <a:cs typeface="Arial Unicode MS"/>
               </a:rPr>
-              <a:t>為什麼？算一下。一個一點七公尺高的人，用這台相機拍，十公尺外在照片上大約兩百多個像素高；四十五公尺外，</a:t>
-            </a:r>
-            <a:r>
-              <a:rPr sz="1400" b="1" lang="zh-TW" dirty="0">
-                <a:solidFill>
-                  <a:srgbClr val="000000"/>
-                </a:solidFill>
-                <a:latin typeface="Arial Unicode MS"/>
-                <a:ea typeface="Arial Unicode MS"/>
-                <a:cs typeface="Arial Unicode MS"/>
-              </a:rPr>
-              <a:t>只剩四十七個像素</a:t>
-            </a:r>
-            <a:r>
-              <a:rPr sz="1400" lang="zh-TW" dirty="0">
-                <a:solidFill>
-                  <a:srgbClr val="000000"/>
-                </a:solidFill>
-                <a:latin typeface="Arial Unicode MS"/>
-                <a:ea typeface="Arial Unicode MS"/>
-                <a:cs typeface="Arial Unicode MS"/>
-              </a:rPr>
-              <a:t>。而且這個模型為了算得快，會先把照片縮成六百四十個像素寬，大約變成原來的四成，四十七個像素就只剩</a:t>
-            </a:r>
-            <a:r>
-              <a:rPr sz="1400" b="1" lang="zh-TW" dirty="0">
-                <a:solidFill>
-                  <a:srgbClr val="000000"/>
-                </a:solidFill>
-                <a:latin typeface="Arial Unicode MS"/>
-                <a:ea typeface="Arial Unicode MS"/>
-                <a:cs typeface="Arial Unicode MS"/>
-              </a:rPr>
-              <a:t>十九個</a:t>
-            </a:r>
-            <a:r>
-              <a:rPr sz="1400" lang="zh-TW" dirty="0">
-                <a:solidFill>
-                  <a:srgbClr val="000000"/>
-                </a:solidFill>
-                <a:latin typeface="Arial Unicode MS"/>
-                <a:ea typeface="Arial Unicode MS"/>
-                <a:cs typeface="Arial Unicode MS"/>
-              </a:rPr>
-              <a:t>。十九個像素，大概就是一個小指甲那麼大，要認出是人很難。車子大得多，同樣距離還有好幾十個像素，所以還認得出來。
+              <a:t>另外兩個細節。
 </a:t>
             </a:r>
           </a:p>
@@ -3628,7 +3783,7 @@
                 <a:ea typeface="Arial Unicode MS"/>
                 <a:cs typeface="Arial Unicode MS"/>
               </a:rPr>
-              <a:t>就像看遠處的招牌：字愈小，愈難認。
+              <a:t>第一，「對不到標註」不一定都是錯的。上一張商場裡的人就是例子：真的有人，只是官方沒標。所以這一欄是「最多有這麼多個多報」。
 </a:t>
             </a:r>
           </a:p>
@@ -3650,29 +3805,7 @@
                 <a:ea typeface="Arial Unicode MS"/>
                 <a:cs typeface="Arial Unicode MS"/>
               </a:rPr>
-              <a:t>跟上週比一下：上週看的是雷達和光達一遠就稀，今天看到相機的偵測也一樣。</a:t>
-            </a:r>
-            <a:r>
-              <a:rPr sz="1400" b="1" lang="zh-TW" dirty="0">
-                <a:solidFill>
-                  <a:srgbClr val="000000"/>
-                </a:solidFill>
-                <a:latin typeface="Arial Unicode MS"/>
-                <a:ea typeface="Arial Unicode MS"/>
-                <a:cs typeface="Arial Unicode MS"/>
-              </a:rPr>
-              <a:t>每一種都是一遠就變差</a:t>
-            </a:r>
-            <a:r>
-              <a:rPr sz="1400" lang="zh-TW" dirty="0">
-                <a:solidFill>
-                  <a:srgbClr val="000000"/>
-                </a:solidFill>
-                <a:latin typeface="Arial Unicode MS"/>
-                <a:ea typeface="Arial Unicode MS"/>
-                <a:cs typeface="Arial Unicode MS"/>
-              </a:rPr>
-              <a:t>，只是差的方式不一樣。這也是第五週為什麼要算「四十公尺外的機車有幾個點」。</a:t>
+              <a:t>第二，同一個門檻，行人比車差很多，機車、腳踏車更差：門檻 0.3，車 82%、行人 53%、二輪只有 27%。人和機車比車小，下一張會看到，一遠就更明顯。</a:t>
             </a:r>
           </a:p>
         </p:txBody>
@@ -3781,11 +3914,11 @@
                 <a:spcPts val="0"/>
               </a:spcBef>
               <a:spcAft>
-                <a:spcPts val="267"/>
+                <a:spcPts val="233"/>
               </a:spcAft>
             </a:pPr>
             <a:r>
-              <a:rPr sz="1600" b="1" lang="zh-TW" dirty="0">
+              <a:rPr sz="1400" b="1" lang="zh-TW" dirty="0">
                 <a:solidFill>
                   <a:srgbClr val="000000"/>
                 </a:solidFill>
@@ -3796,15 +3929,15 @@
               <a:t>這一張的目的：</a:t>
             </a:r>
             <a:r>
-              <a:rPr sz="1600" lang="zh-TW" dirty="0">
-                <a:solidFill>
-                  <a:srgbClr val="000000"/>
-                </a:solidFill>
-                <a:latin typeface="Arial Unicode MS"/>
-                <a:ea typeface="Arial Unicode MS"/>
-                <a:cs typeface="Arial Unicode MS"/>
-              </a:rPr>
-              <a:t>讓大家知道，同一個模型，晚上就會漏得比較多；這跟上週失效對照表「相機夜間變差」是同一件事。
+              <a:rPr sz="1400" lang="zh-TW" dirty="0">
+                <a:solidFill>
+                  <a:srgbClr val="000000"/>
+                </a:solidFill>
+                <a:latin typeface="Arial Unicode MS"/>
+                <a:ea typeface="Arial Unicode MS"/>
+                <a:cs typeface="Arial Unicode MS"/>
+              </a:rPr>
+              <a:t>讓大家知道，相機的偵測也是一遠就漏，而且人和機車比車掉得快很多。
 </a:t>
             </a:r>
           </a:p>
@@ -3814,41 +3947,19 @@
                 <a:spcPts val="0"/>
               </a:spcBef>
               <a:spcAft>
-                <a:spcPts val="267"/>
+                <a:spcPts val="233"/>
               </a:spcAft>
             </a:pPr>
             <a:r>
-              <a:rPr sz="1600" lang="zh-TW" dirty="0">
-                <a:solidFill>
-                  <a:srgbClr val="000000"/>
-                </a:solidFill>
-                <a:latin typeface="Arial Unicode MS"/>
-                <a:ea typeface="Arial Unicode MS"/>
-                <a:cs typeface="Arial Unicode MS"/>
-              </a:rPr>
-              <a:t>這一張是晚上，新加坡，剛下過雨。框是模型抓到的，</a:t>
-            </a:r>
-            <a:r>
-              <a:rPr sz="1600" b="1" lang="zh-TW" dirty="0">
-                <a:solidFill>
-                  <a:srgbClr val="000000"/>
-                </a:solidFill>
-                <a:latin typeface="Arial Unicode MS"/>
-                <a:ea typeface="Arial Unicode MS"/>
-                <a:cs typeface="Arial Unicode MS"/>
-              </a:rPr>
-              <a:t>白色虛線</a:t>
-            </a:r>
-            <a:r>
-              <a:rPr sz="1600" lang="zh-TW" dirty="0">
-                <a:solidFill>
-                  <a:srgbClr val="000000"/>
-                </a:solidFill>
-                <a:latin typeface="Arial Unicode MS"/>
-                <a:ea typeface="Arial Unicode MS"/>
-                <a:cs typeface="Arial Unicode MS"/>
-              </a:rPr>
-              <a:t>是官方標註有、但模型沒抓到的。
+              <a:rPr sz="1400" lang="zh-TW" dirty="0">
+                <a:solidFill>
+                  <a:srgbClr val="000000"/>
+                </a:solidFill>
+                <a:latin typeface="Arial Unicode MS"/>
+                <a:ea typeface="Arial Unicode MS"/>
+                <a:cs typeface="Arial Unicode MS"/>
+              </a:rPr>
+              <a:t>這張是白天的照片，只算看得到六成以上的物體，門檻 0.3。橫軸是距離，每十公尺一組；柱子是抓到的比例。
 </a:t>
             </a:r>
           </a:p>
@@ -3858,19 +3969,30 @@
                 <a:spcPts val="0"/>
               </a:spcBef>
               <a:spcAft>
-                <a:spcPts val="267"/>
+                <a:spcPts val="233"/>
               </a:spcAft>
             </a:pPr>
             <a:r>
-              <a:rPr sz="1600" lang="zh-TW" dirty="0">
-                <a:solidFill>
-                  <a:srgbClr val="000000"/>
-                </a:solidFill>
-                <a:latin typeface="Arial Unicode MS"/>
-                <a:ea typeface="Arial Unicode MS"/>
-                <a:cs typeface="Arial Unicode MS"/>
-              </a:rPr>
-              <a:t>把全部的夜間照片加起來，十到二十公尺的行人，白天抓到 66%，晚上只有 49%，三個人裡少抓了半個。
+              <a:rPr sz="1400" b="1" lang="zh-TW" dirty="0">
+                <a:solidFill>
+                  <a:srgbClr val="000000"/>
+                </a:solidFill>
+                <a:latin typeface="Arial Unicode MS"/>
+                <a:ea typeface="Arial Unicode MS"/>
+                <a:cs typeface="Arial Unicode MS"/>
+              </a:rPr>
+              <a:t>綠色是車</a:t>
+            </a:r>
+            <a:r>
+              <a:rPr sz="1400" lang="zh-TW" dirty="0">
+                <a:solidFill>
+                  <a:srgbClr val="000000"/>
+                </a:solidFill>
+                <a:latin typeface="Arial Unicode MS"/>
+                <a:ea typeface="Arial Unicode MS"/>
+                <a:cs typeface="Arial Unicode MS"/>
+              </a:rPr>
+              <a:t>：十到二十公尺 94%，到四十到五十公尺還有 83%，掉得很少。最左邊十公尺內只有 64%，我一台一台查過，沒抓到的那十台，全部都是太近、有一部分跑出畫面外面，被邊框切掉的。
 </a:t>
             </a:r>
           </a:p>
@@ -3880,19 +4002,52 @@
                 <a:spcPts val="0"/>
               </a:spcBef>
               <a:spcAft>
-                <a:spcPts val="267"/>
+                <a:spcPts val="233"/>
               </a:spcAft>
             </a:pPr>
             <a:r>
-              <a:rPr sz="1600" lang="zh-TW" dirty="0">
-                <a:solidFill>
-                  <a:srgbClr val="000000"/>
-                </a:solidFill>
-                <a:latin typeface="Arial Unicode MS"/>
-                <a:ea typeface="Arial Unicode MS"/>
-                <a:cs typeface="Arial Unicode MS"/>
-              </a:rPr>
-              <a:t>原因不難想。照片就是那四百多萬個數字。晚上，人身上的數字大多很小、很暗，跟背景差不多；只有被路燈、車燈照到的部分才亮。模型在白天學到的「人的樣子」，到晚上很多都對不上了。
+              <a:rPr sz="1400" b="1" lang="zh-TW" dirty="0">
+                <a:solidFill>
+                  <a:srgbClr val="000000"/>
+                </a:solidFill>
+                <a:latin typeface="Arial Unicode MS"/>
+                <a:ea typeface="Arial Unicode MS"/>
+                <a:cs typeface="Arial Unicode MS"/>
+              </a:rPr>
+              <a:t>紅色是行人</a:t>
+            </a:r>
+            <a:r>
+              <a:rPr sz="1400" lang="zh-TW" dirty="0">
+                <a:solidFill>
+                  <a:srgbClr val="000000"/>
+                </a:solidFill>
+                <a:latin typeface="Arial Unicode MS"/>
+                <a:ea typeface="Arial Unicode MS"/>
+                <a:cs typeface="Arial Unicode MS"/>
+              </a:rPr>
+              <a:t>：十公尺內 82%，然後一路往下：66%、60%、37%，到四十到五十公尺，</a:t>
+            </a:r>
+            <a:r>
+              <a:rPr sz="1400" b="1" lang="zh-TW" dirty="0">
+                <a:solidFill>
+                  <a:srgbClr val="000000"/>
+                </a:solidFill>
+                <a:latin typeface="Arial Unicode MS"/>
+                <a:ea typeface="Arial Unicode MS"/>
+                <a:cs typeface="Arial Unicode MS"/>
+              </a:rPr>
+              <a:t>只剩 3%</a:t>
+            </a:r>
+            <a:r>
+              <a:rPr sz="1400" lang="zh-TW" dirty="0">
+                <a:solidFill>
+                  <a:srgbClr val="000000"/>
+                </a:solidFill>
+                <a:latin typeface="Arial Unicode MS"/>
+                <a:ea typeface="Arial Unicode MS"/>
+                <a:cs typeface="Arial Unicode MS"/>
+              </a:rPr>
+              <a:t>，三十九個人只抓到一個。
 </a:t>
             </a:r>
           </a:p>
@@ -3902,19 +4057,30 @@
                 <a:spcPts val="0"/>
               </a:spcBef>
               <a:spcAft>
-                <a:spcPts val="267"/>
+                <a:spcPts val="233"/>
               </a:spcAft>
             </a:pPr>
             <a:r>
-              <a:rPr sz="1600" lang="zh-TW" dirty="0">
-                <a:solidFill>
-                  <a:srgbClr val="000000"/>
-                </a:solidFill>
-                <a:latin typeface="Arial Unicode MS"/>
-                <a:ea typeface="Arial Unicode MS"/>
-                <a:cs typeface="Arial Unicode MS"/>
-              </a:rPr>
-              <a:t>上週那張失效對照表，「夜間」那一列，相機是三角形，變差。今天是用真的偵測結果，把那個三角形量出來。
+              <a:rPr sz="1400" b="1" lang="zh-TW" dirty="0">
+                <a:solidFill>
+                  <a:srgbClr val="000000"/>
+                </a:solidFill>
+                <a:latin typeface="Arial Unicode MS"/>
+                <a:ea typeface="Arial Unicode MS"/>
+                <a:cs typeface="Arial Unicode MS"/>
+              </a:rPr>
+              <a:t>黃色是機車和腳踏車</a:t>
+            </a:r>
+            <a:r>
+              <a:rPr sz="1400" lang="zh-TW" dirty="0">
+                <a:solidFill>
+                  <a:srgbClr val="000000"/>
+                </a:solidFill>
+                <a:latin typeface="Arial Unicode MS"/>
+                <a:ea typeface="Arial Unicode MS"/>
+                <a:cs typeface="Arial Unicode MS"/>
+              </a:rPr>
+              <a:t>，比行人還差：二十到三十公尺就只剩 21%。
 </a:t>
             </a:r>
           </a:p>
@@ -3924,19 +4090,129 @@
                 <a:spcPts val="0"/>
               </a:spcBef>
               <a:spcAft>
-                <a:spcPts val="267"/>
+                <a:spcPts val="233"/>
               </a:spcAft>
             </a:pPr>
             <a:r>
-              <a:rPr sz="1600" lang="zh-TW" dirty="0">
-                <a:solidFill>
-                  <a:srgbClr val="000000"/>
-                </a:solidFill>
-                <a:latin typeface="Arial Unicode MS"/>
-                <a:ea typeface="Arial Unicode MS"/>
-                <a:cs typeface="Arial Unicode MS"/>
-              </a:rPr>
-              <a:t>那晚上怎麼辦？上週講過：光達自己帶光源，晚上點數不會變少。所以晚上更需要把光達的點和相機的框合起來看，就是下一張。</a:t>
+              <a:rPr sz="1400" lang="zh-TW" dirty="0">
+                <a:solidFill>
+                  <a:srgbClr val="000000"/>
+                </a:solidFill>
+                <a:latin typeface="Arial Unicode MS"/>
+                <a:ea typeface="Arial Unicode MS"/>
+                <a:cs typeface="Arial Unicode MS"/>
+              </a:rPr>
+              <a:t>為什麼？算一下。一個一點七公尺高的人，用這台相機拍，十公尺外在照片上大約兩百多個像素高；四十五公尺外，</a:t>
+            </a:r>
+            <a:r>
+              <a:rPr sz="1400" b="1" lang="zh-TW" dirty="0">
+                <a:solidFill>
+                  <a:srgbClr val="000000"/>
+                </a:solidFill>
+                <a:latin typeface="Arial Unicode MS"/>
+                <a:ea typeface="Arial Unicode MS"/>
+                <a:cs typeface="Arial Unicode MS"/>
+              </a:rPr>
+              <a:t>只剩四十七個像素</a:t>
+            </a:r>
+            <a:r>
+              <a:rPr sz="1400" lang="zh-TW" dirty="0">
+                <a:solidFill>
+                  <a:srgbClr val="000000"/>
+                </a:solidFill>
+                <a:latin typeface="Arial Unicode MS"/>
+                <a:ea typeface="Arial Unicode MS"/>
+                <a:cs typeface="Arial Unicode MS"/>
+              </a:rPr>
+              <a:t>。而且這個模型為了算得快，會先把照片縮成六百四十個像素寬，大約變成原來的四成，四十七個像素就只剩</a:t>
+            </a:r>
+            <a:r>
+              <a:rPr sz="1400" b="1" lang="zh-TW" dirty="0">
+                <a:solidFill>
+                  <a:srgbClr val="000000"/>
+                </a:solidFill>
+                <a:latin typeface="Arial Unicode MS"/>
+                <a:ea typeface="Arial Unicode MS"/>
+                <a:cs typeface="Arial Unicode MS"/>
+              </a:rPr>
+              <a:t>十九個</a:t>
+            </a:r>
+            <a:r>
+              <a:rPr sz="1400" lang="zh-TW" dirty="0">
+                <a:solidFill>
+                  <a:srgbClr val="000000"/>
+                </a:solidFill>
+                <a:latin typeface="Arial Unicode MS"/>
+                <a:ea typeface="Arial Unicode MS"/>
+                <a:cs typeface="Arial Unicode MS"/>
+              </a:rPr>
+              <a:t>。十九個像素，大概就是一個小指甲那麼大，要認出是人很難。車子大得多，同樣距離還有好幾十個像素，所以還認得出來。
+</a:t>
+            </a:r>
+          </a:p>
+          <a:p>
+            <a:pPr algn="l">
+              <a:spcBef>
+                <a:spcPts val="0"/>
+              </a:spcBef>
+              <a:spcAft>
+                <a:spcPts val="233"/>
+              </a:spcAft>
+            </a:pPr>
+            <a:r>
+              <a:rPr sz="1400" lang="zh-TW" dirty="0">
+                <a:solidFill>
+                  <a:srgbClr val="000000"/>
+                </a:solidFill>
+                <a:latin typeface="Arial Unicode MS"/>
+                <a:ea typeface="Arial Unicode MS"/>
+                <a:cs typeface="Arial Unicode MS"/>
+              </a:rPr>
+              <a:t>就像看遠處的招牌：字愈小，愈難認。
+</a:t>
+            </a:r>
+          </a:p>
+          <a:p>
+            <a:pPr algn="l">
+              <a:spcBef>
+                <a:spcPts val="0"/>
+              </a:spcBef>
+              <a:spcAft>
+                <a:spcPts val="233"/>
+              </a:spcAft>
+            </a:pPr>
+            <a:r>
+              <a:rPr sz="1400" lang="zh-TW" dirty="0">
+                <a:solidFill>
+                  <a:srgbClr val="000000"/>
+                </a:solidFill>
+                <a:latin typeface="Arial Unicode MS"/>
+                <a:ea typeface="Arial Unicode MS"/>
+                <a:cs typeface="Arial Unicode MS"/>
+              </a:rPr>
+              <a:t>跟上週比一下：上週看的是雷達和光達一遠就稀，今天看到相機的偵測也一樣。</a:t>
+            </a:r>
+            <a:r>
+              <a:rPr sz="1400" b="1" lang="zh-TW" dirty="0">
+                <a:solidFill>
+                  <a:srgbClr val="000000"/>
+                </a:solidFill>
+                <a:latin typeface="Arial Unicode MS"/>
+                <a:ea typeface="Arial Unicode MS"/>
+                <a:cs typeface="Arial Unicode MS"/>
+              </a:rPr>
+              <a:t>每一種都是一遠就變差</a:t>
+            </a:r>
+            <a:r>
+              <a:rPr sz="1400" lang="zh-TW" dirty="0">
+                <a:solidFill>
+                  <a:srgbClr val="000000"/>
+                </a:solidFill>
+                <a:latin typeface="Arial Unicode MS"/>
+                <a:ea typeface="Arial Unicode MS"/>
+                <a:cs typeface="Arial Unicode MS"/>
+              </a:rPr>
+              <a:t>，只是差的方式不一樣。這也是第五週為什麼要算「四十公尺外的機車有幾個點」。</a:t>
             </a:r>
           </a:p>
         </p:txBody>
@@ -4045,11 +4321,11 @@
                 <a:spcPts val="0"/>
               </a:spcBef>
               <a:spcAft>
-                <a:spcPts val="250"/>
+                <a:spcPts val="267"/>
               </a:spcAft>
             </a:pPr>
             <a:r>
-              <a:rPr sz="1500" b="1" lang="zh-TW" dirty="0">
+              <a:rPr sz="1600" b="1" lang="zh-TW" dirty="0">
                 <a:solidFill>
                   <a:srgbClr val="000000"/>
                 </a:solidFill>
@@ -4060,15 +4336,15 @@
               <a:t>這一張的目的：</a:t>
             </a:r>
             <a:r>
-              <a:rPr sz="1500" lang="zh-TW" dirty="0">
-                <a:solidFill>
-                  <a:srgbClr val="000000"/>
-                </a:solidFill>
-                <a:latin typeface="Arial Unicode MS"/>
-                <a:ea typeface="Arial Unicode MS"/>
-                <a:cs typeface="Arial Unicode MS"/>
-              </a:rPr>
-              <a:t>讓大家知道，照片上的框只知道方向、不知道距離；把光達的點放進框裡，才知道它有多遠。
+              <a:rPr sz="1600" lang="zh-TW" dirty="0">
+                <a:solidFill>
+                  <a:srgbClr val="000000"/>
+                </a:solidFill>
+                <a:latin typeface="Arial Unicode MS"/>
+                <a:ea typeface="Arial Unicode MS"/>
+                <a:cs typeface="Arial Unicode MS"/>
+              </a:rPr>
+              <a:t>讓大家知道，同一個模型，晚上就會漏得比較多；這跟上週失效對照表「相機夜間變差」是同一件事。
 </a:t>
             </a:r>
           </a:p>
@@ -4078,41 +4354,41 @@
                 <a:spcPts val="0"/>
               </a:spcBef>
               <a:spcAft>
-                <a:spcPts val="250"/>
+                <a:spcPts val="267"/>
               </a:spcAft>
             </a:pPr>
             <a:r>
-              <a:rPr sz="1500" lang="zh-TW" dirty="0">
-                <a:solidFill>
-                  <a:srgbClr val="000000"/>
-                </a:solidFill>
-                <a:latin typeface="Arial Unicode MS"/>
-                <a:ea typeface="Arial Unicode MS"/>
-                <a:cs typeface="Arial Unicode MS"/>
-              </a:rPr>
-              <a:t>剛剛說過，偵測器給的框，是</a:t>
-            </a:r>
-            <a:r>
-              <a:rPr sz="1500" b="1" lang="zh-TW" dirty="0">
-                <a:solidFill>
-                  <a:srgbClr val="000000"/>
-                </a:solidFill>
-                <a:latin typeface="Arial Unicode MS"/>
-                <a:ea typeface="Arial Unicode MS"/>
-                <a:cs typeface="Arial Unicode MS"/>
-              </a:rPr>
-              <a:t>照片上</a:t>
-            </a:r>
-            <a:r>
-              <a:rPr sz="1500" lang="zh-TW" dirty="0">
-                <a:solidFill>
-                  <a:srgbClr val="000000"/>
-                </a:solidFill>
-                <a:latin typeface="Arial Unicode MS"/>
-                <a:ea typeface="Arial Unicode MS"/>
-                <a:cs typeface="Arial Unicode MS"/>
-              </a:rPr>
-              <a:t>的框。它知道人在照片的左邊、右邊，可是不知道人離車子三公尺還是三十公尺。開車最需要的，偏偏是距離。
+              <a:rPr sz="1600" lang="zh-TW" dirty="0">
+                <a:solidFill>
+                  <a:srgbClr val="000000"/>
+                </a:solidFill>
+                <a:latin typeface="Arial Unicode MS"/>
+                <a:ea typeface="Arial Unicode MS"/>
+                <a:cs typeface="Arial Unicode MS"/>
+              </a:rPr>
+              <a:t>這一張是晚上，新加坡，剛下過雨。框是模型抓到的，</a:t>
+            </a:r>
+            <a:r>
+              <a:rPr sz="1600" b="1" lang="zh-TW" dirty="0">
+                <a:solidFill>
+                  <a:srgbClr val="000000"/>
+                </a:solidFill>
+                <a:latin typeface="Arial Unicode MS"/>
+                <a:ea typeface="Arial Unicode MS"/>
+                <a:cs typeface="Arial Unicode MS"/>
+              </a:rPr>
+              <a:t>白色虛線</a:t>
+            </a:r>
+            <a:r>
+              <a:rPr sz="1600" lang="zh-TW" dirty="0">
+                <a:solidFill>
+                  <a:srgbClr val="000000"/>
+                </a:solidFill>
+                <a:latin typeface="Arial Unicode MS"/>
+                <a:ea typeface="Arial Unicode MS"/>
+                <a:cs typeface="Arial Unicode MS"/>
+              </a:rPr>
+              <a:t>是官方標註有、但模型沒抓到的。
 </a:t>
             </a:r>
           </a:p>
@@ -4122,41 +4398,19 @@
                 <a:spcPts val="0"/>
               </a:spcBef>
               <a:spcAft>
-                <a:spcPts val="250"/>
+                <a:spcPts val="267"/>
               </a:spcAft>
             </a:pPr>
             <a:r>
-              <a:rPr sz="1500" lang="zh-TW" dirty="0">
-                <a:solidFill>
-                  <a:srgbClr val="000000"/>
-                </a:solidFill>
-                <a:latin typeface="Arial Unicode MS"/>
-                <a:ea typeface="Arial Unicode MS"/>
-                <a:cs typeface="Arial Unicode MS"/>
-              </a:rPr>
-              <a:t>上週講融合的時候，第二堂第四張，把光達的點投到照片上。今天把兩件事接起來：</a:t>
-            </a:r>
-            <a:r>
-              <a:rPr sz="1500" b="1" lang="zh-TW" dirty="0">
-                <a:solidFill>
-                  <a:srgbClr val="000000"/>
-                </a:solidFill>
-                <a:latin typeface="Arial Unicode MS"/>
-                <a:ea typeface="Arial Unicode MS"/>
-                <a:cs typeface="Arial Unicode MS"/>
-              </a:rPr>
-              <a:t>照片負責說「這是人」，光達負責說「多遠」。</a:t>
-            </a:r>
-            <a:r>
-              <a:rPr sz="1500" lang="zh-TW" dirty="0">
-                <a:solidFill>
-                  <a:srgbClr val="000000"/>
-                </a:solidFill>
-                <a:latin typeface="Arial Unicode MS"/>
-                <a:ea typeface="Arial Unicode MS"/>
-                <a:cs typeface="Arial Unicode MS"/>
-              </a:rPr>
-              <a:t>
+              <a:rPr sz="1600" lang="zh-TW" dirty="0">
+                <a:solidFill>
+                  <a:srgbClr val="000000"/>
+                </a:solidFill>
+                <a:latin typeface="Arial Unicode MS"/>
+                <a:ea typeface="Arial Unicode MS"/>
+                <a:cs typeface="Arial Unicode MS"/>
+              </a:rPr>
+              <a:t>把全部的夜間照片加起來，十到二十公尺的行人，白天抓到 66%，晚上只有 49%，三個人裡少抓了半個。
 </a:t>
             </a:r>
           </a:p>
@@ -4166,19 +4420,19 @@
                 <a:spcPts val="0"/>
               </a:spcBef>
               <a:spcAft>
-                <a:spcPts val="250"/>
+                <a:spcPts val="267"/>
               </a:spcAft>
             </a:pPr>
             <a:r>
-              <a:rPr sz="1500" lang="zh-TW" dirty="0">
-                <a:solidFill>
-                  <a:srgbClr val="000000"/>
-                </a:solidFill>
-                <a:latin typeface="Arial Unicode MS"/>
-                <a:ea typeface="Arial Unicode MS"/>
-                <a:cs typeface="Arial Unicode MS"/>
-              </a:rPr>
-              <a:t>看這張圖。框是模型抓的，黃色的點是光達的點，投到照片上。每個框裡都有一些黃點，每一個點都知道自己多遠。
+              <a:rPr sz="1600" lang="zh-TW" dirty="0">
+                <a:solidFill>
+                  <a:srgbClr val="000000"/>
+                </a:solidFill>
+                <a:latin typeface="Arial Unicode MS"/>
+                <a:ea typeface="Arial Unicode MS"/>
+                <a:cs typeface="Arial Unicode MS"/>
+              </a:rPr>
+              <a:t>原因不難想。照片就是那四百多萬個數字。晚上，人身上的數字大多很小、很暗，跟背景差不多；只有被路燈、車燈照到的部分才亮。模型在白天學到的「人的樣子」，到晚上很多都對不上了。
 </a:t>
             </a:r>
           </a:p>
@@ -4188,41 +4442,19 @@
                 <a:spcPts val="0"/>
               </a:spcBef>
               <a:spcAft>
-                <a:spcPts val="250"/>
+                <a:spcPts val="267"/>
               </a:spcAft>
             </a:pPr>
             <a:r>
-              <a:rPr sz="1500" lang="zh-TW" dirty="0">
-                <a:solidFill>
-                  <a:srgbClr val="000000"/>
-                </a:solidFill>
-                <a:latin typeface="Arial Unicode MS"/>
-                <a:ea typeface="Arial Unicode MS"/>
-                <a:cs typeface="Arial Unicode MS"/>
-              </a:rPr>
-              <a:t>可是框裡的點，不一定全部打在那個人身上。框是長方形，人不是，框的角落會有背後的路面、遠處的建築。所以我的算法是：框裡的點，找出</a:t>
-            </a:r>
-            <a:r>
-              <a:rPr sz="1500" b="1" lang="zh-TW" dirty="0">
-                <a:solidFill>
-                  <a:srgbClr val="000000"/>
-                </a:solidFill>
-                <a:latin typeface="Arial Unicode MS"/>
-                <a:ea typeface="Arial Unicode MS"/>
-                <a:cs typeface="Arial Unicode MS"/>
-              </a:rPr>
-              <a:t>最密的那一公尺</a:t>
-            </a:r>
-            <a:r>
-              <a:rPr sz="1500" lang="zh-TW" dirty="0">
-                <a:solidFill>
-                  <a:srgbClr val="000000"/>
-                </a:solidFill>
-                <a:latin typeface="Arial Unicode MS"/>
-                <a:ea typeface="Arial Unicode MS"/>
-                <a:cs typeface="Arial Unicode MS"/>
-              </a:rPr>
-              <a:t>，取它的中間值。
+              <a:rPr sz="1600" lang="zh-TW" dirty="0">
+                <a:solidFill>
+                  <a:srgbClr val="000000"/>
+                </a:solidFill>
+                <a:latin typeface="Arial Unicode MS"/>
+                <a:ea typeface="Arial Unicode MS"/>
+                <a:cs typeface="Arial Unicode MS"/>
+              </a:rPr>
+              <a:t>上週那張失效對照表，「夜間」那一列，相機是三角形，變差。今天是用真的偵測結果，把那個三角形量出來。
 </a:t>
             </a:r>
           </a:p>
@@ -4232,41 +4464,19 @@
                 <a:spcPts val="0"/>
               </a:spcBef>
               <a:spcAft>
-                <a:spcPts val="250"/>
+                <a:spcPts val="267"/>
               </a:spcAft>
             </a:pPr>
             <a:r>
-              <a:rPr sz="1500" lang="zh-TW" dirty="0">
-                <a:solidFill>
-                  <a:srgbClr val="000000"/>
-                </a:solidFill>
-                <a:latin typeface="Arial Unicode MS"/>
-                <a:ea typeface="Arial Unicode MS"/>
-                <a:cs typeface="Arial Unicode MS"/>
-              </a:rPr>
-              <a:t>結果：五個人分別是 8.9、7.9、10.0、10.1、9.3 公尺；官方標註這幾個人在 8.0 到 10.2 公尺之間，差不到一公尺。後面那台車，算出來 21.4 公尺，官方 22.0。
-</a:t>
-            </a:r>
-          </a:p>
-          <a:p>
-            <a:pPr algn="l">
-              <a:spcBef>
-                <a:spcPts val="0"/>
-              </a:spcBef>
-              <a:spcAft>
-                <a:spcPts val="250"/>
-              </a:spcAft>
-            </a:pPr>
-            <a:r>
-              <a:rPr sz="1500" lang="zh-TW" dirty="0">
-                <a:solidFill>
-                  <a:srgbClr val="000000"/>
-                </a:solidFill>
-                <a:latin typeface="Arial Unicode MS"/>
-                <a:ea typeface="Arial Unicode MS"/>
-                <a:cs typeface="Arial Unicode MS"/>
-              </a:rPr>
-              <a:t>這就是上週講的相機加光達：相機認得出是什麼，光達量得出多遠。合起來，才是開車用得上的資訊。</a:t>
+              <a:rPr sz="1600" lang="zh-TW" dirty="0">
+                <a:solidFill>
+                  <a:srgbClr val="000000"/>
+                </a:solidFill>
+                <a:latin typeface="Arial Unicode MS"/>
+                <a:ea typeface="Arial Unicode MS"/>
+                <a:cs typeface="Arial Unicode MS"/>
+              </a:rPr>
+              <a:t>那晚上怎麼辦？上週講過：光達自己帶光源，晚上點數不會變少。所以晚上更需要把光達的點和相機的框合起來看，就是下一張。</a:t>
             </a:r>
           </a:p>
         </p:txBody>
@@ -4738,11 +4948,11 @@
                 <a:spcPts val="0"/>
               </a:spcBef>
               <a:spcAft>
-                <a:spcPts val="267"/>
+                <a:spcPts val="250"/>
               </a:spcAft>
             </a:pPr>
             <a:r>
-              <a:rPr sz="1600" b="1" lang="zh-TW" dirty="0">
+              <a:rPr sz="1500" b="1" lang="zh-TW" dirty="0">
                 <a:solidFill>
                   <a:srgbClr val="000000"/>
                 </a:solidFill>
@@ -4753,15 +4963,15 @@
               <a:t>這一張的目的：</a:t>
             </a:r>
             <a:r>
-              <a:rPr sz="1600" lang="zh-TW" dirty="0">
-                <a:solidFill>
-                  <a:srgbClr val="000000"/>
-                </a:solidFill>
-                <a:latin typeface="Arial Unicode MS"/>
-                <a:ea typeface="Arial Unicode MS"/>
-                <a:cs typeface="Arial Unicode MS"/>
-              </a:rPr>
-              <a:t>讓大家分清楚平面的框和立體的框，自駕車做決定要的是立體框。
+              <a:rPr sz="1500" lang="zh-TW" dirty="0">
+                <a:solidFill>
+                  <a:srgbClr val="000000"/>
+                </a:solidFill>
+                <a:latin typeface="Arial Unicode MS"/>
+                <a:ea typeface="Arial Unicode MS"/>
+                <a:cs typeface="Arial Unicode MS"/>
+              </a:rPr>
+              <a:t>讓大家知道，照片上的框只知道方向、不知道距離；把光達的點放進框裡，才知道它有多遠。
 </a:t>
             </a:r>
           </a:p>
@@ -4771,41 +4981,41 @@
                 <a:spcPts val="0"/>
               </a:spcBef>
               <a:spcAft>
-                <a:spcPts val="267"/>
+                <a:spcPts val="250"/>
               </a:spcAft>
             </a:pPr>
             <a:r>
-              <a:rPr sz="1600" lang="zh-TW" dirty="0">
-                <a:solidFill>
-                  <a:srgbClr val="000000"/>
-                </a:solidFill>
-                <a:latin typeface="Arial Unicode MS"/>
-                <a:ea typeface="Arial Unicode MS"/>
-                <a:cs typeface="Arial Unicode MS"/>
-              </a:rPr>
-              <a:t>這張是同一個路口，畫的是 nuScenes 官方標註的</a:t>
-            </a:r>
-            <a:r>
-              <a:rPr sz="1600" b="1" lang="zh-TW" dirty="0">
-                <a:solidFill>
-                  <a:srgbClr val="000000"/>
-                </a:solidFill>
-                <a:latin typeface="Arial Unicode MS"/>
-                <a:ea typeface="Arial Unicode MS"/>
-                <a:cs typeface="Arial Unicode MS"/>
-              </a:rPr>
-              <a:t>立體框</a:t>
-            </a:r>
-            <a:r>
-              <a:rPr sz="1600" lang="zh-TW" dirty="0">
-                <a:solidFill>
-                  <a:srgbClr val="000000"/>
-                </a:solidFill>
-                <a:latin typeface="Arial Unicode MS"/>
-                <a:ea typeface="Arial Unicode MS"/>
-                <a:cs typeface="Arial Unicode MS"/>
-              </a:rPr>
-              <a:t>，投到照片上看。每個人被一個長方體包起來。
+              <a:rPr sz="1500" lang="zh-TW" dirty="0">
+                <a:solidFill>
+                  <a:srgbClr val="000000"/>
+                </a:solidFill>
+                <a:latin typeface="Arial Unicode MS"/>
+                <a:ea typeface="Arial Unicode MS"/>
+                <a:cs typeface="Arial Unicode MS"/>
+              </a:rPr>
+              <a:t>剛剛說過，偵測器給的框，是</a:t>
+            </a:r>
+            <a:r>
+              <a:rPr sz="1500" b="1" lang="zh-TW" dirty="0">
+                <a:solidFill>
+                  <a:srgbClr val="000000"/>
+                </a:solidFill>
+                <a:latin typeface="Arial Unicode MS"/>
+                <a:ea typeface="Arial Unicode MS"/>
+                <a:cs typeface="Arial Unicode MS"/>
+              </a:rPr>
+              <a:t>照片上</a:t>
+            </a:r>
+            <a:r>
+              <a:rPr sz="1500" lang="zh-TW" dirty="0">
+                <a:solidFill>
+                  <a:srgbClr val="000000"/>
+                </a:solidFill>
+                <a:latin typeface="Arial Unicode MS"/>
+                <a:ea typeface="Arial Unicode MS"/>
+                <a:cs typeface="Arial Unicode MS"/>
+              </a:rPr>
+              <a:t>的框。它知道人在照片的左邊、右邊，可是不知道人離車子三公尺還是三十公尺。開車最需要的，偏偏是距離。
 </a:t>
             </a:r>
           </a:p>
@@ -4815,85 +5025,41 @@
                 <a:spcPts val="0"/>
               </a:spcBef>
               <a:spcAft>
-                <a:spcPts val="267"/>
+                <a:spcPts val="250"/>
               </a:spcAft>
             </a:pPr>
             <a:r>
-              <a:rPr sz="1600" lang="zh-TW" dirty="0">
-                <a:solidFill>
-                  <a:srgbClr val="000000"/>
-                </a:solidFill>
-                <a:latin typeface="Arial Unicode MS"/>
-                <a:ea typeface="Arial Unicode MS"/>
-                <a:cs typeface="Arial Unicode MS"/>
-              </a:rPr>
-              <a:t>上週第三節講過，官方每個框記了七個數字：</a:t>
-            </a:r>
-            <a:r>
-              <a:rPr sz="1600" b="1" lang="zh-TW" dirty="0">
-                <a:solidFill>
-                  <a:srgbClr val="000000"/>
-                </a:solidFill>
-                <a:latin typeface="Arial Unicode MS"/>
-                <a:ea typeface="Arial Unicode MS"/>
-                <a:cs typeface="Arial Unicode MS"/>
-              </a:rPr>
-              <a:t>位置</a:t>
-            </a:r>
-            <a:r>
-              <a:rPr sz="1600" lang="zh-TW" dirty="0">
-                <a:solidFill>
-                  <a:srgbClr val="000000"/>
-                </a:solidFill>
-                <a:latin typeface="Arial Unicode MS"/>
-                <a:ea typeface="Arial Unicode MS"/>
-                <a:cs typeface="Arial Unicode MS"/>
-              </a:rPr>
-              <a:t>三個，前後、左右、高低；</a:t>
-            </a:r>
-            <a:r>
-              <a:rPr sz="1600" b="1" lang="zh-TW" dirty="0">
-                <a:solidFill>
-                  <a:srgbClr val="000000"/>
-                </a:solidFill>
-                <a:latin typeface="Arial Unicode MS"/>
-                <a:ea typeface="Arial Unicode MS"/>
-                <a:cs typeface="Arial Unicode MS"/>
-              </a:rPr>
-              <a:t>大小</a:t>
-            </a:r>
-            <a:r>
-              <a:rPr sz="1600" lang="zh-TW" dirty="0">
-                <a:solidFill>
-                  <a:srgbClr val="000000"/>
-                </a:solidFill>
-                <a:latin typeface="Arial Unicode MS"/>
-                <a:ea typeface="Arial Unicode MS"/>
-                <a:cs typeface="Arial Unicode MS"/>
-              </a:rPr>
-              <a:t>三個，長、寬、高；還有一個</a:t>
-            </a:r>
-            <a:r>
-              <a:rPr sz="1600" b="1" lang="zh-TW" dirty="0">
-                <a:solidFill>
-                  <a:srgbClr val="000000"/>
-                </a:solidFill>
-                <a:latin typeface="Arial Unicode MS"/>
-                <a:ea typeface="Arial Unicode MS"/>
-                <a:cs typeface="Arial Unicode MS"/>
-              </a:rPr>
-              <a:t>朝向</a:t>
-            </a:r>
-            <a:r>
-              <a:rPr sz="1600" lang="zh-TW" dirty="0">
-                <a:solidFill>
-                  <a:srgbClr val="000000"/>
-                </a:solidFill>
-                <a:latin typeface="Arial Unicode MS"/>
-                <a:ea typeface="Arial Unicode MS"/>
-                <a:cs typeface="Arial Unicode MS"/>
-              </a:rPr>
-              <a:t>，車頭朝哪邊。圖上白色那一面，就是物體的正面。
+              <a:rPr sz="1500" lang="zh-TW" dirty="0">
+                <a:solidFill>
+                  <a:srgbClr val="000000"/>
+                </a:solidFill>
+                <a:latin typeface="Arial Unicode MS"/>
+                <a:ea typeface="Arial Unicode MS"/>
+                <a:cs typeface="Arial Unicode MS"/>
+              </a:rPr>
+              <a:t>上週講融合的時候，第二堂第四張，把光達的點投到照片上。今天把兩件事接起來：</a:t>
+            </a:r>
+            <a:r>
+              <a:rPr sz="1500" b="1" lang="zh-TW" dirty="0">
+                <a:solidFill>
+                  <a:srgbClr val="000000"/>
+                </a:solidFill>
+                <a:latin typeface="Arial Unicode MS"/>
+                <a:ea typeface="Arial Unicode MS"/>
+                <a:cs typeface="Arial Unicode MS"/>
+              </a:rPr>
+              <a:t>照片負責說「這是人」，光達負責說「多遠」。</a:t>
+            </a:r>
+            <a:r>
+              <a:rPr sz="1500" lang="zh-TW" dirty="0">
+                <a:solidFill>
+                  <a:srgbClr val="000000"/>
+                </a:solidFill>
+                <a:latin typeface="Arial Unicode MS"/>
+                <a:ea typeface="Arial Unicode MS"/>
+                <a:cs typeface="Arial Unicode MS"/>
+              </a:rPr>
+              <a:t>
 </a:t>
             </a:r>
           </a:p>
@@ -4903,19 +5069,19 @@
                 <a:spcPts val="0"/>
               </a:spcBef>
               <a:spcAft>
-                <a:spcPts val="267"/>
+                <a:spcPts val="250"/>
               </a:spcAft>
             </a:pPr>
             <a:r>
-              <a:rPr sz="1600" lang="zh-TW" dirty="0">
-                <a:solidFill>
-                  <a:srgbClr val="000000"/>
-                </a:solidFill>
-                <a:latin typeface="Arial Unicode MS"/>
-                <a:ea typeface="Arial Unicode MS"/>
-                <a:cs typeface="Arial Unicode MS"/>
-              </a:rPr>
-              <a:t>為什麼自駕車要立體框？因為它要做的決定都是在真的路上：那個人離我幾公尺、他往哪個方向走、我要不要讓。平面框只能說「在照片右下角」，回答不了這些。
+              <a:rPr sz="1500" lang="zh-TW" dirty="0">
+                <a:solidFill>
+                  <a:srgbClr val="000000"/>
+                </a:solidFill>
+                <a:latin typeface="Arial Unicode MS"/>
+                <a:ea typeface="Arial Unicode MS"/>
+                <a:cs typeface="Arial Unicode MS"/>
+              </a:rPr>
+              <a:t>看這張圖。框是模型抓的，黃色的點是光達的點，投到照片上。每個框裡都有一些黃點，每一個點都知道自己多遠。
 </a:t>
             </a:r>
           </a:p>
@@ -4925,19 +5091,41 @@
                 <a:spcPts val="0"/>
               </a:spcBef>
               <a:spcAft>
-                <a:spcPts val="267"/>
+                <a:spcPts val="250"/>
               </a:spcAft>
             </a:pPr>
             <a:r>
-              <a:rPr sz="1600" lang="zh-TW" dirty="0">
-                <a:solidFill>
-                  <a:srgbClr val="000000"/>
-                </a:solidFill>
-                <a:latin typeface="Arial Unicode MS"/>
-                <a:ea typeface="Arial Unicode MS"/>
-                <a:cs typeface="Arial Unicode MS"/>
-              </a:rPr>
-              <a:t>那立體框怎麼來？兩種做法。第一種就是上一張：照片的框加上光達的點，把它「撐」成立體的。第二種是直接拿光達的點雲去找，光達的點本來就是立體的，有現成的模型專門做這件事，例如 nuScenes 那家公司自己做的 PointPillars，把點雲切成一根一根柱子來看。
+              <a:rPr sz="1500" lang="zh-TW" dirty="0">
+                <a:solidFill>
+                  <a:srgbClr val="000000"/>
+                </a:solidFill>
+                <a:latin typeface="Arial Unicode MS"/>
+                <a:ea typeface="Arial Unicode MS"/>
+                <a:cs typeface="Arial Unicode MS"/>
+              </a:rPr>
+              <a:t>可是框裡的點，不一定全部打在那個人身上。框是長方形，人不是，框的角落會有背後的路面、遠處的建築。所以我的算法是：框裡的點，找出</a:t>
+            </a:r>
+            <a:r>
+              <a:rPr sz="1500" b="1" lang="zh-TW" dirty="0">
+                <a:solidFill>
+                  <a:srgbClr val="000000"/>
+                </a:solidFill>
+                <a:latin typeface="Arial Unicode MS"/>
+                <a:ea typeface="Arial Unicode MS"/>
+                <a:cs typeface="Arial Unicode MS"/>
+              </a:rPr>
+              <a:t>最密的那一公尺</a:t>
+            </a:r>
+            <a:r>
+              <a:rPr sz="1500" lang="zh-TW" dirty="0">
+                <a:solidFill>
+                  <a:srgbClr val="000000"/>
+                </a:solidFill>
+                <a:latin typeface="Arial Unicode MS"/>
+                <a:ea typeface="Arial Unicode MS"/>
+                <a:cs typeface="Arial Unicode MS"/>
+              </a:rPr>
+              <a:t>，取它的中間值。
 </a:t>
             </a:r>
           </a:p>
@@ -4947,19 +5135,41 @@
                 <a:spcPts val="0"/>
               </a:spcBef>
               <a:spcAft>
-                <a:spcPts val="267"/>
+                <a:spcPts val="250"/>
               </a:spcAft>
             </a:pPr>
             <a:r>
-              <a:rPr sz="1600" lang="zh-TW" dirty="0">
-                <a:solidFill>
-                  <a:srgbClr val="000000"/>
-                </a:solidFill>
-                <a:latin typeface="Arial Unicode MS"/>
-                <a:ea typeface="Arial Unicode MS"/>
-                <a:cs typeface="Arial Unicode MS"/>
-              </a:rPr>
-              <a:t>下一張，我們把這些立體框從上往下看。</a:t>
+              <a:rPr sz="1500" lang="zh-TW" dirty="0">
+                <a:solidFill>
+                  <a:srgbClr val="000000"/>
+                </a:solidFill>
+                <a:latin typeface="Arial Unicode MS"/>
+                <a:ea typeface="Arial Unicode MS"/>
+                <a:cs typeface="Arial Unicode MS"/>
+              </a:rPr>
+              <a:t>結果：五個人分別是 8.9、7.9、10.0、10.1、9.3 公尺；官方標註這幾個人在 8.0 到 10.2 公尺之間，差不到一公尺。後面那台車，算出來 21.4 公尺，官方 22.0。
+</a:t>
+            </a:r>
+          </a:p>
+          <a:p>
+            <a:pPr algn="l">
+              <a:spcBef>
+                <a:spcPts val="0"/>
+              </a:spcBef>
+              <a:spcAft>
+                <a:spcPts val="250"/>
+              </a:spcAft>
+            </a:pPr>
+            <a:r>
+              <a:rPr sz="1500" lang="zh-TW" dirty="0">
+                <a:solidFill>
+                  <a:srgbClr val="000000"/>
+                </a:solidFill>
+                <a:latin typeface="Arial Unicode MS"/>
+                <a:ea typeface="Arial Unicode MS"/>
+                <a:cs typeface="Arial Unicode MS"/>
+              </a:rPr>
+              <a:t>這就是上週講的相機加光達：相機認得出是什麼，光達量得出多遠。合起來，才是開車用得上的資訊。</a:t>
             </a:r>
           </a:p>
         </p:txBody>
@@ -5068,11 +5278,11 @@
                 <a:spcPts val="0"/>
               </a:spcBef>
               <a:spcAft>
-                <a:spcPts val="225"/>
+                <a:spcPts val="267"/>
               </a:spcAft>
             </a:pPr>
             <a:r>
-              <a:rPr sz="1350" b="1" lang="zh-TW" dirty="0">
+              <a:rPr sz="1600" b="1" lang="zh-TW" dirty="0">
                 <a:solidFill>
                   <a:srgbClr val="000000"/>
                 </a:solidFill>
@@ -5083,15 +5293,15 @@
               <a:t>這一張的目的：</a:t>
             </a:r>
             <a:r>
-              <a:rPr sz="1350" lang="zh-TW" dirty="0">
-                <a:solidFill>
-                  <a:srgbClr val="000000"/>
-                </a:solidFill>
-                <a:latin typeface="Arial Unicode MS"/>
-                <a:ea typeface="Arial Unicode MS"/>
-                <a:cs typeface="Arial Unicode MS"/>
-              </a:rPr>
-              <a:t>讓大家知道為什麼自駕車喜歡「從上往下看」，以及佔據網格在做什麼：不用認出是什麼，也知道哪裡不能開。
+              <a:rPr sz="1600" lang="zh-TW" dirty="0">
+                <a:solidFill>
+                  <a:srgbClr val="000000"/>
+                </a:solidFill>
+                <a:latin typeface="Arial Unicode MS"/>
+                <a:ea typeface="Arial Unicode MS"/>
+                <a:cs typeface="Arial Unicode MS"/>
+              </a:rPr>
+              <a:t>讓大家分清楚平面的框和立體的框，自駕車做決定要的是立體框。
 </a:t>
             </a:r>
           </a:p>
@@ -5101,30 +5311,41 @@
                 <a:spcPts val="0"/>
               </a:spcBef>
               <a:spcAft>
-                <a:spcPts val="225"/>
+                <a:spcPts val="267"/>
               </a:spcAft>
             </a:pPr>
             <a:r>
-              <a:rPr sz="1350" b="1" lang="zh-TW" dirty="0">
-                <a:solidFill>
-                  <a:srgbClr val="000000"/>
-                </a:solidFill>
-                <a:latin typeface="Arial Unicode MS"/>
-                <a:ea typeface="Arial Unicode MS"/>
-                <a:cs typeface="Arial Unicode MS"/>
-              </a:rPr>
-              <a:t>左邊是鳥瞰圖</a:t>
-            </a:r>
-            <a:r>
-              <a:rPr sz="1350" lang="zh-TW" dirty="0">
-                <a:solidFill>
-                  <a:srgbClr val="000000"/>
-                </a:solidFill>
-                <a:latin typeface="Arial Unicode MS"/>
-                <a:ea typeface="Arial Unicode MS"/>
-                <a:cs typeface="Arial Unicode MS"/>
-              </a:rPr>
-              <a:t>，波士頓的一條街。自己的車在正中間，車頭朝上，前後左右各三十公尺。灰色的點是光達，綠色長方形是車，紅色小方塊是人。
+              <a:rPr sz="1600" lang="zh-TW" dirty="0">
+                <a:solidFill>
+                  <a:srgbClr val="000000"/>
+                </a:solidFill>
+                <a:latin typeface="Arial Unicode MS"/>
+                <a:ea typeface="Arial Unicode MS"/>
+                <a:cs typeface="Arial Unicode MS"/>
+              </a:rPr>
+              <a:t>這張是同一個路口，畫的是 nuScenes 官方標註的</a:t>
+            </a:r>
+            <a:r>
+              <a:rPr sz="1600" b="1" lang="zh-TW" dirty="0">
+                <a:solidFill>
+                  <a:srgbClr val="000000"/>
+                </a:solidFill>
+                <a:latin typeface="Arial Unicode MS"/>
+                <a:ea typeface="Arial Unicode MS"/>
+                <a:cs typeface="Arial Unicode MS"/>
+              </a:rPr>
+              <a:t>立體框</a:t>
+            </a:r>
+            <a:r>
+              <a:rPr sz="1600" lang="zh-TW" dirty="0">
+                <a:solidFill>
+                  <a:srgbClr val="000000"/>
+                </a:solidFill>
+                <a:latin typeface="Arial Unicode MS"/>
+                <a:ea typeface="Arial Unicode MS"/>
+                <a:cs typeface="Arial Unicode MS"/>
+              </a:rPr>
+              <a:t>，投到照片上看。每個人被一個長方體包起來。
 </a:t>
             </a:r>
           </a:p>
@@ -5134,85 +5355,85 @@
                 <a:spcPts val="0"/>
               </a:spcBef>
               <a:spcAft>
-                <a:spcPts val="225"/>
+                <a:spcPts val="267"/>
               </a:spcAft>
             </a:pPr>
             <a:r>
-              <a:rPr sz="1350" lang="zh-TW" dirty="0">
-                <a:solidFill>
-                  <a:srgbClr val="000000"/>
-                </a:solidFill>
-                <a:latin typeface="Arial Unicode MS"/>
-                <a:ea typeface="Arial Unicode MS"/>
-                <a:cs typeface="Arial Unicode MS"/>
-              </a:rPr>
-              <a:t>為什麼要從上往下看？三個原因。第一，</a:t>
-            </a:r>
-            <a:r>
-              <a:rPr sz="1350" b="1" lang="zh-TW" dirty="0">
-                <a:solidFill>
-                  <a:srgbClr val="000000"/>
-                </a:solidFill>
-                <a:latin typeface="Arial Unicode MS"/>
-                <a:ea typeface="Arial Unicode MS"/>
-                <a:cs typeface="Arial Unicode MS"/>
-              </a:rPr>
-              <a:t>不會互相擋</a:t>
-            </a:r>
-            <a:r>
-              <a:rPr sz="1350" lang="zh-TW" dirty="0">
-                <a:solidFill>
-                  <a:srgbClr val="000000"/>
-                </a:solidFill>
-                <a:latin typeface="Arial Unicode MS"/>
-                <a:ea typeface="Arial Unicode MS"/>
-                <a:cs typeface="Arial Unicode MS"/>
-              </a:rPr>
-              <a:t>：照片上，前面的車會擋住後面的車；從上面看，每台車各佔一塊地。第二，</a:t>
-            </a:r>
-            <a:r>
-              <a:rPr sz="1350" b="1" lang="zh-TW" dirty="0">
-                <a:solidFill>
-                  <a:srgbClr val="000000"/>
-                </a:solidFill>
-                <a:latin typeface="Arial Unicode MS"/>
-                <a:ea typeface="Arial Unicode MS"/>
-                <a:cs typeface="Arial Unicode MS"/>
-              </a:rPr>
-              <a:t>距離不會變形</a:t>
-            </a:r>
-            <a:r>
-              <a:rPr sz="1350" lang="zh-TW" dirty="0">
-                <a:solidFill>
-                  <a:srgbClr val="000000"/>
-                </a:solidFill>
-                <a:latin typeface="Arial Unicode MS"/>
-                <a:ea typeface="Arial Unicode MS"/>
-                <a:cs typeface="Arial Unicode MS"/>
-              </a:rPr>
-              <a:t>：照片上近的東西大、遠的東西小；鳥瞰圖上，一公尺就是一公尺。第三，</a:t>
-            </a:r>
-            <a:r>
-              <a:rPr sz="1350" b="1" lang="zh-TW" dirty="0">
-                <a:solidFill>
-                  <a:srgbClr val="000000"/>
-                </a:solidFill>
-                <a:latin typeface="Arial Unicode MS"/>
-                <a:ea typeface="Arial Unicode MS"/>
-                <a:cs typeface="Arial Unicode MS"/>
-              </a:rPr>
-              <a:t>開車本來就是在地面上做決定</a:t>
-            </a:r>
-            <a:r>
-              <a:rPr sz="1350" lang="zh-TW" dirty="0">
-                <a:solidFill>
-                  <a:srgbClr val="000000"/>
-                </a:solidFill>
-                <a:latin typeface="Arial Unicode MS"/>
-                <a:ea typeface="Arial Unicode MS"/>
-                <a:cs typeface="Arial Unicode MS"/>
-              </a:rPr>
-              <a:t>：往左還是往右、停在哪裡，都是平面上的事。上週講的中期融合，就是把相機、光達都先畫成同一張鳥瞰圖。
+              <a:rPr sz="1600" lang="zh-TW" dirty="0">
+                <a:solidFill>
+                  <a:srgbClr val="000000"/>
+                </a:solidFill>
+                <a:latin typeface="Arial Unicode MS"/>
+                <a:ea typeface="Arial Unicode MS"/>
+                <a:cs typeface="Arial Unicode MS"/>
+              </a:rPr>
+              <a:t>上週第三節講過，官方每個框記了七個數字：</a:t>
+            </a:r>
+            <a:r>
+              <a:rPr sz="1600" b="1" lang="zh-TW" dirty="0">
+                <a:solidFill>
+                  <a:srgbClr val="000000"/>
+                </a:solidFill>
+                <a:latin typeface="Arial Unicode MS"/>
+                <a:ea typeface="Arial Unicode MS"/>
+                <a:cs typeface="Arial Unicode MS"/>
+              </a:rPr>
+              <a:t>位置</a:t>
+            </a:r>
+            <a:r>
+              <a:rPr sz="1600" lang="zh-TW" dirty="0">
+                <a:solidFill>
+                  <a:srgbClr val="000000"/>
+                </a:solidFill>
+                <a:latin typeface="Arial Unicode MS"/>
+                <a:ea typeface="Arial Unicode MS"/>
+                <a:cs typeface="Arial Unicode MS"/>
+              </a:rPr>
+              <a:t>三個，前後、左右、高低；</a:t>
+            </a:r>
+            <a:r>
+              <a:rPr sz="1600" b="1" lang="zh-TW" dirty="0">
+                <a:solidFill>
+                  <a:srgbClr val="000000"/>
+                </a:solidFill>
+                <a:latin typeface="Arial Unicode MS"/>
+                <a:ea typeface="Arial Unicode MS"/>
+                <a:cs typeface="Arial Unicode MS"/>
+              </a:rPr>
+              <a:t>大小</a:t>
+            </a:r>
+            <a:r>
+              <a:rPr sz="1600" lang="zh-TW" dirty="0">
+                <a:solidFill>
+                  <a:srgbClr val="000000"/>
+                </a:solidFill>
+                <a:latin typeface="Arial Unicode MS"/>
+                <a:ea typeface="Arial Unicode MS"/>
+                <a:cs typeface="Arial Unicode MS"/>
+              </a:rPr>
+              <a:t>三個，長、寬、高；還有一個</a:t>
+            </a:r>
+            <a:r>
+              <a:rPr sz="1600" b="1" lang="zh-TW" dirty="0">
+                <a:solidFill>
+                  <a:srgbClr val="000000"/>
+                </a:solidFill>
+                <a:latin typeface="Arial Unicode MS"/>
+                <a:ea typeface="Arial Unicode MS"/>
+                <a:cs typeface="Arial Unicode MS"/>
+              </a:rPr>
+              <a:t>朝向</a:t>
+            </a:r>
+            <a:r>
+              <a:rPr sz="1600" lang="zh-TW" dirty="0">
+                <a:solidFill>
+                  <a:srgbClr val="000000"/>
+                </a:solidFill>
+                <a:latin typeface="Arial Unicode MS"/>
+                <a:ea typeface="Arial Unicode MS"/>
+                <a:cs typeface="Arial Unicode MS"/>
+              </a:rPr>
+              <a:t>，車頭朝哪邊。圖上白色那一面，就是物體的正面。
 </a:t>
             </a:r>
           </a:p>
@@ -5222,30 +5443,19 @@
                 <a:spcPts val="0"/>
               </a:spcBef>
               <a:spcAft>
-                <a:spcPts val="225"/>
+                <a:spcPts val="267"/>
               </a:spcAft>
             </a:pPr>
             <a:r>
-              <a:rPr sz="1350" b="1" lang="zh-TW" dirty="0">
-                <a:solidFill>
-                  <a:srgbClr val="000000"/>
-                </a:solidFill>
-                <a:latin typeface="Arial Unicode MS"/>
-                <a:ea typeface="Arial Unicode MS"/>
-                <a:cs typeface="Arial Unicode MS"/>
-              </a:rPr>
-              <a:t>右邊是佔據網格</a:t>
-            </a:r>
-            <a:r>
-              <a:rPr sz="1350" lang="zh-TW" dirty="0">
-                <a:solidFill>
-                  <a:srgbClr val="000000"/>
-                </a:solidFill>
-                <a:latin typeface="Arial Unicode MS"/>
-                <a:ea typeface="Arial Unicode MS"/>
-                <a:cs typeface="Arial Unicode MS"/>
-              </a:rPr>
-              <a:t>，用同一格光達算的。把地面切成一格一格，每格半公尺。每一格只問一件事：
+              <a:rPr sz="1600" lang="zh-TW" dirty="0">
+                <a:solidFill>
+                  <a:srgbClr val="000000"/>
+                </a:solidFill>
+                <a:latin typeface="Arial Unicode MS"/>
+                <a:ea typeface="Arial Unicode MS"/>
+                <a:cs typeface="Arial Unicode MS"/>
+              </a:rPr>
+              <a:t>為什麼自駕車要立體框？因為它要做的決定都是在真的路上：那個人離我幾公尺、他往哪個方向走、我要不要讓。平面框只能說「在照片右下角」，回答不了這些。
 </a:t>
             </a:r>
           </a:p>
@@ -5255,74 +5465,19 @@
                 <a:spcPts val="0"/>
               </a:spcBef>
               <a:spcAft>
-                <a:spcPts val="225"/>
+                <a:spcPts val="267"/>
               </a:spcAft>
             </a:pPr>
             <a:r>
-              <a:rPr sz="1350" b="1" lang="zh-TW" dirty="0">
-                <a:solidFill>
-                  <a:srgbClr val="000000"/>
-                </a:solidFill>
-                <a:latin typeface="Arial Unicode MS"/>
-                <a:ea typeface="Arial Unicode MS"/>
-                <a:cs typeface="Arial Unicode MS"/>
-              </a:rPr>
-              <a:t>紅色，有東西</a:t>
-            </a:r>
-            <a:r>
-              <a:rPr sz="1350" lang="zh-TW" dirty="0">
-                <a:solidFill>
-                  <a:srgbClr val="000000"/>
-                </a:solidFill>
-                <a:latin typeface="Arial Unicode MS"/>
-                <a:ea typeface="Arial Unicode MS"/>
-                <a:cs typeface="Arial Unicode MS"/>
-              </a:rPr>
-              <a:t>：這一格有高出地面的點。</a:t>
-            </a:r>
-            <a:r>
-              <a:rPr sz="1350" b="1" lang="zh-TW" dirty="0">
-                <a:solidFill>
-                  <a:srgbClr val="000000"/>
-                </a:solidFill>
-                <a:latin typeface="Arial Unicode MS"/>
-                <a:ea typeface="Arial Unicode MS"/>
-                <a:cs typeface="Arial Unicode MS"/>
-              </a:rPr>
-              <a:t>白色，空的</a:t>
-            </a:r>
-            <a:r>
-              <a:rPr sz="1350" lang="zh-TW" dirty="0">
-                <a:solidFill>
-                  <a:srgbClr val="000000"/>
-                </a:solidFill>
-                <a:latin typeface="Arial Unicode MS"/>
-                <a:ea typeface="Arial Unicode MS"/>
-                <a:cs typeface="Arial Unicode MS"/>
-              </a:rPr>
-              <a:t>：雷射從光達打出去，一路經過這些格子都沒碰到東西，所以是空的。</a:t>
-            </a:r>
-            <a:r>
-              <a:rPr sz="1350" b="1" lang="zh-TW" dirty="0">
-                <a:solidFill>
-                  <a:srgbClr val="000000"/>
-                </a:solidFill>
-                <a:latin typeface="Arial Unicode MS"/>
-                <a:ea typeface="Arial Unicode MS"/>
-                <a:cs typeface="Arial Unicode MS"/>
-              </a:rPr>
-              <a:t>灰色，不知道</a:t>
-            </a:r>
-            <a:r>
-              <a:rPr sz="1350" lang="zh-TW" dirty="0">
-                <a:solidFill>
-                  <a:srgbClr val="000000"/>
-                </a:solidFill>
-                <a:latin typeface="Arial Unicode MS"/>
-                <a:ea typeface="Arial Unicode MS"/>
-                <a:cs typeface="Arial Unicode MS"/>
-              </a:rPr>
-              <a:t>：雷射根本沒打到那裡，例如被牆、被車擋住的後面。
+              <a:rPr sz="1600" lang="zh-TW" dirty="0">
+                <a:solidFill>
+                  <a:srgbClr val="000000"/>
+                </a:solidFill>
+                <a:latin typeface="Arial Unicode MS"/>
+                <a:ea typeface="Arial Unicode MS"/>
+                <a:cs typeface="Arial Unicode MS"/>
+              </a:rPr>
+              <a:t>那立體框怎麼來？兩種做法。第一種就是上一張：照片的框加上光達的點，把它「撐」成立體的。第二種是直接拿光達的點雲去找，光達的點本來就是立體的，有現成的模型專門做這件事，例如 nuScenes 那家公司自己做的 PointPillars，把點雲切成一根一根柱子來看。
 </a:t>
             </a:r>
           </a:p>
@@ -5332,85 +5487,19 @@
                 <a:spcPts val="0"/>
               </a:spcBef>
               <a:spcAft>
-                <a:spcPts val="225"/>
+                <a:spcPts val="267"/>
               </a:spcAft>
             </a:pPr>
             <a:r>
-              <a:rPr sz="1350" lang="zh-TW" dirty="0">
-                <a:solidFill>
-                  <a:srgbClr val="000000"/>
-                </a:solidFill>
-                <a:latin typeface="Arial Unicode MS"/>
-                <a:ea typeface="Arial Unicode MS"/>
-                <a:cs typeface="Arial Unicode MS"/>
-              </a:rPr>
-              <a:t>就像教室的座位表：有人坐、空位、被柱子擋住看不到。
-</a:t>
-            </a:r>
-          </a:p>
-          <a:p>
-            <a:pPr algn="l">
-              <a:spcBef>
-                <a:spcPts val="0"/>
-              </a:spcBef>
-              <a:spcAft>
-                <a:spcPts val="225"/>
-              </a:spcAft>
-            </a:pPr>
-            <a:r>
-              <a:rPr sz="1350" lang="zh-TW" dirty="0">
-                <a:solidFill>
-                  <a:srgbClr val="000000"/>
-                </a:solidFill>
-                <a:latin typeface="Arial Unicode MS"/>
-                <a:ea typeface="Arial Unicode MS"/>
-                <a:cs typeface="Arial Unicode MS"/>
-              </a:rPr>
-              <a:t>佔據網格最大的好處是：</a:t>
-            </a:r>
-            <a:r>
-              <a:rPr sz="1350" b="1" lang="zh-TW" dirty="0">
-                <a:solidFill>
-                  <a:srgbClr val="000000"/>
-                </a:solidFill>
-                <a:latin typeface="Arial Unicode MS"/>
-                <a:ea typeface="Arial Unicode MS"/>
-                <a:cs typeface="Arial Unicode MS"/>
-              </a:rPr>
-              <a:t>不用知道那是什麼。</a:t>
-            </a:r>
-            <a:r>
-              <a:rPr sz="1350" lang="zh-TW" dirty="0">
-                <a:solidFill>
-                  <a:srgbClr val="000000"/>
-                </a:solidFill>
-                <a:latin typeface="Arial Unicode MS"/>
-                <a:ea typeface="Arial Unicode MS"/>
-                <a:cs typeface="Arial Unicode MS"/>
-              </a:rPr>
-              <a:t>路上掉了一箱貨、一個沒看過的路障，偵測器可能認不出來，因為它沒學過這種東西；可是佔據網格只問「這一格有沒有東西」，一樣會標紅，車子一樣會避開。
-</a:t>
-            </a:r>
-          </a:p>
-          <a:p>
-            <a:pPr algn="l">
-              <a:spcBef>
-                <a:spcPts val="0"/>
-              </a:spcBef>
-              <a:spcAft>
-                <a:spcPts val="225"/>
-              </a:spcAft>
-            </a:pPr>
-            <a:r>
-              <a:rPr sz="1350" lang="zh-TW" dirty="0">
-                <a:solidFill>
-                  <a:srgbClr val="000000"/>
-                </a:solidFill>
-                <a:latin typeface="Arial Unicode MS"/>
-                <a:ea typeface="Arial Unicode MS"/>
-                <a:cs typeface="Arial Unicode MS"/>
-              </a:rPr>
-              <a:t>還有灰色那一塊要特別小心：「不知道」不等於「空的」。被大卡車擋住的後面，可能就站著一個人。</a:t>
+              <a:rPr sz="1600" lang="zh-TW" dirty="0">
+                <a:solidFill>
+                  <a:srgbClr val="000000"/>
+                </a:solidFill>
+                <a:latin typeface="Arial Unicode MS"/>
+                <a:ea typeface="Arial Unicode MS"/>
+                <a:cs typeface="Arial Unicode MS"/>
+              </a:rPr>
+              <a:t>下一張，我們把這些立體框從上往下看。</a:t>
             </a:r>
           </a:p>
         </p:txBody>
@@ -5519,30 +5608,30 @@
                 <a:spcPts val="0"/>
               </a:spcBef>
               <a:spcAft>
-                <a:spcPts val="267"/>
+                <a:spcPts val="225"/>
               </a:spcAft>
             </a:pPr>
             <a:r>
-              <a:rPr sz="1600" b="1" lang="zh-TW" dirty="0">
-                <a:solidFill>
-                  <a:srgbClr val="000000"/>
-                </a:solidFill>
-                <a:latin typeface="Arial Unicode MS"/>
-                <a:ea typeface="Arial Unicode MS"/>
-                <a:cs typeface="Arial Unicode MS"/>
-              </a:rPr>
-              <a:t>這一節的目的回顧：</a:t>
-            </a:r>
-            <a:r>
-              <a:rPr sz="1600" lang="zh-TW" dirty="0">
-                <a:solidFill>
-                  <a:srgbClr val="000000"/>
-                </a:solidFill>
-                <a:latin typeface="Arial Unicode MS"/>
-                <a:ea typeface="Arial Unicode MS"/>
-                <a:cs typeface="Arial Unicode MS"/>
-              </a:rPr>
-              <a:t>三句話帶走。
+              <a:rPr sz="1350" b="1" lang="zh-TW" dirty="0">
+                <a:solidFill>
+                  <a:srgbClr val="000000"/>
+                </a:solidFill>
+                <a:latin typeface="Arial Unicode MS"/>
+                <a:ea typeface="Arial Unicode MS"/>
+                <a:cs typeface="Arial Unicode MS"/>
+              </a:rPr>
+              <a:t>這一張的目的：</a:t>
+            </a:r>
+            <a:r>
+              <a:rPr sz="1350" lang="zh-TW" dirty="0">
+                <a:solidFill>
+                  <a:srgbClr val="000000"/>
+                </a:solidFill>
+                <a:latin typeface="Arial Unicode MS"/>
+                <a:ea typeface="Arial Unicode MS"/>
+                <a:cs typeface="Arial Unicode MS"/>
+              </a:rPr>
+              <a:t>讓大家知道為什麼自駕車喜歡「從上往下看」，以及佔據網格在做什麼：不用認出是什麼，也知道哪裡不能開。
 </a:t>
             </a:r>
           </a:p>
@@ -5552,41 +5641,30 @@
                 <a:spcPts val="0"/>
               </a:spcBef>
               <a:spcAft>
-                <a:spcPts val="267"/>
+                <a:spcPts val="225"/>
               </a:spcAft>
             </a:pPr>
             <a:r>
-              <a:rPr sz="1600" lang="zh-TW" dirty="0">
-                <a:solidFill>
-                  <a:srgbClr val="000000"/>
-                </a:solidFill>
-                <a:latin typeface="Arial Unicode MS"/>
-                <a:ea typeface="Arial Unicode MS"/>
-                <a:cs typeface="Arial Unicode MS"/>
-              </a:rPr>
-              <a:t>第一句：</a:t>
-            </a:r>
-            <a:r>
-              <a:rPr sz="1600" b="1" lang="zh-TW" dirty="0">
-                <a:solidFill>
-                  <a:srgbClr val="000000"/>
-                </a:solidFill>
-                <a:latin typeface="Arial Unicode MS"/>
-                <a:ea typeface="Arial Unicode MS"/>
-                <a:cs typeface="Arial Unicode MS"/>
-              </a:rPr>
-              <a:t>照片對電腦只是數字。</a:t>
-            </a:r>
-            <a:r>
-              <a:rPr sz="1600" lang="zh-TW" dirty="0">
-                <a:solidFill>
-                  <a:srgbClr val="000000"/>
-                </a:solidFill>
-                <a:latin typeface="Arial Unicode MS"/>
-                <a:ea typeface="Arial Unicode MS"/>
-                <a:cs typeface="Arial Unicode MS"/>
-              </a:rPr>
-              <a:t>模型不是靠規則認車，是從很多很多有標準答案的例子學出來的：猜、對答案、改一點點，重複幾百萬次。
+              <a:rPr sz="1350" b="1" lang="zh-TW" dirty="0">
+                <a:solidFill>
+                  <a:srgbClr val="000000"/>
+                </a:solidFill>
+                <a:latin typeface="Arial Unicode MS"/>
+                <a:ea typeface="Arial Unicode MS"/>
+                <a:cs typeface="Arial Unicode MS"/>
+              </a:rPr>
+              <a:t>左邊是鳥瞰圖</a:t>
+            </a:r>
+            <a:r>
+              <a:rPr sz="1350" lang="zh-TW" dirty="0">
+                <a:solidFill>
+                  <a:srgbClr val="000000"/>
+                </a:solidFill>
+                <a:latin typeface="Arial Unicode MS"/>
+                <a:ea typeface="Arial Unicode MS"/>
+                <a:cs typeface="Arial Unicode MS"/>
+              </a:rPr>
+              <a:t>，波士頓的一條街。自己的車在正中間，車頭朝上，前後左右各三十公尺。灰色的點是光達，綠色長方形是車，紅色小方塊是人。
 </a:t>
             </a:r>
           </a:p>
@@ -5596,41 +5674,85 @@
                 <a:spcPts val="0"/>
               </a:spcBef>
               <a:spcAft>
-                <a:spcPts val="267"/>
+                <a:spcPts val="225"/>
               </a:spcAft>
             </a:pPr>
             <a:r>
-              <a:rPr sz="1600" lang="zh-TW" dirty="0">
-                <a:solidFill>
-                  <a:srgbClr val="000000"/>
-                </a:solidFill>
-                <a:latin typeface="Arial Unicode MS"/>
-                <a:ea typeface="Arial Unicode MS"/>
-                <a:cs typeface="Arial Unicode MS"/>
-              </a:rPr>
-              <a:t>第二句：</a:t>
-            </a:r>
-            <a:r>
-              <a:rPr sz="1600" b="1" lang="zh-TW" dirty="0">
-                <a:solidFill>
-                  <a:srgbClr val="000000"/>
-                </a:solidFill>
-                <a:latin typeface="Arial Unicode MS"/>
-                <a:ea typeface="Arial Unicode MS"/>
-                <a:cs typeface="Arial Unicode MS"/>
-              </a:rPr>
-              <a:t>物件偵測給三樣東西：框、類別、分數。</a:t>
-            </a:r>
-            <a:r>
-              <a:rPr sz="1600" lang="zh-TW" dirty="0">
-                <a:solidFill>
-                  <a:srgbClr val="000000"/>
-                </a:solidFill>
-                <a:latin typeface="Arial Unicode MS"/>
-                <a:ea typeface="Arial Unicode MS"/>
-                <a:cs typeface="Arial Unicode MS"/>
-              </a:rPr>
-              <a:t>分數拿來切門檻：門檻低，多報，車子亂煞；門檻高，漏掉，車子會撞。沒有一個門檻兩邊都好。
+              <a:rPr sz="1350" lang="zh-TW" dirty="0">
+                <a:solidFill>
+                  <a:srgbClr val="000000"/>
+                </a:solidFill>
+                <a:latin typeface="Arial Unicode MS"/>
+                <a:ea typeface="Arial Unicode MS"/>
+                <a:cs typeface="Arial Unicode MS"/>
+              </a:rPr>
+              <a:t>為什麼要從上往下看？三個原因。第一，</a:t>
+            </a:r>
+            <a:r>
+              <a:rPr sz="1350" b="1" lang="zh-TW" dirty="0">
+                <a:solidFill>
+                  <a:srgbClr val="000000"/>
+                </a:solidFill>
+                <a:latin typeface="Arial Unicode MS"/>
+                <a:ea typeface="Arial Unicode MS"/>
+                <a:cs typeface="Arial Unicode MS"/>
+              </a:rPr>
+              <a:t>不會互相擋</a:t>
+            </a:r>
+            <a:r>
+              <a:rPr sz="1350" lang="zh-TW" dirty="0">
+                <a:solidFill>
+                  <a:srgbClr val="000000"/>
+                </a:solidFill>
+                <a:latin typeface="Arial Unicode MS"/>
+                <a:ea typeface="Arial Unicode MS"/>
+                <a:cs typeface="Arial Unicode MS"/>
+              </a:rPr>
+              <a:t>：照片上，前面的車會擋住後面的車；從上面看，每台車各佔一塊地。第二，</a:t>
+            </a:r>
+            <a:r>
+              <a:rPr sz="1350" b="1" lang="zh-TW" dirty="0">
+                <a:solidFill>
+                  <a:srgbClr val="000000"/>
+                </a:solidFill>
+                <a:latin typeface="Arial Unicode MS"/>
+                <a:ea typeface="Arial Unicode MS"/>
+                <a:cs typeface="Arial Unicode MS"/>
+              </a:rPr>
+              <a:t>距離不會變形</a:t>
+            </a:r>
+            <a:r>
+              <a:rPr sz="1350" lang="zh-TW" dirty="0">
+                <a:solidFill>
+                  <a:srgbClr val="000000"/>
+                </a:solidFill>
+                <a:latin typeface="Arial Unicode MS"/>
+                <a:ea typeface="Arial Unicode MS"/>
+                <a:cs typeface="Arial Unicode MS"/>
+              </a:rPr>
+              <a:t>：照片上近的東西大、遠的東西小；鳥瞰圖上，一公尺就是一公尺。第三，</a:t>
+            </a:r>
+            <a:r>
+              <a:rPr sz="1350" b="1" lang="zh-TW" dirty="0">
+                <a:solidFill>
+                  <a:srgbClr val="000000"/>
+                </a:solidFill>
+                <a:latin typeface="Arial Unicode MS"/>
+                <a:ea typeface="Arial Unicode MS"/>
+                <a:cs typeface="Arial Unicode MS"/>
+              </a:rPr>
+              <a:t>開車本來就是在地面上做決定</a:t>
+            </a:r>
+            <a:r>
+              <a:rPr sz="1350" lang="zh-TW" dirty="0">
+                <a:solidFill>
+                  <a:srgbClr val="000000"/>
+                </a:solidFill>
+                <a:latin typeface="Arial Unicode MS"/>
+                <a:ea typeface="Arial Unicode MS"/>
+                <a:cs typeface="Arial Unicode MS"/>
+              </a:rPr>
+              <a:t>：往左還是往右、停在哪裡，都是平面上的事。上週講的中期融合，就是把相機、光達都先畫成同一張鳥瞰圖。
 </a:t>
             </a:r>
           </a:p>
@@ -5640,41 +5762,30 @@
                 <a:spcPts val="0"/>
               </a:spcBef>
               <a:spcAft>
-                <a:spcPts val="267"/>
+                <a:spcPts val="225"/>
               </a:spcAft>
             </a:pPr>
             <a:r>
-              <a:rPr sz="1600" lang="zh-TW" dirty="0">
-                <a:solidFill>
-                  <a:srgbClr val="000000"/>
-                </a:solidFill>
-                <a:latin typeface="Arial Unicode MS"/>
-                <a:ea typeface="Arial Unicode MS"/>
-                <a:cs typeface="Arial Unicode MS"/>
-              </a:rPr>
-              <a:t>第三句：</a:t>
-            </a:r>
-            <a:r>
-              <a:rPr sz="1600" b="1" lang="zh-TW" dirty="0">
-                <a:solidFill>
-                  <a:srgbClr val="000000"/>
-                </a:solidFill>
-                <a:latin typeface="Arial Unicode MS"/>
-                <a:ea typeface="Arial Unicode MS"/>
-                <a:cs typeface="Arial Unicode MS"/>
-              </a:rPr>
-              <a:t>一遠、一暗就漏，人和機車比車先漏。</a:t>
-            </a:r>
-            <a:r>
-              <a:rPr sz="1600" lang="zh-TW" dirty="0">
-                <a:solidFill>
-                  <a:srgbClr val="000000"/>
-                </a:solidFill>
-                <a:latin typeface="Arial Unicode MS"/>
-                <a:ea typeface="Arial Unicode MS"/>
-                <a:cs typeface="Arial Unicode MS"/>
-              </a:rPr>
-              <a:t>行人四十公尺外幾乎抓不到；晚上，十到二十公尺的行人從 66% 掉到 49%。照片的框不知道多遠，要加上光達的點；做決定的時候，要把它們放到從上往下看的地圖上。
+              <a:rPr sz="1350" b="1" lang="zh-TW" dirty="0">
+                <a:solidFill>
+                  <a:srgbClr val="000000"/>
+                </a:solidFill>
+                <a:latin typeface="Arial Unicode MS"/>
+                <a:ea typeface="Arial Unicode MS"/>
+                <a:cs typeface="Arial Unicode MS"/>
+              </a:rPr>
+              <a:t>右邊是佔據網格</a:t>
+            </a:r>
+            <a:r>
+              <a:rPr sz="1350" lang="zh-TW" dirty="0">
+                <a:solidFill>
+                  <a:srgbClr val="000000"/>
+                </a:solidFill>
+                <a:latin typeface="Arial Unicode MS"/>
+                <a:ea typeface="Arial Unicode MS"/>
+                <a:cs typeface="Arial Unicode MS"/>
+              </a:rPr>
+              <a:t>，用同一格光達算的。把地面切成一格一格，每格半公尺。每一格只問一件事：
 </a:t>
             </a:r>
           </a:p>
@@ -5684,19 +5795,162 @@
                 <a:spcPts val="0"/>
               </a:spcBef>
               <a:spcAft>
-                <a:spcPts val="267"/>
+                <a:spcPts val="225"/>
               </a:spcAft>
             </a:pPr>
             <a:r>
-              <a:rPr sz="1600" lang="zh-TW" dirty="0">
-                <a:solidFill>
-                  <a:srgbClr val="000000"/>
-                </a:solidFill>
-                <a:latin typeface="Arial Unicode MS"/>
-                <a:ea typeface="Arial Unicode MS"/>
-                <a:cs typeface="Arial Unicode MS"/>
-              </a:rPr>
-              <a:t>這一節一直提到「標準答案」。標準答案從哪裡來？下一節，各位自己來標。</a:t>
+              <a:rPr sz="1350" b="1" lang="zh-TW" dirty="0">
+                <a:solidFill>
+                  <a:srgbClr val="000000"/>
+                </a:solidFill>
+                <a:latin typeface="Arial Unicode MS"/>
+                <a:ea typeface="Arial Unicode MS"/>
+                <a:cs typeface="Arial Unicode MS"/>
+              </a:rPr>
+              <a:t>紅色，有東西</a:t>
+            </a:r>
+            <a:r>
+              <a:rPr sz="1350" lang="zh-TW" dirty="0">
+                <a:solidFill>
+                  <a:srgbClr val="000000"/>
+                </a:solidFill>
+                <a:latin typeface="Arial Unicode MS"/>
+                <a:ea typeface="Arial Unicode MS"/>
+                <a:cs typeface="Arial Unicode MS"/>
+              </a:rPr>
+              <a:t>：這一格有高出地面的點。</a:t>
+            </a:r>
+            <a:r>
+              <a:rPr sz="1350" b="1" lang="zh-TW" dirty="0">
+                <a:solidFill>
+                  <a:srgbClr val="000000"/>
+                </a:solidFill>
+                <a:latin typeface="Arial Unicode MS"/>
+                <a:ea typeface="Arial Unicode MS"/>
+                <a:cs typeface="Arial Unicode MS"/>
+              </a:rPr>
+              <a:t>白色，空的</a:t>
+            </a:r>
+            <a:r>
+              <a:rPr sz="1350" lang="zh-TW" dirty="0">
+                <a:solidFill>
+                  <a:srgbClr val="000000"/>
+                </a:solidFill>
+                <a:latin typeface="Arial Unicode MS"/>
+                <a:ea typeface="Arial Unicode MS"/>
+                <a:cs typeface="Arial Unicode MS"/>
+              </a:rPr>
+              <a:t>：雷射從光達打出去，一路經過這些格子都沒碰到東西，所以是空的。</a:t>
+            </a:r>
+            <a:r>
+              <a:rPr sz="1350" b="1" lang="zh-TW" dirty="0">
+                <a:solidFill>
+                  <a:srgbClr val="000000"/>
+                </a:solidFill>
+                <a:latin typeface="Arial Unicode MS"/>
+                <a:ea typeface="Arial Unicode MS"/>
+                <a:cs typeface="Arial Unicode MS"/>
+              </a:rPr>
+              <a:t>灰色，不知道</a:t>
+            </a:r>
+            <a:r>
+              <a:rPr sz="1350" lang="zh-TW" dirty="0">
+                <a:solidFill>
+                  <a:srgbClr val="000000"/>
+                </a:solidFill>
+                <a:latin typeface="Arial Unicode MS"/>
+                <a:ea typeface="Arial Unicode MS"/>
+                <a:cs typeface="Arial Unicode MS"/>
+              </a:rPr>
+              <a:t>：雷射根本沒打到那裡，例如被牆、被車擋住的後面。
+</a:t>
+            </a:r>
+          </a:p>
+          <a:p>
+            <a:pPr algn="l">
+              <a:spcBef>
+                <a:spcPts val="0"/>
+              </a:spcBef>
+              <a:spcAft>
+                <a:spcPts val="225"/>
+              </a:spcAft>
+            </a:pPr>
+            <a:r>
+              <a:rPr sz="1350" lang="zh-TW" dirty="0">
+                <a:solidFill>
+                  <a:srgbClr val="000000"/>
+                </a:solidFill>
+                <a:latin typeface="Arial Unicode MS"/>
+                <a:ea typeface="Arial Unicode MS"/>
+                <a:cs typeface="Arial Unicode MS"/>
+              </a:rPr>
+              <a:t>就像教室的座位表：有人坐、空位、被柱子擋住看不到。
+</a:t>
+            </a:r>
+          </a:p>
+          <a:p>
+            <a:pPr algn="l">
+              <a:spcBef>
+                <a:spcPts val="0"/>
+              </a:spcBef>
+              <a:spcAft>
+                <a:spcPts val="225"/>
+              </a:spcAft>
+            </a:pPr>
+            <a:r>
+              <a:rPr sz="1350" lang="zh-TW" dirty="0">
+                <a:solidFill>
+                  <a:srgbClr val="000000"/>
+                </a:solidFill>
+                <a:latin typeface="Arial Unicode MS"/>
+                <a:ea typeface="Arial Unicode MS"/>
+                <a:cs typeface="Arial Unicode MS"/>
+              </a:rPr>
+              <a:t>佔據網格最大的好處是：</a:t>
+            </a:r>
+            <a:r>
+              <a:rPr sz="1350" b="1" lang="zh-TW" dirty="0">
+                <a:solidFill>
+                  <a:srgbClr val="000000"/>
+                </a:solidFill>
+                <a:latin typeface="Arial Unicode MS"/>
+                <a:ea typeface="Arial Unicode MS"/>
+                <a:cs typeface="Arial Unicode MS"/>
+              </a:rPr>
+              <a:t>不用知道那是什麼。</a:t>
+            </a:r>
+            <a:r>
+              <a:rPr sz="1350" lang="zh-TW" dirty="0">
+                <a:solidFill>
+                  <a:srgbClr val="000000"/>
+                </a:solidFill>
+                <a:latin typeface="Arial Unicode MS"/>
+                <a:ea typeface="Arial Unicode MS"/>
+                <a:cs typeface="Arial Unicode MS"/>
+              </a:rPr>
+              <a:t>路上掉了一箱貨、一個沒看過的路障，偵測器可能認不出來，因為它沒學過這種東西；可是佔據網格只問「這一格有沒有東西」，一樣會標紅，車子一樣會避開。
+</a:t>
+            </a:r>
+          </a:p>
+          <a:p>
+            <a:pPr algn="l">
+              <a:spcBef>
+                <a:spcPts val="0"/>
+              </a:spcBef>
+              <a:spcAft>
+                <a:spcPts val="225"/>
+              </a:spcAft>
+            </a:pPr>
+            <a:r>
+              <a:rPr sz="1350" lang="zh-TW" dirty="0">
+                <a:solidFill>
+                  <a:srgbClr val="000000"/>
+                </a:solidFill>
+                <a:latin typeface="Arial Unicode MS"/>
+                <a:ea typeface="Arial Unicode MS"/>
+                <a:cs typeface="Arial Unicode MS"/>
+              </a:rPr>
+              <a:t>還有灰色那一塊要特別小心：「不知道」不等於「空的」。被大卡車擋住的後面，可能就站著一個人。</a:t>
             </a:r>
           </a:p>
         </p:txBody>
@@ -5739,6 +5993,292 @@
                 <a:cs typeface="Arial Unicode MS"/>
               </a:rPr>
               <a:t>22</a:t>
+            </a:r>
+          </a:p>
+        </p:txBody>
+      </p:sp>
+    </p:spTree>
+  </p:cSld>
+  <p:clrMapOvr>
+    <a:masterClrMapping/>
+  </p:clrMapOvr>
+</p:notes>
+</file>
+
+<file path=ppt/notesSlides/notesSlide23.xml><?xml version="1.0" encoding="utf-8"?>
+<p:notes xmlns:a="http://schemas.openxmlformats.org/drawingml/2006/main" xmlns:p="http://schemas.openxmlformats.org/presentationml/2006/main">
+  <p:cSld>
+    <p:spTree>
+      <p:nvGrpSpPr>
+        <p:cNvPr id="1" name=""/>
+        <p:cNvGrpSpPr/>
+        <p:nvPr/>
+      </p:nvGrpSpPr>
+      <p:grpSpPr>
+        <a:xfrm/>
+      </p:grpSpPr>
+      <p:sp>
+        <p:nvSpPr>
+          <p:cNvPr id="2" name="Slide Image Placeholder 1"/>
+          <p:cNvSpPr>
+            <a:spLocks noGrp="1"/>
+          </p:cNvSpPr>
+          <p:nvPr>
+            <p:ph type="sldImg" idx="2"/>
+          </p:nvPr>
+        </p:nvSpPr>
+        <p:spPr>
+          <a:xfrm>
+            <a:off x="1620000" y="380000"/>
+            <a:ext cx="4320000" cy="2430000"/>
+          </a:xfrm>
+        </p:spPr>
+      </p:sp>
+      <p:sp>
+        <p:nvSpPr>
+          <p:cNvPr id="3" name="Notes Placeholder 2"/>
+          <p:cNvSpPr>
+            <a:spLocks noGrp="1"/>
+          </p:cNvSpPr>
+          <p:nvPr>
+            <p:ph type="body" idx="3"/>
+          </p:nvPr>
+        </p:nvSpPr>
+        <p:spPr>
+          <a:xfrm>
+            <a:off x="540000" y="2990000"/>
+            <a:ext cx="6480000" cy="7060000"/>
+          </a:xfrm>
+        </p:spPr>
+        <p:txBody>
+          <a:bodyPr vert="horz" wrap="square" anchor="t" lIns="91440" rIns="91440" tIns="45720" bIns="45720"/>
+          <a:lstStyle/>
+          <a:p>
+            <a:pPr algn="l">
+              <a:spcBef>
+                <a:spcPts val="0"/>
+              </a:spcBef>
+              <a:spcAft>
+                <a:spcPts val="267"/>
+              </a:spcAft>
+            </a:pPr>
+            <a:r>
+              <a:rPr sz="1600" b="1" lang="zh-TW" dirty="0">
+                <a:solidFill>
+                  <a:srgbClr val="000000"/>
+                </a:solidFill>
+                <a:latin typeface="Arial Unicode MS"/>
+                <a:ea typeface="Arial Unicode MS"/>
+                <a:cs typeface="Arial Unicode MS"/>
+              </a:rPr>
+              <a:t>這一節的目的回顧：</a:t>
+            </a:r>
+            <a:r>
+              <a:rPr sz="1600" lang="zh-TW" dirty="0">
+                <a:solidFill>
+                  <a:srgbClr val="000000"/>
+                </a:solidFill>
+                <a:latin typeface="Arial Unicode MS"/>
+                <a:ea typeface="Arial Unicode MS"/>
+                <a:cs typeface="Arial Unicode MS"/>
+              </a:rPr>
+              <a:t>三句話帶走。
+</a:t>
+            </a:r>
+          </a:p>
+          <a:p>
+            <a:pPr algn="l">
+              <a:spcBef>
+                <a:spcPts val="0"/>
+              </a:spcBef>
+              <a:spcAft>
+                <a:spcPts val="267"/>
+              </a:spcAft>
+            </a:pPr>
+            <a:r>
+              <a:rPr sz="1600" lang="zh-TW" dirty="0">
+                <a:solidFill>
+                  <a:srgbClr val="000000"/>
+                </a:solidFill>
+                <a:latin typeface="Arial Unicode MS"/>
+                <a:ea typeface="Arial Unicode MS"/>
+                <a:cs typeface="Arial Unicode MS"/>
+              </a:rPr>
+              <a:t>第一句：</a:t>
+            </a:r>
+            <a:r>
+              <a:rPr sz="1600" b="1" lang="zh-TW" dirty="0">
+                <a:solidFill>
+                  <a:srgbClr val="000000"/>
+                </a:solidFill>
+                <a:latin typeface="Arial Unicode MS"/>
+                <a:ea typeface="Arial Unicode MS"/>
+                <a:cs typeface="Arial Unicode MS"/>
+              </a:rPr>
+              <a:t>照片對電腦只是數字。</a:t>
+            </a:r>
+            <a:r>
+              <a:rPr sz="1600" lang="zh-TW" dirty="0">
+                <a:solidFill>
+                  <a:srgbClr val="000000"/>
+                </a:solidFill>
+                <a:latin typeface="Arial Unicode MS"/>
+                <a:ea typeface="Arial Unicode MS"/>
+                <a:cs typeface="Arial Unicode MS"/>
+              </a:rPr>
+              <a:t>模型不是靠規則認車，是從很多很多有標準答案的例子學出來的：猜、對答案、改一點點，重複幾百萬次。
+</a:t>
+            </a:r>
+          </a:p>
+          <a:p>
+            <a:pPr algn="l">
+              <a:spcBef>
+                <a:spcPts val="0"/>
+              </a:spcBef>
+              <a:spcAft>
+                <a:spcPts val="267"/>
+              </a:spcAft>
+            </a:pPr>
+            <a:r>
+              <a:rPr sz="1600" lang="zh-TW" dirty="0">
+                <a:solidFill>
+                  <a:srgbClr val="000000"/>
+                </a:solidFill>
+                <a:latin typeface="Arial Unicode MS"/>
+                <a:ea typeface="Arial Unicode MS"/>
+                <a:cs typeface="Arial Unicode MS"/>
+              </a:rPr>
+              <a:t>第二句：</a:t>
+            </a:r>
+            <a:r>
+              <a:rPr sz="1600" b="1" lang="zh-TW" dirty="0">
+                <a:solidFill>
+                  <a:srgbClr val="000000"/>
+                </a:solidFill>
+                <a:latin typeface="Arial Unicode MS"/>
+                <a:ea typeface="Arial Unicode MS"/>
+                <a:cs typeface="Arial Unicode MS"/>
+              </a:rPr>
+              <a:t>物件偵測給三樣東西：框、類別、分數。</a:t>
+            </a:r>
+            <a:r>
+              <a:rPr sz="1600" lang="zh-TW" dirty="0">
+                <a:solidFill>
+                  <a:srgbClr val="000000"/>
+                </a:solidFill>
+                <a:latin typeface="Arial Unicode MS"/>
+                <a:ea typeface="Arial Unicode MS"/>
+                <a:cs typeface="Arial Unicode MS"/>
+              </a:rPr>
+              <a:t>分數拿來切門檻：門檻低，多報，車子亂煞；門檻高，漏掉，車子會撞。沒有一個門檻兩邊都好。
+</a:t>
+            </a:r>
+          </a:p>
+          <a:p>
+            <a:pPr algn="l">
+              <a:spcBef>
+                <a:spcPts val="0"/>
+              </a:spcBef>
+              <a:spcAft>
+                <a:spcPts val="267"/>
+              </a:spcAft>
+            </a:pPr>
+            <a:r>
+              <a:rPr sz="1600" lang="zh-TW" dirty="0">
+                <a:solidFill>
+                  <a:srgbClr val="000000"/>
+                </a:solidFill>
+                <a:latin typeface="Arial Unicode MS"/>
+                <a:ea typeface="Arial Unicode MS"/>
+                <a:cs typeface="Arial Unicode MS"/>
+              </a:rPr>
+              <a:t>第三句：</a:t>
+            </a:r>
+            <a:r>
+              <a:rPr sz="1600" b="1" lang="zh-TW" dirty="0">
+                <a:solidFill>
+                  <a:srgbClr val="000000"/>
+                </a:solidFill>
+                <a:latin typeface="Arial Unicode MS"/>
+                <a:ea typeface="Arial Unicode MS"/>
+                <a:cs typeface="Arial Unicode MS"/>
+              </a:rPr>
+              <a:t>一遠、一暗就漏，人和機車比車先漏。</a:t>
+            </a:r>
+            <a:r>
+              <a:rPr sz="1600" lang="zh-TW" dirty="0">
+                <a:solidFill>
+                  <a:srgbClr val="000000"/>
+                </a:solidFill>
+                <a:latin typeface="Arial Unicode MS"/>
+                <a:ea typeface="Arial Unicode MS"/>
+                <a:cs typeface="Arial Unicode MS"/>
+              </a:rPr>
+              <a:t>行人四十公尺外幾乎抓不到；晚上，十到二十公尺的行人從 66% 掉到 49%。照片的框不知道多遠，要加上光達的點；做決定的時候，要把它們放到從上往下看的地圖上。
+</a:t>
+            </a:r>
+          </a:p>
+          <a:p>
+            <a:pPr algn="l">
+              <a:spcBef>
+                <a:spcPts val="0"/>
+              </a:spcBef>
+              <a:spcAft>
+                <a:spcPts val="267"/>
+              </a:spcAft>
+            </a:pPr>
+            <a:r>
+              <a:rPr sz="1600" lang="zh-TW" dirty="0">
+                <a:solidFill>
+                  <a:srgbClr val="000000"/>
+                </a:solidFill>
+                <a:latin typeface="Arial Unicode MS"/>
+                <a:ea typeface="Arial Unicode MS"/>
+                <a:cs typeface="Arial Unicode MS"/>
+              </a:rPr>
+              <a:t>這一節一直提到「標準答案」。標準答案從哪裡來？下一節，各位自己來標。</a:t>
+            </a:r>
+          </a:p>
+        </p:txBody>
+      </p:sp>
+      <p:sp>
+        <p:nvSpPr>
+          <p:cNvPr id="4" name="Slide Number Placeholder 3"/>
+          <p:cNvSpPr>
+            <a:spLocks noGrp="1"/>
+          </p:cNvSpPr>
+          <p:nvPr>
+            <p:ph type="sldNum" idx="5"/>
+          </p:nvPr>
+        </p:nvSpPr>
+        <p:spPr>
+          <a:xfrm>
+            <a:off x="6500000" y="10200000"/>
+            <a:ext cx="500000" cy="300000"/>
+          </a:xfrm>
+        </p:spPr>
+        <p:txBody>
+          <a:bodyPr vert="horz" wrap="square" anchor="t" lIns="91440" rIns="91440" tIns="45720" bIns="45720"/>
+          <a:lstStyle/>
+          <a:p>
+            <a:pPr algn="l">
+              <a:spcBef>
+                <a:spcPts val="0"/>
+              </a:spcBef>
+              <a:spcAft>
+                <a:spcPts val="167"/>
+              </a:spcAft>
+            </a:pPr>
+            <a:r>
+              <a:rPr sz="1000" lang="zh-TW" dirty="0">
+                <a:solidFill>
+                  <a:srgbClr val="000000"/>
+                </a:solidFill>
+                <a:latin typeface="Arial Unicode MS"/>
+                <a:ea typeface="Arial Unicode MS"/>
+                <a:cs typeface="Arial Unicode MS"/>
+              </a:rPr>
+              <a:t>23</a:t>
             </a:r>
           </a:p>
         </p:txBody>
@@ -11284,7 +11824,7 @@
                 <a:ea typeface="Arial" pitchFamily="34" charset="-122"/>
                 <a:cs typeface="Arial" pitchFamily="34" charset="-120"/>
               </a:rPr>
-              <a:t>10 / 22</a:t>
+              <a:t>10 / 23</a:t>
             </a:r>
             <a:endParaRPr lang="en-US" sz="880" dirty="0"/>
           </a:p>
@@ -11387,7 +11927,7 @@
                 <a:ea typeface="Arial" pitchFamily="34" charset="-122"/>
                 <a:cs typeface="Arial" pitchFamily="34" charset="-120"/>
               </a:rPr>
-              <a:t>Học sâu · 深度學習：連「看什麼」都自己學</a:t>
+              <a:t>Vì sao chỉ sửa một chút · 為什麼只改一點點</a:t>
             </a:r>
             <a:endParaRPr lang="en-US" sz="1250" dirty="0"/>
           </a:p>
@@ -11429,7 +11969,7 @@
                 <a:ea typeface="Arial" pitchFamily="34" charset="-122"/>
                 <a:cs typeface="Arial" pitchFamily="34" charset="-120"/>
               </a:rPr>
-              <a:t>32 kính lọc lớp đầu YOLOX: không ai vẽ, tự học ra màu, cạnh, chấm</a:t>
+              <a:t>Bước quá lớn thì nhảy loạn, quá nhỏ thì đi chậm</a:t>
             </a:r>
             <a:endParaRPr lang="en-US" sz="1700" dirty="0"/>
           </a:p>
@@ -11449,7 +11989,7 @@
                 <a:ea typeface="微軟正黑體" pitchFamily="34" charset="-122"/>
                 <a:cs typeface="微軟正黑體" pitchFamily="34" charset="-120"/>
               </a:rPr>
-              <a:t>YOLOX 第一層 32 個濾鏡：沒人畫，自己學出顏色、邊、小點</a:t>
+              <a:t>電腦只知道往哪邊改：步伐太大就亂跳，太小就走得慢</a:t>
             </a:r>
             <a:endParaRPr lang="en-US" sz="1700" dirty="0"/>
           </a:p>
@@ -11463,8 +12003,8 @@
         </p:nvSpPr>
         <p:spPr>
           <a:xfrm>
-            <a:off x="1625373" y="1371600"/>
-            <a:ext cx="5893254" cy="3017520"/>
+            <a:off x="1645474" y="1371600"/>
+            <a:ext cx="5853052" cy="3017520"/>
           </a:xfrm>
           <a:prstGeom prst="rect">
             <a:avLst/>
@@ -11482,7 +12022,7 @@
       </p:sp>
       <p:pic>
         <p:nvPicPr>
-          <p:cNvPr id="5" name="Image 0" descr="/Users/tsengchenghsun/Class/carClass/Claude outputs/第八週(10-29)/src/img/w8_filters.png">    </p:cNvPr>
+          <p:cNvPr id="5" name="Image 0" descr="/Users/tsengchenghsun/Class/carClass/Claude outputs/第八週(10-29)/src/img/w8_lr.png">    </p:cNvPr>
           <p:cNvPicPr>
             <a:picLocks noChangeAspect="1"/>
           </p:cNvPicPr>
@@ -11496,8 +12036,8 @@
         </p:blipFill>
         <p:spPr>
           <a:xfrm>
-            <a:off x="1643661" y="1389888"/>
-            <a:ext cx="5856678" cy="2980944"/>
+            <a:off x="1663762" y="1389888"/>
+            <a:ext cx="5816476" cy="2980944"/>
           </a:xfrm>
           <a:prstGeom prst="rect">
             <a:avLst/>
@@ -11537,7 +12077,7 @@
                 <a:ea typeface="Arial" pitchFamily="34" charset="-122"/>
                 <a:cs typeface="Arial" pitchFamily="34" charset="-120"/>
               </a:rPr>
-              <a:t>YOLOX-s（Megvii，Apache-2.0）第一個卷積層的 32 個濾鏡，每個看原圖 6×6 個像素；各自把數字拉到 0–255 顯示 · src/tools_w8_imgs.py</a:t>
+              <a:t>第 9 張同一批 627 個例子（大人＋汽車）· 電腦用「看斜率、往下走一步」的方式學門檻，從 2.6 出發 · 三種步伐（學習率）· src/tools_w8_imgs.py</a:t>
             </a:r>
             <a:endParaRPr lang="en-US" sz="850" dirty="0"/>
           </a:p>
@@ -11600,7 +12140,7 @@
                 <a:ea typeface="Arial" pitchFamily="34" charset="-122"/>
                 <a:cs typeface="Arial" pitchFamily="34" charset="-120"/>
               </a:rPr>
-              <a:t>11 / 22</a:t>
+              <a:t>11 / 23</a:t>
             </a:r>
             <a:endParaRPr lang="en-US" sz="900" dirty="0"/>
           </a:p>
@@ -11703,7 +12243,7 @@
                 <a:ea typeface="Arial" pitchFamily="34" charset="-122"/>
                 <a:cs typeface="Arial" pitchFamily="34" charset="-120"/>
               </a:rPr>
-              <a:t>Từng lớp · 一層一層看</a:t>
+              <a:t>Học sâu · 深度學習：連「看什麼」都自己學</a:t>
             </a:r>
             <a:endParaRPr lang="en-US" sz="1250" dirty="0"/>
           </a:p>
@@ -11745,7 +12285,7 @@
                 <a:ea typeface="Arial" pitchFamily="34" charset="-122"/>
                 <a:cs typeface="Arial" pitchFamily="34" charset="-120"/>
               </a:rPr>
-              <a:t>Từ cạnh, đến hoa văn, đến cả người: mỗi lớp ghép kết quả lớp trước</a:t>
+              <a:t>32 kính lọc lớp đầu YOLOX: không ai vẽ, tự học ra màu, cạnh, chấm</a:t>
             </a:r>
             <a:endParaRPr lang="en-US" sz="1700" dirty="0"/>
           </a:p>
@@ -11765,7 +12305,7 @@
                 <a:ea typeface="微軟正黑體" pitchFamily="34" charset="-122"/>
                 <a:cs typeface="微軟正黑體" pitchFamily="34" charset="-120"/>
               </a:rPr>
-              <a:t>從邊、到紋理、到整個人：每一層把上一層的結果再組起來</a:t>
+              <a:t>YOLOX 第一層 32 個濾鏡：沒人畫，自己學出顏色、邊、小點</a:t>
             </a:r>
             <a:endParaRPr lang="en-US" sz="1700" dirty="0"/>
           </a:p>
@@ -11779,8 +12319,8 @@
         </p:nvSpPr>
         <p:spPr>
           <a:xfrm>
-            <a:off x="484632" y="2118484"/>
-            <a:ext cx="8174736" cy="1523752"/>
+            <a:off x="1625373" y="1371600"/>
+            <a:ext cx="5893254" cy="3017520"/>
           </a:xfrm>
           <a:prstGeom prst="rect">
             <a:avLst/>
@@ -11798,7 +12338,7 @@
       </p:sp>
       <p:pic>
         <p:nvPicPr>
-          <p:cNvPr id="5" name="Image 0" descr="/Users/tsengchenghsun/Class/carClass/Claude outputs/第八週(10-29)/src/img/w8_featmaps.jpg">    </p:cNvPr>
+          <p:cNvPr id="5" name="Image 0" descr="/Users/tsengchenghsun/Class/carClass/Claude outputs/第八週(10-29)/src/img/w8_filters.png">    </p:cNvPr>
           <p:cNvPicPr>
             <a:picLocks noChangeAspect="1"/>
           </p:cNvPicPr>
@@ -11812,8 +12352,8 @@
         </p:blipFill>
         <p:spPr>
           <a:xfrm>
-            <a:off x="502920" y="2136772"/>
-            <a:ext cx="8138160" cy="1487176"/>
+            <a:off x="1643661" y="1389888"/>
+            <a:ext cx="5856678" cy="2980944"/>
           </a:xfrm>
           <a:prstGeom prst="rect">
             <a:avLst/>
@@ -11853,7 +12393,7 @@
                 <a:ea typeface="Arial" pitchFamily="34" charset="-122"/>
                 <a:cs typeface="Arial" pitchFamily="34" charset="-120"/>
               </a:rPr>
-              <a:t>YOLOX-s 真的中間結果（亮＝反應強）· 第 1 層 32 個通道挑變化最大的一個；後兩個從 64、128 個通道挑「在人身上比背景亮最多」的一個 · nuScenes scene-0553</a:t>
+              <a:t>YOLOX-s（Megvii，Apache-2.0）第一個卷積層的 32 個濾鏡，每個看原圖 6×6 個像素；各自把數字拉到 0–255 顯示 · src/tools_w8_imgs.py</a:t>
             </a:r>
             <a:endParaRPr lang="en-US" sz="850" dirty="0"/>
           </a:p>
@@ -11916,7 +12456,7 @@
                 <a:ea typeface="Arial" pitchFamily="34" charset="-122"/>
                 <a:cs typeface="Arial" pitchFamily="34" charset="-120"/>
               </a:rPr>
-              <a:t>12 / 22</a:t>
+              <a:t>12 / 23</a:t>
             </a:r>
             <a:endParaRPr lang="en-US" sz="900" dirty="0"/>
           </a:p>
@@ -12019,7 +12559,7 @@
                 <a:ea typeface="Arial" pitchFamily="34" charset="-122"/>
                 <a:cs typeface="Arial" pitchFamily="34" charset="-120"/>
               </a:rPr>
-              <a:t>Đầu ra · 偵測器給什麼</a:t>
+              <a:t>Từng lớp · 一層一層看</a:t>
             </a:r>
             <a:endParaRPr lang="en-US" sz="1250" dirty="0"/>
           </a:p>
@@ -12027,19 +12567,79 @@
       </p:sp>
       <p:sp>
         <p:nvSpPr>
-          <p:cNvPr id="3" name="Shape 1"/>
+          <p:cNvPr id="3" name="Text 1"/>
+          <p:cNvSpPr txBox="1"/>
+          <p:nvPr/>
+        </p:nvSpPr>
+        <p:spPr>
+          <a:xfrm>
+            <a:off x="502920" y="731520"/>
+            <a:ext cx="8138160" cy="585216"/>
+          </a:xfrm>
+          <a:prstGeom prst="rect">
+            <a:avLst/>
+          </a:prstGeom>
+          <a:noFill/>
+          <a:ln/>
+        </p:spPr>
+        <p:txBody>
+          <a:bodyPr wrap="square" lIns="0" tIns="0" rIns="0" bIns="0" rtlCol="0" anchor="t"/>
+          <a:lstStyle/>
+          <a:p>
+            <a:pPr indent="0" marL="0">
+              <a:lnSpc>
+                <a:spcPct val="120000"/>
+              </a:lnSpc>
+              <a:buNone/>
+            </a:pPr>
+            <a:r>
+              <a:rPr lang="en-US" sz="1700" b="1" dirty="0">
+                <a:solidFill>
+                  <a:srgbClr val="0B1F3A"/>
+                </a:solidFill>
+                <a:latin typeface="Arial" pitchFamily="34" charset="0"/>
+                <a:ea typeface="Arial" pitchFamily="34" charset="-122"/>
+                <a:cs typeface="Arial" pitchFamily="34" charset="-120"/>
+              </a:rPr>
+              <a:t>Từ cạnh, đến hoa văn, đến cả người: mỗi lớp ghép kết quả lớp trước</a:t>
+            </a:r>
+            <a:endParaRPr lang="en-US" sz="1700" dirty="0"/>
+          </a:p>
+          <a:p>
+            <a:pPr indent="0" marL="0">
+              <a:lnSpc>
+                <a:spcPct val="120000"/>
+              </a:lnSpc>
+              <a:buNone/>
+            </a:pPr>
+            <a:r>
+              <a:rPr lang="en-US" sz="1300" dirty="0">
+                <a:solidFill>
+                  <a:srgbClr val="007F72"/>
+                </a:solidFill>
+                <a:latin typeface="微軟正黑體" pitchFamily="34" charset="0"/>
+                <a:ea typeface="微軟正黑體" pitchFamily="34" charset="-122"/>
+                <a:cs typeface="微軟正黑體" pitchFamily="34" charset="-120"/>
+              </a:rPr>
+              <a:t>從邊、到紋理、到整個人：每一層把上一層的結果再組起來</a:t>
+            </a:r>
+            <a:endParaRPr lang="en-US" sz="1700" dirty="0"/>
+          </a:p>
+        </p:txBody>
+      </p:sp>
+      <p:sp>
+        <p:nvSpPr>
+          <p:cNvPr id="4" name="Shape 2"/>
           <p:cNvSpPr/>
           <p:nvPr/>
         </p:nvSpPr>
         <p:spPr>
           <a:xfrm>
-            <a:off x="502920" y="1412748"/>
-            <a:ext cx="5120640" cy="2514600"/>
-          </a:xfrm>
-          <a:prstGeom prst="roundRect">
-            <a:avLst>
-              <a:gd name="adj" fmla="val 4364"/>
-            </a:avLst>
+            <a:off x="484632" y="2118484"/>
+            <a:ext cx="8174736" cy="1523752"/>
+          </a:xfrm>
+          <a:prstGeom prst="rect">
+            <a:avLst/>
           </a:prstGeom>
           <a:solidFill>
             <a:srgbClr val="FFFFFF"/>
@@ -12054,7 +12654,7 @@
       </p:sp>
       <p:pic>
         <p:nvPicPr>
-          <p:cNvPr id="4" name="Image 0" descr="/Users/tsengchenghsun/Class/carClass/Claude outputs/第八週(10-29)/src/img/w8_det_day.jpg">    </p:cNvPr>
+          <p:cNvPr id="5" name="Image 0" descr="/Users/tsengchenghsun/Class/carClass/Claude outputs/第八週(10-29)/src/img/w8_featmaps.jpg">    </p:cNvPr>
           <p:cNvPicPr>
             <a:picLocks noChangeAspect="1"/>
           </p:cNvPicPr>
@@ -12068,53 +12668,14 @@
         </p:blipFill>
         <p:spPr>
           <a:xfrm>
-            <a:off x="576072" y="1711985"/>
-            <a:ext cx="4974336" cy="1733245"/>
+            <a:off x="502920" y="2136772"/>
+            <a:ext cx="8138160" cy="1487176"/>
           </a:xfrm>
           <a:prstGeom prst="rect">
             <a:avLst/>
           </a:prstGeom>
         </p:spPr>
       </p:pic>
-      <p:sp>
-        <p:nvSpPr>
-          <p:cNvPr id="5" name="Text 2"/>
-          <p:cNvSpPr txBox="1"/>
-          <p:nvPr/>
-        </p:nvSpPr>
-        <p:spPr>
-          <a:xfrm>
-            <a:off x="576072" y="3707892"/>
-            <a:ext cx="4974336" cy="182880"/>
-          </a:xfrm>
-          <a:prstGeom prst="rect">
-            <a:avLst/>
-          </a:prstGeom>
-          <a:noFill/>
-          <a:ln/>
-        </p:spPr>
-        <p:txBody>
-          <a:bodyPr wrap="square" lIns="0" tIns="0" rIns="0" bIns="0" rtlCol="0" anchor="ctr"/>
-          <a:lstStyle/>
-          <a:p>
-            <a:pPr algn="ctr" indent="0" marL="0">
-              <a:buNone/>
-            </a:pPr>
-            <a:r>
-              <a:rPr lang="en-US" sz="700" dirty="0">
-                <a:solidFill>
-                  <a:srgbClr val="5F7183"/>
-                </a:solidFill>
-                <a:latin typeface="Arial" pitchFamily="34" charset="0"/>
-                <a:ea typeface="Arial" pitchFamily="34" charset="-122"/>
-                <a:cs typeface="Arial" pitchFamily="34" charset="-120"/>
-              </a:rPr>
-              <a:t>YOLOX-s 偵測結果（分數 ≥ 0.5）· nuScenes scene-0553 · CC BY-NC-SA 4.0</a:t>
-            </a:r>
-            <a:endParaRPr lang="en-US" sz="700" dirty="0"/>
-          </a:p>
-        </p:txBody>
-      </p:sp>
       <p:sp>
         <p:nvSpPr>
           <p:cNvPr id="6" name="Text 3"/>
@@ -12123,8 +12684,8 @@
         </p:nvSpPr>
         <p:spPr>
           <a:xfrm>
-            <a:off x="5934456" y="914400"/>
-            <a:ext cx="2706624" cy="3511296"/>
+            <a:off x="502920" y="4407408"/>
+            <a:ext cx="8138160" cy="201168"/>
           </a:xfrm>
           <a:prstGeom prst="rect">
             <a:avLst/>
@@ -12136,216 +12697,27 @@
           <a:bodyPr wrap="square" lIns="0" tIns="0" rIns="0" bIns="0" rtlCol="0" anchor="ctr"/>
           <a:lstStyle/>
           <a:p>
-            <a:pPr indent="0" marL="0">
-              <a:lnSpc>
-                <a:spcPct val="120000"/>
-              </a:lnSpc>
+            <a:pPr algn="ctr" indent="0" marL="0">
               <a:buNone/>
             </a:pPr>
             <a:r>
-              <a:rPr lang="en-US" sz="2300" b="1" dirty="0">
-                <a:solidFill>
-                  <a:srgbClr val="0B1F3A"/>
+              <a:rPr lang="en-US" sz="850" dirty="0">
+                <a:solidFill>
+                  <a:srgbClr val="5F7183"/>
                 </a:solidFill>
                 <a:latin typeface="Arial" pitchFamily="34" charset="0"/>
                 <a:ea typeface="Arial" pitchFamily="34" charset="-122"/>
                 <a:cs typeface="Arial" pitchFamily="34" charset="-120"/>
               </a:rPr>
-              <a:t>Ba thứ: khung (ở đâu), loại (là gì), điểm (chắc bao nhiêu)</a:t>
-            </a:r>
-            <a:endParaRPr lang="en-US" sz="2300" dirty="0"/>
-          </a:p>
-          <a:p>
-            <a:pPr indent="0" marL="0">
-              <a:lnSpc>
-                <a:spcPct val="120000"/>
-              </a:lnSpc>
-              <a:buNone/>
-            </a:pPr>
-            <a:r>
-              <a:rPr lang="en-US" sz="1400" b="1" dirty="0">
-                <a:solidFill>
-                  <a:srgbClr val="007F72"/>
-                </a:solidFill>
-                <a:latin typeface="微軟正黑體" pitchFamily="34" charset="0"/>
-                <a:ea typeface="微軟正黑體" pitchFamily="34" charset="-122"/>
-                <a:cs typeface="微軟正黑體" pitchFamily="34" charset="-120"/>
-              </a:rPr>
-              <a:t>三樣東西：框（在哪）、類別（是什麼）、分數（多有把握）</a:t>
-            </a:r>
-            <a:endParaRPr lang="en-US" sz="2300" dirty="0"/>
-          </a:p>
-          <a:p>
-            <a:pPr indent="0" marL="0">
-              <a:lnSpc>
-                <a:spcPct val="120000"/>
-              </a:lnSpc>
-              <a:spcBef>
-                <a:spcPts val="1440"/>
-              </a:spcBef>
-              <a:buNone/>
-            </a:pPr>
-            <a:r>
-              <a:rPr lang="en-US" sz="1250" dirty="0">
-                <a:solidFill>
-                  <a:srgbClr val="5F7183"/>
-                </a:solidFill>
-                <a:latin typeface="Arial" pitchFamily="34" charset="0"/>
-                <a:ea typeface="Arial" pitchFamily="34" charset="-122"/>
-                <a:cs typeface="Arial" pitchFamily="34" charset="-120"/>
-              </a:rPr>
-              <a:t>Điểm 0,91 không phải «91% chắc chắn đúng»; nó chỉ để xếp hạng và cắt ngưỡng.</a:t>
-            </a:r>
-            <a:endParaRPr lang="en-US" sz="2300" dirty="0"/>
-          </a:p>
-          <a:p>
-            <a:pPr indent="0" marL="0">
-              <a:lnSpc>
-                <a:spcPct val="120000"/>
-              </a:lnSpc>
-              <a:buNone/>
-            </a:pPr>
-            <a:r>
-              <a:rPr lang="en-US" sz="1150" dirty="0">
-                <a:solidFill>
-                  <a:srgbClr val="5F7183"/>
-                </a:solidFill>
-                <a:latin typeface="微軟正黑體" pitchFamily="34" charset="0"/>
-                <a:ea typeface="微軟正黑體" pitchFamily="34" charset="-122"/>
-                <a:cs typeface="微軟正黑體" pitchFamily="34" charset="-120"/>
-              </a:rPr>
-              <a:t>分數 0.91 不是「91% 一定對」，它是拿來排序、拿來設門檻的。</a:t>
-            </a:r>
-            <a:endParaRPr lang="en-US" sz="2300" dirty="0"/>
-          </a:p>
-        </p:txBody>
-      </p:sp>
-      <p:sp>
-        <p:nvSpPr>
-          <p:cNvPr id="7" name="Shape 4"/>
-          <p:cNvSpPr/>
-          <p:nvPr/>
-        </p:nvSpPr>
-        <p:spPr>
-          <a:xfrm>
-            <a:off x="6141129" y="365760"/>
-            <a:ext cx="2499951" cy="310896"/>
-          </a:xfrm>
-          <a:prstGeom prst="roundRect">
-            <a:avLst>
-              <a:gd name="adj" fmla="val 20588"/>
-            </a:avLst>
-          </a:prstGeom>
-          <a:solidFill>
-            <a:srgbClr val="EAF6F4"/>
-          </a:solidFill>
-          <a:ln w="9525">
-            <a:solidFill>
-              <a:srgbClr val="9FD6CE"/>
-            </a:solidFill>
-            <a:prstDash val="solid"/>
-          </a:ln>
-        </p:spPr>
-      </p:sp>
-      <p:sp>
-        <p:nvSpPr>
-          <p:cNvPr id="8" name="Text 5"/>
-          <p:cNvSpPr txBox="1"/>
-          <p:nvPr/>
-        </p:nvSpPr>
-        <p:spPr>
-          <a:xfrm>
-            <a:off x="6269145" y="384048"/>
-            <a:ext cx="2317071" cy="274320"/>
-          </a:xfrm>
-          <a:prstGeom prst="rect">
-            <a:avLst/>
-          </a:prstGeom>
-          <a:noFill/>
-          <a:ln/>
-        </p:spPr>
-        <p:txBody>
-          <a:bodyPr wrap="square" lIns="0" tIns="0" rIns="0" bIns="0" rtlCol="0" anchor="ctr"/>
-          <a:lstStyle/>
-          <a:p>
-            <a:pPr indent="0" marL="0">
-              <a:lnSpc>
-                <a:spcPct val="100000"/>
-              </a:lnSpc>
-              <a:buNone/>
-            </a:pPr>
-            <a:r>
-              <a:rPr lang="en-US" sz="950" b="1" dirty="0">
-                <a:solidFill>
-                  <a:srgbClr val="007F72"/>
-                </a:solidFill>
-                <a:latin typeface="Arial" pitchFamily="34" charset="0"/>
-                <a:ea typeface="Arial" pitchFamily="34" charset="-122"/>
-                <a:cs typeface="Arial" pitchFamily="34" charset="-120"/>
-              </a:rPr>
-              <a:t>Ví dụ · </a:t>
-            </a:r>
-            <a:pPr indent="0" marL="0">
-              <a:lnSpc>
-                <a:spcPct val="100000"/>
-              </a:lnSpc>
-              <a:buNone/>
-            </a:pPr>
-            <a:r>
-              <a:rPr lang="en-US" sz="950" dirty="0">
-                <a:solidFill>
-                  <a:srgbClr val="1A2733"/>
-                </a:solidFill>
-                <a:latin typeface="Arial" pitchFamily="34" charset="0"/>
-                <a:ea typeface="Arial" pitchFamily="34" charset="-122"/>
-                <a:cs typeface="Arial" pitchFamily="34" charset="-120"/>
-              </a:rPr>
-              <a:t>chấm bài: đáp án kèm mức tự tin</a:t>
-            </a:r>
-            <a:endParaRPr lang="en-US" sz="950" dirty="0"/>
-          </a:p>
-          <a:p>
-            <a:pPr indent="0" marL="0">
-              <a:lnSpc>
-                <a:spcPct val="100000"/>
-              </a:lnSpc>
-              <a:buNone/>
-            </a:pPr>
-            <a:r>
-              <a:rPr lang="en-US" sz="900" b="1" dirty="0">
-                <a:solidFill>
-                  <a:srgbClr val="007F72"/>
-                </a:solidFill>
-                <a:latin typeface="微軟正黑體" pitchFamily="34" charset="0"/>
-                <a:ea typeface="微軟正黑體" pitchFamily="34" charset="-122"/>
-                <a:cs typeface="微軟正黑體" pitchFamily="34" charset="-120"/>
-              </a:rPr>
-              <a:t>例子・</a:t>
-            </a:r>
-            <a:pPr indent="0" marL="0">
-              <a:lnSpc>
-                <a:spcPct val="100000"/>
-              </a:lnSpc>
-              <a:buNone/>
-            </a:pPr>
-            <a:r>
-              <a:rPr lang="en-US" sz="900" dirty="0">
-                <a:solidFill>
-                  <a:srgbClr val="5F7183"/>
-                </a:solidFill>
-                <a:latin typeface="微軟正黑體" pitchFamily="34" charset="0"/>
-                <a:ea typeface="微軟正黑體" pitchFamily="34" charset="-122"/>
-                <a:cs typeface="微軟正黑體" pitchFamily="34" charset="-120"/>
-              </a:rPr>
-              <a:t>考卷寫答案，旁邊再寫有幾分把握</a:t>
-            </a:r>
-            <a:endParaRPr lang="en-US" sz="950" dirty="0"/>
+              <a:t>YOLOX-s 真的中間結果（亮＝反應強）· 第 1 層 32 個通道挑變化最大的一個；後兩個從 64、128 個通道挑「在人身上比背景亮最多」的一個 · nuScenes scene-0553</a:t>
+            </a:r>
+            <a:endParaRPr lang="en-US" sz="850" dirty="0"/>
           </a:p>
         </p:txBody>
       </p:sp>
       <p:pic>
         <p:nvPicPr>
-          <p:cNvPr id="10" name="Image 1" descr="/Users/tsengchenghsun/Class/carClass/Claude outputs/第八週(10-29)/src/logo.png">    </p:cNvPr>
+          <p:cNvPr id="8" name="Image 1" descr="/Users/tsengchenghsun/Class/carClass/Claude outputs/第八週(10-29)/src/logo.png">    </p:cNvPr>
           <p:cNvPicPr>
             <a:picLocks noChangeAspect="1"/>
           </p:cNvPicPr>
@@ -12369,7 +12741,7 @@
       </p:pic>
       <p:sp>
         <p:nvSpPr>
-          <p:cNvPr id="11" name="Text 6"/>
+          <p:cNvPr id="9" name="Text 4"/>
           <p:cNvSpPr txBox="1"/>
           <p:nvPr/>
         </p:nvSpPr>
@@ -12400,7 +12772,7 @@
                 <a:ea typeface="Arial" pitchFamily="34" charset="-122"/>
                 <a:cs typeface="Arial" pitchFamily="34" charset="-120"/>
               </a:rPr>
-              <a:t>13 / 22</a:t>
+              <a:t>13 / 23</a:t>
             </a:r>
             <a:endParaRPr lang="en-US" sz="900" dirty="0"/>
           </a:p>
@@ -12408,7 +12780,7 @@
       </p:sp>
       <p:sp>
         <p:nvSpPr>
-          <p:cNvPr id="12" name="Text 7"/>
+          <p:cNvPr id="10" name="Text 5"/>
           <p:cNvSpPr txBox="1"/>
           <p:nvPr/>
         </p:nvSpPr>
@@ -12478,8 +12850,8 @@
         </p:nvSpPr>
         <p:spPr>
           <a:xfrm>
-            <a:off x="502920" y="292608"/>
-            <a:ext cx="8138160" cy="841248"/>
+            <a:off x="502920" y="420624"/>
+            <a:ext cx="8138160" cy="274320"/>
           </a:xfrm>
           <a:prstGeom prst="rect">
             <a:avLst/>
@@ -12488,6 +12860,490 @@
           <a:ln/>
         </p:spPr>
         <p:txBody>
+          <a:bodyPr wrap="square" lIns="0" tIns="0" rIns="0" bIns="0" rtlCol="0" anchor="ctr"/>
+          <a:lstStyle/>
+          <a:p>
+            <a:pPr indent="0" marL="0">
+              <a:buNone/>
+            </a:pPr>
+            <a:r>
+              <a:rPr lang="en-US" sz="1250" b="1" dirty="0">
+                <a:solidFill>
+                  <a:srgbClr val="007F72"/>
+                </a:solidFill>
+                <a:latin typeface="Arial" pitchFamily="34" charset="0"/>
+                <a:ea typeface="Arial" pitchFamily="34" charset="-122"/>
+                <a:cs typeface="Arial" pitchFamily="34" charset="-120"/>
+              </a:rPr>
+              <a:t>Đầu ra · 偵測器給什麼</a:t>
+            </a:r>
+            <a:endParaRPr lang="en-US" sz="1250" dirty="0"/>
+          </a:p>
+        </p:txBody>
+      </p:sp>
+      <p:sp>
+        <p:nvSpPr>
+          <p:cNvPr id="3" name="Shape 1"/>
+          <p:cNvSpPr/>
+          <p:nvPr/>
+        </p:nvSpPr>
+        <p:spPr>
+          <a:xfrm>
+            <a:off x="502920" y="1412748"/>
+            <a:ext cx="5120640" cy="2514600"/>
+          </a:xfrm>
+          <a:prstGeom prst="roundRect">
+            <a:avLst>
+              <a:gd name="adj" fmla="val 4364"/>
+            </a:avLst>
+          </a:prstGeom>
+          <a:solidFill>
+            <a:srgbClr val="FFFFFF"/>
+          </a:solidFill>
+          <a:ln w="12700">
+            <a:solidFill>
+              <a:srgbClr val="DBE3EA"/>
+            </a:solidFill>
+            <a:prstDash val="solid"/>
+          </a:ln>
+        </p:spPr>
+      </p:sp>
+      <p:pic>
+        <p:nvPicPr>
+          <p:cNvPr id="4" name="Image 0" descr="/Users/tsengchenghsun/Class/carClass/Claude outputs/第八週(10-29)/src/img/w8_det_day.jpg">    </p:cNvPr>
+          <p:cNvPicPr>
+            <a:picLocks noChangeAspect="1"/>
+          </p:cNvPicPr>
+          <p:nvPr/>
+        </p:nvPicPr>
+        <p:blipFill>
+          <a:blip r:embed="rId1"/>
+          <a:stretch>
+            <a:fillRect/>
+          </a:stretch>
+        </p:blipFill>
+        <p:spPr>
+          <a:xfrm>
+            <a:off x="576072" y="1711985"/>
+            <a:ext cx="4974336" cy="1733245"/>
+          </a:xfrm>
+          <a:prstGeom prst="rect">
+            <a:avLst/>
+          </a:prstGeom>
+        </p:spPr>
+      </p:pic>
+      <p:sp>
+        <p:nvSpPr>
+          <p:cNvPr id="5" name="Text 2"/>
+          <p:cNvSpPr txBox="1"/>
+          <p:nvPr/>
+        </p:nvSpPr>
+        <p:spPr>
+          <a:xfrm>
+            <a:off x="576072" y="3707892"/>
+            <a:ext cx="4974336" cy="182880"/>
+          </a:xfrm>
+          <a:prstGeom prst="rect">
+            <a:avLst/>
+          </a:prstGeom>
+          <a:noFill/>
+          <a:ln/>
+        </p:spPr>
+        <p:txBody>
+          <a:bodyPr wrap="square" lIns="0" tIns="0" rIns="0" bIns="0" rtlCol="0" anchor="ctr"/>
+          <a:lstStyle/>
+          <a:p>
+            <a:pPr algn="ctr" indent="0" marL="0">
+              <a:buNone/>
+            </a:pPr>
+            <a:r>
+              <a:rPr lang="en-US" sz="700" dirty="0">
+                <a:solidFill>
+                  <a:srgbClr val="5F7183"/>
+                </a:solidFill>
+                <a:latin typeface="Arial" pitchFamily="34" charset="0"/>
+                <a:ea typeface="Arial" pitchFamily="34" charset="-122"/>
+                <a:cs typeface="Arial" pitchFamily="34" charset="-120"/>
+              </a:rPr>
+              <a:t>YOLOX-s 偵測結果（分數 ≥ 0.5）· nuScenes scene-0553 · CC BY-NC-SA 4.0</a:t>
+            </a:r>
+            <a:endParaRPr lang="en-US" sz="700" dirty="0"/>
+          </a:p>
+        </p:txBody>
+      </p:sp>
+      <p:sp>
+        <p:nvSpPr>
+          <p:cNvPr id="6" name="Text 3"/>
+          <p:cNvSpPr txBox="1"/>
+          <p:nvPr/>
+        </p:nvSpPr>
+        <p:spPr>
+          <a:xfrm>
+            <a:off x="5934456" y="914400"/>
+            <a:ext cx="2706624" cy="3511296"/>
+          </a:xfrm>
+          <a:prstGeom prst="rect">
+            <a:avLst/>
+          </a:prstGeom>
+          <a:noFill/>
+          <a:ln/>
+        </p:spPr>
+        <p:txBody>
+          <a:bodyPr wrap="square" lIns="0" tIns="0" rIns="0" bIns="0" rtlCol="0" anchor="ctr"/>
+          <a:lstStyle/>
+          <a:p>
+            <a:pPr indent="0" marL="0">
+              <a:lnSpc>
+                <a:spcPct val="120000"/>
+              </a:lnSpc>
+              <a:buNone/>
+            </a:pPr>
+            <a:r>
+              <a:rPr lang="en-US" sz="2300" b="1" dirty="0">
+                <a:solidFill>
+                  <a:srgbClr val="0B1F3A"/>
+                </a:solidFill>
+                <a:latin typeface="Arial" pitchFamily="34" charset="0"/>
+                <a:ea typeface="Arial" pitchFamily="34" charset="-122"/>
+                <a:cs typeface="Arial" pitchFamily="34" charset="-120"/>
+              </a:rPr>
+              <a:t>Ba thứ: khung (ở đâu), loại (là gì), điểm (chắc bao nhiêu)</a:t>
+            </a:r>
+            <a:endParaRPr lang="en-US" sz="2300" dirty="0"/>
+          </a:p>
+          <a:p>
+            <a:pPr indent="0" marL="0">
+              <a:lnSpc>
+                <a:spcPct val="120000"/>
+              </a:lnSpc>
+              <a:buNone/>
+            </a:pPr>
+            <a:r>
+              <a:rPr lang="en-US" sz="1400" b="1" dirty="0">
+                <a:solidFill>
+                  <a:srgbClr val="007F72"/>
+                </a:solidFill>
+                <a:latin typeface="微軟正黑體" pitchFamily="34" charset="0"/>
+                <a:ea typeface="微軟正黑體" pitchFamily="34" charset="-122"/>
+                <a:cs typeface="微軟正黑體" pitchFamily="34" charset="-120"/>
+              </a:rPr>
+              <a:t>三樣東西：框（在哪）、類別（是什麼）、分數（多有把握）</a:t>
+            </a:r>
+            <a:endParaRPr lang="en-US" sz="2300" dirty="0"/>
+          </a:p>
+          <a:p>
+            <a:pPr indent="0" marL="0">
+              <a:lnSpc>
+                <a:spcPct val="120000"/>
+              </a:lnSpc>
+              <a:spcBef>
+                <a:spcPts val="1440"/>
+              </a:spcBef>
+              <a:buNone/>
+            </a:pPr>
+            <a:r>
+              <a:rPr lang="en-US" sz="1250" dirty="0">
+                <a:solidFill>
+                  <a:srgbClr val="5F7183"/>
+                </a:solidFill>
+                <a:latin typeface="Arial" pitchFamily="34" charset="0"/>
+                <a:ea typeface="Arial" pitchFamily="34" charset="-122"/>
+                <a:cs typeface="Arial" pitchFamily="34" charset="-120"/>
+              </a:rPr>
+              <a:t>Điểm 0,91 không phải «91% chắc chắn đúng»; nó chỉ để xếp hạng và cắt ngưỡng.</a:t>
+            </a:r>
+            <a:endParaRPr lang="en-US" sz="2300" dirty="0"/>
+          </a:p>
+          <a:p>
+            <a:pPr indent="0" marL="0">
+              <a:lnSpc>
+                <a:spcPct val="120000"/>
+              </a:lnSpc>
+              <a:buNone/>
+            </a:pPr>
+            <a:r>
+              <a:rPr lang="en-US" sz="1150" dirty="0">
+                <a:solidFill>
+                  <a:srgbClr val="5F7183"/>
+                </a:solidFill>
+                <a:latin typeface="微軟正黑體" pitchFamily="34" charset="0"/>
+                <a:ea typeface="微軟正黑體" pitchFamily="34" charset="-122"/>
+                <a:cs typeface="微軟正黑體" pitchFamily="34" charset="-120"/>
+              </a:rPr>
+              <a:t>分數 0.91 不是「91% 一定對」，它是拿來排序、拿來設門檻的。</a:t>
+            </a:r>
+            <a:endParaRPr lang="en-US" sz="2300" dirty="0"/>
+          </a:p>
+        </p:txBody>
+      </p:sp>
+      <p:sp>
+        <p:nvSpPr>
+          <p:cNvPr id="7" name="Shape 4"/>
+          <p:cNvSpPr/>
+          <p:nvPr/>
+        </p:nvSpPr>
+        <p:spPr>
+          <a:xfrm>
+            <a:off x="6141129" y="365760"/>
+            <a:ext cx="2499951" cy="310896"/>
+          </a:xfrm>
+          <a:prstGeom prst="roundRect">
+            <a:avLst>
+              <a:gd name="adj" fmla="val 20588"/>
+            </a:avLst>
+          </a:prstGeom>
+          <a:solidFill>
+            <a:srgbClr val="EAF6F4"/>
+          </a:solidFill>
+          <a:ln w="9525">
+            <a:solidFill>
+              <a:srgbClr val="9FD6CE"/>
+            </a:solidFill>
+            <a:prstDash val="solid"/>
+          </a:ln>
+        </p:spPr>
+      </p:sp>
+      <p:sp>
+        <p:nvSpPr>
+          <p:cNvPr id="8" name="Text 5"/>
+          <p:cNvSpPr txBox="1"/>
+          <p:nvPr/>
+        </p:nvSpPr>
+        <p:spPr>
+          <a:xfrm>
+            <a:off x="6269145" y="384048"/>
+            <a:ext cx="2317071" cy="274320"/>
+          </a:xfrm>
+          <a:prstGeom prst="rect">
+            <a:avLst/>
+          </a:prstGeom>
+          <a:noFill/>
+          <a:ln/>
+        </p:spPr>
+        <p:txBody>
+          <a:bodyPr wrap="square" lIns="0" tIns="0" rIns="0" bIns="0" rtlCol="0" anchor="ctr"/>
+          <a:lstStyle/>
+          <a:p>
+            <a:pPr indent="0" marL="0">
+              <a:lnSpc>
+                <a:spcPct val="100000"/>
+              </a:lnSpc>
+              <a:buNone/>
+            </a:pPr>
+            <a:r>
+              <a:rPr lang="en-US" sz="950" b="1" dirty="0">
+                <a:solidFill>
+                  <a:srgbClr val="007F72"/>
+                </a:solidFill>
+                <a:latin typeface="Arial" pitchFamily="34" charset="0"/>
+                <a:ea typeface="Arial" pitchFamily="34" charset="-122"/>
+                <a:cs typeface="Arial" pitchFamily="34" charset="-120"/>
+              </a:rPr>
+              <a:t>Ví dụ · </a:t>
+            </a:r>
+            <a:pPr indent="0" marL="0">
+              <a:lnSpc>
+                <a:spcPct val="100000"/>
+              </a:lnSpc>
+              <a:buNone/>
+            </a:pPr>
+            <a:r>
+              <a:rPr lang="en-US" sz="950" dirty="0">
+                <a:solidFill>
+                  <a:srgbClr val="1A2733"/>
+                </a:solidFill>
+                <a:latin typeface="Arial" pitchFamily="34" charset="0"/>
+                <a:ea typeface="Arial" pitchFamily="34" charset="-122"/>
+                <a:cs typeface="Arial" pitchFamily="34" charset="-120"/>
+              </a:rPr>
+              <a:t>chấm bài: đáp án kèm mức tự tin</a:t>
+            </a:r>
+            <a:endParaRPr lang="en-US" sz="950" dirty="0"/>
+          </a:p>
+          <a:p>
+            <a:pPr indent="0" marL="0">
+              <a:lnSpc>
+                <a:spcPct val="100000"/>
+              </a:lnSpc>
+              <a:buNone/>
+            </a:pPr>
+            <a:r>
+              <a:rPr lang="en-US" sz="900" b="1" dirty="0">
+                <a:solidFill>
+                  <a:srgbClr val="007F72"/>
+                </a:solidFill>
+                <a:latin typeface="微軟正黑體" pitchFamily="34" charset="0"/>
+                <a:ea typeface="微軟正黑體" pitchFamily="34" charset="-122"/>
+                <a:cs typeface="微軟正黑體" pitchFamily="34" charset="-120"/>
+              </a:rPr>
+              <a:t>例子・</a:t>
+            </a:r>
+            <a:pPr indent="0" marL="0">
+              <a:lnSpc>
+                <a:spcPct val="100000"/>
+              </a:lnSpc>
+              <a:buNone/>
+            </a:pPr>
+            <a:r>
+              <a:rPr lang="en-US" sz="900" dirty="0">
+                <a:solidFill>
+                  <a:srgbClr val="5F7183"/>
+                </a:solidFill>
+                <a:latin typeface="微軟正黑體" pitchFamily="34" charset="0"/>
+                <a:ea typeface="微軟正黑體" pitchFamily="34" charset="-122"/>
+                <a:cs typeface="微軟正黑體" pitchFamily="34" charset="-120"/>
+              </a:rPr>
+              <a:t>考卷寫答案，旁邊再寫有幾分把握</a:t>
+            </a:r>
+            <a:endParaRPr lang="en-US" sz="950" dirty="0"/>
+          </a:p>
+        </p:txBody>
+      </p:sp>
+      <p:pic>
+        <p:nvPicPr>
+          <p:cNvPr id="10" name="Image 1" descr="/Users/tsengchenghsun/Class/carClass/Claude outputs/第八週(10-29)/src/logo.png">    </p:cNvPr>
+          <p:cNvPicPr>
+            <a:picLocks noChangeAspect="1"/>
+          </p:cNvPicPr>
+          <p:nvPr/>
+        </p:nvPicPr>
+        <p:blipFill>
+          <a:blip r:embed="rId2"/>
+          <a:stretch>
+            <a:fillRect/>
+          </a:stretch>
+        </p:blipFill>
+        <p:spPr>
+          <a:xfrm>
+            <a:off x="7882128" y="109728"/>
+            <a:ext cx="1097280" cy="242439"/>
+          </a:xfrm>
+          <a:prstGeom prst="rect">
+            <a:avLst/>
+          </a:prstGeom>
+        </p:spPr>
+      </p:pic>
+      <p:sp>
+        <p:nvSpPr>
+          <p:cNvPr id="11" name="Text 6"/>
+          <p:cNvSpPr txBox="1"/>
+          <p:nvPr/>
+        </p:nvSpPr>
+        <p:spPr>
+          <a:xfrm>
+            <a:off x="109728" y="128016"/>
+            <a:ext cx="822960" cy="256032"/>
+          </a:xfrm>
+          <a:prstGeom prst="rect">
+            <a:avLst/>
+          </a:prstGeom>
+          <a:noFill/>
+          <a:ln/>
+        </p:spPr>
+        <p:txBody>
+          <a:bodyPr wrap="square" lIns="0" tIns="0" rIns="0" bIns="0" rtlCol="0" anchor="ctr"/>
+          <a:lstStyle/>
+          <a:p>
+            <a:pPr indent="0" marL="0">
+              <a:buNone/>
+            </a:pPr>
+            <a:r>
+              <a:rPr lang="en-US" sz="900" dirty="0">
+                <a:solidFill>
+                  <a:srgbClr val="5F7183"/>
+                </a:solidFill>
+                <a:latin typeface="Arial" pitchFamily="34" charset="0"/>
+                <a:ea typeface="Arial" pitchFamily="34" charset="-122"/>
+                <a:cs typeface="Arial" pitchFamily="34" charset="-120"/>
+              </a:rPr>
+              <a:t>14 / 23</a:t>
+            </a:r>
+            <a:endParaRPr lang="en-US" sz="900" dirty="0"/>
+          </a:p>
+        </p:txBody>
+      </p:sp>
+      <p:sp>
+        <p:nvSpPr>
+          <p:cNvPr id="12" name="Text 7"/>
+          <p:cNvSpPr txBox="1"/>
+          <p:nvPr/>
+        </p:nvSpPr>
+        <p:spPr>
+          <a:xfrm>
+            <a:off x="960120" y="128016"/>
+            <a:ext cx="2011680" cy="256032"/>
+          </a:xfrm>
+          <a:prstGeom prst="rect">
+            <a:avLst/>
+          </a:prstGeom>
+          <a:noFill/>
+          <a:ln/>
+        </p:spPr>
+        <p:txBody>
+          <a:bodyPr wrap="square" lIns="0" tIns="0" rIns="0" bIns="0" rtlCol="0" anchor="ctr"/>
+          <a:lstStyle/>
+          <a:p>
+            <a:pPr indent="0" marL="0">
+              <a:buNone/>
+            </a:pPr>
+            <a:r>
+              <a:rPr lang="en-US" sz="900" dirty="0">
+                <a:solidFill>
+                  <a:srgbClr val="5F7183"/>
+                </a:solidFill>
+                <a:latin typeface="Arial" pitchFamily="34" charset="0"/>
+                <a:ea typeface="Arial" pitchFamily="34" charset="-122"/>
+                <a:cs typeface="Arial" pitchFamily="34" charset="-120"/>
+              </a:rPr>
+              <a:t>Tiết 1 · 第 1 節</a:t>
+            </a:r>
+            <a:endParaRPr lang="en-US" sz="900" dirty="0"/>
+          </a:p>
+        </p:txBody>
+      </p:sp>
+    </p:spTree>
+  </p:cSld>
+  <p:clrMapOvr>
+    <a:masterClrMapping/>
+  </p:clrMapOvr>
+</p:sld>
+</file>
+
+<file path=ppt/slides/slide15.xml><?xml version="1.0" encoding="utf-8"?>
+<p:sld xmlns:a="http://schemas.openxmlformats.org/drawingml/2006/main" xmlns:r="http://schemas.openxmlformats.org/officeDocument/2006/relationships" xmlns:p="http://schemas.openxmlformats.org/presentationml/2006/main">
+  <p:cSld name="Slide 15">
+    <p:spTree>
+      <p:nvGrpSpPr>
+        <p:cNvPr id="1" name=""/>
+        <p:cNvGrpSpPr/>
+        <p:nvPr/>
+      </p:nvGrpSpPr>
+      <p:grpSpPr>
+        <a:xfrm>
+          <a:off x="0" y="0"/>
+          <a:ext cx="1" cy="1"/>
+          <a:chOff x="0" y="0"/>
+          <a:chExt cx="0" cy="0"/>
+        </a:xfrm>
+      </p:grpSpPr>
+      <p:sp>
+        <p:nvSpPr>
+          <p:cNvPr id="2" name="Text 0"/>
+          <p:cNvSpPr txBox="1"/>
+          <p:nvPr/>
+        </p:nvSpPr>
+        <p:spPr>
+          <a:xfrm>
+            <a:off x="502920" y="292608"/>
+            <a:ext cx="8138160" cy="841248"/>
+          </a:xfrm>
+          <a:prstGeom prst="rect">
+            <a:avLst/>
+          </a:prstGeom>
+          <a:noFill/>
+          <a:ln/>
+        </p:spPr>
+        <p:txBody>
           <a:bodyPr wrap="square" lIns="0" tIns="0" rIns="0" bIns="0" rtlCol="0" anchor="t"/>
           <a:lstStyle/>
           <a:p>
@@ -12534,7 +13390,7 @@
       </p:sp>
       <p:graphicFrame>
         <p:nvGraphicFramePr>
-          <p:cNvPr id="15" name="Table 0"/>
+          <p:cNvPr id="16" name="Table 0"/>
           <p:cNvGraphicFramePr>
             <a:graphicFrameLocks noGrp="1"/>
           </p:cNvGraphicFramePr>
@@ -13920,7 +14776,7 @@
                 <a:ea typeface="Arial" pitchFamily="34" charset="-122"/>
                 <a:cs typeface="Arial" pitchFamily="34" charset="-120"/>
               </a:rPr>
-              <a:t>14 / 22</a:t>
+              <a:t>15 / 23</a:t>
             </a:r>
             <a:endParaRPr lang="en-US" sz="900" dirty="0"/>
           </a:p>
@@ -13929,794 +14785,6 @@
       <p:sp>
         <p:nvSpPr>
           <p:cNvPr id="8" name="Text 3"/>
-          <p:cNvSpPr txBox="1"/>
-          <p:nvPr/>
-        </p:nvSpPr>
-        <p:spPr>
-          <a:xfrm>
-            <a:off x="960120" y="128016"/>
-            <a:ext cx="2011680" cy="256032"/>
-          </a:xfrm>
-          <a:prstGeom prst="rect">
-            <a:avLst/>
-          </a:prstGeom>
-          <a:noFill/>
-          <a:ln/>
-        </p:spPr>
-        <p:txBody>
-          <a:bodyPr wrap="square" lIns="0" tIns="0" rIns="0" bIns="0" rtlCol="0" anchor="ctr"/>
-          <a:lstStyle/>
-          <a:p>
-            <a:pPr indent="0" marL="0">
-              <a:buNone/>
-            </a:pPr>
-            <a:r>
-              <a:rPr lang="en-US" sz="900" dirty="0">
-                <a:solidFill>
-                  <a:srgbClr val="5F7183"/>
-                </a:solidFill>
-                <a:latin typeface="Arial" pitchFamily="34" charset="0"/>
-                <a:ea typeface="Arial" pitchFamily="34" charset="-122"/>
-                <a:cs typeface="Arial" pitchFamily="34" charset="-120"/>
-              </a:rPr>
-              <a:t>Tiết 1 · 第 1 節</a:t>
-            </a:r>
-            <a:endParaRPr lang="en-US" sz="900" dirty="0"/>
-          </a:p>
-        </p:txBody>
-      </p:sp>
-    </p:spTree>
-  </p:cSld>
-  <p:clrMapOvr>
-    <a:masterClrMapping/>
-  </p:clrMapOvr>
-</p:sld>
-</file>
-
-<file path=ppt/slides/slide15.xml><?xml version="1.0" encoding="utf-8"?>
-<p:sld xmlns:a="http://schemas.openxmlformats.org/drawingml/2006/main" xmlns:r="http://schemas.openxmlformats.org/officeDocument/2006/relationships" xmlns:p="http://schemas.openxmlformats.org/presentationml/2006/main">
-  <p:cSld name="Slide 15">
-    <p:spTree>
-      <p:nvGrpSpPr>
-        <p:cNvPr id="1" name=""/>
-        <p:cNvGrpSpPr/>
-        <p:nvPr/>
-      </p:nvGrpSpPr>
-      <p:grpSpPr>
-        <a:xfrm>
-          <a:off x="0" y="0"/>
-          <a:ext cx="1" cy="1"/>
-          <a:chOff x="0" y="0"/>
-          <a:chExt cx="0" cy="0"/>
-        </a:xfrm>
-      </p:grpSpPr>
-      <p:sp>
-        <p:nvSpPr>
-          <p:cNvPr id="2" name="Text 0"/>
-          <p:cNvSpPr txBox="1"/>
-          <p:nvPr/>
-        </p:nvSpPr>
-        <p:spPr>
-          <a:xfrm>
-            <a:off x="502920" y="365760"/>
-            <a:ext cx="8138160" cy="274320"/>
-          </a:xfrm>
-          <a:prstGeom prst="rect">
-            <a:avLst/>
-          </a:prstGeom>
-          <a:noFill/>
-          <a:ln/>
-        </p:spPr>
-        <p:txBody>
-          <a:bodyPr wrap="square" lIns="0" tIns="0" rIns="0" bIns="0" rtlCol="0" anchor="ctr"/>
-          <a:lstStyle/>
-          <a:p>
-            <a:pPr indent="0" marL="0">
-              <a:buNone/>
-            </a:pPr>
-            <a:r>
-              <a:rPr lang="en-US" sz="1300" b="1" dirty="0">
-                <a:solidFill>
-                  <a:srgbClr val="007F72"/>
-                </a:solidFill>
-                <a:latin typeface="Arial" pitchFamily="34" charset="0"/>
-                <a:ea typeface="Arial" pitchFamily="34" charset="-122"/>
-                <a:cs typeface="Arial" pitchFamily="34" charset="-120"/>
-              </a:rPr>
-              <a:t>Ngưỡng · 門檻</a:t>
-            </a:r>
-            <a:endParaRPr lang="en-US" sz="1300" dirty="0"/>
-          </a:p>
-        </p:txBody>
-      </p:sp>
-      <p:sp>
-        <p:nvSpPr>
-          <p:cNvPr id="3" name="Text 1"/>
-          <p:cNvSpPr txBox="1"/>
-          <p:nvPr/>
-        </p:nvSpPr>
-        <p:spPr>
-          <a:xfrm>
-            <a:off x="502920" y="676656"/>
-            <a:ext cx="8138160" cy="560684"/>
-          </a:xfrm>
-          <a:prstGeom prst="rect">
-            <a:avLst/>
-          </a:prstGeom>
-          <a:noFill/>
-          <a:ln/>
-        </p:spPr>
-        <p:txBody>
-          <a:bodyPr wrap="square" lIns="0" tIns="0" rIns="0" bIns="0" rtlCol="0" anchor="t"/>
-          <a:lstStyle/>
-          <a:p>
-            <a:pPr indent="0" marL="0">
-              <a:lnSpc>
-                <a:spcPct val="116000"/>
-              </a:lnSpc>
-              <a:buNone/>
-            </a:pPr>
-            <a:r>
-              <a:rPr lang="en-US" sz="1700" b="1" dirty="0">
-                <a:solidFill>
-                  <a:srgbClr val="0B1F3A"/>
-                </a:solidFill>
-                <a:latin typeface="Arial" pitchFamily="34" charset="0"/>
-                <a:ea typeface="Arial" pitchFamily="34" charset="-122"/>
-                <a:cs typeface="Arial" pitchFamily="34" charset="-120"/>
-              </a:rPr>
-              <a:t>Ngưỡng thấp: báo thêm. Ngưỡng cao: bỏ sót</a:t>
-            </a:r>
-            <a:endParaRPr lang="en-US" sz="1700" dirty="0"/>
-          </a:p>
-          <a:p>
-            <a:pPr indent="0" marL="0">
-              <a:lnSpc>
-                <a:spcPct val="116000"/>
-              </a:lnSpc>
-              <a:buNone/>
-            </a:pPr>
-            <a:r>
-              <a:rPr lang="en-US" sz="1250" dirty="0">
-                <a:solidFill>
-                  <a:srgbClr val="5F7183"/>
-                </a:solidFill>
-                <a:latin typeface="微軟正黑體" pitchFamily="34" charset="0"/>
-                <a:ea typeface="微軟正黑體" pitchFamily="34" charset="-122"/>
-                <a:cs typeface="微軟正黑體" pitchFamily="34" charset="-120"/>
-              </a:rPr>
-              <a:t>門檻低：多報。門檻高：漏掉</a:t>
-            </a:r>
-            <a:endParaRPr lang="en-US" sz="1700" dirty="0"/>
-          </a:p>
-        </p:txBody>
-      </p:sp>
-      <p:sp>
-        <p:nvSpPr>
-          <p:cNvPr id="4" name="Shape 2"/>
-          <p:cNvSpPr/>
-          <p:nvPr/>
-        </p:nvSpPr>
-        <p:spPr>
-          <a:xfrm>
-            <a:off x="502920" y="1310492"/>
-            <a:ext cx="3931920" cy="2300800"/>
-          </a:xfrm>
-          <a:prstGeom prst="roundRect">
-            <a:avLst>
-              <a:gd name="adj" fmla="val 3974"/>
-            </a:avLst>
-          </a:prstGeom>
-          <a:solidFill>
-            <a:srgbClr val="FFFFFF"/>
-          </a:solidFill>
-          <a:ln w="12700">
-            <a:solidFill>
-              <a:srgbClr val="DBE3EA"/>
-            </a:solidFill>
-            <a:prstDash val="solid"/>
-          </a:ln>
-        </p:spPr>
-      </p:sp>
-      <p:sp>
-        <p:nvSpPr>
-          <p:cNvPr id="5" name="Shape 3"/>
-          <p:cNvSpPr/>
-          <p:nvPr/>
-        </p:nvSpPr>
-        <p:spPr>
-          <a:xfrm>
-            <a:off x="594360" y="1401932"/>
-            <a:ext cx="3749040" cy="472857"/>
-          </a:xfrm>
-          <a:prstGeom prst="roundRect">
-            <a:avLst>
-              <a:gd name="adj" fmla="val 9669"/>
-            </a:avLst>
-          </a:prstGeom>
-          <a:solidFill>
-            <a:srgbClr val="0B1F3A"/>
-          </a:solidFill>
-          <a:ln/>
-        </p:spPr>
-      </p:sp>
-      <p:sp>
-        <p:nvSpPr>
-          <p:cNvPr id="6" name="Text 4"/>
-          <p:cNvSpPr txBox="1"/>
-          <p:nvPr/>
-        </p:nvSpPr>
-        <p:spPr>
-          <a:xfrm>
-            <a:off x="667512" y="1429364"/>
-            <a:ext cx="3602736" cy="436281"/>
-          </a:xfrm>
-          <a:prstGeom prst="rect">
-            <a:avLst/>
-          </a:prstGeom>
-          <a:noFill/>
-          <a:ln/>
-        </p:spPr>
-        <p:txBody>
-          <a:bodyPr wrap="square" lIns="0" tIns="0" rIns="0" bIns="0" rtlCol="0" anchor="t"/>
-          <a:lstStyle/>
-          <a:p>
-            <a:pPr algn="ctr" indent="0" marL="0">
-              <a:lnSpc>
-                <a:spcPct val="104000"/>
-              </a:lnSpc>
-              <a:buNone/>
-            </a:pPr>
-            <a:r>
-              <a:rPr lang="en-US" sz="950" b="1" dirty="0">
-                <a:solidFill>
-                  <a:srgbClr val="FFFFFF"/>
-                </a:solidFill>
-                <a:latin typeface="Arial" pitchFamily="34" charset="0"/>
-                <a:ea typeface="Arial" pitchFamily="34" charset="-122"/>
-                <a:cs typeface="Arial" pitchFamily="34" charset="-120"/>
-              </a:rPr>
-              <a:t>Ngưỡng 0,3: bắt được nhiều người hơn, cả người trong trung tâm thương mại</a:t>
-            </a:r>
-            <a:endParaRPr lang="en-US" sz="950" dirty="0"/>
-          </a:p>
-          <a:p>
-            <a:pPr algn="ctr" indent="0" marL="0">
-              <a:lnSpc>
-                <a:spcPct val="104000"/>
-              </a:lnSpc>
-              <a:buNone/>
-            </a:pPr>
-            <a:r>
-              <a:rPr lang="en-US" sz="850" dirty="0">
-                <a:solidFill>
-                  <a:srgbClr val="FFFFFF"/>
-                </a:solidFill>
-                <a:latin typeface="微軟正黑體" pitchFamily="34" charset="0"/>
-                <a:ea typeface="微軟正黑體" pitchFamily="34" charset="-122"/>
-                <a:cs typeface="微軟正黑體" pitchFamily="34" charset="-120"/>
-              </a:rPr>
-              <a:t>門檻 0.3：抓到更多人，連商場裡的人也算</a:t>
-            </a:r>
-            <a:endParaRPr lang="en-US" sz="950" dirty="0"/>
-          </a:p>
-        </p:txBody>
-      </p:sp>
-      <p:pic>
-        <p:nvPicPr>
-          <p:cNvPr id="7" name="Image 0" descr="/Users/tsengchenghsun/Class/carClass/Claude outputs/第八週(10-29)/src/img/w8_thr_low.jpg">    </p:cNvPr>
-          <p:cNvPicPr>
-            <a:picLocks noChangeAspect="1"/>
-          </p:cNvPicPr>
-          <p:nvPr/>
-        </p:nvPicPr>
-        <p:blipFill>
-          <a:blip r:embed="rId1"/>
-          <a:stretch>
-            <a:fillRect/>
-          </a:stretch>
-        </p:blipFill>
-        <p:spPr>
-          <a:xfrm>
-            <a:off x="594360" y="1929653"/>
-            <a:ext cx="3749040" cy="1370743"/>
-          </a:xfrm>
-          <a:prstGeom prst="rect">
-            <a:avLst/>
-          </a:prstGeom>
-        </p:spPr>
-      </p:pic>
-      <p:sp>
-        <p:nvSpPr>
-          <p:cNvPr id="8" name="Text 5"/>
-          <p:cNvSpPr txBox="1"/>
-          <p:nvPr/>
-        </p:nvSpPr>
-        <p:spPr>
-          <a:xfrm>
-            <a:off x="594360" y="3318684"/>
-            <a:ext cx="3749040" cy="182880"/>
-          </a:xfrm>
-          <a:prstGeom prst="rect">
-            <a:avLst/>
-          </a:prstGeom>
-          <a:noFill/>
-          <a:ln/>
-        </p:spPr>
-        <p:txBody>
-          <a:bodyPr wrap="square" lIns="0" tIns="0" rIns="0" bIns="0" rtlCol="0" anchor="ctr"/>
-          <a:lstStyle/>
-          <a:p>
-            <a:pPr algn="ctr" indent="0" marL="0">
-              <a:buNone/>
-            </a:pPr>
-            <a:r>
-              <a:rPr lang="en-US" sz="700" dirty="0">
-                <a:solidFill>
-                  <a:srgbClr val="5F7183"/>
-                </a:solidFill>
-                <a:latin typeface="Arial" pitchFamily="34" charset="0"/>
-                <a:ea typeface="Arial" pitchFamily="34" charset="-122"/>
-                <a:cs typeface="Arial" pitchFamily="34" charset="-120"/>
-              </a:rPr>
-              <a:t>nuScenes scene-1094（新加坡，夜間雨後）· YOLOX-s</a:t>
-            </a:r>
-            <a:endParaRPr lang="en-US" sz="700" dirty="0"/>
-          </a:p>
-        </p:txBody>
-      </p:sp>
-      <p:sp>
-        <p:nvSpPr>
-          <p:cNvPr id="9" name="Shape 6"/>
-          <p:cNvSpPr/>
-          <p:nvPr/>
-        </p:nvSpPr>
-        <p:spPr>
-          <a:xfrm>
-            <a:off x="4709160" y="1310492"/>
-            <a:ext cx="3931920" cy="2300800"/>
-          </a:xfrm>
-          <a:prstGeom prst="roundRect">
-            <a:avLst>
-              <a:gd name="adj" fmla="val 3974"/>
-            </a:avLst>
-          </a:prstGeom>
-          <a:solidFill>
-            <a:srgbClr val="FFFFFF"/>
-          </a:solidFill>
-          <a:ln w="12700">
-            <a:solidFill>
-              <a:srgbClr val="DBE3EA"/>
-            </a:solidFill>
-            <a:prstDash val="solid"/>
-          </a:ln>
-        </p:spPr>
-      </p:sp>
-      <p:sp>
-        <p:nvSpPr>
-          <p:cNvPr id="10" name="Shape 7"/>
-          <p:cNvSpPr/>
-          <p:nvPr/>
-        </p:nvSpPr>
-        <p:spPr>
-          <a:xfrm>
-            <a:off x="4800600" y="1401932"/>
-            <a:ext cx="3749040" cy="472857"/>
-          </a:xfrm>
-          <a:prstGeom prst="roundRect">
-            <a:avLst>
-              <a:gd name="adj" fmla="val 9669"/>
-            </a:avLst>
-          </a:prstGeom>
-          <a:solidFill>
-            <a:srgbClr val="007F72"/>
-          </a:solidFill>
-          <a:ln/>
-        </p:spPr>
-      </p:sp>
-      <p:sp>
-        <p:nvSpPr>
-          <p:cNvPr id="11" name="Text 8"/>
-          <p:cNvSpPr txBox="1"/>
-          <p:nvPr/>
-        </p:nvSpPr>
-        <p:spPr>
-          <a:xfrm>
-            <a:off x="4873752" y="1429364"/>
-            <a:ext cx="3602736" cy="436281"/>
-          </a:xfrm>
-          <a:prstGeom prst="rect">
-            <a:avLst/>
-          </a:prstGeom>
-          <a:noFill/>
-          <a:ln/>
-        </p:spPr>
-        <p:txBody>
-          <a:bodyPr wrap="square" lIns="0" tIns="0" rIns="0" bIns="0" rtlCol="0" anchor="t"/>
-          <a:lstStyle/>
-          <a:p>
-            <a:pPr algn="ctr" indent="0" marL="0">
-              <a:lnSpc>
-                <a:spcPct val="104000"/>
-              </a:lnSpc>
-              <a:buNone/>
-            </a:pPr>
-            <a:r>
-              <a:rPr lang="en-US" sz="950" b="1" dirty="0">
-                <a:solidFill>
-                  <a:srgbClr val="FFFFFF"/>
-                </a:solidFill>
-                <a:latin typeface="Arial" pitchFamily="34" charset="0"/>
-                <a:ea typeface="Arial" pitchFamily="34" charset="-122"/>
-                <a:cs typeface="Arial" pitchFamily="34" charset="-120"/>
-              </a:rPr>
-              <a:t>Ngưỡng 0,7: gọn, nhưng bỏ sót người gần (nét đứt trắng)</a:t>
-            </a:r>
-            <a:endParaRPr lang="en-US" sz="950" dirty="0"/>
-          </a:p>
-          <a:p>
-            <a:pPr algn="ctr" indent="0" marL="0">
-              <a:lnSpc>
-                <a:spcPct val="104000"/>
-              </a:lnSpc>
-              <a:buNone/>
-            </a:pPr>
-            <a:r>
-              <a:rPr lang="en-US" sz="850" dirty="0">
-                <a:solidFill>
-                  <a:srgbClr val="FFFFFF"/>
-                </a:solidFill>
-                <a:latin typeface="微軟正黑體" pitchFamily="34" charset="0"/>
-                <a:ea typeface="微軟正黑體" pitchFamily="34" charset="-122"/>
-                <a:cs typeface="微軟正黑體" pitchFamily="34" charset="-120"/>
-              </a:rPr>
-              <a:t>門檻 0.7：很乾淨，但近處的人漏了（白色虛線）</a:t>
-            </a:r>
-            <a:endParaRPr lang="en-US" sz="950" dirty="0"/>
-          </a:p>
-        </p:txBody>
-      </p:sp>
-      <p:pic>
-        <p:nvPicPr>
-          <p:cNvPr id="12" name="Image 1" descr="/Users/tsengchenghsun/Class/carClass/Claude outputs/第八週(10-29)/src/img/w8_thr_high.jpg">    </p:cNvPr>
-          <p:cNvPicPr>
-            <a:picLocks noChangeAspect="1"/>
-          </p:cNvPicPr>
-          <p:nvPr/>
-        </p:nvPicPr>
-        <p:blipFill>
-          <a:blip r:embed="rId2"/>
-          <a:stretch>
-            <a:fillRect/>
-          </a:stretch>
-        </p:blipFill>
-        <p:spPr>
-          <a:xfrm>
-            <a:off x="4800600" y="1929653"/>
-            <a:ext cx="3749040" cy="1370743"/>
-          </a:xfrm>
-          <a:prstGeom prst="rect">
-            <a:avLst/>
-          </a:prstGeom>
-        </p:spPr>
-      </p:pic>
-      <p:sp>
-        <p:nvSpPr>
-          <p:cNvPr id="13" name="Text 9"/>
-          <p:cNvSpPr txBox="1"/>
-          <p:nvPr/>
-        </p:nvSpPr>
-        <p:spPr>
-          <a:xfrm>
-            <a:off x="4800600" y="3318684"/>
-            <a:ext cx="3749040" cy="182880"/>
-          </a:xfrm>
-          <a:prstGeom prst="rect">
-            <a:avLst/>
-          </a:prstGeom>
-          <a:noFill/>
-          <a:ln/>
-        </p:spPr>
-        <p:txBody>
-          <a:bodyPr wrap="square" lIns="0" tIns="0" rIns="0" bIns="0" rtlCol="0" anchor="ctr"/>
-          <a:lstStyle/>
-          <a:p>
-            <a:pPr algn="ctr" indent="0" marL="0">
-              <a:buNone/>
-            </a:pPr>
-            <a:r>
-              <a:rPr lang="en-US" sz="700" dirty="0">
-                <a:solidFill>
-                  <a:srgbClr val="5F7183"/>
-                </a:solidFill>
-                <a:latin typeface="Arial" pitchFamily="34" charset="0"/>
-                <a:ea typeface="Arial" pitchFamily="34" charset="-122"/>
-                <a:cs typeface="Arial" pitchFamily="34" charset="-120"/>
-              </a:rPr>
-              <a:t>白色虛線＝官方標註有、這個門檻下沒抓到的行人</a:t>
-            </a:r>
-            <a:endParaRPr lang="en-US" sz="700" dirty="0"/>
-          </a:p>
-        </p:txBody>
-      </p:sp>
-      <p:sp>
-        <p:nvSpPr>
-          <p:cNvPr id="14" name="Shape 10"/>
-          <p:cNvSpPr/>
-          <p:nvPr/>
-        </p:nvSpPr>
-        <p:spPr>
-          <a:xfrm>
-            <a:off x="502920" y="3757596"/>
-            <a:ext cx="8138160" cy="566928"/>
-          </a:xfrm>
-          <a:prstGeom prst="roundRect">
-            <a:avLst>
-              <a:gd name="adj" fmla="val 14516"/>
-            </a:avLst>
-          </a:prstGeom>
-          <a:solidFill>
-            <a:srgbClr val="FFF6E3"/>
-          </a:solidFill>
-          <a:ln w="12700">
-            <a:solidFill>
-              <a:srgbClr val="FFB020"/>
-            </a:solidFill>
-            <a:prstDash val="solid"/>
-          </a:ln>
-        </p:spPr>
-      </p:sp>
-      <p:sp>
-        <p:nvSpPr>
-          <p:cNvPr id="15" name="Text 11"/>
-          <p:cNvSpPr txBox="1"/>
-          <p:nvPr/>
-        </p:nvSpPr>
-        <p:spPr>
-          <a:xfrm>
-            <a:off x="685800" y="3821604"/>
-            <a:ext cx="7772400" cy="457200"/>
-          </a:xfrm>
-          <a:prstGeom prst="rect">
-            <a:avLst/>
-          </a:prstGeom>
-          <a:noFill/>
-          <a:ln/>
-        </p:spPr>
-        <p:txBody>
-          <a:bodyPr wrap="square" lIns="0" tIns="0" rIns="0" bIns="0" rtlCol="0" anchor="t"/>
-          <a:lstStyle/>
-          <a:p>
-            <a:pPr indent="0" marL="0">
-              <a:lnSpc>
-                <a:spcPct val="116000"/>
-              </a:lnSpc>
-              <a:buNone/>
-            </a:pPr>
-            <a:r>
-              <a:rPr lang="en-US" sz="1200" b="1" dirty="0">
-                <a:solidFill>
-                  <a:srgbClr val="7A4E00"/>
-                </a:solidFill>
-                <a:latin typeface="Arial" pitchFamily="34" charset="0"/>
-                <a:ea typeface="Arial" pitchFamily="34" charset="-122"/>
-                <a:cs typeface="Arial" pitchFamily="34" charset="-120"/>
-              </a:rPr>
-              <a:t>Báo thêm → phanh nhầm (tuần 7: phanh ma). Bỏ sót → đâm vào. Phải chọn đánh đổi.</a:t>
-            </a:r>
-            <a:endParaRPr lang="en-US" sz="1200" dirty="0"/>
-          </a:p>
-          <a:p>
-            <a:pPr indent="0" marL="0">
-              <a:lnSpc>
-                <a:spcPct val="116000"/>
-              </a:lnSpc>
-              <a:buNone/>
-            </a:pPr>
-            <a:r>
-              <a:rPr lang="en-US" sz="1100" dirty="0">
-                <a:solidFill>
-                  <a:srgbClr val="7A4E00"/>
-                </a:solidFill>
-                <a:latin typeface="微軟正黑體" pitchFamily="34" charset="0"/>
-                <a:ea typeface="微軟正黑體" pitchFamily="34" charset="-122"/>
-                <a:cs typeface="微軟正黑體" pitchFamily="34" charset="-120"/>
-              </a:rPr>
-              <a:t>多報→亂煞車（上週的幽靈煞車）。漏掉→會撞上。門檻是在兩者之間取捨。</a:t>
-            </a:r>
-            <a:endParaRPr lang="en-US" sz="1200" dirty="0"/>
-          </a:p>
-        </p:txBody>
-      </p:sp>
-      <p:sp>
-        <p:nvSpPr>
-          <p:cNvPr id="16" name="Shape 12"/>
-          <p:cNvSpPr/>
-          <p:nvPr/>
-        </p:nvSpPr>
-        <p:spPr>
-          <a:xfrm>
-            <a:off x="4885646" y="365760"/>
-            <a:ext cx="3755434" cy="310896"/>
-          </a:xfrm>
-          <a:prstGeom prst="roundRect">
-            <a:avLst>
-              <a:gd name="adj" fmla="val 20588"/>
-            </a:avLst>
-          </a:prstGeom>
-          <a:solidFill>
-            <a:srgbClr val="EAF6F4"/>
-          </a:solidFill>
-          <a:ln w="9525">
-            <a:solidFill>
-              <a:srgbClr val="9FD6CE"/>
-            </a:solidFill>
-            <a:prstDash val="solid"/>
-          </a:ln>
-        </p:spPr>
-      </p:sp>
-      <p:sp>
-        <p:nvSpPr>
-          <p:cNvPr id="17" name="Text 13"/>
-          <p:cNvSpPr txBox="1"/>
-          <p:nvPr/>
-        </p:nvSpPr>
-        <p:spPr>
-          <a:xfrm>
-            <a:off x="5013662" y="384048"/>
-            <a:ext cx="3572554" cy="274320"/>
-          </a:xfrm>
-          <a:prstGeom prst="rect">
-            <a:avLst/>
-          </a:prstGeom>
-          <a:noFill/>
-          <a:ln/>
-        </p:spPr>
-        <p:txBody>
-          <a:bodyPr wrap="square" lIns="0" tIns="0" rIns="0" bIns="0" rtlCol="0" anchor="ctr"/>
-          <a:lstStyle/>
-          <a:p>
-            <a:pPr indent="0" marL="0">
-              <a:lnSpc>
-                <a:spcPct val="100000"/>
-              </a:lnSpc>
-              <a:buNone/>
-            </a:pPr>
-            <a:r>
-              <a:rPr lang="en-US" sz="950" b="1" dirty="0">
-                <a:solidFill>
-                  <a:srgbClr val="007F72"/>
-                </a:solidFill>
-                <a:latin typeface="Arial" pitchFamily="34" charset="0"/>
-                <a:ea typeface="Arial" pitchFamily="34" charset="-122"/>
-                <a:cs typeface="Arial" pitchFamily="34" charset="-120"/>
-              </a:rPr>
-              <a:t>Ví dụ · </a:t>
-            </a:r>
-            <a:pPr indent="0" marL="0">
-              <a:lnSpc>
-                <a:spcPct val="100000"/>
-              </a:lnSpc>
-              <a:buNone/>
-            </a:pPr>
-            <a:r>
-              <a:rPr lang="en-US" sz="950" dirty="0">
-                <a:solidFill>
-                  <a:srgbClr val="1A2733"/>
-                </a:solidFill>
-                <a:latin typeface="Arial" pitchFamily="34" charset="0"/>
-                <a:ea typeface="Arial" pitchFamily="34" charset="-122"/>
-                <a:cs typeface="Arial" pitchFamily="34" charset="-120"/>
-              </a:rPr>
-              <a:t>chuông báo cháy: nhạy quá kêu hoài, kém quá không kêu</a:t>
-            </a:r>
-            <a:endParaRPr lang="en-US" sz="950" dirty="0"/>
-          </a:p>
-          <a:p>
-            <a:pPr indent="0" marL="0">
-              <a:lnSpc>
-                <a:spcPct val="100000"/>
-              </a:lnSpc>
-              <a:buNone/>
-            </a:pPr>
-            <a:r>
-              <a:rPr lang="en-US" sz="900" b="1" dirty="0">
-                <a:solidFill>
-                  <a:srgbClr val="007F72"/>
-                </a:solidFill>
-                <a:latin typeface="微軟正黑體" pitchFamily="34" charset="0"/>
-                <a:ea typeface="微軟正黑體" pitchFamily="34" charset="-122"/>
-                <a:cs typeface="微軟正黑體" pitchFamily="34" charset="-120"/>
-              </a:rPr>
-              <a:t>例子・</a:t>
-            </a:r>
-            <a:pPr indent="0" marL="0">
-              <a:lnSpc>
-                <a:spcPct val="100000"/>
-              </a:lnSpc>
-              <a:buNone/>
-            </a:pPr>
-            <a:r>
-              <a:rPr lang="en-US" sz="900" dirty="0">
-                <a:solidFill>
-                  <a:srgbClr val="5F7183"/>
-                </a:solidFill>
-                <a:latin typeface="微軟正黑體" pitchFamily="34" charset="0"/>
-                <a:ea typeface="微軟正黑體" pitchFamily="34" charset="-122"/>
-                <a:cs typeface="微軟正黑體" pitchFamily="34" charset="-120"/>
-              </a:rPr>
-              <a:t>火災警報器：太敏感一直響，太遲鈍不響</a:t>
-            </a:r>
-            <a:endParaRPr lang="en-US" sz="950" dirty="0"/>
-          </a:p>
-        </p:txBody>
-      </p:sp>
-      <p:pic>
-        <p:nvPicPr>
-          <p:cNvPr id="19" name="Image 2" descr="/Users/tsengchenghsun/Class/carClass/Claude outputs/第八週(10-29)/src/logo.png">    </p:cNvPr>
-          <p:cNvPicPr>
-            <a:picLocks noChangeAspect="1"/>
-          </p:cNvPicPr>
-          <p:nvPr/>
-        </p:nvPicPr>
-        <p:blipFill>
-          <a:blip r:embed="rId3"/>
-          <a:stretch>
-            <a:fillRect/>
-          </a:stretch>
-        </p:blipFill>
-        <p:spPr>
-          <a:xfrm>
-            <a:off x="7882128" y="109728"/>
-            <a:ext cx="1097280" cy="242439"/>
-          </a:xfrm>
-          <a:prstGeom prst="rect">
-            <a:avLst/>
-          </a:prstGeom>
-        </p:spPr>
-      </p:pic>
-      <p:sp>
-        <p:nvSpPr>
-          <p:cNvPr id="20" name="Text 14"/>
-          <p:cNvSpPr txBox="1"/>
-          <p:nvPr/>
-        </p:nvSpPr>
-        <p:spPr>
-          <a:xfrm>
-            <a:off x="109728" y="128016"/>
-            <a:ext cx="822960" cy="256032"/>
-          </a:xfrm>
-          <a:prstGeom prst="rect">
-            <a:avLst/>
-          </a:prstGeom>
-          <a:noFill/>
-          <a:ln/>
-        </p:spPr>
-        <p:txBody>
-          <a:bodyPr wrap="square" lIns="0" tIns="0" rIns="0" bIns="0" rtlCol="0" anchor="ctr"/>
-          <a:lstStyle/>
-          <a:p>
-            <a:pPr indent="0" marL="0">
-              <a:buNone/>
-            </a:pPr>
-            <a:r>
-              <a:rPr lang="en-US" sz="900" dirty="0">
-                <a:solidFill>
-                  <a:srgbClr val="5F7183"/>
-                </a:solidFill>
-                <a:latin typeface="Arial" pitchFamily="34" charset="0"/>
-                <a:ea typeface="Arial" pitchFamily="34" charset="-122"/>
-                <a:cs typeface="Arial" pitchFamily="34" charset="-120"/>
-              </a:rPr>
-              <a:t>15 / 22</a:t>
-            </a:r>
-            <a:endParaRPr lang="en-US" sz="900" dirty="0"/>
-          </a:p>
-        </p:txBody>
-      </p:sp>
-      <p:sp>
-        <p:nvSpPr>
-          <p:cNvPr id="21" name="Text 15"/>
           <p:cNvSpPr txBox="1"/>
           <p:nvPr/>
         </p:nvSpPr>
@@ -14786,8 +14854,8 @@
         </p:nvSpPr>
         <p:spPr>
           <a:xfrm>
-            <a:off x="502920" y="292608"/>
-            <a:ext cx="8138160" cy="841248"/>
+            <a:off x="502920" y="365760"/>
+            <a:ext cx="8138160" cy="274320"/>
           </a:xfrm>
           <a:prstGeom prst="rect">
             <a:avLst/>
@@ -14796,6 +14864,45 @@
           <a:ln/>
         </p:spPr>
         <p:txBody>
+          <a:bodyPr wrap="square" lIns="0" tIns="0" rIns="0" bIns="0" rtlCol="0" anchor="ctr"/>
+          <a:lstStyle/>
+          <a:p>
+            <a:pPr indent="0" marL="0">
+              <a:buNone/>
+            </a:pPr>
+            <a:r>
+              <a:rPr lang="en-US" sz="1300" b="1" dirty="0">
+                <a:solidFill>
+                  <a:srgbClr val="007F72"/>
+                </a:solidFill>
+                <a:latin typeface="Arial" pitchFamily="34" charset="0"/>
+                <a:ea typeface="Arial" pitchFamily="34" charset="-122"/>
+                <a:cs typeface="Arial" pitchFamily="34" charset="-120"/>
+              </a:rPr>
+              <a:t>Ngưỡng · 門檻</a:t>
+            </a:r>
+            <a:endParaRPr lang="en-US" sz="1300" dirty="0"/>
+          </a:p>
+        </p:txBody>
+      </p:sp>
+      <p:sp>
+        <p:nvSpPr>
+          <p:cNvPr id="3" name="Text 1"/>
+          <p:cNvSpPr txBox="1"/>
+          <p:nvPr/>
+        </p:nvSpPr>
+        <p:spPr>
+          <a:xfrm>
+            <a:off x="502920" y="676656"/>
+            <a:ext cx="8138160" cy="560684"/>
+          </a:xfrm>
+          <a:prstGeom prst="rect">
+            <a:avLst/>
+          </a:prstGeom>
+          <a:noFill/>
+          <a:ln/>
+        </p:spPr>
+        <p:txBody>
           <a:bodyPr wrap="square" lIns="0" tIns="0" rIns="0" bIns="0" rtlCol="0" anchor="t"/>
           <a:lstStyle/>
           <a:p>
@@ -14806,7 +14913,7 @@
               <a:buNone/>
             </a:pPr>
             <a:r>
-              <a:rPr lang="en-US" sz="2200" b="1" dirty="0">
+              <a:rPr lang="en-US" sz="1700" b="1" dirty="0">
                 <a:solidFill>
                   <a:srgbClr val="0B1F3A"/>
                 </a:solidFill>
@@ -14814,9 +14921,9 @@
                 <a:ea typeface="Arial" pitchFamily="34" charset="-122"/>
                 <a:cs typeface="Arial" pitchFamily="34" charset="-120"/>
               </a:rPr>
-              <a:t>404 ảnh camera trước: kéo ngưỡng từ 0,1 đến 0,9</a:t>
-            </a:r>
-            <a:endParaRPr lang="en-US" sz="2200" dirty="0"/>
+              <a:t>Ngưỡng thấp: báo thêm. Ngưỡng cao: bỏ sót</a:t>
+            </a:r>
+            <a:endParaRPr lang="en-US" sz="1700" dirty="0"/>
           </a:p>
           <a:p>
             <a:pPr indent="0" marL="0">
@@ -14826,6 +14933,755 @@
               <a:buNone/>
             </a:pPr>
             <a:r>
+              <a:rPr lang="en-US" sz="1250" dirty="0">
+                <a:solidFill>
+                  <a:srgbClr val="5F7183"/>
+                </a:solidFill>
+                <a:latin typeface="微軟正黑體" pitchFamily="34" charset="0"/>
+                <a:ea typeface="微軟正黑體" pitchFamily="34" charset="-122"/>
+                <a:cs typeface="微軟正黑體" pitchFamily="34" charset="-120"/>
+              </a:rPr>
+              <a:t>門檻低：多報。門檻高：漏掉</a:t>
+            </a:r>
+            <a:endParaRPr lang="en-US" sz="1700" dirty="0"/>
+          </a:p>
+        </p:txBody>
+      </p:sp>
+      <p:sp>
+        <p:nvSpPr>
+          <p:cNvPr id="4" name="Shape 2"/>
+          <p:cNvSpPr/>
+          <p:nvPr/>
+        </p:nvSpPr>
+        <p:spPr>
+          <a:xfrm>
+            <a:off x="502920" y="1310492"/>
+            <a:ext cx="3931920" cy="2300800"/>
+          </a:xfrm>
+          <a:prstGeom prst="roundRect">
+            <a:avLst>
+              <a:gd name="adj" fmla="val 3974"/>
+            </a:avLst>
+          </a:prstGeom>
+          <a:solidFill>
+            <a:srgbClr val="FFFFFF"/>
+          </a:solidFill>
+          <a:ln w="12700">
+            <a:solidFill>
+              <a:srgbClr val="DBE3EA"/>
+            </a:solidFill>
+            <a:prstDash val="solid"/>
+          </a:ln>
+        </p:spPr>
+      </p:sp>
+      <p:sp>
+        <p:nvSpPr>
+          <p:cNvPr id="5" name="Shape 3"/>
+          <p:cNvSpPr/>
+          <p:nvPr/>
+        </p:nvSpPr>
+        <p:spPr>
+          <a:xfrm>
+            <a:off x="594360" y="1401932"/>
+            <a:ext cx="3749040" cy="472857"/>
+          </a:xfrm>
+          <a:prstGeom prst="roundRect">
+            <a:avLst>
+              <a:gd name="adj" fmla="val 9669"/>
+            </a:avLst>
+          </a:prstGeom>
+          <a:solidFill>
+            <a:srgbClr val="0B1F3A"/>
+          </a:solidFill>
+          <a:ln/>
+        </p:spPr>
+      </p:sp>
+      <p:sp>
+        <p:nvSpPr>
+          <p:cNvPr id="6" name="Text 4"/>
+          <p:cNvSpPr txBox="1"/>
+          <p:nvPr/>
+        </p:nvSpPr>
+        <p:spPr>
+          <a:xfrm>
+            <a:off x="667512" y="1429364"/>
+            <a:ext cx="3602736" cy="436281"/>
+          </a:xfrm>
+          <a:prstGeom prst="rect">
+            <a:avLst/>
+          </a:prstGeom>
+          <a:noFill/>
+          <a:ln/>
+        </p:spPr>
+        <p:txBody>
+          <a:bodyPr wrap="square" lIns="0" tIns="0" rIns="0" bIns="0" rtlCol="0" anchor="t"/>
+          <a:lstStyle/>
+          <a:p>
+            <a:pPr algn="ctr" indent="0" marL="0">
+              <a:lnSpc>
+                <a:spcPct val="104000"/>
+              </a:lnSpc>
+              <a:buNone/>
+            </a:pPr>
+            <a:r>
+              <a:rPr lang="en-US" sz="950" b="1" dirty="0">
+                <a:solidFill>
+                  <a:srgbClr val="FFFFFF"/>
+                </a:solidFill>
+                <a:latin typeface="Arial" pitchFamily="34" charset="0"/>
+                <a:ea typeface="Arial" pitchFamily="34" charset="-122"/>
+                <a:cs typeface="Arial" pitchFamily="34" charset="-120"/>
+              </a:rPr>
+              <a:t>Ngưỡng 0,3: bắt được nhiều người hơn, cả người trong trung tâm thương mại</a:t>
+            </a:r>
+            <a:endParaRPr lang="en-US" sz="950" dirty="0"/>
+          </a:p>
+          <a:p>
+            <a:pPr algn="ctr" indent="0" marL="0">
+              <a:lnSpc>
+                <a:spcPct val="104000"/>
+              </a:lnSpc>
+              <a:buNone/>
+            </a:pPr>
+            <a:r>
+              <a:rPr lang="en-US" sz="850" dirty="0">
+                <a:solidFill>
+                  <a:srgbClr val="FFFFFF"/>
+                </a:solidFill>
+                <a:latin typeface="微軟正黑體" pitchFamily="34" charset="0"/>
+                <a:ea typeface="微軟正黑體" pitchFamily="34" charset="-122"/>
+                <a:cs typeface="微軟正黑體" pitchFamily="34" charset="-120"/>
+              </a:rPr>
+              <a:t>門檻 0.3：抓到更多人，連商場裡的人也算</a:t>
+            </a:r>
+            <a:endParaRPr lang="en-US" sz="950" dirty="0"/>
+          </a:p>
+        </p:txBody>
+      </p:sp>
+      <p:pic>
+        <p:nvPicPr>
+          <p:cNvPr id="7" name="Image 0" descr="/Users/tsengchenghsun/Class/carClass/Claude outputs/第八週(10-29)/src/img/w8_thr_low.jpg">    </p:cNvPr>
+          <p:cNvPicPr>
+            <a:picLocks noChangeAspect="1"/>
+          </p:cNvPicPr>
+          <p:nvPr/>
+        </p:nvPicPr>
+        <p:blipFill>
+          <a:blip r:embed="rId1"/>
+          <a:stretch>
+            <a:fillRect/>
+          </a:stretch>
+        </p:blipFill>
+        <p:spPr>
+          <a:xfrm>
+            <a:off x="594360" y="1929653"/>
+            <a:ext cx="3749040" cy="1370743"/>
+          </a:xfrm>
+          <a:prstGeom prst="rect">
+            <a:avLst/>
+          </a:prstGeom>
+        </p:spPr>
+      </p:pic>
+      <p:sp>
+        <p:nvSpPr>
+          <p:cNvPr id="8" name="Text 5"/>
+          <p:cNvSpPr txBox="1"/>
+          <p:nvPr/>
+        </p:nvSpPr>
+        <p:spPr>
+          <a:xfrm>
+            <a:off x="594360" y="3318684"/>
+            <a:ext cx="3749040" cy="182880"/>
+          </a:xfrm>
+          <a:prstGeom prst="rect">
+            <a:avLst/>
+          </a:prstGeom>
+          <a:noFill/>
+          <a:ln/>
+        </p:spPr>
+        <p:txBody>
+          <a:bodyPr wrap="square" lIns="0" tIns="0" rIns="0" bIns="0" rtlCol="0" anchor="ctr"/>
+          <a:lstStyle/>
+          <a:p>
+            <a:pPr algn="ctr" indent="0" marL="0">
+              <a:buNone/>
+            </a:pPr>
+            <a:r>
+              <a:rPr lang="en-US" sz="700" dirty="0">
+                <a:solidFill>
+                  <a:srgbClr val="5F7183"/>
+                </a:solidFill>
+                <a:latin typeface="Arial" pitchFamily="34" charset="0"/>
+                <a:ea typeface="Arial" pitchFamily="34" charset="-122"/>
+                <a:cs typeface="Arial" pitchFamily="34" charset="-120"/>
+              </a:rPr>
+              <a:t>nuScenes scene-1094（新加坡，夜間雨後）· YOLOX-s</a:t>
+            </a:r>
+            <a:endParaRPr lang="en-US" sz="700" dirty="0"/>
+          </a:p>
+        </p:txBody>
+      </p:sp>
+      <p:sp>
+        <p:nvSpPr>
+          <p:cNvPr id="9" name="Shape 6"/>
+          <p:cNvSpPr/>
+          <p:nvPr/>
+        </p:nvSpPr>
+        <p:spPr>
+          <a:xfrm>
+            <a:off x="4709160" y="1310492"/>
+            <a:ext cx="3931920" cy="2300800"/>
+          </a:xfrm>
+          <a:prstGeom prst="roundRect">
+            <a:avLst>
+              <a:gd name="adj" fmla="val 3974"/>
+            </a:avLst>
+          </a:prstGeom>
+          <a:solidFill>
+            <a:srgbClr val="FFFFFF"/>
+          </a:solidFill>
+          <a:ln w="12700">
+            <a:solidFill>
+              <a:srgbClr val="DBE3EA"/>
+            </a:solidFill>
+            <a:prstDash val="solid"/>
+          </a:ln>
+        </p:spPr>
+      </p:sp>
+      <p:sp>
+        <p:nvSpPr>
+          <p:cNvPr id="10" name="Shape 7"/>
+          <p:cNvSpPr/>
+          <p:nvPr/>
+        </p:nvSpPr>
+        <p:spPr>
+          <a:xfrm>
+            <a:off x="4800600" y="1401932"/>
+            <a:ext cx="3749040" cy="472857"/>
+          </a:xfrm>
+          <a:prstGeom prst="roundRect">
+            <a:avLst>
+              <a:gd name="adj" fmla="val 9669"/>
+            </a:avLst>
+          </a:prstGeom>
+          <a:solidFill>
+            <a:srgbClr val="007F72"/>
+          </a:solidFill>
+          <a:ln/>
+        </p:spPr>
+      </p:sp>
+      <p:sp>
+        <p:nvSpPr>
+          <p:cNvPr id="11" name="Text 8"/>
+          <p:cNvSpPr txBox="1"/>
+          <p:nvPr/>
+        </p:nvSpPr>
+        <p:spPr>
+          <a:xfrm>
+            <a:off x="4873752" y="1429364"/>
+            <a:ext cx="3602736" cy="436281"/>
+          </a:xfrm>
+          <a:prstGeom prst="rect">
+            <a:avLst/>
+          </a:prstGeom>
+          <a:noFill/>
+          <a:ln/>
+        </p:spPr>
+        <p:txBody>
+          <a:bodyPr wrap="square" lIns="0" tIns="0" rIns="0" bIns="0" rtlCol="0" anchor="t"/>
+          <a:lstStyle/>
+          <a:p>
+            <a:pPr algn="ctr" indent="0" marL="0">
+              <a:lnSpc>
+                <a:spcPct val="104000"/>
+              </a:lnSpc>
+              <a:buNone/>
+            </a:pPr>
+            <a:r>
+              <a:rPr lang="en-US" sz="950" b="1" dirty="0">
+                <a:solidFill>
+                  <a:srgbClr val="FFFFFF"/>
+                </a:solidFill>
+                <a:latin typeface="Arial" pitchFamily="34" charset="0"/>
+                <a:ea typeface="Arial" pitchFamily="34" charset="-122"/>
+                <a:cs typeface="Arial" pitchFamily="34" charset="-120"/>
+              </a:rPr>
+              <a:t>Ngưỡng 0,7: gọn, nhưng bỏ sót người gần (nét đứt trắng)</a:t>
+            </a:r>
+            <a:endParaRPr lang="en-US" sz="950" dirty="0"/>
+          </a:p>
+          <a:p>
+            <a:pPr algn="ctr" indent="0" marL="0">
+              <a:lnSpc>
+                <a:spcPct val="104000"/>
+              </a:lnSpc>
+              <a:buNone/>
+            </a:pPr>
+            <a:r>
+              <a:rPr lang="en-US" sz="850" dirty="0">
+                <a:solidFill>
+                  <a:srgbClr val="FFFFFF"/>
+                </a:solidFill>
+                <a:latin typeface="微軟正黑體" pitchFamily="34" charset="0"/>
+                <a:ea typeface="微軟正黑體" pitchFamily="34" charset="-122"/>
+                <a:cs typeface="微軟正黑體" pitchFamily="34" charset="-120"/>
+              </a:rPr>
+              <a:t>門檻 0.7：很乾淨，但近處的人漏了（白色虛線）</a:t>
+            </a:r>
+            <a:endParaRPr lang="en-US" sz="950" dirty="0"/>
+          </a:p>
+        </p:txBody>
+      </p:sp>
+      <p:pic>
+        <p:nvPicPr>
+          <p:cNvPr id="12" name="Image 1" descr="/Users/tsengchenghsun/Class/carClass/Claude outputs/第八週(10-29)/src/img/w8_thr_high.jpg">    </p:cNvPr>
+          <p:cNvPicPr>
+            <a:picLocks noChangeAspect="1"/>
+          </p:cNvPicPr>
+          <p:nvPr/>
+        </p:nvPicPr>
+        <p:blipFill>
+          <a:blip r:embed="rId2"/>
+          <a:stretch>
+            <a:fillRect/>
+          </a:stretch>
+        </p:blipFill>
+        <p:spPr>
+          <a:xfrm>
+            <a:off x="4800600" y="1929653"/>
+            <a:ext cx="3749040" cy="1370743"/>
+          </a:xfrm>
+          <a:prstGeom prst="rect">
+            <a:avLst/>
+          </a:prstGeom>
+        </p:spPr>
+      </p:pic>
+      <p:sp>
+        <p:nvSpPr>
+          <p:cNvPr id="13" name="Text 9"/>
+          <p:cNvSpPr txBox="1"/>
+          <p:nvPr/>
+        </p:nvSpPr>
+        <p:spPr>
+          <a:xfrm>
+            <a:off x="4800600" y="3318684"/>
+            <a:ext cx="3749040" cy="182880"/>
+          </a:xfrm>
+          <a:prstGeom prst="rect">
+            <a:avLst/>
+          </a:prstGeom>
+          <a:noFill/>
+          <a:ln/>
+        </p:spPr>
+        <p:txBody>
+          <a:bodyPr wrap="square" lIns="0" tIns="0" rIns="0" bIns="0" rtlCol="0" anchor="ctr"/>
+          <a:lstStyle/>
+          <a:p>
+            <a:pPr algn="ctr" indent="0" marL="0">
+              <a:buNone/>
+            </a:pPr>
+            <a:r>
+              <a:rPr lang="en-US" sz="700" dirty="0">
+                <a:solidFill>
+                  <a:srgbClr val="5F7183"/>
+                </a:solidFill>
+                <a:latin typeface="Arial" pitchFamily="34" charset="0"/>
+                <a:ea typeface="Arial" pitchFamily="34" charset="-122"/>
+                <a:cs typeface="Arial" pitchFamily="34" charset="-120"/>
+              </a:rPr>
+              <a:t>白色虛線＝官方標註有、這個門檻下沒抓到的行人</a:t>
+            </a:r>
+            <a:endParaRPr lang="en-US" sz="700" dirty="0"/>
+          </a:p>
+        </p:txBody>
+      </p:sp>
+      <p:sp>
+        <p:nvSpPr>
+          <p:cNvPr id="14" name="Shape 10"/>
+          <p:cNvSpPr/>
+          <p:nvPr/>
+        </p:nvSpPr>
+        <p:spPr>
+          <a:xfrm>
+            <a:off x="502920" y="3757596"/>
+            <a:ext cx="8138160" cy="566928"/>
+          </a:xfrm>
+          <a:prstGeom prst="roundRect">
+            <a:avLst>
+              <a:gd name="adj" fmla="val 14516"/>
+            </a:avLst>
+          </a:prstGeom>
+          <a:solidFill>
+            <a:srgbClr val="FFF6E3"/>
+          </a:solidFill>
+          <a:ln w="12700">
+            <a:solidFill>
+              <a:srgbClr val="FFB020"/>
+            </a:solidFill>
+            <a:prstDash val="solid"/>
+          </a:ln>
+        </p:spPr>
+      </p:sp>
+      <p:sp>
+        <p:nvSpPr>
+          <p:cNvPr id="15" name="Text 11"/>
+          <p:cNvSpPr txBox="1"/>
+          <p:nvPr/>
+        </p:nvSpPr>
+        <p:spPr>
+          <a:xfrm>
+            <a:off x="685800" y="3821604"/>
+            <a:ext cx="7772400" cy="457200"/>
+          </a:xfrm>
+          <a:prstGeom prst="rect">
+            <a:avLst/>
+          </a:prstGeom>
+          <a:noFill/>
+          <a:ln/>
+        </p:spPr>
+        <p:txBody>
+          <a:bodyPr wrap="square" lIns="0" tIns="0" rIns="0" bIns="0" rtlCol="0" anchor="t"/>
+          <a:lstStyle/>
+          <a:p>
+            <a:pPr indent="0" marL="0">
+              <a:lnSpc>
+                <a:spcPct val="116000"/>
+              </a:lnSpc>
+              <a:buNone/>
+            </a:pPr>
+            <a:r>
+              <a:rPr lang="en-US" sz="1200" b="1" dirty="0">
+                <a:solidFill>
+                  <a:srgbClr val="7A4E00"/>
+                </a:solidFill>
+                <a:latin typeface="Arial" pitchFamily="34" charset="0"/>
+                <a:ea typeface="Arial" pitchFamily="34" charset="-122"/>
+                <a:cs typeface="Arial" pitchFamily="34" charset="-120"/>
+              </a:rPr>
+              <a:t>Báo thêm → phanh nhầm (tuần 7: phanh ma). Bỏ sót → đâm vào. Phải chọn đánh đổi.</a:t>
+            </a:r>
+            <a:endParaRPr lang="en-US" sz="1200" dirty="0"/>
+          </a:p>
+          <a:p>
+            <a:pPr indent="0" marL="0">
+              <a:lnSpc>
+                <a:spcPct val="116000"/>
+              </a:lnSpc>
+              <a:buNone/>
+            </a:pPr>
+            <a:r>
+              <a:rPr lang="en-US" sz="1100" dirty="0">
+                <a:solidFill>
+                  <a:srgbClr val="7A4E00"/>
+                </a:solidFill>
+                <a:latin typeface="微軟正黑體" pitchFamily="34" charset="0"/>
+                <a:ea typeface="微軟正黑體" pitchFamily="34" charset="-122"/>
+                <a:cs typeface="微軟正黑體" pitchFamily="34" charset="-120"/>
+              </a:rPr>
+              <a:t>多報→亂煞車（上週的幽靈煞車）。漏掉→會撞上。門檻是在兩者之間取捨。</a:t>
+            </a:r>
+            <a:endParaRPr lang="en-US" sz="1200" dirty="0"/>
+          </a:p>
+        </p:txBody>
+      </p:sp>
+      <p:sp>
+        <p:nvSpPr>
+          <p:cNvPr id="16" name="Shape 12"/>
+          <p:cNvSpPr/>
+          <p:nvPr/>
+        </p:nvSpPr>
+        <p:spPr>
+          <a:xfrm>
+            <a:off x="4885646" y="365760"/>
+            <a:ext cx="3755434" cy="310896"/>
+          </a:xfrm>
+          <a:prstGeom prst="roundRect">
+            <a:avLst>
+              <a:gd name="adj" fmla="val 20588"/>
+            </a:avLst>
+          </a:prstGeom>
+          <a:solidFill>
+            <a:srgbClr val="EAF6F4"/>
+          </a:solidFill>
+          <a:ln w="9525">
+            <a:solidFill>
+              <a:srgbClr val="9FD6CE"/>
+            </a:solidFill>
+            <a:prstDash val="solid"/>
+          </a:ln>
+        </p:spPr>
+      </p:sp>
+      <p:sp>
+        <p:nvSpPr>
+          <p:cNvPr id="17" name="Text 13"/>
+          <p:cNvSpPr txBox="1"/>
+          <p:nvPr/>
+        </p:nvSpPr>
+        <p:spPr>
+          <a:xfrm>
+            <a:off x="5013662" y="384048"/>
+            <a:ext cx="3572554" cy="274320"/>
+          </a:xfrm>
+          <a:prstGeom prst="rect">
+            <a:avLst/>
+          </a:prstGeom>
+          <a:noFill/>
+          <a:ln/>
+        </p:spPr>
+        <p:txBody>
+          <a:bodyPr wrap="square" lIns="0" tIns="0" rIns="0" bIns="0" rtlCol="0" anchor="ctr"/>
+          <a:lstStyle/>
+          <a:p>
+            <a:pPr indent="0" marL="0">
+              <a:lnSpc>
+                <a:spcPct val="100000"/>
+              </a:lnSpc>
+              <a:buNone/>
+            </a:pPr>
+            <a:r>
+              <a:rPr lang="en-US" sz="950" b="1" dirty="0">
+                <a:solidFill>
+                  <a:srgbClr val="007F72"/>
+                </a:solidFill>
+                <a:latin typeface="Arial" pitchFamily="34" charset="0"/>
+                <a:ea typeface="Arial" pitchFamily="34" charset="-122"/>
+                <a:cs typeface="Arial" pitchFamily="34" charset="-120"/>
+              </a:rPr>
+              <a:t>Ví dụ · </a:t>
+            </a:r>
+            <a:pPr indent="0" marL="0">
+              <a:lnSpc>
+                <a:spcPct val="100000"/>
+              </a:lnSpc>
+              <a:buNone/>
+            </a:pPr>
+            <a:r>
+              <a:rPr lang="en-US" sz="950" dirty="0">
+                <a:solidFill>
+                  <a:srgbClr val="1A2733"/>
+                </a:solidFill>
+                <a:latin typeface="Arial" pitchFamily="34" charset="0"/>
+                <a:ea typeface="Arial" pitchFamily="34" charset="-122"/>
+                <a:cs typeface="Arial" pitchFamily="34" charset="-120"/>
+              </a:rPr>
+              <a:t>chuông báo cháy: nhạy quá kêu hoài, kém quá không kêu</a:t>
+            </a:r>
+            <a:endParaRPr lang="en-US" sz="950" dirty="0"/>
+          </a:p>
+          <a:p>
+            <a:pPr indent="0" marL="0">
+              <a:lnSpc>
+                <a:spcPct val="100000"/>
+              </a:lnSpc>
+              <a:buNone/>
+            </a:pPr>
+            <a:r>
+              <a:rPr lang="en-US" sz="900" b="1" dirty="0">
+                <a:solidFill>
+                  <a:srgbClr val="007F72"/>
+                </a:solidFill>
+                <a:latin typeface="微軟正黑體" pitchFamily="34" charset="0"/>
+                <a:ea typeface="微軟正黑體" pitchFamily="34" charset="-122"/>
+                <a:cs typeface="微軟正黑體" pitchFamily="34" charset="-120"/>
+              </a:rPr>
+              <a:t>例子・</a:t>
+            </a:r>
+            <a:pPr indent="0" marL="0">
+              <a:lnSpc>
+                <a:spcPct val="100000"/>
+              </a:lnSpc>
+              <a:buNone/>
+            </a:pPr>
+            <a:r>
+              <a:rPr lang="en-US" sz="900" dirty="0">
+                <a:solidFill>
+                  <a:srgbClr val="5F7183"/>
+                </a:solidFill>
+                <a:latin typeface="微軟正黑體" pitchFamily="34" charset="0"/>
+                <a:ea typeface="微軟正黑體" pitchFamily="34" charset="-122"/>
+                <a:cs typeface="微軟正黑體" pitchFamily="34" charset="-120"/>
+              </a:rPr>
+              <a:t>火災警報器：太敏感一直響，太遲鈍不響</a:t>
+            </a:r>
+            <a:endParaRPr lang="en-US" sz="950" dirty="0"/>
+          </a:p>
+        </p:txBody>
+      </p:sp>
+      <p:pic>
+        <p:nvPicPr>
+          <p:cNvPr id="19" name="Image 2" descr="/Users/tsengchenghsun/Class/carClass/Claude outputs/第八週(10-29)/src/logo.png">    </p:cNvPr>
+          <p:cNvPicPr>
+            <a:picLocks noChangeAspect="1"/>
+          </p:cNvPicPr>
+          <p:nvPr/>
+        </p:nvPicPr>
+        <p:blipFill>
+          <a:blip r:embed="rId3"/>
+          <a:stretch>
+            <a:fillRect/>
+          </a:stretch>
+        </p:blipFill>
+        <p:spPr>
+          <a:xfrm>
+            <a:off x="7882128" y="109728"/>
+            <a:ext cx="1097280" cy="242439"/>
+          </a:xfrm>
+          <a:prstGeom prst="rect">
+            <a:avLst/>
+          </a:prstGeom>
+        </p:spPr>
+      </p:pic>
+      <p:sp>
+        <p:nvSpPr>
+          <p:cNvPr id="20" name="Text 14"/>
+          <p:cNvSpPr txBox="1"/>
+          <p:nvPr/>
+        </p:nvSpPr>
+        <p:spPr>
+          <a:xfrm>
+            <a:off x="109728" y="128016"/>
+            <a:ext cx="822960" cy="256032"/>
+          </a:xfrm>
+          <a:prstGeom prst="rect">
+            <a:avLst/>
+          </a:prstGeom>
+          <a:noFill/>
+          <a:ln/>
+        </p:spPr>
+        <p:txBody>
+          <a:bodyPr wrap="square" lIns="0" tIns="0" rIns="0" bIns="0" rtlCol="0" anchor="ctr"/>
+          <a:lstStyle/>
+          <a:p>
+            <a:pPr indent="0" marL="0">
+              <a:buNone/>
+            </a:pPr>
+            <a:r>
+              <a:rPr lang="en-US" sz="900" dirty="0">
+                <a:solidFill>
+                  <a:srgbClr val="5F7183"/>
+                </a:solidFill>
+                <a:latin typeface="Arial" pitchFamily="34" charset="0"/>
+                <a:ea typeface="Arial" pitchFamily="34" charset="-122"/>
+                <a:cs typeface="Arial" pitchFamily="34" charset="-120"/>
+              </a:rPr>
+              <a:t>16 / 23</a:t>
+            </a:r>
+            <a:endParaRPr lang="en-US" sz="900" dirty="0"/>
+          </a:p>
+        </p:txBody>
+      </p:sp>
+      <p:sp>
+        <p:nvSpPr>
+          <p:cNvPr id="21" name="Text 15"/>
+          <p:cNvSpPr txBox="1"/>
+          <p:nvPr/>
+        </p:nvSpPr>
+        <p:spPr>
+          <a:xfrm>
+            <a:off x="960120" y="128016"/>
+            <a:ext cx="2011680" cy="256032"/>
+          </a:xfrm>
+          <a:prstGeom prst="rect">
+            <a:avLst/>
+          </a:prstGeom>
+          <a:noFill/>
+          <a:ln/>
+        </p:spPr>
+        <p:txBody>
+          <a:bodyPr wrap="square" lIns="0" tIns="0" rIns="0" bIns="0" rtlCol="0" anchor="ctr"/>
+          <a:lstStyle/>
+          <a:p>
+            <a:pPr indent="0" marL="0">
+              <a:buNone/>
+            </a:pPr>
+            <a:r>
+              <a:rPr lang="en-US" sz="900" dirty="0">
+                <a:solidFill>
+                  <a:srgbClr val="5F7183"/>
+                </a:solidFill>
+                <a:latin typeface="Arial" pitchFamily="34" charset="0"/>
+                <a:ea typeface="Arial" pitchFamily="34" charset="-122"/>
+                <a:cs typeface="Arial" pitchFamily="34" charset="-120"/>
+              </a:rPr>
+              <a:t>Tiết 1 · 第 1 節</a:t>
+            </a:r>
+            <a:endParaRPr lang="en-US" sz="900" dirty="0"/>
+          </a:p>
+        </p:txBody>
+      </p:sp>
+    </p:spTree>
+  </p:cSld>
+  <p:clrMapOvr>
+    <a:masterClrMapping/>
+  </p:clrMapOvr>
+</p:sld>
+</file>
+
+<file path=ppt/slides/slide17.xml><?xml version="1.0" encoding="utf-8"?>
+<p:sld xmlns:a="http://schemas.openxmlformats.org/drawingml/2006/main" xmlns:r="http://schemas.openxmlformats.org/officeDocument/2006/relationships" xmlns:p="http://schemas.openxmlformats.org/presentationml/2006/main">
+  <p:cSld name="Slide 17">
+    <p:spTree>
+      <p:nvGrpSpPr>
+        <p:cNvPr id="1" name=""/>
+        <p:cNvGrpSpPr/>
+        <p:nvPr/>
+      </p:nvGrpSpPr>
+      <p:grpSpPr>
+        <a:xfrm>
+          <a:off x="0" y="0"/>
+          <a:ext cx="1" cy="1"/>
+          <a:chOff x="0" y="0"/>
+          <a:chExt cx="0" cy="0"/>
+        </a:xfrm>
+      </p:grpSpPr>
+      <p:sp>
+        <p:nvSpPr>
+          <p:cNvPr id="2" name="Text 0"/>
+          <p:cNvSpPr txBox="1"/>
+          <p:nvPr/>
+        </p:nvSpPr>
+        <p:spPr>
+          <a:xfrm>
+            <a:off x="502920" y="292608"/>
+            <a:ext cx="8138160" cy="841248"/>
+          </a:xfrm>
+          <a:prstGeom prst="rect">
+            <a:avLst/>
+          </a:prstGeom>
+          <a:noFill/>
+          <a:ln/>
+        </p:spPr>
+        <p:txBody>
+          <a:bodyPr wrap="square" lIns="0" tIns="0" rIns="0" bIns="0" rtlCol="0" anchor="t"/>
+          <a:lstStyle/>
+          <a:p>
+            <a:pPr indent="0" marL="0">
+              <a:lnSpc>
+                <a:spcPct val="116000"/>
+              </a:lnSpc>
+              <a:buNone/>
+            </a:pPr>
+            <a:r>
+              <a:rPr lang="en-US" sz="2200" b="1" dirty="0">
+                <a:solidFill>
+                  <a:srgbClr val="0B1F3A"/>
+                </a:solidFill>
+                <a:latin typeface="Arial" pitchFamily="34" charset="0"/>
+                <a:ea typeface="Arial" pitchFamily="34" charset="-122"/>
+                <a:cs typeface="Arial" pitchFamily="34" charset="-120"/>
+              </a:rPr>
+              <a:t>404 ảnh camera trước: kéo ngưỡng từ 0,1 đến 0,9</a:t>
+            </a:r>
+            <a:endParaRPr lang="en-US" sz="2200" dirty="0"/>
+          </a:p>
+          <a:p>
+            <a:pPr indent="0" marL="0">
+              <a:lnSpc>
+                <a:spcPct val="116000"/>
+              </a:lnSpc>
+              <a:buNone/>
+            </a:pPr>
+            <a:r>
               <a:rPr lang="en-US" sz="1350" dirty="0">
                 <a:solidFill>
                   <a:srgbClr val="5F7183"/>
@@ -14842,7 +15698,7 @@
       </p:sp>
       <p:graphicFrame>
         <p:nvGraphicFramePr>
-          <p:cNvPr id="17" name="Table 0"/>
+          <p:cNvPr id="18" name="Table 0"/>
           <p:cNvGraphicFramePr>
             <a:graphicFrameLocks noGrp="1"/>
           </p:cNvGraphicFramePr>
@@ -17321,7 +18177,7 @@
                 <a:ea typeface="Arial" pitchFamily="34" charset="-122"/>
                 <a:cs typeface="Arial" pitchFamily="34" charset="-120"/>
               </a:rPr>
-              <a:t>16 / 22</a:t>
+              <a:t>17 / 23</a:t>
             </a:r>
             <a:endParaRPr lang="en-US" sz="900" dirty="0"/>
           </a:p>
@@ -17330,490 +18186,6 @@
       <p:sp>
         <p:nvSpPr>
           <p:cNvPr id="8" name="Text 3"/>
-          <p:cNvSpPr txBox="1"/>
-          <p:nvPr/>
-        </p:nvSpPr>
-        <p:spPr>
-          <a:xfrm>
-            <a:off x="960120" y="128016"/>
-            <a:ext cx="2011680" cy="256032"/>
-          </a:xfrm>
-          <a:prstGeom prst="rect">
-            <a:avLst/>
-          </a:prstGeom>
-          <a:noFill/>
-          <a:ln/>
-        </p:spPr>
-        <p:txBody>
-          <a:bodyPr wrap="square" lIns="0" tIns="0" rIns="0" bIns="0" rtlCol="0" anchor="ctr"/>
-          <a:lstStyle/>
-          <a:p>
-            <a:pPr indent="0" marL="0">
-              <a:buNone/>
-            </a:pPr>
-            <a:r>
-              <a:rPr lang="en-US" sz="900" dirty="0">
-                <a:solidFill>
-                  <a:srgbClr val="5F7183"/>
-                </a:solidFill>
-                <a:latin typeface="Arial" pitchFamily="34" charset="0"/>
-                <a:ea typeface="Arial" pitchFamily="34" charset="-122"/>
-                <a:cs typeface="Arial" pitchFamily="34" charset="-120"/>
-              </a:rPr>
-              <a:t>Tiết 1 · 第 1 節</a:t>
-            </a:r>
-            <a:endParaRPr lang="en-US" sz="900" dirty="0"/>
-          </a:p>
-        </p:txBody>
-      </p:sp>
-    </p:spTree>
-  </p:cSld>
-  <p:clrMapOvr>
-    <a:masterClrMapping/>
-  </p:clrMapOvr>
-</p:sld>
-</file>
-
-<file path=ppt/slides/slide17.xml><?xml version="1.0" encoding="utf-8"?>
-<p:sld xmlns:a="http://schemas.openxmlformats.org/drawingml/2006/main" xmlns:r="http://schemas.openxmlformats.org/officeDocument/2006/relationships" xmlns:p="http://schemas.openxmlformats.org/presentationml/2006/main">
-  <p:cSld name="Slide 17">
-    <p:spTree>
-      <p:nvGrpSpPr>
-        <p:cNvPr id="1" name=""/>
-        <p:cNvGrpSpPr/>
-        <p:nvPr/>
-      </p:nvGrpSpPr>
-      <p:grpSpPr>
-        <a:xfrm>
-          <a:off x="0" y="0"/>
-          <a:ext cx="1" cy="1"/>
-          <a:chOff x="0" y="0"/>
-          <a:chExt cx="0" cy="0"/>
-        </a:xfrm>
-      </p:grpSpPr>
-      <p:sp>
-        <p:nvSpPr>
-          <p:cNvPr id="2" name="Text 0"/>
-          <p:cNvSpPr txBox="1"/>
-          <p:nvPr/>
-        </p:nvSpPr>
-        <p:spPr>
-          <a:xfrm>
-            <a:off x="502920" y="420624"/>
-            <a:ext cx="8138160" cy="274320"/>
-          </a:xfrm>
-          <a:prstGeom prst="rect">
-            <a:avLst/>
-          </a:prstGeom>
-          <a:noFill/>
-          <a:ln/>
-        </p:spPr>
-        <p:txBody>
-          <a:bodyPr wrap="square" lIns="0" tIns="0" rIns="0" bIns="0" rtlCol="0" anchor="ctr"/>
-          <a:lstStyle/>
-          <a:p>
-            <a:pPr indent="0" marL="0">
-              <a:buNone/>
-            </a:pPr>
-            <a:r>
-              <a:rPr lang="en-US" sz="1250" b="1" dirty="0">
-                <a:solidFill>
-                  <a:srgbClr val="007F72"/>
-                </a:solidFill>
-                <a:latin typeface="Arial" pitchFamily="34" charset="0"/>
-                <a:ea typeface="Arial" pitchFamily="34" charset="-122"/>
-                <a:cs typeface="Arial" pitchFamily="34" charset="-120"/>
-              </a:rPr>
-              <a:t>Càng xa càng sót · 一遠就漏</a:t>
-            </a:r>
-            <a:endParaRPr lang="en-US" sz="1250" dirty="0"/>
-          </a:p>
-        </p:txBody>
-      </p:sp>
-      <p:sp>
-        <p:nvSpPr>
-          <p:cNvPr id="3" name="Shape 1"/>
-          <p:cNvSpPr/>
-          <p:nvPr/>
-        </p:nvSpPr>
-        <p:spPr>
-          <a:xfrm>
-            <a:off x="502920" y="1412748"/>
-            <a:ext cx="4299910" cy="2514600"/>
-          </a:xfrm>
-          <a:prstGeom prst="roundRect">
-            <a:avLst>
-              <a:gd name="adj" fmla="val 4364"/>
-            </a:avLst>
-          </a:prstGeom>
-          <a:solidFill>
-            <a:srgbClr val="FFFFFF"/>
-          </a:solidFill>
-          <a:ln w="12700">
-            <a:solidFill>
-              <a:srgbClr val="DBE3EA"/>
-            </a:solidFill>
-            <a:prstDash val="solid"/>
-          </a:ln>
-        </p:spPr>
-      </p:sp>
-      <p:pic>
-        <p:nvPicPr>
-          <p:cNvPr id="4" name="Image 0" descr="/Users/tsengchenghsun/Class/carClass/Claude outputs/第八週(10-29)/src/img/w8_recall.png">    </p:cNvPr>
-          <p:cNvPicPr>
-            <a:picLocks noChangeAspect="1"/>
-          </p:cNvPicPr>
-          <p:nvPr/>
-        </p:nvPicPr>
-        <p:blipFill>
-          <a:blip r:embed="rId1"/>
-          <a:stretch>
-            <a:fillRect/>
-          </a:stretch>
-        </p:blipFill>
-        <p:spPr>
-          <a:xfrm>
-            <a:off x="576072" y="1514246"/>
-            <a:ext cx="4153606" cy="2128723"/>
-          </a:xfrm>
-          <a:prstGeom prst="rect">
-            <a:avLst/>
-          </a:prstGeom>
-        </p:spPr>
-      </p:pic>
-      <p:sp>
-        <p:nvSpPr>
-          <p:cNvPr id="5" name="Text 2"/>
-          <p:cNvSpPr txBox="1"/>
-          <p:nvPr/>
-        </p:nvSpPr>
-        <p:spPr>
-          <a:xfrm>
-            <a:off x="576072" y="3707892"/>
-            <a:ext cx="4153606" cy="182880"/>
-          </a:xfrm>
-          <a:prstGeom prst="rect">
-            <a:avLst/>
-          </a:prstGeom>
-          <a:noFill/>
-          <a:ln/>
-        </p:spPr>
-        <p:txBody>
-          <a:bodyPr wrap="square" lIns="0" tIns="0" rIns="0" bIns="0" rtlCol="0" anchor="ctr"/>
-          <a:lstStyle/>
-          <a:p>
-            <a:pPr algn="ctr" indent="0" marL="0">
-              <a:buNone/>
-            </a:pPr>
-            <a:r>
-              <a:rPr lang="en-US" sz="700" dirty="0">
-                <a:solidFill>
-                  <a:srgbClr val="5F7183"/>
-                </a:solidFill>
-                <a:latin typeface="Arial" pitchFamily="34" charset="0"/>
-                <a:ea typeface="Arial" pitchFamily="34" charset="-122"/>
-                <a:cs typeface="Arial" pitchFamily="34" charset="-120"/>
-              </a:rPr>
-              <a:t>nuScenes mini 白天 283 張前方照片 · YOLOX-s · 門檻 0.3 · 看得到 60% 以上</a:t>
-            </a:r>
-            <a:endParaRPr lang="en-US" sz="700" dirty="0"/>
-          </a:p>
-        </p:txBody>
-      </p:sp>
-      <p:sp>
-        <p:nvSpPr>
-          <p:cNvPr id="6" name="Text 3"/>
-          <p:cNvSpPr txBox="1"/>
-          <p:nvPr/>
-        </p:nvSpPr>
-        <p:spPr>
-          <a:xfrm>
-            <a:off x="5113726" y="914400"/>
-            <a:ext cx="3527354" cy="3511296"/>
-          </a:xfrm>
-          <a:prstGeom prst="rect">
-            <a:avLst/>
-          </a:prstGeom>
-          <a:noFill/>
-          <a:ln/>
-        </p:spPr>
-        <p:txBody>
-          <a:bodyPr wrap="square" lIns="0" tIns="0" rIns="0" bIns="0" rtlCol="0" anchor="ctr"/>
-          <a:lstStyle/>
-          <a:p>
-            <a:pPr indent="0" marL="0">
-              <a:lnSpc>
-                <a:spcPct val="120000"/>
-              </a:lnSpc>
-              <a:buNone/>
-            </a:pPr>
-            <a:r>
-              <a:rPr lang="en-US" sz="2300" b="1" dirty="0">
-                <a:solidFill>
-                  <a:srgbClr val="0B1F3A"/>
-                </a:solidFill>
-                <a:latin typeface="Arial" pitchFamily="34" charset="0"/>
-                <a:ea typeface="Arial" pitchFamily="34" charset="-122"/>
-                <a:cs typeface="Arial" pitchFamily="34" charset="-120"/>
-              </a:rPr>
-              <a:t>Người đi bộ: trong 10 m bắt được 82%, ở 40–50 m chỉ 3%</a:t>
-            </a:r>
-            <a:endParaRPr lang="en-US" sz="2300" dirty="0"/>
-          </a:p>
-          <a:p>
-            <a:pPr indent="0" marL="0">
-              <a:lnSpc>
-                <a:spcPct val="120000"/>
-              </a:lnSpc>
-              <a:buNone/>
-            </a:pPr>
-            <a:r>
-              <a:rPr lang="en-US" sz="1400" b="1" dirty="0">
-                <a:solidFill>
-                  <a:srgbClr val="007F72"/>
-                </a:solidFill>
-                <a:latin typeface="微軟正黑體" pitchFamily="34" charset="0"/>
-                <a:ea typeface="微軟正黑體" pitchFamily="34" charset="-122"/>
-                <a:cs typeface="微軟正黑體" pitchFamily="34" charset="-120"/>
-              </a:rPr>
-              <a:t>行人：10 公尺內抓到 82%，40–50 公尺只剩 3%</a:t>
-            </a:r>
-            <a:endParaRPr lang="en-US" sz="2300" dirty="0"/>
-          </a:p>
-          <a:p>
-            <a:pPr indent="0" marL="0">
-              <a:lnSpc>
-                <a:spcPct val="120000"/>
-              </a:lnSpc>
-              <a:spcBef>
-                <a:spcPts val="1440"/>
-              </a:spcBef>
-              <a:buNone/>
-            </a:pPr>
-            <a:r>
-              <a:rPr lang="en-US" sz="1250" dirty="0">
-                <a:solidFill>
-                  <a:srgbClr val="5F7183"/>
-                </a:solidFill>
-                <a:latin typeface="Arial" pitchFamily="34" charset="0"/>
-                <a:ea typeface="Arial" pitchFamily="34" charset="-122"/>
-                <a:cs typeface="Arial" pitchFamily="34" charset="-120"/>
-              </a:rPr>
-              <a:t>Người cao 1,7 m ở 45 m chỉ còn khoảng 47 điểm ảnh; mô hình thu ảnh về 640 ngang, còn khoảng 19.</a:t>
-            </a:r>
-            <a:endParaRPr lang="en-US" sz="2300" dirty="0"/>
-          </a:p>
-          <a:p>
-            <a:pPr indent="0" marL="0">
-              <a:lnSpc>
-                <a:spcPct val="120000"/>
-              </a:lnSpc>
-              <a:buNone/>
-            </a:pPr>
-            <a:r>
-              <a:rPr lang="en-US" sz="1150" dirty="0">
-                <a:solidFill>
-                  <a:srgbClr val="5F7183"/>
-                </a:solidFill>
-                <a:latin typeface="微軟正黑體" pitchFamily="34" charset="0"/>
-                <a:ea typeface="微軟正黑體" pitchFamily="34" charset="-122"/>
-                <a:cs typeface="微軟正黑體" pitchFamily="34" charset="-120"/>
-              </a:rPr>
-              <a:t>1.7 公尺高的人，在 45 公尺外只有約 47 個像素高；模型把照片縮到 640 寬，只剩約 19 個。</a:t>
-            </a:r>
-            <a:endParaRPr lang="en-US" sz="2300" dirty="0"/>
-          </a:p>
-        </p:txBody>
-      </p:sp>
-      <p:sp>
-        <p:nvSpPr>
-          <p:cNvPr id="7" name="Shape 4"/>
-          <p:cNvSpPr/>
-          <p:nvPr/>
-        </p:nvSpPr>
-        <p:spPr>
-          <a:xfrm>
-            <a:off x="6483534" y="365760"/>
-            <a:ext cx="2157546" cy="310896"/>
-          </a:xfrm>
-          <a:prstGeom prst="roundRect">
-            <a:avLst>
-              <a:gd name="adj" fmla="val 20588"/>
-            </a:avLst>
-          </a:prstGeom>
-          <a:solidFill>
-            <a:srgbClr val="EAF6F4"/>
-          </a:solidFill>
-          <a:ln w="9525">
-            <a:solidFill>
-              <a:srgbClr val="9FD6CE"/>
-            </a:solidFill>
-            <a:prstDash val="solid"/>
-          </a:ln>
-        </p:spPr>
-      </p:sp>
-      <p:sp>
-        <p:nvSpPr>
-          <p:cNvPr id="8" name="Text 5"/>
-          <p:cNvSpPr txBox="1"/>
-          <p:nvPr/>
-        </p:nvSpPr>
-        <p:spPr>
-          <a:xfrm>
-            <a:off x="6611550" y="384048"/>
-            <a:ext cx="1974666" cy="274320"/>
-          </a:xfrm>
-          <a:prstGeom prst="rect">
-            <a:avLst/>
-          </a:prstGeom>
-          <a:noFill/>
-          <a:ln/>
-        </p:spPr>
-        <p:txBody>
-          <a:bodyPr wrap="square" lIns="0" tIns="0" rIns="0" bIns="0" rtlCol="0" anchor="ctr"/>
-          <a:lstStyle/>
-          <a:p>
-            <a:pPr indent="0" marL="0">
-              <a:lnSpc>
-                <a:spcPct val="100000"/>
-              </a:lnSpc>
-              <a:buNone/>
-            </a:pPr>
-            <a:r>
-              <a:rPr lang="en-US" sz="950" b="1" dirty="0">
-                <a:solidFill>
-                  <a:srgbClr val="007F72"/>
-                </a:solidFill>
-                <a:latin typeface="Arial" pitchFamily="34" charset="0"/>
-                <a:ea typeface="Arial" pitchFamily="34" charset="-122"/>
-                <a:cs typeface="Arial" pitchFamily="34" charset="-120"/>
-              </a:rPr>
-              <a:t>Ví dụ · </a:t>
-            </a:r>
-            <a:pPr indent="0" marL="0">
-              <a:lnSpc>
-                <a:spcPct val="100000"/>
-              </a:lnSpc>
-              <a:buNone/>
-            </a:pPr>
-            <a:r>
-              <a:rPr lang="en-US" sz="950" dirty="0">
-                <a:solidFill>
-                  <a:srgbClr val="1A2733"/>
-                </a:solidFill>
-                <a:latin typeface="Arial" pitchFamily="34" charset="0"/>
-                <a:ea typeface="Arial" pitchFamily="34" charset="-122"/>
-                <a:cs typeface="Arial" pitchFamily="34" charset="-120"/>
-              </a:rPr>
-              <a:t>chữ càng nhỏ càng khó đọc</a:t>
-            </a:r>
-            <a:endParaRPr lang="en-US" sz="950" dirty="0"/>
-          </a:p>
-          <a:p>
-            <a:pPr indent="0" marL="0">
-              <a:lnSpc>
-                <a:spcPct val="100000"/>
-              </a:lnSpc>
-              <a:buNone/>
-            </a:pPr>
-            <a:r>
-              <a:rPr lang="en-US" sz="900" b="1" dirty="0">
-                <a:solidFill>
-                  <a:srgbClr val="007F72"/>
-                </a:solidFill>
-                <a:latin typeface="微軟正黑體" pitchFamily="34" charset="0"/>
-                <a:ea typeface="微軟正黑體" pitchFamily="34" charset="-122"/>
-                <a:cs typeface="微軟正黑體" pitchFamily="34" charset="-120"/>
-              </a:rPr>
-              <a:t>例子・</a:t>
-            </a:r>
-            <a:pPr indent="0" marL="0">
-              <a:lnSpc>
-                <a:spcPct val="100000"/>
-              </a:lnSpc>
-              <a:buNone/>
-            </a:pPr>
-            <a:r>
-              <a:rPr lang="en-US" sz="900" dirty="0">
-                <a:solidFill>
-                  <a:srgbClr val="5F7183"/>
-                </a:solidFill>
-                <a:latin typeface="微軟正黑體" pitchFamily="34" charset="0"/>
-                <a:ea typeface="微軟正黑體" pitchFamily="34" charset="-122"/>
-                <a:cs typeface="微軟正黑體" pitchFamily="34" charset="-120"/>
-              </a:rPr>
-              <a:t>字愈小愈難認</a:t>
-            </a:r>
-            <a:endParaRPr lang="en-US" sz="950" dirty="0"/>
-          </a:p>
-        </p:txBody>
-      </p:sp>
-      <p:pic>
-        <p:nvPicPr>
-          <p:cNvPr id="10" name="Image 1" descr="/Users/tsengchenghsun/Class/carClass/Claude outputs/第八週(10-29)/src/logo.png">    </p:cNvPr>
-          <p:cNvPicPr>
-            <a:picLocks noChangeAspect="1"/>
-          </p:cNvPicPr>
-          <p:nvPr/>
-        </p:nvPicPr>
-        <p:blipFill>
-          <a:blip r:embed="rId2"/>
-          <a:stretch>
-            <a:fillRect/>
-          </a:stretch>
-        </p:blipFill>
-        <p:spPr>
-          <a:xfrm>
-            <a:off x="7882128" y="109728"/>
-            <a:ext cx="1097280" cy="242439"/>
-          </a:xfrm>
-          <a:prstGeom prst="rect">
-            <a:avLst/>
-          </a:prstGeom>
-        </p:spPr>
-      </p:pic>
-      <p:sp>
-        <p:nvSpPr>
-          <p:cNvPr id="11" name="Text 6"/>
-          <p:cNvSpPr txBox="1"/>
-          <p:nvPr/>
-        </p:nvSpPr>
-        <p:spPr>
-          <a:xfrm>
-            <a:off x="109728" y="128016"/>
-            <a:ext cx="822960" cy="256032"/>
-          </a:xfrm>
-          <a:prstGeom prst="rect">
-            <a:avLst/>
-          </a:prstGeom>
-          <a:noFill/>
-          <a:ln/>
-        </p:spPr>
-        <p:txBody>
-          <a:bodyPr wrap="square" lIns="0" tIns="0" rIns="0" bIns="0" rtlCol="0" anchor="ctr"/>
-          <a:lstStyle/>
-          <a:p>
-            <a:pPr indent="0" marL="0">
-              <a:buNone/>
-            </a:pPr>
-            <a:r>
-              <a:rPr lang="en-US" sz="900" dirty="0">
-                <a:solidFill>
-                  <a:srgbClr val="5F7183"/>
-                </a:solidFill>
-                <a:latin typeface="Arial" pitchFamily="34" charset="0"/>
-                <a:ea typeface="Arial" pitchFamily="34" charset="-122"/>
-                <a:cs typeface="Arial" pitchFamily="34" charset="-120"/>
-              </a:rPr>
-              <a:t>17 / 22</a:t>
-            </a:r>
-            <a:endParaRPr lang="en-US" sz="900" dirty="0"/>
-          </a:p>
-        </p:txBody>
-      </p:sp>
-      <p:sp>
-        <p:nvSpPr>
-          <p:cNvPr id="12" name="Text 7"/>
           <p:cNvSpPr txBox="1"/>
           <p:nvPr/>
         </p:nvSpPr>
@@ -17908,7 +18280,7 @@
                 <a:ea typeface="Arial" pitchFamily="34" charset="-122"/>
                 <a:cs typeface="Arial" pitchFamily="34" charset="-120"/>
               </a:rPr>
-              <a:t>Ban đêm · 晚上</a:t>
+              <a:t>Càng xa càng sót · 一遠就漏</a:t>
             </a:r>
             <a:endParaRPr lang="en-US" sz="1250" dirty="0"/>
           </a:p>
@@ -17923,7 +18295,7 @@
         <p:spPr>
           <a:xfrm>
             <a:off x="502920" y="1412748"/>
-            <a:ext cx="5120640" cy="2514600"/>
+            <a:ext cx="4299910" cy="2514600"/>
           </a:xfrm>
           <a:prstGeom prst="roundRect">
             <a:avLst>
@@ -17943,7 +18315,7 @@
       </p:sp>
       <p:pic>
         <p:nvPicPr>
-          <p:cNvPr id="4" name="Image 0" descr="/Users/tsengchenghsun/Class/carClass/Claude outputs/第八週(10-29)/src/img/w8_night.jpg">    </p:cNvPr>
+          <p:cNvPr id="4" name="Image 0" descr="/Users/tsengchenghsun/Class/carClass/Claude outputs/第八週(10-29)/src/img/w8_recall.png">    </p:cNvPr>
           <p:cNvPicPr>
             <a:picLocks noChangeAspect="1"/>
           </p:cNvPicPr>
@@ -17957,8 +18329,8 @@
         </p:blipFill>
         <p:spPr>
           <a:xfrm>
-            <a:off x="576072" y="1669237"/>
-            <a:ext cx="4974336" cy="1818742"/>
+            <a:off x="576072" y="1514246"/>
+            <a:ext cx="4153606" cy="2128723"/>
           </a:xfrm>
           <a:prstGeom prst="rect">
             <a:avLst/>
@@ -17974,7 +18346,7 @@
         <p:spPr>
           <a:xfrm>
             <a:off x="576072" y="3707892"/>
-            <a:ext cx="4974336" cy="182880"/>
+            <a:ext cx="4153606" cy="182880"/>
           </a:xfrm>
           <a:prstGeom prst="rect">
             <a:avLst/>
@@ -17998,7 +18370,7 @@
                 <a:ea typeface="Arial" pitchFamily="34" charset="-122"/>
                 <a:cs typeface="Arial" pitchFamily="34" charset="-120"/>
               </a:rPr>
-              <a:t>nuScenes scene-1094（新加坡，夜間雨後）· YOLOX-s 門檻 0.3 · 白色虛線＝標註有、沒抓到</a:t>
+              <a:t>nuScenes mini 白天 283 張前方照片 · YOLOX-s · 門檻 0.3 · 看得到 60% 以上</a:t>
             </a:r>
             <a:endParaRPr lang="en-US" sz="700" dirty="0"/>
           </a:p>
@@ -18012,8 +18384,8 @@
         </p:nvSpPr>
         <p:spPr>
           <a:xfrm>
-            <a:off x="5934456" y="914400"/>
-            <a:ext cx="2706624" cy="3511296"/>
+            <a:off x="5113726" y="914400"/>
+            <a:ext cx="3527354" cy="3511296"/>
           </a:xfrm>
           <a:prstGeom prst="rect">
             <a:avLst/>
@@ -18040,7 +18412,7 @@
                 <a:ea typeface="Arial" pitchFamily="34" charset="-122"/>
                 <a:cs typeface="Arial" pitchFamily="34" charset="-120"/>
               </a:rPr>
-              <a:t>Người 10–20 m: ban ngày bắt được 66%, ban đêm 49%</a:t>
+              <a:t>Người đi bộ: trong 10 m bắt được 82%, ở 40–50 m chỉ 3%</a:t>
             </a:r>
             <a:endParaRPr lang="en-US" sz="2300" dirty="0"/>
           </a:p>
@@ -18060,7 +18432,7 @@
                 <a:ea typeface="微軟正黑體" pitchFamily="34" charset="-122"/>
                 <a:cs typeface="微軟正黑體" pitchFamily="34" charset="-120"/>
               </a:rPr>
-              <a:t>10–20 公尺的行人：白天抓到 66%，晚上 49%</a:t>
+              <a:t>行人：10 公尺內抓到 82%，40–50 公尺只剩 3%</a:t>
             </a:r>
             <a:endParaRPr lang="en-US" sz="2300" dirty="0"/>
           </a:p>
@@ -18083,7 +18455,7 @@
                 <a:ea typeface="Arial" pitchFamily="34" charset="-122"/>
                 <a:cs typeface="Arial" pitchFamily="34" charset="-120"/>
               </a:rPr>
-              <a:t>Cùng một mô hình, cùng khoảng cách: tối thì số điểm ảnh «giống người» ít đi. Đúng như bảng hỏng tuần 7: camera ban đêm ▲.</a:t>
+              <a:t>Người cao 1,7 m ở 45 m chỉ còn khoảng 47 điểm ảnh; mô hình thu ảnh về 640 ngang, còn khoảng 19.</a:t>
             </a:r>
             <a:endParaRPr lang="en-US" sz="2300" dirty="0"/>
           </a:p>
@@ -18103,15 +18475,138 @@
                 <a:ea typeface="微軟正黑體" pitchFamily="34" charset="-122"/>
                 <a:cs typeface="微軟正黑體" pitchFamily="34" charset="-120"/>
               </a:rPr>
-              <a:t>同一個模型、同樣的距離：天一黑，照片上「像人的數字」就少了。跟上週失效表一樣：相機夜間 ▲。</a:t>
+              <a:t>1.7 公尺高的人，在 45 公尺外只有約 47 個像素高；模型把照片縮到 640 寬，只剩約 19 個。</a:t>
             </a:r>
             <a:endParaRPr lang="en-US" sz="2300" dirty="0"/>
+          </a:p>
+        </p:txBody>
+      </p:sp>
+      <p:sp>
+        <p:nvSpPr>
+          <p:cNvPr id="7" name="Shape 4"/>
+          <p:cNvSpPr/>
+          <p:nvPr/>
+        </p:nvSpPr>
+        <p:spPr>
+          <a:xfrm>
+            <a:off x="6483534" y="365760"/>
+            <a:ext cx="2157546" cy="310896"/>
+          </a:xfrm>
+          <a:prstGeom prst="roundRect">
+            <a:avLst>
+              <a:gd name="adj" fmla="val 20588"/>
+            </a:avLst>
+          </a:prstGeom>
+          <a:solidFill>
+            <a:srgbClr val="EAF6F4"/>
+          </a:solidFill>
+          <a:ln w="9525">
+            <a:solidFill>
+              <a:srgbClr val="9FD6CE"/>
+            </a:solidFill>
+            <a:prstDash val="solid"/>
+          </a:ln>
+        </p:spPr>
+      </p:sp>
+      <p:sp>
+        <p:nvSpPr>
+          <p:cNvPr id="8" name="Text 5"/>
+          <p:cNvSpPr txBox="1"/>
+          <p:nvPr/>
+        </p:nvSpPr>
+        <p:spPr>
+          <a:xfrm>
+            <a:off x="6611550" y="384048"/>
+            <a:ext cx="1974666" cy="274320"/>
+          </a:xfrm>
+          <a:prstGeom prst="rect">
+            <a:avLst/>
+          </a:prstGeom>
+          <a:noFill/>
+          <a:ln/>
+        </p:spPr>
+        <p:txBody>
+          <a:bodyPr wrap="square" lIns="0" tIns="0" rIns="0" bIns="0" rtlCol="0" anchor="ctr"/>
+          <a:lstStyle/>
+          <a:p>
+            <a:pPr indent="0" marL="0">
+              <a:lnSpc>
+                <a:spcPct val="100000"/>
+              </a:lnSpc>
+              <a:buNone/>
+            </a:pPr>
+            <a:r>
+              <a:rPr lang="en-US" sz="950" b="1" dirty="0">
+                <a:solidFill>
+                  <a:srgbClr val="007F72"/>
+                </a:solidFill>
+                <a:latin typeface="Arial" pitchFamily="34" charset="0"/>
+                <a:ea typeface="Arial" pitchFamily="34" charset="-122"/>
+                <a:cs typeface="Arial" pitchFamily="34" charset="-120"/>
+              </a:rPr>
+              <a:t>Ví dụ · </a:t>
+            </a:r>
+            <a:pPr indent="0" marL="0">
+              <a:lnSpc>
+                <a:spcPct val="100000"/>
+              </a:lnSpc>
+              <a:buNone/>
+            </a:pPr>
+            <a:r>
+              <a:rPr lang="en-US" sz="950" dirty="0">
+                <a:solidFill>
+                  <a:srgbClr val="1A2733"/>
+                </a:solidFill>
+                <a:latin typeface="Arial" pitchFamily="34" charset="0"/>
+                <a:ea typeface="Arial" pitchFamily="34" charset="-122"/>
+                <a:cs typeface="Arial" pitchFamily="34" charset="-120"/>
+              </a:rPr>
+              <a:t>chữ càng nhỏ càng khó đọc</a:t>
+            </a:r>
+            <a:endParaRPr lang="en-US" sz="950" dirty="0"/>
+          </a:p>
+          <a:p>
+            <a:pPr indent="0" marL="0">
+              <a:lnSpc>
+                <a:spcPct val="100000"/>
+              </a:lnSpc>
+              <a:buNone/>
+            </a:pPr>
+            <a:r>
+              <a:rPr lang="en-US" sz="900" b="1" dirty="0">
+                <a:solidFill>
+                  <a:srgbClr val="007F72"/>
+                </a:solidFill>
+                <a:latin typeface="微軟正黑體" pitchFamily="34" charset="0"/>
+                <a:ea typeface="微軟正黑體" pitchFamily="34" charset="-122"/>
+                <a:cs typeface="微軟正黑體" pitchFamily="34" charset="-120"/>
+              </a:rPr>
+              <a:t>例子・</a:t>
+            </a:r>
+            <a:pPr indent="0" marL="0">
+              <a:lnSpc>
+                <a:spcPct val="100000"/>
+              </a:lnSpc>
+              <a:buNone/>
+            </a:pPr>
+            <a:r>
+              <a:rPr lang="en-US" sz="900" dirty="0">
+                <a:solidFill>
+                  <a:srgbClr val="5F7183"/>
+                </a:solidFill>
+                <a:latin typeface="微軟正黑體" pitchFamily="34" charset="0"/>
+                <a:ea typeface="微軟正黑體" pitchFamily="34" charset="-122"/>
+                <a:cs typeface="微軟正黑體" pitchFamily="34" charset="-120"/>
+              </a:rPr>
+              <a:t>字愈小愈難認</a:t>
+            </a:r>
+            <a:endParaRPr lang="en-US" sz="950" dirty="0"/>
           </a:p>
         </p:txBody>
       </p:sp>
       <p:pic>
         <p:nvPicPr>
-          <p:cNvPr id="8" name="Image 1" descr="/Users/tsengchenghsun/Class/carClass/Claude outputs/第八週(10-29)/src/logo.png">    </p:cNvPr>
+          <p:cNvPr id="10" name="Image 1" descr="/Users/tsengchenghsun/Class/carClass/Claude outputs/第八週(10-29)/src/logo.png">    </p:cNvPr>
           <p:cNvPicPr>
             <a:picLocks noChangeAspect="1"/>
           </p:cNvPicPr>
@@ -18135,7 +18630,7 @@
       </p:pic>
       <p:sp>
         <p:nvSpPr>
-          <p:cNvPr id="9" name="Text 4"/>
+          <p:cNvPr id="11" name="Text 6"/>
           <p:cNvSpPr txBox="1"/>
           <p:nvPr/>
         </p:nvSpPr>
@@ -18166,7 +18661,7 @@
                 <a:ea typeface="Arial" pitchFamily="34" charset="-122"/>
                 <a:cs typeface="Arial" pitchFamily="34" charset="-120"/>
               </a:rPr>
-              <a:t>18 / 22</a:t>
+              <a:t>18 / 23</a:t>
             </a:r>
             <a:endParaRPr lang="en-US" sz="900" dirty="0"/>
           </a:p>
@@ -18174,7 +18669,7 @@
       </p:sp>
       <p:sp>
         <p:nvSpPr>
-          <p:cNvPr id="10" name="Text 5"/>
+          <p:cNvPr id="12" name="Text 7"/>
           <p:cNvSpPr txBox="1"/>
           <p:nvPr/>
         </p:nvSpPr>
@@ -18269,7 +18764,7 @@
                 <a:ea typeface="Arial" pitchFamily="34" charset="-122"/>
                 <a:cs typeface="Arial" pitchFamily="34" charset="-120"/>
               </a:rPr>
-              <a:t>Khung + lidar · 框＋光達</a:t>
+              <a:t>Ban đêm · 晚上</a:t>
             </a:r>
             <a:endParaRPr lang="en-US" sz="1250" dirty="0"/>
           </a:p>
@@ -18304,7 +18799,7 @@
       </p:sp>
       <p:pic>
         <p:nvPicPr>
-          <p:cNvPr id="4" name="Image 0" descr="/Users/tsengchenghsun/Class/carClass/Claude outputs/第八週(10-29)/src/img/w8_box_dist.jpg">    </p:cNvPr>
+          <p:cNvPr id="4" name="Image 0" descr="/Users/tsengchenghsun/Class/carClass/Claude outputs/第八週(10-29)/src/img/w8_night.jpg">    </p:cNvPr>
           <p:cNvPicPr>
             <a:picLocks noChangeAspect="1"/>
           </p:cNvPicPr>
@@ -18318,8 +18813,8 @@
         </p:blipFill>
         <p:spPr>
           <a:xfrm>
-            <a:off x="576072" y="1711985"/>
-            <a:ext cx="4974336" cy="1733245"/>
+            <a:off x="576072" y="1669237"/>
+            <a:ext cx="4974336" cy="1818742"/>
           </a:xfrm>
           <a:prstGeom prst="rect">
             <a:avLst/>
@@ -18359,7 +18854,7 @@
                 <a:ea typeface="Arial" pitchFamily="34" charset="-122"/>
                 <a:cs typeface="Arial" pitchFamily="34" charset="-120"/>
               </a:rPr>
-              <a:t>nuScenes scene-0553 · YOLOX-s 框 ＋ 光達點（黃）· 距離＝框裡點最密那 1 公尺的中位數</a:t>
+              <a:t>nuScenes scene-1094（新加坡，夜間雨後）· YOLOX-s 門檻 0.3 · 白色虛線＝標註有、沒抓到</a:t>
             </a:r>
             <a:endParaRPr lang="en-US" sz="700" dirty="0"/>
           </a:p>
@@ -18401,7 +18896,7 @@
                 <a:ea typeface="Arial" pitchFamily="34" charset="-122"/>
                 <a:cs typeface="Arial" pitchFamily="34" charset="-120"/>
               </a:rPr>
-              <a:t>Khung trên ảnh không biết bao xa. Thêm điểm lidar thì biết</a:t>
+              <a:t>Người 10–20 m: ban ngày bắt được 66%, ban đêm 49%</a:t>
             </a:r>
             <a:endParaRPr lang="en-US" sz="2300" dirty="0"/>
           </a:p>
@@ -18421,7 +18916,7 @@
                 <a:ea typeface="微軟正黑體" pitchFamily="34" charset="-122"/>
                 <a:cs typeface="微軟正黑體" pitchFamily="34" charset="-120"/>
               </a:rPr>
-              <a:t>照片上的框不知道多遠。加上光達的點就知道</a:t>
+              <a:t>10–20 公尺的行人：白天抓到 66%，晚上 49%</a:t>
             </a:r>
             <a:endParaRPr lang="en-US" sz="2300" dirty="0"/>
           </a:p>
@@ -18444,7 +18939,7 @@
                 <a:ea typeface="Arial" pitchFamily="34" charset="-122"/>
                 <a:cs typeface="Arial" pitchFamily="34" charset="-120"/>
               </a:rPr>
-              <a:t>Người 8,9 m (nhãn chính thức 9,0 m), xe 21,4 m (22,0 m). Đây là cặp camera + lidar của tuần 7.</a:t>
+              <a:t>Cùng một mô hình, cùng khoảng cách: tối thì số điểm ảnh «giống người» ít đi. Đúng như bảng hỏng tuần 7: camera ban đêm ▲.</a:t>
             </a:r>
             <a:endParaRPr lang="en-US" sz="2300" dirty="0"/>
           </a:p>
@@ -18464,7 +18959,7 @@
                 <a:ea typeface="微軟正黑體" pitchFamily="34" charset="-122"/>
                 <a:cs typeface="微軟正黑體" pitchFamily="34" charset="-120"/>
               </a:rPr>
-              <a:t>人 8.9 公尺（官方標註 9.0），車 21.4 公尺（官方 22.0）。這就是上週的相機＋光達搭檔。</a:t>
+              <a:t>同一個模型、同樣的距離：天一黑，照片上「像人的數字」就少了。跟上週失效表一樣：相機夜間 ▲。</a:t>
             </a:r>
             <a:endParaRPr lang="en-US" sz="2300" dirty="0"/>
           </a:p>
@@ -18527,7 +19022,7 @@
                 <a:ea typeface="Arial" pitchFamily="34" charset="-122"/>
                 <a:cs typeface="Arial" pitchFamily="34" charset="-120"/>
               </a:rPr>
-              <a:t>19 / 22</a:t>
+              <a:t>19 / 23</a:t>
             </a:r>
             <a:endParaRPr lang="en-US" sz="900" dirty="0"/>
           </a:p>
@@ -19507,7 +20002,7 @@
                 <a:ea typeface="Arial" pitchFamily="34" charset="-122"/>
                 <a:cs typeface="Arial" pitchFamily="34" charset="-120"/>
               </a:rPr>
-              <a:t>2 / 22</a:t>
+              <a:t>2 / 23</a:t>
             </a:r>
             <a:endParaRPr lang="en-US" sz="880" dirty="0"/>
           </a:p>
@@ -19610,7 +20105,7 @@
                 <a:ea typeface="Arial" pitchFamily="34" charset="-122"/>
                 <a:cs typeface="Arial" pitchFamily="34" charset="-120"/>
               </a:rPr>
-              <a:t>Khung 2D, khung 3D · 平面框、立體框</a:t>
+              <a:t>Khung + lidar · 框＋光達</a:t>
             </a:r>
             <a:endParaRPr lang="en-US" sz="1250" dirty="0"/>
           </a:p>
@@ -19645,7 +20140,7 @@
       </p:sp>
       <p:pic>
         <p:nvPicPr>
-          <p:cNvPr id="4" name="Image 0" descr="/Users/tsengchenghsun/Class/carClass/Claude outputs/第八週(10-29)/src/img/w8_box3d.jpg">    </p:cNvPr>
+          <p:cNvPr id="4" name="Image 0" descr="/Users/tsengchenghsun/Class/carClass/Claude outputs/第八週(10-29)/src/img/w8_box_dist.jpg">    </p:cNvPr>
           <p:cNvPicPr>
             <a:picLocks noChangeAspect="1"/>
           </p:cNvPicPr>
@@ -19700,7 +20195,7 @@
                 <a:ea typeface="Arial" pitchFamily="34" charset="-122"/>
                 <a:cs typeface="Arial" pitchFamily="34" charset="-120"/>
               </a:rPr>
-              <a:t>nuScenes scene-0553 官方 3D 標註框投到照片上 · CC BY-NC-SA 4.0 · 白色那一面＝物體正面</a:t>
+              <a:t>nuScenes scene-0553 · YOLOX-s 框 ＋ 光達點（黃）· 距離＝框裡點最密那 1 公尺的中位數</a:t>
             </a:r>
             <a:endParaRPr lang="en-US" sz="700" dirty="0"/>
           </a:p>
@@ -19742,7 +20237,7 @@
                 <a:ea typeface="Arial" pitchFamily="34" charset="-122"/>
                 <a:cs typeface="Arial" pitchFamily="34" charset="-120"/>
               </a:rPr>
-              <a:t>Xe tự lái cần khung 3D: vị trí, kích thước, hướng — 7 con số</a:t>
+              <a:t>Khung trên ảnh không biết bao xa. Thêm điểm lidar thì biết</a:t>
             </a:r>
             <a:endParaRPr lang="en-US" sz="2300" dirty="0"/>
           </a:p>
@@ -19762,7 +20257,7 @@
                 <a:ea typeface="微軟正黑體" pitchFamily="34" charset="-122"/>
                 <a:cs typeface="微軟正黑體" pitchFamily="34" charset="-120"/>
               </a:rPr>
-              <a:t>自駕車要的是立體框：位置、大小、朝向——7 個數字</a:t>
+              <a:t>照片上的框不知道多遠。加上光達的點就知道</a:t>
             </a:r>
             <a:endParaRPr lang="en-US" sz="2300" dirty="0"/>
           </a:p>
@@ -19785,7 +20280,7 @@
                 <a:ea typeface="Arial" pitchFamily="34" charset="-122"/>
                 <a:cs typeface="Arial" pitchFamily="34" charset="-120"/>
               </a:rPr>
-              <a:t>Khung 2D chỉ nói «ở đâu trên ảnh». Khung 3D nói «ở đâu ngoài đường, to bao nhiêu, quay về đâu».</a:t>
+              <a:t>Người 8,9 m (nhãn chính thức 9,0 m), xe 21,4 m (22,0 m). Đây là cặp camera + lidar của tuần 7.</a:t>
             </a:r>
             <a:endParaRPr lang="en-US" sz="2300" dirty="0"/>
           </a:p>
@@ -19805,7 +20300,7 @@
                 <a:ea typeface="微軟正黑體" pitchFamily="34" charset="-122"/>
                 <a:cs typeface="微軟正黑體" pitchFamily="34" charset="-120"/>
               </a:rPr>
-              <a:t>平面框只說「在照片的哪裡」。立體框說「在路上的哪裡、多大、朝哪邊」。</a:t>
+              <a:t>人 8.9 公尺（官方標註 9.0），車 21.4 公尺（官方 22.0）。這就是上週的相機＋光達搭檔。</a:t>
             </a:r>
             <a:endParaRPr lang="en-US" sz="2300" dirty="0"/>
           </a:p>
@@ -19868,7 +20363,7 @@
                 <a:ea typeface="Arial" pitchFamily="34" charset="-122"/>
                 <a:cs typeface="Arial" pitchFamily="34" charset="-120"/>
               </a:rPr>
-              <a:t>20 / 22</a:t>
+              <a:t>20 / 23</a:t>
             </a:r>
             <a:endParaRPr lang="en-US" sz="900" dirty="0"/>
           </a:p>
@@ -19971,6 +20466,367 @@
                 <a:ea typeface="Arial" pitchFamily="34" charset="-122"/>
                 <a:cs typeface="Arial" pitchFamily="34" charset="-120"/>
               </a:rPr>
+              <a:t>Khung 2D, khung 3D · 平面框、立體框</a:t>
+            </a:r>
+            <a:endParaRPr lang="en-US" sz="1250" dirty="0"/>
+          </a:p>
+        </p:txBody>
+      </p:sp>
+      <p:sp>
+        <p:nvSpPr>
+          <p:cNvPr id="3" name="Shape 1"/>
+          <p:cNvSpPr/>
+          <p:nvPr/>
+        </p:nvSpPr>
+        <p:spPr>
+          <a:xfrm>
+            <a:off x="502920" y="1412748"/>
+            <a:ext cx="5120640" cy="2514600"/>
+          </a:xfrm>
+          <a:prstGeom prst="roundRect">
+            <a:avLst>
+              <a:gd name="adj" fmla="val 4364"/>
+            </a:avLst>
+          </a:prstGeom>
+          <a:solidFill>
+            <a:srgbClr val="FFFFFF"/>
+          </a:solidFill>
+          <a:ln w="12700">
+            <a:solidFill>
+              <a:srgbClr val="DBE3EA"/>
+            </a:solidFill>
+            <a:prstDash val="solid"/>
+          </a:ln>
+        </p:spPr>
+      </p:sp>
+      <p:pic>
+        <p:nvPicPr>
+          <p:cNvPr id="4" name="Image 0" descr="/Users/tsengchenghsun/Class/carClass/Claude outputs/第八週(10-29)/src/img/w8_box3d.jpg">    </p:cNvPr>
+          <p:cNvPicPr>
+            <a:picLocks noChangeAspect="1"/>
+          </p:cNvPicPr>
+          <p:nvPr/>
+        </p:nvPicPr>
+        <p:blipFill>
+          <a:blip r:embed="rId1"/>
+          <a:stretch>
+            <a:fillRect/>
+          </a:stretch>
+        </p:blipFill>
+        <p:spPr>
+          <a:xfrm>
+            <a:off x="576072" y="1711985"/>
+            <a:ext cx="4974336" cy="1733245"/>
+          </a:xfrm>
+          <a:prstGeom prst="rect">
+            <a:avLst/>
+          </a:prstGeom>
+        </p:spPr>
+      </p:pic>
+      <p:sp>
+        <p:nvSpPr>
+          <p:cNvPr id="5" name="Text 2"/>
+          <p:cNvSpPr txBox="1"/>
+          <p:nvPr/>
+        </p:nvSpPr>
+        <p:spPr>
+          <a:xfrm>
+            <a:off x="576072" y="3707892"/>
+            <a:ext cx="4974336" cy="182880"/>
+          </a:xfrm>
+          <a:prstGeom prst="rect">
+            <a:avLst/>
+          </a:prstGeom>
+          <a:noFill/>
+          <a:ln/>
+        </p:spPr>
+        <p:txBody>
+          <a:bodyPr wrap="square" lIns="0" tIns="0" rIns="0" bIns="0" rtlCol="0" anchor="ctr"/>
+          <a:lstStyle/>
+          <a:p>
+            <a:pPr algn="ctr" indent="0" marL="0">
+              <a:buNone/>
+            </a:pPr>
+            <a:r>
+              <a:rPr lang="en-US" sz="700" dirty="0">
+                <a:solidFill>
+                  <a:srgbClr val="5F7183"/>
+                </a:solidFill>
+                <a:latin typeface="Arial" pitchFamily="34" charset="0"/>
+                <a:ea typeface="Arial" pitchFamily="34" charset="-122"/>
+                <a:cs typeface="Arial" pitchFamily="34" charset="-120"/>
+              </a:rPr>
+              <a:t>nuScenes scene-0553 官方 3D 標註框投到照片上 · CC BY-NC-SA 4.0 · 白色那一面＝物體正面</a:t>
+            </a:r>
+            <a:endParaRPr lang="en-US" sz="700" dirty="0"/>
+          </a:p>
+        </p:txBody>
+      </p:sp>
+      <p:sp>
+        <p:nvSpPr>
+          <p:cNvPr id="6" name="Text 3"/>
+          <p:cNvSpPr txBox="1"/>
+          <p:nvPr/>
+        </p:nvSpPr>
+        <p:spPr>
+          <a:xfrm>
+            <a:off x="5934456" y="914400"/>
+            <a:ext cx="2706624" cy="3511296"/>
+          </a:xfrm>
+          <a:prstGeom prst="rect">
+            <a:avLst/>
+          </a:prstGeom>
+          <a:noFill/>
+          <a:ln/>
+        </p:spPr>
+        <p:txBody>
+          <a:bodyPr wrap="square" lIns="0" tIns="0" rIns="0" bIns="0" rtlCol="0" anchor="ctr"/>
+          <a:lstStyle/>
+          <a:p>
+            <a:pPr indent="0" marL="0">
+              <a:lnSpc>
+                <a:spcPct val="120000"/>
+              </a:lnSpc>
+              <a:buNone/>
+            </a:pPr>
+            <a:r>
+              <a:rPr lang="en-US" sz="2300" b="1" dirty="0">
+                <a:solidFill>
+                  <a:srgbClr val="0B1F3A"/>
+                </a:solidFill>
+                <a:latin typeface="Arial" pitchFamily="34" charset="0"/>
+                <a:ea typeface="Arial" pitchFamily="34" charset="-122"/>
+                <a:cs typeface="Arial" pitchFamily="34" charset="-120"/>
+              </a:rPr>
+              <a:t>Xe tự lái cần khung 3D: vị trí, kích thước, hướng — 7 con số</a:t>
+            </a:r>
+            <a:endParaRPr lang="en-US" sz="2300" dirty="0"/>
+          </a:p>
+          <a:p>
+            <a:pPr indent="0" marL="0">
+              <a:lnSpc>
+                <a:spcPct val="120000"/>
+              </a:lnSpc>
+              <a:buNone/>
+            </a:pPr>
+            <a:r>
+              <a:rPr lang="en-US" sz="1400" b="1" dirty="0">
+                <a:solidFill>
+                  <a:srgbClr val="007F72"/>
+                </a:solidFill>
+                <a:latin typeface="微軟正黑體" pitchFamily="34" charset="0"/>
+                <a:ea typeface="微軟正黑體" pitchFamily="34" charset="-122"/>
+                <a:cs typeface="微軟正黑體" pitchFamily="34" charset="-120"/>
+              </a:rPr>
+              <a:t>自駕車要的是立體框：位置、大小、朝向——7 個數字</a:t>
+            </a:r>
+            <a:endParaRPr lang="en-US" sz="2300" dirty="0"/>
+          </a:p>
+          <a:p>
+            <a:pPr indent="0" marL="0">
+              <a:lnSpc>
+                <a:spcPct val="120000"/>
+              </a:lnSpc>
+              <a:spcBef>
+                <a:spcPts val="1440"/>
+              </a:spcBef>
+              <a:buNone/>
+            </a:pPr>
+            <a:r>
+              <a:rPr lang="en-US" sz="1250" dirty="0">
+                <a:solidFill>
+                  <a:srgbClr val="5F7183"/>
+                </a:solidFill>
+                <a:latin typeface="Arial" pitchFamily="34" charset="0"/>
+                <a:ea typeface="Arial" pitchFamily="34" charset="-122"/>
+                <a:cs typeface="Arial" pitchFamily="34" charset="-120"/>
+              </a:rPr>
+              <a:t>Khung 2D chỉ nói «ở đâu trên ảnh». Khung 3D nói «ở đâu ngoài đường, to bao nhiêu, quay về đâu».</a:t>
+            </a:r>
+            <a:endParaRPr lang="en-US" sz="2300" dirty="0"/>
+          </a:p>
+          <a:p>
+            <a:pPr indent="0" marL="0">
+              <a:lnSpc>
+                <a:spcPct val="120000"/>
+              </a:lnSpc>
+              <a:buNone/>
+            </a:pPr>
+            <a:r>
+              <a:rPr lang="en-US" sz="1150" dirty="0">
+                <a:solidFill>
+                  <a:srgbClr val="5F7183"/>
+                </a:solidFill>
+                <a:latin typeface="微軟正黑體" pitchFamily="34" charset="0"/>
+                <a:ea typeface="微軟正黑體" pitchFamily="34" charset="-122"/>
+                <a:cs typeface="微軟正黑體" pitchFamily="34" charset="-120"/>
+              </a:rPr>
+              <a:t>平面框只說「在照片的哪裡」。立體框說「在路上的哪裡、多大、朝哪邊」。</a:t>
+            </a:r>
+            <a:endParaRPr lang="en-US" sz="2300" dirty="0"/>
+          </a:p>
+        </p:txBody>
+      </p:sp>
+      <p:pic>
+        <p:nvPicPr>
+          <p:cNvPr id="8" name="Image 1" descr="/Users/tsengchenghsun/Class/carClass/Claude outputs/第八週(10-29)/src/logo.png">    </p:cNvPr>
+          <p:cNvPicPr>
+            <a:picLocks noChangeAspect="1"/>
+          </p:cNvPicPr>
+          <p:nvPr/>
+        </p:nvPicPr>
+        <p:blipFill>
+          <a:blip r:embed="rId2"/>
+          <a:stretch>
+            <a:fillRect/>
+          </a:stretch>
+        </p:blipFill>
+        <p:spPr>
+          <a:xfrm>
+            <a:off x="7882128" y="109728"/>
+            <a:ext cx="1097280" cy="242439"/>
+          </a:xfrm>
+          <a:prstGeom prst="rect">
+            <a:avLst/>
+          </a:prstGeom>
+        </p:spPr>
+      </p:pic>
+      <p:sp>
+        <p:nvSpPr>
+          <p:cNvPr id="9" name="Text 4"/>
+          <p:cNvSpPr txBox="1"/>
+          <p:nvPr/>
+        </p:nvSpPr>
+        <p:spPr>
+          <a:xfrm>
+            <a:off x="109728" y="128016"/>
+            <a:ext cx="822960" cy="256032"/>
+          </a:xfrm>
+          <a:prstGeom prst="rect">
+            <a:avLst/>
+          </a:prstGeom>
+          <a:noFill/>
+          <a:ln/>
+        </p:spPr>
+        <p:txBody>
+          <a:bodyPr wrap="square" lIns="0" tIns="0" rIns="0" bIns="0" rtlCol="0" anchor="ctr"/>
+          <a:lstStyle/>
+          <a:p>
+            <a:pPr indent="0" marL="0">
+              <a:buNone/>
+            </a:pPr>
+            <a:r>
+              <a:rPr lang="en-US" sz="900" dirty="0">
+                <a:solidFill>
+                  <a:srgbClr val="5F7183"/>
+                </a:solidFill>
+                <a:latin typeface="Arial" pitchFamily="34" charset="0"/>
+                <a:ea typeface="Arial" pitchFamily="34" charset="-122"/>
+                <a:cs typeface="Arial" pitchFamily="34" charset="-120"/>
+              </a:rPr>
+              <a:t>21 / 23</a:t>
+            </a:r>
+            <a:endParaRPr lang="en-US" sz="900" dirty="0"/>
+          </a:p>
+        </p:txBody>
+      </p:sp>
+      <p:sp>
+        <p:nvSpPr>
+          <p:cNvPr id="10" name="Text 5"/>
+          <p:cNvSpPr txBox="1"/>
+          <p:nvPr/>
+        </p:nvSpPr>
+        <p:spPr>
+          <a:xfrm>
+            <a:off x="960120" y="128016"/>
+            <a:ext cx="2011680" cy="256032"/>
+          </a:xfrm>
+          <a:prstGeom prst="rect">
+            <a:avLst/>
+          </a:prstGeom>
+          <a:noFill/>
+          <a:ln/>
+        </p:spPr>
+        <p:txBody>
+          <a:bodyPr wrap="square" lIns="0" tIns="0" rIns="0" bIns="0" rtlCol="0" anchor="ctr"/>
+          <a:lstStyle/>
+          <a:p>
+            <a:pPr indent="0" marL="0">
+              <a:buNone/>
+            </a:pPr>
+            <a:r>
+              <a:rPr lang="en-US" sz="900" dirty="0">
+                <a:solidFill>
+                  <a:srgbClr val="5F7183"/>
+                </a:solidFill>
+                <a:latin typeface="Arial" pitchFamily="34" charset="0"/>
+                <a:ea typeface="Arial" pitchFamily="34" charset="-122"/>
+                <a:cs typeface="Arial" pitchFamily="34" charset="-120"/>
+              </a:rPr>
+              <a:t>Tiết 1 · 第 1 節</a:t>
+            </a:r>
+            <a:endParaRPr lang="en-US" sz="900" dirty="0"/>
+          </a:p>
+        </p:txBody>
+      </p:sp>
+    </p:spTree>
+  </p:cSld>
+  <p:clrMapOvr>
+    <a:masterClrMapping/>
+  </p:clrMapOvr>
+</p:sld>
+</file>
+
+<file path=ppt/slides/slide22.xml><?xml version="1.0" encoding="utf-8"?>
+<p:sld xmlns:a="http://schemas.openxmlformats.org/drawingml/2006/main" xmlns:r="http://schemas.openxmlformats.org/officeDocument/2006/relationships" xmlns:p="http://schemas.openxmlformats.org/presentationml/2006/main">
+  <p:cSld name="Slide 22">
+    <p:spTree>
+      <p:nvGrpSpPr>
+        <p:cNvPr id="1" name=""/>
+        <p:cNvGrpSpPr/>
+        <p:nvPr/>
+      </p:nvGrpSpPr>
+      <p:grpSpPr>
+        <a:xfrm>
+          <a:off x="0" y="0"/>
+          <a:ext cx="1" cy="1"/>
+          <a:chOff x="0" y="0"/>
+          <a:chExt cx="0" cy="0"/>
+        </a:xfrm>
+      </p:grpSpPr>
+      <p:sp>
+        <p:nvSpPr>
+          <p:cNvPr id="2" name="Text 0"/>
+          <p:cNvSpPr txBox="1"/>
+          <p:nvPr/>
+        </p:nvSpPr>
+        <p:spPr>
+          <a:xfrm>
+            <a:off x="502920" y="420624"/>
+            <a:ext cx="8138160" cy="274320"/>
+          </a:xfrm>
+          <a:prstGeom prst="rect">
+            <a:avLst/>
+          </a:prstGeom>
+          <a:noFill/>
+          <a:ln/>
+        </p:spPr>
+        <p:txBody>
+          <a:bodyPr wrap="square" lIns="0" tIns="0" rIns="0" bIns="0" rtlCol="0" anchor="ctr"/>
+          <a:lstStyle/>
+          <a:p>
+            <a:pPr indent="0" marL="0">
+              <a:buNone/>
+            </a:pPr>
+            <a:r>
+              <a:rPr lang="en-US" sz="1250" b="1" dirty="0">
+                <a:solidFill>
+                  <a:srgbClr val="007F72"/>
+                </a:solidFill>
+                <a:latin typeface="Arial" pitchFamily="34" charset="0"/>
+                <a:ea typeface="Arial" pitchFamily="34" charset="-122"/>
+                <a:cs typeface="Arial" pitchFamily="34" charset="-120"/>
+              </a:rPr>
               <a:t>Nhìn từ trên · 鳥瞰圖、佔據網格</a:t>
             </a:r>
             <a:endParaRPr lang="en-US" sz="1250" dirty="0"/>
@@ -20398,7 +21254,7 @@
                 <a:ea typeface="Arial" pitchFamily="34" charset="-122"/>
                 <a:cs typeface="Arial" pitchFamily="34" charset="-120"/>
               </a:rPr>
-              <a:t>21 / 22</a:t>
+              <a:t>22 / 23</a:t>
             </a:r>
             <a:endParaRPr lang="en-US" sz="900" dirty="0"/>
           </a:p>
@@ -20451,9 +21307,9 @@
 </p:sld>
 </file>
 
-<file path=ppt/slides/slide22.xml><?xml version="1.0" encoding="utf-8"?>
+<file path=ppt/slides/slide23.xml><?xml version="1.0" encoding="utf-8"?>
 <p:sld xmlns:a="http://schemas.openxmlformats.org/drawingml/2006/main" xmlns:r="http://schemas.openxmlformats.org/officeDocument/2006/relationships" xmlns:p="http://schemas.openxmlformats.org/presentationml/2006/main">
-  <p:cSld name="Slide 22">
+  <p:cSld name="Slide 23">
     <p:bg>
       <p:bgPr>
         <a:solidFill>
@@ -20902,7 +21758,7 @@
                 <a:ea typeface="Arial" pitchFamily="34" charset="-122"/>
                 <a:cs typeface="Arial" pitchFamily="34" charset="-120"/>
               </a:rPr>
-              <a:t>22 / 22</a:t>
+              <a:t>23 / 23</a:t>
             </a:r>
             <a:endParaRPr lang="en-US" sz="900" dirty="0"/>
           </a:p>
@@ -21218,7 +22074,7 @@
                 <a:ea typeface="Arial" pitchFamily="34" charset="-122"/>
                 <a:cs typeface="Arial" pitchFamily="34" charset="-120"/>
               </a:rPr>
-              <a:t>3 / 22</a:t>
+              <a:t>3 / 23</a:t>
             </a:r>
             <a:endParaRPr lang="en-US" sz="900" dirty="0"/>
           </a:p>
@@ -21534,7 +22390,7 @@
                 <a:ea typeface="Arial" pitchFamily="34" charset="-122"/>
                 <a:cs typeface="Arial" pitchFamily="34" charset="-120"/>
               </a:rPr>
-              <a:t>4 / 22</a:t>
+              <a:t>4 / 23</a:t>
             </a:r>
             <a:endParaRPr lang="en-US" sz="900" dirty="0"/>
           </a:p>
@@ -21850,7 +22706,7 @@
                 <a:ea typeface="Arial" pitchFamily="34" charset="-122"/>
                 <a:cs typeface="Arial" pitchFamily="34" charset="-120"/>
               </a:rPr>
-              <a:t>5 / 22</a:t>
+              <a:t>5 / 23</a:t>
             </a:r>
             <a:endParaRPr lang="en-US" sz="900" dirty="0"/>
           </a:p>
@@ -22166,7 +23022,7 @@
                 <a:ea typeface="Arial" pitchFamily="34" charset="-122"/>
                 <a:cs typeface="Arial" pitchFamily="34" charset="-120"/>
               </a:rPr>
-              <a:t>6 / 22</a:t>
+              <a:t>6 / 23</a:t>
             </a:r>
             <a:endParaRPr lang="en-US" sz="900" dirty="0"/>
           </a:p>
@@ -22650,7 +23506,7 @@
                 <a:ea typeface="Arial" pitchFamily="34" charset="-122"/>
                 <a:cs typeface="Arial" pitchFamily="34" charset="-120"/>
               </a:rPr>
-              <a:t>7 / 22</a:t>
+              <a:t>7 / 23</a:t>
             </a:r>
             <a:endParaRPr lang="en-US" sz="900" dirty="0"/>
           </a:p>
@@ -25112,7 +25968,7 @@
                 <a:ea typeface="Arial" pitchFamily="34" charset="-122"/>
                 <a:cs typeface="Arial" pitchFamily="34" charset="-120"/>
               </a:rPr>
-              <a:t>8 / 22</a:t>
+              <a:t>8 / 23</a:t>
             </a:r>
             <a:endParaRPr lang="en-US" sz="820" dirty="0"/>
           </a:p>
@@ -25428,7 +26284,7 @@
                 <a:ea typeface="Arial" pitchFamily="34" charset="-122"/>
                 <a:cs typeface="Arial" pitchFamily="34" charset="-120"/>
               </a:rPr>
-              <a:t>9 / 22</a:t>
+              <a:t>9 / 23</a:t>
             </a:r>
             <a:endParaRPr lang="en-US" sz="900" dirty="0"/>
           </a:p>

--- a/第八週(10-29)/第八週_第1節_簡報.pptx
+++ b/第八週(10-29)/第八週_第1節_簡報.pptx
@@ -1087,11 +1087,11 @@
                 <a:spcPts val="0"/>
               </a:spcBef>
               <a:spcAft>
-                <a:spcPts val="158"/>
+                <a:spcPts val="142"/>
               </a:spcAft>
             </a:pPr>
             <a:r>
-              <a:rPr sz="950" b="1" lang="zh-TW" dirty="0">
+              <a:rPr sz="850" b="1" lang="zh-TW" dirty="0">
                 <a:solidFill>
                   <a:srgbClr val="000000"/>
                 </a:solidFill>
@@ -1102,7 +1102,7 @@
               <a:t>這一張的目的：</a:t>
             </a:r>
             <a:r>
-              <a:rPr sz="950" lang="zh-TW" dirty="0">
+              <a:rPr sz="850" lang="zh-TW" dirty="0">
                 <a:solidFill>
                   <a:srgbClr val="000000"/>
                 </a:solidFill>
@@ -1120,11 +1120,11 @@
                 <a:spcPts val="0"/>
               </a:spcBef>
               <a:spcAft>
-                <a:spcPts val="158"/>
+                <a:spcPts val="142"/>
               </a:spcAft>
             </a:pPr>
             <a:r>
-              <a:rPr sz="950" lang="zh-TW" dirty="0">
+              <a:rPr sz="850" lang="zh-TW" dirty="0">
                 <a:solidFill>
                   <a:srgbClr val="000000"/>
                 </a:solidFill>
@@ -1142,11 +1142,11 @@
                 <a:spcPts val="0"/>
               </a:spcBef>
               <a:spcAft>
-                <a:spcPts val="158"/>
+                <a:spcPts val="142"/>
               </a:spcAft>
             </a:pPr>
             <a:r>
-              <a:rPr sz="950" b="1" lang="zh-TW" dirty="0">
+              <a:rPr sz="850" b="1" lang="zh-TW" dirty="0">
                 <a:solidFill>
                   <a:srgbClr val="000000"/>
                 </a:solidFill>
@@ -1157,7 +1157,7 @@
               <a:t>第一個理由：電腦只知道方向，不知道距離。</a:t>
             </a:r>
             <a:r>
-              <a:rPr sz="950" lang="zh-TW" dirty="0">
+              <a:rPr sz="850" lang="zh-TW" dirty="0">
                 <a:solidFill>
                   <a:srgbClr val="000000"/>
                 </a:solidFill>
@@ -1175,11 +1175,11 @@
                 <a:spcPts val="0"/>
               </a:spcBef>
               <a:spcAft>
-                <a:spcPts val="158"/>
+                <a:spcPts val="142"/>
               </a:spcAft>
             </a:pPr>
             <a:r>
-              <a:rPr sz="950" lang="zh-TW" dirty="0">
+              <a:rPr sz="850" lang="zh-TW" dirty="0">
                 <a:solidFill>
                   <a:srgbClr val="000000"/>
                 </a:solidFill>
@@ -1190,7 +1190,7 @@
               <a:t>想像大霧裡下山，看不到山谷在哪裡，只摸得到</a:t>
             </a:r>
             <a:r>
-              <a:rPr sz="950" b="1" lang="zh-TW" dirty="0">
+              <a:rPr sz="850" b="1" lang="zh-TW" dirty="0">
                 <a:solidFill>
                   <a:srgbClr val="000000"/>
                 </a:solidFill>
@@ -1201,7 +1201,7 @@
               <a:t>腳下是往哪邊斜</a:t>
             </a:r>
             <a:r>
-              <a:rPr sz="950" lang="zh-TW" dirty="0">
+              <a:rPr sz="850" lang="zh-TW" dirty="0">
                 <a:solidFill>
                   <a:srgbClr val="000000"/>
                 </a:solidFill>
@@ -1219,11 +1219,11 @@
                 <a:spcPts val="0"/>
               </a:spcBef>
               <a:spcAft>
-                <a:spcPts val="158"/>
+                <a:spcPts val="142"/>
               </a:spcAft>
             </a:pPr>
             <a:r>
-              <a:rPr sz="950" lang="zh-TW" dirty="0">
+              <a:rPr sz="850" lang="zh-TW" dirty="0">
                 <a:solidFill>
                   <a:srgbClr val="000000"/>
                 </a:solidFill>
@@ -1234,7 +1234,7 @@
               <a:t>電腦學東西就是這樣。對完答案，它算得出「門檻往小一點，錯會變少」，這是方向；可是它不知道要往小</a:t>
             </a:r>
             <a:r>
-              <a:rPr sz="950" b="1" lang="zh-TW" dirty="0">
+              <a:rPr sz="850" b="1" lang="zh-TW" dirty="0">
                 <a:solidFill>
                   <a:srgbClr val="000000"/>
                 </a:solidFill>
@@ -1245,7 +1245,7 @@
               <a:t>多少</a:t>
             </a:r>
             <a:r>
-              <a:rPr sz="950" lang="zh-TW" dirty="0">
+              <a:rPr sz="850" lang="zh-TW" dirty="0">
                 <a:solidFill>
                   <a:srgbClr val="000000"/>
                 </a:solidFill>
@@ -1256,7 +1256,7 @@
               <a:t>。每次走多大一步，是人事先設定的，這個數字叫</a:t>
             </a:r>
             <a:r>
-              <a:rPr sz="950" b="1" lang="zh-TW" dirty="0">
+              <a:rPr sz="850" b="1" lang="zh-TW" dirty="0">
                 <a:solidFill>
                   <a:srgbClr val="000000"/>
                 </a:solidFill>
@@ -1267,7 +1267,7 @@
               <a:t>學習率</a:t>
             </a:r>
             <a:r>
-              <a:rPr sz="950" lang="zh-TW" dirty="0">
+              <a:rPr sz="850" lang="zh-TW" dirty="0">
                 <a:solidFill>
                   <a:srgbClr val="000000"/>
                 </a:solidFill>
@@ -1285,19 +1285,63 @@
                 <a:spcPts val="0"/>
               </a:spcBef>
               <a:spcAft>
-                <a:spcPts val="158"/>
+                <a:spcPts val="142"/>
               </a:spcAft>
             </a:pPr>
             <a:r>
-              <a:rPr sz="950" lang="zh-TW" dirty="0">
-                <a:solidFill>
-                  <a:srgbClr val="000000"/>
-                </a:solidFill>
-                <a:latin typeface="Arial Unicode MS"/>
-                <a:ea typeface="Arial Unicode MS"/>
-                <a:cs typeface="Arial Unicode MS"/>
-              </a:rPr>
-              <a:t>看這張圖，是真的。我拿第 9 張那 627 個例子，讓電腦用這種「摸斜坡、走一步」的方式學門檻，從 2.6 出發，試三種步伐。橫軸是第幾次修改，縱軸是門檻。淺綠色那一條帶，是分得對的範圍：汽車最高到 1.02，大人最低 1.25，門檻放在中間就全部分對。
+              <a:rPr sz="850" lang="zh-TW" dirty="0">
+                <a:solidFill>
+                  <a:srgbClr val="000000"/>
+                </a:solidFill>
+                <a:latin typeface="Arial Unicode MS"/>
+                <a:ea typeface="Arial Unicode MS"/>
+                <a:cs typeface="Arial Unicode MS"/>
+              </a:rPr>
+              <a:t>看這個動畫，數字是真的。我拿第 9 張那 627 個例子算了一條</a:t>
+            </a:r>
+            <a:r>
+              <a:rPr sz="850" b="1" lang="zh-TW" dirty="0">
+                <a:solidFill>
+                  <a:srgbClr val="000000"/>
+                </a:solidFill>
+                <a:latin typeface="Arial Unicode MS"/>
+                <a:ea typeface="Arial Unicode MS"/>
+                <a:cs typeface="Arial Unicode MS"/>
+              </a:rPr>
+              <a:t>山谷曲線</a:t>
+            </a:r>
+            <a:r>
+              <a:rPr sz="850" lang="zh-TW" dirty="0">
+                <a:solidFill>
+                  <a:srgbClr val="000000"/>
+                </a:solidFill>
+                <a:latin typeface="Arial Unicode MS"/>
+                <a:ea typeface="Arial Unicode MS"/>
+                <a:cs typeface="Arial Unicode MS"/>
+              </a:rPr>
+              <a:t>：橫軸是門檻放在哪裡，縱軸是放在那裡會</a:t>
+            </a:r>
+            <a:r>
+              <a:rPr sz="850" b="1" lang="zh-TW" dirty="0">
+                <a:solidFill>
+                  <a:srgbClr val="000000"/>
+                </a:solidFill>
+                <a:latin typeface="Arial Unicode MS"/>
+                <a:ea typeface="Arial Unicode MS"/>
+                <a:cs typeface="Arial Unicode MS"/>
+              </a:rPr>
+              <a:t>錯多少</a:t>
+            </a:r>
+            <a:r>
+              <a:rPr sz="850" lang="zh-TW" dirty="0">
+                <a:solidFill>
+                  <a:srgbClr val="000000"/>
+                </a:solidFill>
+                <a:latin typeface="Arial Unicode MS"/>
+                <a:ea typeface="Arial Unicode MS"/>
+                <a:cs typeface="Arial Unicode MS"/>
+              </a:rPr>
+              <a:t>。谷底就是最好的門檻。中間那條淺綠色的帶，是分得對的範圍：汽車最高到 1.02，大人最低 1.25，門檻放在中間就全部分對。黃色的球是電腦目前的門檻，從 2.6 出發，每一次修改，就往下坡走「步伐乘以斜度」那麼遠。三格只差在步伐，也就是學習率。
 </a:t>
             </a:r>
           </a:p>
@@ -1307,30 +1351,30 @@
                 <a:spcPts val="0"/>
               </a:spcBef>
               <a:spcAft>
-                <a:spcPts val="158"/>
+                <a:spcPts val="142"/>
               </a:spcAft>
             </a:pPr>
             <a:r>
-              <a:rPr sz="950" b="1" lang="zh-TW" dirty="0">
-                <a:solidFill>
-                  <a:srgbClr val="000000"/>
-                </a:solidFill>
-                <a:latin typeface="Arial Unicode MS"/>
-                <a:ea typeface="Arial Unicode MS"/>
-                <a:cs typeface="Arial Unicode MS"/>
-              </a:rPr>
-              <a:t>綠線，步伐剛好</a:t>
-            </a:r>
-            <a:r>
-              <a:rPr sz="950" lang="zh-TW" dirty="0">
-                <a:solidFill>
-                  <a:srgbClr val="000000"/>
-                </a:solidFill>
-                <a:latin typeface="Arial Unicode MS"/>
-                <a:ea typeface="Arial Unicode MS"/>
-                <a:cs typeface="Arial Unicode MS"/>
-              </a:rPr>
-              <a:t>：改第一次就到 1.38，第三次就走進淺綠帶，之後停在 1.17，全部分對。
+              <a:rPr sz="850" b="1" lang="zh-TW" dirty="0">
+                <a:solidFill>
+                  <a:srgbClr val="000000"/>
+                </a:solidFill>
+                <a:latin typeface="Arial Unicode MS"/>
+                <a:ea typeface="Arial Unicode MS"/>
+                <a:cs typeface="Arial Unicode MS"/>
+              </a:rPr>
+              <a:t>中間，步伐剛好</a:t>
+            </a:r>
+            <a:r>
+              <a:rPr sz="850" lang="zh-TW" dirty="0">
+                <a:solidFill>
+                  <a:srgbClr val="000000"/>
+                </a:solidFill>
+                <a:latin typeface="Arial Unicode MS"/>
+                <a:ea typeface="Arial Unicode MS"/>
+                <a:cs typeface="Arial Unicode MS"/>
+              </a:rPr>
+              <a:t>：第一步就跳到 1.38，第三步落進淺綠帶，之後停在 1.17，全部分對。
 </a:t>
             </a:r>
           </a:p>
@@ -1340,30 +1384,30 @@
                 <a:spcPts val="0"/>
               </a:spcBef>
               <a:spcAft>
-                <a:spcPts val="158"/>
+                <a:spcPts val="142"/>
               </a:spcAft>
             </a:pPr>
             <a:r>
-              <a:rPr sz="950" b="1" lang="zh-TW" dirty="0">
-                <a:solidFill>
-                  <a:srgbClr val="000000"/>
-                </a:solidFill>
-                <a:latin typeface="Arial Unicode MS"/>
-                <a:ea typeface="Arial Unicode MS"/>
-                <a:cs typeface="Arial Unicode MS"/>
-              </a:rPr>
-              <a:t>灰線，步伐太小</a:t>
-            </a:r>
-            <a:r>
-              <a:rPr sz="950" lang="zh-TW" dirty="0">
-                <a:solidFill>
-                  <a:srgbClr val="000000"/>
-                </a:solidFill>
-                <a:latin typeface="Arial Unicode MS"/>
-                <a:ea typeface="Arial Unicode MS"/>
-                <a:cs typeface="Arial Unicode MS"/>
-              </a:rPr>
-              <a:t>：方向是對的，可是走得很慢，改了 30 次才到 1.32，還差一點才進淺綠帶。
+              <a:rPr sz="850" b="1" lang="zh-TW" dirty="0">
+                <a:solidFill>
+                  <a:srgbClr val="000000"/>
+                </a:solidFill>
+                <a:latin typeface="Arial Unicode MS"/>
+                <a:ea typeface="Arial Unicode MS"/>
+                <a:cs typeface="Arial Unicode MS"/>
+              </a:rPr>
+              <a:t>左邊，步伐太小</a:t>
+            </a:r>
+            <a:r>
+              <a:rPr sz="850" lang="zh-TW" dirty="0">
+                <a:solidFill>
+                  <a:srgbClr val="000000"/>
+                </a:solidFill>
+                <a:latin typeface="Arial Unicode MS"/>
+                <a:ea typeface="Arial Unicode MS"/>
+                <a:cs typeface="Arial Unicode MS"/>
+              </a:rPr>
+              <a:t>：方向是對的，球一小步一小步往下滾，改了 30 次才到 1.32，還差一點才進淺綠帶。
 </a:t>
             </a:r>
           </a:p>
@@ -1373,30 +1417,30 @@
                 <a:spcPts val="0"/>
               </a:spcBef>
               <a:spcAft>
-                <a:spcPts val="158"/>
+                <a:spcPts val="142"/>
               </a:spcAft>
             </a:pPr>
             <a:r>
-              <a:rPr sz="950" b="1" lang="zh-TW" dirty="0">
-                <a:solidFill>
-                  <a:srgbClr val="000000"/>
-                </a:solidFill>
-                <a:latin typeface="Arial Unicode MS"/>
-                <a:ea typeface="Arial Unicode MS"/>
-                <a:cs typeface="Arial Unicode MS"/>
-              </a:rPr>
-              <a:t>紅線，步伐太大</a:t>
-            </a:r>
-            <a:r>
-              <a:rPr sz="950" lang="zh-TW" dirty="0">
-                <a:solidFill>
-                  <a:srgbClr val="000000"/>
-                </a:solidFill>
-                <a:latin typeface="Arial Unicode MS"/>
-                <a:ea typeface="Arial Unicode MS"/>
-                <a:cs typeface="Arial Unicode MS"/>
-              </a:rPr>
-              <a:t>：第一次就從 2.6 跳到負 2.5，跳過頭了；下一次又跳回 2，再跳到負 1……一直在兩邊亂跳，改了 30 次只分對一半。
+              <a:rPr sz="850" b="1" lang="zh-TW" dirty="0">
+                <a:solidFill>
+                  <a:srgbClr val="000000"/>
+                </a:solidFill>
+                <a:latin typeface="Arial Unicode MS"/>
+                <a:ea typeface="Arial Unicode MS"/>
+                <a:cs typeface="Arial Unicode MS"/>
+              </a:rPr>
+              <a:t>右邊，步伐太大</a:t>
+            </a:r>
+            <a:r>
+              <a:rPr sz="850" lang="zh-TW" dirty="0">
+                <a:solidFill>
+                  <a:srgbClr val="000000"/>
+                </a:solidFill>
+                <a:latin typeface="Arial Unicode MS"/>
+                <a:ea typeface="Arial Unicode MS"/>
+                <a:cs typeface="Arial Unicode MS"/>
+              </a:rPr>
+              <a:t>：第一步就從 2.6 跳到負 2.5，跳過谷底，落到對面的山坡上；下一步又跳回 2，再跳到負 1……一直在山谷兩邊跳來跳去，改了 30 次只分對一半。
 </a:t>
             </a:r>
           </a:p>
@@ -1406,11 +1450,11 @@
                 <a:spcPts val="0"/>
               </a:spcBef>
               <a:spcAft>
-                <a:spcPts val="158"/>
+                <a:spcPts val="142"/>
               </a:spcAft>
             </a:pPr>
             <a:r>
-              <a:rPr sz="950" lang="zh-TW" dirty="0">
+              <a:rPr sz="850" lang="zh-TW" dirty="0">
                 <a:solidFill>
                   <a:srgbClr val="000000"/>
                 </a:solidFill>
@@ -1428,11 +1472,11 @@
                 <a:spcPts val="0"/>
               </a:spcBef>
               <a:spcAft>
-                <a:spcPts val="158"/>
+                <a:spcPts val="142"/>
               </a:spcAft>
             </a:pPr>
             <a:r>
-              <a:rPr sz="950" lang="zh-TW" dirty="0">
+              <a:rPr sz="850" lang="zh-TW" dirty="0">
                 <a:solidFill>
                   <a:srgbClr val="000000"/>
                 </a:solidFill>
@@ -1450,11 +1494,11 @@
                 <a:spcPts val="0"/>
               </a:spcBef>
               <a:spcAft>
-                <a:spcPts val="158"/>
+                <a:spcPts val="142"/>
               </a:spcAft>
             </a:pPr>
             <a:r>
-              <a:rPr sz="950" b="1" lang="zh-TW" dirty="0">
+              <a:rPr sz="850" b="1" lang="zh-TW" dirty="0">
                 <a:solidFill>
                   <a:srgbClr val="000000"/>
                 </a:solidFill>
@@ -1465,7 +1509,7 @@
               <a:t>第二個理由：每次只看到一部分照片。</a:t>
             </a:r>
             <a:r>
-              <a:rPr sz="950" lang="zh-TW" dirty="0">
+              <a:rPr sz="850" lang="zh-TW" dirty="0">
                 <a:solidFill>
                   <a:srgbClr val="000000"/>
                 </a:solidFill>
@@ -1483,11 +1527,11 @@
                 <a:spcPts val="0"/>
               </a:spcBef>
               <a:spcAft>
-                <a:spcPts val="158"/>
+                <a:spcPts val="142"/>
               </a:spcAft>
             </a:pPr>
             <a:r>
-              <a:rPr sz="950" lang="zh-TW" dirty="0">
+              <a:rPr sz="850" lang="zh-TW" dirty="0">
                 <a:solidFill>
                   <a:srgbClr val="000000"/>
                 </a:solidFill>
@@ -1505,19 +1549,52 @@
                 <a:spcPts val="0"/>
               </a:spcBef>
               <a:spcAft>
-                <a:spcPts val="158"/>
+                <a:spcPts val="142"/>
               </a:spcAft>
             </a:pPr>
             <a:r>
-              <a:rPr sz="950" lang="zh-TW" dirty="0">
-                <a:solidFill>
-                  <a:srgbClr val="000000"/>
-                </a:solidFill>
-                <a:latin typeface="Arial Unicode MS"/>
-                <a:ea typeface="Arial Unicode MS"/>
-                <a:cs typeface="Arial Unicode MS"/>
-              </a:rPr>
-              <a:t>YOLOX 有九百萬個小旋鈕，每個都要這樣一點一點調，所以訓練要跑很多輪、要很強的電腦。第十週訓練模型的時候，各位會親眼看到學習率這個設定。</a:t>
+              <a:rPr sz="850" lang="zh-TW" dirty="0">
+                <a:solidFill>
+                  <a:srgbClr val="000000"/>
+                </a:solidFill>
+                <a:latin typeface="Arial Unicode MS"/>
+                <a:ea typeface="Arial Unicode MS"/>
+                <a:cs typeface="Arial Unicode MS"/>
+              </a:rPr>
+              <a:t>YOLOX 有九百萬個小旋鈕，每個都要這樣一點一點調，所以訓練要跑很多輪、要很強的電腦。第十週訓練模型的時候，各位會親眼看到學習率這個設定。
+</a:t>
+            </a:r>
+          </a:p>
+          <a:p>
+            <a:pPr algn="l">
+              <a:spcBef>
+                <a:spcPts val="0"/>
+              </a:spcBef>
+              <a:spcAft>
+                <a:spcPts val="142"/>
+              </a:spcAft>
+            </a:pPr>
+            <a:r>
+              <a:rPr sz="850" b="1" lang="zh-TW" dirty="0">
+                <a:solidFill>
+                  <a:srgbClr val="000000"/>
+                </a:solidFill>
+                <a:latin typeface="Arial Unicode MS"/>
+                <a:ea typeface="Arial Unicode MS"/>
+                <a:cs typeface="Arial Unicode MS"/>
+              </a:rPr>
+              <a:t>影片（3Blue1Brown，英文，可開自動翻譯字幕）：從 5:12 播到 6:54。</a:t>
+            </a:r>
+            <a:r>
+              <a:rPr sz="850" lang="zh-TW" dirty="0">
+                <a:solidFill>
+                  <a:srgbClr val="000000"/>
+                </a:solidFill>
+                <a:latin typeface="Arial Unicode MS"/>
+                <a:ea typeface="Arial Unicode MS"/>
+                <a:cs typeface="Arial Unicode MS"/>
+              </a:rPr>
+              <a:t>他先把問題縮成「只有一個輸入的函數，怎麼找到最低點」，畫一條有好幾個谷的曲線；5:51 說：看你站的地方斜率是正還是負，往下坡那邊走一步；6:19 用的就是「球滾下山」的比喻；6:23 提醒，從不同的地方出發，可能停在不同的谷；6:42 講「步伐跟斜率成正比，快到谷底時斜率變小，步伐也變小，就比較不會跳過頭」。我們的動畫就是這個做法，只是谷只有一個。</a:t>
             </a:r>
           </a:p>
         </p:txBody>
@@ -2088,11 +2165,11 @@
                 <a:spcPts val="0"/>
               </a:spcBef>
               <a:spcAft>
-                <a:spcPts val="233"/>
+                <a:spcPts val="208"/>
               </a:spcAft>
             </a:pPr>
             <a:r>
-              <a:rPr sz="1400" b="1" lang="zh-TW" dirty="0">
+              <a:rPr sz="1250" b="1" lang="zh-TW" dirty="0">
                 <a:solidFill>
                   <a:srgbClr val="000000"/>
                 </a:solidFill>
@@ -2103,7 +2180,7 @@
               <a:t>這一張的目的：</a:t>
             </a:r>
             <a:r>
-              <a:rPr sz="1400" lang="zh-TW" dirty="0">
+              <a:rPr sz="1250" lang="zh-TW" dirty="0">
                 <a:solidFill>
                   <a:srgbClr val="000000"/>
                 </a:solidFill>
@@ -2121,11 +2198,11 @@
                 <a:spcPts val="0"/>
               </a:spcBef>
               <a:spcAft>
-                <a:spcPts val="233"/>
+                <a:spcPts val="208"/>
               </a:spcAft>
             </a:pPr>
             <a:r>
-              <a:rPr sz="1400" lang="zh-TW" dirty="0">
+              <a:rPr sz="1250" lang="zh-TW" dirty="0">
                 <a:solidFill>
                   <a:srgbClr val="000000"/>
                 </a:solidFill>
@@ -2136,7 +2213,7 @@
               <a:t>上一張是第一層的「濾鏡」本身，這一張是把斑馬線那張照片送進去，</a:t>
             </a:r>
             <a:r>
-              <a:rPr sz="1400" b="1" lang="zh-TW" dirty="0">
+              <a:rPr sz="1250" b="1" lang="zh-TW" dirty="0">
                 <a:solidFill>
                   <a:srgbClr val="000000"/>
                 </a:solidFill>
@@ -2147,7 +2224,7 @@
               <a:t>每一層真的算出來的結果</a:t>
             </a:r>
             <a:r>
-              <a:rPr sz="1400" lang="zh-TW" dirty="0">
+              <a:rPr sz="1250" lang="zh-TW" dirty="0">
                 <a:solidFill>
                   <a:srgbClr val="000000"/>
                 </a:solidFill>
@@ -2165,11 +2242,11 @@
                 <a:spcPts val="0"/>
               </a:spcBef>
               <a:spcAft>
-                <a:spcPts val="233"/>
+                <a:spcPts val="208"/>
               </a:spcAft>
             </a:pPr>
             <a:r>
-              <a:rPr sz="1400" b="1" lang="zh-TW" dirty="0">
+              <a:rPr sz="1250" b="1" lang="zh-TW" dirty="0">
                 <a:solidFill>
                   <a:srgbClr val="000000"/>
                 </a:solidFill>
@@ -2180,7 +2257,7 @@
               <a:t>最左邊</a:t>
             </a:r>
             <a:r>
-              <a:rPr sz="1400" lang="zh-TW" dirty="0">
+              <a:rPr sz="1250" lang="zh-TW" dirty="0">
                 <a:solidFill>
                   <a:srgbClr val="000000"/>
                 </a:solidFill>
@@ -2198,11 +2275,11 @@
                 <a:spcPts val="0"/>
               </a:spcBef>
               <a:spcAft>
-                <a:spcPts val="233"/>
+                <a:spcPts val="208"/>
               </a:spcAft>
             </a:pPr>
             <a:r>
-              <a:rPr sz="1400" b="1" lang="zh-TW" dirty="0">
+              <a:rPr sz="1250" b="1" lang="zh-TW" dirty="0">
                 <a:solidFill>
                   <a:srgbClr val="000000"/>
                 </a:solidFill>
@@ -2213,7 +2290,7 @@
               <a:t>第 1 層</a:t>
             </a:r>
             <a:r>
-              <a:rPr sz="1400" lang="zh-TW" dirty="0">
+              <a:rPr sz="1250" lang="zh-TW" dirty="0">
                 <a:solidFill>
                   <a:srgbClr val="000000"/>
                 </a:solidFill>
@@ -2231,11 +2308,11 @@
                 <a:spcPts val="0"/>
               </a:spcBef>
               <a:spcAft>
-                <a:spcPts val="233"/>
+                <a:spcPts val="208"/>
               </a:spcAft>
             </a:pPr>
             <a:r>
-              <a:rPr sz="1400" b="1" lang="zh-TW" dirty="0">
+              <a:rPr sz="1250" b="1" lang="zh-TW" dirty="0">
                 <a:solidFill>
                   <a:srgbClr val="000000"/>
                 </a:solidFill>
@@ -2246,7 +2323,7 @@
               <a:t>第 2 段</a:t>
             </a:r>
             <a:r>
-              <a:rPr sz="1400" lang="zh-TW" dirty="0">
+              <a:rPr sz="1250" lang="zh-TW" dirty="0">
                 <a:solidFill>
                   <a:srgbClr val="000000"/>
                 </a:solidFill>
@@ -2264,11 +2341,11 @@
                 <a:spcPts val="0"/>
               </a:spcBef>
               <a:spcAft>
-                <a:spcPts val="233"/>
+                <a:spcPts val="208"/>
               </a:spcAft>
             </a:pPr>
             <a:r>
-              <a:rPr sz="1400" b="1" lang="zh-TW" dirty="0">
+              <a:rPr sz="1250" b="1" lang="zh-TW" dirty="0">
                 <a:solidFill>
                   <a:srgbClr val="000000"/>
                 </a:solidFill>
@@ -2279,7 +2356,7 @@
               <a:t>後段</a:t>
             </a:r>
             <a:r>
-              <a:rPr sz="1400" lang="zh-TW" dirty="0">
+              <a:rPr sz="1250" lang="zh-TW" dirty="0">
                 <a:solidFill>
                   <a:srgbClr val="000000"/>
                 </a:solidFill>
@@ -2290,7 +2367,7 @@
               <a:t>：再往後，畫面變得很粗，一格代表照片上的一大塊。可是請看，</a:t>
             </a:r>
             <a:r>
-              <a:rPr sz="1400" b="1" lang="zh-TW" dirty="0">
+              <a:rPr sz="1250" b="1" lang="zh-TW" dirty="0">
                 <a:solidFill>
                   <a:srgbClr val="000000"/>
                 </a:solidFill>
@@ -2301,7 +2378,7 @@
               <a:t>五個行人的位置整個亮起來</a:t>
             </a:r>
             <a:r>
-              <a:rPr sz="1400" lang="zh-TW" dirty="0">
+              <a:rPr sz="1250" lang="zh-TW" dirty="0">
                 <a:solidFill>
                   <a:srgbClr val="000000"/>
                 </a:solidFill>
@@ -2319,11 +2396,11 @@
                 <a:spcPts val="0"/>
               </a:spcBef>
               <a:spcAft>
-                <a:spcPts val="233"/>
+                <a:spcPts val="208"/>
               </a:spcAft>
             </a:pPr>
             <a:r>
-              <a:rPr sz="1400" lang="zh-TW" dirty="0">
+              <a:rPr sz="1250" lang="zh-TW" dirty="0">
                 <a:solidFill>
                   <a:srgbClr val="000000"/>
                 </a:solidFill>
@@ -2334,7 +2411,7 @@
               <a:t>所以「一層一層」不是比喻，是真的：</a:t>
             </a:r>
             <a:r>
-              <a:rPr sz="1400" b="1" lang="zh-TW" dirty="0">
+              <a:rPr sz="1250" b="1" lang="zh-TW" dirty="0">
                 <a:solidFill>
                   <a:srgbClr val="000000"/>
                 </a:solidFill>
@@ -2345,7 +2422,7 @@
               <a:t>前面的層看簡單的東西，後面的層把前面的結果組起來，看愈來愈完整的東西。</a:t>
             </a:r>
             <a:r>
-              <a:rPr sz="1400" lang="zh-TW" dirty="0">
+              <a:rPr sz="1250" lang="zh-TW" dirty="0">
                 <a:solidFill>
                   <a:srgbClr val="000000"/>
                 </a:solidFill>
@@ -2363,19 +2440,52 @@
                 <a:spcPts val="0"/>
               </a:spcBef>
               <a:spcAft>
-                <a:spcPts val="233"/>
+                <a:spcPts val="208"/>
               </a:spcAft>
             </a:pPr>
             <a:r>
-              <a:rPr sz="1400" lang="zh-TW" dirty="0">
-                <a:solidFill>
-                  <a:srgbClr val="000000"/>
-                </a:solidFill>
-                <a:latin typeface="Arial Unicode MS"/>
-                <a:ea typeface="Arial Unicode MS"/>
-                <a:cs typeface="Arial Unicode MS"/>
-              </a:rPr>
-              <a:t>要說明一下怎麼挑的：每一層有幾十到一百多個通道，每個通道各看一種東西，不可能全部放上來。第 1 層我挑變化最大的一個；後面兩個，我挑「在行人身上比背景亮最多」的那一個，所以後段那張是刻意挑出來看人的通道，其他通道有的看車、有的看路。</a:t>
+              <a:rPr sz="1250" lang="zh-TW" dirty="0">
+                <a:solidFill>
+                  <a:srgbClr val="000000"/>
+                </a:solidFill>
+                <a:latin typeface="Arial Unicode MS"/>
+                <a:ea typeface="Arial Unicode MS"/>
+                <a:cs typeface="Arial Unicode MS"/>
+              </a:rPr>
+              <a:t>要說明一下怎麼挑的：每一層有幾十到一百多個通道，每個通道各看一種東西，不可能全部放上來。第 1 層我挑變化最大的一個；後面兩個，我挑「在行人身上比背景亮最多」的那一個，所以後段那張是刻意挑出來看人的通道，其他通道有的看車、有的看路。
+</a:t>
+            </a:r>
+          </a:p>
+          <a:p>
+            <a:pPr algn="l">
+              <a:spcBef>
+                <a:spcPts val="0"/>
+              </a:spcBef>
+              <a:spcAft>
+                <a:spcPts val="208"/>
+              </a:spcAft>
+            </a:pPr>
+            <a:r>
+              <a:rPr sz="1250" b="1" lang="zh-TW" dirty="0">
+                <a:solidFill>
+                  <a:srgbClr val="000000"/>
+                </a:solidFill>
+                <a:latin typeface="Arial Unicode MS"/>
+                <a:ea typeface="Arial Unicode MS"/>
+                <a:cs typeface="Arial Unicode MS"/>
+              </a:rPr>
+              <a:t>影片（3Blue1Brown 第一集，英文）：從 5:32 播到 8:39。</a:t>
+            </a:r>
+            <a:r>
+              <a:rPr sz="1250" lang="zh-TW" dirty="0">
+                <a:solidFill>
+                  <a:srgbClr val="000000"/>
+                </a:solidFill>
+                <a:latin typeface="Arial Unicode MS"/>
+                <a:ea typeface="Arial Unicode MS"/>
+                <a:cs typeface="Arial Unicode MS"/>
+              </a:rPr>
+              <a:t>他用手寫數字當例子講「我們希望中間的層在做什麼」：9 是上面一個圈加右邊一條線（5:49）；圈又可以拆成好幾小段邊（6:53）；所以希望第二層找小段的邊、第三層把邊組成圈和直線、最後一層組成數字（7:15）。要誠實補充一句：他在第二集 14:01 說，那個很簡單的網路實際學出來的並不像邊，看起來幾乎是亂的；而我們用的 YOLOX 是專門看圖的「卷積網路」，第 12 張那 32 個濾鏡就真的學出了顏色和邊。</a:t>
             </a:r>
           </a:p>
         </p:txBody>
@@ -2484,11 +2594,11 @@
                 <a:spcPts val="0"/>
               </a:spcBef>
               <a:spcAft>
-                <a:spcPts val="250"/>
+                <a:spcPts val="217"/>
               </a:spcAft>
             </a:pPr>
             <a:r>
-              <a:rPr sz="1500" b="1" lang="zh-TW" dirty="0">
+              <a:rPr sz="1300" b="1" lang="zh-TW" dirty="0">
                 <a:solidFill>
                   <a:srgbClr val="000000"/>
                 </a:solidFill>
@@ -2499,7 +2609,7 @@
               <a:t>這一張的目的：</a:t>
             </a:r>
             <a:r>
-              <a:rPr sz="1500" lang="zh-TW" dirty="0">
+              <a:rPr sz="1300" lang="zh-TW" dirty="0">
                 <a:solidFill>
                   <a:srgbClr val="000000"/>
                 </a:solidFill>
@@ -2517,11 +2627,11 @@
                 <a:spcPts val="0"/>
               </a:spcBef>
               <a:spcAft>
-                <a:spcPts val="250"/>
+                <a:spcPts val="217"/>
               </a:spcAft>
             </a:pPr>
             <a:r>
-              <a:rPr sz="1500" lang="zh-TW" dirty="0">
+              <a:rPr sz="1300" lang="zh-TW" dirty="0">
                 <a:solidFill>
                   <a:srgbClr val="000000"/>
                 </a:solidFill>
@@ -2532,7 +2642,7 @@
               <a:t>上一張最後一層之後，再接上偵測的那一層，就得到這張：YOLOX 在斑馬線那張照片上真的跑出來的結果。這種工作叫</a:t>
             </a:r>
             <a:r>
-              <a:rPr sz="1500" b="1" lang="zh-TW" dirty="0">
+              <a:rPr sz="1300" b="1" lang="zh-TW" dirty="0">
                 <a:solidFill>
                   <a:srgbClr val="000000"/>
                 </a:solidFill>
@@ -2543,7 +2653,7 @@
               <a:t>物件偵測</a:t>
             </a:r>
             <a:r>
-              <a:rPr sz="1500" lang="zh-TW" dirty="0">
+              <a:rPr sz="1300" lang="zh-TW" dirty="0">
                 <a:solidFill>
                   <a:srgbClr val="000000"/>
                 </a:solidFill>
@@ -2561,11 +2671,11 @@
                 <a:spcPts val="0"/>
               </a:spcBef>
               <a:spcAft>
-                <a:spcPts val="250"/>
+                <a:spcPts val="217"/>
               </a:spcAft>
             </a:pPr>
             <a:r>
-              <a:rPr sz="1500" b="1" lang="zh-TW" dirty="0">
+              <a:rPr sz="1300" b="1" lang="zh-TW" dirty="0">
                 <a:solidFill>
                   <a:srgbClr val="000000"/>
                 </a:solidFill>
@@ -2576,7 +2686,7 @@
               <a:t>第一，框。</a:t>
             </a:r>
             <a:r>
-              <a:rPr sz="1500" lang="zh-TW" dirty="0">
+              <a:rPr sz="1300" lang="zh-TW" dirty="0">
                 <a:solidFill>
                   <a:srgbClr val="000000"/>
                 </a:solidFill>
@@ -2587,7 +2697,7 @@
               <a:t>一個長方形，告訴你東西在照片的哪裡。注意，這是照片上的框，只知道在照片的左邊還是右邊、上面還是下面，</a:t>
             </a:r>
             <a:r>
-              <a:rPr sz="1500" b="1" lang="zh-TW" dirty="0">
+              <a:rPr sz="1300" b="1" lang="zh-TW" dirty="0">
                 <a:solidFill>
                   <a:srgbClr val="000000"/>
                 </a:solidFill>
@@ -2598,7 +2708,7 @@
               <a:t>不知道它離車子幾公尺</a:t>
             </a:r>
             <a:r>
-              <a:rPr sz="1500" lang="zh-TW" dirty="0">
+              <a:rPr sz="1300" lang="zh-TW" dirty="0">
                 <a:solidFill>
                   <a:srgbClr val="000000"/>
                 </a:solidFill>
@@ -2616,11 +2726,11 @@
                 <a:spcPts val="0"/>
               </a:spcBef>
               <a:spcAft>
-                <a:spcPts val="250"/>
+                <a:spcPts val="217"/>
               </a:spcAft>
             </a:pPr>
             <a:r>
-              <a:rPr sz="1500" b="1" lang="zh-TW" dirty="0">
+              <a:rPr sz="1300" b="1" lang="zh-TW" dirty="0">
                 <a:solidFill>
                   <a:srgbClr val="000000"/>
                 </a:solidFill>
@@ -2631,7 +2741,7 @@
               <a:t>第二，類別。</a:t>
             </a:r>
             <a:r>
-              <a:rPr sz="1500" lang="zh-TW" dirty="0">
+              <a:rPr sz="1300" lang="zh-TW" dirty="0">
                 <a:solidFill>
                   <a:srgbClr val="000000"/>
                 </a:solidFill>
@@ -2649,11 +2759,11 @@
                 <a:spcPts val="0"/>
               </a:spcBef>
               <a:spcAft>
-                <a:spcPts val="250"/>
+                <a:spcPts val="217"/>
               </a:spcAft>
             </a:pPr>
             <a:r>
-              <a:rPr sz="1500" b="1" lang="zh-TW" dirty="0">
+              <a:rPr sz="1300" b="1" lang="zh-TW" dirty="0">
                 <a:solidFill>
                   <a:srgbClr val="000000"/>
                 </a:solidFill>
@@ -2664,7 +2774,7 @@
               <a:t>第三，分數。</a:t>
             </a:r>
             <a:r>
-              <a:rPr sz="1500" lang="zh-TW" dirty="0">
+              <a:rPr sz="1300" lang="zh-TW" dirty="0">
                 <a:solidFill>
                   <a:srgbClr val="000000"/>
                 </a:solidFill>
@@ -2682,11 +2792,11 @@
                 <a:spcPts val="0"/>
               </a:spcBef>
               <a:spcAft>
-                <a:spcPts val="250"/>
+                <a:spcPts val="217"/>
               </a:spcAft>
             </a:pPr>
             <a:r>
-              <a:rPr sz="1500" lang="zh-TW" dirty="0">
+              <a:rPr sz="1300" lang="zh-TW" dirty="0">
                 <a:solidFill>
                   <a:srgbClr val="000000"/>
                 </a:solidFill>
@@ -2704,11 +2814,11 @@
                 <a:spcPts val="0"/>
               </a:spcBef>
               <a:spcAft>
-                <a:spcPts val="250"/>
+                <a:spcPts val="217"/>
               </a:spcAft>
             </a:pPr>
             <a:r>
-              <a:rPr sz="1500" lang="zh-TW" dirty="0">
+              <a:rPr sz="1300" lang="zh-TW" dirty="0">
                 <a:solidFill>
                   <a:srgbClr val="000000"/>
                 </a:solidFill>
@@ -2719,7 +2829,7 @@
               <a:t>有一個常見的誤會：</a:t>
             </a:r>
             <a:r>
-              <a:rPr sz="1500" b="1" lang="zh-TW" dirty="0">
+              <a:rPr sz="1300" b="1" lang="zh-TW" dirty="0">
                 <a:solidFill>
                   <a:srgbClr val="000000"/>
                 </a:solidFill>
@@ -2730,7 +2840,7 @@
               <a:t>0.91 不等於「百分之九十一一定對」。</a:t>
             </a:r>
             <a:r>
-              <a:rPr sz="1500" lang="zh-TW" dirty="0">
+              <a:rPr sz="1300" lang="zh-TW" dirty="0">
                 <a:solidFill>
                   <a:srgbClr val="000000"/>
                 </a:solidFill>
@@ -2741,7 +2851,7 @@
               <a:t>它比較像考試的時候，答案旁邊自己寫「我有幾分把握」，有人寫九分的也會錯。這個分數真正的用途，是拿來排序、拿來切一刀：低於某個分數的框就不要了。這一刀叫</a:t>
             </a:r>
             <a:r>
-              <a:rPr sz="1500" b="1" lang="zh-TW" dirty="0">
+              <a:rPr sz="1300" b="1" lang="zh-TW" dirty="0">
                 <a:solidFill>
                   <a:srgbClr val="000000"/>
                 </a:solidFill>
@@ -2752,15 +2862,48 @@
               <a:t>門檻</a:t>
             </a:r>
             <a:r>
-              <a:rPr sz="1500" lang="zh-TW" dirty="0">
-                <a:solidFill>
-                  <a:srgbClr val="000000"/>
-                </a:solidFill>
-                <a:latin typeface="Arial Unicode MS"/>
-                <a:ea typeface="Arial Unicode MS"/>
-                <a:cs typeface="Arial Unicode MS"/>
-              </a:rPr>
-              <a:t>，下下張會看到，門檻切在哪裡，影響非常大。</a:t>
+              <a:rPr sz="1300" lang="zh-TW" dirty="0">
+                <a:solidFill>
+                  <a:srgbClr val="000000"/>
+                </a:solidFill>
+                <a:latin typeface="Arial Unicode MS"/>
+                <a:ea typeface="Arial Unicode MS"/>
+                <a:cs typeface="Arial Unicode MS"/>
+              </a:rPr>
+              <a:t>，下下張會看到，門檻切在哪裡，影響非常大。
+</a:t>
+            </a:r>
+          </a:p>
+          <a:p>
+            <a:pPr algn="l">
+              <a:spcBef>
+                <a:spcPts val="0"/>
+              </a:spcBef>
+              <a:spcAft>
+                <a:spcPts val="217"/>
+              </a:spcAft>
+            </a:pPr>
+            <a:r>
+              <a:rPr sz="1300" b="1" lang="zh-TW" dirty="0">
+                <a:solidFill>
+                  <a:srgbClr val="000000"/>
+                </a:solidFill>
+                <a:latin typeface="Arial Unicode MS"/>
+                <a:ea typeface="Arial Unicode MS"/>
+                <a:cs typeface="Arial Unicode MS"/>
+              </a:rPr>
+              <a:t>影片（TED，YOLO 的作者 Joseph Redmon，英文，可開字幕）：從 0:12 播到 4:30。</a:t>
+            </a:r>
+            <a:r>
+              <a:rPr sz="1300" lang="zh-TW" dirty="0">
+                <a:solidFill>
+                  <a:srgbClr val="000000"/>
+                </a:solidFill>
+                <a:latin typeface="Arial Unicode MS"/>
+                <a:ea typeface="Arial Unicode MS"/>
+                <a:cs typeface="Arial Unicode MS"/>
+              </a:rPr>
+              <a:t>他先用分類：電腦說得出照片裡是哪一種狗（1:02）；可是一張照片有貓有狗，只給一個答案就不夠了（1:13）；所以要用物件偵測，把每個東西框起來（1:48），他說自駕車、機器人要的就是這種資訊（2:09）。2:22 到 3:36 示範速度：一張要 2 秒的偵測器跟不上，每秒 5 張也不夠，他筆電上即時跑的版本可以一路跟著他移動。4:11 到 4:30 解釋名字：整張照片只看一次（You Only Look Once），所以叫 YOLO。我們用的 YOLOX，就是後來從 YOLO 這一家延伸出來的版本。</a:t>
             </a:r>
           </a:p>
         </p:txBody>
@@ -2869,11 +3012,11 @@
                 <a:spcPts val="0"/>
               </a:spcBef>
               <a:spcAft>
-                <a:spcPts val="267"/>
+                <a:spcPts val="225"/>
               </a:spcAft>
             </a:pPr>
             <a:r>
-              <a:rPr sz="1600" b="1" lang="zh-TW" dirty="0">
+              <a:rPr sz="1350" b="1" lang="zh-TW" dirty="0">
                 <a:solidFill>
                   <a:srgbClr val="000000"/>
                 </a:solidFill>
@@ -2884,7 +3027,7 @@
               <a:t>這一張的目的：</a:t>
             </a:r>
             <a:r>
-              <a:rPr sz="1600" lang="zh-TW" dirty="0">
+              <a:rPr sz="1350" lang="zh-TW" dirty="0">
                 <a:solidFill>
                   <a:srgbClr val="000000"/>
                 </a:solidFill>
@@ -2902,11 +3045,11 @@
                 <a:spcPts val="0"/>
               </a:spcBef>
               <a:spcAft>
-                <a:spcPts val="267"/>
+                <a:spcPts val="225"/>
               </a:spcAft>
             </a:pPr>
             <a:r>
-              <a:rPr sz="1600" lang="zh-TW" dirty="0">
+              <a:rPr sz="1350" lang="zh-TW" dirty="0">
                 <a:solidFill>
                   <a:srgbClr val="000000"/>
                 </a:solidFill>
@@ -2924,11 +3067,11 @@
                 <a:spcPts val="0"/>
               </a:spcBef>
               <a:spcAft>
-                <a:spcPts val="267"/>
+                <a:spcPts val="225"/>
               </a:spcAft>
             </a:pPr>
             <a:r>
-              <a:rPr sz="1600" b="1" lang="zh-TW" dirty="0">
+              <a:rPr sz="1350" b="1" lang="zh-TW" dirty="0">
                 <a:solidFill>
                   <a:srgbClr val="000000"/>
                 </a:solidFill>
@@ -2939,7 +3082,7 @@
               <a:t>分類</a:t>
             </a:r>
             <a:r>
-              <a:rPr sz="1600" lang="zh-TW" dirty="0">
+              <a:rPr sz="1350" lang="zh-TW" dirty="0">
                 <a:solidFill>
                   <a:srgbClr val="000000"/>
                 </a:solidFill>
@@ -2950,7 +3093,7 @@
               <a:t>：問「這張照片裡</a:t>
             </a:r>
             <a:r>
-              <a:rPr sz="1600" b="1" lang="zh-TW" dirty="0">
+              <a:rPr sz="1350" b="1" lang="zh-TW" dirty="0">
                 <a:solidFill>
                   <a:srgbClr val="000000"/>
                 </a:solidFill>
@@ -2961,7 +3104,7 @@
               <a:t>有沒有</a:t>
             </a:r>
             <a:r>
-              <a:rPr sz="1600" lang="zh-TW" dirty="0">
+              <a:rPr sz="1350" lang="zh-TW" dirty="0">
                 <a:solidFill>
                   <a:srgbClr val="000000"/>
                 </a:solidFill>
@@ -2979,11 +3122,11 @@
                 <a:spcPts val="0"/>
               </a:spcBef>
               <a:spcAft>
-                <a:spcPts val="267"/>
+                <a:spcPts val="225"/>
               </a:spcAft>
             </a:pPr>
             <a:r>
-              <a:rPr sz="1600" b="1" lang="zh-TW" dirty="0">
+              <a:rPr sz="1350" b="1" lang="zh-TW" dirty="0">
                 <a:solidFill>
                   <a:srgbClr val="000000"/>
                 </a:solidFill>
@@ -2994,7 +3137,7 @@
               <a:t>物件偵測</a:t>
             </a:r>
             <a:r>
-              <a:rPr sz="1600" lang="zh-TW" dirty="0">
+              <a:rPr sz="1350" lang="zh-TW" dirty="0">
                 <a:solidFill>
                   <a:srgbClr val="000000"/>
                 </a:solidFill>
@@ -3005,7 +3148,7 @@
               <a:t>：問「人</a:t>
             </a:r>
             <a:r>
-              <a:rPr sz="1600" b="1" lang="zh-TW" dirty="0">
+              <a:rPr sz="1350" b="1" lang="zh-TW" dirty="0">
                 <a:solidFill>
                   <a:srgbClr val="000000"/>
                 </a:solidFill>
@@ -3016,7 +3159,7 @@
               <a:t>在哪裡</a:t>
             </a:r>
             <a:r>
-              <a:rPr sz="1600" lang="zh-TW" dirty="0">
+              <a:rPr sz="1350" lang="zh-TW" dirty="0">
                 <a:solidFill>
                   <a:srgbClr val="000000"/>
                 </a:solidFill>
@@ -3034,11 +3177,11 @@
                 <a:spcPts val="0"/>
               </a:spcBef>
               <a:spcAft>
-                <a:spcPts val="267"/>
+                <a:spcPts val="225"/>
               </a:spcAft>
             </a:pPr>
             <a:r>
-              <a:rPr sz="1600" b="1" lang="zh-TW" dirty="0">
+              <a:rPr sz="1350" b="1" lang="zh-TW" dirty="0">
                 <a:solidFill>
                   <a:srgbClr val="000000"/>
                 </a:solidFill>
@@ -3049,7 +3192,7 @@
               <a:t>分割</a:t>
             </a:r>
             <a:r>
-              <a:rPr sz="1600" lang="zh-TW" dirty="0">
+              <a:rPr sz="1350" lang="zh-TW" dirty="0">
                 <a:solidFill>
                   <a:srgbClr val="000000"/>
                 </a:solidFill>
@@ -3060,7 +3203,7 @@
               <a:t>：問得最細，「</a:t>
             </a:r>
             <a:r>
-              <a:rPr sz="1600" b="1" lang="zh-TW" dirty="0">
+              <a:rPr sz="1350" b="1" lang="zh-TW" dirty="0">
                 <a:solidFill>
                   <a:srgbClr val="000000"/>
                 </a:solidFill>
@@ -3071,7 +3214,7 @@
               <a:t>每一個像素</a:t>
             </a:r>
             <a:r>
-              <a:rPr sz="1600" lang="zh-TW" dirty="0">
+              <a:rPr sz="1350" lang="zh-TW" dirty="0">
                 <a:solidFill>
                   <a:srgbClr val="000000"/>
                 </a:solidFill>
@@ -3089,11 +3232,11 @@
                 <a:spcPts val="0"/>
               </a:spcBef>
               <a:spcAft>
-                <a:spcPts val="267"/>
+                <a:spcPts val="225"/>
               </a:spcAft>
             </a:pPr>
             <a:r>
-              <a:rPr sz="1600" lang="zh-TW" dirty="0">
+              <a:rPr sz="1350" lang="zh-TW" dirty="0">
                 <a:solidFill>
                   <a:srgbClr val="000000"/>
                 </a:solidFill>
@@ -3111,19 +3254,52 @@
                 <a:spcPts val="0"/>
               </a:spcBef>
               <a:spcAft>
-                <a:spcPts val="267"/>
+                <a:spcPts val="225"/>
               </a:spcAft>
             </a:pPr>
             <a:r>
-              <a:rPr sz="1600" lang="zh-TW" dirty="0">
-                <a:solidFill>
-                  <a:srgbClr val="000000"/>
-                </a:solidFill>
-                <a:latin typeface="Arial Unicode MS"/>
-                <a:ea typeface="Arial Unicode MS"/>
-                <a:cs typeface="Arial Unicode MS"/>
-              </a:rPr>
-              <a:t>今天專講中間這種，物件偵測，因為它是避免撞到東西最主要的那一塊。第二節各位標的，也是偵測用的框。</a:t>
+              <a:rPr sz="1350" lang="zh-TW" dirty="0">
+                <a:solidFill>
+                  <a:srgbClr val="000000"/>
+                </a:solidFill>
+                <a:latin typeface="Arial Unicode MS"/>
+                <a:ea typeface="Arial Unicode MS"/>
+                <a:cs typeface="Arial Unicode MS"/>
+              </a:rPr>
+              <a:t>今天專講中間這種，物件偵測，因為它是避免撞到東西最主要的那一塊。第二節各位標的，也是偵測用的框。
+</a:t>
+            </a:r>
+          </a:p>
+          <a:p>
+            <a:pPr algn="l">
+              <a:spcBef>
+                <a:spcPts val="0"/>
+              </a:spcBef>
+              <a:spcAft>
+                <a:spcPts val="225"/>
+              </a:spcAft>
+            </a:pPr>
+            <a:r>
+              <a:rPr sz="1350" b="1" lang="zh-TW" dirty="0">
+                <a:solidFill>
+                  <a:srgbClr val="000000"/>
+                </a:solidFill>
+                <a:latin typeface="Arial Unicode MS"/>
+                <a:ea typeface="Arial Unicode MS"/>
+                <a:cs typeface="Arial Unicode MS"/>
+              </a:rPr>
+              <a:t>影片（NVIDIA DRIVE Labs 第 14 集，英文，1 分 27 秒，整支播）：</a:t>
+            </a:r>
+            <a:r>
+              <a:rPr sz="1350" lang="zh-TW" dirty="0">
+                <a:solidFill>
+                  <a:srgbClr val="000000"/>
+                </a:solidFill>
+                <a:latin typeface="Arial Unicode MS"/>
+                <a:ea typeface="Arial Unicode MS"/>
+                <a:cs typeface="Arial Unicode MS"/>
+              </a:rPr>
+              <a:t>這就是第三種工作「分割」的真實樣子。上半部的畫面裡，車子塗成藍色、行人塗成紅色、可以開的路面塗成綠色（0:13）；下半部再把每一個人、每一台車分開編號（0:24）。0:40 說它連公車的後照鏡、形狀奇怪的卡車、拖車的形狀都描得出來；被樹擋住一半的車，還是被當成同一台（0:45）；0:52 在三角錐旁邊也描出了可以開的路面。比起一個框，這種做法對形狀奇怪、互相擋住的東西更清楚。</a:t>
             </a:r>
           </a:p>
         </p:txBody>
@@ -3232,11 +3408,11 @@
                 <a:spcPts val="0"/>
               </a:spcBef>
               <a:spcAft>
-                <a:spcPts val="267"/>
+                <a:spcPts val="233"/>
               </a:spcAft>
             </a:pPr>
             <a:r>
-              <a:rPr sz="1600" b="1" lang="zh-TW" dirty="0">
+              <a:rPr sz="1400" b="1" lang="zh-TW" dirty="0">
                 <a:solidFill>
                   <a:srgbClr val="000000"/>
                 </a:solidFill>
@@ -3247,7 +3423,7 @@
               <a:t>這一張的目的：</a:t>
             </a:r>
             <a:r>
-              <a:rPr sz="1600" lang="zh-TW" dirty="0">
+              <a:rPr sz="1400" lang="zh-TW" dirty="0">
                 <a:solidFill>
                   <a:srgbClr val="000000"/>
                 </a:solidFill>
@@ -3265,11 +3441,11 @@
                 <a:spcPts val="0"/>
               </a:spcBef>
               <a:spcAft>
-                <a:spcPts val="267"/>
+                <a:spcPts val="233"/>
               </a:spcAft>
             </a:pPr>
             <a:r>
-              <a:rPr sz="1600" lang="zh-TW" dirty="0">
+              <a:rPr sz="1400" lang="zh-TW" dirty="0">
                 <a:solidFill>
                   <a:srgbClr val="000000"/>
                 </a:solidFill>
@@ -3287,11 +3463,11 @@
                 <a:spcPts val="0"/>
               </a:spcBef>
               <a:spcAft>
-                <a:spcPts val="267"/>
+                <a:spcPts val="233"/>
               </a:spcAft>
             </a:pPr>
             <a:r>
-              <a:rPr sz="1600" b="1" lang="zh-TW" dirty="0">
+              <a:rPr sz="1400" b="1" lang="zh-TW" dirty="0">
                 <a:solidFill>
                   <a:srgbClr val="000000"/>
                 </a:solidFill>
@@ -3302,7 +3478,7 @@
               <a:t>左邊，門檻 0.3</a:t>
             </a:r>
             <a:r>
-              <a:rPr sz="1600" lang="zh-TW" dirty="0">
+              <a:rPr sz="1400" lang="zh-TW" dirty="0">
                 <a:solidFill>
                   <a:srgbClr val="000000"/>
                 </a:solidFill>
@@ -3320,11 +3496,11 @@
                 <a:spcPts val="0"/>
               </a:spcBef>
               <a:spcAft>
-                <a:spcPts val="267"/>
+                <a:spcPts val="233"/>
               </a:spcAft>
             </a:pPr>
             <a:r>
-              <a:rPr sz="1600" b="1" lang="zh-TW" dirty="0">
+              <a:rPr sz="1400" b="1" lang="zh-TW" dirty="0">
                 <a:solidFill>
                   <a:srgbClr val="000000"/>
                 </a:solidFill>
@@ -3335,7 +3511,7 @@
               <a:t>右邊，門檻 0.7</a:t>
             </a:r>
             <a:r>
-              <a:rPr sz="1600" lang="zh-TW" dirty="0">
+              <a:rPr sz="1400" lang="zh-TW" dirty="0">
                 <a:solidFill>
                   <a:srgbClr val="000000"/>
                 </a:solidFill>
@@ -3346,7 +3522,7 @@
               <a:t>：只留分數 0.7 以上的。畫面很乾淨，可是請看那些</a:t>
             </a:r>
             <a:r>
-              <a:rPr sz="1600" b="1" lang="zh-TW" dirty="0">
+              <a:rPr sz="1400" b="1" lang="zh-TW" dirty="0">
                 <a:solidFill>
                   <a:srgbClr val="000000"/>
                 </a:solidFill>
@@ -3357,7 +3533,7 @@
               <a:t>白色虛線框</a:t>
             </a:r>
             <a:r>
-              <a:rPr sz="1600" lang="zh-TW" dirty="0">
+              <a:rPr sz="1400" lang="zh-TW" dirty="0">
                 <a:solidFill>
                   <a:srgbClr val="000000"/>
                 </a:solidFill>
@@ -3375,11 +3551,11 @@
                 <a:spcPts val="0"/>
               </a:spcBef>
               <a:spcAft>
-                <a:spcPts val="267"/>
+                <a:spcPts val="233"/>
               </a:spcAft>
             </a:pPr>
             <a:r>
-              <a:rPr sz="1600" lang="zh-TW" dirty="0">
+              <a:rPr sz="1400" lang="zh-TW" dirty="0">
                 <a:solidFill>
                   <a:srgbClr val="000000"/>
                 </a:solidFill>
@@ -3397,11 +3573,11 @@
                 <a:spcPts val="0"/>
               </a:spcBef>
               <a:spcAft>
-                <a:spcPts val="267"/>
+                <a:spcPts val="233"/>
               </a:spcAft>
             </a:pPr>
             <a:r>
-              <a:rPr sz="1600" lang="zh-TW" dirty="0">
+              <a:rPr sz="1400" lang="zh-TW" dirty="0">
                 <a:solidFill>
                   <a:srgbClr val="000000"/>
                 </a:solidFill>
@@ -3412,7 +3588,7 @@
               <a:t>放到車上：</a:t>
             </a:r>
             <a:r>
-              <a:rPr sz="1600" b="1" lang="zh-TW" dirty="0">
+              <a:rPr sz="1400" b="1" lang="zh-TW" dirty="0">
                 <a:solidFill>
                   <a:srgbClr val="000000"/>
                 </a:solidFill>
@@ -3423,7 +3599,7 @@
               <a:t>多報</a:t>
             </a:r>
             <a:r>
-              <a:rPr sz="1600" lang="zh-TW" dirty="0">
+              <a:rPr sz="1400" lang="zh-TW" dirty="0">
                 <a:solidFill>
                   <a:srgbClr val="000000"/>
                 </a:solidFill>
@@ -3434,7 +3610,7 @@
               <a:t>，車子會為了不存在的東西煞車，就是上週講的幽靈煞車；</a:t>
             </a:r>
             <a:r>
-              <a:rPr sz="1600" b="1" lang="zh-TW" dirty="0">
+              <a:rPr sz="1400" b="1" lang="zh-TW" dirty="0">
                 <a:solidFill>
                   <a:srgbClr val="000000"/>
                 </a:solidFill>
@@ -3445,15 +3621,48 @@
               <a:t>漏掉</a:t>
             </a:r>
             <a:r>
-              <a:rPr sz="1600" lang="zh-TW" dirty="0">
-                <a:solidFill>
-                  <a:srgbClr val="000000"/>
-                </a:solidFill>
-                <a:latin typeface="Arial Unicode MS"/>
-                <a:ea typeface="Arial Unicode MS"/>
-                <a:cs typeface="Arial Unicode MS"/>
-              </a:rPr>
-              <a:t>，前面明明有人，車子不煞。哪一種比較嚴重？漏掉人當然比較嚴重，所以行人通常門檻會設得比較低，多出來的框，再靠光達、雷達、追蹤去確認。這就是上週講的融合派上用場的地方。</a:t>
+              <a:rPr sz="1400" lang="zh-TW" dirty="0">
+                <a:solidFill>
+                  <a:srgbClr val="000000"/>
+                </a:solidFill>
+                <a:latin typeface="Arial Unicode MS"/>
+                <a:ea typeface="Arial Unicode MS"/>
+                <a:cs typeface="Arial Unicode MS"/>
+              </a:rPr>
+              <a:t>，前面明明有人，車子不煞。哪一種比較嚴重？漏掉人當然比較嚴重，所以行人通常門檻會設得比較低，多出來的框，再靠光達、雷達、追蹤去確認。這就是上週講的融合派上用場的地方。
+</a:t>
+            </a:r>
+          </a:p>
+          <a:p>
+            <a:pPr algn="l">
+              <a:spcBef>
+                <a:spcPts val="0"/>
+              </a:spcBef>
+              <a:spcAft>
+                <a:spcPts val="233"/>
+              </a:spcAft>
+            </a:pPr>
+            <a:r>
+              <a:rPr sz="1400" b="1" lang="zh-TW" dirty="0">
+                <a:solidFill>
+                  <a:srgbClr val="000000"/>
+                </a:solidFill>
+                <a:latin typeface="Arial Unicode MS"/>
+                <a:ea typeface="Arial Unicode MS"/>
+                <a:cs typeface="Arial Unicode MS"/>
+              </a:rPr>
+              <a:t>影片（同一支 TED）：從 5:10 播到 5:48。</a:t>
+            </a:r>
+            <a:r>
+              <a:rPr sz="1400" lang="zh-TW" dirty="0">
+                <a:solidFill>
+                  <a:srgbClr val="000000"/>
+                </a:solidFill>
+                <a:latin typeface="Arial Unicode MS"/>
+                <a:ea typeface="Arial Unicode MS"/>
+                <a:cs typeface="Arial Unicode MS"/>
+              </a:rPr>
+              <a:t>他把鏡頭對著觀眾，說「我們把偵測的門檻調低一點，就可以找到更多人」（5:22），畫面上框一下子多了很多，連觀眾手上的停車標誌、背包都框出來了。這就是左邊那張門檻 0.3：框變多了，找到的東西也變多了。</a:t>
             </a:r>
           </a:p>
         </p:txBody>
@@ -4321,11 +4530,11 @@
                 <a:spcPts val="0"/>
               </a:spcBef>
               <a:spcAft>
-                <a:spcPts val="267"/>
+                <a:spcPts val="225"/>
               </a:spcAft>
             </a:pPr>
             <a:r>
-              <a:rPr sz="1600" b="1" lang="zh-TW" dirty="0">
+              <a:rPr sz="1350" b="1" lang="zh-TW" dirty="0">
                 <a:solidFill>
                   <a:srgbClr val="000000"/>
                 </a:solidFill>
@@ -4336,7 +4545,7 @@
               <a:t>這一張的目的：</a:t>
             </a:r>
             <a:r>
-              <a:rPr sz="1600" lang="zh-TW" dirty="0">
+              <a:rPr sz="1350" lang="zh-TW" dirty="0">
                 <a:solidFill>
                   <a:srgbClr val="000000"/>
                 </a:solidFill>
@@ -4354,11 +4563,11 @@
                 <a:spcPts val="0"/>
               </a:spcBef>
               <a:spcAft>
-                <a:spcPts val="267"/>
+                <a:spcPts val="225"/>
               </a:spcAft>
             </a:pPr>
             <a:r>
-              <a:rPr sz="1600" lang="zh-TW" dirty="0">
+              <a:rPr sz="1350" lang="zh-TW" dirty="0">
                 <a:solidFill>
                   <a:srgbClr val="000000"/>
                 </a:solidFill>
@@ -4369,7 +4578,7 @@
               <a:t>這一張是晚上，新加坡，剛下過雨。框是模型抓到的，</a:t>
             </a:r>
             <a:r>
-              <a:rPr sz="1600" b="1" lang="zh-TW" dirty="0">
+              <a:rPr sz="1350" b="1" lang="zh-TW" dirty="0">
                 <a:solidFill>
                   <a:srgbClr val="000000"/>
                 </a:solidFill>
@@ -4380,7 +4589,7 @@
               <a:t>白色虛線</a:t>
             </a:r>
             <a:r>
-              <a:rPr sz="1600" lang="zh-TW" dirty="0">
+              <a:rPr sz="1350" lang="zh-TW" dirty="0">
                 <a:solidFill>
                   <a:srgbClr val="000000"/>
                 </a:solidFill>
@@ -4398,11 +4607,11 @@
                 <a:spcPts val="0"/>
               </a:spcBef>
               <a:spcAft>
-                <a:spcPts val="267"/>
+                <a:spcPts val="225"/>
               </a:spcAft>
             </a:pPr>
             <a:r>
-              <a:rPr sz="1600" lang="zh-TW" dirty="0">
+              <a:rPr sz="1350" lang="zh-TW" dirty="0">
                 <a:solidFill>
                   <a:srgbClr val="000000"/>
                 </a:solidFill>
@@ -4420,11 +4629,11 @@
                 <a:spcPts val="0"/>
               </a:spcBef>
               <a:spcAft>
-                <a:spcPts val="267"/>
+                <a:spcPts val="225"/>
               </a:spcAft>
             </a:pPr>
             <a:r>
-              <a:rPr sz="1600" lang="zh-TW" dirty="0">
+              <a:rPr sz="1350" lang="zh-TW" dirty="0">
                 <a:solidFill>
                   <a:srgbClr val="000000"/>
                 </a:solidFill>
@@ -4442,11 +4651,11 @@
                 <a:spcPts val="0"/>
               </a:spcBef>
               <a:spcAft>
-                <a:spcPts val="267"/>
+                <a:spcPts val="225"/>
               </a:spcAft>
             </a:pPr>
             <a:r>
-              <a:rPr sz="1600" lang="zh-TW" dirty="0">
+              <a:rPr sz="1350" lang="zh-TW" dirty="0">
                 <a:solidFill>
                   <a:srgbClr val="000000"/>
                 </a:solidFill>
@@ -4464,19 +4673,74 @@
                 <a:spcPts val="0"/>
               </a:spcBef>
               <a:spcAft>
-                <a:spcPts val="267"/>
+                <a:spcPts val="225"/>
               </a:spcAft>
             </a:pPr>
             <a:r>
-              <a:rPr sz="1600" lang="zh-TW" dirty="0">
-                <a:solidFill>
-                  <a:srgbClr val="000000"/>
-                </a:solidFill>
-                <a:latin typeface="Arial Unicode MS"/>
-                <a:ea typeface="Arial Unicode MS"/>
-                <a:cs typeface="Arial Unicode MS"/>
-              </a:rPr>
-              <a:t>那晚上怎麼辦？上週講過：光達自己帶光源，晚上點數不會變少。所以晚上更需要把光達的點和相機的框合起來看，就是下一張。</a:t>
+              <a:rPr sz="1350" lang="zh-TW" dirty="0">
+                <a:solidFill>
+                  <a:srgbClr val="000000"/>
+                </a:solidFill>
+                <a:latin typeface="Arial Unicode MS"/>
+                <a:ea typeface="Arial Unicode MS"/>
+                <a:cs typeface="Arial Unicode MS"/>
+              </a:rPr>
+              <a:t>那晚上怎麼辦？上週講過：光達自己帶光源，晚上點數不會變少。所以晚上更需要把光達的點和相機的框合起來看，就是下一張。
+</a:t>
+            </a:r>
+          </a:p>
+          <a:p>
+            <a:pPr algn="l">
+              <a:spcBef>
+                <a:spcPts val="0"/>
+              </a:spcBef>
+              <a:spcAft>
+                <a:spcPts val="225"/>
+              </a:spcAft>
+            </a:pPr>
+            <a:r>
+              <a:rPr sz="1350" b="1" lang="zh-TW" dirty="0">
+                <a:solidFill>
+                  <a:srgbClr val="000000"/>
+                </a:solidFill>
+                <a:latin typeface="Arial Unicode MS"/>
+                <a:ea typeface="Arial Unicode MS"/>
+                <a:cs typeface="Arial Unicode MS"/>
+              </a:rPr>
+              <a:t>影片（NVIDIA DRIVE Labs 第 19 集，英文，1 分 51 秒，整支播）：</a:t>
+            </a:r>
+            <a:r>
+              <a:rPr sz="1350" lang="zh-TW" dirty="0">
+                <a:solidFill>
+                  <a:srgbClr val="000000"/>
+                </a:solidFill>
+                <a:latin typeface="Arial Unicode MS"/>
+                <a:ea typeface="Arial Unicode MS"/>
+                <a:cs typeface="Arial Unicode MS"/>
+              </a:rPr>
+              <a:t>主題剛好是「晚上偵測行人」。0:16 到 0:47 的熱度圖，是幾個模型對「這裡有沒有人」意見不一致的地方，紅色最不確定，例如撐傘的人；他們把這些最沒把握的畫面挑出來，請人標好，再加進訓練資料，這叫</a:t>
+            </a:r>
+            <a:r>
+              <a:rPr sz="1350" b="1" lang="zh-TW" dirty="0">
+                <a:solidFill>
+                  <a:srgbClr val="000000"/>
+                </a:solidFill>
+                <a:latin typeface="Arial Unicode MS"/>
+                <a:ea typeface="Arial Unicode MS"/>
+                <a:cs typeface="Arial Unicode MS"/>
+              </a:rPr>
+              <a:t>主動學習</a:t>
+            </a:r>
+            <a:r>
+              <a:rPr sz="1350" lang="zh-TW" dirty="0">
+                <a:solidFill>
+                  <a:srgbClr val="000000"/>
+                </a:solidFill>
+                <a:latin typeface="Arial Unicode MS"/>
+                <a:ea typeface="Arial Unicode MS"/>
+                <a:cs typeface="Arial Unicode MS"/>
+              </a:rPr>
+              <a:t>。0:48 之後左右對照：左邊是人工挑資料訓練的模型，右邊是主動學習訓練的；鏡頭上一滴雨，左邊撐傘的人就不見了，右邊還在（0:58）；左邊把一張卡通人像當成行人，右邊沒有（1:13）；最後一段，右邊在很暗的地方同時抓到機車和騎士（1:26）。這也接到第二節：要標哪些照片，也是一門學問。</a:t>
             </a:r>
           </a:p>
         </p:txBody>
@@ -5608,11 +5872,11 @@
                 <a:spcPts val="0"/>
               </a:spcBef>
               <a:spcAft>
-                <a:spcPts val="225"/>
+                <a:spcPts val="200"/>
               </a:spcAft>
             </a:pPr>
             <a:r>
-              <a:rPr sz="1350" b="1" lang="zh-TW" dirty="0">
+              <a:rPr sz="1200" b="1" lang="zh-TW" dirty="0">
                 <a:solidFill>
                   <a:srgbClr val="000000"/>
                 </a:solidFill>
@@ -5623,7 +5887,7 @@
               <a:t>這一張的目的：</a:t>
             </a:r>
             <a:r>
-              <a:rPr sz="1350" lang="zh-TW" dirty="0">
+              <a:rPr sz="1200" lang="zh-TW" dirty="0">
                 <a:solidFill>
                   <a:srgbClr val="000000"/>
                 </a:solidFill>
@@ -5641,11 +5905,11 @@
                 <a:spcPts val="0"/>
               </a:spcBef>
               <a:spcAft>
-                <a:spcPts val="225"/>
+                <a:spcPts val="200"/>
               </a:spcAft>
             </a:pPr>
             <a:r>
-              <a:rPr sz="1350" b="1" lang="zh-TW" dirty="0">
+              <a:rPr sz="1200" b="1" lang="zh-TW" dirty="0">
                 <a:solidFill>
                   <a:srgbClr val="000000"/>
                 </a:solidFill>
@@ -5656,7 +5920,7 @@
               <a:t>左邊是鳥瞰圖</a:t>
             </a:r>
             <a:r>
-              <a:rPr sz="1350" lang="zh-TW" dirty="0">
+              <a:rPr sz="1200" lang="zh-TW" dirty="0">
                 <a:solidFill>
                   <a:srgbClr val="000000"/>
                 </a:solidFill>
@@ -5674,11 +5938,11 @@
                 <a:spcPts val="0"/>
               </a:spcBef>
               <a:spcAft>
-                <a:spcPts val="225"/>
+                <a:spcPts val="200"/>
               </a:spcAft>
             </a:pPr>
             <a:r>
-              <a:rPr sz="1350" lang="zh-TW" dirty="0">
+              <a:rPr sz="1200" lang="zh-TW" dirty="0">
                 <a:solidFill>
                   <a:srgbClr val="000000"/>
                 </a:solidFill>
@@ -5689,7 +5953,7 @@
               <a:t>為什麼要從上往下看？三個原因。第一，</a:t>
             </a:r>
             <a:r>
-              <a:rPr sz="1350" b="1" lang="zh-TW" dirty="0">
+              <a:rPr sz="1200" b="1" lang="zh-TW" dirty="0">
                 <a:solidFill>
                   <a:srgbClr val="000000"/>
                 </a:solidFill>
@@ -5700,7 +5964,7 @@
               <a:t>不會互相擋</a:t>
             </a:r>
             <a:r>
-              <a:rPr sz="1350" lang="zh-TW" dirty="0">
+              <a:rPr sz="1200" lang="zh-TW" dirty="0">
                 <a:solidFill>
                   <a:srgbClr val="000000"/>
                 </a:solidFill>
@@ -5711,7 +5975,7 @@
               <a:t>：照片上，前面的車會擋住後面的車；從上面看，每台車各佔一塊地。第二，</a:t>
             </a:r>
             <a:r>
-              <a:rPr sz="1350" b="1" lang="zh-TW" dirty="0">
+              <a:rPr sz="1200" b="1" lang="zh-TW" dirty="0">
                 <a:solidFill>
                   <a:srgbClr val="000000"/>
                 </a:solidFill>
@@ -5722,7 +5986,7 @@
               <a:t>距離不會變形</a:t>
             </a:r>
             <a:r>
-              <a:rPr sz="1350" lang="zh-TW" dirty="0">
+              <a:rPr sz="1200" lang="zh-TW" dirty="0">
                 <a:solidFill>
                   <a:srgbClr val="000000"/>
                 </a:solidFill>
@@ -5733,7 +5997,7 @@
               <a:t>：照片上近的東西大、遠的東西小；鳥瞰圖上，一公尺就是一公尺。第三，</a:t>
             </a:r>
             <a:r>
-              <a:rPr sz="1350" b="1" lang="zh-TW" dirty="0">
+              <a:rPr sz="1200" b="1" lang="zh-TW" dirty="0">
                 <a:solidFill>
                   <a:srgbClr val="000000"/>
                 </a:solidFill>
@@ -5744,7 +6008,7 @@
               <a:t>開車本來就是在地面上做決定</a:t>
             </a:r>
             <a:r>
-              <a:rPr sz="1350" lang="zh-TW" dirty="0">
+              <a:rPr sz="1200" lang="zh-TW" dirty="0">
                 <a:solidFill>
                   <a:srgbClr val="000000"/>
                 </a:solidFill>
@@ -5762,11 +6026,11 @@
                 <a:spcPts val="0"/>
               </a:spcBef>
               <a:spcAft>
-                <a:spcPts val="225"/>
+                <a:spcPts val="200"/>
               </a:spcAft>
             </a:pPr>
             <a:r>
-              <a:rPr sz="1350" b="1" lang="zh-TW" dirty="0">
+              <a:rPr sz="1200" b="1" lang="zh-TW" dirty="0">
                 <a:solidFill>
                   <a:srgbClr val="000000"/>
                 </a:solidFill>
@@ -5777,7 +6041,7 @@
               <a:t>右邊是佔據網格</a:t>
             </a:r>
             <a:r>
-              <a:rPr sz="1350" lang="zh-TW" dirty="0">
+              <a:rPr sz="1200" lang="zh-TW" dirty="0">
                 <a:solidFill>
                   <a:srgbClr val="000000"/>
                 </a:solidFill>
@@ -5795,11 +6059,11 @@
                 <a:spcPts val="0"/>
               </a:spcBef>
               <a:spcAft>
-                <a:spcPts val="225"/>
+                <a:spcPts val="200"/>
               </a:spcAft>
             </a:pPr>
             <a:r>
-              <a:rPr sz="1350" b="1" lang="zh-TW" dirty="0">
+              <a:rPr sz="1200" b="1" lang="zh-TW" dirty="0">
                 <a:solidFill>
                   <a:srgbClr val="000000"/>
                 </a:solidFill>
@@ -5810,7 +6074,7 @@
               <a:t>紅色，有東西</a:t>
             </a:r>
             <a:r>
-              <a:rPr sz="1350" lang="zh-TW" dirty="0">
+              <a:rPr sz="1200" lang="zh-TW" dirty="0">
                 <a:solidFill>
                   <a:srgbClr val="000000"/>
                 </a:solidFill>
@@ -5821,7 +6085,7 @@
               <a:t>：這一格有高出地面的點。</a:t>
             </a:r>
             <a:r>
-              <a:rPr sz="1350" b="1" lang="zh-TW" dirty="0">
+              <a:rPr sz="1200" b="1" lang="zh-TW" dirty="0">
                 <a:solidFill>
                   <a:srgbClr val="000000"/>
                 </a:solidFill>
@@ -5832,7 +6096,7 @@
               <a:t>白色，空的</a:t>
             </a:r>
             <a:r>
-              <a:rPr sz="1350" lang="zh-TW" dirty="0">
+              <a:rPr sz="1200" lang="zh-TW" dirty="0">
                 <a:solidFill>
                   <a:srgbClr val="000000"/>
                 </a:solidFill>
@@ -5843,7 +6107,7 @@
               <a:t>：雷射從光達打出去，一路經過這些格子都沒碰到東西，所以是空的。</a:t>
             </a:r>
             <a:r>
-              <a:rPr sz="1350" b="1" lang="zh-TW" dirty="0">
+              <a:rPr sz="1200" b="1" lang="zh-TW" dirty="0">
                 <a:solidFill>
                   <a:srgbClr val="000000"/>
                 </a:solidFill>
@@ -5854,7 +6118,7 @@
               <a:t>灰色，不知道</a:t>
             </a:r>
             <a:r>
-              <a:rPr sz="1350" lang="zh-TW" dirty="0">
+              <a:rPr sz="1200" lang="zh-TW" dirty="0">
                 <a:solidFill>
                   <a:srgbClr val="000000"/>
                 </a:solidFill>
@@ -5872,11 +6136,11 @@
                 <a:spcPts val="0"/>
               </a:spcBef>
               <a:spcAft>
-                <a:spcPts val="225"/>
+                <a:spcPts val="200"/>
               </a:spcAft>
             </a:pPr>
             <a:r>
-              <a:rPr sz="1350" lang="zh-TW" dirty="0">
+              <a:rPr sz="1200" lang="zh-TW" dirty="0">
                 <a:solidFill>
                   <a:srgbClr val="000000"/>
                 </a:solidFill>
@@ -5894,11 +6158,11 @@
                 <a:spcPts val="0"/>
               </a:spcBef>
               <a:spcAft>
-                <a:spcPts val="225"/>
+                <a:spcPts val="200"/>
               </a:spcAft>
             </a:pPr>
             <a:r>
-              <a:rPr sz="1350" lang="zh-TW" dirty="0">
+              <a:rPr sz="1200" lang="zh-TW" dirty="0">
                 <a:solidFill>
                   <a:srgbClr val="000000"/>
                 </a:solidFill>
@@ -5909,7 +6173,7 @@
               <a:t>佔據網格最大的好處是：</a:t>
             </a:r>
             <a:r>
-              <a:rPr sz="1350" b="1" lang="zh-TW" dirty="0">
+              <a:rPr sz="1200" b="1" lang="zh-TW" dirty="0">
                 <a:solidFill>
                   <a:srgbClr val="000000"/>
                 </a:solidFill>
@@ -5920,7 +6184,7 @@
               <a:t>不用知道那是什麼。</a:t>
             </a:r>
             <a:r>
-              <a:rPr sz="1350" lang="zh-TW" dirty="0">
+              <a:rPr sz="1200" lang="zh-TW" dirty="0">
                 <a:solidFill>
                   <a:srgbClr val="000000"/>
                 </a:solidFill>
@@ -5938,19 +6202,52 @@
                 <a:spcPts val="0"/>
               </a:spcBef>
               <a:spcAft>
-                <a:spcPts val="225"/>
+                <a:spcPts val="200"/>
               </a:spcAft>
             </a:pPr>
             <a:r>
-              <a:rPr sz="1350" lang="zh-TW" dirty="0">
-                <a:solidFill>
-                  <a:srgbClr val="000000"/>
-                </a:solidFill>
-                <a:latin typeface="Arial Unicode MS"/>
-                <a:ea typeface="Arial Unicode MS"/>
-                <a:cs typeface="Arial Unicode MS"/>
-              </a:rPr>
-              <a:t>還有灰色那一塊要特別小心：「不知道」不等於「空的」。被大卡車擋住的後面，可能就站著一個人。</a:t>
+              <a:rPr sz="1200" lang="zh-TW" dirty="0">
+                <a:solidFill>
+                  <a:srgbClr val="000000"/>
+                </a:solidFill>
+                <a:latin typeface="Arial Unicode MS"/>
+                <a:ea typeface="Arial Unicode MS"/>
+                <a:cs typeface="Arial Unicode MS"/>
+              </a:rPr>
+              <a:t>還有灰色那一塊要特別小心：「不知道」不等於「空的」。被大卡車擋住的後面，可能就站著一個人。
+</a:t>
+            </a:r>
+          </a:p>
+          <a:p>
+            <a:pPr algn="l">
+              <a:spcBef>
+                <a:spcPts val="0"/>
+              </a:spcBef>
+              <a:spcAft>
+                <a:spcPts val="200"/>
+              </a:spcAft>
+            </a:pPr>
+            <a:r>
+              <a:rPr sz="1200" b="1" lang="zh-TW" dirty="0">
+                <a:solidFill>
+                  <a:srgbClr val="000000"/>
+                </a:solidFill>
+                <a:latin typeface="Arial Unicode MS"/>
+                <a:ea typeface="Arial Unicode MS"/>
+                <a:cs typeface="Arial Unicode MS"/>
+              </a:rPr>
+              <a:t>影片（波昂大學 Cyrill Stachniss 教授，英文）：從 0:04 播到 2:21。</a:t>
+            </a:r>
+            <a:r>
+              <a:rPr sz="1200" lang="zh-TW" dirty="0">
+                <a:solidFill>
+                  <a:srgbClr val="000000"/>
+                </a:solidFill>
+                <a:latin typeface="Arial Unicode MS"/>
+                <a:ea typeface="Arial Unicode MS"/>
+                <a:cs typeface="Arial Unicode MS"/>
+              </a:rPr>
+              <a:t>他說佔據網格就像存在電腦裡的地圖（0:08）：把地面切成小格子，每一格記「有東西」還是「空的」，畫出來就像一張黑白圖片（0:58），黑色是有東西、白色是空的（1:12）。我們的圖用紅色表示有東西，意思一樣。1:40 他講到重點：感測器有雜訊，其實不能百分之百確定，所以每一格記的是一個機率，1 是一定有東西，0 是一定空的（2:02）。</a:t>
             </a:r>
           </a:p>
         </p:txBody>
@@ -6653,11 +6950,11 @@
                 <a:spcPts val="0"/>
               </a:spcBef>
               <a:spcAft>
-                <a:spcPts val="167"/>
+                <a:spcPts val="150"/>
               </a:spcAft>
             </a:pPr>
             <a:r>
-              <a:rPr sz="1000" b="1" lang="zh-TW" dirty="0">
+              <a:rPr sz="900" b="1" lang="zh-TW" dirty="0">
                 <a:solidFill>
                   <a:srgbClr val="000000"/>
                 </a:solidFill>
@@ -6668,7 +6965,7 @@
               <a:t>這一張的目的：</a:t>
             </a:r>
             <a:r>
-              <a:rPr sz="1000" lang="zh-TW" dirty="0">
+              <a:rPr sz="900" lang="zh-TW" dirty="0">
                 <a:solidFill>
                   <a:srgbClr val="000000"/>
                 </a:solidFill>
@@ -6686,11 +6983,11 @@
                 <a:spcPts val="0"/>
               </a:spcBef>
               <a:spcAft>
-                <a:spcPts val="167"/>
+                <a:spcPts val="150"/>
               </a:spcAft>
             </a:pPr>
             <a:r>
-              <a:rPr sz="1000" lang="zh-TW" dirty="0">
+              <a:rPr sz="900" lang="zh-TW" dirty="0">
                 <a:solidFill>
                   <a:srgbClr val="000000"/>
                 </a:solidFill>
@@ -6708,11 +7005,11 @@
                 <a:spcPts val="0"/>
               </a:spcBef>
               <a:spcAft>
-                <a:spcPts val="167"/>
+                <a:spcPts val="150"/>
               </a:spcAft>
             </a:pPr>
             <a:r>
-              <a:rPr sz="1000" lang="zh-TW" dirty="0">
+              <a:rPr sz="900" lang="zh-TW" dirty="0">
                 <a:solidFill>
                   <a:srgbClr val="000000"/>
                 </a:solidFill>
@@ -6723,7 +7020,7 @@
               <a:t>相機裡面有一塊</a:t>
             </a:r>
             <a:r>
-              <a:rPr sz="1000" b="1" lang="zh-TW" dirty="0">
+              <a:rPr sz="900" b="1" lang="zh-TW" dirty="0">
                 <a:solidFill>
                   <a:srgbClr val="000000"/>
                 </a:solidFill>
@@ -6734,7 +7031,7 @@
               <a:t>影像感測器</a:t>
             </a:r>
             <a:r>
-              <a:rPr sz="1000" lang="zh-TW" dirty="0">
+              <a:rPr sz="900" lang="zh-TW" dirty="0">
                 <a:solidFill>
                   <a:srgbClr val="000000"/>
                 </a:solidFill>
@@ -6745,7 +7042,7 @@
               <a:t>，第五週讀過它的規格表。nuScenes 用的是 1/1.8 吋的 CMOS 感測器，照片是 1600 乘 900 個像素。可以把它想成</a:t>
             </a:r>
             <a:r>
-              <a:rPr sz="1000" b="1" lang="zh-TW" dirty="0">
+              <a:rPr sz="900" b="1" lang="zh-TW" dirty="0">
                 <a:solidFill>
                   <a:srgbClr val="000000"/>
                 </a:solidFill>
@@ -6756,7 +7053,7 @@
               <a:t>一大片排得整整齊齊的小水桶</a:t>
             </a:r>
             <a:r>
-              <a:rPr sz="1000" lang="zh-TW" dirty="0">
+              <a:rPr sz="900" lang="zh-TW" dirty="0">
                 <a:solidFill>
                   <a:srgbClr val="000000"/>
                 </a:solidFill>
@@ -6774,11 +7071,11 @@
                 <a:spcPts val="0"/>
               </a:spcBef>
               <a:spcAft>
-                <a:spcPts val="167"/>
+                <a:spcPts val="150"/>
               </a:spcAft>
             </a:pPr>
             <a:r>
-              <a:rPr sz="1000" lang="zh-TW" dirty="0">
+              <a:rPr sz="900" lang="zh-TW" dirty="0">
                 <a:solidFill>
                   <a:srgbClr val="000000"/>
                 </a:solidFill>
@@ -6789,7 +7086,7 @@
               <a:t>按下快門，也就是</a:t>
             </a:r>
             <a:r>
-              <a:rPr sz="1000" b="1" lang="zh-TW" dirty="0">
+              <a:rPr sz="900" b="1" lang="zh-TW" dirty="0">
                 <a:solidFill>
                   <a:srgbClr val="000000"/>
                 </a:solidFill>
@@ -6800,7 +7097,7 @@
               <a:t>曝光</a:t>
             </a:r>
             <a:r>
-              <a:rPr sz="1000" lang="zh-TW" dirty="0">
+              <a:rPr sz="900" lang="zh-TW" dirty="0">
                 <a:solidFill>
                   <a:srgbClr val="000000"/>
                 </a:solidFill>
@@ -6811,7 +7108,7 @@
               <a:t>的那一小段時間，光照進來，就像下雨，每個小水桶接光。光愈多，桶子裡接到的電就愈多；曝光結束，晶片把每一桶的電量</a:t>
             </a:r>
             <a:r>
-              <a:rPr sz="1000" b="1" lang="zh-TW" dirty="0">
+              <a:rPr sz="900" b="1" lang="zh-TW" dirty="0">
                 <a:solidFill>
                   <a:srgbClr val="000000"/>
                 </a:solidFill>
@@ -6822,7 +7119,7 @@
               <a:t>換算成一個數字</a:t>
             </a:r>
             <a:r>
-              <a:rPr sz="1000" lang="zh-TW" dirty="0">
+              <a:rPr sz="900" lang="zh-TW" dirty="0">
                 <a:solidFill>
                   <a:srgbClr val="000000"/>
                 </a:solidFill>
@@ -6840,11 +7137,11 @@
                 <a:spcPts val="0"/>
               </a:spcBef>
               <a:spcAft>
-                <a:spcPts val="167"/>
+                <a:spcPts val="150"/>
               </a:spcAft>
             </a:pPr>
             <a:r>
-              <a:rPr sz="1000" lang="zh-TW" dirty="0">
+              <a:rPr sz="900" lang="zh-TW" dirty="0">
                 <a:solidFill>
                   <a:srgbClr val="000000"/>
                 </a:solidFill>
@@ -6855,7 +7152,7 @@
               <a:t>可是請注意，小水桶</a:t>
             </a:r>
             <a:r>
-              <a:rPr sz="1000" b="1" lang="zh-TW" dirty="0">
+              <a:rPr sz="900" b="1" lang="zh-TW" dirty="0">
                 <a:solidFill>
                   <a:srgbClr val="000000"/>
                 </a:solidFill>
@@ -6866,7 +7163,7 @@
               <a:t>只分得出接到多少光，分不出是什麼顏色</a:t>
             </a:r>
             <a:r>
-              <a:rPr sz="1000" lang="zh-TW" dirty="0">
+              <a:rPr sz="900" lang="zh-TW" dirty="0">
                 <a:solidFill>
                   <a:srgbClr val="000000"/>
                 </a:solidFill>
@@ -6884,11 +7181,11 @@
                 <a:spcPts val="0"/>
               </a:spcBef>
               <a:spcAft>
-                <a:spcPts val="167"/>
+                <a:spcPts val="150"/>
               </a:spcAft>
             </a:pPr>
             <a:r>
-              <a:rPr sz="1000" lang="zh-TW" dirty="0">
+              <a:rPr sz="900" lang="zh-TW" dirty="0">
                 <a:solidFill>
                   <a:srgbClr val="000000"/>
                 </a:solidFill>
@@ -6899,7 +7196,7 @@
               <a:t>那顏色怎麼來？在每一個小水桶上面，</a:t>
             </a:r>
             <a:r>
-              <a:rPr sz="1000" b="1" lang="zh-TW" dirty="0">
+              <a:rPr sz="900" b="1" lang="zh-TW" dirty="0">
                 <a:solidFill>
                   <a:srgbClr val="000000"/>
                 </a:solidFill>
@@ -6910,7 +7207,7 @@
               <a:t>貼一片很小的濾色片</a:t>
             </a:r>
             <a:r>
-              <a:rPr sz="1000" lang="zh-TW" dirty="0">
+              <a:rPr sz="900" lang="zh-TW" dirty="0">
                 <a:solidFill>
                   <a:srgbClr val="000000"/>
                 </a:solidFill>
@@ -6921,7 +7218,7 @@
               <a:t>：紅的、綠的、藍的，排成固定的花樣，最常見的是兩乘兩一組，一個紅、兩個綠、一個藍。貼了紅色濾色片的那一格，就只量得到紅光有多少。這就是中間那一格：每個像素</a:t>
             </a:r>
             <a:r>
-              <a:rPr sz="1000" b="1" lang="zh-TW" dirty="0">
+              <a:rPr sz="900" b="1" lang="zh-TW" dirty="0">
                 <a:solidFill>
                   <a:srgbClr val="000000"/>
                 </a:solidFill>
@@ -6932,7 +7229,7 @@
               <a:t>只有一種顏色的數字</a:t>
             </a:r>
             <a:r>
-              <a:rPr sz="1000" lang="zh-TW" dirty="0">
+              <a:rPr sz="900" lang="zh-TW" dirty="0">
                 <a:solidFill>
                   <a:srgbClr val="000000"/>
                 </a:solidFill>
@@ -6950,11 +7247,11 @@
                 <a:spcPts val="0"/>
               </a:spcBef>
               <a:spcAft>
-                <a:spcPts val="167"/>
+                <a:spcPts val="150"/>
               </a:spcAft>
             </a:pPr>
             <a:r>
-              <a:rPr sz="1000" lang="zh-TW" dirty="0">
+              <a:rPr sz="900" lang="zh-TW" dirty="0">
                 <a:solidFill>
                   <a:srgbClr val="000000"/>
                 </a:solidFill>
@@ -6965,7 +7262,7 @@
               <a:t>為什麼綠色要兩個？因為</a:t>
             </a:r>
             <a:r>
-              <a:rPr sz="1000" b="1" lang="zh-TW" dirty="0">
+              <a:rPr sz="900" b="1" lang="zh-TW" dirty="0">
                 <a:solidFill>
                   <a:srgbClr val="000000"/>
                 </a:solidFill>
@@ -6976,7 +7273,7 @@
               <a:t>人的眼睛對綠光最敏感</a:t>
             </a:r>
             <a:r>
-              <a:rPr sz="1000" lang="zh-TW" dirty="0">
+              <a:rPr sz="900" lang="zh-TW" dirty="0">
                 <a:solidFill>
                   <a:srgbClr val="000000"/>
                 </a:solidFill>
@@ -6987,7 +7284,7 @@
               <a:t>，我們看到的「亮暗和細節」，大部分來自綠色。把一張彩色照片換成黑白時，常用的算法裡綠色就佔了將近六成（紅 0.30、綠 0.59、藍 0.11），左邊第一格就是這樣算的。所以多放一倍的綠，照片的</a:t>
             </a:r>
             <a:r>
-              <a:rPr sz="1000" b="1" lang="zh-TW" dirty="0">
+              <a:rPr sz="900" b="1" lang="zh-TW" dirty="0">
                 <a:solidFill>
                   <a:srgbClr val="000000"/>
                 </a:solidFill>
@@ -6998,7 +7295,7 @@
               <a:t>清晰度</a:t>
             </a:r>
             <a:r>
-              <a:rPr sz="1000" lang="zh-TW" dirty="0">
+              <a:rPr sz="900" lang="zh-TW" dirty="0">
                 <a:solidFill>
                   <a:srgbClr val="000000"/>
                 </a:solidFill>
@@ -7009,7 +7306,7 @@
               <a:t>比較好、雜訊比較少。代價是紅和藍各只佔四分之一，</a:t>
             </a:r>
             <a:r>
-              <a:rPr sz="1000" b="1" lang="zh-TW" dirty="0">
+              <a:rPr sz="900" b="1" lang="zh-TW" dirty="0">
                 <a:solidFill>
                   <a:srgbClr val="000000"/>
                 </a:solidFill>
@@ -7020,7 +7317,7 @@
               <a:t>顏色的細節比較粗</a:t>
             </a:r>
             <a:r>
-              <a:rPr sz="1000" lang="zh-TW" dirty="0">
+              <a:rPr sz="900" lang="zh-TW" dirty="0">
                 <a:solidFill>
                   <a:srgbClr val="000000"/>
                 </a:solidFill>
@@ -7038,11 +7335,11 @@
                 <a:spcPts val="0"/>
               </a:spcBef>
               <a:spcAft>
-                <a:spcPts val="167"/>
+                <a:spcPts val="150"/>
               </a:spcAft>
             </a:pPr>
             <a:r>
-              <a:rPr sz="1000" lang="zh-TW" dirty="0">
+              <a:rPr sz="900" lang="zh-TW" dirty="0">
                 <a:solidFill>
                   <a:srgbClr val="000000"/>
                 </a:solidFill>
@@ -7053,7 +7350,7 @@
               <a:t>可是一個像素只量到一種顏色，另外兩種怎麼辦？相機的晶片會看旁邊的格子，把缺的兩個顏色</a:t>
             </a:r>
             <a:r>
-              <a:rPr sz="1000" b="1" lang="zh-TW" dirty="0">
+              <a:rPr sz="900" b="1" lang="zh-TW" dirty="0">
                 <a:solidFill>
                   <a:srgbClr val="000000"/>
                 </a:solidFill>
@@ -7064,7 +7361,7 @@
               <a:t>估出來補上</a:t>
             </a:r>
             <a:r>
-              <a:rPr sz="1000" lang="zh-TW" dirty="0">
+              <a:rPr sz="900" lang="zh-TW" dirty="0">
                 <a:solidFill>
                   <a:srgbClr val="000000"/>
                 </a:solidFill>
@@ -7082,11 +7379,11 @@
                 <a:spcPts val="0"/>
               </a:spcBef>
               <a:spcAft>
-                <a:spcPts val="167"/>
+                <a:spcPts val="150"/>
               </a:spcAft>
             </a:pPr>
             <a:r>
-              <a:rPr sz="1000" lang="zh-TW" dirty="0">
+              <a:rPr sz="900" lang="zh-TW" dirty="0">
                 <a:solidFill>
                   <a:srgbClr val="000000"/>
                 </a:solidFill>
@@ -7097,7 +7394,7 @@
               <a:t>最後存成 JPEG 檔的時候，每種顏色用 </a:t>
             </a:r>
             <a:r>
-              <a:rPr sz="1000" b="1" lang="zh-TW" dirty="0">
+              <a:rPr sz="900" b="1" lang="zh-TW" dirty="0">
                 <a:solidFill>
                   <a:srgbClr val="000000"/>
                 </a:solidFill>
@@ -7108,7 +7405,7 @@
               <a:t>8 個位元</a:t>
             </a:r>
             <a:r>
-              <a:rPr sz="1000" lang="zh-TW" dirty="0">
+              <a:rPr sz="900" lang="zh-TW" dirty="0">
                 <a:solidFill>
                   <a:srgbClr val="000000"/>
                 </a:solidFill>
@@ -7119,7 +7416,7 @@
               <a:t>來記。8 個位元可以記 2 的 8 次方，256 種，所以數字是 </a:t>
             </a:r>
             <a:r>
-              <a:rPr sz="1000" b="1" lang="zh-TW" dirty="0">
+              <a:rPr sz="900" b="1" lang="zh-TW" dirty="0">
                 <a:solidFill>
                   <a:srgbClr val="000000"/>
                 </a:solidFill>
@@ -7130,7 +7427,7 @@
               <a:t>0 到 255</a:t>
             </a:r>
             <a:r>
-              <a:rPr sz="1000" lang="zh-TW" dirty="0">
+              <a:rPr sz="900" lang="zh-TW" dirty="0">
                 <a:solidFill>
                   <a:srgbClr val="000000"/>
                 </a:solidFill>
@@ -7148,11 +7445,11 @@
                 <a:spcPts val="0"/>
               </a:spcBef>
               <a:spcAft>
-                <a:spcPts val="167"/>
+                <a:spcPts val="150"/>
               </a:spcAft>
             </a:pPr>
             <a:r>
-              <a:rPr sz="1000" lang="zh-TW" dirty="0">
+              <a:rPr sz="900" lang="zh-TW" dirty="0">
                 <a:solidFill>
                   <a:srgbClr val="000000"/>
                 </a:solidFill>
@@ -7163,7 +7460,7 @@
               <a:t>兩件事順便記一下。第一，nuScenes 的相機是</a:t>
             </a:r>
             <a:r>
-              <a:rPr sz="1000" b="1" lang="zh-TW" dirty="0">
+              <a:rPr sz="900" b="1" lang="zh-TW" dirty="0">
                 <a:solidFill>
                   <a:srgbClr val="000000"/>
                 </a:solidFill>
@@ -7174,7 +7471,7 @@
               <a:t>自動曝光</a:t>
             </a:r>
             <a:r>
-              <a:rPr sz="1000" lang="zh-TW" dirty="0">
+              <a:rPr sz="900" lang="zh-TW" dirty="0">
                 <a:solidFill>
                   <a:srgbClr val="000000"/>
                 </a:solidFill>
@@ -7185,7 +7482,7 @@
               <a:t>：太暗就讓水桶多接一點時間，太亮就少接一點。所以同一條白線，在不同照片裡數字不一定一樣。第二，桶子有大小，光太強就</a:t>
             </a:r>
             <a:r>
-              <a:rPr sz="1000" b="1" lang="zh-TW" dirty="0">
+              <a:rPr sz="900" b="1" lang="zh-TW" dirty="0">
                 <a:solidFill>
                   <a:srgbClr val="000000"/>
                 </a:solidFill>
@@ -7196,7 +7493,7 @@
               <a:t>滿出來</a:t>
             </a:r>
             <a:r>
-              <a:rPr sz="1000" lang="zh-TW" dirty="0">
+              <a:rPr sz="900" lang="zh-TW" dirty="0">
                 <a:solidFill>
                   <a:srgbClr val="000000"/>
                 </a:solidFill>
@@ -7214,19 +7511,52 @@
                 <a:spcPts val="0"/>
               </a:spcBef>
               <a:spcAft>
-                <a:spcPts val="167"/>
+                <a:spcPts val="150"/>
               </a:spcAft>
             </a:pPr>
             <a:r>
-              <a:rPr sz="1000" lang="zh-TW" dirty="0">
-                <a:solidFill>
-                  <a:srgbClr val="000000"/>
-                </a:solidFill>
-                <a:latin typeface="Arial Unicode MS"/>
-                <a:ea typeface="Arial Unicode MS"/>
-                <a:cs typeface="Arial Unicode MS"/>
-              </a:rPr>
-              <a:t>（說明：左邊和中間兩格是用這張照片的數字算出來的示意；中間的顏色有加亮，方便大家看清楚。）</a:t>
+              <a:rPr sz="900" lang="zh-TW" dirty="0">
+                <a:solidFill>
+                  <a:srgbClr val="000000"/>
+                </a:solidFill>
+                <a:latin typeface="Arial Unicode MS"/>
+                <a:ea typeface="Arial Unicode MS"/>
+                <a:cs typeface="Arial Unicode MS"/>
+              </a:rPr>
+              <a:t>（說明：左邊和中間兩格是用這張照片的數字算出來的示意；中間的顏色有加亮，方便大家看清楚。）
+</a:t>
+            </a:r>
+          </a:p>
+          <a:p>
+            <a:pPr algn="l">
+              <a:spcBef>
+                <a:spcPts val="0"/>
+              </a:spcBef>
+              <a:spcAft>
+                <a:spcPts val="150"/>
+              </a:spcAft>
+            </a:pPr>
+            <a:r>
+              <a:rPr sz="900" b="1" lang="zh-TW" dirty="0">
+                <a:solidFill>
+                  <a:srgbClr val="000000"/>
+                </a:solidFill>
+                <a:latin typeface="Arial Unicode MS"/>
+                <a:ea typeface="Arial Unicode MS"/>
+                <a:cs typeface="Arial Unicode MS"/>
+              </a:rPr>
+              <a:t>影片（Computerphile，英文，可開自動翻譯字幕）：從 0:17 播到 3:25。</a:t>
+            </a:r>
+            <a:r>
+              <a:rPr sz="900" lang="zh-TW" dirty="0">
+                <a:solidFill>
+                  <a:srgbClr val="000000"/>
+                </a:solidFill>
+                <a:latin typeface="Arial Unicode MS"/>
+                <a:ea typeface="Arial Unicode MS"/>
+                <a:cs typeface="Arial Unicode MS"/>
+              </a:rPr>
+              <a:t>諾丁漢大學的老師在紙上畫：感光元件只知道「有多少光照到」，不放濾色片就只能得到黑白照片（0:40）；所以每一格前面放一片紅、綠或藍的濾色片（0:51）；2:08 有一張紅綠相間的格子動畫，就是這種排列；2:08 到 3:00 他講為什麼綠色是兩倍：眼睛對綠色最敏感，亮暗大部分從綠色來，照片看起來比較清楚。片中說的「Biofilter」是口音，指的就是 Bayer filter。</a:t>
             </a:r>
           </a:p>
         </p:txBody>
@@ -7335,11 +7665,11 @@
                 <a:spcPts val="0"/>
               </a:spcBef>
               <a:spcAft>
-                <a:spcPts val="192"/>
+                <a:spcPts val="175"/>
               </a:spcAft>
             </a:pPr>
             <a:r>
-              <a:rPr sz="1150" b="1" lang="zh-TW" dirty="0">
+              <a:rPr sz="1050" b="1" lang="zh-TW" dirty="0">
                 <a:solidFill>
                   <a:srgbClr val="000000"/>
                 </a:solidFill>
@@ -7350,7 +7680,7 @@
               <a:t>這一張的目的：</a:t>
             </a:r>
             <a:r>
-              <a:rPr sz="1150" lang="zh-TW" dirty="0">
+              <a:rPr sz="1050" lang="zh-TW" dirty="0">
                 <a:solidFill>
                   <a:srgbClr val="000000"/>
                 </a:solidFill>
@@ -7368,11 +7698,11 @@
                 <a:spcPts val="0"/>
               </a:spcBef>
               <a:spcAft>
-                <a:spcPts val="192"/>
+                <a:spcPts val="175"/>
               </a:spcAft>
             </a:pPr>
             <a:r>
-              <a:rPr sz="1150" lang="zh-TW" dirty="0">
+              <a:rPr sz="1050" lang="zh-TW" dirty="0">
                 <a:solidFill>
                   <a:srgbClr val="000000"/>
                 </a:solidFill>
@@ -7383,7 +7713,7 @@
               <a:t>上一張說，每個格子只量到一種顏色，缺的兩種用旁邊的格子補。怎麼補？最簡單的方法叫</a:t>
             </a:r>
             <a:r>
-              <a:rPr sz="1150" b="1" lang="zh-TW" dirty="0">
+              <a:rPr sz="1050" b="1" lang="zh-TW" dirty="0">
                 <a:solidFill>
                   <a:srgbClr val="000000"/>
                 </a:solidFill>
@@ -7394,7 +7724,7 @@
               <a:t>鄰居平均</a:t>
             </a:r>
             <a:r>
-              <a:rPr sz="1150" lang="zh-TW" dirty="0">
+              <a:rPr sz="1050" lang="zh-TW" dirty="0">
                 <a:solidFill>
                   <a:srgbClr val="000000"/>
                 </a:solidFill>
@@ -7405,7 +7735,7 @@
               <a:t>：缺什麼顏色，就找旁邊</a:t>
             </a:r>
             <a:r>
-              <a:rPr sz="1150" b="1" lang="zh-TW" dirty="0">
+              <a:rPr sz="1050" b="1" lang="zh-TW" dirty="0">
                 <a:solidFill>
                   <a:srgbClr val="000000"/>
                 </a:solidFill>
@@ -7416,7 +7746,7 @@
               <a:t>同一種顏色</a:t>
             </a:r>
             <a:r>
-              <a:rPr sz="1150" lang="zh-TW" dirty="0">
+              <a:rPr sz="1050" lang="zh-TW" dirty="0">
                 <a:solidFill>
                   <a:srgbClr val="000000"/>
                 </a:solidFill>
@@ -7434,11 +7764,11 @@
                 <a:spcPts val="0"/>
               </a:spcBef>
               <a:spcAft>
-                <a:spcPts val="192"/>
+                <a:spcPts val="175"/>
               </a:spcAft>
             </a:pPr>
             <a:r>
-              <a:rPr sz="1150" lang="zh-TW" dirty="0">
+              <a:rPr sz="1050" lang="zh-TW" dirty="0">
                 <a:solidFill>
                   <a:srgbClr val="000000"/>
                 </a:solidFill>
@@ -7449,7 +7779,7 @@
               <a:t>看第一格，</a:t>
             </a:r>
             <a:r>
-              <a:rPr sz="1150" b="1" lang="zh-TW" dirty="0">
+              <a:rPr sz="1050" b="1" lang="zh-TW" dirty="0">
                 <a:solidFill>
                   <a:srgbClr val="000000"/>
                 </a:solidFill>
@@ -7460,7 +7790,7 @@
               <a:t>紅格</a:t>
             </a:r>
             <a:r>
-              <a:rPr sz="1150" lang="zh-TW" dirty="0">
+              <a:rPr sz="1050" lang="zh-TW" dirty="0">
                 <a:solidFill>
                   <a:srgbClr val="000000"/>
                 </a:solidFill>
@@ -7471,7 +7801,7 @@
               <a:t>。中間那一格貼的是紅色濾色片，自己量到 </a:t>
             </a:r>
             <a:r>
-              <a:rPr sz="1150" b="1" lang="zh-TW" dirty="0">
+              <a:rPr sz="1050" b="1" lang="zh-TW" dirty="0">
                 <a:solidFill>
                   <a:srgbClr val="000000"/>
                 </a:solidFill>
@@ -7482,7 +7812,7 @@
               <a:t>R 40</a:t>
             </a:r>
             <a:r>
-              <a:rPr sz="1150" lang="zh-TW" dirty="0">
+              <a:rPr sz="1050" lang="zh-TW" dirty="0">
                 <a:solidFill>
                   <a:srgbClr val="000000"/>
                 </a:solidFill>
@@ -7500,11 +7830,11 @@
                 <a:spcPts val="0"/>
               </a:spcBef>
               <a:spcAft>
-                <a:spcPts val="192"/>
+                <a:spcPts val="175"/>
               </a:spcAft>
             </a:pPr>
             <a:r>
-              <a:rPr sz="1150" lang="zh-TW" dirty="0">
+              <a:rPr sz="1050" lang="zh-TW" dirty="0">
                 <a:solidFill>
                   <a:srgbClr val="000000"/>
                 </a:solidFill>
@@ -7515,7 +7845,7 @@
               <a:t>它缺綠色。看看周圍：</a:t>
             </a:r>
             <a:r>
-              <a:rPr sz="1150" b="1" lang="zh-TW" dirty="0">
+              <a:rPr sz="1050" b="1" lang="zh-TW" dirty="0">
                 <a:solidFill>
                   <a:srgbClr val="000000"/>
                 </a:solidFill>
@@ -7526,7 +7856,7 @@
               <a:t>上下左右四個都是綠格</a:t>
             </a:r>
             <a:r>
-              <a:rPr sz="1150" lang="zh-TW" dirty="0">
+              <a:rPr sz="1050" lang="zh-TW" dirty="0">
                 <a:solidFill>
                   <a:srgbClr val="000000"/>
                 </a:solidFill>
@@ -7537,7 +7867,7 @@
               <a:t>，41、45、48、36。四個加起來除以 4，</a:t>
             </a:r>
             <a:r>
-              <a:rPr sz="1150" b="1" lang="zh-TW" dirty="0">
+              <a:rPr sz="1050" b="1" lang="zh-TW" dirty="0">
                 <a:solidFill>
                   <a:srgbClr val="000000"/>
                 </a:solidFill>
@@ -7548,7 +7878,7 @@
               <a:t>42.5</a:t>
             </a:r>
             <a:r>
-              <a:rPr sz="1150" lang="zh-TW" dirty="0">
+              <a:rPr sz="1050" lang="zh-TW" dirty="0">
                 <a:solidFill>
                   <a:srgbClr val="000000"/>
                 </a:solidFill>
@@ -7566,11 +7896,11 @@
                 <a:spcPts val="0"/>
               </a:spcBef>
               <a:spcAft>
-                <a:spcPts val="192"/>
+                <a:spcPts val="175"/>
               </a:spcAft>
             </a:pPr>
             <a:r>
-              <a:rPr sz="1150" lang="zh-TW" dirty="0">
+              <a:rPr sz="1050" lang="zh-TW" dirty="0">
                 <a:solidFill>
                   <a:srgbClr val="000000"/>
                 </a:solidFill>
@@ -7581,7 +7911,7 @@
               <a:t>它也缺藍色。藍格在哪裡？在</a:t>
             </a:r>
             <a:r>
-              <a:rPr sz="1150" b="1" lang="zh-TW" dirty="0">
+              <a:rPr sz="1050" b="1" lang="zh-TW" dirty="0">
                 <a:solidFill>
                   <a:srgbClr val="000000"/>
                 </a:solidFill>
@@ -7592,7 +7922,7 @@
               <a:t>四個斜角</a:t>
             </a:r>
             <a:r>
-              <a:rPr sz="1150" lang="zh-TW" dirty="0">
+              <a:rPr sz="1050" lang="zh-TW" dirty="0">
                 <a:solidFill>
                   <a:srgbClr val="000000"/>
                 </a:solidFill>
@@ -7603,7 +7933,7 @@
               <a:t>：48、33、50、37，平均 </a:t>
             </a:r>
             <a:r>
-              <a:rPr sz="1150" b="1" lang="zh-TW" dirty="0">
+              <a:rPr sz="1050" b="1" lang="zh-TW" dirty="0">
                 <a:solidFill>
                   <a:srgbClr val="000000"/>
                 </a:solidFill>
@@ -7614,7 +7944,7 @@
               <a:t>42</a:t>
             </a:r>
             <a:r>
-              <a:rPr sz="1150" lang="zh-TW" dirty="0">
+              <a:rPr sz="1050" lang="zh-TW" dirty="0">
                 <a:solidFill>
                   <a:srgbClr val="000000"/>
                 </a:solidFill>
@@ -7632,11 +7962,11 @@
                 <a:spcPts val="0"/>
               </a:spcBef>
               <a:spcAft>
-                <a:spcPts val="192"/>
+                <a:spcPts val="175"/>
               </a:spcAft>
             </a:pPr>
             <a:r>
-              <a:rPr sz="1150" lang="zh-TW" dirty="0">
+              <a:rPr sz="1050" lang="zh-TW" dirty="0">
                 <a:solidFill>
                   <a:srgbClr val="000000"/>
                 </a:solidFill>
@@ -7654,11 +7984,11 @@
                 <a:spcPts val="0"/>
               </a:spcBef>
               <a:spcAft>
-                <a:spcPts val="192"/>
+                <a:spcPts val="175"/>
               </a:spcAft>
             </a:pPr>
             <a:r>
-              <a:rPr sz="1150" lang="zh-TW" dirty="0">
+              <a:rPr sz="1050" lang="zh-TW" dirty="0">
                 <a:solidFill>
                   <a:srgbClr val="000000"/>
                 </a:solidFill>
@@ -7669,7 +7999,7 @@
               <a:t>第二格，</a:t>
             </a:r>
             <a:r>
-              <a:rPr sz="1150" b="1" lang="zh-TW" dirty="0">
+              <a:rPr sz="1050" b="1" lang="zh-TW" dirty="0">
                 <a:solidFill>
                   <a:srgbClr val="000000"/>
                 </a:solidFill>
@@ -7680,7 +8010,7 @@
               <a:t>綠格</a:t>
             </a:r>
             <a:r>
-              <a:rPr sz="1150" lang="zh-TW" dirty="0">
+              <a:rPr sz="1050" lang="zh-TW" dirty="0">
                 <a:solidFill>
                   <a:srgbClr val="000000"/>
                 </a:solidFill>
@@ -7691,7 +8021,7 @@
               <a:t>，而且它在有紅色的那一列。自己量到 G 36。紅色在它的</a:t>
             </a:r>
             <a:r>
-              <a:rPr sz="1150" b="1" lang="zh-TW" dirty="0">
+              <a:rPr sz="1050" b="1" lang="zh-TW" dirty="0">
                 <a:solidFill>
                   <a:srgbClr val="000000"/>
                 </a:solidFill>
@@ -7702,7 +8032,7 @@
               <a:t>左右兩邊</a:t>
             </a:r>
             <a:r>
-              <a:rPr sz="1150" lang="zh-TW" dirty="0">
+              <a:rPr sz="1050" lang="zh-TW" dirty="0">
                 <a:solidFill>
                   <a:srgbClr val="000000"/>
                 </a:solidFill>
@@ -7713,7 +8043,7 @@
               <a:t>：40 和 60，平均 50；藍色在它的</a:t>
             </a:r>
             <a:r>
-              <a:rPr sz="1150" b="1" lang="zh-TW" dirty="0">
+              <a:rPr sz="1050" b="1" lang="zh-TW" dirty="0">
                 <a:solidFill>
                   <a:srgbClr val="000000"/>
                 </a:solidFill>
@@ -7724,7 +8054,7 @@
               <a:t>上下</a:t>
             </a:r>
             <a:r>
-              <a:rPr sz="1150" lang="zh-TW" dirty="0">
+              <a:rPr sz="1050" lang="zh-TW" dirty="0">
                 <a:solidFill>
                   <a:srgbClr val="000000"/>
                 </a:solidFill>
@@ -7742,11 +8072,11 @@
                 <a:spcPts val="0"/>
               </a:spcBef>
               <a:spcAft>
-                <a:spcPts val="192"/>
+                <a:spcPts val="175"/>
               </a:spcAft>
             </a:pPr>
             <a:r>
-              <a:rPr sz="1150" lang="zh-TW" dirty="0">
+              <a:rPr sz="1050" lang="zh-TW" dirty="0">
                 <a:solidFill>
                   <a:srgbClr val="000000"/>
                 </a:solidFill>
@@ -7757,7 +8087,7 @@
               <a:t>第三格，</a:t>
             </a:r>
             <a:r>
-              <a:rPr sz="1150" b="1" lang="zh-TW" dirty="0">
+              <a:rPr sz="1050" b="1" lang="zh-TW" dirty="0">
                 <a:solidFill>
                   <a:srgbClr val="000000"/>
                 </a:solidFill>
@@ -7768,7 +8098,7 @@
               <a:t>藍格</a:t>
             </a:r>
             <a:r>
-              <a:rPr sz="1150" lang="zh-TW" dirty="0">
+              <a:rPr sz="1050" lang="zh-TW" dirty="0">
                 <a:solidFill>
                   <a:srgbClr val="000000"/>
                 </a:solidFill>
@@ -7786,11 +8116,11 @@
                 <a:spcPts val="0"/>
               </a:spcBef>
               <a:spcAft>
-                <a:spcPts val="192"/>
+                <a:spcPts val="175"/>
               </a:spcAft>
             </a:pPr>
             <a:r>
-              <a:rPr sz="1150" lang="zh-TW" dirty="0">
+              <a:rPr sz="1050" lang="zh-TW" dirty="0">
                 <a:solidFill>
                   <a:srgbClr val="000000"/>
                 </a:solidFill>
@@ -7808,11 +8138,11 @@
                 <a:spcPts val="0"/>
               </a:spcBef>
               <a:spcAft>
-                <a:spcPts val="192"/>
+                <a:spcPts val="175"/>
               </a:spcAft>
             </a:pPr>
             <a:r>
-              <a:rPr sz="1150" lang="zh-TW" dirty="0">
+              <a:rPr sz="1050" lang="zh-TW" dirty="0">
                 <a:solidFill>
                   <a:srgbClr val="000000"/>
                 </a:solidFill>
@@ -7823,7 +8153,7 @@
               <a:t>最下面兩行，請比一比「算出」和「相機存的」：差了幾個數。原因有兩個。第一，這張圖每格那一個顏色的數字，是我從已經存好的 JPEG 拿回來的，只是示範，不是相機真正量到的原始值。第二，真的相機不會用這麼簡單的平均：它會先看</a:t>
             </a:r>
             <a:r>
-              <a:rPr sz="1150" b="1" lang="zh-TW" dirty="0">
+              <a:rPr sz="1050" b="1" lang="zh-TW" dirty="0">
                 <a:solidFill>
                   <a:srgbClr val="000000"/>
                 </a:solidFill>
@@ -7834,7 +8164,7 @@
               <a:t>上下差得多、還是左右差得多</a:t>
             </a:r>
             <a:r>
-              <a:rPr sz="1150" lang="zh-TW" dirty="0">
+              <a:rPr sz="1050" lang="zh-TW" dirty="0">
                 <a:solidFill>
                   <a:srgbClr val="000000"/>
                 </a:solidFill>
@@ -7845,7 +8175,7 @@
               <a:t>，順著變化比較小的方向去平均，以免把邊緣兩邊的顏色混在一起；補完以後，還要調</a:t>
             </a:r>
             <a:r>
-              <a:rPr sz="1150" b="1" lang="zh-TW" dirty="0">
+              <a:rPr sz="1050" b="1" lang="zh-TW" dirty="0">
                 <a:solidFill>
                   <a:srgbClr val="000000"/>
                 </a:solidFill>
@@ -7856,7 +8186,7 @@
               <a:t>白平衡</a:t>
             </a:r>
             <a:r>
-              <a:rPr sz="1150" lang="zh-TW" dirty="0">
+              <a:rPr sz="1050" lang="zh-TW" dirty="0">
                 <a:solidFill>
                   <a:srgbClr val="000000"/>
                 </a:solidFill>
@@ -7874,11 +8204,11 @@
                 <a:spcPts val="0"/>
               </a:spcBef>
               <a:spcAft>
-                <a:spcPts val="192"/>
+                <a:spcPts val="175"/>
               </a:spcAft>
             </a:pPr>
             <a:r>
-              <a:rPr sz="1150" lang="zh-TW" dirty="0">
+              <a:rPr sz="1050" lang="zh-TW" dirty="0">
                 <a:solidFill>
                   <a:srgbClr val="000000"/>
                 </a:solidFill>
@@ -7889,7 +8219,7 @@
               <a:t>最簡單的平均有一個毛病：碰到</a:t>
             </a:r>
             <a:r>
-              <a:rPr sz="1150" b="1" lang="zh-TW" dirty="0">
+              <a:rPr sz="1050" b="1" lang="zh-TW" dirty="0">
                 <a:solidFill>
                   <a:srgbClr val="000000"/>
                 </a:solidFill>
@@ -7900,7 +8230,7 @@
               <a:t>邊緣</a:t>
             </a:r>
             <a:r>
-              <a:rPr sz="1150" lang="zh-TW" dirty="0">
+              <a:rPr sz="1050" lang="zh-TW" dirty="0">
                 <a:solidFill>
                   <a:srgbClr val="000000"/>
                 </a:solidFill>
@@ -7911,7 +8241,7 @@
               <a:t>，例如白色斑馬線旁邊就是黑色柏油，平均的時候會把兩邊混在一起，邊緣就冒出一圈原本沒有的顏色，叫做</a:t>
             </a:r>
             <a:r>
-              <a:rPr sz="1150" b="1" lang="zh-TW" dirty="0">
+              <a:rPr sz="1050" b="1" lang="zh-TW" dirty="0">
                 <a:solidFill>
                   <a:srgbClr val="000000"/>
                 </a:solidFill>
@@ -7922,15 +8252,48 @@
               <a:t>假色</a:t>
             </a:r>
             <a:r>
-              <a:rPr sz="1150" lang="zh-TW" dirty="0">
-                <a:solidFill>
-                  <a:srgbClr val="000000"/>
-                </a:solidFill>
-                <a:latin typeface="Arial Unicode MS"/>
-                <a:ea typeface="Arial Unicode MS"/>
-                <a:cs typeface="Arial Unicode MS"/>
-              </a:rPr>
-              <a:t>。這就是上一張講的，紅和藍格子比較少的代價。</a:t>
+              <a:rPr sz="1050" lang="zh-TW" dirty="0">
+                <a:solidFill>
+                  <a:srgbClr val="000000"/>
+                </a:solidFill>
+                <a:latin typeface="Arial Unicode MS"/>
+                <a:ea typeface="Arial Unicode MS"/>
+                <a:cs typeface="Arial Unicode MS"/>
+              </a:rPr>
+              <a:t>。這就是上一張講的，紅和藍格子比較少的代價。
+</a:t>
+            </a:r>
+          </a:p>
+          <a:p>
+            <a:pPr algn="l">
+              <a:spcBef>
+                <a:spcPts val="0"/>
+              </a:spcBef>
+              <a:spcAft>
+                <a:spcPts val="175"/>
+              </a:spcAft>
+            </a:pPr>
+            <a:r>
+              <a:rPr sz="1050" b="1" lang="zh-TW" dirty="0">
+                <a:solidFill>
+                  <a:srgbClr val="000000"/>
+                </a:solidFill>
+                <a:latin typeface="Arial Unicode MS"/>
+                <a:ea typeface="Arial Unicode MS"/>
+                <a:cs typeface="Arial Unicode MS"/>
+              </a:rPr>
+              <a:t>影片（同一支 Computerphile）：從 3:02 播到 5:46。</a:t>
+            </a:r>
+            <a:r>
+              <a:rPr sz="1050" lang="zh-TW" dirty="0">
+                <a:solidFill>
+                  <a:srgbClr val="000000"/>
+                </a:solidFill>
+                <a:latin typeface="Arial Unicode MS"/>
+                <a:ea typeface="Arial Unicode MS"/>
+                <a:cs typeface="Arial Unicode MS"/>
+              </a:rPr>
+              <a:t>3:02 他說缺的顏色就看旁邊同顏色的格子取中間值，跟這張的鄰居平均一樣；3:25 說這一步叫 demosaicing（去馬賽克）；4:22 開始在紙上寫四個鄰居 200、200、200、50，問中間那格該是多少：直接平均，還是看出那是一條邊、應該是 200，這就是我說的「真的相機會看邊的方向」；5:20 給兩張黑白放射狀的圖，示範補錯時會出現的怪紋路。</a:t>
             </a:r>
           </a:p>
         </p:txBody>
@@ -12003,8 +12366,8 @@
         </p:nvSpPr>
         <p:spPr>
           <a:xfrm>
-            <a:off x="1645474" y="1371600"/>
-            <a:ext cx="5853052" cy="3017520"/>
+            <a:off x="1280765" y="1371600"/>
+            <a:ext cx="6582471" cy="2633472"/>
           </a:xfrm>
           <a:prstGeom prst="rect">
             <a:avLst/>
@@ -12022,7 +12385,7 @@
       </p:sp>
       <p:pic>
         <p:nvPicPr>
-          <p:cNvPr id="5" name="Image 0" descr="/Users/tsengchenghsun/Class/carClass/Claude outputs/第八週(10-29)/src/img/w8_lr.png">    </p:cNvPr>
+          <p:cNvPr id="5" name="Image 0" descr="/Users/tsengchenghsun/Class/carClass/Claude outputs/第八週(10-29)/src/img/w8_lr.gif">    </p:cNvPr>
           <p:cNvPicPr>
             <a:picLocks noChangeAspect="1"/>
           </p:cNvPicPr>
@@ -12036,8 +12399,8 @@
         </p:blipFill>
         <p:spPr>
           <a:xfrm>
-            <a:off x="1663762" y="1389888"/>
-            <a:ext cx="5816476" cy="2980944"/>
+            <a:off x="1299053" y="1389888"/>
+            <a:ext cx="6545895" cy="2596896"/>
           </a:xfrm>
           <a:prstGeom prst="rect">
             <a:avLst/>
@@ -12052,7 +12415,7 @@
         </p:nvSpPr>
         <p:spPr>
           <a:xfrm>
-            <a:off x="502920" y="4407408"/>
+            <a:off x="502920" y="4023360"/>
             <a:ext cx="8138160" cy="201168"/>
           </a:xfrm>
           <a:prstGeom prst="rect">
@@ -12077,22 +12440,178 @@
                 <a:ea typeface="Arial" pitchFamily="34" charset="-122"/>
                 <a:cs typeface="Arial" pitchFamily="34" charset="-120"/>
               </a:rPr>
-              <a:t>第 9 張同一批 627 個例子（大人＋汽車）· 電腦用「看斜率、往下走一步」的方式學門檻，從 2.6 出發 · 三種步伐（學習率）· src/tools_w8_imgs.py</a:t>
+              <a:t>動畫：第 9 張同一批 627 個例子（大人＋汽車）· 白線＝門檻放在哪裡時錯多少 · 球從 2.6 出發，三種步伐（學習率）各走 30 步 · 放映時會動，PDF 只顯示走完的結果 · src/tools_make_lr_gif.py</a:t>
             </a:r>
             <a:endParaRPr lang="en-US" sz="850" dirty="0"/>
+          </a:p>
+        </p:txBody>
+      </p:sp>
+      <p:sp>
+        <p:nvSpPr>
+          <p:cNvPr id="7" name="Shape 4"/>
+          <p:cNvSpPr/>
+          <p:nvPr/>
+        </p:nvSpPr>
+        <p:spPr>
+          <a:xfrm>
+            <a:off x="539496" y="4288536"/>
+            <a:ext cx="219456" cy="219456"/>
+          </a:xfrm>
+          <a:prstGeom prst="ellipse">
+            <a:avLst/>
+          </a:prstGeom>
+          <a:solidFill>
+            <a:srgbClr val="D9463E"/>
+          </a:solidFill>
+          <a:ln/>
+        </p:spPr>
+      </p:sp>
+      <p:sp>
+        <p:nvSpPr>
+          <p:cNvPr id="8" name="Text 5"/>
+          <p:cNvSpPr txBox="1"/>
+          <p:nvPr/>
+        </p:nvSpPr>
+        <p:spPr>
+          <a:xfrm>
+            <a:off x="539496" y="4315968"/>
+            <a:ext cx="219456" cy="164592"/>
+          </a:xfrm>
+          <a:prstGeom prst="rect">
+            <a:avLst/>
+          </a:prstGeom>
+          <a:noFill/>
+          <a:ln/>
+        </p:spPr>
+        <p:txBody>
+          <a:bodyPr wrap="square" lIns="0" tIns="0" rIns="0" bIns="0" rtlCol="0" anchor="ctr"/>
+          <a:lstStyle/>
+          <a:p>
+            <a:pPr algn="ctr" indent="0" marL="0">
+              <a:buNone/>
+            </a:pPr>
+            <a:r>
+              <a:rPr lang="en-US" sz="750" b="1" dirty="0">
+                <a:solidFill>
+                  <a:srgbClr val="FFFFFF"/>
+                </a:solidFill>
+                <a:latin typeface="Arial" pitchFamily="34" charset="0"/>
+                <a:ea typeface="Arial" pitchFamily="34" charset="-122"/>
+                <a:cs typeface="Arial" pitchFamily="34" charset="-120"/>
+              </a:rPr>
+              <a:t>▶</a:t>
+            </a:r>
+            <a:endParaRPr lang="en-US" sz="750" dirty="0"/>
+          </a:p>
+        </p:txBody>
+      </p:sp>
+      <p:sp>
+        <p:nvSpPr>
+          <p:cNvPr id="9" name="Text 6"/>
+          <p:cNvSpPr txBox="1"/>
+          <p:nvPr/>
+        </p:nvSpPr>
+        <p:spPr>
+          <a:xfrm>
+            <a:off x="832104" y="4261104"/>
+            <a:ext cx="7808976" cy="274320"/>
+          </a:xfrm>
+          <a:prstGeom prst="rect">
+            <a:avLst/>
+          </a:prstGeom>
+          <a:noFill/>
+          <a:ln/>
+        </p:spPr>
+        <p:txBody>
+          <a:bodyPr wrap="square" lIns="0" tIns="0" rIns="0" bIns="0" rtlCol="0" anchor="ctr"/>
+          <a:lstStyle/>
+          <a:p>
+            <a:pPr indent="0" marL="0">
+              <a:lnSpc>
+                <a:spcPct val="100000"/>
+              </a:lnSpc>
+              <a:buNone/>
+            </a:pPr>
+            <a:r>
+              <a:rPr lang="en-US" sz="900" b="1" u="sng" dirty="0">
+                <a:solidFill>
+                  <a:srgbClr val="0B1F3A"/>
+                </a:solidFill>
+                <a:latin typeface="Arial" pitchFamily="34" charset="0"/>
+                <a:ea typeface="Arial" pitchFamily="34" charset="-122"/>
+                <a:cs typeface="Arial" pitchFamily="34" charset="-120"/>
+                <a:hlinkClick r:id="rId2" invalidUrl="" action="" tgtFrame="" tooltip="" history="1" highlightClick="0" endSnd="0">
+                  <a:extLst>
+                    <a:ext uri="{A12FA001-AC4F-418D-AE19-62706E023703}">
+                      <ahyp:hlinkClr xmlns:ahyp="http://schemas.microsoft.com/office/drawing/2018/hyperlinkcolor" val="tx"/>
+                    </a:ext>
+                  </a:extLst>
+                </a:hlinkClick>
+              </a:rPr>
+              <a:t>Video: gradient descent (3Blue1Brown) · </a:t>
+            </a:r>
+            <a:pPr indent="0" marL="0">
+              <a:lnSpc>
+                <a:spcPct val="100000"/>
+              </a:lnSpc>
+              <a:buNone/>
+            </a:pPr>
+            <a:r>
+              <a:rPr lang="en-US" sz="900" b="1" u="sng" dirty="0">
+                <a:solidFill>
+                  <a:srgbClr val="0B1F3A"/>
+                </a:solidFill>
+                <a:latin typeface="微軟正黑體" pitchFamily="34" charset="0"/>
+                <a:ea typeface="微軟正黑體" pitchFamily="34" charset="-122"/>
+                <a:cs typeface="微軟正黑體" pitchFamily="34" charset="-120"/>
+                <a:hlinkClick r:id="rId2" invalidUrl="" action="" tgtFrame="" tooltip="" history="1" highlightClick="0" endSnd="0">
+                  <a:extLst>
+                    <a:ext uri="{A12FA001-AC4F-418D-AE19-62706E023703}">
+                      <ahyp:hlinkClr xmlns:ahyp="http://schemas.microsoft.com/office/drawing/2018/hyperlinkcolor" val="tx"/>
+                    </a:ext>
+                  </a:extLst>
+                </a:hlinkClick>
+              </a:rPr>
+              <a:t>影片：梯度下降，球滾下山（3Blue1Brown）　5:12–6:54　</a:t>
+            </a:r>
+            <a:pPr indent="0" marL="0">
+              <a:lnSpc>
+                <a:spcPct val="100000"/>
+              </a:lnSpc>
+              <a:buNone/>
+            </a:pPr>
+            <a:r>
+              <a:rPr lang="en-US" sz="900" u="sng" dirty="0">
+                <a:solidFill>
+                  <a:srgbClr val="1F6FBF"/>
+                </a:solidFill>
+                <a:latin typeface="Arial" pitchFamily="34" charset="0"/>
+                <a:ea typeface="Arial" pitchFamily="34" charset="-122"/>
+                <a:cs typeface="Arial" pitchFamily="34" charset="-120"/>
+                <a:hlinkClick r:id="rId2" invalidUrl="" action="" tgtFrame="" tooltip="" history="1" highlightClick="0" endSnd="0">
+                  <a:extLst>
+                    <a:ext uri="{A12FA001-AC4F-418D-AE19-62706E023703}">
+                      <ahyp:hlinkClr xmlns:ahyp="http://schemas.microsoft.com/office/drawing/2018/hyperlinkcolor" val="tx"/>
+                    </a:ext>
+                  </a:extLst>
+                </a:hlinkClick>
+              </a:rPr>
+              <a:t>youtu.be/IHZwWFHWa-w?t=312</a:t>
+            </a:r>
+            <a:endParaRPr lang="en-US" sz="900" dirty="0"/>
           </a:p>
         </p:txBody>
       </p:sp>
       <p:pic>
         <p:nvPicPr>
-          <p:cNvPr id="8" name="Image 1" descr="/Users/tsengchenghsun/Class/carClass/Claude outputs/第八週(10-29)/src/logo.png">    </p:cNvPr>
+          <p:cNvPr id="11" name="Image 1" descr="/Users/tsengchenghsun/Class/carClass/Claude outputs/第八週(10-29)/src/logo.png">    </p:cNvPr>
           <p:cNvPicPr>
             <a:picLocks noChangeAspect="1"/>
           </p:cNvPicPr>
           <p:nvPr/>
         </p:nvPicPr>
         <p:blipFill>
-          <a:blip r:embed="rId2"/>
+          <a:blip r:embed="rId3"/>
           <a:stretch>
             <a:fillRect/>
           </a:stretch>
@@ -12109,7 +12628,7 @@
       </p:pic>
       <p:sp>
         <p:nvSpPr>
-          <p:cNvPr id="9" name="Text 4"/>
+          <p:cNvPr id="12" name="Text 7"/>
           <p:cNvSpPr txBox="1"/>
           <p:nvPr/>
         </p:nvSpPr>
@@ -12148,7 +12667,7 @@
       </p:sp>
       <p:sp>
         <p:nvSpPr>
-          <p:cNvPr id="10" name="Text 5"/>
+          <p:cNvPr id="13" name="Text 8"/>
           <p:cNvSpPr txBox="1"/>
           <p:nvPr/>
         </p:nvSpPr>
@@ -12635,7 +13154,7 @@
         </p:nvSpPr>
         <p:spPr>
           <a:xfrm>
-            <a:off x="484632" y="2118484"/>
+            <a:off x="484632" y="1926460"/>
             <a:ext cx="8174736" cy="1523752"/>
           </a:xfrm>
           <a:prstGeom prst="rect">
@@ -12668,7 +13187,7 @@
         </p:blipFill>
         <p:spPr>
           <a:xfrm>
-            <a:off x="502920" y="2136772"/>
+            <a:off x="502920" y="1944748"/>
             <a:ext cx="8138160" cy="1487176"/>
           </a:xfrm>
           <a:prstGeom prst="rect">
@@ -12684,7 +13203,7 @@
         </p:nvSpPr>
         <p:spPr>
           <a:xfrm>
-            <a:off x="502920" y="4407408"/>
+            <a:off x="502920" y="4023360"/>
             <a:ext cx="8138160" cy="201168"/>
           </a:xfrm>
           <a:prstGeom prst="rect">
@@ -12715,16 +13234,172 @@
           </a:p>
         </p:txBody>
       </p:sp>
+      <p:sp>
+        <p:nvSpPr>
+          <p:cNvPr id="7" name="Shape 4"/>
+          <p:cNvSpPr/>
+          <p:nvPr/>
+        </p:nvSpPr>
+        <p:spPr>
+          <a:xfrm>
+            <a:off x="539496" y="4288536"/>
+            <a:ext cx="219456" cy="219456"/>
+          </a:xfrm>
+          <a:prstGeom prst="ellipse">
+            <a:avLst/>
+          </a:prstGeom>
+          <a:solidFill>
+            <a:srgbClr val="D9463E"/>
+          </a:solidFill>
+          <a:ln/>
+        </p:spPr>
+      </p:sp>
+      <p:sp>
+        <p:nvSpPr>
+          <p:cNvPr id="8" name="Text 5"/>
+          <p:cNvSpPr txBox="1"/>
+          <p:nvPr/>
+        </p:nvSpPr>
+        <p:spPr>
+          <a:xfrm>
+            <a:off x="539496" y="4315968"/>
+            <a:ext cx="219456" cy="164592"/>
+          </a:xfrm>
+          <a:prstGeom prst="rect">
+            <a:avLst/>
+          </a:prstGeom>
+          <a:noFill/>
+          <a:ln/>
+        </p:spPr>
+        <p:txBody>
+          <a:bodyPr wrap="square" lIns="0" tIns="0" rIns="0" bIns="0" rtlCol="0" anchor="ctr"/>
+          <a:lstStyle/>
+          <a:p>
+            <a:pPr algn="ctr" indent="0" marL="0">
+              <a:buNone/>
+            </a:pPr>
+            <a:r>
+              <a:rPr lang="en-US" sz="750" b="1" dirty="0">
+                <a:solidFill>
+                  <a:srgbClr val="FFFFFF"/>
+                </a:solidFill>
+                <a:latin typeface="Arial" pitchFamily="34" charset="0"/>
+                <a:ea typeface="Arial" pitchFamily="34" charset="-122"/>
+                <a:cs typeface="Arial" pitchFamily="34" charset="-120"/>
+              </a:rPr>
+              <a:t>▶</a:t>
+            </a:r>
+            <a:endParaRPr lang="en-US" sz="750" dirty="0"/>
+          </a:p>
+        </p:txBody>
+      </p:sp>
+      <p:sp>
+        <p:nvSpPr>
+          <p:cNvPr id="9" name="Text 6"/>
+          <p:cNvSpPr txBox="1"/>
+          <p:nvPr/>
+        </p:nvSpPr>
+        <p:spPr>
+          <a:xfrm>
+            <a:off x="832104" y="4261104"/>
+            <a:ext cx="7808976" cy="274320"/>
+          </a:xfrm>
+          <a:prstGeom prst="rect">
+            <a:avLst/>
+          </a:prstGeom>
+          <a:noFill/>
+          <a:ln/>
+        </p:spPr>
+        <p:txBody>
+          <a:bodyPr wrap="square" lIns="0" tIns="0" rIns="0" bIns="0" rtlCol="0" anchor="ctr"/>
+          <a:lstStyle/>
+          <a:p>
+            <a:pPr indent="0" marL="0">
+              <a:lnSpc>
+                <a:spcPct val="100000"/>
+              </a:lnSpc>
+              <a:buNone/>
+            </a:pPr>
+            <a:r>
+              <a:rPr lang="en-US" sz="900" b="1" u="sng" dirty="0">
+                <a:solidFill>
+                  <a:srgbClr val="0B1F3A"/>
+                </a:solidFill>
+                <a:latin typeface="Arial" pitchFamily="34" charset="0"/>
+                <a:ea typeface="Arial" pitchFamily="34" charset="-122"/>
+                <a:cs typeface="Arial" pitchFamily="34" charset="-120"/>
+                <a:hlinkClick r:id="rId2" invalidUrl="" action="" tgtFrame="" tooltip="" history="1" highlightClick="0" endSnd="0">
+                  <a:extLst>
+                    <a:ext uri="{A12FA001-AC4F-418D-AE19-62706E023703}">
+                      <ahyp:hlinkClr xmlns:ahyp="http://schemas.microsoft.com/office/drawing/2018/hyperlinkcolor" val="tx"/>
+                    </a:ext>
+                  </a:extLst>
+                </a:hlinkClick>
+              </a:rPr>
+              <a:t>Video: neural network, layer by layer (3Blue1Brown) · </a:t>
+            </a:r>
+            <a:pPr indent="0" marL="0">
+              <a:lnSpc>
+                <a:spcPct val="100000"/>
+              </a:lnSpc>
+              <a:buNone/>
+            </a:pPr>
+            <a:r>
+              <a:rPr lang="en-US" sz="900" b="1" u="sng" dirty="0">
+                <a:solidFill>
+                  <a:srgbClr val="0B1F3A"/>
+                </a:solidFill>
+                <a:latin typeface="微軟正黑體" pitchFamily="34" charset="0"/>
+                <a:ea typeface="微軟正黑體" pitchFamily="34" charset="-122"/>
+                <a:cs typeface="微軟正黑體" pitchFamily="34" charset="-120"/>
+                <a:hlinkClick r:id="rId2" invalidUrl="" action="" tgtFrame="" tooltip="" history="1" highlightClick="0" endSnd="0">
+                  <a:extLst>
+                    <a:ext uri="{A12FA001-AC4F-418D-AE19-62706E023703}">
+                      <ahyp:hlinkClr xmlns:ahyp="http://schemas.microsoft.com/office/drawing/2018/hyperlinkcolor" val="tx"/>
+                    </a:ext>
+                  </a:extLst>
+                </a:hlinkClick>
+              </a:rPr>
+              <a:t>影片：神經網路一層一層（3Blue1Brown）　5:32–8:39　</a:t>
+            </a:r>
+            <a:pPr indent="0" marL="0">
+              <a:lnSpc>
+                <a:spcPct val="100000"/>
+              </a:lnSpc>
+              <a:buNone/>
+            </a:pPr>
+            <a:r>
+              <a:rPr lang="en-US" sz="900" u="sng" dirty="0">
+                <a:solidFill>
+                  <a:srgbClr val="1F6FBF"/>
+                </a:solidFill>
+                <a:latin typeface="Arial" pitchFamily="34" charset="0"/>
+                <a:ea typeface="Arial" pitchFamily="34" charset="-122"/>
+                <a:cs typeface="Arial" pitchFamily="34" charset="-120"/>
+                <a:hlinkClick r:id="rId2" invalidUrl="" action="" tgtFrame="" tooltip="" history="1" highlightClick="0" endSnd="0">
+                  <a:extLst>
+                    <a:ext uri="{A12FA001-AC4F-418D-AE19-62706E023703}">
+                      <ahyp:hlinkClr xmlns:ahyp="http://schemas.microsoft.com/office/drawing/2018/hyperlinkcolor" val="tx"/>
+                    </a:ext>
+                  </a:extLst>
+                </a:hlinkClick>
+              </a:rPr>
+              <a:t>youtu.be/aircAruvnKk?t=332</a:t>
+            </a:r>
+            <a:endParaRPr lang="en-US" sz="900" dirty="0"/>
+          </a:p>
+        </p:txBody>
+      </p:sp>
       <p:pic>
         <p:nvPicPr>
-          <p:cNvPr id="8" name="Image 1" descr="/Users/tsengchenghsun/Class/carClass/Claude outputs/第八週(10-29)/src/logo.png">    </p:cNvPr>
+          <p:cNvPr id="11" name="Image 1" descr="/Users/tsengchenghsun/Class/carClass/Claude outputs/第八週(10-29)/src/logo.png">    </p:cNvPr>
           <p:cNvPicPr>
             <a:picLocks noChangeAspect="1"/>
           </p:cNvPicPr>
           <p:nvPr/>
         </p:nvPicPr>
         <p:blipFill>
-          <a:blip r:embed="rId2"/>
+          <a:blip r:embed="rId3"/>
           <a:stretch>
             <a:fillRect/>
           </a:stretch>
@@ -12741,7 +13416,7 @@
       </p:pic>
       <p:sp>
         <p:nvSpPr>
-          <p:cNvPr id="9" name="Text 4"/>
+          <p:cNvPr id="12" name="Text 7"/>
           <p:cNvSpPr txBox="1"/>
           <p:nvPr/>
         </p:nvSpPr>
@@ -12780,7 +13455,7 @@
       </p:sp>
       <p:sp>
         <p:nvSpPr>
-          <p:cNvPr id="10" name="Text 5"/>
+          <p:cNvPr id="13" name="Text 8"/>
           <p:cNvSpPr txBox="1"/>
           <p:nvPr/>
         </p:nvSpPr>
@@ -12889,7 +13564,7 @@
         </p:nvSpPr>
         <p:spPr>
           <a:xfrm>
-            <a:off x="502920" y="1412748"/>
+            <a:off x="502920" y="1229868"/>
             <a:ext cx="5120640" cy="2514600"/>
           </a:xfrm>
           <a:prstGeom prst="roundRect">
@@ -12924,7 +13599,7 @@
         </p:blipFill>
         <p:spPr>
           <a:xfrm>
-            <a:off x="576072" y="1711985"/>
+            <a:off x="576072" y="1529105"/>
             <a:ext cx="4974336" cy="1733245"/>
           </a:xfrm>
           <a:prstGeom prst="rect">
@@ -12940,7 +13615,7 @@
         </p:nvSpPr>
         <p:spPr>
           <a:xfrm>
-            <a:off x="576072" y="3707892"/>
+            <a:off x="576072" y="3525012"/>
             <a:ext cx="4974336" cy="182880"/>
           </a:xfrm>
           <a:prstGeom prst="rect">
@@ -13079,6 +13754,165 @@
       <p:sp>
         <p:nvSpPr>
           <p:cNvPr id="7" name="Shape 4"/>
+          <p:cNvSpPr/>
+          <p:nvPr/>
+        </p:nvSpPr>
+        <p:spPr>
+          <a:xfrm>
+            <a:off x="539496" y="3845052"/>
+            <a:ext cx="219456" cy="219456"/>
+          </a:xfrm>
+          <a:prstGeom prst="ellipse">
+            <a:avLst/>
+          </a:prstGeom>
+          <a:solidFill>
+            <a:srgbClr val="D9463E"/>
+          </a:solidFill>
+          <a:ln/>
+        </p:spPr>
+      </p:sp>
+      <p:sp>
+        <p:nvSpPr>
+          <p:cNvPr id="8" name="Text 5"/>
+          <p:cNvSpPr txBox="1"/>
+          <p:nvPr/>
+        </p:nvSpPr>
+        <p:spPr>
+          <a:xfrm>
+            <a:off x="539496" y="3872484"/>
+            <a:ext cx="219456" cy="164592"/>
+          </a:xfrm>
+          <a:prstGeom prst="rect">
+            <a:avLst/>
+          </a:prstGeom>
+          <a:noFill/>
+          <a:ln/>
+        </p:spPr>
+        <p:txBody>
+          <a:bodyPr wrap="square" lIns="0" tIns="0" rIns="0" bIns="0" rtlCol="0" anchor="ctr"/>
+          <a:lstStyle/>
+          <a:p>
+            <a:pPr algn="ctr" indent="0" marL="0">
+              <a:buNone/>
+            </a:pPr>
+            <a:r>
+              <a:rPr lang="en-US" sz="750" b="1" dirty="0">
+                <a:solidFill>
+                  <a:srgbClr val="FFFFFF"/>
+                </a:solidFill>
+                <a:latin typeface="Arial" pitchFamily="34" charset="0"/>
+                <a:ea typeface="Arial" pitchFamily="34" charset="-122"/>
+                <a:cs typeface="Arial" pitchFamily="34" charset="-120"/>
+              </a:rPr>
+              <a:t>▶</a:t>
+            </a:r>
+            <a:endParaRPr lang="en-US" sz="750" dirty="0"/>
+          </a:p>
+        </p:txBody>
+      </p:sp>
+      <p:sp>
+        <p:nvSpPr>
+          <p:cNvPr id="9" name="Text 6"/>
+          <p:cNvSpPr txBox="1"/>
+          <p:nvPr/>
+        </p:nvSpPr>
+        <p:spPr>
+          <a:xfrm>
+            <a:off x="832104" y="3799332"/>
+            <a:ext cx="4791456" cy="310896"/>
+          </a:xfrm>
+          <a:prstGeom prst="rect">
+            <a:avLst/>
+          </a:prstGeom>
+          <a:noFill/>
+          <a:ln/>
+        </p:spPr>
+        <p:txBody>
+          <a:bodyPr wrap="square" lIns="0" tIns="0" rIns="0" bIns="0" rtlCol="0" anchor="ctr"/>
+          <a:lstStyle/>
+          <a:p>
+            <a:pPr indent="0" marL="0">
+              <a:lnSpc>
+                <a:spcPct val="100000"/>
+              </a:lnSpc>
+              <a:buNone/>
+            </a:pPr>
+            <a:r>
+              <a:rPr lang="en-US" sz="850" b="1" u="sng" dirty="0">
+                <a:solidFill>
+                  <a:srgbClr val="0B1F3A"/>
+                </a:solidFill>
+                <a:latin typeface="Arial" pitchFamily="34" charset="0"/>
+                <a:ea typeface="Arial" pitchFamily="34" charset="-122"/>
+                <a:cs typeface="Arial" pitchFamily="34" charset="-120"/>
+                <a:hlinkClick r:id="rId2" invalidUrl="" action="" tgtFrame="" tooltip="" history="1" highlightClick="0" endSnd="0">
+                  <a:extLst>
+                    <a:ext uri="{A12FA001-AC4F-418D-AE19-62706E023703}">
+                      <ahyp:hlinkClr xmlns:ahyp="http://schemas.microsoft.com/office/drawing/2018/hyperlinkcolor" val="tx"/>
+                    </a:ext>
+                  </a:extLst>
+                </a:hlinkClick>
+              </a:rPr>
+              <a:t>Video: YOLO, object detection in real time (TED, Joseph Redmon)　0:12–4:30</a:t>
+            </a:r>
+            <a:endParaRPr lang="en-US" sz="850" dirty="0"/>
+          </a:p>
+          <a:p>
+            <a:pPr indent="0" marL="0">
+              <a:lnSpc>
+                <a:spcPct val="100000"/>
+              </a:lnSpc>
+              <a:buNone/>
+            </a:pPr>
+            <a:r>
+              <a:rPr lang="en-US" sz="850" b="1" u="sng" dirty="0">
+                <a:solidFill>
+                  <a:srgbClr val="0B1F3A"/>
+                </a:solidFill>
+                <a:latin typeface="微軟正黑體" pitchFamily="34" charset="0"/>
+                <a:ea typeface="微軟正黑體" pitchFamily="34" charset="-122"/>
+                <a:cs typeface="微軟正黑體" pitchFamily="34" charset="-120"/>
+                <a:hlinkClick r:id="rId2" invalidUrl="" action="" tgtFrame="" tooltip="" history="1" highlightClick="0" endSnd="0">
+                  <a:extLst>
+                    <a:ext uri="{A12FA001-AC4F-418D-AE19-62706E023703}">
+                      <ahyp:hlinkClr xmlns:ahyp="http://schemas.microsoft.com/office/drawing/2018/hyperlinkcolor" val="tx"/>
+                    </a:ext>
+                  </a:extLst>
+                </a:hlinkClick>
+              </a:rPr>
+              <a:t>影片：YOLO 即時物件偵測（TED，YOLO 作者）　</a:t>
+            </a:r>
+            <a:pPr indent="0" marL="0">
+              <a:lnSpc>
+                <a:spcPct val="100000"/>
+              </a:lnSpc>
+              <a:buNone/>
+            </a:pPr>
+            <a:r>
+              <a:rPr lang="en-US" sz="850" u="sng" dirty="0">
+                <a:solidFill>
+                  <a:srgbClr val="1F6FBF"/>
+                </a:solidFill>
+                <a:latin typeface="Arial" pitchFamily="34" charset="0"/>
+                <a:ea typeface="Arial" pitchFamily="34" charset="-122"/>
+                <a:cs typeface="Arial" pitchFamily="34" charset="-120"/>
+                <a:hlinkClick r:id="rId2" invalidUrl="" action="" tgtFrame="" tooltip="" history="1" highlightClick="0" endSnd="0">
+                  <a:extLst>
+                    <a:ext uri="{A12FA001-AC4F-418D-AE19-62706E023703}">
+                      <ahyp:hlinkClr xmlns:ahyp="http://schemas.microsoft.com/office/drawing/2018/hyperlinkcolor" val="tx"/>
+                    </a:ext>
+                  </a:extLst>
+                </a:hlinkClick>
+              </a:rPr>
+              <a:t>youtu.be/Cgxsv1riJhI?t=12</a:t>
+            </a:r>
+            <a:endParaRPr lang="en-US" sz="850" dirty="0"/>
+          </a:p>
+        </p:txBody>
+      </p:sp>
+      <p:sp>
+        <p:nvSpPr>
+          <p:cNvPr id="10" name="Shape 7"/>
           <p:cNvSpPr/>
           <p:nvPr/>
         </p:nvSpPr>
@@ -13105,7 +13939,7 @@
       </p:sp>
       <p:sp>
         <p:nvSpPr>
-          <p:cNvPr id="8" name="Text 5"/>
+          <p:cNvPr id="11" name="Text 8"/>
           <p:cNvSpPr txBox="1"/>
           <p:nvPr/>
         </p:nvSpPr>
@@ -13201,14 +14035,14 @@
       </p:sp>
       <p:pic>
         <p:nvPicPr>
-          <p:cNvPr id="10" name="Image 1" descr="/Users/tsengchenghsun/Class/carClass/Claude outputs/第八週(10-29)/src/logo.png">    </p:cNvPr>
+          <p:cNvPr id="13" name="Image 1" descr="/Users/tsengchenghsun/Class/carClass/Claude outputs/第八週(10-29)/src/logo.png">    </p:cNvPr>
           <p:cNvPicPr>
             <a:picLocks noChangeAspect="1"/>
           </p:cNvPicPr>
           <p:nvPr/>
         </p:nvPicPr>
         <p:blipFill>
-          <a:blip r:embed="rId2"/>
+          <a:blip r:embed="rId3"/>
           <a:stretch>
             <a:fillRect/>
           </a:stretch>
@@ -13225,7 +14059,7 @@
       </p:pic>
       <p:sp>
         <p:nvSpPr>
-          <p:cNvPr id="11" name="Text 6"/>
+          <p:cNvPr id="14" name="Text 9"/>
           <p:cNvSpPr txBox="1"/>
           <p:nvPr/>
         </p:nvSpPr>
@@ -13264,7 +14098,7 @@
       </p:sp>
       <p:sp>
         <p:nvSpPr>
-          <p:cNvPr id="12" name="Text 7"/>
+          <p:cNvPr id="15" name="Text 10"/>
           <p:cNvSpPr txBox="1"/>
           <p:nvPr/>
         </p:nvSpPr>
@@ -14719,16 +15553,172 @@
           </a:p>
         </p:txBody>
       </p:sp>
+      <p:sp>
+        <p:nvSpPr>
+          <p:cNvPr id="5" name="Shape 2"/>
+          <p:cNvSpPr/>
+          <p:nvPr/>
+        </p:nvSpPr>
+        <p:spPr>
+          <a:xfrm>
+            <a:off x="539496" y="3653122"/>
+            <a:ext cx="219456" cy="219456"/>
+          </a:xfrm>
+          <a:prstGeom prst="ellipse">
+            <a:avLst/>
+          </a:prstGeom>
+          <a:solidFill>
+            <a:srgbClr val="D9463E"/>
+          </a:solidFill>
+          <a:ln/>
+        </p:spPr>
+      </p:sp>
+      <p:sp>
+        <p:nvSpPr>
+          <p:cNvPr id="6" name="Text 3"/>
+          <p:cNvSpPr txBox="1"/>
+          <p:nvPr/>
+        </p:nvSpPr>
+        <p:spPr>
+          <a:xfrm>
+            <a:off x="539496" y="3680554"/>
+            <a:ext cx="219456" cy="164592"/>
+          </a:xfrm>
+          <a:prstGeom prst="rect">
+            <a:avLst/>
+          </a:prstGeom>
+          <a:noFill/>
+          <a:ln/>
+        </p:spPr>
+        <p:txBody>
+          <a:bodyPr wrap="square" lIns="0" tIns="0" rIns="0" bIns="0" rtlCol="0" anchor="ctr"/>
+          <a:lstStyle/>
+          <a:p>
+            <a:pPr algn="ctr" indent="0" marL="0">
+              <a:buNone/>
+            </a:pPr>
+            <a:r>
+              <a:rPr lang="en-US" sz="750" b="1" dirty="0">
+                <a:solidFill>
+                  <a:srgbClr val="FFFFFF"/>
+                </a:solidFill>
+                <a:latin typeface="Arial" pitchFamily="34" charset="0"/>
+                <a:ea typeface="Arial" pitchFamily="34" charset="-122"/>
+                <a:cs typeface="Arial" pitchFamily="34" charset="-120"/>
+              </a:rPr>
+              <a:t>▶</a:t>
+            </a:r>
+            <a:endParaRPr lang="en-US" sz="750" dirty="0"/>
+          </a:p>
+        </p:txBody>
+      </p:sp>
+      <p:sp>
+        <p:nvSpPr>
+          <p:cNvPr id="7" name="Text 4"/>
+          <p:cNvSpPr txBox="1"/>
+          <p:nvPr/>
+        </p:nvSpPr>
+        <p:spPr>
+          <a:xfrm>
+            <a:off x="832104" y="3625690"/>
+            <a:ext cx="7808976" cy="274320"/>
+          </a:xfrm>
+          <a:prstGeom prst="rect">
+            <a:avLst/>
+          </a:prstGeom>
+          <a:noFill/>
+          <a:ln/>
+        </p:spPr>
+        <p:txBody>
+          <a:bodyPr wrap="square" lIns="0" tIns="0" rIns="0" bIns="0" rtlCol="0" anchor="ctr"/>
+          <a:lstStyle/>
+          <a:p>
+            <a:pPr indent="0" marL="0">
+              <a:lnSpc>
+                <a:spcPct val="100000"/>
+              </a:lnSpc>
+              <a:buNone/>
+            </a:pPr>
+            <a:r>
+              <a:rPr lang="en-US" sz="900" b="1" u="sng" dirty="0">
+                <a:solidFill>
+                  <a:srgbClr val="0B1F3A"/>
+                </a:solidFill>
+                <a:latin typeface="Arial" pitchFamily="34" charset="0"/>
+                <a:ea typeface="Arial" pitchFamily="34" charset="-122"/>
+                <a:cs typeface="Arial" pitchFamily="34" charset="-120"/>
+                <a:hlinkClick r:id="rId1" invalidUrl="" action="" tgtFrame="" tooltip="" history="1" highlightClick="0" endSnd="0">
+                  <a:extLst>
+                    <a:ext uri="{A12FA001-AC4F-418D-AE19-62706E023703}">
+                      <ahyp:hlinkClr xmlns:ahyp="http://schemas.microsoft.com/office/drawing/2018/hyperlinkcolor" val="tx"/>
+                    </a:ext>
+                  </a:extLst>
+                </a:hlinkClick>
+              </a:rPr>
+              <a:t>Video: phân vùng từng điểm ảnh (NVIDIA DRIVE Labs) · </a:t>
+            </a:r>
+            <a:pPr indent="0" marL="0">
+              <a:lnSpc>
+                <a:spcPct val="100000"/>
+              </a:lnSpc>
+              <a:buNone/>
+            </a:pPr>
+            <a:r>
+              <a:rPr lang="en-US" sz="900" b="1" u="sng" dirty="0">
+                <a:solidFill>
+                  <a:srgbClr val="0B1F3A"/>
+                </a:solidFill>
+                <a:latin typeface="微軟正黑體" pitchFamily="34" charset="0"/>
+                <a:ea typeface="微軟正黑體" pitchFamily="34" charset="-122"/>
+                <a:cs typeface="微軟正黑體" pitchFamily="34" charset="-120"/>
+                <a:hlinkClick r:id="rId1" invalidUrl="" action="" tgtFrame="" tooltip="" history="1" highlightClick="0" endSnd="0">
+                  <a:extLst>
+                    <a:ext uri="{A12FA001-AC4F-418D-AE19-62706E023703}">
+                      <ahyp:hlinkClr xmlns:ahyp="http://schemas.microsoft.com/office/drawing/2018/hyperlinkcolor" val="tx"/>
+                    </a:ext>
+                  </a:extLst>
+                </a:hlinkClick>
+              </a:rPr>
+              <a:t>影片：一個像素一個像素地分割（NVIDIA DRIVE Labs）　1:27　</a:t>
+            </a:r>
+            <a:pPr indent="0" marL="0">
+              <a:lnSpc>
+                <a:spcPct val="100000"/>
+              </a:lnSpc>
+              <a:buNone/>
+            </a:pPr>
+            <a:r>
+              <a:rPr lang="en-US" sz="900" u="sng" dirty="0">
+                <a:solidFill>
+                  <a:srgbClr val="1F6FBF"/>
+                </a:solidFill>
+                <a:latin typeface="Arial" pitchFamily="34" charset="0"/>
+                <a:ea typeface="Arial" pitchFamily="34" charset="-122"/>
+                <a:cs typeface="Arial" pitchFamily="34" charset="-120"/>
+                <a:hlinkClick r:id="rId1" invalidUrl="" action="" tgtFrame="" tooltip="" history="1" highlightClick="0" endSnd="0">
+                  <a:extLst>
+                    <a:ext uri="{A12FA001-AC4F-418D-AE19-62706E023703}">
+                      <ahyp:hlinkClr xmlns:ahyp="http://schemas.microsoft.com/office/drawing/2018/hyperlinkcolor" val="tx"/>
+                    </a:ext>
+                  </a:extLst>
+                </a:hlinkClick>
+              </a:rPr>
+              <a:t>youtu.be/HS1wV9NMLr8</a:t>
+            </a:r>
+            <a:endParaRPr lang="en-US" sz="900" dirty="0"/>
+          </a:p>
+        </p:txBody>
+      </p:sp>
       <p:pic>
         <p:nvPicPr>
-          <p:cNvPr id="6" name="Image 0" descr="/Users/tsengchenghsun/Class/carClass/Claude outputs/第八週(10-29)/src/logo.png">    </p:cNvPr>
+          <p:cNvPr id="9" name="Image 0" descr="/Users/tsengchenghsun/Class/carClass/Claude outputs/第八週(10-29)/src/logo.png">    </p:cNvPr>
           <p:cNvPicPr>
             <a:picLocks noChangeAspect="1"/>
           </p:cNvPicPr>
           <p:nvPr/>
         </p:nvPicPr>
         <p:blipFill>
-          <a:blip r:embed="rId1"/>
+          <a:blip r:embed="rId2"/>
           <a:stretch>
             <a:fillRect/>
           </a:stretch>
@@ -14745,7 +15735,7 @@
       </p:pic>
       <p:sp>
         <p:nvSpPr>
-          <p:cNvPr id="7" name="Text 2"/>
+          <p:cNvPr id="10" name="Text 5"/>
           <p:cNvSpPr txBox="1"/>
           <p:nvPr/>
         </p:nvSpPr>
@@ -14784,7 +15774,7 @@
       </p:sp>
       <p:sp>
         <p:nvSpPr>
-          <p:cNvPr id="8" name="Text 3"/>
+          <p:cNvPr id="11" name="Text 6"/>
           <p:cNvSpPr txBox="1"/>
           <p:nvPr/>
         </p:nvSpPr>
@@ -14955,12 +15945,12 @@
         </p:nvSpPr>
         <p:spPr>
           <a:xfrm>
-            <a:off x="502920" y="1310492"/>
-            <a:ext cx="3931920" cy="2300800"/>
+            <a:off x="876451" y="1310492"/>
+            <a:ext cx="3558389" cy="2164228"/>
           </a:xfrm>
           <a:prstGeom prst="roundRect">
             <a:avLst>
-              <a:gd name="adj" fmla="val 3974"/>
+              <a:gd name="adj" fmla="val 4225"/>
             </a:avLst>
           </a:prstGeom>
           <a:solidFill>
@@ -14982,8 +15972,8 @@
         </p:nvSpPr>
         <p:spPr>
           <a:xfrm>
-            <a:off x="594360" y="1401932"/>
-            <a:ext cx="3749040" cy="472857"/>
+            <a:off x="967891" y="1401932"/>
+            <a:ext cx="3375509" cy="472857"/>
           </a:xfrm>
           <a:prstGeom prst="roundRect">
             <a:avLst>
@@ -15004,8 +15994,8 @@
         </p:nvSpPr>
         <p:spPr>
           <a:xfrm>
-            <a:off x="667512" y="1429364"/>
-            <a:ext cx="3602736" cy="436281"/>
+            <a:off x="1041043" y="1429364"/>
+            <a:ext cx="3229205" cy="436281"/>
           </a:xfrm>
           <a:prstGeom prst="rect">
             <a:avLst/>
@@ -15074,8 +16064,8 @@
         </p:blipFill>
         <p:spPr>
           <a:xfrm>
-            <a:off x="594360" y="1929653"/>
-            <a:ext cx="3749040" cy="1370743"/>
+            <a:off x="967891" y="1929653"/>
+            <a:ext cx="3375509" cy="1234171"/>
           </a:xfrm>
           <a:prstGeom prst="rect">
             <a:avLst/>
@@ -15090,8 +16080,8 @@
         </p:nvSpPr>
         <p:spPr>
           <a:xfrm>
-            <a:off x="594360" y="3318684"/>
-            <a:ext cx="3749040" cy="182880"/>
+            <a:off x="967891" y="3182112"/>
+            <a:ext cx="3375509" cy="182880"/>
           </a:xfrm>
           <a:prstGeom prst="rect">
             <a:avLst/>
@@ -15130,11 +16120,11 @@
         <p:spPr>
           <a:xfrm>
             <a:off x="4709160" y="1310492"/>
-            <a:ext cx="3931920" cy="2300800"/>
+            <a:ext cx="3558389" cy="2164228"/>
           </a:xfrm>
           <a:prstGeom prst="roundRect">
             <a:avLst>
-              <a:gd name="adj" fmla="val 3974"/>
+              <a:gd name="adj" fmla="val 4225"/>
             </a:avLst>
           </a:prstGeom>
           <a:solidFill>
@@ -15157,7 +16147,7 @@
         <p:spPr>
           <a:xfrm>
             <a:off x="4800600" y="1401932"/>
-            <a:ext cx="3749040" cy="472857"/>
+            <a:ext cx="3375509" cy="472857"/>
           </a:xfrm>
           <a:prstGeom prst="roundRect">
             <a:avLst>
@@ -15179,7 +16169,7 @@
         <p:spPr>
           <a:xfrm>
             <a:off x="4873752" y="1429364"/>
-            <a:ext cx="3602736" cy="436281"/>
+            <a:ext cx="3229205" cy="436281"/>
           </a:xfrm>
           <a:prstGeom prst="rect">
             <a:avLst/>
@@ -15249,7 +16239,7 @@
         <p:spPr>
           <a:xfrm>
             <a:off x="4800600" y="1929653"/>
-            <a:ext cx="3749040" cy="1370743"/>
+            <a:ext cx="3375509" cy="1234171"/>
           </a:xfrm>
           <a:prstGeom prst="rect">
             <a:avLst/>
@@ -15264,8 +16254,8 @@
         </p:nvSpPr>
         <p:spPr>
           <a:xfrm>
-            <a:off x="4800600" y="3318684"/>
-            <a:ext cx="3749040" cy="182880"/>
+            <a:off x="4800600" y="3182112"/>
+            <a:ext cx="3375509" cy="182880"/>
           </a:xfrm>
           <a:prstGeom prst="rect">
             <a:avLst/>
@@ -15303,7 +16293,163 @@
         </p:nvSpPr>
         <p:spPr>
           <a:xfrm>
-            <a:off x="502920" y="3757596"/>
+            <a:off x="539496" y="3575304"/>
+            <a:ext cx="219456" cy="219456"/>
+          </a:xfrm>
+          <a:prstGeom prst="ellipse">
+            <a:avLst/>
+          </a:prstGeom>
+          <a:solidFill>
+            <a:srgbClr val="D9463E"/>
+          </a:solidFill>
+          <a:ln/>
+        </p:spPr>
+      </p:sp>
+      <p:sp>
+        <p:nvSpPr>
+          <p:cNvPr id="15" name="Text 11"/>
+          <p:cNvSpPr txBox="1"/>
+          <p:nvPr/>
+        </p:nvSpPr>
+        <p:spPr>
+          <a:xfrm>
+            <a:off x="539496" y="3602736"/>
+            <a:ext cx="219456" cy="164592"/>
+          </a:xfrm>
+          <a:prstGeom prst="rect">
+            <a:avLst/>
+          </a:prstGeom>
+          <a:noFill/>
+          <a:ln/>
+        </p:spPr>
+        <p:txBody>
+          <a:bodyPr wrap="square" lIns="0" tIns="0" rIns="0" bIns="0" rtlCol="0" anchor="ctr"/>
+          <a:lstStyle/>
+          <a:p>
+            <a:pPr algn="ctr" indent="0" marL="0">
+              <a:buNone/>
+            </a:pPr>
+            <a:r>
+              <a:rPr lang="en-US" sz="750" b="1" dirty="0">
+                <a:solidFill>
+                  <a:srgbClr val="FFFFFF"/>
+                </a:solidFill>
+                <a:latin typeface="Arial" pitchFamily="34" charset="0"/>
+                <a:ea typeface="Arial" pitchFamily="34" charset="-122"/>
+                <a:cs typeface="Arial" pitchFamily="34" charset="-120"/>
+              </a:rPr>
+              <a:t>▶</a:t>
+            </a:r>
+            <a:endParaRPr lang="en-US" sz="750" dirty="0"/>
+          </a:p>
+        </p:txBody>
+      </p:sp>
+      <p:sp>
+        <p:nvSpPr>
+          <p:cNvPr id="16" name="Text 12"/>
+          <p:cNvSpPr txBox="1"/>
+          <p:nvPr/>
+        </p:nvSpPr>
+        <p:spPr>
+          <a:xfrm>
+            <a:off x="832104" y="3547872"/>
+            <a:ext cx="7808976" cy="274320"/>
+          </a:xfrm>
+          <a:prstGeom prst="rect">
+            <a:avLst/>
+          </a:prstGeom>
+          <a:noFill/>
+          <a:ln/>
+        </p:spPr>
+        <p:txBody>
+          <a:bodyPr wrap="square" lIns="0" tIns="0" rIns="0" bIns="0" rtlCol="0" anchor="ctr"/>
+          <a:lstStyle/>
+          <a:p>
+            <a:pPr indent="0" marL="0">
+              <a:lnSpc>
+                <a:spcPct val="100000"/>
+              </a:lnSpc>
+              <a:buNone/>
+            </a:pPr>
+            <a:r>
+              <a:rPr lang="en-US" sz="900" b="1" u="sng" dirty="0">
+                <a:solidFill>
+                  <a:srgbClr val="0B1F3A"/>
+                </a:solidFill>
+                <a:latin typeface="Arial" pitchFamily="34" charset="0"/>
+                <a:ea typeface="Arial" pitchFamily="34" charset="-122"/>
+                <a:cs typeface="Arial" pitchFamily="34" charset="-120"/>
+                <a:hlinkClick r:id="rId3" invalidUrl="" action="" tgtFrame="" tooltip="" history="1" highlightClick="0" endSnd="0">
+                  <a:extLst>
+                    <a:ext uri="{A12FA001-AC4F-418D-AE19-62706E023703}">
+                      <ahyp:hlinkClr xmlns:ahyp="http://schemas.microsoft.com/office/drawing/2018/hyperlinkcolor" val="tx"/>
+                    </a:ext>
+                  </a:extLst>
+                </a:hlinkClick>
+              </a:rPr>
+              <a:t>Video: hạ ngưỡng để thấy thêm người (TED, Joseph Redmon) · </a:t>
+            </a:r>
+            <a:pPr indent="0" marL="0">
+              <a:lnSpc>
+                <a:spcPct val="100000"/>
+              </a:lnSpc>
+              <a:buNone/>
+            </a:pPr>
+            <a:r>
+              <a:rPr lang="en-US" sz="900" b="1" u="sng" dirty="0">
+                <a:solidFill>
+                  <a:srgbClr val="0B1F3A"/>
+                </a:solidFill>
+                <a:latin typeface="微軟正黑體" pitchFamily="34" charset="0"/>
+                <a:ea typeface="微軟正黑體" pitchFamily="34" charset="-122"/>
+                <a:cs typeface="微軟正黑體" pitchFamily="34" charset="-120"/>
+                <a:hlinkClick r:id="rId3" invalidUrl="" action="" tgtFrame="" tooltip="" history="1" highlightClick="0" endSnd="0">
+                  <a:extLst>
+                    <a:ext uri="{A12FA001-AC4F-418D-AE19-62706E023703}">
+                      <ahyp:hlinkClr xmlns:ahyp="http://schemas.microsoft.com/office/drawing/2018/hyperlinkcolor" val="tx"/>
+                    </a:ext>
+                  </a:extLst>
+                </a:hlinkClick>
+              </a:rPr>
+              <a:t>影片：調低門檻，找到更多人（TED）　5:10–5:48　</a:t>
+            </a:r>
+            <a:pPr indent="0" marL="0">
+              <a:lnSpc>
+                <a:spcPct val="100000"/>
+              </a:lnSpc>
+              <a:buNone/>
+            </a:pPr>
+            <a:r>
+              <a:rPr lang="en-US" sz="900" u="sng" dirty="0">
+                <a:solidFill>
+                  <a:srgbClr val="1F6FBF"/>
+                </a:solidFill>
+                <a:latin typeface="Arial" pitchFamily="34" charset="0"/>
+                <a:ea typeface="Arial" pitchFamily="34" charset="-122"/>
+                <a:cs typeface="Arial" pitchFamily="34" charset="-120"/>
+                <a:hlinkClick r:id="rId3" invalidUrl="" action="" tgtFrame="" tooltip="" history="1" highlightClick="0" endSnd="0">
+                  <a:extLst>
+                    <a:ext uri="{A12FA001-AC4F-418D-AE19-62706E023703}">
+                      <ahyp:hlinkClr xmlns:ahyp="http://schemas.microsoft.com/office/drawing/2018/hyperlinkcolor" val="tx"/>
+                    </a:ext>
+                  </a:extLst>
+                </a:hlinkClick>
+              </a:rPr>
+              <a:t>youtu.be/Cgxsv1riJhI?t=310</a:t>
+            </a:r>
+            <a:endParaRPr lang="en-US" sz="900" dirty="0"/>
+          </a:p>
+        </p:txBody>
+      </p:sp>
+      <p:sp>
+        <p:nvSpPr>
+          <p:cNvPr id="17" name="Shape 13"/>
+          <p:cNvSpPr/>
+          <p:nvPr/>
+        </p:nvSpPr>
+        <p:spPr>
+          <a:xfrm>
+            <a:off x="502920" y="3931920"/>
             <a:ext cx="8138160" cy="566928"/>
           </a:xfrm>
           <a:prstGeom prst="roundRect">
@@ -15324,13 +16470,13 @@
       </p:sp>
       <p:sp>
         <p:nvSpPr>
-          <p:cNvPr id="15" name="Text 11"/>
+          <p:cNvPr id="18" name="Text 14"/>
           <p:cNvSpPr txBox="1"/>
           <p:nvPr/>
         </p:nvSpPr>
         <p:spPr>
           <a:xfrm>
-            <a:off x="685800" y="3821604"/>
+            <a:off x="685800" y="3995928"/>
             <a:ext cx="7772400" cy="457200"/>
           </a:xfrm>
           <a:prstGeom prst="rect">
@@ -15386,7 +16532,7 @@
       </p:sp>
       <p:sp>
         <p:nvSpPr>
-          <p:cNvPr id="16" name="Shape 12"/>
+          <p:cNvPr id="19" name="Shape 15"/>
           <p:cNvSpPr/>
           <p:nvPr/>
         </p:nvSpPr>
@@ -15413,7 +16559,7 @@
       </p:sp>
       <p:sp>
         <p:nvSpPr>
-          <p:cNvPr id="17" name="Text 13"/>
+          <p:cNvPr id="20" name="Text 16"/>
           <p:cNvSpPr txBox="1"/>
           <p:nvPr/>
         </p:nvSpPr>
@@ -15509,14 +16655,14 @@
       </p:sp>
       <p:pic>
         <p:nvPicPr>
-          <p:cNvPr id="19" name="Image 2" descr="/Users/tsengchenghsun/Class/carClass/Claude outputs/第八週(10-29)/src/logo.png">    </p:cNvPr>
+          <p:cNvPr id="22" name="Image 2" descr="/Users/tsengchenghsun/Class/carClass/Claude outputs/第八週(10-29)/src/logo.png">    </p:cNvPr>
           <p:cNvPicPr>
             <a:picLocks noChangeAspect="1"/>
           </p:cNvPicPr>
           <p:nvPr/>
         </p:nvPicPr>
         <p:blipFill>
-          <a:blip r:embed="rId3"/>
+          <a:blip r:embed="rId4"/>
           <a:stretch>
             <a:fillRect/>
           </a:stretch>
@@ -15533,7 +16679,7 @@
       </p:pic>
       <p:sp>
         <p:nvSpPr>
-          <p:cNvPr id="20" name="Text 14"/>
+          <p:cNvPr id="23" name="Text 17"/>
           <p:cNvSpPr txBox="1"/>
           <p:nvPr/>
         </p:nvSpPr>
@@ -15572,7 +16718,7 @@
       </p:sp>
       <p:sp>
         <p:nvSpPr>
-          <p:cNvPr id="21" name="Text 15"/>
+          <p:cNvPr id="24" name="Text 18"/>
           <p:cNvSpPr txBox="1"/>
           <p:nvPr/>
         </p:nvSpPr>
@@ -18778,7 +19924,7 @@
         </p:nvSpPr>
         <p:spPr>
           <a:xfrm>
-            <a:off x="502920" y="1412748"/>
+            <a:off x="502920" y="1229868"/>
             <a:ext cx="5120640" cy="2514600"/>
           </a:xfrm>
           <a:prstGeom prst="roundRect">
@@ -18813,7 +19959,7 @@
         </p:blipFill>
         <p:spPr>
           <a:xfrm>
-            <a:off x="576072" y="1669237"/>
+            <a:off x="576072" y="1486357"/>
             <a:ext cx="4974336" cy="1818742"/>
           </a:xfrm>
           <a:prstGeom prst="rect">
@@ -18829,7 +19975,7 @@
         </p:nvSpPr>
         <p:spPr>
           <a:xfrm>
-            <a:off x="576072" y="3707892"/>
+            <a:off x="576072" y="3525012"/>
             <a:ext cx="4974336" cy="182880"/>
           </a:xfrm>
           <a:prstGeom prst="rect">
@@ -18965,16 +20111,175 @@
           </a:p>
         </p:txBody>
       </p:sp>
+      <p:sp>
+        <p:nvSpPr>
+          <p:cNvPr id="7" name="Shape 4"/>
+          <p:cNvSpPr/>
+          <p:nvPr/>
+        </p:nvSpPr>
+        <p:spPr>
+          <a:xfrm>
+            <a:off x="539496" y="3845052"/>
+            <a:ext cx="219456" cy="219456"/>
+          </a:xfrm>
+          <a:prstGeom prst="ellipse">
+            <a:avLst/>
+          </a:prstGeom>
+          <a:solidFill>
+            <a:srgbClr val="D9463E"/>
+          </a:solidFill>
+          <a:ln/>
+        </p:spPr>
+      </p:sp>
+      <p:sp>
+        <p:nvSpPr>
+          <p:cNvPr id="8" name="Text 5"/>
+          <p:cNvSpPr txBox="1"/>
+          <p:nvPr/>
+        </p:nvSpPr>
+        <p:spPr>
+          <a:xfrm>
+            <a:off x="539496" y="3872484"/>
+            <a:ext cx="219456" cy="164592"/>
+          </a:xfrm>
+          <a:prstGeom prst="rect">
+            <a:avLst/>
+          </a:prstGeom>
+          <a:noFill/>
+          <a:ln/>
+        </p:spPr>
+        <p:txBody>
+          <a:bodyPr wrap="square" lIns="0" tIns="0" rIns="0" bIns="0" rtlCol="0" anchor="ctr"/>
+          <a:lstStyle/>
+          <a:p>
+            <a:pPr algn="ctr" indent="0" marL="0">
+              <a:buNone/>
+            </a:pPr>
+            <a:r>
+              <a:rPr lang="en-US" sz="750" b="1" dirty="0">
+                <a:solidFill>
+                  <a:srgbClr val="FFFFFF"/>
+                </a:solidFill>
+                <a:latin typeface="Arial" pitchFamily="34" charset="0"/>
+                <a:ea typeface="Arial" pitchFamily="34" charset="-122"/>
+                <a:cs typeface="Arial" pitchFamily="34" charset="-120"/>
+              </a:rPr>
+              <a:t>▶</a:t>
+            </a:r>
+            <a:endParaRPr lang="en-US" sz="750" dirty="0"/>
+          </a:p>
+        </p:txBody>
+      </p:sp>
+      <p:sp>
+        <p:nvSpPr>
+          <p:cNvPr id="9" name="Text 6"/>
+          <p:cNvSpPr txBox="1"/>
+          <p:nvPr/>
+        </p:nvSpPr>
+        <p:spPr>
+          <a:xfrm>
+            <a:off x="832104" y="3799332"/>
+            <a:ext cx="4791456" cy="310896"/>
+          </a:xfrm>
+          <a:prstGeom prst="rect">
+            <a:avLst/>
+          </a:prstGeom>
+          <a:noFill/>
+          <a:ln/>
+        </p:spPr>
+        <p:txBody>
+          <a:bodyPr wrap="square" lIns="0" tIns="0" rIns="0" bIns="0" rtlCol="0" anchor="ctr"/>
+          <a:lstStyle/>
+          <a:p>
+            <a:pPr indent="0" marL="0">
+              <a:lnSpc>
+                <a:spcPct val="100000"/>
+              </a:lnSpc>
+              <a:buNone/>
+            </a:pPr>
+            <a:r>
+              <a:rPr lang="en-US" sz="850" b="1" u="sng" dirty="0">
+                <a:solidFill>
+                  <a:srgbClr val="0B1F3A"/>
+                </a:solidFill>
+                <a:latin typeface="Arial" pitchFamily="34" charset="0"/>
+                <a:ea typeface="Arial" pitchFamily="34" charset="-122"/>
+                <a:cs typeface="Arial" pitchFamily="34" charset="-120"/>
+                <a:hlinkClick r:id="rId2" invalidUrl="" action="" tgtFrame="" tooltip="" history="1" highlightClick="0" endSnd="0">
+                  <a:extLst>
+                    <a:ext uri="{A12FA001-AC4F-418D-AE19-62706E023703}">
+                      <ahyp:hlinkClr xmlns:ahyp="http://schemas.microsoft.com/office/drawing/2018/hyperlinkcolor" val="tx"/>
+                    </a:ext>
+                  </a:extLst>
+                </a:hlinkClick>
+              </a:rPr>
+              <a:t>Video: phát hiện người đi bộ ban đêm (NVIDIA DRIVE Labs)　1:51</a:t>
+            </a:r>
+            <a:endParaRPr lang="en-US" sz="850" dirty="0"/>
+          </a:p>
+          <a:p>
+            <a:pPr indent="0" marL="0">
+              <a:lnSpc>
+                <a:spcPct val="100000"/>
+              </a:lnSpc>
+              <a:buNone/>
+            </a:pPr>
+            <a:r>
+              <a:rPr lang="en-US" sz="850" b="1" u="sng" dirty="0">
+                <a:solidFill>
+                  <a:srgbClr val="0B1F3A"/>
+                </a:solidFill>
+                <a:latin typeface="微軟正黑體" pitchFamily="34" charset="0"/>
+                <a:ea typeface="微軟正黑體" pitchFamily="34" charset="-122"/>
+                <a:cs typeface="微軟正黑體" pitchFamily="34" charset="-120"/>
+                <a:hlinkClick r:id="rId2" invalidUrl="" action="" tgtFrame="" tooltip="" history="1" highlightClick="0" endSnd="0">
+                  <a:extLst>
+                    <a:ext uri="{A12FA001-AC4F-418D-AE19-62706E023703}">
+                      <ahyp:hlinkClr xmlns:ahyp="http://schemas.microsoft.com/office/drawing/2018/hyperlinkcolor" val="tx"/>
+                    </a:ext>
+                  </a:extLst>
+                </a:hlinkClick>
+              </a:rPr>
+              <a:t>影片：夜間行人偵測與主動學習（NVIDIA DRIVE Labs）　</a:t>
+            </a:r>
+            <a:pPr indent="0" marL="0">
+              <a:lnSpc>
+                <a:spcPct val="100000"/>
+              </a:lnSpc>
+              <a:buNone/>
+            </a:pPr>
+            <a:r>
+              <a:rPr lang="en-US" sz="850" u="sng" dirty="0">
+                <a:solidFill>
+                  <a:srgbClr val="1F6FBF"/>
+                </a:solidFill>
+                <a:latin typeface="Arial" pitchFamily="34" charset="0"/>
+                <a:ea typeface="Arial" pitchFamily="34" charset="-122"/>
+                <a:cs typeface="Arial" pitchFamily="34" charset="-120"/>
+                <a:hlinkClick r:id="rId2" invalidUrl="" action="" tgtFrame="" tooltip="" history="1" highlightClick="0" endSnd="0">
+                  <a:extLst>
+                    <a:ext uri="{A12FA001-AC4F-418D-AE19-62706E023703}">
+                      <ahyp:hlinkClr xmlns:ahyp="http://schemas.microsoft.com/office/drawing/2018/hyperlinkcolor" val="tx"/>
+                    </a:ext>
+                  </a:extLst>
+                </a:hlinkClick>
+              </a:rPr>
+              <a:t>youtu.be/4aq13pB9s7c</a:t>
+            </a:r>
+            <a:endParaRPr lang="en-US" sz="850" dirty="0"/>
+          </a:p>
+        </p:txBody>
+      </p:sp>
       <p:pic>
         <p:nvPicPr>
-          <p:cNvPr id="8" name="Image 1" descr="/Users/tsengchenghsun/Class/carClass/Claude outputs/第八週(10-29)/src/logo.png">    </p:cNvPr>
+          <p:cNvPr id="11" name="Image 1" descr="/Users/tsengchenghsun/Class/carClass/Claude outputs/第八週(10-29)/src/logo.png">    </p:cNvPr>
           <p:cNvPicPr>
             <a:picLocks noChangeAspect="1"/>
           </p:cNvPicPr>
           <p:nvPr/>
         </p:nvPicPr>
         <p:blipFill>
-          <a:blip r:embed="rId2"/>
+          <a:blip r:embed="rId3"/>
           <a:stretch>
             <a:fillRect/>
           </a:stretch>
@@ -18991,7 +20296,7 @@
       </p:pic>
       <p:sp>
         <p:nvSpPr>
-          <p:cNvPr id="9" name="Text 4"/>
+          <p:cNvPr id="12" name="Text 7"/>
           <p:cNvSpPr txBox="1"/>
           <p:nvPr/>
         </p:nvSpPr>
@@ -19030,7 +20335,7 @@
       </p:sp>
       <p:sp>
         <p:nvSpPr>
-          <p:cNvPr id="10" name="Text 5"/>
+          <p:cNvPr id="13" name="Text 8"/>
           <p:cNvSpPr txBox="1"/>
           <p:nvPr/>
         </p:nvSpPr>
@@ -20841,7 +22146,7 @@
         </p:nvSpPr>
         <p:spPr>
           <a:xfrm>
-            <a:off x="502920" y="1101852"/>
+            <a:off x="502920" y="918972"/>
             <a:ext cx="3906566" cy="2514600"/>
           </a:xfrm>
           <a:prstGeom prst="roundRect">
@@ -20876,7 +22181,7 @@
         </p:blipFill>
         <p:spPr>
           <a:xfrm>
-            <a:off x="576072" y="1207125"/>
+            <a:off x="576072" y="1024245"/>
             <a:ext cx="3760262" cy="2121174"/>
           </a:xfrm>
           <a:prstGeom prst="rect">
@@ -20892,7 +22197,7 @@
         </p:nvSpPr>
         <p:spPr>
           <a:xfrm>
-            <a:off x="576072" y="3396996"/>
+            <a:off x="576072" y="3214116"/>
             <a:ext cx="3760262" cy="182880"/>
           </a:xfrm>
           <a:prstGeom prst="rect">
@@ -20988,6 +22293,165 @@
       <p:sp>
         <p:nvSpPr>
           <p:cNvPr id="7" name="Shape 4"/>
+          <p:cNvSpPr/>
+          <p:nvPr/>
+        </p:nvSpPr>
+        <p:spPr>
+          <a:xfrm>
+            <a:off x="539496" y="3534156"/>
+            <a:ext cx="219456" cy="219456"/>
+          </a:xfrm>
+          <a:prstGeom prst="ellipse">
+            <a:avLst/>
+          </a:prstGeom>
+          <a:solidFill>
+            <a:srgbClr val="D9463E"/>
+          </a:solidFill>
+          <a:ln/>
+        </p:spPr>
+      </p:sp>
+      <p:sp>
+        <p:nvSpPr>
+          <p:cNvPr id="8" name="Text 5"/>
+          <p:cNvSpPr txBox="1"/>
+          <p:nvPr/>
+        </p:nvSpPr>
+        <p:spPr>
+          <a:xfrm>
+            <a:off x="539496" y="3561588"/>
+            <a:ext cx="219456" cy="164592"/>
+          </a:xfrm>
+          <a:prstGeom prst="rect">
+            <a:avLst/>
+          </a:prstGeom>
+          <a:noFill/>
+          <a:ln/>
+        </p:spPr>
+        <p:txBody>
+          <a:bodyPr wrap="square" lIns="0" tIns="0" rIns="0" bIns="0" rtlCol="0" anchor="ctr"/>
+          <a:lstStyle/>
+          <a:p>
+            <a:pPr algn="ctr" indent="0" marL="0">
+              <a:buNone/>
+            </a:pPr>
+            <a:r>
+              <a:rPr lang="en-US" sz="750" b="1" dirty="0">
+                <a:solidFill>
+                  <a:srgbClr val="FFFFFF"/>
+                </a:solidFill>
+                <a:latin typeface="Arial" pitchFamily="34" charset="0"/>
+                <a:ea typeface="Arial" pitchFamily="34" charset="-122"/>
+                <a:cs typeface="Arial" pitchFamily="34" charset="-120"/>
+              </a:rPr>
+              <a:t>▶</a:t>
+            </a:r>
+            <a:endParaRPr lang="en-US" sz="750" dirty="0"/>
+          </a:p>
+        </p:txBody>
+      </p:sp>
+      <p:sp>
+        <p:nvSpPr>
+          <p:cNvPr id="9" name="Text 6"/>
+          <p:cNvSpPr txBox="1"/>
+          <p:nvPr/>
+        </p:nvSpPr>
+        <p:spPr>
+          <a:xfrm>
+            <a:off x="832104" y="3488436"/>
+            <a:ext cx="3577382" cy="310896"/>
+          </a:xfrm>
+          <a:prstGeom prst="rect">
+            <a:avLst/>
+          </a:prstGeom>
+          <a:noFill/>
+          <a:ln/>
+        </p:spPr>
+        <p:txBody>
+          <a:bodyPr wrap="square" lIns="0" tIns="0" rIns="0" bIns="0" rtlCol="0" anchor="ctr"/>
+          <a:lstStyle/>
+          <a:p>
+            <a:pPr indent="0" marL="0">
+              <a:lnSpc>
+                <a:spcPct val="100000"/>
+              </a:lnSpc>
+              <a:buNone/>
+            </a:pPr>
+            <a:r>
+              <a:rPr lang="en-US" sz="850" b="1" u="sng" dirty="0">
+                <a:solidFill>
+                  <a:srgbClr val="0B1F3A"/>
+                </a:solidFill>
+                <a:latin typeface="Arial" pitchFamily="34" charset="0"/>
+                <a:ea typeface="Arial" pitchFamily="34" charset="-122"/>
+                <a:cs typeface="Arial" pitchFamily="34" charset="-120"/>
+                <a:hlinkClick r:id="rId2" invalidUrl="" action="" tgtFrame="" tooltip="" history="1" highlightClick="0" endSnd="0">
+                  <a:extLst>
+                    <a:ext uri="{A12FA001-AC4F-418D-AE19-62706E023703}">
+                      <ahyp:hlinkClr xmlns:ahyp="http://schemas.microsoft.com/office/drawing/2018/hyperlinkcolor" val="tx"/>
+                    </a:ext>
+                  </a:extLst>
+                </a:hlinkClick>
+              </a:rPr>
+              <a:t>Video: Occupancy Grid — 5 Minutes with Cyrill　0:04–2:21</a:t>
+            </a:r>
+            <a:endParaRPr lang="en-US" sz="850" dirty="0"/>
+          </a:p>
+          <a:p>
+            <a:pPr indent="0" marL="0">
+              <a:lnSpc>
+                <a:spcPct val="100000"/>
+              </a:lnSpc>
+              <a:buNone/>
+            </a:pPr>
+            <a:r>
+              <a:rPr lang="en-US" sz="850" b="1" u="sng" dirty="0">
+                <a:solidFill>
+                  <a:srgbClr val="0B1F3A"/>
+                </a:solidFill>
+                <a:latin typeface="微軟正黑體" pitchFamily="34" charset="0"/>
+                <a:ea typeface="微軟正黑體" pitchFamily="34" charset="-122"/>
+                <a:cs typeface="微軟正黑體" pitchFamily="34" charset="-120"/>
+                <a:hlinkClick r:id="rId2" invalidUrl="" action="" tgtFrame="" tooltip="" history="1" highlightClick="0" endSnd="0">
+                  <a:extLst>
+                    <a:ext uri="{A12FA001-AC4F-418D-AE19-62706E023703}">
+                      <ahyp:hlinkClr xmlns:ahyp="http://schemas.microsoft.com/office/drawing/2018/hyperlinkcolor" val="tx"/>
+                    </a:ext>
+                  </a:extLst>
+                </a:hlinkClick>
+              </a:rPr>
+              <a:t>影片：佔據網格五分鐘（波昂大學 Cyrill Stachniss）　</a:t>
+            </a:r>
+            <a:pPr indent="0" marL="0">
+              <a:lnSpc>
+                <a:spcPct val="100000"/>
+              </a:lnSpc>
+              <a:buNone/>
+            </a:pPr>
+            <a:r>
+              <a:rPr lang="en-US" sz="850" u="sng" dirty="0">
+                <a:solidFill>
+                  <a:srgbClr val="1F6FBF"/>
+                </a:solidFill>
+                <a:latin typeface="Arial" pitchFamily="34" charset="0"/>
+                <a:ea typeface="Arial" pitchFamily="34" charset="-122"/>
+                <a:cs typeface="Arial" pitchFamily="34" charset="-120"/>
+                <a:hlinkClick r:id="rId2" invalidUrl="" action="" tgtFrame="" tooltip="" history="1" highlightClick="0" endSnd="0">
+                  <a:extLst>
+                    <a:ext uri="{A12FA001-AC4F-418D-AE19-62706E023703}">
+                      <ahyp:hlinkClr xmlns:ahyp="http://schemas.microsoft.com/office/drawing/2018/hyperlinkcolor" val="tx"/>
+                    </a:ext>
+                  </a:extLst>
+                </a:hlinkClick>
+              </a:rPr>
+              <a:t>youtu.be/8ckhPViqneg?t=4</a:t>
+            </a:r>
+            <a:endParaRPr lang="en-US" sz="850" dirty="0"/>
+          </a:p>
+        </p:txBody>
+      </p:sp>
+      <p:sp>
+        <p:nvSpPr>
+          <p:cNvPr id="10" name="Shape 7"/>
           <p:cNvSpPr/>
           <p:nvPr/>
         </p:nvSpPr>
@@ -21014,7 +22478,7 @@
       </p:sp>
       <p:sp>
         <p:nvSpPr>
-          <p:cNvPr id="8" name="Text 5"/>
+          <p:cNvPr id="11" name="Text 8"/>
           <p:cNvSpPr txBox="1"/>
           <p:nvPr/>
         </p:nvSpPr>
@@ -21076,7 +22540,7 @@
       </p:sp>
       <p:sp>
         <p:nvSpPr>
-          <p:cNvPr id="9" name="Shape 6"/>
+          <p:cNvPr id="12" name="Shape 9"/>
           <p:cNvSpPr/>
           <p:nvPr/>
         </p:nvSpPr>
@@ -21103,7 +22567,7 @@
       </p:sp>
       <p:sp>
         <p:nvSpPr>
-          <p:cNvPr id="10" name="Text 7"/>
+          <p:cNvPr id="13" name="Text 10"/>
           <p:cNvSpPr txBox="1"/>
           <p:nvPr/>
         </p:nvSpPr>
@@ -21199,14 +22663,14 @@
       </p:sp>
       <p:pic>
         <p:nvPicPr>
-          <p:cNvPr id="12" name="Image 1" descr="/Users/tsengchenghsun/Class/carClass/Claude outputs/第八週(10-29)/src/logo.png">    </p:cNvPr>
+          <p:cNvPr id="15" name="Image 1" descr="/Users/tsengchenghsun/Class/carClass/Claude outputs/第八週(10-29)/src/logo.png">    </p:cNvPr>
           <p:cNvPicPr>
             <a:picLocks noChangeAspect="1"/>
           </p:cNvPicPr>
           <p:nvPr/>
         </p:nvPicPr>
         <p:blipFill>
-          <a:blip r:embed="rId2"/>
+          <a:blip r:embed="rId3"/>
           <a:stretch>
             <a:fillRect/>
           </a:stretch>
@@ -21223,7 +22687,7 @@
       </p:pic>
       <p:sp>
         <p:nvSpPr>
-          <p:cNvPr id="13" name="Text 8"/>
+          <p:cNvPr id="16" name="Text 11"/>
           <p:cNvSpPr txBox="1"/>
           <p:nvPr/>
         </p:nvSpPr>
@@ -21262,7 +22726,7 @@
       </p:sp>
       <p:sp>
         <p:nvSpPr>
-          <p:cNvPr id="14" name="Text 9"/>
+          <p:cNvPr id="17" name="Text 12"/>
           <p:cNvSpPr txBox="1"/>
           <p:nvPr/>
         </p:nvSpPr>
@@ -22253,8 +23717,8 @@
         </p:nvSpPr>
         <p:spPr>
           <a:xfrm>
-            <a:off x="676061" y="1371600"/>
-            <a:ext cx="7791877" cy="3017520"/>
+            <a:off x="1175636" y="1371600"/>
+            <a:ext cx="6792728" cy="2633472"/>
           </a:xfrm>
           <a:prstGeom prst="rect">
             <a:avLst/>
@@ -22286,8 +23750,8 @@
         </p:blipFill>
         <p:spPr>
           <a:xfrm>
-            <a:off x="694349" y="1389888"/>
-            <a:ext cx="7755301" cy="2980944"/>
+            <a:off x="1193924" y="1389888"/>
+            <a:ext cx="6756152" cy="2596896"/>
           </a:xfrm>
           <a:prstGeom prst="rect">
             <a:avLst/>
@@ -22302,7 +23766,7 @@
         </p:nvSpPr>
         <p:spPr>
           <a:xfrm>
-            <a:off x="502920" y="4407408"/>
+            <a:off x="502920" y="4023360"/>
             <a:ext cx="8138160" cy="201168"/>
           </a:xfrm>
           <a:prstGeom prst="rect">
@@ -22333,16 +23797,172 @@
           </a:p>
         </p:txBody>
       </p:sp>
+      <p:sp>
+        <p:nvSpPr>
+          <p:cNvPr id="7" name="Shape 4"/>
+          <p:cNvSpPr/>
+          <p:nvPr/>
+        </p:nvSpPr>
+        <p:spPr>
+          <a:xfrm>
+            <a:off x="539496" y="4288536"/>
+            <a:ext cx="219456" cy="219456"/>
+          </a:xfrm>
+          <a:prstGeom prst="ellipse">
+            <a:avLst/>
+          </a:prstGeom>
+          <a:solidFill>
+            <a:srgbClr val="D9463E"/>
+          </a:solidFill>
+          <a:ln/>
+        </p:spPr>
+      </p:sp>
+      <p:sp>
+        <p:nvSpPr>
+          <p:cNvPr id="8" name="Text 5"/>
+          <p:cNvSpPr txBox="1"/>
+          <p:nvPr/>
+        </p:nvSpPr>
+        <p:spPr>
+          <a:xfrm>
+            <a:off x="539496" y="4315968"/>
+            <a:ext cx="219456" cy="164592"/>
+          </a:xfrm>
+          <a:prstGeom prst="rect">
+            <a:avLst/>
+          </a:prstGeom>
+          <a:noFill/>
+          <a:ln/>
+        </p:spPr>
+        <p:txBody>
+          <a:bodyPr wrap="square" lIns="0" tIns="0" rIns="0" bIns="0" rtlCol="0" anchor="ctr"/>
+          <a:lstStyle/>
+          <a:p>
+            <a:pPr algn="ctr" indent="0" marL="0">
+              <a:buNone/>
+            </a:pPr>
+            <a:r>
+              <a:rPr lang="en-US" sz="750" b="1" dirty="0">
+                <a:solidFill>
+                  <a:srgbClr val="FFFFFF"/>
+                </a:solidFill>
+                <a:latin typeface="Arial" pitchFamily="34" charset="0"/>
+                <a:ea typeface="Arial" pitchFamily="34" charset="-122"/>
+                <a:cs typeface="Arial" pitchFamily="34" charset="-120"/>
+              </a:rPr>
+              <a:t>▶</a:t>
+            </a:r>
+            <a:endParaRPr lang="en-US" sz="750" dirty="0"/>
+          </a:p>
+        </p:txBody>
+      </p:sp>
+      <p:sp>
+        <p:nvSpPr>
+          <p:cNvPr id="9" name="Text 6"/>
+          <p:cNvSpPr txBox="1"/>
+          <p:nvPr/>
+        </p:nvSpPr>
+        <p:spPr>
+          <a:xfrm>
+            <a:off x="832104" y="4261104"/>
+            <a:ext cx="7808976" cy="274320"/>
+          </a:xfrm>
+          <a:prstGeom prst="rect">
+            <a:avLst/>
+          </a:prstGeom>
+          <a:noFill/>
+          <a:ln/>
+        </p:spPr>
+        <p:txBody>
+          <a:bodyPr wrap="square" lIns="0" tIns="0" rIns="0" bIns="0" rtlCol="0" anchor="ctr"/>
+          <a:lstStyle/>
+          <a:p>
+            <a:pPr indent="0" marL="0">
+              <a:lnSpc>
+                <a:spcPct val="100000"/>
+              </a:lnSpc>
+              <a:buNone/>
+            </a:pPr>
+            <a:r>
+              <a:rPr lang="en-US" sz="900" b="1" u="sng" dirty="0">
+                <a:solidFill>
+                  <a:srgbClr val="0B1F3A"/>
+                </a:solidFill>
+                <a:latin typeface="Arial" pitchFamily="34" charset="0"/>
+                <a:ea typeface="Arial" pitchFamily="34" charset="-122"/>
+                <a:cs typeface="Arial" pitchFamily="34" charset="-120"/>
+                <a:hlinkClick r:id="rId2" invalidUrl="" action="" tgtFrame="" tooltip="" history="1" highlightClick="0" endSnd="0">
+                  <a:extLst>
+                    <a:ext uri="{A12FA001-AC4F-418D-AE19-62706E023703}">
+                      <ahyp:hlinkClr xmlns:ahyp="http://schemas.microsoft.com/office/drawing/2018/hyperlinkcolor" val="tx"/>
+                    </a:ext>
+                  </a:extLst>
+                </a:hlinkClick>
+              </a:rPr>
+              <a:t>Video: bộ lọc Bayer (Computerphile) · </a:t>
+            </a:r>
+            <a:pPr indent="0" marL="0">
+              <a:lnSpc>
+                <a:spcPct val="100000"/>
+              </a:lnSpc>
+              <a:buNone/>
+            </a:pPr>
+            <a:r>
+              <a:rPr lang="en-US" sz="900" b="1" u="sng" dirty="0">
+                <a:solidFill>
+                  <a:srgbClr val="0B1F3A"/>
+                </a:solidFill>
+                <a:latin typeface="微軟正黑體" pitchFamily="34" charset="0"/>
+                <a:ea typeface="微軟正黑體" pitchFamily="34" charset="-122"/>
+                <a:cs typeface="微軟正黑體" pitchFamily="34" charset="-120"/>
+                <a:hlinkClick r:id="rId2" invalidUrl="" action="" tgtFrame="" tooltip="" history="1" highlightClick="0" endSnd="0">
+                  <a:extLst>
+                    <a:ext uri="{A12FA001-AC4F-418D-AE19-62706E023703}">
+                      <ahyp:hlinkClr xmlns:ahyp="http://schemas.microsoft.com/office/drawing/2018/hyperlinkcolor" val="tx"/>
+                    </a:ext>
+                  </a:extLst>
+                </a:hlinkClick>
+              </a:rPr>
+              <a:t>影片：Bayer 濾色片（Computerphile）　0:17–3:25　</a:t>
+            </a:r>
+            <a:pPr indent="0" marL="0">
+              <a:lnSpc>
+                <a:spcPct val="100000"/>
+              </a:lnSpc>
+              <a:buNone/>
+            </a:pPr>
+            <a:r>
+              <a:rPr lang="en-US" sz="900" u="sng" dirty="0">
+                <a:solidFill>
+                  <a:srgbClr val="1F6FBF"/>
+                </a:solidFill>
+                <a:latin typeface="Arial" pitchFamily="34" charset="0"/>
+                <a:ea typeface="Arial" pitchFamily="34" charset="-122"/>
+                <a:cs typeface="Arial" pitchFamily="34" charset="-120"/>
+                <a:hlinkClick r:id="rId2" invalidUrl="" action="" tgtFrame="" tooltip="" history="1" highlightClick="0" endSnd="0">
+                  <a:extLst>
+                    <a:ext uri="{A12FA001-AC4F-418D-AE19-62706E023703}">
+                      <ahyp:hlinkClr xmlns:ahyp="http://schemas.microsoft.com/office/drawing/2018/hyperlinkcolor" val="tx"/>
+                    </a:ext>
+                  </a:extLst>
+                </a:hlinkClick>
+              </a:rPr>
+              <a:t>youtu.be/LWxu4rkZBLw?t=17</a:t>
+            </a:r>
+            <a:endParaRPr lang="en-US" sz="900" dirty="0"/>
+          </a:p>
+        </p:txBody>
+      </p:sp>
       <p:pic>
         <p:nvPicPr>
-          <p:cNvPr id="8" name="Image 1" descr="/Users/tsengchenghsun/Class/carClass/Claude outputs/第八週(10-29)/src/logo.png">    </p:cNvPr>
+          <p:cNvPr id="11" name="Image 1" descr="/Users/tsengchenghsun/Class/carClass/Claude outputs/第八週(10-29)/src/logo.png">    </p:cNvPr>
           <p:cNvPicPr>
             <a:picLocks noChangeAspect="1"/>
           </p:cNvPicPr>
           <p:nvPr/>
         </p:nvPicPr>
         <p:blipFill>
-          <a:blip r:embed="rId2"/>
+          <a:blip r:embed="rId3"/>
           <a:stretch>
             <a:fillRect/>
           </a:stretch>
@@ -22359,7 +23979,7 @@
       </p:pic>
       <p:sp>
         <p:nvSpPr>
-          <p:cNvPr id="9" name="Text 4"/>
+          <p:cNvPr id="12" name="Text 7"/>
           <p:cNvSpPr txBox="1"/>
           <p:nvPr/>
         </p:nvSpPr>
@@ -22398,7 +24018,7 @@
       </p:sp>
       <p:sp>
         <p:nvSpPr>
-          <p:cNvPr id="10" name="Text 5"/>
+          <p:cNvPr id="13" name="Text 8"/>
           <p:cNvSpPr txBox="1"/>
           <p:nvPr/>
         </p:nvSpPr>
@@ -22569,8 +24189,8 @@
         </p:nvSpPr>
         <p:spPr>
           <a:xfrm>
-            <a:off x="1706528" y="1371600"/>
-            <a:ext cx="5730943" cy="3017520"/>
+            <a:off x="2073343" y="1371600"/>
+            <a:ext cx="4997313" cy="2633472"/>
           </a:xfrm>
           <a:prstGeom prst="rect">
             <a:avLst/>
@@ -22602,8 +24222,8 @@
         </p:blipFill>
         <p:spPr>
           <a:xfrm>
-            <a:off x="1724816" y="1389888"/>
-            <a:ext cx="5694367" cy="2980944"/>
+            <a:off x="2091631" y="1389888"/>
+            <a:ext cx="4960737" cy="2596896"/>
           </a:xfrm>
           <a:prstGeom prst="rect">
             <a:avLst/>
@@ -22618,7 +24238,7 @@
         </p:nvSpPr>
         <p:spPr>
           <a:xfrm>
-            <a:off x="502920" y="4407408"/>
+            <a:off x="502920" y="4023360"/>
             <a:ext cx="8138160" cy="201168"/>
           </a:xfrm>
           <a:prstGeom prst="rect">
@@ -22649,16 +24269,172 @@
           </a:p>
         </p:txBody>
       </p:sp>
+      <p:sp>
+        <p:nvSpPr>
+          <p:cNvPr id="7" name="Shape 4"/>
+          <p:cNvSpPr/>
+          <p:nvPr/>
+        </p:nvSpPr>
+        <p:spPr>
+          <a:xfrm>
+            <a:off x="539496" y="4288536"/>
+            <a:ext cx="219456" cy="219456"/>
+          </a:xfrm>
+          <a:prstGeom prst="ellipse">
+            <a:avLst/>
+          </a:prstGeom>
+          <a:solidFill>
+            <a:srgbClr val="D9463E"/>
+          </a:solidFill>
+          <a:ln/>
+        </p:spPr>
+      </p:sp>
+      <p:sp>
+        <p:nvSpPr>
+          <p:cNvPr id="8" name="Text 5"/>
+          <p:cNvSpPr txBox="1"/>
+          <p:nvPr/>
+        </p:nvSpPr>
+        <p:spPr>
+          <a:xfrm>
+            <a:off x="539496" y="4315968"/>
+            <a:ext cx="219456" cy="164592"/>
+          </a:xfrm>
+          <a:prstGeom prst="rect">
+            <a:avLst/>
+          </a:prstGeom>
+          <a:noFill/>
+          <a:ln/>
+        </p:spPr>
+        <p:txBody>
+          <a:bodyPr wrap="square" lIns="0" tIns="0" rIns="0" bIns="0" rtlCol="0" anchor="ctr"/>
+          <a:lstStyle/>
+          <a:p>
+            <a:pPr algn="ctr" indent="0" marL="0">
+              <a:buNone/>
+            </a:pPr>
+            <a:r>
+              <a:rPr lang="en-US" sz="750" b="1" dirty="0">
+                <a:solidFill>
+                  <a:srgbClr val="FFFFFF"/>
+                </a:solidFill>
+                <a:latin typeface="Arial" pitchFamily="34" charset="0"/>
+                <a:ea typeface="Arial" pitchFamily="34" charset="-122"/>
+                <a:cs typeface="Arial" pitchFamily="34" charset="-120"/>
+              </a:rPr>
+              <a:t>▶</a:t>
+            </a:r>
+            <a:endParaRPr lang="en-US" sz="750" dirty="0"/>
+          </a:p>
+        </p:txBody>
+      </p:sp>
+      <p:sp>
+        <p:nvSpPr>
+          <p:cNvPr id="9" name="Text 6"/>
+          <p:cNvSpPr txBox="1"/>
+          <p:nvPr/>
+        </p:nvSpPr>
+        <p:spPr>
+          <a:xfrm>
+            <a:off x="832104" y="4261104"/>
+            <a:ext cx="7808976" cy="274320"/>
+          </a:xfrm>
+          <a:prstGeom prst="rect">
+            <a:avLst/>
+          </a:prstGeom>
+          <a:noFill/>
+          <a:ln/>
+        </p:spPr>
+        <p:txBody>
+          <a:bodyPr wrap="square" lIns="0" tIns="0" rIns="0" bIns="0" rtlCol="0" anchor="ctr"/>
+          <a:lstStyle/>
+          <a:p>
+            <a:pPr indent="0" marL="0">
+              <a:lnSpc>
+                <a:spcPct val="100000"/>
+              </a:lnSpc>
+              <a:buNone/>
+            </a:pPr>
+            <a:r>
+              <a:rPr lang="en-US" sz="900" b="1" u="sng" dirty="0">
+                <a:solidFill>
+                  <a:srgbClr val="0B1F3A"/>
+                </a:solidFill>
+                <a:latin typeface="Arial" pitchFamily="34" charset="0"/>
+                <a:ea typeface="Arial" pitchFamily="34" charset="-122"/>
+                <a:cs typeface="Arial" pitchFamily="34" charset="-120"/>
+                <a:hlinkClick r:id="rId2" invalidUrl="" action="" tgtFrame="" tooltip="" history="1" highlightClick="0" endSnd="0">
+                  <a:extLst>
+                    <a:ext uri="{A12FA001-AC4F-418D-AE19-62706E023703}">
+                      <ahyp:hlinkClr xmlns:ahyp="http://schemas.microsoft.com/office/drawing/2018/hyperlinkcolor" val="tx"/>
+                    </a:ext>
+                  </a:extLst>
+                </a:hlinkClick>
+              </a:rPr>
+              <a:t>Video: bù màu từ ô bên cạnh (Computerphile) · </a:t>
+            </a:r>
+            <a:pPr indent="0" marL="0">
+              <a:lnSpc>
+                <a:spcPct val="100000"/>
+              </a:lnSpc>
+              <a:buNone/>
+            </a:pPr>
+            <a:r>
+              <a:rPr lang="en-US" sz="900" b="1" u="sng" dirty="0">
+                <a:solidFill>
+                  <a:srgbClr val="0B1F3A"/>
+                </a:solidFill>
+                <a:latin typeface="微軟正黑體" pitchFamily="34" charset="0"/>
+                <a:ea typeface="微軟正黑體" pitchFamily="34" charset="-122"/>
+                <a:cs typeface="微軟正黑體" pitchFamily="34" charset="-120"/>
+                <a:hlinkClick r:id="rId2" invalidUrl="" action="" tgtFrame="" tooltip="" history="1" highlightClick="0" endSnd="0">
+                  <a:extLst>
+                    <a:ext uri="{A12FA001-AC4F-418D-AE19-62706E023703}">
+                      <ahyp:hlinkClr xmlns:ahyp="http://schemas.microsoft.com/office/drawing/2018/hyperlinkcolor" val="tx"/>
+                    </a:ext>
+                  </a:extLst>
+                </a:hlinkClick>
+              </a:rPr>
+              <a:t>影片：用旁邊的格子補齊（Computerphile）　3:02–5:46　</a:t>
+            </a:r>
+            <a:pPr indent="0" marL="0">
+              <a:lnSpc>
+                <a:spcPct val="100000"/>
+              </a:lnSpc>
+              <a:buNone/>
+            </a:pPr>
+            <a:r>
+              <a:rPr lang="en-US" sz="900" u="sng" dirty="0">
+                <a:solidFill>
+                  <a:srgbClr val="1F6FBF"/>
+                </a:solidFill>
+                <a:latin typeface="Arial" pitchFamily="34" charset="0"/>
+                <a:ea typeface="Arial" pitchFamily="34" charset="-122"/>
+                <a:cs typeface="Arial" pitchFamily="34" charset="-120"/>
+                <a:hlinkClick r:id="rId2" invalidUrl="" action="" tgtFrame="" tooltip="" history="1" highlightClick="0" endSnd="0">
+                  <a:extLst>
+                    <a:ext uri="{A12FA001-AC4F-418D-AE19-62706E023703}">
+                      <ahyp:hlinkClr xmlns:ahyp="http://schemas.microsoft.com/office/drawing/2018/hyperlinkcolor" val="tx"/>
+                    </a:ext>
+                  </a:extLst>
+                </a:hlinkClick>
+              </a:rPr>
+              <a:t>youtu.be/LWxu4rkZBLw?t=182</a:t>
+            </a:r>
+            <a:endParaRPr lang="en-US" sz="900" dirty="0"/>
+          </a:p>
+        </p:txBody>
+      </p:sp>
       <p:pic>
         <p:nvPicPr>
-          <p:cNvPr id="8" name="Image 1" descr="/Users/tsengchenghsun/Class/carClass/Claude outputs/第八週(10-29)/src/logo.png">    </p:cNvPr>
+          <p:cNvPr id="11" name="Image 1" descr="/Users/tsengchenghsun/Class/carClass/Claude outputs/第八週(10-29)/src/logo.png">    </p:cNvPr>
           <p:cNvPicPr>
             <a:picLocks noChangeAspect="1"/>
           </p:cNvPicPr>
           <p:nvPr/>
         </p:nvPicPr>
         <p:blipFill>
-          <a:blip r:embed="rId2"/>
+          <a:blip r:embed="rId3"/>
           <a:stretch>
             <a:fillRect/>
           </a:stretch>
@@ -22675,7 +24451,7 @@
       </p:pic>
       <p:sp>
         <p:nvSpPr>
-          <p:cNvPr id="9" name="Text 4"/>
+          <p:cNvPr id="12" name="Text 7"/>
           <p:cNvSpPr txBox="1"/>
           <p:nvPr/>
         </p:nvSpPr>
@@ -22714,7 +24490,7 @@
       </p:sp>
       <p:sp>
         <p:nvSpPr>
-          <p:cNvPr id="10" name="Text 5"/>
+          <p:cNvPr id="13" name="Text 8"/>
           <p:cNvSpPr txBox="1"/>
           <p:nvPr/>
         </p:nvSpPr>

--- a/第八週(10-29)/第八週_第1節_簡報.pptx
+++ b/第八週(10-29)/第八週_第1節_簡報.pptx
@@ -1341,7 +1341,51 @@
                 <a:ea typeface="Arial Unicode MS"/>
                 <a:cs typeface="Arial Unicode MS"/>
               </a:rPr>
-              <a:t>。谷底就是最好的門檻。中間那條淺綠色的帶，是分得對的範圍：汽車最高到 1.02，大人最低 1.25，門檻放在中間就全部分對。黃色的球是電腦目前的門檻，從 2.6 出發，每一次修改，就往下坡走「步伐乘以斜度」那麼遠。三格只差在步伐，也就是學習率。
+              <a:t>。谷底就是最好的門檻。中間那條淺綠色的帶，是分得對的範圍：汽車最高到 1.02，大人最低 1.25，門檻放在中間就全部分對。黃色的球是電腦目前的門檻，從 2.6 出發，每一次修改，就往下坡走「步伐乘以斜度」那麼遠。前八步會放慢：每一步跳之前，球腳下先出現一小段</a:t>
+            </a:r>
+            <a:r>
+              <a:rPr sz="850" b="1" lang="zh-TW" dirty="0">
+                <a:solidFill>
+                  <a:srgbClr val="000000"/>
+                </a:solidFill>
+                <a:latin typeface="Arial Unicode MS"/>
+                <a:ea typeface="Arial Unicode MS"/>
+                <a:cs typeface="Arial Unicode MS"/>
+              </a:rPr>
+              <a:t>黃色斜線</a:t>
+            </a:r>
+            <a:r>
+              <a:rPr sz="850" lang="zh-TW" dirty="0">
+                <a:solidFill>
+                  <a:srgbClr val="000000"/>
+                </a:solidFill>
+                <a:latin typeface="Arial Unicode MS"/>
+                <a:ea typeface="Arial Unicode MS"/>
+                <a:cs typeface="Arial Unicode MS"/>
+              </a:rPr>
+              <a:t>，那就是電腦算出來的斜度；下面再出現一個</a:t>
+            </a:r>
+            <a:r>
+              <a:rPr sz="850" b="1" lang="zh-TW" dirty="0">
+                <a:solidFill>
+                  <a:srgbClr val="000000"/>
+                </a:solidFill>
+                <a:latin typeface="Arial Unicode MS"/>
+                <a:ea typeface="Arial Unicode MS"/>
+                <a:cs typeface="Arial Unicode MS"/>
+              </a:rPr>
+              <a:t>箭頭</a:t>
+            </a:r>
+            <a:r>
+              <a:rPr sz="850" lang="zh-TW" dirty="0">
+                <a:solidFill>
+                  <a:srgbClr val="000000"/>
+                </a:solidFill>
+                <a:latin typeface="Arial Unicode MS"/>
+                <a:ea typeface="Arial Unicode MS"/>
+                <a:cs typeface="Arial Unicode MS"/>
+              </a:rPr>
+              <a:t>，標出這一步要跳多遠。三格只差在步伐，也就是學習率。
 </a:t>
             </a:r>
           </a:p>
@@ -1374,7 +1418,29 @@
                 <a:ea typeface="Arial Unicode MS"/>
                 <a:cs typeface="Arial Unicode MS"/>
               </a:rPr>
-              <a:t>：第一步就跳到 1.38，第三步落進淺綠帶，之後停在 1.17，全部分對。
+              <a:t>：第一步從 2.6 跳到 1.99，第二步 1.60，第三步 1.41，第四步 1.31……請看下面的箭頭，</a:t>
+            </a:r>
+            <a:r>
+              <a:rPr sz="850" b="1" lang="zh-TW" dirty="0">
+                <a:solidFill>
+                  <a:srgbClr val="000000"/>
+                </a:solidFill>
+                <a:latin typeface="Arial Unicode MS"/>
+                <a:ea typeface="Arial Unicode MS"/>
+                <a:cs typeface="Arial Unicode MS"/>
+              </a:rPr>
+              <a:t>一次比一次短</a:t>
+            </a:r>
+            <a:r>
+              <a:rPr sz="850" lang="zh-TW" dirty="0">
+                <a:solidFill>
+                  <a:srgbClr val="000000"/>
+                </a:solidFill>
+                <a:latin typeface="Arial Unicode MS"/>
+                <a:ea typeface="Arial Unicode MS"/>
+                <a:cs typeface="Arial Unicode MS"/>
+              </a:rPr>
+              <a:t>。因為愈靠近谷底，坡愈平，斜度愈小，「步伐乘以斜度」自然就愈小，球會自己放慢。第六步走進淺綠帶，最後停在 1.17，全部分對。
 </a:t>
             </a:r>
           </a:p>
@@ -12366,8 +12432,8 @@
         </p:nvSpPr>
         <p:spPr>
           <a:xfrm>
-            <a:off x="1280765" y="1371600"/>
-            <a:ext cx="6582471" cy="2633472"/>
+            <a:off x="1471793" y="1371600"/>
+            <a:ext cx="6200415" cy="2633472"/>
           </a:xfrm>
           <a:prstGeom prst="rect">
             <a:avLst/>
@@ -12399,8 +12465,8 @@
         </p:blipFill>
         <p:spPr>
           <a:xfrm>
-            <a:off x="1299053" y="1389888"/>
-            <a:ext cx="6545895" cy="2596896"/>
+            <a:off x="1490081" y="1389888"/>
+            <a:ext cx="6163839" cy="2596896"/>
           </a:xfrm>
           <a:prstGeom prst="rect">
             <a:avLst/>

--- a/第八週(10-29)/第八週_第1節_簡報.pptx
+++ b/第八週(10-29)/第八週_第1節_簡報.pptx
@@ -473,7 +473,7 @@
                 <a:ea typeface="Arial Unicode MS"/>
                 <a:cs typeface="Arial Unicode MS"/>
               </a:rPr>
-              <a:t>讓大家知道，電腦「看見」車和人，靠的是從大量例子學出來的模型；它的輸出是框、類別和分數，而且一遠、一暗就會漏。
+              <a:t>讓大家知道，電腦「看見」車和人，靠的是從大量例子學出來的模型；它的輸出是框、類別和分數；而且東西離得愈遠、光線愈暗，模型就愈容易漏掉，沒有把它框出來。
 </a:t>
             </a:r>
           </a:p>
@@ -1111,7 +1111,7 @@
                 <a:ea typeface="Arial Unicode MS"/>
                 <a:cs typeface="Arial Unicode MS"/>
               </a:rPr>
-              <a:t>讓大家知道為什麼每次只改一點點：電腦算得出往哪邊改比較好，算不出要改多少；改太多會跳過頭，而且會把從別的照片學到的東西弄壞。
+              <a:t>讓大家知道為什麼每次只改一點點：電腦算得出往哪個方向改比較好，但是算不出要改多少；一次改太多，會越過最好的位置，而且會把從別的照片學到的東西弄壞。
 </a:t>
             </a:r>
           </a:p>
@@ -1661,7 +1661,7 @@
                 <a:ea typeface="Arial Unicode MS"/>
                 <a:cs typeface="Arial Unicode MS"/>
               </a:rPr>
-              <a:t>他先把問題縮成「只有一個輸入的函數，怎麼找到最低點」，畫一條有好幾個谷的曲線；5:51 說：看你站的地方斜率是正還是負，往下坡那邊走一步；6:19 用的就是「球滾下山」的比喻；6:23 提醒，從不同的地方出發，可能停在不同的谷；6:42 講「步伐跟斜率成正比，快到谷底時斜率變小，步伐也變小，就比較不會跳過頭」。我們的動畫就是這個做法，只是谷只有一個。</a:t>
+              <a:t>他先把問題縮成「只有一個輸入的函數，怎麼找到最低點」，畫一條有好幾個谷的曲線；5:51 說：看你站的地方斜率是正還是負，往下坡那邊走一步；6:19 用的就是「球滾下山」的比喻；6:23 提醒，從不同的地方出發，可能停在不同的谷；6:42 講「步伐跟斜率成正比，快到谷底時斜率變小，步伐也變小，就比較不會越過谷底」。我們的動畫就是這個做法，只是谷只有一個。</a:t>
             </a:r>
           </a:p>
         </p:txBody>
@@ -4058,11 +4058,11 @@
                 <a:spcPts val="0"/>
               </a:spcBef>
               <a:spcAft>
-                <a:spcPts val="233"/>
+                <a:spcPts val="225"/>
               </a:spcAft>
             </a:pPr>
             <a:r>
-              <a:rPr sz="1400" b="1" lang="zh-TW" dirty="0">
+              <a:rPr sz="1350" b="1" lang="zh-TW" dirty="0">
                 <a:solidFill>
                   <a:srgbClr val="000000"/>
                 </a:solidFill>
@@ -4073,15 +4073,15 @@
               <a:t>這一張的目的：</a:t>
             </a:r>
             <a:r>
-              <a:rPr sz="1400" lang="zh-TW" dirty="0">
-                <a:solidFill>
-                  <a:srgbClr val="000000"/>
-                </a:solidFill>
-                <a:latin typeface="Arial Unicode MS"/>
-                <a:ea typeface="Arial Unicode MS"/>
-                <a:cs typeface="Arial Unicode MS"/>
-              </a:rPr>
-              <a:t>讓大家知道，門檻切在哪裡是一種取捨：低了多報，高了漏掉，沒有一個門檻兩邊都好。
+              <a:rPr sz="1350" lang="zh-TW" dirty="0">
+                <a:solidFill>
+                  <a:srgbClr val="000000"/>
+                </a:solidFill>
+                <a:latin typeface="Arial Unicode MS"/>
+                <a:ea typeface="Arial Unicode MS"/>
+                <a:cs typeface="Arial Unicode MS"/>
+              </a:rPr>
+              <a:t>讓大家知道，門檻要設在哪裡，是一種取捨：門檻設得低，模型會多報出一些其實不存在的東西；門檻設得高，又會漏掉一些真的存在的車和人；沒有一個門檻可以讓這兩種錯誤同時變少。
 </a:t>
             </a:r>
           </a:p>
@@ -4091,11 +4091,11 @@
                 <a:spcPts val="0"/>
               </a:spcBef>
               <a:spcAft>
-                <a:spcPts val="233"/>
+                <a:spcPts val="225"/>
               </a:spcAft>
             </a:pPr>
             <a:r>
-              <a:rPr sz="1400" lang="zh-TW" dirty="0">
+              <a:rPr sz="1350" lang="zh-TW" dirty="0">
                 <a:solidFill>
                   <a:srgbClr val="000000"/>
                 </a:solidFill>
@@ -4113,11 +4113,11 @@
                 <a:spcPts val="0"/>
               </a:spcBef>
               <a:spcAft>
-                <a:spcPts val="233"/>
+                <a:spcPts val="225"/>
               </a:spcAft>
             </a:pPr>
             <a:r>
-              <a:rPr sz="1400" b="1" lang="zh-TW" dirty="0">
+              <a:rPr sz="1350" b="1" lang="zh-TW" dirty="0">
                 <a:solidFill>
                   <a:srgbClr val="000000"/>
                 </a:solidFill>
@@ -4128,7 +4128,7 @@
               <a:t>左邊，門檻 0.3</a:t>
             </a:r>
             <a:r>
-              <a:rPr sz="1400" lang="zh-TW" dirty="0">
+              <a:rPr sz="1350" lang="zh-TW" dirty="0">
                 <a:solidFill>
                   <a:srgbClr val="000000"/>
                 </a:solidFill>
@@ -4146,11 +4146,11 @@
                 <a:spcPts val="0"/>
               </a:spcBef>
               <a:spcAft>
-                <a:spcPts val="233"/>
+                <a:spcPts val="225"/>
               </a:spcAft>
             </a:pPr>
             <a:r>
-              <a:rPr sz="1400" b="1" lang="zh-TW" dirty="0">
+              <a:rPr sz="1350" b="1" lang="zh-TW" dirty="0">
                 <a:solidFill>
                   <a:srgbClr val="000000"/>
                 </a:solidFill>
@@ -4161,7 +4161,7 @@
               <a:t>右邊，門檻 0.7</a:t>
             </a:r>
             <a:r>
-              <a:rPr sz="1400" lang="zh-TW" dirty="0">
+              <a:rPr sz="1350" lang="zh-TW" dirty="0">
                 <a:solidFill>
                   <a:srgbClr val="000000"/>
                 </a:solidFill>
@@ -4172,7 +4172,7 @@
               <a:t>：只留分數 0.7 以上的。畫面很乾淨，可是請看那些</a:t>
             </a:r>
             <a:r>
-              <a:rPr sz="1400" b="1" lang="zh-TW" dirty="0">
+              <a:rPr sz="1350" b="1" lang="zh-TW" dirty="0">
                 <a:solidFill>
                   <a:srgbClr val="000000"/>
                 </a:solidFill>
@@ -4183,7 +4183,7 @@
               <a:t>白色虛線框</a:t>
             </a:r>
             <a:r>
-              <a:rPr sz="1400" lang="zh-TW" dirty="0">
+              <a:rPr sz="1350" lang="zh-TW" dirty="0">
                 <a:solidFill>
                   <a:srgbClr val="000000"/>
                 </a:solidFill>
@@ -4201,11 +4201,11 @@
                 <a:spcPts val="0"/>
               </a:spcBef>
               <a:spcAft>
-                <a:spcPts val="233"/>
+                <a:spcPts val="225"/>
               </a:spcAft>
             </a:pPr>
             <a:r>
-              <a:rPr sz="1400" lang="zh-TW" dirty="0">
+              <a:rPr sz="1350" lang="zh-TW" dirty="0">
                 <a:solidFill>
                   <a:srgbClr val="000000"/>
                 </a:solidFill>
@@ -4223,11 +4223,11 @@
                 <a:spcPts val="0"/>
               </a:spcBef>
               <a:spcAft>
-                <a:spcPts val="233"/>
+                <a:spcPts val="225"/>
               </a:spcAft>
             </a:pPr>
             <a:r>
-              <a:rPr sz="1400" lang="zh-TW" dirty="0">
+              <a:rPr sz="1350" lang="zh-TW" dirty="0">
                 <a:solidFill>
                   <a:srgbClr val="000000"/>
                 </a:solidFill>
@@ -4238,7 +4238,7 @@
               <a:t>放到車上：</a:t>
             </a:r>
             <a:r>
-              <a:rPr sz="1400" b="1" lang="zh-TW" dirty="0">
+              <a:rPr sz="1350" b="1" lang="zh-TW" dirty="0">
                 <a:solidFill>
                   <a:srgbClr val="000000"/>
                 </a:solidFill>
@@ -4249,7 +4249,7 @@
               <a:t>多報</a:t>
             </a:r>
             <a:r>
-              <a:rPr sz="1400" lang="zh-TW" dirty="0">
+              <a:rPr sz="1350" lang="zh-TW" dirty="0">
                 <a:solidFill>
                   <a:srgbClr val="000000"/>
                 </a:solidFill>
@@ -4260,7 +4260,7 @@
               <a:t>，車子會為了不存在的東西煞車，就是上週講的幽靈煞車；</a:t>
             </a:r>
             <a:r>
-              <a:rPr sz="1400" b="1" lang="zh-TW" dirty="0">
+              <a:rPr sz="1350" b="1" lang="zh-TW" dirty="0">
                 <a:solidFill>
                   <a:srgbClr val="000000"/>
                 </a:solidFill>
@@ -4271,7 +4271,7 @@
               <a:t>漏掉</a:t>
             </a:r>
             <a:r>
-              <a:rPr sz="1400" lang="zh-TW" dirty="0">
+              <a:rPr sz="1350" lang="zh-TW" dirty="0">
                 <a:solidFill>
                   <a:srgbClr val="000000"/>
                 </a:solidFill>
@@ -4289,11 +4289,11 @@
                 <a:spcPts val="0"/>
               </a:spcBef>
               <a:spcAft>
-                <a:spcPts val="233"/>
+                <a:spcPts val="225"/>
               </a:spcAft>
             </a:pPr>
             <a:r>
-              <a:rPr sz="1400" b="1" lang="zh-TW" dirty="0">
+              <a:rPr sz="1350" b="1" lang="zh-TW" dirty="0">
                 <a:solidFill>
                   <a:srgbClr val="000000"/>
                 </a:solidFill>
@@ -4304,7 +4304,7 @@
               <a:t>影片（同一支 TED）：從 5:10 播到 5:48。</a:t>
             </a:r>
             <a:r>
-              <a:rPr sz="1400" lang="zh-TW" dirty="0">
+              <a:rPr sz="1350" lang="zh-TW" dirty="0">
                 <a:solidFill>
                   <a:srgbClr val="000000"/>
                 </a:solidFill>
@@ -4444,7 +4444,7 @@
                 <a:ea typeface="Arial Unicode MS"/>
                 <a:cs typeface="Arial Unicode MS"/>
               </a:rPr>
-              <a:t>讓大家用真的數字看見門檻的取捨：多報少了，漏掉的就多了，兩欄一起動。
+              <a:t>讓大家用真的數字看見門檻的取捨：門檻拉高，多報的框變少了，可是漏掉沒抓到的車和人就變多了；這兩欄的數字會一起變化。
 </a:t>
             </a:r>
           </a:p>
@@ -4554,7 +4554,7 @@
                 <a:ea typeface="Arial Unicode MS"/>
                 <a:cs typeface="Arial Unicode MS"/>
               </a:rPr>
-              <a:t>」的比例：官方標註的車、人、二輪，有多少被框到了。門檻 0.1，車 87%、行人 63%；門檻 0.9，車剩 18%，行人剩 2%，幾乎全部漏光。
+              <a:t>」的比例：官方標註的車、人、二輪，有多少被框到了。門檻 0.1，車 87%、行人 63%；門檻 0.9，車剩 18%，行人剩 2%，行人幾乎全部都沒抓到。
 </a:t>
             </a:r>
           </a:p>
@@ -4587,7 +4587,7 @@
                 <a:ea typeface="Arial Unicode MS"/>
                 <a:cs typeface="Arial Unicode MS"/>
               </a:rPr>
-              <a:t>要多報少，就要接受漏得多；要漏得少，就要接受多報。</a:t>
+              <a:t>想讓多報的框變少，就要接受漏掉的車和人變多；想讓漏掉的變少，就要接受多報的框變多。</a:t>
             </a:r>
             <a:r>
               <a:rPr sz="1400" lang="zh-TW" dirty="0">
@@ -4598,7 +4598,7 @@
                 <a:ea typeface="Arial Unicode MS"/>
                 <a:cs typeface="Arial Unicode MS"/>
               </a:rPr>
-              <a:t>沒有一列兩邊都好。
+              <a:t>沒有一列是兩邊都好的。
 </a:t>
             </a:r>
           </a:p>
@@ -4642,7 +4642,7 @@
                 <a:ea typeface="Arial Unicode MS"/>
                 <a:cs typeface="Arial Unicode MS"/>
               </a:rPr>
-              <a:t>第一，「對不到標註」不一定都是錯的。上一張商場裡的人就是例子：真的有人，只是官方沒標。所以這一欄是「最多有這麼多個多報」。
+              <a:t>第一，「對不到標註」不一定都是錯的。上一張商場裡的人就是例子：真的有人，只是官方沒標。所以這一欄的意思是「多報的框，最多有這麼多個」。
 </a:t>
             </a:r>
           </a:p>
@@ -4664,7 +4664,7 @@
                 <a:ea typeface="Arial Unicode MS"/>
                 <a:cs typeface="Arial Unicode MS"/>
               </a:rPr>
-              <a:t>第二，同一個門檻，行人比車差很多，機車、腳踏車更差：門檻 0.3，車 82%、行人 53%、二輪只有 27%。人和機車比車小，下一張會看到，一遠就更明顯。</a:t>
+              <a:t>第二，同一個門檻，行人比車差很多，機車、腳踏車更差：門檻 0.3，車 82%、行人 53%、二輪只有 27%。因為人和機車在照片上比車小；下一張會看到，距離愈遠，這個差別愈明顯。</a:t>
             </a:r>
           </a:p>
         </p:txBody>
@@ -4796,7 +4796,7 @@
                 <a:ea typeface="Arial Unicode MS"/>
                 <a:cs typeface="Arial Unicode MS"/>
               </a:rPr>
-              <a:t>讓大家知道，相機的偵測也是一遠就漏，而且人和機車比車掉得快很多。
+              <a:t>讓大家知道，用相機照片做偵測，也是距離愈遠就愈容易漏掉；而且距離拉遠的時候，人和機車被抓到的比例，比車下降得快很多。
 </a:t>
             </a:r>
           </a:p>
@@ -5049,7 +5049,7 @@
                 <a:ea typeface="Arial Unicode MS"/>
                 <a:cs typeface="Arial Unicode MS"/>
               </a:rPr>
-              <a:t>跟上週比一下：上週看的是雷達和光達一遠就稀，今天看到相機的偵測也一樣。</a:t>
+              <a:t>跟上週比一下：上週看到，雷達和光達打在物體上的點，距離愈遠就愈稀疏；今天看到，相機的偵測也一樣。</a:t>
             </a:r>
             <a:r>
               <a:rPr sz="1400" b="1" lang="zh-TW" dirty="0">
@@ -5060,7 +5060,7 @@
                 <a:ea typeface="Arial Unicode MS"/>
                 <a:cs typeface="Arial Unicode MS"/>
               </a:rPr>
-              <a:t>每一種都是一遠就變差</a:t>
+              <a:t>每一種感測器都是距離愈遠，表現就愈差</a:t>
             </a:r>
             <a:r>
               <a:rPr sz="1400" lang="zh-TW" dirty="0">
@@ -5071,7 +5071,7 @@
                 <a:ea typeface="Arial Unicode MS"/>
                 <a:cs typeface="Arial Unicode MS"/>
               </a:rPr>
-              <a:t>，只是差的方式不一樣。這也是第五週為什麼要算「四十公尺外的機車有幾個點」。</a:t>
+              <a:t>，只是變差的方式不一樣。這也是第五週為什麼要算「四十公尺外的機車有幾個點」。</a:t>
             </a:r>
           </a:p>
         </p:txBody>
@@ -5180,11 +5180,11 @@
                 <a:spcPts val="0"/>
               </a:spcBef>
               <a:spcAft>
-                <a:spcPts val="267"/>
+                <a:spcPts val="250"/>
               </a:spcAft>
             </a:pPr>
             <a:r>
-              <a:rPr sz="1600" b="1" lang="zh-TW" dirty="0">
+              <a:rPr sz="1500" b="1" lang="zh-TW" dirty="0">
                 <a:solidFill>
                   <a:srgbClr val="000000"/>
                 </a:solidFill>
@@ -5195,7 +5195,7 @@
               <a:t>這一張的目的：</a:t>
             </a:r>
             <a:r>
-              <a:rPr sz="1600" lang="zh-TW" dirty="0">
+              <a:rPr sz="1500" lang="zh-TW" dirty="0">
                 <a:solidFill>
                   <a:srgbClr val="000000"/>
                 </a:solidFill>
@@ -5213,11 +5213,11 @@
                 <a:spcPts val="0"/>
               </a:spcBef>
               <a:spcAft>
-                <a:spcPts val="267"/>
+                <a:spcPts val="250"/>
               </a:spcAft>
             </a:pPr>
             <a:r>
-              <a:rPr sz="1600" lang="zh-TW" dirty="0">
+              <a:rPr sz="1500" lang="zh-TW" dirty="0">
                 <a:solidFill>
                   <a:srgbClr val="000000"/>
                 </a:solidFill>
@@ -5235,22 +5235,22 @@
                 <a:spcPts val="0"/>
               </a:spcBef>
               <a:spcAft>
-                <a:spcPts val="267"/>
+                <a:spcPts val="250"/>
               </a:spcAft>
             </a:pPr>
             <a:r>
-              <a:rPr sz="1600" lang="zh-TW" dirty="0">
-                <a:solidFill>
-                  <a:srgbClr val="000000"/>
-                </a:solidFill>
-                <a:latin typeface="Arial Unicode MS"/>
-                <a:ea typeface="Arial Unicode MS"/>
-                <a:cs typeface="Arial Unicode MS"/>
-              </a:rPr>
-              <a:t>前面幾週，我們把感測器一顆一顆讀完，上週看了它們什麼時候會壞、怎麼合起來。感測器給的，其實只是</a:t>
-            </a:r>
-            <a:r>
-              <a:rPr sz="1600" b="1" lang="zh-TW" dirty="0">
+              <a:rPr sz="1500" lang="zh-TW" dirty="0">
+                <a:solidFill>
+                  <a:srgbClr val="000000"/>
+                </a:solidFill>
+                <a:latin typeface="Arial Unicode MS"/>
+                <a:ea typeface="Arial Unicode MS"/>
+                <a:cs typeface="Arial Unicode MS"/>
+              </a:rPr>
+              <a:t>前面幾週，我們把感測器一顆一顆讀完，上週看了每一種感測器在什麼情況下會失效，以及怎麼把幾種感測器的資料合起來用。感測器給的，其實只是</a:t>
+            </a:r>
+            <a:r>
+              <a:rPr sz="1500" b="1" lang="zh-TW" dirty="0">
                 <a:solidFill>
                   <a:srgbClr val="000000"/>
                 </a:solidFill>
@@ -5261,7 +5261,7 @@
               <a:t>原料</a:t>
             </a:r>
             <a:r>
-              <a:rPr sz="1600" lang="zh-TW" dirty="0">
+              <a:rPr sz="1500" lang="zh-TW" dirty="0">
                 <a:solidFill>
                   <a:srgbClr val="000000"/>
                 </a:solidFill>
@@ -5272,7 +5272,7 @@
               <a:t>：一張照片、一堆點、一串速度。這一週開始問：電腦拿到這些原料，</a:t>
             </a:r>
             <a:r>
-              <a:rPr sz="1600" b="1" lang="zh-TW" dirty="0">
+              <a:rPr sz="1500" b="1" lang="zh-TW" dirty="0">
                 <a:solidFill>
                   <a:srgbClr val="000000"/>
                 </a:solidFill>
@@ -5283,7 +5283,7 @@
               <a:t>怎麼看懂</a:t>
             </a:r>
             <a:r>
-              <a:rPr sz="1600" lang="zh-TW" dirty="0">
+              <a:rPr sz="1500" lang="zh-TW" dirty="0">
                 <a:solidFill>
                   <a:srgbClr val="000000"/>
                 </a:solidFill>
@@ -5301,11 +5301,11 @@
                 <a:spcPts val="0"/>
               </a:spcBef>
               <a:spcAft>
-                <a:spcPts val="267"/>
+                <a:spcPts val="250"/>
               </a:spcAft>
             </a:pPr>
             <a:r>
-              <a:rPr sz="1600" b="1" lang="zh-TW" dirty="0">
+              <a:rPr sz="1500" b="1" lang="zh-TW" dirty="0">
                 <a:solidFill>
                   <a:srgbClr val="000000"/>
                 </a:solidFill>
@@ -5316,15 +5316,15 @@
               <a:t>第 1 節，就是現在</a:t>
             </a:r>
             <a:r>
-              <a:rPr sz="1600" lang="zh-TW" dirty="0">
-                <a:solidFill>
-                  <a:srgbClr val="000000"/>
-                </a:solidFill>
-                <a:latin typeface="Arial Unicode MS"/>
-                <a:ea typeface="Arial Unicode MS"/>
-                <a:cs typeface="Arial Unicode MS"/>
-              </a:rPr>
-              <a:t>：電腦怎麼從一張照片，找出車和人。它會給什麼答案，什麼時候會漏掉。
+              <a:rPr sz="1500" lang="zh-TW" dirty="0">
+                <a:solidFill>
+                  <a:srgbClr val="000000"/>
+                </a:solidFill>
+                <a:latin typeface="Arial Unicode MS"/>
+                <a:ea typeface="Arial Unicode MS"/>
+                <a:cs typeface="Arial Unicode MS"/>
+              </a:rPr>
+              <a:t>：電腦怎麼從一張照片，找出車和人。模型會給出什麼樣的答案，以及在什麼情況下，照片裡明明有車或人，模型卻沒有找到。
 </a:t>
             </a:r>
           </a:p>
@@ -5334,11 +5334,11 @@
                 <a:spcPts val="0"/>
               </a:spcBef>
               <a:spcAft>
-                <a:spcPts val="267"/>
+                <a:spcPts val="250"/>
               </a:spcAft>
             </a:pPr>
             <a:r>
-              <a:rPr sz="1600" b="1" lang="zh-TW" dirty="0">
+              <a:rPr sz="1500" b="1" lang="zh-TW" dirty="0">
                 <a:solidFill>
                   <a:srgbClr val="000000"/>
                 </a:solidFill>
@@ -5349,7 +5349,7 @@
               <a:t>第 2 節</a:t>
             </a:r>
             <a:r>
-              <a:rPr sz="1600" lang="zh-TW" dirty="0">
+              <a:rPr sz="1500" lang="zh-TW" dirty="0">
                 <a:solidFill>
                   <a:srgbClr val="000000"/>
                 </a:solidFill>
@@ -5367,11 +5367,11 @@
                 <a:spcPts val="0"/>
               </a:spcBef>
               <a:spcAft>
-                <a:spcPts val="267"/>
+                <a:spcPts val="250"/>
               </a:spcAft>
             </a:pPr>
             <a:r>
-              <a:rPr sz="1600" b="1" lang="zh-TW" dirty="0">
+              <a:rPr sz="1500" b="1" lang="zh-TW" dirty="0">
                 <a:solidFill>
                   <a:srgbClr val="000000"/>
                 </a:solidFill>
@@ -5382,7 +5382,7 @@
               <a:t>第 3 節</a:t>
             </a:r>
             <a:r>
-              <a:rPr sz="1600" lang="zh-TW" dirty="0">
+              <a:rPr sz="1500" lang="zh-TW" dirty="0">
                 <a:solidFill>
                   <a:srgbClr val="000000"/>
                 </a:solidFill>
@@ -5393,7 +5393,7 @@
               <a:t>：期中複習。</a:t>
             </a:r>
             <a:r>
-              <a:rPr sz="1600" b="1" lang="zh-TW" dirty="0">
+              <a:rPr sz="1500" b="1" lang="zh-TW" dirty="0">
                 <a:solidFill>
                   <a:srgbClr val="000000"/>
                 </a:solidFill>
@@ -5404,7 +5404,7 @@
               <a:t>下星期四，十一月五日，期中考</a:t>
             </a:r>
             <a:r>
-              <a:rPr sz="1600" lang="zh-TW" dirty="0">
+              <a:rPr sz="1500" lang="zh-TW" dirty="0">
                 <a:solidFill>
                   <a:srgbClr val="000000"/>
                 </a:solidFill>
@@ -5422,11 +5422,11 @@
                 <a:spcPts val="0"/>
               </a:spcBef>
               <a:spcAft>
-                <a:spcPts val="267"/>
+                <a:spcPts val="250"/>
               </a:spcAft>
             </a:pPr>
             <a:r>
-              <a:rPr sz="1600" lang="zh-TW" dirty="0">
+              <a:rPr sz="1500" lang="zh-TW" dirty="0">
                 <a:solidFill>
                   <a:srgbClr val="000000"/>
                 </a:solidFill>
@@ -5566,7 +5566,7 @@
                 <a:ea typeface="Arial Unicode MS"/>
                 <a:cs typeface="Arial Unicode MS"/>
               </a:rPr>
-              <a:t>讓大家知道，同一個模型，晚上就會漏得比較多；這跟上週失效對照表「相機夜間變差」是同一件事。
+              <a:t>讓大家知道，同一個模型，到了晚上，漏掉沒抓到的行人就比較多；這跟上週失效對照表「相機夜間變差」是同一件事。
 </a:t>
             </a:r>
           </a:p>
@@ -5632,7 +5632,7 @@
                 <a:ea typeface="Arial Unicode MS"/>
                 <a:cs typeface="Arial Unicode MS"/>
               </a:rPr>
-              <a:t>把全部的夜間照片加起來，十到二十公尺的行人，白天抓到 66%，晚上只有 49%，三個人裡少抓了半個。
+              <a:t>把全部的夜間照片加起來，十到二十公尺的行人，白天抓到 66%，晚上只有 49%。也就是說，每六個行人，晚上大約就多漏掉一個。
 </a:t>
             </a:r>
           </a:p>
@@ -5885,7 +5885,7 @@
                 <a:ea typeface="Arial Unicode MS"/>
                 <a:cs typeface="Arial Unicode MS"/>
               </a:rPr>
-              <a:t>讓大家知道，照片上的框只知道方向、不知道距離；把光達的點放進框裡，才知道它有多遠。
+              <a:t>讓大家知道，照片上的框只告訴我們東西在哪個方向，不告訴我們它有多遠；把光達的點放進框裡，才知道它有多遠。
 </a:t>
             </a:r>
           </a:p>
@@ -7117,7 +7117,7 @@
                 <a:ea typeface="Arial Unicode MS"/>
                 <a:cs typeface="Arial Unicode MS"/>
               </a:rPr>
-              <a:t>分數拿來切門檻：門檻低，多報，車子亂煞；門檻高，漏掉，車子會撞。沒有一個門檻兩邊都好。
+              <a:t>分數拿來切門檻：門檻設得低，模型會多報出不存在的東西，車子就會為了它們亂煞車；門檻設得高，模型會漏掉真的人和車，車子就可能撞上去。沒有一個門檻兩邊都好。
 </a:t>
             </a:r>
           </a:p>
@@ -7150,7 +7150,7 @@
                 <a:ea typeface="Arial Unicode MS"/>
                 <a:cs typeface="Arial Unicode MS"/>
               </a:rPr>
-              <a:t>一遠、一暗就漏，人和機車比車先漏。</a:t>
+              <a:t>東西離得愈遠、光線愈暗，模型就愈容易漏掉；而且人和機車比車更早開始漏掉。</a:t>
             </a:r>
             <a:r>
               <a:rPr sz="1600" lang="zh-TW" dirty="0">
@@ -7623,7 +7623,7 @@
                 <a:ea typeface="Arial Unicode MS"/>
                 <a:cs typeface="Arial Unicode MS"/>
               </a:rPr>
-              <a:t>讓大家知道照片上的數字是怎麼量出來的：光變成電、電變成數字；顏色是靠濾色片分別量、再補起來的。
+              <a:t>讓大家知道照片上的數字是怎麼量出來的：光照進來先變成電，電再換算成數字；顏色是靠濾色片把紅、綠、藍分開來量，缺的顏色再用旁邊的格子補起來。
 </a:t>
             </a:r>
           </a:p>
@@ -10153,7 +10153,7 @@
                 <a:ea typeface="Arial Unicode MS"/>
                 <a:cs typeface="Arial Unicode MS"/>
               </a:rPr>
-              <a:t>：兩個問題都由人回答。人決定看「高除以寬」，人也決定「大於 1 就是人」。電腦只是照做，完全不用資料。好處是好懂、出錯好查；壞處就是上一張講的，情況一多，規則寫不完。
+              <a:t>：兩個問題都由人回答。人決定看「高除以寬」，人也決定「大於 1 就是人」。電腦只是照做，完全不用資料。好處是容易看懂，出錯的時候也容易查出是哪一條規則有問題；壞處就是上一張講的，情況一多，規則寫不完。
 </a:t>
             </a:r>
           </a:p>
@@ -10362,7 +10362,7 @@
                 <a:ea typeface="Arial Unicode MS"/>
                 <a:cs typeface="Arial Unicode MS"/>
               </a:rPr>
-              <a:t>寫規則，人決定看什麼也決定怎麼判斷；機器學習，人決定看什麼，電腦學怎麼判斷；深度學習，兩個都是電腦學。</a:t>
+              <a:t>寫規則，人決定看什麼也決定怎麼判斷；機器學習，人決定看什麼，電腦學怎麼判斷；深度學習，看什麼和怎麼判斷，兩個都是電腦自己學。</a:t>
             </a:r>
             <a:r>
               <a:rPr sz="1200" lang="zh-TW" dirty="0">
@@ -10395,7 +10395,7 @@
                 <a:ea typeface="Arial Unicode MS"/>
                 <a:cs typeface="Arial Unicode MS"/>
               </a:rPr>
-              <a:t>代價也跟著變：愈往右，要的資料愈多、電腦要愈強；愈往右也愈難知道它為什麼這樣判斷。今天自駕車看照片、看點雲，主流都是深度學習。</a:t>
+              <a:t>代價也跟著變：愈往右邊的做法，需要的資料愈多，電腦的運算能力也要愈強；而且愈往右，人愈難知道模型為什麼會這樣判斷。今天自駕車看照片、看點雲，主流都是深度學習。</a:t>
             </a:r>
           </a:p>
         </p:txBody>
@@ -10527,7 +10527,7 @@
                 <a:ea typeface="Arial Unicode MS"/>
                 <a:cs typeface="Arial Unicode MS"/>
               </a:rPr>
-              <a:t>用真的資料做一次傳統機器學習，讓大家看到「人選特徵、電腦學門檻」是什麼意思，以及它卡在哪裡。
+              <a:t>用真的資料做一次傳統機器學習，讓大家看到「人選特徵、電腦學門檻」是什麼意思，以及這種做法的限制在哪裡。
 </a:t>
             </a:r>
           </a:p>

--- a/第八週(10-29)/第八週_第1節_簡報.pptx
+++ b/第八週(10-29)/第八週_第1節_簡報.pptx
@@ -7292,11 +7292,11 @@
                 <a:spcPts val="0"/>
               </a:spcBef>
               <a:spcAft>
-                <a:spcPts val="267"/>
+                <a:spcPts val="175"/>
               </a:spcAft>
             </a:pPr>
             <a:r>
-              <a:rPr sz="1600" b="1" lang="zh-TW" dirty="0">
+              <a:rPr sz="1050" b="1" lang="zh-TW" dirty="0">
                 <a:solidFill>
                   <a:srgbClr val="000000"/>
                 </a:solidFill>
@@ -7307,7 +7307,7 @@
               <a:t>這一張的目的：</a:t>
             </a:r>
             <a:r>
-              <a:rPr sz="1600" lang="zh-TW" dirty="0">
+              <a:rPr sz="1050" lang="zh-TW" dirty="0">
                 <a:solidFill>
                   <a:srgbClr val="000000"/>
                 </a:solidFill>
@@ -7325,11 +7325,11 @@
                 <a:spcPts val="0"/>
               </a:spcBef>
               <a:spcAft>
-                <a:spcPts val="267"/>
+                <a:spcPts val="175"/>
               </a:spcAft>
             </a:pPr>
             <a:r>
-              <a:rPr sz="1600" lang="zh-TW" dirty="0">
+              <a:rPr sz="1050" lang="zh-TW" dirty="0">
                 <a:solidFill>
                   <a:srgbClr val="000000"/>
                 </a:solidFill>
@@ -7347,11 +7347,11 @@
                 <a:spcPts val="0"/>
               </a:spcBef>
               <a:spcAft>
-                <a:spcPts val="267"/>
+                <a:spcPts val="175"/>
               </a:spcAft>
             </a:pPr>
             <a:r>
-              <a:rPr sz="1600" lang="zh-TW" dirty="0">
+              <a:rPr sz="1050" lang="zh-TW" dirty="0">
                 <a:solidFill>
                   <a:srgbClr val="000000"/>
                 </a:solidFill>
@@ -7362,7 +7362,7 @@
               <a:t>左邊這張是上週看過的波士頓斑馬線，前方相機拍的。請看那個黃色的小框，很小，在一個人的肩膀附近。右邊，是把那個小框放大，裡面</a:t>
             </a:r>
             <a:r>
-              <a:rPr sz="1600" b="1" lang="zh-TW" dirty="0">
+              <a:rPr sz="1050" b="1" lang="zh-TW" dirty="0">
                 <a:solidFill>
                   <a:srgbClr val="000000"/>
                 </a:solidFill>
@@ -7373,7 +7373,7 @@
               <a:t>八乘八，六十四個像素</a:t>
             </a:r>
             <a:r>
-              <a:rPr sz="1600" lang="zh-TW" dirty="0">
+              <a:rPr sz="1050" lang="zh-TW" dirty="0">
                 <a:solidFill>
                   <a:srgbClr val="000000"/>
                 </a:solidFill>
@@ -7391,11 +7391,11 @@
                 <a:spcPts val="0"/>
               </a:spcBef>
               <a:spcAft>
-                <a:spcPts val="267"/>
+                <a:spcPts val="175"/>
               </a:spcAft>
             </a:pPr>
             <a:r>
-              <a:rPr sz="1600" lang="zh-TW" dirty="0">
+              <a:rPr sz="1050" lang="zh-TW" dirty="0">
                 <a:solidFill>
                   <a:srgbClr val="000000"/>
                 </a:solidFill>
@@ -7406,7 +7406,7 @@
               <a:t>整張照片有多少個這種數字？橫的一千六百個像素，直的九百個，每個像素三個數字：一千六乘九百乘三，</a:t>
             </a:r>
             <a:r>
-              <a:rPr sz="1600" b="1" lang="zh-TW" dirty="0">
+              <a:rPr sz="1050" b="1" lang="zh-TW" dirty="0">
                 <a:solidFill>
                   <a:srgbClr val="000000"/>
                 </a:solidFill>
@@ -7417,7 +7417,7 @@
               <a:t>四百三十二萬個數字</a:t>
             </a:r>
             <a:r>
-              <a:rPr sz="1600" lang="zh-TW" dirty="0">
+              <a:rPr sz="1050" lang="zh-TW" dirty="0">
                 <a:solidFill>
                   <a:srgbClr val="000000"/>
                 </a:solidFill>
@@ -7435,11 +7435,11 @@
                 <a:spcPts val="0"/>
               </a:spcBef>
               <a:spcAft>
-                <a:spcPts val="267"/>
+                <a:spcPts val="175"/>
               </a:spcAft>
             </a:pPr>
             <a:r>
-              <a:rPr sz="1600" lang="zh-TW" dirty="0">
+              <a:rPr sz="1050" lang="zh-TW" dirty="0">
                 <a:solidFill>
                   <a:srgbClr val="000000"/>
                 </a:solidFill>
@@ -7450,7 +7450,7 @@
               <a:t>各位可以想成一張超大的 Excel 表，每一格都是數字。</a:t>
             </a:r>
             <a:r>
-              <a:rPr sz="1600" b="1" lang="zh-TW" dirty="0">
+              <a:rPr sz="1050" b="1" lang="zh-TW" dirty="0">
                 <a:solidFill>
                   <a:srgbClr val="000000"/>
                 </a:solidFill>
@@ -7461,7 +7461,7 @@
               <a:t>沒有任何一格寫著「這是人」、「這是車」。</a:t>
             </a:r>
             <a:r>
-              <a:rPr sz="1600" lang="zh-TW" dirty="0">
+              <a:rPr sz="1050" lang="zh-TW" dirty="0">
                 <a:solidFill>
                   <a:srgbClr val="000000"/>
                 </a:solidFill>
@@ -7479,19 +7479,162 @@
                 <a:spcPts val="0"/>
               </a:spcBef>
               <a:spcAft>
-                <a:spcPts val="267"/>
+                <a:spcPts val="175"/>
               </a:spcAft>
             </a:pPr>
             <a:r>
-              <a:rPr sz="1600" lang="zh-TW" dirty="0">
-                <a:solidFill>
-                  <a:srgbClr val="000000"/>
-                </a:solidFill>
-                <a:latin typeface="Arial Unicode MS"/>
-                <a:ea typeface="Arial Unicode MS"/>
-                <a:cs typeface="Arial Unicode MS"/>
-              </a:rPr>
-              <a:t>接下來兩張，先弄清楚這些數字是什麼、怎麼來的，跟顏色是什麼關係；弄清楚了，再來回答今天的問題：電腦怎麼從數字裡找出人。</a:t>
+              <a:rPr sz="1050" lang="zh-TW" dirty="0">
+                <a:solidFill>
+                  <a:srgbClr val="000000"/>
+                </a:solidFill>
+                <a:latin typeface="Arial Unicode MS"/>
+                <a:ea typeface="Arial Unicode MS"/>
+                <a:cs typeface="Arial Unicode MS"/>
+              </a:rPr>
+              <a:t>接下來兩張，先弄清楚這些數字是什麼、怎麼來的，跟顏色是什麼關係；弄清楚了，再來回答今天的問題：電腦怎麼從數字裡找出人。
+</a:t>
+            </a:r>
+          </a:p>
+          <a:p>
+            <a:pPr algn="l">
+              <a:spcBef>
+                <a:spcPts val="0"/>
+              </a:spcBef>
+              <a:spcAft>
+                <a:spcPts val="175"/>
+              </a:spcAft>
+            </a:pPr>
+            <a:r>
+              <a:rPr sz="1050" lang="zh-TW" dirty="0">
+                <a:solidFill>
+                  <a:srgbClr val="000000"/>
+                </a:solidFill>
+                <a:latin typeface="Arial Unicode MS"/>
+                <a:ea typeface="Arial Unicode MS"/>
+                <a:cs typeface="Arial Unicode MS"/>
+              </a:rPr>
+              <a:t>在講之前，先看一支影片。這些數字是相機裡面那一塊</a:t>
+            </a:r>
+            <a:r>
+              <a:rPr sz="1050" b="1" lang="zh-TW" dirty="0">
+                <a:solidFill>
+                  <a:srgbClr val="000000"/>
+                </a:solidFill>
+                <a:latin typeface="Arial Unicode MS"/>
+                <a:ea typeface="Arial Unicode MS"/>
+                <a:cs typeface="Arial Unicode MS"/>
+              </a:rPr>
+              <a:t>影像感測器</a:t>
+            </a:r>
+            <a:r>
+              <a:rPr sz="1050" lang="zh-TW" dirty="0">
+                <a:solidFill>
+                  <a:srgbClr val="000000"/>
+                </a:solidFill>
+                <a:latin typeface="Arial Unicode MS"/>
+                <a:ea typeface="Arial Unicode MS"/>
+                <a:cs typeface="Arial Unicode MS"/>
+              </a:rPr>
+              <a:t>量出來的，影片會讓大家看到它的構造：每一個像素是一個很小的感光格子，光照進來變成電，電再被換成一個數字。下一張我再用中文，一步一步講一次。
+</a:t>
+            </a:r>
+          </a:p>
+          <a:p>
+            <a:pPr algn="l">
+              <a:spcBef>
+                <a:spcPts val="0"/>
+              </a:spcBef>
+              <a:spcAft>
+                <a:spcPts val="175"/>
+              </a:spcAft>
+            </a:pPr>
+            <a:r>
+              <a:rPr sz="1050" b="1" lang="zh-TW" dirty="0">
+                <a:solidFill>
+                  <a:srgbClr val="000000"/>
+                </a:solidFill>
+                <a:latin typeface="Arial Unicode MS"/>
+                <a:ea typeface="Arial Unicode MS"/>
+                <a:cs typeface="Arial Unicode MS"/>
+              </a:rPr>
+              <a:t>影片（Branch Education，英文，可開自動翻譯字幕）：從 7:47 播到 11:18。</a:t>
+            </a:r>
+            <a:r>
+              <a:rPr sz="1050" lang="zh-TW" dirty="0">
+                <a:solidFill>
+                  <a:srgbClr val="000000"/>
+                </a:solidFill>
+                <a:latin typeface="Arial Unicode MS"/>
+                <a:ea typeface="Arial Unicode MS"/>
+                <a:cs typeface="Arial Unicode MS"/>
+              </a:rPr>
+              <a:t>這一段講手機相機裡面的影像感測器。8:05 他說，相機的最後面是一大片很小的感光方格，每一格就是一個像素；8:20 說一台 1600 萬像素的相機，大約就有 1600 萬個這種格子。8:37 說每一格上面放了一個微透鏡和一片濾色片：微透鏡把光聚進來，濾色片把這一格指定成紅、綠或藍，只讓那一種顏色的光通過。8:53 說真正感光的部分叫做</a:t>
+            </a:r>
+            <a:r>
+              <a:rPr sz="1050" b="1" lang="zh-TW" dirty="0">
+                <a:solidFill>
+                  <a:srgbClr val="000000"/>
+                </a:solidFill>
+                <a:latin typeface="Arial Unicode MS"/>
+                <a:ea typeface="Arial Unicode MS"/>
+                <a:cs typeface="Arial Unicode MS"/>
+              </a:rPr>
+              <a:t>光電二極體</a:t>
+            </a:r>
+            <a:r>
+              <a:rPr sz="1050" lang="zh-TW" dirty="0">
+                <a:solidFill>
+                  <a:srgbClr val="000000"/>
+                </a:solidFill>
+                <a:latin typeface="Arial Unicode MS"/>
+                <a:ea typeface="Arial Unicode MS"/>
+                <a:cs typeface="Arial Unicode MS"/>
+              </a:rPr>
+              <a:t>，9:00 說它的作用很像太陽能板：吸收光，變成電。9:12 到 9:46 講原理：光子打進去，把原子裡的電子打出來，打出來的電子累積起來，就可以量得到。10:22 說要把一千六百萬格的值全部讀出來，還需要很多電路；10:35 說最常見的讀法是一列一列讀，每次只把一列送進</a:t>
+            </a:r>
+            <a:r>
+              <a:rPr sz="1050" b="1" lang="zh-TW" dirty="0">
+                <a:solidFill>
+                  <a:srgbClr val="000000"/>
+                </a:solidFill>
+                <a:latin typeface="Arial Unicode MS"/>
+                <a:ea typeface="Arial Unicode MS"/>
+                <a:cs typeface="Arial Unicode MS"/>
+              </a:rPr>
+              <a:t>類比數位轉換器</a:t>
+            </a:r>
+            <a:r>
+              <a:rPr sz="1050" lang="zh-TW" dirty="0">
+                <a:solidFill>
+                  <a:srgbClr val="000000"/>
+                </a:solidFill>
+                <a:latin typeface="Arial Unicode MS"/>
+                <a:ea typeface="Arial Unicode MS"/>
+                <a:cs typeface="Arial Unicode MS"/>
+              </a:rPr>
+              <a:t>；10:54 說它把累積的電子換成一個 0 到 4095 的數字，11:02 說這個數字存成 12 個位元。
+</a:t>
+            </a:r>
+          </a:p>
+          <a:p>
+            <a:pPr algn="l">
+              <a:spcBef>
+                <a:spcPts val="0"/>
+              </a:spcBef>
+              <a:spcAft>
+                <a:spcPts val="175"/>
+              </a:spcAft>
+            </a:pPr>
+            <a:r>
+              <a:rPr sz="1050" lang="zh-TW" dirty="0">
+                <a:solidFill>
+                  <a:srgbClr val="000000"/>
+                </a:solidFill>
+                <a:latin typeface="Arial Unicode MS"/>
+                <a:ea typeface="Arial Unicode MS"/>
+                <a:cs typeface="Arial Unicode MS"/>
+              </a:rPr>
+              <a:t>請注意這裡和我們的數字不一樣：12 個位元可以記 2 的 12 次方，4096 種，所以感測器量到的原始值是 0 到 4095；存成 JPEG 的時候，才壓成每種顏色 8 個位元，0 到 255，下一張會講。影片說明欄有寫，旁白在這裡把 4095 唸成了 4096，正確的是 4095。中間 10:05 到 10:18 他比較人眼和老鷹的感光細胞數量，跟今天的主題無關，可以不用解釋。</a:t>
             </a:r>
           </a:p>
         </p:txBody>
@@ -7600,11 +7743,11 @@
                 <a:spcPts val="0"/>
               </a:spcBef>
               <a:spcAft>
-                <a:spcPts val="150"/>
+                <a:spcPts val="142"/>
               </a:spcAft>
             </a:pPr>
             <a:r>
-              <a:rPr sz="900" b="1" lang="zh-TW" dirty="0">
+              <a:rPr sz="850" b="1" lang="zh-TW" dirty="0">
                 <a:solidFill>
                   <a:srgbClr val="000000"/>
                 </a:solidFill>
@@ -7615,7 +7758,7 @@
               <a:t>這一張的目的：</a:t>
             </a:r>
             <a:r>
-              <a:rPr sz="900" lang="zh-TW" dirty="0">
+              <a:rPr sz="850" lang="zh-TW" dirty="0">
                 <a:solidFill>
                   <a:srgbClr val="000000"/>
                 </a:solidFill>
@@ -7633,11 +7776,11 @@
                 <a:spcPts val="0"/>
               </a:spcBef>
               <a:spcAft>
-                <a:spcPts val="150"/>
+                <a:spcPts val="142"/>
               </a:spcAft>
             </a:pPr>
             <a:r>
-              <a:rPr sz="900" lang="zh-TW" dirty="0">
+              <a:rPr sz="850" lang="zh-TW" dirty="0">
                 <a:solidFill>
                   <a:srgbClr val="000000"/>
                 </a:solidFill>
@@ -7655,11 +7798,11 @@
                 <a:spcPts val="0"/>
               </a:spcBef>
               <a:spcAft>
-                <a:spcPts val="150"/>
+                <a:spcPts val="142"/>
               </a:spcAft>
             </a:pPr>
             <a:r>
-              <a:rPr sz="900" lang="zh-TW" dirty="0">
+              <a:rPr sz="850" lang="zh-TW" dirty="0">
                 <a:solidFill>
                   <a:srgbClr val="000000"/>
                 </a:solidFill>
@@ -7670,7 +7813,7 @@
               <a:t>相機裡面有一塊</a:t>
             </a:r>
             <a:r>
-              <a:rPr sz="900" b="1" lang="zh-TW" dirty="0">
+              <a:rPr sz="850" b="1" lang="zh-TW" dirty="0">
                 <a:solidFill>
                   <a:srgbClr val="000000"/>
                 </a:solidFill>
@@ -7681,7 +7824,7 @@
               <a:t>影像感測器</a:t>
             </a:r>
             <a:r>
-              <a:rPr sz="900" lang="zh-TW" dirty="0">
+              <a:rPr sz="850" lang="zh-TW" dirty="0">
                 <a:solidFill>
                   <a:srgbClr val="000000"/>
                 </a:solidFill>
@@ -7692,7 +7835,7 @@
               <a:t>，第五週讀過它的規格表。nuScenes 用的是 1/1.8 吋的 CMOS 感測器，照片是 1600 乘 900 個像素。可以把它想成</a:t>
             </a:r>
             <a:r>
-              <a:rPr sz="900" b="1" lang="zh-TW" dirty="0">
+              <a:rPr sz="850" b="1" lang="zh-TW" dirty="0">
                 <a:solidFill>
                   <a:srgbClr val="000000"/>
                 </a:solidFill>
@@ -7703,7 +7846,7 @@
               <a:t>一大片排得整整齊齊的小水桶</a:t>
             </a:r>
             <a:r>
-              <a:rPr sz="900" lang="zh-TW" dirty="0">
+              <a:rPr sz="850" lang="zh-TW" dirty="0">
                 <a:solidFill>
                   <a:srgbClr val="000000"/>
                 </a:solidFill>
@@ -7721,11 +7864,11 @@
                 <a:spcPts val="0"/>
               </a:spcBef>
               <a:spcAft>
-                <a:spcPts val="150"/>
+                <a:spcPts val="142"/>
               </a:spcAft>
             </a:pPr>
             <a:r>
-              <a:rPr sz="900" lang="zh-TW" dirty="0">
+              <a:rPr sz="850" lang="zh-TW" dirty="0">
                 <a:solidFill>
                   <a:srgbClr val="000000"/>
                 </a:solidFill>
@@ -7736,7 +7879,7 @@
               <a:t>按下快門，也就是</a:t>
             </a:r>
             <a:r>
-              <a:rPr sz="900" b="1" lang="zh-TW" dirty="0">
+              <a:rPr sz="850" b="1" lang="zh-TW" dirty="0">
                 <a:solidFill>
                   <a:srgbClr val="000000"/>
                 </a:solidFill>
@@ -7747,7 +7890,7 @@
               <a:t>曝光</a:t>
             </a:r>
             <a:r>
-              <a:rPr sz="900" lang="zh-TW" dirty="0">
+              <a:rPr sz="850" lang="zh-TW" dirty="0">
                 <a:solidFill>
                   <a:srgbClr val="000000"/>
                 </a:solidFill>
@@ -7758,7 +7901,7 @@
               <a:t>的那一小段時間，光照進來，就像下雨，每個小水桶接光。光愈多，桶子裡接到的電就愈多；曝光結束，晶片把每一桶的電量</a:t>
             </a:r>
             <a:r>
-              <a:rPr sz="900" b="1" lang="zh-TW" dirty="0">
+              <a:rPr sz="850" b="1" lang="zh-TW" dirty="0">
                 <a:solidFill>
                   <a:srgbClr val="000000"/>
                 </a:solidFill>
@@ -7769,7 +7912,7 @@
               <a:t>換算成一個數字</a:t>
             </a:r>
             <a:r>
-              <a:rPr sz="900" lang="zh-TW" dirty="0">
+              <a:rPr sz="850" lang="zh-TW" dirty="0">
                 <a:solidFill>
                   <a:srgbClr val="000000"/>
                 </a:solidFill>
@@ -7787,11 +7930,11 @@
                 <a:spcPts val="0"/>
               </a:spcBef>
               <a:spcAft>
-                <a:spcPts val="150"/>
+                <a:spcPts val="142"/>
               </a:spcAft>
             </a:pPr>
             <a:r>
-              <a:rPr sz="900" lang="zh-TW" dirty="0">
+              <a:rPr sz="850" lang="zh-TW" dirty="0">
                 <a:solidFill>
                   <a:srgbClr val="000000"/>
                 </a:solidFill>
@@ -7802,7 +7945,7 @@
               <a:t>可是請注意，小水桶</a:t>
             </a:r>
             <a:r>
-              <a:rPr sz="900" b="1" lang="zh-TW" dirty="0">
+              <a:rPr sz="850" b="1" lang="zh-TW" dirty="0">
                 <a:solidFill>
                   <a:srgbClr val="000000"/>
                 </a:solidFill>
@@ -7813,7 +7956,7 @@
               <a:t>只分得出接到多少光，分不出是什麼顏色</a:t>
             </a:r>
             <a:r>
-              <a:rPr sz="900" lang="zh-TW" dirty="0">
+              <a:rPr sz="850" lang="zh-TW" dirty="0">
                 <a:solidFill>
                   <a:srgbClr val="000000"/>
                 </a:solidFill>
@@ -7831,11 +7974,11 @@
                 <a:spcPts val="0"/>
               </a:spcBef>
               <a:spcAft>
-                <a:spcPts val="150"/>
+                <a:spcPts val="142"/>
               </a:spcAft>
             </a:pPr>
             <a:r>
-              <a:rPr sz="900" lang="zh-TW" dirty="0">
+              <a:rPr sz="850" lang="zh-TW" dirty="0">
                 <a:solidFill>
                   <a:srgbClr val="000000"/>
                 </a:solidFill>
@@ -7846,7 +7989,7 @@
               <a:t>那顏色怎麼來？在每一個小水桶上面，</a:t>
             </a:r>
             <a:r>
-              <a:rPr sz="900" b="1" lang="zh-TW" dirty="0">
+              <a:rPr sz="850" b="1" lang="zh-TW" dirty="0">
                 <a:solidFill>
                   <a:srgbClr val="000000"/>
                 </a:solidFill>
@@ -7857,7 +8000,7 @@
               <a:t>貼一片很小的濾色片</a:t>
             </a:r>
             <a:r>
-              <a:rPr sz="900" lang="zh-TW" dirty="0">
+              <a:rPr sz="850" lang="zh-TW" dirty="0">
                 <a:solidFill>
                   <a:srgbClr val="000000"/>
                 </a:solidFill>
@@ -7868,7 +8011,7 @@
               <a:t>：紅的、綠的、藍的，排成固定的花樣，最常見的是兩乘兩一組，一個紅、兩個綠、一個藍。貼了紅色濾色片的那一格，就只量得到紅光有多少。這就是中間那一格：每個像素</a:t>
             </a:r>
             <a:r>
-              <a:rPr sz="900" b="1" lang="zh-TW" dirty="0">
+              <a:rPr sz="850" b="1" lang="zh-TW" dirty="0">
                 <a:solidFill>
                   <a:srgbClr val="000000"/>
                 </a:solidFill>
@@ -7879,7 +8022,7 @@
               <a:t>只有一種顏色的數字</a:t>
             </a:r>
             <a:r>
-              <a:rPr sz="900" lang="zh-TW" dirty="0">
+              <a:rPr sz="850" lang="zh-TW" dirty="0">
                 <a:solidFill>
                   <a:srgbClr val="000000"/>
                 </a:solidFill>
@@ -7897,11 +8040,11 @@
                 <a:spcPts val="0"/>
               </a:spcBef>
               <a:spcAft>
-                <a:spcPts val="150"/>
+                <a:spcPts val="142"/>
               </a:spcAft>
             </a:pPr>
             <a:r>
-              <a:rPr sz="900" lang="zh-TW" dirty="0">
+              <a:rPr sz="850" lang="zh-TW" dirty="0">
                 <a:solidFill>
                   <a:srgbClr val="000000"/>
                 </a:solidFill>
@@ -7912,7 +8055,7 @@
               <a:t>為什麼綠色要兩個？因為</a:t>
             </a:r>
             <a:r>
-              <a:rPr sz="900" b="1" lang="zh-TW" dirty="0">
+              <a:rPr sz="850" b="1" lang="zh-TW" dirty="0">
                 <a:solidFill>
                   <a:srgbClr val="000000"/>
                 </a:solidFill>
@@ -7923,7 +8066,7 @@
               <a:t>人的眼睛對綠光最敏感</a:t>
             </a:r>
             <a:r>
-              <a:rPr sz="900" lang="zh-TW" dirty="0">
+              <a:rPr sz="850" lang="zh-TW" dirty="0">
                 <a:solidFill>
                   <a:srgbClr val="000000"/>
                 </a:solidFill>
@@ -7934,7 +8077,7 @@
               <a:t>，我們看到的「亮暗和細節」，大部分來自綠色。把一張彩色照片換成黑白時，常用的算法裡綠色就佔了將近六成（紅 0.30、綠 0.59、藍 0.11），左邊第一格就是這樣算的。所以多放一倍的綠，照片的</a:t>
             </a:r>
             <a:r>
-              <a:rPr sz="900" b="1" lang="zh-TW" dirty="0">
+              <a:rPr sz="850" b="1" lang="zh-TW" dirty="0">
                 <a:solidFill>
                   <a:srgbClr val="000000"/>
                 </a:solidFill>
@@ -7945,7 +8088,7 @@
               <a:t>清晰度</a:t>
             </a:r>
             <a:r>
-              <a:rPr sz="900" lang="zh-TW" dirty="0">
+              <a:rPr sz="850" lang="zh-TW" dirty="0">
                 <a:solidFill>
                   <a:srgbClr val="000000"/>
                 </a:solidFill>
@@ -7956,7 +8099,7 @@
               <a:t>比較好、雜訊比較少。代價是紅和藍各只佔四分之一，</a:t>
             </a:r>
             <a:r>
-              <a:rPr sz="900" b="1" lang="zh-TW" dirty="0">
+              <a:rPr sz="850" b="1" lang="zh-TW" dirty="0">
                 <a:solidFill>
                   <a:srgbClr val="000000"/>
                 </a:solidFill>
@@ -7967,7 +8110,7 @@
               <a:t>顏色的細節比較粗</a:t>
             </a:r>
             <a:r>
-              <a:rPr sz="900" lang="zh-TW" dirty="0">
+              <a:rPr sz="850" lang="zh-TW" dirty="0">
                 <a:solidFill>
                   <a:srgbClr val="000000"/>
                 </a:solidFill>
@@ -7985,11 +8128,11 @@
                 <a:spcPts val="0"/>
               </a:spcBef>
               <a:spcAft>
-                <a:spcPts val="150"/>
+                <a:spcPts val="142"/>
               </a:spcAft>
             </a:pPr>
             <a:r>
-              <a:rPr sz="900" lang="zh-TW" dirty="0">
+              <a:rPr sz="850" lang="zh-TW" dirty="0">
                 <a:solidFill>
                   <a:srgbClr val="000000"/>
                 </a:solidFill>
@@ -8000,7 +8143,7 @@
               <a:t>可是一個像素只量到一種顏色，另外兩種怎麼辦？相機的晶片會看旁邊的格子，把缺的兩個顏色</a:t>
             </a:r>
             <a:r>
-              <a:rPr sz="900" b="1" lang="zh-TW" dirty="0">
+              <a:rPr sz="850" b="1" lang="zh-TW" dirty="0">
                 <a:solidFill>
                   <a:srgbClr val="000000"/>
                 </a:solidFill>
@@ -8011,7 +8154,7 @@
               <a:t>估出來補上</a:t>
             </a:r>
             <a:r>
-              <a:rPr sz="900" lang="zh-TW" dirty="0">
+              <a:rPr sz="850" lang="zh-TW" dirty="0">
                 <a:solidFill>
                   <a:srgbClr val="000000"/>
                 </a:solidFill>
@@ -8029,11 +8172,11 @@
                 <a:spcPts val="0"/>
               </a:spcBef>
               <a:spcAft>
-                <a:spcPts val="150"/>
+                <a:spcPts val="142"/>
               </a:spcAft>
             </a:pPr>
             <a:r>
-              <a:rPr sz="900" lang="zh-TW" dirty="0">
+              <a:rPr sz="850" lang="zh-TW" dirty="0">
                 <a:solidFill>
                   <a:srgbClr val="000000"/>
                 </a:solidFill>
@@ -8044,7 +8187,7 @@
               <a:t>最後存成 JPEG 檔的時候，每種顏色用 </a:t>
             </a:r>
             <a:r>
-              <a:rPr sz="900" b="1" lang="zh-TW" dirty="0">
+              <a:rPr sz="850" b="1" lang="zh-TW" dirty="0">
                 <a:solidFill>
                   <a:srgbClr val="000000"/>
                 </a:solidFill>
@@ -8055,7 +8198,7 @@
               <a:t>8 個位元</a:t>
             </a:r>
             <a:r>
-              <a:rPr sz="900" lang="zh-TW" dirty="0">
+              <a:rPr sz="850" lang="zh-TW" dirty="0">
                 <a:solidFill>
                   <a:srgbClr val="000000"/>
                 </a:solidFill>
@@ -8066,7 +8209,7 @@
               <a:t>來記。8 個位元可以記 2 的 8 次方，256 種，所以數字是 </a:t>
             </a:r>
             <a:r>
-              <a:rPr sz="900" b="1" lang="zh-TW" dirty="0">
+              <a:rPr sz="850" b="1" lang="zh-TW" dirty="0">
                 <a:solidFill>
                   <a:srgbClr val="000000"/>
                 </a:solidFill>
@@ -8077,7 +8220,7 @@
               <a:t>0 到 255</a:t>
             </a:r>
             <a:r>
-              <a:rPr sz="900" lang="zh-TW" dirty="0">
+              <a:rPr sz="850" lang="zh-TW" dirty="0">
                 <a:solidFill>
                   <a:srgbClr val="000000"/>
                 </a:solidFill>
@@ -8095,11 +8238,11 @@
                 <a:spcPts val="0"/>
               </a:spcBef>
               <a:spcAft>
-                <a:spcPts val="150"/>
+                <a:spcPts val="142"/>
               </a:spcAft>
             </a:pPr>
             <a:r>
-              <a:rPr sz="900" lang="zh-TW" dirty="0">
+              <a:rPr sz="850" lang="zh-TW" dirty="0">
                 <a:solidFill>
                   <a:srgbClr val="000000"/>
                 </a:solidFill>
@@ -8110,7 +8253,7 @@
               <a:t>兩件事順便記一下。第一，nuScenes 的相機是</a:t>
             </a:r>
             <a:r>
-              <a:rPr sz="900" b="1" lang="zh-TW" dirty="0">
+              <a:rPr sz="850" b="1" lang="zh-TW" dirty="0">
                 <a:solidFill>
                   <a:srgbClr val="000000"/>
                 </a:solidFill>
@@ -8121,7 +8264,7 @@
               <a:t>自動曝光</a:t>
             </a:r>
             <a:r>
-              <a:rPr sz="900" lang="zh-TW" dirty="0">
+              <a:rPr sz="850" lang="zh-TW" dirty="0">
                 <a:solidFill>
                   <a:srgbClr val="000000"/>
                 </a:solidFill>
@@ -8132,7 +8275,7 @@
               <a:t>：太暗就讓水桶多接一點時間，太亮就少接一點。所以同一條白線，在不同照片裡數字不一定一樣。第二，桶子有大小，光太強就</a:t>
             </a:r>
             <a:r>
-              <a:rPr sz="900" b="1" lang="zh-TW" dirty="0">
+              <a:rPr sz="850" b="1" lang="zh-TW" dirty="0">
                 <a:solidFill>
                   <a:srgbClr val="000000"/>
                 </a:solidFill>
@@ -8143,7 +8286,7 @@
               <a:t>滿出來</a:t>
             </a:r>
             <a:r>
-              <a:rPr sz="900" lang="zh-TW" dirty="0">
+              <a:rPr sz="850" lang="zh-TW" dirty="0">
                 <a:solidFill>
                   <a:srgbClr val="000000"/>
                 </a:solidFill>
@@ -8161,11 +8304,11 @@
                 <a:spcPts val="0"/>
               </a:spcBef>
               <a:spcAft>
-                <a:spcPts val="150"/>
+                <a:spcPts val="142"/>
               </a:spcAft>
             </a:pPr>
             <a:r>
-              <a:rPr sz="900" lang="zh-TW" dirty="0">
+              <a:rPr sz="850" lang="zh-TW" dirty="0">
                 <a:solidFill>
                   <a:srgbClr val="000000"/>
                 </a:solidFill>
@@ -8183,22 +8326,55 @@
                 <a:spcPts val="0"/>
               </a:spcBef>
               <a:spcAft>
-                <a:spcPts val="150"/>
+                <a:spcPts val="142"/>
               </a:spcAft>
             </a:pPr>
             <a:r>
-              <a:rPr sz="900" b="1" lang="zh-TW" dirty="0">
-                <a:solidFill>
-                  <a:srgbClr val="000000"/>
-                </a:solidFill>
-                <a:latin typeface="Arial Unicode MS"/>
-                <a:ea typeface="Arial Unicode MS"/>
-                <a:cs typeface="Arial Unicode MS"/>
-              </a:rPr>
-              <a:t>影片（Computerphile，英文，可開自動翻譯字幕）：從 0:17 播到 3:25。</a:t>
-            </a:r>
-            <a:r>
-              <a:rPr sz="900" lang="zh-TW" dirty="0">
+              <a:rPr sz="850" b="1" lang="zh-TW" dirty="0">
+                <a:solidFill>
+                  <a:srgbClr val="000000"/>
+                </a:solidFill>
+                <a:latin typeface="Arial Unicode MS"/>
+                <a:ea typeface="Arial Unicode MS"/>
+                <a:cs typeface="Arial Unicode MS"/>
+              </a:rPr>
+              <a:t>第一支影片（CreativeLive，攝影老師 John Greengo，英文，可開自動翻譯字幕）：從 0:13 播到 1:27。</a:t>
+            </a:r>
+            <a:r>
+              <a:rPr sz="850" lang="zh-TW" dirty="0">
+                <a:solidFill>
+                  <a:srgbClr val="000000"/>
+                </a:solidFill>
+                <a:latin typeface="Arial Unicode MS"/>
+                <a:ea typeface="Arial Unicode MS"/>
+                <a:cs typeface="Arial Unicode MS"/>
+              </a:rPr>
+              <a:t>他用的就是我們剛剛的比喻：把每一個像素想成一個接雨水的水桶。0:23 他說，桶子整個接滿，相機就知道這一格是白的；0:37 說只接到一半，就是灰的；0:51 說只接到一點點，就是暗的。1:04 他說，如果把相機直接對著太陽，光多到水桶滿出來，多出來的光不會被記下來，他用的詞是 clipped，也就是我們講的過曝，數字頂到 255，那一塊只剩一片白。這一段他先不管顏色，只講從黑到白。1:27 以後他接著講 ISO 和雜訊，今天不播。
+</a:t>
+            </a:r>
+          </a:p>
+          <a:p>
+            <a:pPr algn="l">
+              <a:spcBef>
+                <a:spcPts val="0"/>
+              </a:spcBef>
+              <a:spcAft>
+                <a:spcPts val="142"/>
+              </a:spcAft>
+            </a:pPr>
+            <a:r>
+              <a:rPr sz="850" b="1" lang="zh-TW" dirty="0">
+                <a:solidFill>
+                  <a:srgbClr val="000000"/>
+                </a:solidFill>
+                <a:latin typeface="Arial Unicode MS"/>
+                <a:ea typeface="Arial Unicode MS"/>
+                <a:cs typeface="Arial Unicode MS"/>
+              </a:rPr>
+              <a:t>第二支影片（Computerphile，英文，可開自動翻譯字幕）：從 0:17 播到 3:25。</a:t>
+            </a:r>
+            <a:r>
+              <a:rPr sz="850" lang="zh-TW" dirty="0">
                 <a:solidFill>
                   <a:srgbClr val="000000"/>
                 </a:solidFill>
@@ -24367,8 +24543,8 @@
         </p:nvSpPr>
         <p:spPr>
           <a:xfrm>
-            <a:off x="1374038" y="1371600"/>
-            <a:ext cx="6395923" cy="3017520"/>
+            <a:off x="1783690" y="1371600"/>
+            <a:ext cx="5576621" cy="2633472"/>
           </a:xfrm>
           <a:prstGeom prst="rect">
             <a:avLst/>
@@ -24400,8 +24576,8 @@
         </p:blipFill>
         <p:spPr>
           <a:xfrm>
-            <a:off x="1392326" y="1389888"/>
-            <a:ext cx="6359347" cy="2980944"/>
+            <a:off x="1801978" y="1389888"/>
+            <a:ext cx="5540045" cy="2596896"/>
           </a:xfrm>
           <a:prstGeom prst="rect">
             <a:avLst/>
@@ -24416,7 +24592,7 @@
         </p:nvSpPr>
         <p:spPr>
           <a:xfrm>
-            <a:off x="502920" y="4407408"/>
+            <a:off x="502920" y="4023360"/>
             <a:ext cx="8138160" cy="201168"/>
           </a:xfrm>
           <a:prstGeom prst="rect">
@@ -24447,16 +24623,172 @@
           </a:p>
         </p:txBody>
       </p:sp>
+      <p:sp>
+        <p:nvSpPr>
+          <p:cNvPr id="7" name="Shape 4"/>
+          <p:cNvSpPr/>
+          <p:nvPr/>
+        </p:nvSpPr>
+        <p:spPr>
+          <a:xfrm>
+            <a:off x="539496" y="4288536"/>
+            <a:ext cx="219456" cy="219456"/>
+          </a:xfrm>
+          <a:prstGeom prst="ellipse">
+            <a:avLst/>
+          </a:prstGeom>
+          <a:solidFill>
+            <a:srgbClr val="D9463E"/>
+          </a:solidFill>
+          <a:ln/>
+        </p:spPr>
+      </p:sp>
+      <p:sp>
+        <p:nvSpPr>
+          <p:cNvPr id="8" name="Text 5"/>
+          <p:cNvSpPr txBox="1"/>
+          <p:nvPr/>
+        </p:nvSpPr>
+        <p:spPr>
+          <a:xfrm>
+            <a:off x="539496" y="4315968"/>
+            <a:ext cx="219456" cy="164592"/>
+          </a:xfrm>
+          <a:prstGeom prst="rect">
+            <a:avLst/>
+          </a:prstGeom>
+          <a:noFill/>
+          <a:ln/>
+        </p:spPr>
+        <p:txBody>
+          <a:bodyPr wrap="square" lIns="0" tIns="0" rIns="0" bIns="0" rtlCol="0" anchor="ctr"/>
+          <a:lstStyle/>
+          <a:p>
+            <a:pPr algn="ctr" indent="0" marL="0">
+              <a:buNone/>
+            </a:pPr>
+            <a:r>
+              <a:rPr lang="en-US" sz="750" b="1" dirty="0">
+                <a:solidFill>
+                  <a:srgbClr val="FFFFFF"/>
+                </a:solidFill>
+                <a:latin typeface="Arial" pitchFamily="34" charset="0"/>
+                <a:ea typeface="Arial" pitchFamily="34" charset="-122"/>
+                <a:cs typeface="Arial" pitchFamily="34" charset="-120"/>
+              </a:rPr>
+              <a:t>▶</a:t>
+            </a:r>
+            <a:endParaRPr lang="en-US" sz="750" dirty="0"/>
+          </a:p>
+        </p:txBody>
+      </p:sp>
+      <p:sp>
+        <p:nvSpPr>
+          <p:cNvPr id="9" name="Text 6"/>
+          <p:cNvSpPr txBox="1"/>
+          <p:nvPr/>
+        </p:nvSpPr>
+        <p:spPr>
+          <a:xfrm>
+            <a:off x="832104" y="4261104"/>
+            <a:ext cx="7808976" cy="274320"/>
+          </a:xfrm>
+          <a:prstGeom prst="rect">
+            <a:avLst/>
+          </a:prstGeom>
+          <a:noFill/>
+          <a:ln/>
+        </p:spPr>
+        <p:txBody>
+          <a:bodyPr wrap="square" lIns="0" tIns="0" rIns="0" bIns="0" rtlCol="0" anchor="ctr"/>
+          <a:lstStyle/>
+          <a:p>
+            <a:pPr indent="0" marL="0">
+              <a:lnSpc>
+                <a:spcPct val="100000"/>
+              </a:lnSpc>
+              <a:buNone/>
+            </a:pPr>
+            <a:r>
+              <a:rPr lang="en-US" sz="900" b="1" u="sng" dirty="0">
+                <a:solidFill>
+                  <a:srgbClr val="0B1F3A"/>
+                </a:solidFill>
+                <a:latin typeface="Arial" pitchFamily="34" charset="0"/>
+                <a:ea typeface="Arial" pitchFamily="34" charset="-122"/>
+                <a:cs typeface="Arial" pitchFamily="34" charset="-120"/>
+                <a:hlinkClick r:id="rId2" invalidUrl="" action="" tgtFrame="" tooltip="" history="1" highlightClick="0" endSnd="0">
+                  <a:extLst>
+                    <a:ext uri="{A12FA001-AC4F-418D-AE19-62706E023703}">
+                      <ahyp:hlinkClr xmlns:ahyp="http://schemas.microsoft.com/office/drawing/2018/hyperlinkcolor" val="tx"/>
+                    </a:ext>
+                  </a:extLst>
+                </a:hlinkClick>
+              </a:rPr>
+              <a:t>Video: cảm biến ảnh (Branch Education) · </a:t>
+            </a:r>
+            <a:pPr indent="0" marL="0">
+              <a:lnSpc>
+                <a:spcPct val="100000"/>
+              </a:lnSpc>
+              <a:buNone/>
+            </a:pPr>
+            <a:r>
+              <a:rPr lang="en-US" sz="900" b="1" u="sng" dirty="0">
+                <a:solidFill>
+                  <a:srgbClr val="0B1F3A"/>
+                </a:solidFill>
+                <a:latin typeface="微軟正黑體" pitchFamily="34" charset="0"/>
+                <a:ea typeface="微軟正黑體" pitchFamily="34" charset="-122"/>
+                <a:cs typeface="微軟正黑體" pitchFamily="34" charset="-120"/>
+                <a:hlinkClick r:id="rId2" invalidUrl="" action="" tgtFrame="" tooltip="" history="1" highlightClick="0" endSnd="0">
+                  <a:extLst>
+                    <a:ext uri="{A12FA001-AC4F-418D-AE19-62706E023703}">
+                      <ahyp:hlinkClr xmlns:ahyp="http://schemas.microsoft.com/office/drawing/2018/hyperlinkcolor" val="tx"/>
+                    </a:ext>
+                  </a:extLst>
+                </a:hlinkClick>
+              </a:rPr>
+              <a:t>影片：影像感測器把光變成數字（Branch Education）　7:47–11:18　</a:t>
+            </a:r>
+            <a:pPr indent="0" marL="0">
+              <a:lnSpc>
+                <a:spcPct val="100000"/>
+              </a:lnSpc>
+              <a:buNone/>
+            </a:pPr>
+            <a:r>
+              <a:rPr lang="en-US" sz="900" u="sng" dirty="0">
+                <a:solidFill>
+                  <a:srgbClr val="1F6FBF"/>
+                </a:solidFill>
+                <a:latin typeface="Arial" pitchFamily="34" charset="0"/>
+                <a:ea typeface="Arial" pitchFamily="34" charset="-122"/>
+                <a:cs typeface="Arial" pitchFamily="34" charset="-120"/>
+                <a:hlinkClick r:id="rId2" invalidUrl="" action="" tgtFrame="" tooltip="" history="1" highlightClick="0" endSnd="0">
+                  <a:extLst>
+                    <a:ext uri="{A12FA001-AC4F-418D-AE19-62706E023703}">
+                      <ahyp:hlinkClr xmlns:ahyp="http://schemas.microsoft.com/office/drawing/2018/hyperlinkcolor" val="tx"/>
+                    </a:ext>
+                  </a:extLst>
+                </a:hlinkClick>
+              </a:rPr>
+              <a:t>youtu.be/B7Dopv6kzJA?t=467</a:t>
+            </a:r>
+            <a:endParaRPr lang="en-US" sz="900" dirty="0"/>
+          </a:p>
+        </p:txBody>
+      </p:sp>
       <p:pic>
         <p:nvPicPr>
-          <p:cNvPr id="8" name="Image 1" descr="/Users/tsengchenghsun/Class/carClass/Claude outputs/第八週(10-29)/src/logo.png">    </p:cNvPr>
+          <p:cNvPr id="11" name="Image 1" descr="/Users/tsengchenghsun/Class/carClass/Claude outputs/第八週(10-29)/src/logo.png">    </p:cNvPr>
           <p:cNvPicPr>
             <a:picLocks noChangeAspect="1"/>
           </p:cNvPicPr>
           <p:nvPr/>
         </p:nvPicPr>
         <p:blipFill>
-          <a:blip r:embed="rId2"/>
+          <a:blip r:embed="rId3"/>
           <a:stretch>
             <a:fillRect/>
           </a:stretch>
@@ -24473,7 +24805,7 @@
       </p:pic>
       <p:sp>
         <p:nvSpPr>
-          <p:cNvPr id="9" name="Text 4"/>
+          <p:cNvPr id="12" name="Text 7"/>
           <p:cNvSpPr txBox="1"/>
           <p:nvPr/>
         </p:nvSpPr>
@@ -24512,7 +24844,7 @@
       </p:sp>
       <p:sp>
         <p:nvSpPr>
-          <p:cNvPr id="10" name="Text 5"/>
+          <p:cNvPr id="13" name="Text 8"/>
           <p:cNvSpPr txBox="1"/>
           <p:nvPr/>
         </p:nvSpPr>
@@ -24771,7 +25103,7 @@
         </p:nvSpPr>
         <p:spPr>
           <a:xfrm>
-            <a:off x="539496" y="4288536"/>
+            <a:off x="539496" y="4306824"/>
             <a:ext cx="219456" cy="219456"/>
           </a:xfrm>
           <a:prstGeom prst="ellipse">
@@ -24791,7 +25123,7 @@
         </p:nvSpPr>
         <p:spPr>
           <a:xfrm>
-            <a:off x="539496" y="4315968"/>
+            <a:off x="539496" y="4334256"/>
             <a:ext cx="219456" cy="164592"/>
           </a:xfrm>
           <a:prstGeom prst="rect">
@@ -24831,7 +25163,7 @@
         <p:spPr>
           <a:xfrm>
             <a:off x="832104" y="4261104"/>
-            <a:ext cx="7808976" cy="274320"/>
+            <a:ext cx="3625596" cy="310896"/>
           </a:xfrm>
           <a:prstGeom prst="rect">
             <a:avLst/>
@@ -24850,7 +25182,7 @@
               <a:buNone/>
             </a:pPr>
             <a:r>
-              <a:rPr lang="en-US" sz="900" b="1" u="sng" dirty="0">
+              <a:rPr lang="en-US" sz="850" b="1" u="sng" dirty="0">
                 <a:solidFill>
                   <a:srgbClr val="0B1F3A"/>
                 </a:solidFill>
@@ -24865,8 +25197,11 @@
                   </a:extLst>
                 </a:hlinkClick>
               </a:rPr>
-              <a:t>Video: bộ lọc Bayer (Computerphile) · </a:t>
-            </a:r>
+              <a:t>Video: điểm ảnh như cái xô (CreativeLive)　0:13–1:27</a:t>
+            </a:r>
+            <a:endParaRPr lang="en-US" sz="850" dirty="0"/>
+          </a:p>
+          <a:p>
             <a:pPr indent="0" marL="0">
               <a:lnSpc>
                 <a:spcPct val="100000"/>
@@ -24874,7 +25209,7 @@
               <a:buNone/>
             </a:pPr>
             <a:r>
-              <a:rPr lang="en-US" sz="900" b="1" u="sng" dirty="0">
+              <a:rPr lang="en-US" sz="850" b="1" u="sng" dirty="0">
                 <a:solidFill>
                   <a:srgbClr val="0B1F3A"/>
                 </a:solidFill>
@@ -24889,7 +25224,7 @@
                   </a:extLst>
                 </a:hlinkClick>
               </a:rPr>
-              <a:t>影片：Bayer 濾色片（Computerphile）　0:17–3:25　</a:t>
+              <a:t>影片：像素像水桶（CreativeLive）　</a:t>
             </a:r>
             <a:pPr indent="0" marL="0">
               <a:lnSpc>
@@ -24898,7 +25233,7 @@
               <a:buNone/>
             </a:pPr>
             <a:r>
-              <a:rPr lang="en-US" sz="900" u="sng" dirty="0">
+              <a:rPr lang="en-US" sz="850" u="sng" dirty="0">
                 <a:solidFill>
                   <a:srgbClr val="1F6FBF"/>
                 </a:solidFill>
@@ -24913,22 +25248,181 @@
                   </a:extLst>
                 </a:hlinkClick>
               </a:rPr>
+              <a:t>youtu.be/BsXIQkhsxEM?t=13</a:t>
+            </a:r>
+            <a:endParaRPr lang="en-US" sz="850" dirty="0"/>
+          </a:p>
+        </p:txBody>
+      </p:sp>
+      <p:sp>
+        <p:nvSpPr>
+          <p:cNvPr id="10" name="Shape 7"/>
+          <p:cNvSpPr/>
+          <p:nvPr/>
+        </p:nvSpPr>
+        <p:spPr>
+          <a:xfrm>
+            <a:off x="4722876" y="4306824"/>
+            <a:ext cx="219456" cy="219456"/>
+          </a:xfrm>
+          <a:prstGeom prst="ellipse">
+            <a:avLst/>
+          </a:prstGeom>
+          <a:solidFill>
+            <a:srgbClr val="D9463E"/>
+          </a:solidFill>
+          <a:ln/>
+        </p:spPr>
+      </p:sp>
+      <p:sp>
+        <p:nvSpPr>
+          <p:cNvPr id="11" name="Text 8"/>
+          <p:cNvSpPr txBox="1"/>
+          <p:nvPr/>
+        </p:nvSpPr>
+        <p:spPr>
+          <a:xfrm>
+            <a:off x="4722876" y="4334256"/>
+            <a:ext cx="219456" cy="164592"/>
+          </a:xfrm>
+          <a:prstGeom prst="rect">
+            <a:avLst/>
+          </a:prstGeom>
+          <a:noFill/>
+          <a:ln/>
+        </p:spPr>
+        <p:txBody>
+          <a:bodyPr wrap="square" lIns="0" tIns="0" rIns="0" bIns="0" rtlCol="0" anchor="ctr"/>
+          <a:lstStyle/>
+          <a:p>
+            <a:pPr algn="ctr" indent="0" marL="0">
+              <a:buNone/>
+            </a:pPr>
+            <a:r>
+              <a:rPr lang="en-US" sz="750" b="1" dirty="0">
+                <a:solidFill>
+                  <a:srgbClr val="FFFFFF"/>
+                </a:solidFill>
+                <a:latin typeface="Arial" pitchFamily="34" charset="0"/>
+                <a:ea typeface="Arial" pitchFamily="34" charset="-122"/>
+                <a:cs typeface="Arial" pitchFamily="34" charset="-120"/>
+              </a:rPr>
+              <a:t>▶</a:t>
+            </a:r>
+            <a:endParaRPr lang="en-US" sz="750" dirty="0"/>
+          </a:p>
+        </p:txBody>
+      </p:sp>
+      <p:sp>
+        <p:nvSpPr>
+          <p:cNvPr id="12" name="Text 9"/>
+          <p:cNvSpPr txBox="1"/>
+          <p:nvPr/>
+        </p:nvSpPr>
+        <p:spPr>
+          <a:xfrm>
+            <a:off x="5015484" y="4261104"/>
+            <a:ext cx="3625596" cy="310896"/>
+          </a:xfrm>
+          <a:prstGeom prst="rect">
+            <a:avLst/>
+          </a:prstGeom>
+          <a:noFill/>
+          <a:ln/>
+        </p:spPr>
+        <p:txBody>
+          <a:bodyPr wrap="square" lIns="0" tIns="0" rIns="0" bIns="0" rtlCol="0" anchor="ctr"/>
+          <a:lstStyle/>
+          <a:p>
+            <a:pPr indent="0" marL="0">
+              <a:lnSpc>
+                <a:spcPct val="100000"/>
+              </a:lnSpc>
+              <a:buNone/>
+            </a:pPr>
+            <a:r>
+              <a:rPr lang="en-US" sz="850" b="1" u="sng" dirty="0">
+                <a:solidFill>
+                  <a:srgbClr val="0B1F3A"/>
+                </a:solidFill>
+                <a:latin typeface="Arial" pitchFamily="34" charset="0"/>
+                <a:ea typeface="Arial" pitchFamily="34" charset="-122"/>
+                <a:cs typeface="Arial" pitchFamily="34" charset="-120"/>
+                <a:hlinkClick r:id="rId3" invalidUrl="" action="" tgtFrame="" tooltip="" history="1" highlightClick="0" endSnd="0">
+                  <a:extLst>
+                    <a:ext uri="{A12FA001-AC4F-418D-AE19-62706E023703}">
+                      <ahyp:hlinkClr xmlns:ahyp="http://schemas.microsoft.com/office/drawing/2018/hyperlinkcolor" val="tx"/>
+                    </a:ext>
+                  </a:extLst>
+                </a:hlinkClick>
+              </a:rPr>
+              <a:t>Video: bộ lọc Bayer (Computerphile)　0:17–3:25</a:t>
+            </a:r>
+            <a:endParaRPr lang="en-US" sz="850" dirty="0"/>
+          </a:p>
+          <a:p>
+            <a:pPr indent="0" marL="0">
+              <a:lnSpc>
+                <a:spcPct val="100000"/>
+              </a:lnSpc>
+              <a:buNone/>
+            </a:pPr>
+            <a:r>
+              <a:rPr lang="en-US" sz="850" b="1" u="sng" dirty="0">
+                <a:solidFill>
+                  <a:srgbClr val="0B1F3A"/>
+                </a:solidFill>
+                <a:latin typeface="微軟正黑體" pitchFamily="34" charset="0"/>
+                <a:ea typeface="微軟正黑體" pitchFamily="34" charset="-122"/>
+                <a:cs typeface="微軟正黑體" pitchFamily="34" charset="-120"/>
+                <a:hlinkClick r:id="rId3" invalidUrl="" action="" tgtFrame="" tooltip="" history="1" highlightClick="0" endSnd="0">
+                  <a:extLst>
+                    <a:ext uri="{A12FA001-AC4F-418D-AE19-62706E023703}">
+                      <ahyp:hlinkClr xmlns:ahyp="http://schemas.microsoft.com/office/drawing/2018/hyperlinkcolor" val="tx"/>
+                    </a:ext>
+                  </a:extLst>
+                </a:hlinkClick>
+              </a:rPr>
+              <a:t>影片：Bayer 濾色片（Computerphile）　</a:t>
+            </a:r>
+            <a:pPr indent="0" marL="0">
+              <a:lnSpc>
+                <a:spcPct val="100000"/>
+              </a:lnSpc>
+              <a:buNone/>
+            </a:pPr>
+            <a:r>
+              <a:rPr lang="en-US" sz="850" u="sng" dirty="0">
+                <a:solidFill>
+                  <a:srgbClr val="1F6FBF"/>
+                </a:solidFill>
+                <a:latin typeface="Arial" pitchFamily="34" charset="0"/>
+                <a:ea typeface="Arial" pitchFamily="34" charset="-122"/>
+                <a:cs typeface="Arial" pitchFamily="34" charset="-120"/>
+                <a:hlinkClick r:id="rId3" invalidUrl="" action="" tgtFrame="" tooltip="" history="1" highlightClick="0" endSnd="0">
+                  <a:extLst>
+                    <a:ext uri="{A12FA001-AC4F-418D-AE19-62706E023703}">
+                      <ahyp:hlinkClr xmlns:ahyp="http://schemas.microsoft.com/office/drawing/2018/hyperlinkcolor" val="tx"/>
+                    </a:ext>
+                  </a:extLst>
+                </a:hlinkClick>
+              </a:rPr>
               <a:t>youtu.be/LWxu4rkZBLw?t=17</a:t>
             </a:r>
-            <a:endParaRPr lang="en-US" sz="900" dirty="0"/>
+            <a:endParaRPr lang="en-US" sz="850" dirty="0"/>
           </a:p>
         </p:txBody>
       </p:sp>
       <p:pic>
         <p:nvPicPr>
-          <p:cNvPr id="11" name="Image 1" descr="/Users/tsengchenghsun/Class/carClass/Claude outputs/第八週(10-29)/src/logo.png">    </p:cNvPr>
+          <p:cNvPr id="14" name="Image 1" descr="/Users/tsengchenghsun/Class/carClass/Claude outputs/第八週(10-29)/src/logo.png">    </p:cNvPr>
           <p:cNvPicPr>
             <a:picLocks noChangeAspect="1"/>
           </p:cNvPicPr>
           <p:nvPr/>
         </p:nvPicPr>
         <p:blipFill>
-          <a:blip r:embed="rId3"/>
+          <a:blip r:embed="rId4"/>
           <a:stretch>
             <a:fillRect/>
           </a:stretch>
@@ -24945,7 +25439,7 @@
       </p:pic>
       <p:sp>
         <p:nvSpPr>
-          <p:cNvPr id="12" name="Text 7"/>
+          <p:cNvPr id="15" name="Text 10"/>
           <p:cNvSpPr txBox="1"/>
           <p:nvPr/>
         </p:nvSpPr>
@@ -24984,7 +25478,7 @@
       </p:sp>
       <p:sp>
         <p:nvSpPr>
-          <p:cNvPr id="13" name="Text 8"/>
+          <p:cNvPr id="16" name="Text 11"/>
           <p:cNvSpPr txBox="1"/>
           <p:nvPr/>
         </p:nvSpPr>

--- a/第八週(10-29)/第八週_第1節_簡報.pptx
+++ b/第八週(10-29)/第八週_第1節_簡報.pptx
@@ -9228,11 +9228,11 @@
                 <a:spcPts val="0"/>
               </a:spcBef>
               <a:spcAft>
-                <a:spcPts val="183"/>
+                <a:spcPts val="133"/>
               </a:spcAft>
             </a:pPr>
             <a:r>
-              <a:rPr sz="1100" b="1" lang="zh-TW" dirty="0">
+              <a:rPr sz="800" b="1" lang="zh-TW" dirty="0">
                 <a:solidFill>
                   <a:srgbClr val="000000"/>
                 </a:solidFill>
@@ -9243,7 +9243,7 @@
               <a:t>這一張的目的：</a:t>
             </a:r>
             <a:r>
-              <a:rPr sz="1100" lang="zh-TW" dirty="0">
+              <a:rPr sz="800" lang="zh-TW" dirty="0">
                 <a:solidFill>
                   <a:srgbClr val="000000"/>
                 </a:solidFill>
@@ -9261,11 +9261,11 @@
                 <a:spcPts val="0"/>
               </a:spcBef>
               <a:spcAft>
-                <a:spcPts val="183"/>
+                <a:spcPts val="133"/>
               </a:spcAft>
             </a:pPr>
             <a:r>
-              <a:rPr sz="1100" lang="zh-TW" dirty="0">
+              <a:rPr sz="800" lang="zh-TW" dirty="0">
                 <a:solidFill>
                   <a:srgbClr val="000000"/>
                 </a:solidFill>
@@ -9283,11 +9283,11 @@
                 <a:spcPts val="0"/>
               </a:spcBef>
               <a:spcAft>
-                <a:spcPts val="183"/>
+                <a:spcPts val="133"/>
               </a:spcAft>
             </a:pPr>
             <a:r>
-              <a:rPr sz="1100" lang="zh-TW" dirty="0">
+              <a:rPr sz="800" lang="zh-TW" dirty="0">
                 <a:solidFill>
                   <a:srgbClr val="000000"/>
                 </a:solidFill>
@@ -9298,7 +9298,7 @@
               <a:t>看上排。只開紅的，</a:t>
             </a:r>
             <a:r>
-              <a:rPr sz="1100" b="1" lang="zh-TW" dirty="0">
+              <a:rPr sz="800" b="1" lang="zh-TW" dirty="0">
                 <a:solidFill>
                   <a:srgbClr val="000000"/>
                 </a:solidFill>
@@ -9309,7 +9309,7 @@
               <a:t>R 255、G 0、B 0</a:t>
             </a:r>
             <a:r>
-              <a:rPr sz="1100" lang="zh-TW" dirty="0">
+              <a:rPr sz="800" lang="zh-TW" dirty="0">
                 <a:solidFill>
                   <a:srgbClr val="000000"/>
                 </a:solidFill>
@@ -9320,7 +9320,7 @@
               <a:t>，牆就是紅色。只開綠的就是綠，只開藍的就是藍。紅和綠一起開，</a:t>
             </a:r>
             <a:r>
-              <a:rPr sz="1100" b="1" lang="zh-TW" dirty="0">
+              <a:rPr sz="800" b="1" lang="zh-TW" dirty="0">
                 <a:solidFill>
                   <a:srgbClr val="000000"/>
                 </a:solidFill>
@@ -9331,7 +9331,7 @@
               <a:t>黃色</a:t>
             </a:r>
             <a:r>
-              <a:rPr sz="1100" lang="zh-TW" dirty="0">
+              <a:rPr sz="800" lang="zh-TW" dirty="0">
                 <a:solidFill>
                   <a:srgbClr val="000000"/>
                 </a:solidFill>
@@ -9342,7 +9342,7 @@
               <a:t>。三支都開到最亮，</a:t>
             </a:r>
             <a:r>
-              <a:rPr sz="1100" b="1" lang="zh-TW" dirty="0">
+              <a:rPr sz="800" b="1" lang="zh-TW" dirty="0">
                 <a:solidFill>
                   <a:srgbClr val="000000"/>
                 </a:solidFill>
@@ -9353,7 +9353,7 @@
               <a:t>白色</a:t>
             </a:r>
             <a:r>
-              <a:rPr sz="1100" lang="zh-TW" dirty="0">
+              <a:rPr sz="800" lang="zh-TW" dirty="0">
                 <a:solidFill>
                   <a:srgbClr val="000000"/>
                 </a:solidFill>
@@ -9364,7 +9364,7 @@
               <a:t>。三支一樣亮、但都只開一半，128，</a:t>
             </a:r>
             <a:r>
-              <a:rPr sz="1100" b="1" lang="zh-TW" dirty="0">
+              <a:rPr sz="800" b="1" lang="zh-TW" dirty="0">
                 <a:solidFill>
                   <a:srgbClr val="000000"/>
                 </a:solidFill>
@@ -9375,7 +9375,7 @@
               <a:t>灰色</a:t>
             </a:r>
             <a:r>
-              <a:rPr sz="1100" lang="zh-TW" dirty="0">
+              <a:rPr sz="800" lang="zh-TW" dirty="0">
                 <a:solidFill>
                   <a:srgbClr val="000000"/>
                 </a:solidFill>
@@ -9386,7 +9386,7 @@
               <a:t>。三支都關掉，全部是 0，</a:t>
             </a:r>
             <a:r>
-              <a:rPr sz="1100" b="1" lang="zh-TW" dirty="0">
+              <a:rPr sz="800" b="1" lang="zh-TW" dirty="0">
                 <a:solidFill>
                   <a:srgbClr val="000000"/>
                 </a:solidFill>
@@ -9397,7 +9397,7 @@
               <a:t>黑色</a:t>
             </a:r>
             <a:r>
-              <a:rPr sz="1100" lang="zh-TW" dirty="0">
+              <a:rPr sz="800" lang="zh-TW" dirty="0">
                 <a:solidFill>
                   <a:srgbClr val="000000"/>
                 </a:solidFill>
@@ -9415,11 +9415,11 @@
                 <a:spcPts val="0"/>
               </a:spcBef>
               <a:spcAft>
-                <a:spcPts val="183"/>
+                <a:spcPts val="133"/>
               </a:spcAft>
             </a:pPr>
             <a:r>
-              <a:rPr sz="1100" lang="zh-TW" dirty="0">
+              <a:rPr sz="800" lang="zh-TW" dirty="0">
                 <a:solidFill>
                   <a:srgbClr val="000000"/>
                 </a:solidFill>
@@ -9430,7 +9430,7 @@
               <a:t>所以讀數字只要問兩件事：</a:t>
             </a:r>
             <a:r>
-              <a:rPr sz="1100" b="1" lang="zh-TW" dirty="0">
+              <a:rPr sz="800" b="1" lang="zh-TW" dirty="0">
                 <a:solidFill>
                   <a:srgbClr val="000000"/>
                 </a:solidFill>
@@ -9441,7 +9441,7 @@
               <a:t>數字大不大</a:t>
             </a:r>
             <a:r>
-              <a:rPr sz="1100" lang="zh-TW" dirty="0">
+              <a:rPr sz="800" lang="zh-TW" dirty="0">
                 <a:solidFill>
                   <a:srgbClr val="000000"/>
                 </a:solidFill>
@@ -9452,7 +9452,7 @@
               <a:t>，大就亮、小就暗；</a:t>
             </a:r>
             <a:r>
-              <a:rPr sz="1100" b="1" lang="zh-TW" dirty="0">
+              <a:rPr sz="800" b="1" lang="zh-TW" dirty="0">
                 <a:solidFill>
                   <a:srgbClr val="000000"/>
                 </a:solidFill>
@@ -9463,7 +9463,7 @@
               <a:t>哪一個最大</a:t>
             </a:r>
             <a:r>
-              <a:rPr sz="1100" lang="zh-TW" dirty="0">
+              <a:rPr sz="800" lang="zh-TW" dirty="0">
                 <a:solidFill>
                   <a:srgbClr val="000000"/>
                 </a:solidFill>
@@ -9481,19 +9481,30 @@
                 <a:spcPts val="0"/>
               </a:spcBef>
               <a:spcAft>
-                <a:spcPts val="183"/>
+                <a:spcPts val="133"/>
               </a:spcAft>
             </a:pPr>
             <a:r>
-              <a:rPr sz="1100" lang="zh-TW" dirty="0">
-                <a:solidFill>
-                  <a:srgbClr val="000000"/>
-                </a:solidFill>
-                <a:latin typeface="Arial Unicode MS"/>
-                <a:ea typeface="Arial Unicode MS"/>
-                <a:cs typeface="Arial Unicode MS"/>
-              </a:rPr>
-              <a:t>再看下排，全部是照片上真的點，五乘五個像素取平均。
+              <a:rPr sz="800" b="1" lang="zh-TW" dirty="0">
+                <a:solidFill>
+                  <a:srgbClr val="000000"/>
+                </a:solidFill>
+                <a:latin typeface="Arial Unicode MS"/>
+                <a:ea typeface="Arial Unicode MS"/>
+                <a:cs typeface="Arial Unicode MS"/>
+              </a:rPr>
+              <a:t>補充：如果拿顏料來調，為什麼結果跟光不一樣？</a:t>
+            </a:r>
+            <a:r>
+              <a:rPr sz="800" lang="zh-TW" dirty="0">
+                <a:solidFill>
+                  <a:srgbClr val="000000"/>
+                </a:solidFill>
+                <a:latin typeface="Arial Unicode MS"/>
+                <a:ea typeface="Arial Unicode MS"/>
+                <a:cs typeface="Arial Unicode MS"/>
+              </a:rPr>
+              <a:t>
 </a:t>
             </a:r>
           </a:p>
@@ -9503,30 +9514,19 @@
                 <a:spcPts val="0"/>
               </a:spcBef>
               <a:spcAft>
-                <a:spcPts val="183"/>
+                <a:spcPts val="133"/>
               </a:spcAft>
             </a:pPr>
             <a:r>
-              <a:rPr sz="1100" b="1" lang="zh-TW" dirty="0">
-                <a:solidFill>
-                  <a:srgbClr val="000000"/>
-                </a:solidFill>
-                <a:latin typeface="Arial Unicode MS"/>
-                <a:ea typeface="Arial Unicode MS"/>
-                <a:cs typeface="Arial Unicode MS"/>
-              </a:rPr>
-              <a:t>1，紅褲子</a:t>
-            </a:r>
-            <a:r>
-              <a:rPr sz="1100" lang="zh-TW" dirty="0">
-                <a:solidFill>
-                  <a:srgbClr val="000000"/>
-                </a:solidFill>
-                <a:latin typeface="Arial Unicode MS"/>
-                <a:ea typeface="Arial Unicode MS"/>
-                <a:cs typeface="Arial Unicode MS"/>
-              </a:rPr>
-              <a:t>：R 123，G 80，B 67。紅的最大，所以看起來偏紅；可是三個都不小，所以是暗暗的紅棕色，不是鮮紅。
+              <a:rPr sz="800" lang="zh-TW" dirty="0">
+                <a:solidFill>
+                  <a:srgbClr val="000000"/>
+                </a:solidFill>
+                <a:latin typeface="Arial Unicode MS"/>
+                <a:ea typeface="Arial Unicode MS"/>
+                <a:cs typeface="Arial Unicode MS"/>
+              </a:rPr>
+              <a:t>有同學可能會問：小時候畫畫，紅色加綠色調出來是咖啡色，不是黃色；所有顏料混在一起是黑色，不是白色。為什麼跟手電筒不一樣？
 </a:t>
             </a:r>
           </a:p>
@@ -9536,30 +9536,19 @@
                 <a:spcPts val="0"/>
               </a:spcBef>
               <a:spcAft>
-                <a:spcPts val="183"/>
+                <a:spcPts val="133"/>
               </a:spcAft>
             </a:pPr>
             <a:r>
-              <a:rPr sz="1100" b="1" lang="zh-TW" dirty="0">
-                <a:solidFill>
-                  <a:srgbClr val="000000"/>
-                </a:solidFill>
-                <a:latin typeface="Arial Unicode MS"/>
-                <a:ea typeface="Arial Unicode MS"/>
-                <a:cs typeface="Arial Unicode MS"/>
-              </a:rPr>
-              <a:t>2，白色斑馬線</a:t>
-            </a:r>
-            <a:r>
-              <a:rPr sz="1100" lang="zh-TW" dirty="0">
-                <a:solidFill>
-                  <a:srgbClr val="000000"/>
-                </a:solidFill>
-                <a:latin typeface="Arial Unicode MS"/>
-                <a:ea typeface="Arial Unicode MS"/>
-                <a:cs typeface="Arial Unicode MS"/>
-              </a:rPr>
-              <a:t>：138、135、128，三個差不多，所以是灰白色。可是只有 138，不是 255！因為那天陰天，相機的自動曝光把整張調暗了。
+              <a:rPr sz="800" lang="zh-TW" dirty="0">
+                <a:solidFill>
+                  <a:srgbClr val="000000"/>
+                </a:solidFill>
+                <a:latin typeface="Arial Unicode MS"/>
+                <a:ea typeface="Arial Unicode MS"/>
+                <a:cs typeface="Arial Unicode MS"/>
+              </a:rPr>
+              <a:t>因為光和顏料做的事情剛好相反。
 </a:t>
             </a:r>
           </a:p>
@@ -9569,30 +9558,63 @@
                 <a:spcPts val="0"/>
               </a:spcBef>
               <a:spcAft>
-                <a:spcPts val="183"/>
+                <a:spcPts val="133"/>
               </a:spcAft>
             </a:pPr>
             <a:r>
-              <a:rPr sz="1100" b="1" lang="zh-TW" dirty="0">
-                <a:solidFill>
-                  <a:srgbClr val="000000"/>
-                </a:solidFill>
-                <a:latin typeface="Arial Unicode MS"/>
-                <a:ea typeface="Arial Unicode MS"/>
-                <a:cs typeface="Arial Unicode MS"/>
-              </a:rPr>
-              <a:t>3，柏油路</a:t>
-            </a:r>
-            <a:r>
-              <a:rPr sz="1100" lang="zh-TW" dirty="0">
-                <a:solidFill>
-                  <a:srgbClr val="000000"/>
-                </a:solidFill>
-                <a:latin typeface="Arial Unicode MS"/>
-                <a:ea typeface="Arial Unicode MS"/>
-                <a:cs typeface="Arial Unicode MS"/>
-              </a:rPr>
-              <a:t>：74 左右，三個一樣，灰色，比斑馬線暗。
+              <a:rPr sz="800" lang="zh-TW" dirty="0">
+                <a:solidFill>
+                  <a:srgbClr val="000000"/>
+                </a:solidFill>
+                <a:latin typeface="Arial Unicode MS"/>
+                <a:ea typeface="Arial Unicode MS"/>
+                <a:cs typeface="Arial Unicode MS"/>
+              </a:rPr>
+              <a:t>手電筒自己會發光。每多開一支，牆上就多一份光，所以光是</a:t>
+            </a:r>
+            <a:r>
+              <a:rPr sz="800" b="1" lang="zh-TW" dirty="0">
+                <a:solidFill>
+                  <a:srgbClr val="000000"/>
+                </a:solidFill>
+                <a:latin typeface="Arial Unicode MS"/>
+                <a:ea typeface="Arial Unicode MS"/>
+                <a:cs typeface="Arial Unicode MS"/>
+              </a:rPr>
+              <a:t>愈混愈亮</a:t>
+            </a:r>
+            <a:r>
+              <a:rPr sz="800" lang="zh-TW" dirty="0">
+                <a:solidFill>
+                  <a:srgbClr val="000000"/>
+                </a:solidFill>
+                <a:latin typeface="Arial Unicode MS"/>
+                <a:ea typeface="Arial Unicode MS"/>
+                <a:cs typeface="Arial Unicode MS"/>
+              </a:rPr>
+              <a:t>，三支都開就是白色。這叫</a:t>
+            </a:r>
+            <a:r>
+              <a:rPr sz="800" b="1" lang="zh-TW" dirty="0">
+                <a:solidFill>
+                  <a:srgbClr val="000000"/>
+                </a:solidFill>
+                <a:latin typeface="Arial Unicode MS"/>
+                <a:ea typeface="Arial Unicode MS"/>
+                <a:cs typeface="Arial Unicode MS"/>
+              </a:rPr>
+              <a:t>加法混色</a:t>
+            </a:r>
+            <a:r>
+              <a:rPr sz="800" lang="zh-TW" dirty="0">
+                <a:solidFill>
+                  <a:srgbClr val="000000"/>
+                </a:solidFill>
+                <a:latin typeface="Arial Unicode MS"/>
+                <a:ea typeface="Arial Unicode MS"/>
+                <a:cs typeface="Arial Unicode MS"/>
+              </a:rPr>
+              <a:t>。
 </a:t>
             </a:r>
           </a:p>
@@ -9602,30 +9624,63 @@
                 <a:spcPts val="0"/>
               </a:spcBef>
               <a:spcAft>
-                <a:spcPts val="183"/>
+                <a:spcPts val="133"/>
               </a:spcAft>
             </a:pPr>
             <a:r>
-              <a:rPr sz="1100" b="1" lang="zh-TW" dirty="0">
-                <a:solidFill>
-                  <a:srgbClr val="000000"/>
-                </a:solidFill>
-                <a:latin typeface="Arial Unicode MS"/>
-                <a:ea typeface="Arial Unicode MS"/>
-                <a:cs typeface="Arial Unicode MS"/>
-              </a:rPr>
-              <a:t>4，陰影裡的衣服</a:t>
-            </a:r>
-            <a:r>
-              <a:rPr sz="1100" lang="zh-TW" dirty="0">
-                <a:solidFill>
-                  <a:srgbClr val="000000"/>
-                </a:solidFill>
-                <a:latin typeface="Arial Unicode MS"/>
-                <a:ea typeface="Arial Unicode MS"/>
-                <a:cs typeface="Arial Unicode MS"/>
-              </a:rPr>
-              <a:t>：只有 20 上下，幾乎是黑的。這個人的衣服在影子裡，跟背景的數字很接近，電腦要找出他就比較難。
+              <a:rPr sz="800" lang="zh-TW" dirty="0">
+                <a:solidFill>
+                  <a:srgbClr val="000000"/>
+                </a:solidFill>
+                <a:latin typeface="Arial Unicode MS"/>
+                <a:ea typeface="Arial Unicode MS"/>
+                <a:cs typeface="Arial Unicode MS"/>
+              </a:rPr>
+              <a:t>顏料自己不會發光。我們看得到顏料的顏色，是因為白光照到它。白光裡面紅、綠、藍都有，顏料把其中一部分</a:t>
+            </a:r>
+            <a:r>
+              <a:rPr sz="800" b="1" lang="zh-TW" dirty="0">
+                <a:solidFill>
+                  <a:srgbClr val="000000"/>
+                </a:solidFill>
+                <a:latin typeface="Arial Unicode MS"/>
+                <a:ea typeface="Arial Unicode MS"/>
+                <a:cs typeface="Arial Unicode MS"/>
+              </a:rPr>
+              <a:t>吃掉</a:t>
+            </a:r>
+            <a:r>
+              <a:rPr sz="800" lang="zh-TW" dirty="0">
+                <a:solidFill>
+                  <a:srgbClr val="000000"/>
+                </a:solidFill>
+                <a:latin typeface="Arial Unicode MS"/>
+                <a:ea typeface="Arial Unicode MS"/>
+                <a:cs typeface="Arial Unicode MS"/>
+              </a:rPr>
+              <a:t>，把剩下的</a:t>
+            </a:r>
+            <a:r>
+              <a:rPr sz="800" b="1" lang="zh-TW" dirty="0">
+                <a:solidFill>
+                  <a:srgbClr val="000000"/>
+                </a:solidFill>
+                <a:latin typeface="Arial Unicode MS"/>
+                <a:ea typeface="Arial Unicode MS"/>
+                <a:cs typeface="Arial Unicode MS"/>
+              </a:rPr>
+              <a:t>反射</a:t>
+            </a:r>
+            <a:r>
+              <a:rPr sz="800" lang="zh-TW" dirty="0">
+                <a:solidFill>
+                  <a:srgbClr val="000000"/>
+                </a:solidFill>
+                <a:latin typeface="Arial Unicode MS"/>
+                <a:ea typeface="Arial Unicode MS"/>
+                <a:cs typeface="Arial Unicode MS"/>
+              </a:rPr>
+              <a:t>到我們的眼睛裡。黃色的顏料把藍光吃掉，反射紅光和綠光，紅加綠，看起來就是黃色。青色的顏料，就是偏藍的綠色，它把紅光吃掉，反射綠光和藍光。
 </a:t>
             </a:r>
           </a:p>
@@ -9635,44 +9690,55 @@
                 <a:spcPts val="0"/>
               </a:spcBef>
               <a:spcAft>
-                <a:spcPts val="183"/>
+                <a:spcPts val="133"/>
               </a:spcAft>
             </a:pPr>
             <a:r>
-              <a:rPr sz="1100" b="1" lang="zh-TW" dirty="0">
-                <a:solidFill>
-                  <a:srgbClr val="000000"/>
-                </a:solidFill>
-                <a:latin typeface="Arial Unicode MS"/>
-                <a:ea typeface="Arial Unicode MS"/>
-                <a:cs typeface="Arial Unicode MS"/>
-              </a:rPr>
-              <a:t>5，晚上的路面</a:t>
-            </a:r>
-            <a:r>
-              <a:rPr sz="1100" lang="zh-TW" dirty="0">
-                <a:solidFill>
-                  <a:srgbClr val="000000"/>
-                </a:solidFill>
-                <a:latin typeface="Arial Unicode MS"/>
-                <a:ea typeface="Arial Unicode MS"/>
-                <a:cs typeface="Arial Unicode MS"/>
-              </a:rPr>
-              <a:t>：86、86、63，藍色那個特別小，所以偏黃。不是路面是黃的，是</a:t>
-            </a:r>
-            <a:r>
-              <a:rPr sz="1100" b="1" lang="zh-TW" dirty="0">
-                <a:solidFill>
-                  <a:srgbClr val="000000"/>
-                </a:solidFill>
-                <a:latin typeface="Arial Unicode MS"/>
-                <a:ea typeface="Arial Unicode MS"/>
-                <a:cs typeface="Arial Unicode MS"/>
-              </a:rPr>
-              <a:t>路燈的光是黃的</a:t>
-            </a:r>
-            <a:r>
-              <a:rPr sz="1100" lang="zh-TW" dirty="0">
+              <a:rPr sz="800" lang="zh-TW" dirty="0">
+                <a:solidFill>
+                  <a:srgbClr val="000000"/>
+                </a:solidFill>
+                <a:latin typeface="Arial Unicode MS"/>
+                <a:ea typeface="Arial Unicode MS"/>
+                <a:cs typeface="Arial Unicode MS"/>
+              </a:rPr>
+              <a:t>把黃色和青色的顏料混在一起，兩種顏料都在吃：黃色吃掉藍光，青色吃掉紅光，最後只剩下綠光沒有被吃掉，所以調出來是綠色。每多加一種顏料，被吃掉的顏色就多一些，反射回來的光就愈少，所以顏料是</a:t>
+            </a:r>
+            <a:r>
+              <a:rPr sz="800" b="1" lang="zh-TW" dirty="0">
+                <a:solidFill>
+                  <a:srgbClr val="000000"/>
+                </a:solidFill>
+                <a:latin typeface="Arial Unicode MS"/>
+                <a:ea typeface="Arial Unicode MS"/>
+                <a:cs typeface="Arial Unicode MS"/>
+              </a:rPr>
+              <a:t>愈混愈暗</a:t>
+            </a:r>
+            <a:r>
+              <a:rPr sz="800" lang="zh-TW" dirty="0">
+                <a:solidFill>
+                  <a:srgbClr val="000000"/>
+                </a:solidFill>
+                <a:latin typeface="Arial Unicode MS"/>
+                <a:ea typeface="Arial Unicode MS"/>
+                <a:cs typeface="Arial Unicode MS"/>
+              </a:rPr>
+              <a:t>。全部混在一起，幾乎所有的光都被吃掉，就變成很深的咖啡色，接近黑色。這叫</a:t>
+            </a:r>
+            <a:r>
+              <a:rPr sz="800" b="1" lang="zh-TW" dirty="0">
+                <a:solidFill>
+                  <a:srgbClr val="000000"/>
+                </a:solidFill>
+                <a:latin typeface="Arial Unicode MS"/>
+                <a:ea typeface="Arial Unicode MS"/>
+                <a:cs typeface="Arial Unicode MS"/>
+              </a:rPr>
+              <a:t>減法混色</a:t>
+            </a:r>
+            <a:r>
+              <a:rPr sz="800" lang="zh-TW" dirty="0">
                 <a:solidFill>
                   <a:srgbClr val="000000"/>
                 </a:solidFill>
@@ -9690,30 +9756,63 @@
                 <a:spcPts val="0"/>
               </a:spcBef>
               <a:spcAft>
-                <a:spcPts val="183"/>
+                <a:spcPts val="133"/>
               </a:spcAft>
             </a:pPr>
             <a:r>
-              <a:rPr sz="1100" b="1" lang="zh-TW" dirty="0">
-                <a:solidFill>
-                  <a:srgbClr val="000000"/>
-                </a:solidFill>
-                <a:latin typeface="Arial Unicode MS"/>
-                <a:ea typeface="Arial Unicode MS"/>
-                <a:cs typeface="Arial Unicode MS"/>
-              </a:rPr>
-              <a:t>6，晚上的路燈</a:t>
-            </a:r>
-            <a:r>
-              <a:rPr sz="1100" lang="zh-TW" dirty="0">
-                <a:solidFill>
-                  <a:srgbClr val="000000"/>
-                </a:solidFill>
-                <a:latin typeface="Arial Unicode MS"/>
-                <a:ea typeface="Arial Unicode MS"/>
-                <a:cs typeface="Arial Unicode MS"/>
-              </a:rPr>
-              <a:t>：220 以上，接近 255，快要滿出來了。
+              <a:rPr sz="800" lang="zh-TW" dirty="0">
+                <a:solidFill>
+                  <a:srgbClr val="000000"/>
+                </a:solidFill>
+                <a:latin typeface="Arial Unicode MS"/>
+                <a:ea typeface="Arial Unicode MS"/>
+                <a:cs typeface="Arial Unicode MS"/>
+              </a:rPr>
+              <a:t>（下面這一段用數字算一次，時間不夠可以跳過。）假設黃色顏料會留下 90% 的紅光、90% 的綠光、10% 的藍光；青色顏料會留下 10% 的紅光、90% 的綠光、90% 的藍光。這些比例是為了好算而假設的。兩種顏料混在一起，光要兩種顏料都通過才回得來，所以要相乘：紅光剩下 90% 乘 10%，等於 9%；綠光剩下 90% 乘 90%，等於 81%；藍光剩下 10% 乘 90%，等於 9%。只有綠光留下比較多，所以是綠色。光是</a:t>
+            </a:r>
+            <a:r>
+              <a:rPr sz="800" b="1" lang="zh-TW" dirty="0">
+                <a:solidFill>
+                  <a:srgbClr val="000000"/>
+                </a:solidFill>
+                <a:latin typeface="Arial Unicode MS"/>
+                <a:ea typeface="Arial Unicode MS"/>
+                <a:cs typeface="Arial Unicode MS"/>
+              </a:rPr>
+              <a:t>相加</a:t>
+            </a:r>
+            <a:r>
+              <a:rPr sz="800" lang="zh-TW" dirty="0">
+                <a:solidFill>
+                  <a:srgbClr val="000000"/>
+                </a:solidFill>
+                <a:latin typeface="Arial Unicode MS"/>
+                <a:ea typeface="Arial Unicode MS"/>
+                <a:cs typeface="Arial Unicode MS"/>
+              </a:rPr>
+              <a:t>，愈加愈多；顏料比較像</a:t>
+            </a:r>
+            <a:r>
+              <a:rPr sz="800" b="1" lang="zh-TW" dirty="0">
+                <a:solidFill>
+                  <a:srgbClr val="000000"/>
+                </a:solidFill>
+                <a:latin typeface="Arial Unicode MS"/>
+                <a:ea typeface="Arial Unicode MS"/>
+                <a:cs typeface="Arial Unicode MS"/>
+              </a:rPr>
+              <a:t>相乘</a:t>
+            </a:r>
+            <a:r>
+              <a:rPr sz="800" lang="zh-TW" dirty="0">
+                <a:solidFill>
+                  <a:srgbClr val="000000"/>
+                </a:solidFill>
+                <a:latin typeface="Arial Unicode MS"/>
+                <a:ea typeface="Arial Unicode MS"/>
+                <a:cs typeface="Arial Unicode MS"/>
+              </a:rPr>
+              <a:t>，每一層只留下一部分，乘下去只會愈來愈少。
 </a:t>
             </a:r>
           </a:p>
@@ -9723,11 +9822,297 @@
                 <a:spcPts val="0"/>
               </a:spcBef>
               <a:spcAft>
-                <a:spcPts val="183"/>
+                <a:spcPts val="133"/>
               </a:spcAft>
             </a:pPr>
             <a:r>
-              <a:rPr sz="1100" lang="zh-TW" dirty="0">
+              <a:rPr sz="800" lang="zh-TW" dirty="0">
+                <a:solidFill>
+                  <a:srgbClr val="000000"/>
+                </a:solidFill>
+                <a:latin typeface="Arial Unicode MS"/>
+                <a:ea typeface="Arial Unicode MS"/>
+                <a:cs typeface="Arial Unicode MS"/>
+              </a:rPr>
+              <a:t>生活中兩種做法都看得到。印表機的墨水不是紅、綠、藍，而是青、洋紅、黃三種顏色，再加一個黑色。因為紙本身不會發光，印表機只能用墨水把光吃掉；三種顏色的墨水混起來，只會變成深咖啡色，不是真正的黑色，所以要另外放一個黑色，也比較省墨水。手機螢幕和相機的感光元件，處理的都是光：螢幕是發出多少光，感光元件是收到多少光，所以都用紅、綠、藍，都是加法。
+</a:t>
+            </a:r>
+          </a:p>
+          <a:p>
+            <a:pPr algn="l">
+              <a:spcBef>
+                <a:spcPts val="0"/>
+              </a:spcBef>
+              <a:spcAft>
+                <a:spcPts val="133"/>
+              </a:spcAft>
+            </a:pPr>
+            <a:r>
+              <a:rPr sz="800" lang="zh-TW" dirty="0">
+                <a:solidFill>
+                  <a:srgbClr val="000000"/>
+                </a:solidFill>
+                <a:latin typeface="Arial Unicode MS"/>
+                <a:ea typeface="Arial Unicode MS"/>
+                <a:cs typeface="Arial Unicode MS"/>
+              </a:rPr>
+              <a:t>最後接回第 4 張。濾色片其實也是減法：紅色的濾色片不是把紅色加上去，而是把綠光和藍光擋掉，只讓紅光通過。如果把一片紅色的濾色片和一片綠色的濾色片疊在一起，紅色那片擋掉綠光和藍光，綠色那片擋掉紅光，最後什麼光都過不去，就是一片黑。
+</a:t>
+            </a:r>
+          </a:p>
+          <a:p>
+            <a:pPr algn="l">
+              <a:spcBef>
+                <a:spcPts val="0"/>
+              </a:spcBef>
+              <a:spcAft>
+                <a:spcPts val="133"/>
+              </a:spcAft>
+            </a:pPr>
+            <a:r>
+              <a:rPr sz="800" lang="zh-TW" dirty="0">
+                <a:solidFill>
+                  <a:srgbClr val="000000"/>
+                </a:solidFill>
+                <a:latin typeface="Arial Unicode MS"/>
+                <a:ea typeface="Arial Unicode MS"/>
+                <a:cs typeface="Arial Unicode MS"/>
+              </a:rPr>
+              <a:t>再看下排，全部是照片上真的點，五乘五個像素取平均。
+</a:t>
+            </a:r>
+          </a:p>
+          <a:p>
+            <a:pPr algn="l">
+              <a:spcBef>
+                <a:spcPts val="0"/>
+              </a:spcBef>
+              <a:spcAft>
+                <a:spcPts val="133"/>
+              </a:spcAft>
+            </a:pPr>
+            <a:r>
+              <a:rPr sz="800" b="1" lang="zh-TW" dirty="0">
+                <a:solidFill>
+                  <a:srgbClr val="000000"/>
+                </a:solidFill>
+                <a:latin typeface="Arial Unicode MS"/>
+                <a:ea typeface="Arial Unicode MS"/>
+                <a:cs typeface="Arial Unicode MS"/>
+              </a:rPr>
+              <a:t>1，紅褲子</a:t>
+            </a:r>
+            <a:r>
+              <a:rPr sz="800" lang="zh-TW" dirty="0">
+                <a:solidFill>
+                  <a:srgbClr val="000000"/>
+                </a:solidFill>
+                <a:latin typeface="Arial Unicode MS"/>
+                <a:ea typeface="Arial Unicode MS"/>
+                <a:cs typeface="Arial Unicode MS"/>
+              </a:rPr>
+              <a:t>：R 123，G 80，B 67。紅的最大，所以看起來偏紅；可是三個都不小，所以是暗暗的紅棕色，不是鮮紅。
+</a:t>
+            </a:r>
+          </a:p>
+          <a:p>
+            <a:pPr algn="l">
+              <a:spcBef>
+                <a:spcPts val="0"/>
+              </a:spcBef>
+              <a:spcAft>
+                <a:spcPts val="133"/>
+              </a:spcAft>
+            </a:pPr>
+            <a:r>
+              <a:rPr sz="800" b="1" lang="zh-TW" dirty="0">
+                <a:solidFill>
+                  <a:srgbClr val="000000"/>
+                </a:solidFill>
+                <a:latin typeface="Arial Unicode MS"/>
+                <a:ea typeface="Arial Unicode MS"/>
+                <a:cs typeface="Arial Unicode MS"/>
+              </a:rPr>
+              <a:t>2，白色斑馬線</a:t>
+            </a:r>
+            <a:r>
+              <a:rPr sz="800" lang="zh-TW" dirty="0">
+                <a:solidFill>
+                  <a:srgbClr val="000000"/>
+                </a:solidFill>
+                <a:latin typeface="Arial Unicode MS"/>
+                <a:ea typeface="Arial Unicode MS"/>
+                <a:cs typeface="Arial Unicode MS"/>
+              </a:rPr>
+              <a:t>：138、135、128，三個差不多，所以是灰白色。可是只有 138，不是 255！因為那天陰天，相機的自動曝光把整張調暗了。
+</a:t>
+            </a:r>
+          </a:p>
+          <a:p>
+            <a:pPr algn="l">
+              <a:spcBef>
+                <a:spcPts val="0"/>
+              </a:spcBef>
+              <a:spcAft>
+                <a:spcPts val="133"/>
+              </a:spcAft>
+            </a:pPr>
+            <a:r>
+              <a:rPr sz="800" b="1" lang="zh-TW" dirty="0">
+                <a:solidFill>
+                  <a:srgbClr val="000000"/>
+                </a:solidFill>
+                <a:latin typeface="Arial Unicode MS"/>
+                <a:ea typeface="Arial Unicode MS"/>
+                <a:cs typeface="Arial Unicode MS"/>
+              </a:rPr>
+              <a:t>3，柏油路</a:t>
+            </a:r>
+            <a:r>
+              <a:rPr sz="800" lang="zh-TW" dirty="0">
+                <a:solidFill>
+                  <a:srgbClr val="000000"/>
+                </a:solidFill>
+                <a:latin typeface="Arial Unicode MS"/>
+                <a:ea typeface="Arial Unicode MS"/>
+                <a:cs typeface="Arial Unicode MS"/>
+              </a:rPr>
+              <a:t>：74 左右，三個一樣，灰色，比斑馬線暗。
+</a:t>
+            </a:r>
+          </a:p>
+          <a:p>
+            <a:pPr algn="l">
+              <a:spcBef>
+                <a:spcPts val="0"/>
+              </a:spcBef>
+              <a:spcAft>
+                <a:spcPts val="133"/>
+              </a:spcAft>
+            </a:pPr>
+            <a:r>
+              <a:rPr sz="800" b="1" lang="zh-TW" dirty="0">
+                <a:solidFill>
+                  <a:srgbClr val="000000"/>
+                </a:solidFill>
+                <a:latin typeface="Arial Unicode MS"/>
+                <a:ea typeface="Arial Unicode MS"/>
+                <a:cs typeface="Arial Unicode MS"/>
+              </a:rPr>
+              <a:t>4，陰影裡的衣服</a:t>
+            </a:r>
+            <a:r>
+              <a:rPr sz="800" lang="zh-TW" dirty="0">
+                <a:solidFill>
+                  <a:srgbClr val="000000"/>
+                </a:solidFill>
+                <a:latin typeface="Arial Unicode MS"/>
+                <a:ea typeface="Arial Unicode MS"/>
+                <a:cs typeface="Arial Unicode MS"/>
+              </a:rPr>
+              <a:t>：只有 20 上下，幾乎是黑的。這個人的衣服在影子裡，跟背景的數字很接近，電腦要找出他就比較難。
+</a:t>
+            </a:r>
+          </a:p>
+          <a:p>
+            <a:pPr algn="l">
+              <a:spcBef>
+                <a:spcPts val="0"/>
+              </a:spcBef>
+              <a:spcAft>
+                <a:spcPts val="133"/>
+              </a:spcAft>
+            </a:pPr>
+            <a:r>
+              <a:rPr sz="800" b="1" lang="zh-TW" dirty="0">
+                <a:solidFill>
+                  <a:srgbClr val="000000"/>
+                </a:solidFill>
+                <a:latin typeface="Arial Unicode MS"/>
+                <a:ea typeface="Arial Unicode MS"/>
+                <a:cs typeface="Arial Unicode MS"/>
+              </a:rPr>
+              <a:t>5，晚上的路面</a:t>
+            </a:r>
+            <a:r>
+              <a:rPr sz="800" lang="zh-TW" dirty="0">
+                <a:solidFill>
+                  <a:srgbClr val="000000"/>
+                </a:solidFill>
+                <a:latin typeface="Arial Unicode MS"/>
+                <a:ea typeface="Arial Unicode MS"/>
+                <a:cs typeface="Arial Unicode MS"/>
+              </a:rPr>
+              <a:t>：86、86、63，藍色那個特別小，所以偏黃。不是路面是黃的，是</a:t>
+            </a:r>
+            <a:r>
+              <a:rPr sz="800" b="1" lang="zh-TW" dirty="0">
+                <a:solidFill>
+                  <a:srgbClr val="000000"/>
+                </a:solidFill>
+                <a:latin typeface="Arial Unicode MS"/>
+                <a:ea typeface="Arial Unicode MS"/>
+                <a:cs typeface="Arial Unicode MS"/>
+              </a:rPr>
+              <a:t>路燈的光是黃的</a:t>
+            </a:r>
+            <a:r>
+              <a:rPr sz="800" lang="zh-TW" dirty="0">
+                <a:solidFill>
+                  <a:srgbClr val="000000"/>
+                </a:solidFill>
+                <a:latin typeface="Arial Unicode MS"/>
+                <a:ea typeface="Arial Unicode MS"/>
+                <a:cs typeface="Arial Unicode MS"/>
+              </a:rPr>
+              <a:t>。
+</a:t>
+            </a:r>
+          </a:p>
+          <a:p>
+            <a:pPr algn="l">
+              <a:spcBef>
+                <a:spcPts val="0"/>
+              </a:spcBef>
+              <a:spcAft>
+                <a:spcPts val="133"/>
+              </a:spcAft>
+            </a:pPr>
+            <a:r>
+              <a:rPr sz="800" b="1" lang="zh-TW" dirty="0">
+                <a:solidFill>
+                  <a:srgbClr val="000000"/>
+                </a:solidFill>
+                <a:latin typeface="Arial Unicode MS"/>
+                <a:ea typeface="Arial Unicode MS"/>
+                <a:cs typeface="Arial Unicode MS"/>
+              </a:rPr>
+              <a:t>6，晚上的路燈</a:t>
+            </a:r>
+            <a:r>
+              <a:rPr sz="800" lang="zh-TW" dirty="0">
+                <a:solidFill>
+                  <a:srgbClr val="000000"/>
+                </a:solidFill>
+                <a:latin typeface="Arial Unicode MS"/>
+                <a:ea typeface="Arial Unicode MS"/>
+                <a:cs typeface="Arial Unicode MS"/>
+              </a:rPr>
+              <a:t>：220 以上，接近 255，快要滿出來了。
+</a:t>
+            </a:r>
+          </a:p>
+          <a:p>
+            <a:pPr algn="l">
+              <a:spcBef>
+                <a:spcPts val="0"/>
+              </a:spcBef>
+              <a:spcAft>
+                <a:spcPts val="133"/>
+              </a:spcAft>
+            </a:pPr>
+            <a:r>
+              <a:rPr sz="800" lang="zh-TW" dirty="0">
                 <a:solidFill>
                   <a:srgbClr val="000000"/>
                 </a:solidFill>
@@ -9738,7 +10123,7 @@
               <a:t>這一張最重要的一句話：</a:t>
             </a:r>
             <a:r>
-              <a:rPr sz="1100" b="1" lang="zh-TW" dirty="0">
+              <a:rPr sz="800" b="1" lang="zh-TW" dirty="0">
                 <a:solidFill>
                   <a:srgbClr val="000000"/>
                 </a:solidFill>
@@ -9749,7 +10134,7 @@
               <a:t>同一種東西，換一個光線，數字就差很多。</a:t>
             </a:r>
             <a:r>
-              <a:rPr sz="1100" lang="zh-TW" dirty="0">
+              <a:rPr sz="800" lang="zh-TW" dirty="0">
                 <a:solidFill>
                   <a:srgbClr val="000000"/>
                 </a:solidFill>
@@ -26201,9 +26586,132 @@
           </a:p>
         </p:txBody>
       </p:sp>
+      <p:sp>
+        <p:nvSpPr>
+          <p:cNvPr id="7" name="Shape 4"/>
+          <p:cNvSpPr/>
+          <p:nvPr/>
+        </p:nvSpPr>
+        <p:spPr>
+          <a:xfrm>
+            <a:off x="5056848" y="365760"/>
+            <a:ext cx="3584232" cy="310896"/>
+          </a:xfrm>
+          <a:prstGeom prst="roundRect">
+            <a:avLst>
+              <a:gd name="adj" fmla="val 20588"/>
+            </a:avLst>
+          </a:prstGeom>
+          <a:solidFill>
+            <a:srgbClr val="EAF6F4"/>
+          </a:solidFill>
+          <a:ln w="9525">
+            <a:solidFill>
+              <a:srgbClr val="9FD6CE"/>
+            </a:solidFill>
+            <a:prstDash val="solid"/>
+          </a:ln>
+        </p:spPr>
+      </p:sp>
+      <p:sp>
+        <p:nvSpPr>
+          <p:cNvPr id="8" name="Text 5"/>
+          <p:cNvSpPr txBox="1"/>
+          <p:nvPr/>
+        </p:nvSpPr>
+        <p:spPr>
+          <a:xfrm>
+            <a:off x="5184864" y="384048"/>
+            <a:ext cx="3401352" cy="274320"/>
+          </a:xfrm>
+          <a:prstGeom prst="rect">
+            <a:avLst/>
+          </a:prstGeom>
+          <a:noFill/>
+          <a:ln/>
+        </p:spPr>
+        <p:txBody>
+          <a:bodyPr wrap="square" lIns="0" tIns="0" rIns="0" bIns="0" rtlCol="0" anchor="ctr"/>
+          <a:lstStyle/>
+          <a:p>
+            <a:pPr indent="0" marL="0">
+              <a:lnSpc>
+                <a:spcPct val="100000"/>
+              </a:lnSpc>
+              <a:buNone/>
+            </a:pPr>
+            <a:r>
+              <a:rPr lang="en-US" sz="950" b="1" dirty="0">
+                <a:solidFill>
+                  <a:srgbClr val="007F72"/>
+                </a:solidFill>
+                <a:latin typeface="Arial" pitchFamily="34" charset="0"/>
+                <a:ea typeface="Arial" pitchFamily="34" charset="-122"/>
+                <a:cs typeface="Arial" pitchFamily="34" charset="-120"/>
+              </a:rPr>
+              <a:t>Ví dụ · </a:t>
+            </a:r>
+            <a:pPr indent="0" marL="0">
+              <a:lnSpc>
+                <a:spcPct val="100000"/>
+              </a:lnSpc>
+              <a:buNone/>
+            </a:pPr>
+            <a:r>
+              <a:rPr lang="en-US" sz="950" dirty="0">
+                <a:solidFill>
+                  <a:srgbClr val="1A2733"/>
+                </a:solidFill>
+                <a:latin typeface="Arial" pitchFamily="34" charset="0"/>
+                <a:ea typeface="Arial" pitchFamily="34" charset="-122"/>
+                <a:cs typeface="Arial" pitchFamily="34" charset="-120"/>
+              </a:rPr>
+              <a:t>đèn pin cộng thêm ánh sáng, màu vẽ ăn bớt ánh sáng</a:t>
+            </a:r>
+            <a:endParaRPr lang="en-US" sz="950" dirty="0"/>
+          </a:p>
+          <a:p>
+            <a:pPr indent="0" marL="0">
+              <a:lnSpc>
+                <a:spcPct val="100000"/>
+              </a:lnSpc>
+              <a:buNone/>
+            </a:pPr>
+            <a:r>
+              <a:rPr lang="en-US" sz="900" b="1" dirty="0">
+                <a:solidFill>
+                  <a:srgbClr val="007F72"/>
+                </a:solidFill>
+                <a:latin typeface="微軟正黑體" pitchFamily="34" charset="0"/>
+                <a:ea typeface="微軟正黑體" pitchFamily="34" charset="-122"/>
+                <a:cs typeface="微軟正黑體" pitchFamily="34" charset="-120"/>
+              </a:rPr>
+              <a:t>例子・</a:t>
+            </a:r>
+            <a:pPr indent="0" marL="0">
+              <a:lnSpc>
+                <a:spcPct val="100000"/>
+              </a:lnSpc>
+              <a:buNone/>
+            </a:pPr>
+            <a:r>
+              <a:rPr lang="en-US" sz="900" dirty="0">
+                <a:solidFill>
+                  <a:srgbClr val="5F7183"/>
+                </a:solidFill>
+                <a:latin typeface="微軟正黑體" pitchFamily="34" charset="0"/>
+                <a:ea typeface="微軟正黑體" pitchFamily="34" charset="-122"/>
+                <a:cs typeface="微軟正黑體" pitchFamily="34" charset="-120"/>
+              </a:rPr>
+              <a:t>手電筒是加光，顏料是吃掉光</a:t>
+            </a:r>
+            <a:endParaRPr lang="en-US" sz="950" dirty="0"/>
+          </a:p>
+        </p:txBody>
+      </p:sp>
       <p:pic>
         <p:nvPicPr>
-          <p:cNvPr id="8" name="Image 1" descr="/Users/tsengchenghsun/Class/carClass/Claude outputs/第八週(10-29)/src/logo.png">    </p:cNvPr>
+          <p:cNvPr id="10" name="Image 1" descr="/Users/tsengchenghsun/Class/carClass/Claude outputs/第八週(10-29)/src/logo.png">    </p:cNvPr>
           <p:cNvPicPr>
             <a:picLocks noChangeAspect="1"/>
           </p:cNvPicPr>
@@ -26227,7 +26735,7 @@
       </p:pic>
       <p:sp>
         <p:nvSpPr>
-          <p:cNvPr id="9" name="Text 4"/>
+          <p:cNvPr id="11" name="Text 6"/>
           <p:cNvSpPr txBox="1"/>
           <p:nvPr/>
         </p:nvSpPr>
@@ -26266,7 +26774,7 @@
       </p:sp>
       <p:sp>
         <p:nvSpPr>
-          <p:cNvPr id="10" name="Text 5"/>
+          <p:cNvPr id="12" name="Text 7"/>
           <p:cNvSpPr txBox="1"/>
           <p:nvPr/>
         </p:nvSpPr>

--- a/第八週(10-29)/第八週_第1節_簡報.pptx
+++ b/第八週(10-29)/第八週_第1節_簡報.pptx
@@ -714,11 +714,11 @@
                 <a:spcPts val="0"/>
               </a:spcBef>
               <a:spcAft>
-                <a:spcPts val="233"/>
+                <a:spcPts val="183"/>
               </a:spcAft>
             </a:pPr>
             <a:r>
-              <a:rPr sz="1400" b="1" lang="zh-TW" dirty="0">
+              <a:rPr sz="1100" b="1" lang="zh-TW" dirty="0">
                 <a:solidFill>
                   <a:srgbClr val="000000"/>
                 </a:solidFill>
@@ -729,15 +729,15 @@
               <a:t>這一張的目的：</a:t>
             </a:r>
             <a:r>
-              <a:rPr sz="1400" lang="zh-TW" dirty="0">
-                <a:solidFill>
-                  <a:srgbClr val="000000"/>
-                </a:solidFill>
-                <a:latin typeface="Arial Unicode MS"/>
-                <a:ea typeface="Arial Unicode MS"/>
-                <a:cs typeface="Arial Unicode MS"/>
-              </a:rPr>
-              <a:t>讓大家知道「學」是什麼意思：猜、對答案、改一點點，重複很多次；而標準答案要先有人標好。
+              <a:rPr sz="1100" lang="zh-TW" dirty="0">
+                <a:solidFill>
+                  <a:srgbClr val="000000"/>
+                </a:solidFill>
+                <a:latin typeface="Arial Unicode MS"/>
+                <a:ea typeface="Arial Unicode MS"/>
+                <a:cs typeface="Arial Unicode MS"/>
+              </a:rPr>
+              <a:t>讓大家知道「學」是什麼意思：模型先猜一個答案，再拿去對標準答案，然後把裡面的數字改一點點，這樣重複很多次。機器學習和深度學習都是這樣學的，差別只在第三步要改的數字有幾個；而對答案用的標準答案，要先有人標好。
 </a:t>
             </a:r>
           </a:p>
@@ -747,19 +747,41 @@
                 <a:spcPts val="0"/>
               </a:spcBef>
               <a:spcAft>
-                <a:spcPts val="233"/>
+                <a:spcPts val="183"/>
               </a:spcAft>
             </a:pPr>
             <a:r>
-              <a:rPr sz="1400" lang="zh-TW" dirty="0">
-                <a:solidFill>
-                  <a:srgbClr val="000000"/>
-                </a:solidFill>
-                <a:latin typeface="Arial Unicode MS"/>
-                <a:ea typeface="Arial Unicode MS"/>
-                <a:cs typeface="Arial Unicode MS"/>
-              </a:rPr>
-              <a:t>那「讓電腦自己學」，到底怎麼學？四個步驟，跟各位準備考試很像。
+              <a:rPr sz="1100" lang="zh-TW" dirty="0">
+                <a:solidFill>
+                  <a:srgbClr val="000000"/>
+                </a:solidFill>
+                <a:latin typeface="Arial Unicode MS"/>
+                <a:ea typeface="Arial Unicode MS"/>
+                <a:cs typeface="Arial Unicode MS"/>
+              </a:rPr>
+              <a:t>那「讓電腦自己學」，到底怎麼學？先講清楚一件事：</a:t>
+            </a:r>
+            <a:r>
+              <a:rPr sz="1100" b="1" lang="zh-TW" dirty="0">
+                <a:solidFill>
+                  <a:srgbClr val="000000"/>
+                </a:solidFill>
+                <a:latin typeface="Arial Unicode MS"/>
+                <a:ea typeface="Arial Unicode MS"/>
+                <a:cs typeface="Arial Unicode MS"/>
+              </a:rPr>
+              <a:t>這一張講的學法，機器學習和深度學習都一樣。</a:t>
+            </a:r>
+            <a:r>
+              <a:rPr sz="1100" lang="zh-TW" dirty="0">
+                <a:solidFill>
+                  <a:srgbClr val="000000"/>
+                </a:solidFill>
+                <a:latin typeface="Arial Unicode MS"/>
+                <a:ea typeface="Arial Unicode MS"/>
+                <a:cs typeface="Arial Unicode MS"/>
+              </a:rPr>
+              <a:t>兩種做法都是四個步驟，跟各位準備考試很像。
 </a:t>
             </a:r>
           </a:p>
@@ -769,11 +791,11 @@
                 <a:spcPts val="0"/>
               </a:spcBef>
               <a:spcAft>
-                <a:spcPts val="233"/>
+                <a:spcPts val="183"/>
               </a:spcAft>
             </a:pPr>
             <a:r>
-              <a:rPr sz="1400" b="1" lang="zh-TW" dirty="0">
+              <a:rPr sz="1100" b="1" lang="zh-TW" dirty="0">
                 <a:solidFill>
                   <a:srgbClr val="000000"/>
                 </a:solidFill>
@@ -784,15 +806,15 @@
               <a:t>第一步，猜。</a:t>
             </a:r>
             <a:r>
-              <a:rPr sz="1400" lang="zh-TW" dirty="0">
-                <a:solidFill>
-                  <a:srgbClr val="000000"/>
-                </a:solidFill>
-                <a:latin typeface="Arial Unicode MS"/>
-                <a:ea typeface="Arial Unicode MS"/>
-                <a:cs typeface="Arial Unicode MS"/>
-              </a:rPr>
-              <a:t>丟一張照片進去，模型就猜：「這裡有一個人，框在這裡。」一開始它什麼都不會，猜得亂七八糟。
+              <a:rPr sz="1100" lang="zh-TW" dirty="0">
+                <a:solidFill>
+                  <a:srgbClr val="000000"/>
+                </a:solidFill>
+                <a:latin typeface="Arial Unicode MS"/>
+                <a:ea typeface="Arial Unicode MS"/>
+                <a:cs typeface="Arial Unicode MS"/>
+              </a:rPr>
+              <a:t>模型先猜一個答案。用第 9 張的機器學習來說，給它一個框，它算出高除以寬，猜這個框是人還是車。用深度學習的 YOLOX 來說，丟一整張照片進去，它猜「這裡有一個人，框在這裡」。一開始模型什麼都不會，猜得亂七八糟。
 </a:t>
             </a:r>
           </a:p>
@@ -802,11 +824,11 @@
                 <a:spcPts val="0"/>
               </a:spcBef>
               <a:spcAft>
-                <a:spcPts val="233"/>
+                <a:spcPts val="183"/>
               </a:spcAft>
             </a:pPr>
             <a:r>
-              <a:rPr sz="1400" b="1" lang="zh-TW" dirty="0">
+              <a:rPr sz="1100" b="1" lang="zh-TW" dirty="0">
                 <a:solidFill>
                   <a:srgbClr val="000000"/>
                 </a:solidFill>
@@ -817,15 +839,15 @@
               <a:t>第二步，對答案。</a:t>
             </a:r>
             <a:r>
-              <a:rPr sz="1400" lang="zh-TW" dirty="0">
-                <a:solidFill>
-                  <a:srgbClr val="000000"/>
-                </a:solidFill>
-                <a:latin typeface="Arial Unicode MS"/>
-                <a:ea typeface="Arial Unicode MS"/>
-                <a:cs typeface="Arial Unicode MS"/>
-              </a:rPr>
-              <a:t>這張照片，事先已經有人標好了：人在哪裡、車在哪裡。拿模型猜的去比標準答案，看差多少：框偏了多少、類別錯了沒有、有沒有漏掉。
+              <a:rPr sz="1100" lang="zh-TW" dirty="0">
+                <a:solidFill>
+                  <a:srgbClr val="000000"/>
+                </a:solidFill>
+                <a:latin typeface="Arial Unicode MS"/>
+                <a:ea typeface="Arial Unicode MS"/>
+                <a:cs typeface="Arial Unicode MS"/>
+              </a:rPr>
+              <a:t>答案事先已經有人標好了：這個框是人還是車、照片裡人在哪裡、車在哪裡。拿模型猜的去比標準答案，看差多少：類別錯了沒有、框偏了多少、有沒有漏掉。
 </a:t>
             </a:r>
           </a:p>
@@ -835,11 +857,11 @@
                 <a:spcPts val="0"/>
               </a:spcBef>
               <a:spcAft>
-                <a:spcPts val="233"/>
+                <a:spcPts val="183"/>
               </a:spcAft>
             </a:pPr>
             <a:r>
-              <a:rPr sz="1400" b="1" lang="zh-TW" dirty="0">
+              <a:rPr sz="1100" b="1" lang="zh-TW" dirty="0">
                 <a:solidFill>
                   <a:srgbClr val="000000"/>
                 </a:solidFill>
@@ -850,18 +872,18 @@
               <a:t>第三步，改一點點。</a:t>
             </a:r>
             <a:r>
-              <a:rPr sz="1400" lang="zh-TW" dirty="0">
-                <a:solidFill>
-                  <a:srgbClr val="000000"/>
-                </a:solidFill>
-                <a:latin typeface="Arial Unicode MS"/>
-                <a:ea typeface="Arial Unicode MS"/>
-                <a:cs typeface="Arial Unicode MS"/>
-              </a:rPr>
-              <a:t>剛剛那個例子，要改的數字只有一個，就是門檻。深度學習的 YOLOX，裡面有大約九百萬個數字，可以想成九百萬個小旋鈕。電腦會算出：每個旋鈕往哪邊轉一點點，下次就會差少一點。注意是</a:t>
-            </a:r>
-            <a:r>
-              <a:rPr sz="1400" b="1" lang="zh-TW" dirty="0">
+              <a:rPr sz="1100" lang="zh-TW" dirty="0">
+                <a:solidFill>
+                  <a:srgbClr val="000000"/>
+                </a:solidFill>
+                <a:latin typeface="Arial Unicode MS"/>
+                <a:ea typeface="Arial Unicode MS"/>
+                <a:cs typeface="Arial Unicode MS"/>
+              </a:rPr>
+              <a:t>兩種做法不一樣的地方，就在這一步：要改的數字有幾個。第 9 張的機器學習，要改的數字只有一個，就是門檻；「看高除以寬」是人選好的，電腦不會去改它。深度學習的 YOLOX，裡面有大約九百萬個數字，可以想成九百萬個小旋鈕，第 12 張要看的那些濾鏡也在裡面，所以連「看什麼」都會一起被改。電腦會算出每個旋鈕往哪邊轉一點點，下次的錯就會少一點。注意是</a:t>
+            </a:r>
+            <a:r>
+              <a:rPr sz="1100" b="1" lang="zh-TW" dirty="0">
                 <a:solidFill>
                   <a:srgbClr val="000000"/>
                 </a:solidFill>
@@ -872,15 +894,15 @@
               <a:t>一點點</a:t>
             </a:r>
             <a:r>
-              <a:rPr sz="1400" lang="zh-TW" dirty="0">
-                <a:solidFill>
-                  <a:srgbClr val="000000"/>
-                </a:solidFill>
-                <a:latin typeface="Arial Unicode MS"/>
-                <a:ea typeface="Arial Unicode MS"/>
-                <a:cs typeface="Arial Unicode MS"/>
-              </a:rPr>
-              <a:t>，不是一次改到對。為什麼只改一點點？下一張用真的資料示範。
+              <a:rPr sz="1100" lang="zh-TW" dirty="0">
+                <a:solidFill>
+                  <a:srgbClr val="000000"/>
+                </a:solidFill>
+                <a:latin typeface="Arial Unicode MS"/>
+                <a:ea typeface="Arial Unicode MS"/>
+                <a:cs typeface="Arial Unicode MS"/>
+              </a:rPr>
+              <a:t>，不是一次改到對。
 </a:t>
             </a:r>
           </a:p>
@@ -890,30 +912,19 @@
                 <a:spcPts val="0"/>
               </a:spcBef>
               <a:spcAft>
-                <a:spcPts val="233"/>
+                <a:spcPts val="183"/>
               </a:spcAft>
             </a:pPr>
             <a:r>
-              <a:rPr sz="1400" b="1" lang="zh-TW" dirty="0">
-                <a:solidFill>
-                  <a:srgbClr val="000000"/>
-                </a:solidFill>
-                <a:latin typeface="Arial Unicode MS"/>
-                <a:ea typeface="Arial Unicode MS"/>
-                <a:cs typeface="Arial Unicode MS"/>
-              </a:rPr>
-              <a:t>第四步，重複。</a:t>
-            </a:r>
-            <a:r>
-              <a:rPr sz="1400" lang="zh-TW" dirty="0">
-                <a:solidFill>
-                  <a:srgbClr val="000000"/>
-                </a:solidFill>
-                <a:latin typeface="Arial Unicode MS"/>
-                <a:ea typeface="Arial Unicode MS"/>
-                <a:cs typeface="Arial Unicode MS"/>
-              </a:rPr>
-              <a:t>換下一張照片，再猜、再對、再改。幾萬張照片，一輪又一輪。
+              <a:rPr sz="1100" lang="zh-TW" dirty="0">
+                <a:solidFill>
+                  <a:srgbClr val="000000"/>
+                </a:solidFill>
+                <a:latin typeface="Arial Unicode MS"/>
+                <a:ea typeface="Arial Unicode MS"/>
+                <a:cs typeface="Arial Unicode MS"/>
+              </a:rPr>
+              <a:t>這裡要說明一下第 9 張。第 9 張的門檻 1.03，其實不是用這四步一點一點改出來的：那時候我讓電腦把門檻從 0.5 一路試到 3，每一個都試過，挑分得最準的那一個。門檻只有一個數字，全部試一遍很快。可是 YOLOX 有九百萬個數字，不可能把每一種組合都試一遍，只能用這四步一點一點改。下一張，我用同一批例子、同一個門檻，改用一點一點改的方法再學一次，結果停在 1.17，一樣全部分對。為什麼每次只改一點點，下一張用動畫示範。
 </a:t>
             </a:r>
           </a:p>
@@ -923,19 +934,30 @@
                 <a:spcPts val="0"/>
               </a:spcBef>
               <a:spcAft>
-                <a:spcPts val="233"/>
+                <a:spcPts val="183"/>
               </a:spcAft>
             </a:pPr>
             <a:r>
-              <a:rPr sz="1400" lang="zh-TW" dirty="0">
-                <a:solidFill>
-                  <a:srgbClr val="000000"/>
-                </a:solidFill>
-                <a:latin typeface="Arial Unicode MS"/>
-                <a:ea typeface="Arial Unicode MS"/>
-                <a:cs typeface="Arial Unicode MS"/>
-              </a:rPr>
-              <a:t>就像寫考古題：寫完對答案，錯的地方記一下，下一份再寫。寫夠多份，碰到沒看過的題目也會寫。
+              <a:rPr sz="1100" b="1" lang="zh-TW" dirty="0">
+                <a:solidFill>
+                  <a:srgbClr val="000000"/>
+                </a:solidFill>
+                <a:latin typeface="Arial Unicode MS"/>
+                <a:ea typeface="Arial Unicode MS"/>
+                <a:cs typeface="Arial Unicode MS"/>
+              </a:rPr>
+              <a:t>第四步，重複。</a:t>
+            </a:r>
+            <a:r>
+              <a:rPr sz="1100" lang="zh-TW" dirty="0">
+                <a:solidFill>
+                  <a:srgbClr val="000000"/>
+                </a:solidFill>
+                <a:latin typeface="Arial Unicode MS"/>
+                <a:ea typeface="Arial Unicode MS"/>
+                <a:cs typeface="Arial Unicode MS"/>
+              </a:rPr>
+              <a:t>換下一個例子，再猜、再對、再改。幾萬個例子，一輪又一輪。
 </a:t>
             </a:r>
           </a:p>
@@ -945,11 +967,33 @@
                 <a:spcPts val="0"/>
               </a:spcBef>
               <a:spcAft>
-                <a:spcPts val="233"/>
+                <a:spcPts val="183"/>
               </a:spcAft>
             </a:pPr>
             <a:r>
-              <a:rPr sz="1400" lang="zh-TW" dirty="0">
+              <a:rPr sz="1100" lang="zh-TW" dirty="0">
+                <a:solidFill>
+                  <a:srgbClr val="000000"/>
+                </a:solidFill>
+                <a:latin typeface="Arial Unicode MS"/>
+                <a:ea typeface="Arial Unicode MS"/>
+                <a:cs typeface="Arial Unicode MS"/>
+              </a:rPr>
+              <a:t>就像寫考古題：寫完對答案，錯的地方記一下，下一份再寫。寫夠多份，碰到沒看過的題目也會寫。
+</a:t>
+            </a:r>
+          </a:p>
+          <a:p>
+            <a:pPr algn="l">
+              <a:spcBef>
+                <a:spcPts val="0"/>
+              </a:spcBef>
+              <a:spcAft>
+                <a:spcPts val="183"/>
+              </a:spcAft>
+            </a:pPr>
+            <a:r>
+              <a:rPr sz="1100" lang="zh-TW" dirty="0">
                 <a:solidFill>
                   <a:srgbClr val="000000"/>
                 </a:solidFill>
@@ -960,7 +1004,7 @@
               <a:t>這裡有一個關鍵：</a:t>
             </a:r>
             <a:r>
-              <a:rPr sz="1400" b="1" lang="zh-TW" dirty="0">
+              <a:rPr sz="1100" b="1" lang="zh-TW" dirty="0">
                 <a:solidFill>
                   <a:srgbClr val="000000"/>
                 </a:solidFill>
@@ -971,7 +1015,7 @@
               <a:t>第二步的標準答案，從哪裡來？</a:t>
             </a:r>
             <a:r>
-              <a:rPr sz="1400" lang="zh-TW" dirty="0">
+              <a:rPr sz="1100" lang="zh-TW" dirty="0">
                 <a:solidFill>
                   <a:srgbClr val="000000"/>
                 </a:solidFill>
@@ -12268,7 +12312,7 @@
                 <a:ea typeface="Arial" pitchFamily="34" charset="-122"/>
                 <a:cs typeface="Arial" pitchFamily="34" charset="-120"/>
               </a:rPr>
-              <a:t>«Học» là: đoán, so đáp án, sửa một chút — lặp lại rất nhiều lần</a:t>
+              <a:t>Học máy và học sâu đều học như nhau: đoán, so đáp án, sửa một chút — lặp lại nhiều lần</a:t>
             </a:r>
             <a:endParaRPr lang="en-US" sz="2140" dirty="0"/>
           </a:p>
@@ -12288,7 +12332,7 @@
                 <a:ea typeface="微軟正黑體" pitchFamily="34" charset="-122"/>
                 <a:cs typeface="微軟正黑體" pitchFamily="34" charset="-120"/>
               </a:rPr>
-              <a:t>「學」就是：猜、對答案、改一點點——重複很多次</a:t>
+              <a:t>機器學習和深度學習都這樣學：猜、對答案、改一點點，重複很多次</a:t>
             </a:r>
             <a:endParaRPr lang="en-US" sz="2140" dirty="0"/>
           </a:p>
@@ -12485,7 +12529,7 @@
                 <a:ea typeface="Arial" pitchFamily="34" charset="-122"/>
                 <a:cs typeface="Arial" pitchFamily="34" charset="-120"/>
               </a:rPr>
-              <a:t>Đưa một ảnh vào, mô hình đoán: ở đây có người, khung này.</a:t>
+              <a:t>Mô hình đoán trước một đáp án: khung này là người hay xe? Trong ảnh, người ở đâu?</a:t>
             </a:r>
             <a:endParaRPr lang="en-US" sz="1020" dirty="0"/>
           </a:p>
@@ -12505,7 +12549,7 @@
                 <a:ea typeface="微軟正黑體" pitchFamily="34" charset="-122"/>
                 <a:cs typeface="微軟正黑體" pitchFamily="34" charset="-120"/>
               </a:rPr>
-              <a:t>丟一張照片進去，模型猜：這裡有一個人，框在這裡。</a:t>
+              <a:t>模型先猜一個答案：這個框是人還是車？照片裡哪裡有人？</a:t>
             </a:r>
             <a:endParaRPr lang="en-US" sz="1020" dirty="0"/>
           </a:p>
@@ -12997,7 +13041,7 @@
                 <a:ea typeface="Arial" pitchFamily="34" charset="-122"/>
                 <a:cs typeface="Arial" pitchFamily="34" charset="-120"/>
               </a:rPr>
-              <a:t>Chỉnh các con số bên trong (ngưỡng: 1 số; YOLOX: ~9 triệu số).</a:t>
+              <a:t>Học máy: chỉ ngưỡng, 1 số. YOLOX: ~9 triệu số, cả bộ lọc.</a:t>
             </a:r>
             <a:endParaRPr lang="en-US" sz="1020" dirty="0"/>
           </a:p>
@@ -13017,7 +13061,7 @@
                 <a:ea typeface="微軟正黑體" pitchFamily="34" charset="-122"/>
                 <a:cs typeface="微軟正黑體" pitchFamily="34" charset="-120"/>
               </a:rPr>
-              <a:t>調整裡面的數字（剛剛的門檻：1 個；YOLOX：約 900 萬個）。</a:t>
+              <a:t>機器學習：只改門檻，1 個。YOLOX：約 900 萬個，連濾鏡一起改。</a:t>
             </a:r>
             <a:endParaRPr lang="en-US" sz="1020" dirty="0"/>
           </a:p>
@@ -13253,7 +13297,7 @@
                 <a:ea typeface="Arial" pitchFamily="34" charset="-122"/>
                 <a:cs typeface="Arial" pitchFamily="34" charset="-120"/>
               </a:rPr>
-              <a:t>Hàng chục nghìn ảnh, lặp nhiều vòng.</a:t>
+              <a:t>Hàng chục nghìn ví dụ, lặp nhiều vòng.</a:t>
             </a:r>
             <a:endParaRPr lang="en-US" sz="1020" dirty="0"/>
           </a:p>
@@ -13273,7 +13317,7 @@
                 <a:ea typeface="微軟正黑體" pitchFamily="34" charset="-122"/>
                 <a:cs typeface="微軟正黑體" pitchFamily="34" charset="-120"/>
               </a:rPr>
-              <a:t>幾萬張照片，一輪又一輪。</a:t>
+              <a:t>幾萬個例子，一輪又一輪。</a:t>
             </a:r>
             <a:endParaRPr lang="en-US" sz="1020" dirty="0"/>
           </a:p>

--- a/第八週(10-29)/第八週_第1節_簡報.pptx
+++ b/第八週(10-29)/第八週_第1節_簡報.pptx
@@ -1132,11 +1132,11 @@
                 <a:spcPts val="0"/>
               </a:spcBef>
               <a:spcAft>
-                <a:spcPts val="142"/>
+                <a:spcPts val="133"/>
               </a:spcAft>
             </a:pPr>
             <a:r>
-              <a:rPr sz="850" b="1" lang="zh-TW" dirty="0">
+              <a:rPr sz="800" b="1" lang="zh-TW" dirty="0">
                 <a:solidFill>
                   <a:srgbClr val="000000"/>
                 </a:solidFill>
@@ -1147,7 +1147,7 @@
               <a:t>這一張的目的：</a:t>
             </a:r>
             <a:r>
-              <a:rPr sz="850" lang="zh-TW" dirty="0">
+              <a:rPr sz="800" lang="zh-TW" dirty="0">
                 <a:solidFill>
                   <a:srgbClr val="000000"/>
                 </a:solidFill>
@@ -1165,11 +1165,11 @@
                 <a:spcPts val="0"/>
               </a:spcBef>
               <a:spcAft>
-                <a:spcPts val="142"/>
+                <a:spcPts val="133"/>
               </a:spcAft>
             </a:pPr>
             <a:r>
-              <a:rPr sz="850" lang="zh-TW" dirty="0">
+              <a:rPr sz="800" lang="zh-TW" dirty="0">
                 <a:solidFill>
                   <a:srgbClr val="000000"/>
                 </a:solidFill>
@@ -1187,11 +1187,11 @@
                 <a:spcPts val="0"/>
               </a:spcBef>
               <a:spcAft>
-                <a:spcPts val="142"/>
+                <a:spcPts val="133"/>
               </a:spcAft>
             </a:pPr>
             <a:r>
-              <a:rPr sz="850" b="1" lang="zh-TW" dirty="0">
+              <a:rPr sz="800" b="1" lang="zh-TW" dirty="0">
                 <a:solidFill>
                   <a:srgbClr val="000000"/>
                 </a:solidFill>
@@ -1202,7 +1202,7 @@
               <a:t>第一個理由：電腦只知道方向，不知道距離。</a:t>
             </a:r>
             <a:r>
-              <a:rPr sz="850" lang="zh-TW" dirty="0">
+              <a:rPr sz="800" lang="zh-TW" dirty="0">
                 <a:solidFill>
                   <a:srgbClr val="000000"/>
                 </a:solidFill>
@@ -1220,11 +1220,11 @@
                 <a:spcPts val="0"/>
               </a:spcBef>
               <a:spcAft>
-                <a:spcPts val="142"/>
+                <a:spcPts val="133"/>
               </a:spcAft>
             </a:pPr>
             <a:r>
-              <a:rPr sz="850" lang="zh-TW" dirty="0">
+              <a:rPr sz="800" lang="zh-TW" dirty="0">
                 <a:solidFill>
                   <a:srgbClr val="000000"/>
                 </a:solidFill>
@@ -1235,7 +1235,7 @@
               <a:t>想像大霧裡下山，看不到山谷在哪裡，只摸得到</a:t>
             </a:r>
             <a:r>
-              <a:rPr sz="850" b="1" lang="zh-TW" dirty="0">
+              <a:rPr sz="800" b="1" lang="zh-TW" dirty="0">
                 <a:solidFill>
                   <a:srgbClr val="000000"/>
                 </a:solidFill>
@@ -1246,7 +1246,7 @@
               <a:t>腳下是往哪邊斜</a:t>
             </a:r>
             <a:r>
-              <a:rPr sz="850" lang="zh-TW" dirty="0">
+              <a:rPr sz="800" lang="zh-TW" dirty="0">
                 <a:solidFill>
                   <a:srgbClr val="000000"/>
                 </a:solidFill>
@@ -1264,11 +1264,11 @@
                 <a:spcPts val="0"/>
               </a:spcBef>
               <a:spcAft>
-                <a:spcPts val="142"/>
+                <a:spcPts val="133"/>
               </a:spcAft>
             </a:pPr>
             <a:r>
-              <a:rPr sz="850" lang="zh-TW" dirty="0">
+              <a:rPr sz="800" lang="zh-TW" dirty="0">
                 <a:solidFill>
                   <a:srgbClr val="000000"/>
                 </a:solidFill>
@@ -1279,7 +1279,7 @@
               <a:t>電腦學東西就是這樣。對完答案，它算得出「門檻往小一點，錯會變少」，這是方向；可是它不知道要往小</a:t>
             </a:r>
             <a:r>
-              <a:rPr sz="850" b="1" lang="zh-TW" dirty="0">
+              <a:rPr sz="800" b="1" lang="zh-TW" dirty="0">
                 <a:solidFill>
                   <a:srgbClr val="000000"/>
                 </a:solidFill>
@@ -1290,7 +1290,7 @@
               <a:t>多少</a:t>
             </a:r>
             <a:r>
-              <a:rPr sz="850" lang="zh-TW" dirty="0">
+              <a:rPr sz="800" lang="zh-TW" dirty="0">
                 <a:solidFill>
                   <a:srgbClr val="000000"/>
                 </a:solidFill>
@@ -1301,7 +1301,7 @@
               <a:t>。每次走多大一步，是人事先設定的，這個數字叫</a:t>
             </a:r>
             <a:r>
-              <a:rPr sz="850" b="1" lang="zh-TW" dirty="0">
+              <a:rPr sz="800" b="1" lang="zh-TW" dirty="0">
                 <a:solidFill>
                   <a:srgbClr val="000000"/>
                 </a:solidFill>
@@ -1312,7 +1312,7 @@
               <a:t>學習率</a:t>
             </a:r>
             <a:r>
-              <a:rPr sz="850" lang="zh-TW" dirty="0">
+              <a:rPr sz="800" lang="zh-TW" dirty="0">
                 <a:solidFill>
                   <a:srgbClr val="000000"/>
                 </a:solidFill>
@@ -1330,11 +1330,11 @@
                 <a:spcPts val="0"/>
               </a:spcBef>
               <a:spcAft>
-                <a:spcPts val="142"/>
+                <a:spcPts val="133"/>
               </a:spcAft>
             </a:pPr>
             <a:r>
-              <a:rPr sz="850" lang="zh-TW" dirty="0">
+              <a:rPr sz="800" lang="zh-TW" dirty="0">
                 <a:solidFill>
                   <a:srgbClr val="000000"/>
                 </a:solidFill>
@@ -1345,7 +1345,7 @@
               <a:t>看這個動畫，數字是真的。我拿第 9 張那 627 個例子算了一條</a:t>
             </a:r>
             <a:r>
-              <a:rPr sz="850" b="1" lang="zh-TW" dirty="0">
+              <a:rPr sz="800" b="1" lang="zh-TW" dirty="0">
                 <a:solidFill>
                   <a:srgbClr val="000000"/>
                 </a:solidFill>
@@ -1356,7 +1356,7 @@
               <a:t>山谷曲線</a:t>
             </a:r>
             <a:r>
-              <a:rPr sz="850" lang="zh-TW" dirty="0">
+              <a:rPr sz="800" lang="zh-TW" dirty="0">
                 <a:solidFill>
                   <a:srgbClr val="000000"/>
                 </a:solidFill>
@@ -1367,7 +1367,7 @@
               <a:t>：橫軸是門檻放在哪裡，縱軸是放在那裡會</a:t>
             </a:r>
             <a:r>
-              <a:rPr sz="850" b="1" lang="zh-TW" dirty="0">
+              <a:rPr sz="800" b="1" lang="zh-TW" dirty="0">
                 <a:solidFill>
                   <a:srgbClr val="000000"/>
                 </a:solidFill>
@@ -1378,7 +1378,7 @@
               <a:t>錯多少</a:t>
             </a:r>
             <a:r>
-              <a:rPr sz="850" lang="zh-TW" dirty="0">
+              <a:rPr sz="800" lang="zh-TW" dirty="0">
                 <a:solidFill>
                   <a:srgbClr val="000000"/>
                 </a:solidFill>
@@ -1389,7 +1389,7 @@
               <a:t>。谷底就是最好的門檻。中間那條淺綠色的帶，是分得對的範圍：汽車最高到 1.02，大人最低 1.25，門檻放在中間就全部分對。黃色的球是電腦目前的門檻，從 2.6 出發，每一次修改，就往下坡走「步伐乘以斜度」那麼遠。前八步會放慢：每一步跳之前，球腳下先出現一小段</a:t>
             </a:r>
             <a:r>
-              <a:rPr sz="850" b="1" lang="zh-TW" dirty="0">
+              <a:rPr sz="800" b="1" lang="zh-TW" dirty="0">
                 <a:solidFill>
                   <a:srgbClr val="000000"/>
                 </a:solidFill>
@@ -1400,7 +1400,7 @@
               <a:t>黃色斜線</a:t>
             </a:r>
             <a:r>
-              <a:rPr sz="850" lang="zh-TW" dirty="0">
+              <a:rPr sz="800" lang="zh-TW" dirty="0">
                 <a:solidFill>
                   <a:srgbClr val="000000"/>
                 </a:solidFill>
@@ -1411,7 +1411,7 @@
               <a:t>，那就是電腦算出來的斜度；下面再出現一個</a:t>
             </a:r>
             <a:r>
-              <a:rPr sz="850" b="1" lang="zh-TW" dirty="0">
+              <a:rPr sz="800" b="1" lang="zh-TW" dirty="0">
                 <a:solidFill>
                   <a:srgbClr val="000000"/>
                 </a:solidFill>
@@ -1422,7 +1422,7 @@
               <a:t>箭頭</a:t>
             </a:r>
             <a:r>
-              <a:rPr sz="850" lang="zh-TW" dirty="0">
+              <a:rPr sz="800" lang="zh-TW" dirty="0">
                 <a:solidFill>
                   <a:srgbClr val="000000"/>
                 </a:solidFill>
@@ -1440,11 +1440,11 @@
                 <a:spcPts val="0"/>
               </a:spcBef>
               <a:spcAft>
-                <a:spcPts val="142"/>
+                <a:spcPts val="133"/>
               </a:spcAft>
             </a:pPr>
             <a:r>
-              <a:rPr sz="850" b="1" lang="zh-TW" dirty="0">
+              <a:rPr sz="800" b="1" lang="zh-TW" dirty="0">
                 <a:solidFill>
                   <a:srgbClr val="000000"/>
                 </a:solidFill>
@@ -1455,7 +1455,7 @@
               <a:t>中間，步伐剛好</a:t>
             </a:r>
             <a:r>
-              <a:rPr sz="850" lang="zh-TW" dirty="0">
+              <a:rPr sz="800" lang="zh-TW" dirty="0">
                 <a:solidFill>
                   <a:srgbClr val="000000"/>
                 </a:solidFill>
@@ -1466,7 +1466,7 @@
               <a:t>：第一步從 2.6 跳到 1.99，第二步 1.60，第三步 1.41，第四步 1.31……請看下面的箭頭，</a:t>
             </a:r>
             <a:r>
-              <a:rPr sz="850" b="1" lang="zh-TW" dirty="0">
+              <a:rPr sz="800" b="1" lang="zh-TW" dirty="0">
                 <a:solidFill>
                   <a:srgbClr val="000000"/>
                 </a:solidFill>
@@ -1477,7 +1477,7 @@
               <a:t>一次比一次短</a:t>
             </a:r>
             <a:r>
-              <a:rPr sz="850" lang="zh-TW" dirty="0">
+              <a:rPr sz="800" lang="zh-TW" dirty="0">
                 <a:solidFill>
                   <a:srgbClr val="000000"/>
                 </a:solidFill>
@@ -1495,11 +1495,11 @@
                 <a:spcPts val="0"/>
               </a:spcBef>
               <a:spcAft>
-                <a:spcPts val="142"/>
+                <a:spcPts val="133"/>
               </a:spcAft>
             </a:pPr>
             <a:r>
-              <a:rPr sz="850" b="1" lang="zh-TW" dirty="0">
+              <a:rPr sz="800" b="1" lang="zh-TW" dirty="0">
                 <a:solidFill>
                   <a:srgbClr val="000000"/>
                 </a:solidFill>
@@ -1510,7 +1510,7 @@
               <a:t>左邊，步伐太小</a:t>
             </a:r>
             <a:r>
-              <a:rPr sz="850" lang="zh-TW" dirty="0">
+              <a:rPr sz="800" lang="zh-TW" dirty="0">
                 <a:solidFill>
                   <a:srgbClr val="000000"/>
                 </a:solidFill>
@@ -1528,11 +1528,11 @@
                 <a:spcPts val="0"/>
               </a:spcBef>
               <a:spcAft>
-                <a:spcPts val="142"/>
+                <a:spcPts val="133"/>
               </a:spcAft>
             </a:pPr>
             <a:r>
-              <a:rPr sz="850" b="1" lang="zh-TW" dirty="0">
+              <a:rPr sz="800" b="1" lang="zh-TW" dirty="0">
                 <a:solidFill>
                   <a:srgbClr val="000000"/>
                 </a:solidFill>
@@ -1543,7 +1543,7 @@
               <a:t>右邊，步伐太大</a:t>
             </a:r>
             <a:r>
-              <a:rPr sz="850" lang="zh-TW" dirty="0">
+              <a:rPr sz="800" lang="zh-TW" dirty="0">
                 <a:solidFill>
                   <a:srgbClr val="000000"/>
                 </a:solidFill>
@@ -1561,11 +1561,11 @@
                 <a:spcPts val="0"/>
               </a:spcBef>
               <a:spcAft>
-                <a:spcPts val="142"/>
+                <a:spcPts val="133"/>
               </a:spcAft>
             </a:pPr>
             <a:r>
-              <a:rPr sz="850" lang="zh-TW" dirty="0">
+              <a:rPr sz="800" lang="zh-TW" dirty="0">
                 <a:solidFill>
                   <a:srgbClr val="000000"/>
                 </a:solidFill>
@@ -1583,11 +1583,11 @@
                 <a:spcPts val="0"/>
               </a:spcBef>
               <a:spcAft>
-                <a:spcPts val="142"/>
+                <a:spcPts val="133"/>
               </a:spcAft>
             </a:pPr>
             <a:r>
-              <a:rPr sz="850" lang="zh-TW" dirty="0">
+              <a:rPr sz="800" lang="zh-TW" dirty="0">
                 <a:solidFill>
                   <a:srgbClr val="000000"/>
                 </a:solidFill>
@@ -1605,11 +1605,11 @@
                 <a:spcPts val="0"/>
               </a:spcBef>
               <a:spcAft>
-                <a:spcPts val="142"/>
+                <a:spcPts val="133"/>
               </a:spcAft>
             </a:pPr>
             <a:r>
-              <a:rPr sz="850" b="1" lang="zh-TW" dirty="0">
+              <a:rPr sz="800" b="1" lang="zh-TW" dirty="0">
                 <a:solidFill>
                   <a:srgbClr val="000000"/>
                 </a:solidFill>
@@ -1620,7 +1620,7 @@
               <a:t>第二個理由：每次只看到一部分照片。</a:t>
             </a:r>
             <a:r>
-              <a:rPr sz="850" lang="zh-TW" dirty="0">
+              <a:rPr sz="800" lang="zh-TW" dirty="0">
                 <a:solidFill>
                   <a:srgbClr val="000000"/>
                 </a:solidFill>
@@ -1638,11 +1638,11 @@
                 <a:spcPts val="0"/>
               </a:spcBef>
               <a:spcAft>
-                <a:spcPts val="142"/>
+                <a:spcPts val="133"/>
               </a:spcAft>
             </a:pPr>
             <a:r>
-              <a:rPr sz="850" lang="zh-TW" dirty="0">
+              <a:rPr sz="800" lang="zh-TW" dirty="0">
                 <a:solidFill>
                   <a:srgbClr val="000000"/>
                 </a:solidFill>
@@ -1660,11 +1660,11 @@
                 <a:spcPts val="0"/>
               </a:spcBef>
               <a:spcAft>
-                <a:spcPts val="142"/>
+                <a:spcPts val="133"/>
               </a:spcAft>
             </a:pPr>
             <a:r>
-              <a:rPr sz="850" lang="zh-TW" dirty="0">
+              <a:rPr sz="800" lang="zh-TW" dirty="0">
                 <a:solidFill>
                   <a:srgbClr val="000000"/>
                 </a:solidFill>
@@ -1682,11 +1682,286 @@
                 <a:spcPts val="0"/>
               </a:spcBef>
               <a:spcAft>
-                <a:spcPts val="142"/>
+                <a:spcPts val="133"/>
               </a:spcAft>
             </a:pPr>
             <a:r>
-              <a:rPr sz="850" b="1" lang="zh-TW" dirty="0">
+              <a:rPr sz="800" b="1" lang="zh-TW" dirty="0">
+                <a:solidFill>
+                  <a:srgbClr val="000000"/>
+                </a:solidFill>
+                <a:latin typeface="Arial Unicode MS"/>
+                <a:ea typeface="Arial Unicode MS"/>
+                <a:cs typeface="Arial Unicode MS"/>
+              </a:rPr>
+              <a:t>這一張講的東西，都有正式的名字。</a:t>
+            </a:r>
+            <a:r>
+              <a:rPr sz="800" lang="zh-TW" dirty="0">
+                <a:solidFill>
+                  <a:srgbClr val="000000"/>
+                </a:solidFill>
+                <a:latin typeface="Arial Unicode MS"/>
+                <a:ea typeface="Arial Unicode MS"/>
+                <a:cs typeface="Arial Unicode MS"/>
+              </a:rPr>
+              <a:t>以後各位看英文的資料，或是第十週訓練模型的時候，會一直碰到這幾個詞，先記下來。
+</a:t>
+            </a:r>
+          </a:p>
+          <a:p>
+            <a:pPr algn="l">
+              <a:spcBef>
+                <a:spcPts val="0"/>
+              </a:spcBef>
+              <a:spcAft>
+                <a:spcPts val="133"/>
+              </a:spcAft>
+            </a:pPr>
+            <a:r>
+              <a:rPr sz="800" lang="zh-TW" dirty="0">
+                <a:solidFill>
+                  <a:srgbClr val="000000"/>
+                </a:solidFill>
+                <a:latin typeface="Arial Unicode MS"/>
+                <a:ea typeface="Arial Unicode MS"/>
+                <a:cs typeface="Arial Unicode MS"/>
+              </a:rPr>
+              <a:t>第一個，</a:t>
+            </a:r>
+            <a:r>
+              <a:rPr sz="800" b="1" lang="zh-TW" dirty="0">
+                <a:solidFill>
+                  <a:srgbClr val="000000"/>
+                </a:solidFill>
+                <a:latin typeface="Arial Unicode MS"/>
+                <a:ea typeface="Arial Unicode MS"/>
+                <a:cs typeface="Arial Unicode MS"/>
+              </a:rPr>
+              <a:t>損失函數</a:t>
+            </a:r>
+            <a:r>
+              <a:rPr sz="800" lang="zh-TW" dirty="0">
+                <a:solidFill>
+                  <a:srgbClr val="000000"/>
+                </a:solidFill>
+                <a:latin typeface="Arial Unicode MS"/>
+                <a:ea typeface="Arial Unicode MS"/>
+                <a:cs typeface="Arial Unicode MS"/>
+              </a:rPr>
+              <a:t>，英文是 loss function。就是動畫裡那條山谷曲線：門檻放在哪裡，會錯多少。它是用來量「模型現在錯多少」的，數字愈小愈好，谷底就是錯最少的地方。
+</a:t>
+            </a:r>
+          </a:p>
+          <a:p>
+            <a:pPr algn="l">
+              <a:spcBef>
+                <a:spcPts val="0"/>
+              </a:spcBef>
+              <a:spcAft>
+                <a:spcPts val="133"/>
+              </a:spcAft>
+            </a:pPr>
+            <a:r>
+              <a:rPr sz="800" lang="zh-TW" dirty="0">
+                <a:solidFill>
+                  <a:srgbClr val="000000"/>
+                </a:solidFill>
+                <a:latin typeface="Arial Unicode MS"/>
+                <a:ea typeface="Arial Unicode MS"/>
+                <a:cs typeface="Arial Unicode MS"/>
+              </a:rPr>
+              <a:t>第二個，</a:t>
+            </a:r>
+            <a:r>
+              <a:rPr sz="800" b="1" lang="zh-TW" dirty="0">
+                <a:solidFill>
+                  <a:srgbClr val="000000"/>
+                </a:solidFill>
+                <a:latin typeface="Arial Unicode MS"/>
+                <a:ea typeface="Arial Unicode MS"/>
+                <a:cs typeface="Arial Unicode MS"/>
+              </a:rPr>
+              <a:t>梯度</a:t>
+            </a:r>
+            <a:r>
+              <a:rPr sz="800" lang="zh-TW" dirty="0">
+                <a:solidFill>
+                  <a:srgbClr val="000000"/>
+                </a:solidFill>
+                <a:latin typeface="Arial Unicode MS"/>
+                <a:ea typeface="Arial Unicode MS"/>
+                <a:cs typeface="Arial Unicode MS"/>
+              </a:rPr>
+              <a:t>，英文是 gradient。就是球腳下那一段黃色斜線：曲線在這一點有多斜、往哪一邊斜。電腦對完答案以後算出來的，就是梯度。
+</a:t>
+            </a:r>
+          </a:p>
+          <a:p>
+            <a:pPr algn="l">
+              <a:spcBef>
+                <a:spcPts val="0"/>
+              </a:spcBef>
+              <a:spcAft>
+                <a:spcPts val="133"/>
+              </a:spcAft>
+            </a:pPr>
+            <a:r>
+              <a:rPr sz="800" lang="zh-TW" dirty="0">
+                <a:solidFill>
+                  <a:srgbClr val="000000"/>
+                </a:solidFill>
+                <a:latin typeface="Arial Unicode MS"/>
+                <a:ea typeface="Arial Unicode MS"/>
+                <a:cs typeface="Arial Unicode MS"/>
+              </a:rPr>
+              <a:t>第三個，</a:t>
+            </a:r>
+            <a:r>
+              <a:rPr sz="800" b="1" lang="zh-TW" dirty="0">
+                <a:solidFill>
+                  <a:srgbClr val="000000"/>
+                </a:solidFill>
+                <a:latin typeface="Arial Unicode MS"/>
+                <a:ea typeface="Arial Unicode MS"/>
+                <a:cs typeface="Arial Unicode MS"/>
+              </a:rPr>
+              <a:t>梯度下降</a:t>
+            </a:r>
+            <a:r>
+              <a:rPr sz="800" lang="zh-TW" dirty="0">
+                <a:solidFill>
+                  <a:srgbClr val="000000"/>
+                </a:solidFill>
+                <a:latin typeface="Arial Unicode MS"/>
+                <a:ea typeface="Arial Unicode MS"/>
+                <a:cs typeface="Arial Unicode MS"/>
+              </a:rPr>
+              <a:t>，英文是 gradient descent。就是整個動畫在做的事：照著梯度往下坡走一小步，再算一次梯度，再走一小步，一直重複，走到谷底。每一步走多大，就是剛剛講的學習率。影片列的標題寫著「梯度下降」，指的就是這件事。
+</a:t>
+            </a:r>
+          </a:p>
+          <a:p>
+            <a:pPr algn="l">
+              <a:spcBef>
+                <a:spcPts val="0"/>
+              </a:spcBef>
+              <a:spcAft>
+                <a:spcPts val="133"/>
+              </a:spcAft>
+            </a:pPr>
+            <a:r>
+              <a:rPr sz="800" lang="zh-TW" dirty="0">
+                <a:solidFill>
+                  <a:srgbClr val="000000"/>
+                </a:solidFill>
+                <a:latin typeface="Arial Unicode MS"/>
+                <a:ea typeface="Arial Unicode MS"/>
+                <a:cs typeface="Arial Unicode MS"/>
+              </a:rPr>
+              <a:t>所以把這一張換成正式的說法，就是：電腦用</a:t>
+            </a:r>
+            <a:r>
+              <a:rPr sz="800" b="1" lang="zh-TW" dirty="0">
+                <a:solidFill>
+                  <a:srgbClr val="000000"/>
+                </a:solidFill>
+                <a:latin typeface="Arial Unicode MS"/>
+                <a:ea typeface="Arial Unicode MS"/>
+                <a:cs typeface="Arial Unicode MS"/>
+              </a:rPr>
+              <a:t>梯度下降</a:t>
+            </a:r>
+            <a:r>
+              <a:rPr sz="800" lang="zh-TW" dirty="0">
+                <a:solidFill>
+                  <a:srgbClr val="000000"/>
+                </a:solidFill>
+                <a:latin typeface="Arial Unicode MS"/>
+                <a:ea typeface="Arial Unicode MS"/>
+                <a:cs typeface="Arial Unicode MS"/>
+              </a:rPr>
+              <a:t>，照著</a:t>
+            </a:r>
+            <a:r>
+              <a:rPr sz="800" b="1" lang="zh-TW" dirty="0">
+                <a:solidFill>
+                  <a:srgbClr val="000000"/>
+                </a:solidFill>
+                <a:latin typeface="Arial Unicode MS"/>
+                <a:ea typeface="Arial Unicode MS"/>
+                <a:cs typeface="Arial Unicode MS"/>
+              </a:rPr>
+              <a:t>梯度</a:t>
+            </a:r>
+            <a:r>
+              <a:rPr sz="800" lang="zh-TW" dirty="0">
+                <a:solidFill>
+                  <a:srgbClr val="000000"/>
+                </a:solidFill>
+                <a:latin typeface="Arial Unicode MS"/>
+                <a:ea typeface="Arial Unicode MS"/>
+                <a:cs typeface="Arial Unicode MS"/>
+              </a:rPr>
+              <a:t>一步一步走，讓</a:t>
+            </a:r>
+            <a:r>
+              <a:rPr sz="800" b="1" lang="zh-TW" dirty="0">
+                <a:solidFill>
+                  <a:srgbClr val="000000"/>
+                </a:solidFill>
+                <a:latin typeface="Arial Unicode MS"/>
+                <a:ea typeface="Arial Unicode MS"/>
+                <a:cs typeface="Arial Unicode MS"/>
+              </a:rPr>
+              <a:t>損失函數</a:t>
+            </a:r>
+            <a:r>
+              <a:rPr sz="800" lang="zh-TW" dirty="0">
+                <a:solidFill>
+                  <a:srgbClr val="000000"/>
+                </a:solidFill>
+                <a:latin typeface="Arial Unicode MS"/>
+                <a:ea typeface="Arial Unicode MS"/>
+                <a:cs typeface="Arial Unicode MS"/>
+              </a:rPr>
+              <a:t>愈來愈小；每一步走多大，由</a:t>
+            </a:r>
+            <a:r>
+              <a:rPr sz="800" b="1" lang="zh-TW" dirty="0">
+                <a:solidFill>
+                  <a:srgbClr val="000000"/>
+                </a:solidFill>
+                <a:latin typeface="Arial Unicode MS"/>
+                <a:ea typeface="Arial Unicode MS"/>
+                <a:cs typeface="Arial Unicode MS"/>
+              </a:rPr>
+              <a:t>學習率</a:t>
+            </a:r>
+            <a:r>
+              <a:rPr sz="800" lang="zh-TW" dirty="0">
+                <a:solidFill>
+                  <a:srgbClr val="000000"/>
+                </a:solidFill>
+                <a:latin typeface="Arial Unicode MS"/>
+                <a:ea typeface="Arial Unicode MS"/>
+                <a:cs typeface="Arial Unicode MS"/>
+              </a:rPr>
+              <a:t>決定。
+</a:t>
+            </a:r>
+          </a:p>
+          <a:p>
+            <a:pPr algn="l">
+              <a:spcBef>
+                <a:spcPts val="0"/>
+              </a:spcBef>
+              <a:spcAft>
+                <a:spcPts val="133"/>
+              </a:spcAft>
+            </a:pPr>
+            <a:r>
+              <a:rPr sz="800" b="1" lang="zh-TW" dirty="0">
                 <a:solidFill>
                   <a:srgbClr val="000000"/>
                 </a:solidFill>
@@ -1697,7 +1972,7 @@
               <a:t>影片（3Blue1Brown，英文，可開自動翻譯字幕）：從 5:12 播到 6:54。</a:t>
             </a:r>
             <a:r>
-              <a:rPr sz="850" lang="zh-TW" dirty="0">
+              <a:rPr sz="800" lang="zh-TW" dirty="0">
                 <a:solidFill>
                   <a:srgbClr val="000000"/>
                 </a:solidFill>

--- a/第八週(10-29)/第八週_第1節_簡報.pptx
+++ b/第八週(10-29)/第八週_第1節_簡報.pptx
@@ -1177,7 +1177,95 @@
                 <a:ea typeface="Arial Unicode MS"/>
                 <a:cs typeface="Arial Unicode MS"/>
               </a:rPr>
-              <a:t>上一張說「改一點點」，為什麼不一次改到對？有兩個理由。
+              <a:t>上一張說「改一點點」，為什麼不一次改到對？有兩個理由。</a:t>
+            </a:r>
+            <a:r>
+              <a:rPr sz="800" b="1" lang="zh-TW" dirty="0">
+                <a:solidFill>
+                  <a:srgbClr val="000000"/>
+                </a:solidFill>
+                <a:latin typeface="Arial Unicode MS"/>
+                <a:ea typeface="Arial Unicode MS"/>
+                <a:cs typeface="Arial Unicode MS"/>
+              </a:rPr>
+              <a:t>第一個理由：電腦只知道方向，不知道距離。</a:t>
+            </a:r>
+            <a:r>
+              <a:rPr sz="800" lang="zh-TW" dirty="0">
+                <a:solidFill>
+                  <a:srgbClr val="000000"/>
+                </a:solidFill>
+                <a:latin typeface="Arial Unicode MS"/>
+                <a:ea typeface="Arial Unicode MS"/>
+                <a:cs typeface="Arial Unicode MS"/>
+              </a:rPr>
+              <a:t>想像大霧裡下山，看不到山谷在哪裡，只摸得到</a:t>
+            </a:r>
+            <a:r>
+              <a:rPr sz="800" b="1" lang="zh-TW" dirty="0">
+                <a:solidFill>
+                  <a:srgbClr val="000000"/>
+                </a:solidFill>
+                <a:latin typeface="Arial Unicode MS"/>
+                <a:ea typeface="Arial Unicode MS"/>
+                <a:cs typeface="Arial Unicode MS"/>
+              </a:rPr>
+              <a:t>腳下是往哪邊斜</a:t>
+            </a:r>
+            <a:r>
+              <a:rPr sz="800" lang="zh-TW" dirty="0">
+                <a:solidFill>
+                  <a:srgbClr val="000000"/>
+                </a:solidFill>
+                <a:latin typeface="Arial Unicode MS"/>
+                <a:ea typeface="Arial Unicode MS"/>
+                <a:cs typeface="Arial Unicode MS"/>
+              </a:rPr>
+              <a:t>。最安全的做法是：往下坡的方向走一小步，停下來再摸一次，再走一小步。如果你一看到往下，就往那個方向大跳一百公尺，很可能直接跳過山谷，落在對面的山坡上。電腦學東西就是這樣。對完答案，它算得出「門檻往小一點，錯會變少」，這是方向；可是它不知道要往小</a:t>
+            </a:r>
+            <a:r>
+              <a:rPr sz="800" b="1" lang="zh-TW" dirty="0">
+                <a:solidFill>
+                  <a:srgbClr val="000000"/>
+                </a:solidFill>
+                <a:latin typeface="Arial Unicode MS"/>
+                <a:ea typeface="Arial Unicode MS"/>
+                <a:cs typeface="Arial Unicode MS"/>
+              </a:rPr>
+              <a:t>多少</a:t>
+            </a:r>
+            <a:r>
+              <a:rPr sz="800" lang="zh-TW" dirty="0">
+                <a:solidFill>
+                  <a:srgbClr val="000000"/>
+                </a:solidFill>
+                <a:latin typeface="Arial Unicode MS"/>
+                <a:ea typeface="Arial Unicode MS"/>
+                <a:cs typeface="Arial Unicode MS"/>
+              </a:rPr>
+              <a:t>。每次走多大一步，是人事先設定的，這個數字叫</a:t>
+            </a:r>
+            <a:r>
+              <a:rPr sz="800" b="1" lang="zh-TW" dirty="0">
+                <a:solidFill>
+                  <a:srgbClr val="000000"/>
+                </a:solidFill>
+                <a:latin typeface="Arial Unicode MS"/>
+                <a:ea typeface="Arial Unicode MS"/>
+                <a:cs typeface="Arial Unicode MS"/>
+              </a:rPr>
+              <a:t>學習率</a:t>
+            </a:r>
+            <a:r>
+              <a:rPr sz="800" lang="zh-TW" dirty="0">
+                <a:solidFill>
+                  <a:srgbClr val="000000"/>
+                </a:solidFill>
+                <a:latin typeface="Arial Unicode MS"/>
+                <a:ea typeface="Arial Unicode MS"/>
+                <a:cs typeface="Arial Unicode MS"/>
+              </a:rPr>
+              <a:t>。
 </a:t>
             </a:r>
           </a:p>
@@ -1191,6 +1279,17 @@
               </a:spcAft>
             </a:pPr>
             <a:r>
+              <a:rPr sz="800" lang="zh-TW" dirty="0">
+                <a:solidFill>
+                  <a:srgbClr val="000000"/>
+                </a:solidFill>
+                <a:latin typeface="Arial Unicode MS"/>
+                <a:ea typeface="Arial Unicode MS"/>
+                <a:cs typeface="Arial Unicode MS"/>
+              </a:rPr>
+              <a:t>看這個動畫，數字是真的。我拿第 9 張那 627 個例子算了一條</a:t>
+            </a:r>
+            <a:r>
               <a:rPr sz="800" b="1" lang="zh-TW" dirty="0">
                 <a:solidFill>
                   <a:srgbClr val="000000"/>
@@ -1199,7 +1298,7 @@
                 <a:ea typeface="Arial Unicode MS"/>
                 <a:cs typeface="Arial Unicode MS"/>
               </a:rPr>
-              <a:t>第一個理由：電腦只知道方向，不知道距離。</a:t>
+              <a:t>山谷曲線</a:t>
             </a:r>
             <a:r>
               <a:rPr sz="800" lang="zh-TW" dirty="0">
@@ -1210,7 +1309,73 @@
                 <a:ea typeface="Arial Unicode MS"/>
                 <a:cs typeface="Arial Unicode MS"/>
               </a:rPr>
-              <a:t>
+              <a:t>：橫軸是門檻放在哪裡；縱軸是門檻放在那裡的時候，模型「</a:t>
+            </a:r>
+            <a:r>
+              <a:rPr sz="800" b="1" lang="zh-TW" dirty="0">
+                <a:solidFill>
+                  <a:srgbClr val="000000"/>
+                </a:solidFill>
+                <a:latin typeface="Arial Unicode MS"/>
+                <a:ea typeface="Arial Unicode MS"/>
+                <a:cs typeface="Arial Unicode MS"/>
+              </a:rPr>
+              <a:t>錯得有多嚴重</a:t>
+            </a:r>
+            <a:r>
+              <a:rPr sz="800" lang="zh-TW" dirty="0">
+                <a:solidFill>
+                  <a:srgbClr val="000000"/>
+                </a:solidFill>
+                <a:latin typeface="Arial Unicode MS"/>
+                <a:ea typeface="Arial Unicode MS"/>
+                <a:cs typeface="Arial Unicode MS"/>
+              </a:rPr>
+              <a:t>」的分數。這個分數不是數分錯幾個：分錯的例子扣很多分，分對了但是沒什麼把握的例子也扣一點分。分數愈低愈好，谷底就是最好的門檻。中間那條淺綠色的帶，是分得對的範圍：汽車最高到 1.02，大人最低 1.25，門檻放在中間就全部分對。黃色的球是電腦目前的門檻，從 2.6 出發，每一次修改，就往下坡走「步伐乘以斜度」那麼遠。前八步會放慢：每一步跳之前，球腳下先出現一小段</a:t>
+            </a:r>
+            <a:r>
+              <a:rPr sz="800" b="1" lang="zh-TW" dirty="0">
+                <a:solidFill>
+                  <a:srgbClr val="000000"/>
+                </a:solidFill>
+                <a:latin typeface="Arial Unicode MS"/>
+                <a:ea typeface="Arial Unicode MS"/>
+                <a:cs typeface="Arial Unicode MS"/>
+              </a:rPr>
+              <a:t>黃色斜線</a:t>
+            </a:r>
+            <a:r>
+              <a:rPr sz="800" lang="zh-TW" dirty="0">
+                <a:solidFill>
+                  <a:srgbClr val="000000"/>
+                </a:solidFill>
+                <a:latin typeface="Arial Unicode MS"/>
+                <a:ea typeface="Arial Unicode MS"/>
+                <a:cs typeface="Arial Unicode MS"/>
+              </a:rPr>
+              <a:t>，那就是電腦算出來的斜度；下面再出現一個</a:t>
+            </a:r>
+            <a:r>
+              <a:rPr sz="800" b="1" lang="zh-TW" dirty="0">
+                <a:solidFill>
+                  <a:srgbClr val="000000"/>
+                </a:solidFill>
+                <a:latin typeface="Arial Unicode MS"/>
+                <a:ea typeface="Arial Unicode MS"/>
+                <a:cs typeface="Arial Unicode MS"/>
+              </a:rPr>
+              <a:t>箭頭</a:t>
+            </a:r>
+            <a:r>
+              <a:rPr sz="800" lang="zh-TW" dirty="0">
+                <a:solidFill>
+                  <a:srgbClr val="000000"/>
+                </a:solidFill>
+                <a:latin typeface="Arial Unicode MS"/>
+                <a:ea typeface="Arial Unicode MS"/>
+                <a:cs typeface="Arial Unicode MS"/>
+              </a:rPr>
+              <a:t>，標出這一步要跳多遠。三格只差在步伐，也就是學習率。
 </a:t>
             </a:r>
           </a:p>
@@ -1224,6 +1389,17 @@
               </a:spcAft>
             </a:pPr>
             <a:r>
+              <a:rPr sz="800" b="1" lang="zh-TW" dirty="0">
+                <a:solidFill>
+                  <a:srgbClr val="000000"/>
+                </a:solidFill>
+                <a:latin typeface="Arial Unicode MS"/>
+                <a:ea typeface="Arial Unicode MS"/>
+                <a:cs typeface="Arial Unicode MS"/>
+              </a:rPr>
+              <a:t>中間，步伐剛好</a:t>
+            </a:r>
+            <a:r>
               <a:rPr sz="800" lang="zh-TW" dirty="0">
                 <a:solidFill>
                   <a:srgbClr val="000000"/>
@@ -1232,7 +1408,7 @@
                 <a:ea typeface="Arial Unicode MS"/>
                 <a:cs typeface="Arial Unicode MS"/>
               </a:rPr>
-              <a:t>想像大霧裡下山，看不到山谷在哪裡，只摸得到</a:t>
+              <a:t>：第一步從 2.6 跳到 1.99，第二步 1.60，第三步 1.41，第四步 1.31……請看下面的箭頭，</a:t>
             </a:r>
             <a:r>
               <a:rPr sz="800" b="1" lang="zh-TW" dirty="0">
@@ -1243,7 +1419,7 @@
                 <a:ea typeface="Arial Unicode MS"/>
                 <a:cs typeface="Arial Unicode MS"/>
               </a:rPr>
-              <a:t>腳下是往哪邊斜</a:t>
+              <a:t>一次比一次短</a:t>
             </a:r>
             <a:r>
               <a:rPr sz="800" lang="zh-TW" dirty="0">
@@ -1254,7 +1430,51 @@
                 <a:ea typeface="Arial Unicode MS"/>
                 <a:cs typeface="Arial Unicode MS"/>
               </a:rPr>
-              <a:t>。最安全的做法是：往下坡的方向走一小步，停下來再摸一次，再走一小步。如果你一看到往下，就往那個方向大跳一百公尺，很可能直接跳過山谷，落在對面的山坡上。
+              <a:t>。因為愈靠近谷底，坡愈平，斜度愈小，「步伐乘以斜度」自然就愈小，球會自己放慢。第六步走進淺綠帶，最後停在 1.17，全部分對。</a:t>
+            </a:r>
+            <a:r>
+              <a:rPr sz="800" b="1" lang="zh-TW" dirty="0">
+                <a:solidFill>
+                  <a:srgbClr val="000000"/>
+                </a:solidFill>
+                <a:latin typeface="Arial Unicode MS"/>
+                <a:ea typeface="Arial Unicode MS"/>
+                <a:cs typeface="Arial Unicode MS"/>
+              </a:rPr>
+              <a:t>左邊，步伐太小</a:t>
+            </a:r>
+            <a:r>
+              <a:rPr sz="800" lang="zh-TW" dirty="0">
+                <a:solidFill>
+                  <a:srgbClr val="000000"/>
+                </a:solidFill>
+                <a:latin typeface="Arial Unicode MS"/>
+                <a:ea typeface="Arial Unicode MS"/>
+                <a:cs typeface="Arial Unicode MS"/>
+              </a:rPr>
+              <a:t>：方向是對的，球一小步一小步往下滾，改了 30 次才到 1.32，還差一點才進淺綠帶。</a:t>
+            </a:r>
+            <a:r>
+              <a:rPr sz="800" b="1" lang="zh-TW" dirty="0">
+                <a:solidFill>
+                  <a:srgbClr val="000000"/>
+                </a:solidFill>
+                <a:latin typeface="Arial Unicode MS"/>
+                <a:ea typeface="Arial Unicode MS"/>
+                <a:cs typeface="Arial Unicode MS"/>
+              </a:rPr>
+              <a:t>右邊，步伐太大</a:t>
+            </a:r>
+            <a:r>
+              <a:rPr sz="800" lang="zh-TW" dirty="0">
+                <a:solidFill>
+                  <a:srgbClr val="000000"/>
+                </a:solidFill>
+                <a:latin typeface="Arial Unicode MS"/>
+                <a:ea typeface="Arial Unicode MS"/>
+                <a:cs typeface="Arial Unicode MS"/>
+              </a:rPr>
+              <a:t>：第一步就從 2.6 跳到負 2.5。方向是對的，可是一步跳太遠，跳過谷底，落到對面的山坡上，分數反而從 1.67 變成 5.42，比出發點高很多；下一步又跳回 2，再跳到負 1……一直在山谷兩邊跳來跳去，改了 30 次只分對一半。就像洗澡調水溫：太冷，水龍頭一下轉到底，變太燙；再一下轉回去，又太冷。慢慢轉一點點，等一下，再轉一點點，才調得到剛好。
 </a:t>
             </a:r>
           </a:p>
@@ -1276,51 +1496,7 @@
                 <a:ea typeface="Arial Unicode MS"/>
                 <a:cs typeface="Arial Unicode MS"/>
               </a:rPr>
-              <a:t>電腦學東西就是這樣。對完答案，它算得出「門檻往小一點，錯會變少」，這是方向；可是它不知道要往小</a:t>
-            </a:r>
-            <a:r>
-              <a:rPr sz="800" b="1" lang="zh-TW" dirty="0">
-                <a:solidFill>
-                  <a:srgbClr val="000000"/>
-                </a:solidFill>
-                <a:latin typeface="Arial Unicode MS"/>
-                <a:ea typeface="Arial Unicode MS"/>
-                <a:cs typeface="Arial Unicode MS"/>
-              </a:rPr>
-              <a:t>多少</a:t>
-            </a:r>
-            <a:r>
-              <a:rPr sz="800" lang="zh-TW" dirty="0">
-                <a:solidFill>
-                  <a:srgbClr val="000000"/>
-                </a:solidFill>
-                <a:latin typeface="Arial Unicode MS"/>
-                <a:ea typeface="Arial Unicode MS"/>
-                <a:cs typeface="Arial Unicode MS"/>
-              </a:rPr>
-              <a:t>。每次走多大一步，是人事先設定的，這個數字叫</a:t>
-            </a:r>
-            <a:r>
-              <a:rPr sz="800" b="1" lang="zh-TW" dirty="0">
-                <a:solidFill>
-                  <a:srgbClr val="000000"/>
-                </a:solidFill>
-                <a:latin typeface="Arial Unicode MS"/>
-                <a:ea typeface="Arial Unicode MS"/>
-                <a:cs typeface="Arial Unicode MS"/>
-              </a:rPr>
-              <a:t>學習率</a:t>
-            </a:r>
-            <a:r>
-              <a:rPr sz="800" lang="zh-TW" dirty="0">
-                <a:solidFill>
-                  <a:srgbClr val="000000"/>
-                </a:solidFill>
-                <a:latin typeface="Arial Unicode MS"/>
-                <a:ea typeface="Arial Unicode MS"/>
-                <a:cs typeface="Arial Unicode MS"/>
-              </a:rPr>
-              <a:t>。
+              <a:t>這裡學出來是 1.17，第 9 張是 1.03，為什麼不一樣？在淺綠帶裡面，門檻放在哪裡都是分錯 0 個。第 9 張是數「分錯幾個」，整條淺綠帶都一樣好，第 9 張的做法挑到的是 1.03。這一張看的是「錯得有多嚴重」的分數，它在淺綠帶裡面還有高低：1.03 是 0.128，1.17 是 0.114，最低。因為 1.17 在淺綠帶的中間，離汽車最高的 1.02 和大人最低的 1.25 都最遠，最保險。
 </a:t>
             </a:r>
           </a:p>
@@ -1334,6 +1510,17 @@
               </a:spcAft>
             </a:pPr>
             <a:r>
+              <a:rPr sz="800" b="1" lang="zh-TW" dirty="0">
+                <a:solidFill>
+                  <a:srgbClr val="000000"/>
+                </a:solidFill>
+                <a:latin typeface="Arial Unicode MS"/>
+                <a:ea typeface="Arial Unicode MS"/>
+                <a:cs typeface="Arial Unicode MS"/>
+              </a:rPr>
+              <a:t>第二個理由：每次只看到一部分照片。</a:t>
+            </a:r>
+            <a:r>
               <a:rPr sz="800" lang="zh-TW" dirty="0">
                 <a:solidFill>
                   <a:srgbClr val="000000"/>
@@ -1342,95 +1529,7 @@
                 <a:ea typeface="Arial Unicode MS"/>
                 <a:cs typeface="Arial Unicode MS"/>
               </a:rPr>
-              <a:t>看這個動畫，數字是真的。我拿第 9 張那 627 個例子算了一條</a:t>
-            </a:r>
-            <a:r>
-              <a:rPr sz="800" b="1" lang="zh-TW" dirty="0">
-                <a:solidFill>
-                  <a:srgbClr val="000000"/>
-                </a:solidFill>
-                <a:latin typeface="Arial Unicode MS"/>
-                <a:ea typeface="Arial Unicode MS"/>
-                <a:cs typeface="Arial Unicode MS"/>
-              </a:rPr>
-              <a:t>山谷曲線</a:t>
-            </a:r>
-            <a:r>
-              <a:rPr sz="800" lang="zh-TW" dirty="0">
-                <a:solidFill>
-                  <a:srgbClr val="000000"/>
-                </a:solidFill>
-                <a:latin typeface="Arial Unicode MS"/>
-                <a:ea typeface="Arial Unicode MS"/>
-                <a:cs typeface="Arial Unicode MS"/>
-              </a:rPr>
-              <a:t>：橫軸是門檻放在哪裡，縱軸是放在那裡會</a:t>
-            </a:r>
-            <a:r>
-              <a:rPr sz="800" b="1" lang="zh-TW" dirty="0">
-                <a:solidFill>
-                  <a:srgbClr val="000000"/>
-                </a:solidFill>
-                <a:latin typeface="Arial Unicode MS"/>
-                <a:ea typeface="Arial Unicode MS"/>
-                <a:cs typeface="Arial Unicode MS"/>
-              </a:rPr>
-              <a:t>錯多少</a:t>
-            </a:r>
-            <a:r>
-              <a:rPr sz="800" lang="zh-TW" dirty="0">
-                <a:solidFill>
-                  <a:srgbClr val="000000"/>
-                </a:solidFill>
-                <a:latin typeface="Arial Unicode MS"/>
-                <a:ea typeface="Arial Unicode MS"/>
-                <a:cs typeface="Arial Unicode MS"/>
-              </a:rPr>
-              <a:t>。谷底就是最好的門檻。中間那條淺綠色的帶，是分得對的範圍：汽車最高到 1.02，大人最低 1.25，門檻放在中間就全部分對。黃色的球是電腦目前的門檻，從 2.6 出發，每一次修改，就往下坡走「步伐乘以斜度」那麼遠。前八步會放慢：每一步跳之前，球腳下先出現一小段</a:t>
-            </a:r>
-            <a:r>
-              <a:rPr sz="800" b="1" lang="zh-TW" dirty="0">
-                <a:solidFill>
-                  <a:srgbClr val="000000"/>
-                </a:solidFill>
-                <a:latin typeface="Arial Unicode MS"/>
-                <a:ea typeface="Arial Unicode MS"/>
-                <a:cs typeface="Arial Unicode MS"/>
-              </a:rPr>
-              <a:t>黃色斜線</a:t>
-            </a:r>
-            <a:r>
-              <a:rPr sz="800" lang="zh-TW" dirty="0">
-                <a:solidFill>
-                  <a:srgbClr val="000000"/>
-                </a:solidFill>
-                <a:latin typeface="Arial Unicode MS"/>
-                <a:ea typeface="Arial Unicode MS"/>
-                <a:cs typeface="Arial Unicode MS"/>
-              </a:rPr>
-              <a:t>，那就是電腦算出來的斜度；下面再出現一個</a:t>
-            </a:r>
-            <a:r>
-              <a:rPr sz="800" b="1" lang="zh-TW" dirty="0">
-                <a:solidFill>
-                  <a:srgbClr val="000000"/>
-                </a:solidFill>
-                <a:latin typeface="Arial Unicode MS"/>
-                <a:ea typeface="Arial Unicode MS"/>
-                <a:cs typeface="Arial Unicode MS"/>
-              </a:rPr>
-              <a:t>箭頭</a:t>
-            </a:r>
-            <a:r>
-              <a:rPr sz="800" lang="zh-TW" dirty="0">
-                <a:solidFill>
-                  <a:srgbClr val="000000"/>
-                </a:solidFill>
-                <a:latin typeface="Arial Unicode MS"/>
-                <a:ea typeface="Arial Unicode MS"/>
-                <a:cs typeface="Arial Unicode MS"/>
-              </a:rPr>
-              <a:t>，標出這一步要跳多遠。三格只差在步伐，也就是學習率。
+              <a:t>真的訓練深度學習，照片有好幾萬張，電腦沒辦法每改一次就看完全部，通常一次只看幾張到幾十張。如果每看幾張就大改，模型會變成「只記得剛剛那幾張」，前面從其他照片學到的就被蓋掉了。就像準備考試，不能因為剛剛那一題錯了，就把整本筆記改掉；每一題錯了，筆記只修一點點，寫夠多題，筆記才會對所有題目都好用。YOLOX 有九百萬個小旋鈕，每個都要這樣一點一點調，所以訓練要跑很多輪、要很強的電腦。第十週訓練模型的時候，各位會親眼看到學習率這個設定。
 </a:t>
             </a:r>
           </a:p>
@@ -1452,7 +1551,7 @@
                 <a:ea typeface="Arial Unicode MS"/>
                 <a:cs typeface="Arial Unicode MS"/>
               </a:rPr>
-              <a:t>中間，步伐剛好</a:t>
+              <a:t>這一張講的東西，都有正式的名字。</a:t>
             </a:r>
             <a:r>
               <a:rPr sz="800" lang="zh-TW" dirty="0">
@@ -1463,7 +1562,7 @@
                 <a:ea typeface="Arial Unicode MS"/>
                 <a:cs typeface="Arial Unicode MS"/>
               </a:rPr>
-              <a:t>：第一步從 2.6 跳到 1.99，第二步 1.60，第三步 1.41，第四步 1.31……請看下面的箭頭，</a:t>
+              <a:t>第十週訓練模型的時候會一直碰到，先記下來。第一個，</a:t>
             </a:r>
             <a:r>
               <a:rPr sz="800" b="1" lang="zh-TW" dirty="0">
@@ -1474,7 +1573,7 @@
                 <a:ea typeface="Arial Unicode MS"/>
                 <a:cs typeface="Arial Unicode MS"/>
               </a:rPr>
-              <a:t>一次比一次短</a:t>
+              <a:t>損失函數</a:t>
             </a:r>
             <a:r>
               <a:rPr sz="800" lang="zh-TW" dirty="0">
@@ -1485,7 +1584,7 @@
                 <a:ea typeface="Arial Unicode MS"/>
                 <a:cs typeface="Arial Unicode MS"/>
               </a:rPr>
-              <a:t>。因為愈靠近谷底，坡愈平，斜度愈小，「步伐乘以斜度」自然就愈小，球會自己放慢。第六步走進淺綠帶，最後停在 1.17，全部分對。
+              <a:t>，英文是 loss function。它是一條計算規則：給它一個門檻，它算出一個分數，表示模型「錯得有多嚴重」，分數愈小愈好。把門檻從負 3 到 4 一個一個代進去，把算出來的分數連起來，畫出來的就是動畫裡那條山谷曲線。所以山谷曲線是損失函數畫出來的樣子，谷底就是錯得最少的地方。損失函數為什麼不直接數「分錯幾個」？用射飛鏢來想。如果只記「有沒有射中紅心」，差一點點和差很多都算沒中，射手不知道要往哪邊修正；如果量「離紅心幾公分」，每一鏢都告訴他偏了多少、往哪邊偏，他就可以一點一點修。剛剛說的淺綠帶也是這樣：分錯的個數一直是 0，只數分錯幾個，球就摸不到斜坡。
 </a:t>
             </a:r>
           </a:p>
@@ -1499,6 +1598,17 @@
               </a:spcAft>
             </a:pPr>
             <a:r>
+              <a:rPr sz="800" lang="zh-TW" dirty="0">
+                <a:solidFill>
+                  <a:srgbClr val="000000"/>
+                </a:solidFill>
+                <a:latin typeface="Arial Unicode MS"/>
+                <a:ea typeface="Arial Unicode MS"/>
+                <a:cs typeface="Arial Unicode MS"/>
+              </a:rPr>
+              <a:t>第二個，</a:t>
+            </a:r>
+            <a:r>
               <a:rPr sz="800" b="1" lang="zh-TW" dirty="0">
                 <a:solidFill>
                   <a:srgbClr val="000000"/>
@@ -1507,7 +1617,7 @@
                 <a:ea typeface="Arial Unicode MS"/>
                 <a:cs typeface="Arial Unicode MS"/>
               </a:rPr>
-              <a:t>左邊，步伐太小</a:t>
+              <a:t>梯度</a:t>
             </a:r>
             <a:r>
               <a:rPr sz="800" lang="zh-TW" dirty="0">
@@ -1518,7 +1628,73 @@
                 <a:ea typeface="Arial Unicode MS"/>
                 <a:cs typeface="Arial Unicode MS"/>
               </a:rPr>
-              <a:t>：方向是對的，球一小步一小步往下滾，改了 30 次才到 1.32，還差一點才進淺綠帶。
+              <a:t>，英文是 gradient。就是球腳下那一段黃色斜線：曲線在這一點有多斜、往哪一邊斜。電腦對完答案以後算出來的，就是梯度。有同學可能會想：曲線畫在平面上，反正一定是往下走，為什麼還要算梯度？因為電腦</a:t>
+            </a:r>
+            <a:r>
+              <a:rPr sz="800" b="1" lang="zh-TW" dirty="0">
+                <a:solidFill>
+                  <a:srgbClr val="000000"/>
+                </a:solidFill>
+                <a:latin typeface="Arial Unicode MS"/>
+                <a:ea typeface="Arial Unicode MS"/>
+                <a:cs typeface="Arial Unicode MS"/>
+              </a:rPr>
+              <a:t>看不到這張圖</a:t>
+            </a:r>
+            <a:r>
+              <a:rPr sz="800" lang="zh-TW" dirty="0">
+                <a:solidFill>
+                  <a:srgbClr val="000000"/>
+                </a:solidFill>
+                <a:latin typeface="Arial Unicode MS"/>
+                <a:ea typeface="Arial Unicode MS"/>
+                <a:cs typeface="Arial Unicode MS"/>
+              </a:rPr>
+              <a:t>。這張圖是我把三百個門檻一個一個代進去算出來的；YOLOX 有九百萬個數字，根本畫不出來。電腦只摸得到自己腳下，梯度告訴它下坡在哪一邊：球在 2.6 的時候，斜度是正 2.03，右邊高、左邊低，所以往左走；如果球在 0，斜度是負 1.57，左邊高、右邊低，就要往右走；走到 1.17，斜度幾乎是 0，就停下來。影片如果多播到 7:46，他會說「負梯度是函數下降最快的方向」，意思是這樣：梯度指的是</a:t>
+            </a:r>
+            <a:r>
+              <a:rPr sz="800" b="1" lang="zh-TW" dirty="0">
+                <a:solidFill>
+                  <a:srgbClr val="000000"/>
+                </a:solidFill>
+                <a:latin typeface="Arial Unicode MS"/>
+                <a:ea typeface="Arial Unicode MS"/>
+                <a:cs typeface="Arial Unicode MS"/>
+              </a:rPr>
+              <a:t>往上最陡</a:t>
+            </a:r>
+            <a:r>
+              <a:rPr sz="800" lang="zh-TW" dirty="0">
+                <a:solidFill>
+                  <a:srgbClr val="000000"/>
+                </a:solidFill>
+                <a:latin typeface="Arial Unicode MS"/>
+                <a:ea typeface="Arial Unicode MS"/>
+                <a:cs typeface="Arial Unicode MS"/>
+              </a:rPr>
+              <a:t>的方向，前面加一個負號倒過來，就是</a:t>
+            </a:r>
+            <a:r>
+              <a:rPr sz="800" b="1" lang="zh-TW" dirty="0">
+                <a:solidFill>
+                  <a:srgbClr val="000000"/>
+                </a:solidFill>
+                <a:latin typeface="Arial Unicode MS"/>
+                <a:ea typeface="Arial Unicode MS"/>
+                <a:cs typeface="Arial Unicode MS"/>
+              </a:rPr>
+              <a:t>往下最陡</a:t>
+            </a:r>
+            <a:r>
+              <a:rPr sz="800" lang="zh-TW" dirty="0">
+                <a:solidFill>
+                  <a:srgbClr val="000000"/>
+                </a:solidFill>
+                <a:latin typeface="Arial Unicode MS"/>
+                <a:ea typeface="Arial Unicode MS"/>
+                <a:cs typeface="Arial Unicode MS"/>
+              </a:rPr>
+              <a:t>的方向。就像下雨的時候，雨水會自己沿著最陡的路往下流。只有一個門檻的時候，只能往左或往右，看不出「最快」的意思；有兩個以上的數字，可以走的方向有很多個，這句話才有意義。
 </a:t>
             </a:r>
           </a:p>
@@ -1532,17 +1708,6 @@
               </a:spcAft>
             </a:pPr>
             <a:r>
-              <a:rPr sz="800" b="1" lang="zh-TW" dirty="0">
-                <a:solidFill>
-                  <a:srgbClr val="000000"/>
-                </a:solidFill>
-                <a:latin typeface="Arial Unicode MS"/>
-                <a:ea typeface="Arial Unicode MS"/>
-                <a:cs typeface="Arial Unicode MS"/>
-              </a:rPr>
-              <a:t>右邊，步伐太大</a:t>
-            </a:r>
-            <a:r>
               <a:rPr sz="800" lang="zh-TW" dirty="0">
                 <a:solidFill>
                   <a:srgbClr val="000000"/>
@@ -1551,7 +1716,7 @@
                 <a:ea typeface="Arial Unicode MS"/>
                 <a:cs typeface="Arial Unicode MS"/>
               </a:rPr>
-              <a:t>：第一步就從 2.6 跳到負 2.5，跳過谷底，落到對面的山坡上；下一步又跳回 2，再跳到負 1……一直在山谷兩邊跳來跳去，改了 30 次只分對一半。
+              <a:t>（下面這一段用數字算一次，時間不夠可以跳過。）假設有兩個旋鈕，A 的斜度是 4，B 的斜度是 8，這一步總共只能走 0.1 那麼遠：只轉 A，分數降 0.39；只轉 B，降 0.76；照斜度的比例，讓 B 轉得比 A 多一倍，降 0.86，降得最多。這個方向就是負梯度。YOLOX 的負梯度，就是一張九百萬個數字的清單，告訴每一個旋鈕往哪邊轉、轉多少。
 </a:t>
             </a:r>
           </a:p>
@@ -1573,7 +1738,117 @@
                 <a:ea typeface="Arial Unicode MS"/>
                 <a:cs typeface="Arial Unicode MS"/>
               </a:rPr>
-              <a:t>就像洗澡調水溫：太冷，水龍頭一下轉到底，變太燙；再一下轉回去，又太冷。慢慢轉一點點，等一下，再轉一點點，才調得到剛好。
+              <a:t>第三個，</a:t>
+            </a:r>
+            <a:r>
+              <a:rPr sz="800" b="1" lang="zh-TW" dirty="0">
+                <a:solidFill>
+                  <a:srgbClr val="000000"/>
+                </a:solidFill>
+                <a:latin typeface="Arial Unicode MS"/>
+                <a:ea typeface="Arial Unicode MS"/>
+                <a:cs typeface="Arial Unicode MS"/>
+              </a:rPr>
+              <a:t>梯度下降</a:t>
+            </a:r>
+            <a:r>
+              <a:rPr sz="800" lang="zh-TW" dirty="0">
+                <a:solidFill>
+                  <a:srgbClr val="000000"/>
+                </a:solidFill>
+                <a:latin typeface="Arial Unicode MS"/>
+                <a:ea typeface="Arial Unicode MS"/>
+                <a:cs typeface="Arial Unicode MS"/>
+              </a:rPr>
+              <a:t>，英文是 gradient descent，就是整個動畫在做的事：照著梯度往下坡走一小步，再算一次梯度，再走一小步，一直走到谷底。所以把這一張換成正式的說法，就是：電腦用</a:t>
+            </a:r>
+            <a:r>
+              <a:rPr sz="800" b="1" lang="zh-TW" dirty="0">
+                <a:solidFill>
+                  <a:srgbClr val="000000"/>
+                </a:solidFill>
+                <a:latin typeface="Arial Unicode MS"/>
+                <a:ea typeface="Arial Unicode MS"/>
+                <a:cs typeface="Arial Unicode MS"/>
+              </a:rPr>
+              <a:t>梯度下降</a:t>
+            </a:r>
+            <a:r>
+              <a:rPr sz="800" lang="zh-TW" dirty="0">
+                <a:solidFill>
+                  <a:srgbClr val="000000"/>
+                </a:solidFill>
+                <a:latin typeface="Arial Unicode MS"/>
+                <a:ea typeface="Arial Unicode MS"/>
+                <a:cs typeface="Arial Unicode MS"/>
+              </a:rPr>
+              <a:t>，照著</a:t>
+            </a:r>
+            <a:r>
+              <a:rPr sz="800" b="1" lang="zh-TW" dirty="0">
+                <a:solidFill>
+                  <a:srgbClr val="000000"/>
+                </a:solidFill>
+                <a:latin typeface="Arial Unicode MS"/>
+                <a:ea typeface="Arial Unicode MS"/>
+                <a:cs typeface="Arial Unicode MS"/>
+              </a:rPr>
+              <a:t>梯度</a:t>
+            </a:r>
+            <a:r>
+              <a:rPr sz="800" lang="zh-TW" dirty="0">
+                <a:solidFill>
+                  <a:srgbClr val="000000"/>
+                </a:solidFill>
+                <a:latin typeface="Arial Unicode MS"/>
+                <a:ea typeface="Arial Unicode MS"/>
+                <a:cs typeface="Arial Unicode MS"/>
+              </a:rPr>
+              <a:t>一步一步走，讓</a:t>
+            </a:r>
+            <a:r>
+              <a:rPr sz="800" b="1" lang="zh-TW" dirty="0">
+                <a:solidFill>
+                  <a:srgbClr val="000000"/>
+                </a:solidFill>
+                <a:latin typeface="Arial Unicode MS"/>
+                <a:ea typeface="Arial Unicode MS"/>
+                <a:cs typeface="Arial Unicode MS"/>
+              </a:rPr>
+              <a:t>損失函數</a:t>
+            </a:r>
+            <a:r>
+              <a:rPr sz="800" lang="zh-TW" dirty="0">
+                <a:solidFill>
+                  <a:srgbClr val="000000"/>
+                </a:solidFill>
+                <a:latin typeface="Arial Unicode MS"/>
+                <a:ea typeface="Arial Unicode MS"/>
+                <a:cs typeface="Arial Unicode MS"/>
+              </a:rPr>
+              <a:t>愈來愈小；每一步走多大，由</a:t>
+            </a:r>
+            <a:r>
+              <a:rPr sz="800" b="1" lang="zh-TW" dirty="0">
+                <a:solidFill>
+                  <a:srgbClr val="000000"/>
+                </a:solidFill>
+                <a:latin typeface="Arial Unicode MS"/>
+                <a:ea typeface="Arial Unicode MS"/>
+                <a:cs typeface="Arial Unicode MS"/>
+              </a:rPr>
+              <a:t>學習率</a:t>
+            </a:r>
+            <a:r>
+              <a:rPr sz="800" lang="zh-TW" dirty="0">
+                <a:solidFill>
+                  <a:srgbClr val="000000"/>
+                </a:solidFill>
+                <a:latin typeface="Arial Unicode MS"/>
+                <a:ea typeface="Arial Unicode MS"/>
+                <a:cs typeface="Arial Unicode MS"/>
+              </a:rPr>
+              <a:t>決定。
 </a:t>
             </a:r>
           </a:p>
@@ -1587,6 +1862,17 @@
               </a:spcAft>
             </a:pPr>
             <a:r>
+              <a:rPr sz="800" b="1" lang="zh-TW" dirty="0">
+                <a:solidFill>
+                  <a:srgbClr val="000000"/>
+                </a:solidFill>
+                <a:latin typeface="Arial Unicode MS"/>
+                <a:ea typeface="Arial Unicode MS"/>
+                <a:cs typeface="Arial Unicode MS"/>
+              </a:rPr>
+              <a:t>影片（3Blue1Brown，英文，可開自動翻譯字幕）：從 5:12 播到 6:54。</a:t>
+            </a:r>
+            <a:r>
               <a:rPr sz="800" lang="zh-TW" dirty="0">
                 <a:solidFill>
                   <a:srgbClr val="000000"/>
@@ -1595,392 +1881,7 @@
                 <a:ea typeface="Arial Unicode MS"/>
                 <a:cs typeface="Arial Unicode MS"/>
               </a:rPr>
-              <a:t>（注意：這裡學出來是 1.17，第 9 張是 1.03。兩個都在淺綠帶裡，都能全部分對；用的方法不一樣，停的位置就不一樣。）
-</a:t>
-            </a:r>
-          </a:p>
-          <a:p>
-            <a:pPr algn="l">
-              <a:spcBef>
-                <a:spcPts val="0"/>
-              </a:spcBef>
-              <a:spcAft>
-                <a:spcPts val="133"/>
-              </a:spcAft>
-            </a:pPr>
-            <a:r>
-              <a:rPr sz="800" b="1" lang="zh-TW" dirty="0">
-                <a:solidFill>
-                  <a:srgbClr val="000000"/>
-                </a:solidFill>
-                <a:latin typeface="Arial Unicode MS"/>
-                <a:ea typeface="Arial Unicode MS"/>
-                <a:cs typeface="Arial Unicode MS"/>
-              </a:rPr>
-              <a:t>第二個理由：每次只看到一部分照片。</a:t>
-            </a:r>
-            <a:r>
-              <a:rPr sz="800" lang="zh-TW" dirty="0">
-                <a:solidFill>
-                  <a:srgbClr val="000000"/>
-                </a:solidFill>
-                <a:latin typeface="Arial Unicode MS"/>
-                <a:ea typeface="Arial Unicode MS"/>
-                <a:cs typeface="Arial Unicode MS"/>
-              </a:rPr>
-              <a:t>
-</a:t>
-            </a:r>
-          </a:p>
-          <a:p>
-            <a:pPr algn="l">
-              <a:spcBef>
-                <a:spcPts val="0"/>
-              </a:spcBef>
-              <a:spcAft>
-                <a:spcPts val="133"/>
-              </a:spcAft>
-            </a:pPr>
-            <a:r>
-              <a:rPr sz="800" lang="zh-TW" dirty="0">
-                <a:solidFill>
-                  <a:srgbClr val="000000"/>
-                </a:solidFill>
-                <a:latin typeface="Arial Unicode MS"/>
-                <a:ea typeface="Arial Unicode MS"/>
-                <a:cs typeface="Arial Unicode MS"/>
-              </a:rPr>
-              <a:t>真的訓練深度學習，照片有好幾萬張，電腦沒辦法每改一次就看完全部，通常一次只看幾張到幾十張。如果每看幾張就大改，模型會變成「只記得剛剛那幾張」，前面從其他照片學到的就被蓋掉了。就像準備考試，不能因為剛剛那一題錯了，就把整本筆記改掉；每一題錯了，筆記只修一點點，寫夠多題，筆記才會對所有題目都好用。
-</a:t>
-            </a:r>
-          </a:p>
-          <a:p>
-            <a:pPr algn="l">
-              <a:spcBef>
-                <a:spcPts val="0"/>
-              </a:spcBef>
-              <a:spcAft>
-                <a:spcPts val="133"/>
-              </a:spcAft>
-            </a:pPr>
-            <a:r>
-              <a:rPr sz="800" lang="zh-TW" dirty="0">
-                <a:solidFill>
-                  <a:srgbClr val="000000"/>
-                </a:solidFill>
-                <a:latin typeface="Arial Unicode MS"/>
-                <a:ea typeface="Arial Unicode MS"/>
-                <a:cs typeface="Arial Unicode MS"/>
-              </a:rPr>
-              <a:t>YOLOX 有九百萬個小旋鈕，每個都要這樣一點一點調，所以訓練要跑很多輪、要很強的電腦。第十週訓練模型的時候，各位會親眼看到學習率這個設定。
-</a:t>
-            </a:r>
-          </a:p>
-          <a:p>
-            <a:pPr algn="l">
-              <a:spcBef>
-                <a:spcPts val="0"/>
-              </a:spcBef>
-              <a:spcAft>
-                <a:spcPts val="133"/>
-              </a:spcAft>
-            </a:pPr>
-            <a:r>
-              <a:rPr sz="800" b="1" lang="zh-TW" dirty="0">
-                <a:solidFill>
-                  <a:srgbClr val="000000"/>
-                </a:solidFill>
-                <a:latin typeface="Arial Unicode MS"/>
-                <a:ea typeface="Arial Unicode MS"/>
-                <a:cs typeface="Arial Unicode MS"/>
-              </a:rPr>
-              <a:t>這一張講的東西，都有正式的名字。</a:t>
-            </a:r>
-            <a:r>
-              <a:rPr sz="800" lang="zh-TW" dirty="0">
-                <a:solidFill>
-                  <a:srgbClr val="000000"/>
-                </a:solidFill>
-                <a:latin typeface="Arial Unicode MS"/>
-                <a:ea typeface="Arial Unicode MS"/>
-                <a:cs typeface="Arial Unicode MS"/>
-              </a:rPr>
-              <a:t>以後各位看英文的資料，或是第十週訓練模型的時候，會一直碰到這幾個詞，先記下來。
-</a:t>
-            </a:r>
-          </a:p>
-          <a:p>
-            <a:pPr algn="l">
-              <a:spcBef>
-                <a:spcPts val="0"/>
-              </a:spcBef>
-              <a:spcAft>
-                <a:spcPts val="133"/>
-              </a:spcAft>
-            </a:pPr>
-            <a:r>
-              <a:rPr sz="800" lang="zh-TW" dirty="0">
-                <a:solidFill>
-                  <a:srgbClr val="000000"/>
-                </a:solidFill>
-                <a:latin typeface="Arial Unicode MS"/>
-                <a:ea typeface="Arial Unicode MS"/>
-                <a:cs typeface="Arial Unicode MS"/>
-              </a:rPr>
-              <a:t>第一個，</a:t>
-            </a:r>
-            <a:r>
-              <a:rPr sz="800" b="1" lang="zh-TW" dirty="0">
-                <a:solidFill>
-                  <a:srgbClr val="000000"/>
-                </a:solidFill>
-                <a:latin typeface="Arial Unicode MS"/>
-                <a:ea typeface="Arial Unicode MS"/>
-                <a:cs typeface="Arial Unicode MS"/>
-              </a:rPr>
-              <a:t>損失函數</a:t>
-            </a:r>
-            <a:r>
-              <a:rPr sz="800" lang="zh-TW" dirty="0">
-                <a:solidFill>
-                  <a:srgbClr val="000000"/>
-                </a:solidFill>
-                <a:latin typeface="Arial Unicode MS"/>
-                <a:ea typeface="Arial Unicode MS"/>
-                <a:cs typeface="Arial Unicode MS"/>
-              </a:rPr>
-              <a:t>，英文是 loss function。就是動畫裡那條山谷曲線：門檻放在哪裡，會錯多少。它是用來量「模型現在錯多少」的，數字愈小愈好，谷底就是錯最少的地方。
-</a:t>
-            </a:r>
-          </a:p>
-          <a:p>
-            <a:pPr algn="l">
-              <a:spcBef>
-                <a:spcPts val="0"/>
-              </a:spcBef>
-              <a:spcAft>
-                <a:spcPts val="133"/>
-              </a:spcAft>
-            </a:pPr>
-            <a:r>
-              <a:rPr sz="800" lang="zh-TW" dirty="0">
-                <a:solidFill>
-                  <a:srgbClr val="000000"/>
-                </a:solidFill>
-                <a:latin typeface="Arial Unicode MS"/>
-                <a:ea typeface="Arial Unicode MS"/>
-                <a:cs typeface="Arial Unicode MS"/>
-              </a:rPr>
-              <a:t>第二個，</a:t>
-            </a:r>
-            <a:r>
-              <a:rPr sz="800" b="1" lang="zh-TW" dirty="0">
-                <a:solidFill>
-                  <a:srgbClr val="000000"/>
-                </a:solidFill>
-                <a:latin typeface="Arial Unicode MS"/>
-                <a:ea typeface="Arial Unicode MS"/>
-                <a:cs typeface="Arial Unicode MS"/>
-              </a:rPr>
-              <a:t>梯度</a:t>
-            </a:r>
-            <a:r>
-              <a:rPr sz="800" lang="zh-TW" dirty="0">
-                <a:solidFill>
-                  <a:srgbClr val="000000"/>
-                </a:solidFill>
-                <a:latin typeface="Arial Unicode MS"/>
-                <a:ea typeface="Arial Unicode MS"/>
-                <a:cs typeface="Arial Unicode MS"/>
-              </a:rPr>
-              <a:t>，英文是 gradient。就是球腳下那一段黃色斜線：曲線在這一點有多斜、往哪一邊斜。電腦對完答案以後算出來的，就是梯度。
-</a:t>
-            </a:r>
-          </a:p>
-          <a:p>
-            <a:pPr algn="l">
-              <a:spcBef>
-                <a:spcPts val="0"/>
-              </a:spcBef>
-              <a:spcAft>
-                <a:spcPts val="133"/>
-              </a:spcAft>
-            </a:pPr>
-            <a:r>
-              <a:rPr sz="800" lang="zh-TW" dirty="0">
-                <a:solidFill>
-                  <a:srgbClr val="000000"/>
-                </a:solidFill>
-                <a:latin typeface="Arial Unicode MS"/>
-                <a:ea typeface="Arial Unicode MS"/>
-                <a:cs typeface="Arial Unicode MS"/>
-              </a:rPr>
-              <a:t>第三個，</a:t>
-            </a:r>
-            <a:r>
-              <a:rPr sz="800" b="1" lang="zh-TW" dirty="0">
-                <a:solidFill>
-                  <a:srgbClr val="000000"/>
-                </a:solidFill>
-                <a:latin typeface="Arial Unicode MS"/>
-                <a:ea typeface="Arial Unicode MS"/>
-                <a:cs typeface="Arial Unicode MS"/>
-              </a:rPr>
-              <a:t>梯度下降</a:t>
-            </a:r>
-            <a:r>
-              <a:rPr sz="800" lang="zh-TW" dirty="0">
-                <a:solidFill>
-                  <a:srgbClr val="000000"/>
-                </a:solidFill>
-                <a:latin typeface="Arial Unicode MS"/>
-                <a:ea typeface="Arial Unicode MS"/>
-                <a:cs typeface="Arial Unicode MS"/>
-              </a:rPr>
-              <a:t>，英文是 gradient descent。就是整個動畫在做的事：照著梯度往下坡走一小步，再算一次梯度，再走一小步，一直重複，走到谷底。每一步走多大，就是剛剛講的學習率。影片列的標題寫著「梯度下降」，指的就是這件事。
-</a:t>
-            </a:r>
-          </a:p>
-          <a:p>
-            <a:pPr algn="l">
-              <a:spcBef>
-                <a:spcPts val="0"/>
-              </a:spcBef>
-              <a:spcAft>
-                <a:spcPts val="133"/>
-              </a:spcAft>
-            </a:pPr>
-            <a:r>
-              <a:rPr sz="800" lang="zh-TW" dirty="0">
-                <a:solidFill>
-                  <a:srgbClr val="000000"/>
-                </a:solidFill>
-                <a:latin typeface="Arial Unicode MS"/>
-                <a:ea typeface="Arial Unicode MS"/>
-                <a:cs typeface="Arial Unicode MS"/>
-              </a:rPr>
-              <a:t>所以把這一張換成正式的說法，就是：電腦用</a:t>
-            </a:r>
-            <a:r>
-              <a:rPr sz="800" b="1" lang="zh-TW" dirty="0">
-                <a:solidFill>
-                  <a:srgbClr val="000000"/>
-                </a:solidFill>
-                <a:latin typeface="Arial Unicode MS"/>
-                <a:ea typeface="Arial Unicode MS"/>
-                <a:cs typeface="Arial Unicode MS"/>
-              </a:rPr>
-              <a:t>梯度下降</a:t>
-            </a:r>
-            <a:r>
-              <a:rPr sz="800" lang="zh-TW" dirty="0">
-                <a:solidFill>
-                  <a:srgbClr val="000000"/>
-                </a:solidFill>
-                <a:latin typeface="Arial Unicode MS"/>
-                <a:ea typeface="Arial Unicode MS"/>
-                <a:cs typeface="Arial Unicode MS"/>
-              </a:rPr>
-              <a:t>，照著</a:t>
-            </a:r>
-            <a:r>
-              <a:rPr sz="800" b="1" lang="zh-TW" dirty="0">
-                <a:solidFill>
-                  <a:srgbClr val="000000"/>
-                </a:solidFill>
-                <a:latin typeface="Arial Unicode MS"/>
-                <a:ea typeface="Arial Unicode MS"/>
-                <a:cs typeface="Arial Unicode MS"/>
-              </a:rPr>
-              <a:t>梯度</a:t>
-            </a:r>
-            <a:r>
-              <a:rPr sz="800" lang="zh-TW" dirty="0">
-                <a:solidFill>
-                  <a:srgbClr val="000000"/>
-                </a:solidFill>
-                <a:latin typeface="Arial Unicode MS"/>
-                <a:ea typeface="Arial Unicode MS"/>
-                <a:cs typeface="Arial Unicode MS"/>
-              </a:rPr>
-              <a:t>一步一步走，讓</a:t>
-            </a:r>
-            <a:r>
-              <a:rPr sz="800" b="1" lang="zh-TW" dirty="0">
-                <a:solidFill>
-                  <a:srgbClr val="000000"/>
-                </a:solidFill>
-                <a:latin typeface="Arial Unicode MS"/>
-                <a:ea typeface="Arial Unicode MS"/>
-                <a:cs typeface="Arial Unicode MS"/>
-              </a:rPr>
-              <a:t>損失函數</a:t>
-            </a:r>
-            <a:r>
-              <a:rPr sz="800" lang="zh-TW" dirty="0">
-                <a:solidFill>
-                  <a:srgbClr val="000000"/>
-                </a:solidFill>
-                <a:latin typeface="Arial Unicode MS"/>
-                <a:ea typeface="Arial Unicode MS"/>
-                <a:cs typeface="Arial Unicode MS"/>
-              </a:rPr>
-              <a:t>愈來愈小；每一步走多大，由</a:t>
-            </a:r>
-            <a:r>
-              <a:rPr sz="800" b="1" lang="zh-TW" dirty="0">
-                <a:solidFill>
-                  <a:srgbClr val="000000"/>
-                </a:solidFill>
-                <a:latin typeface="Arial Unicode MS"/>
-                <a:ea typeface="Arial Unicode MS"/>
-                <a:cs typeface="Arial Unicode MS"/>
-              </a:rPr>
-              <a:t>學習率</a:t>
-            </a:r>
-            <a:r>
-              <a:rPr sz="800" lang="zh-TW" dirty="0">
-                <a:solidFill>
-                  <a:srgbClr val="000000"/>
-                </a:solidFill>
-                <a:latin typeface="Arial Unicode MS"/>
-                <a:ea typeface="Arial Unicode MS"/>
-                <a:cs typeface="Arial Unicode MS"/>
-              </a:rPr>
-              <a:t>決定。
-</a:t>
-            </a:r>
-          </a:p>
-          <a:p>
-            <a:pPr algn="l">
-              <a:spcBef>
-                <a:spcPts val="0"/>
-              </a:spcBef>
-              <a:spcAft>
-                <a:spcPts val="133"/>
-              </a:spcAft>
-            </a:pPr>
-            <a:r>
-              <a:rPr sz="800" b="1" lang="zh-TW" dirty="0">
-                <a:solidFill>
-                  <a:srgbClr val="000000"/>
-                </a:solidFill>
-                <a:latin typeface="Arial Unicode MS"/>
-                <a:ea typeface="Arial Unicode MS"/>
-                <a:cs typeface="Arial Unicode MS"/>
-              </a:rPr>
-              <a:t>影片（3Blue1Brown，英文，可開自動翻譯字幕）：從 5:12 播到 6:54。</a:t>
-            </a:r>
-            <a:r>
-              <a:rPr sz="800" lang="zh-TW" dirty="0">
-                <a:solidFill>
-                  <a:srgbClr val="000000"/>
-                </a:solidFill>
-                <a:latin typeface="Arial Unicode MS"/>
-                <a:ea typeface="Arial Unicode MS"/>
-                <a:cs typeface="Arial Unicode MS"/>
-              </a:rPr>
-              <a:t>他先把問題縮成「只有一個輸入的函數，怎麼找到最低點」，畫一條有好幾個谷的曲線；5:51 說：看你站的地方斜率是正還是負，往下坡那邊走一步；6:19 用的就是「球滾下山」的比喻；6:23 提醒，從不同的地方出發，可能停在不同的谷；6:42 講「步伐跟斜率成正比，快到谷底時斜率變小，步伐也變小，就比較不會越過谷底」。我們的動畫就是這個做法，只是谷只有一個。</a:t>
+              <a:t>5:51 他說，看你站的地方斜率是正還是負，就往下坡那邊走一步；6:19 用的就是球滾下山的比喻；6:23 提醒，從不同的地方出發，可能停在不同的谷；6:42 說步伐跟斜率成正比，快到谷底的時候，步伐會自己變小。時間夠的話，可以多播到 8:53：6:55 他換成兩個輸入的立體地形，8:27 說同樣的做法可以用在一萬三千個數字上。</a:t>
             </a:r>
           </a:p>
         </p:txBody>
@@ -3134,11 +3035,11 @@
                 <a:spcPts val="0"/>
               </a:spcBef>
               <a:spcAft>
-                <a:spcPts val="208"/>
+                <a:spcPts val="150"/>
               </a:spcAft>
             </a:pPr>
             <a:r>
-              <a:rPr sz="1250" b="1" lang="zh-TW" dirty="0">
+              <a:rPr sz="900" b="1" lang="zh-TW" dirty="0">
                 <a:solidFill>
                   <a:srgbClr val="000000"/>
                 </a:solidFill>
@@ -3149,15 +3050,15 @@
               <a:t>這一張的目的：</a:t>
             </a:r>
             <a:r>
-              <a:rPr sz="1250" lang="zh-TW" dirty="0">
-                <a:solidFill>
-                  <a:srgbClr val="000000"/>
-                </a:solidFill>
-                <a:latin typeface="Arial Unicode MS"/>
-                <a:ea typeface="Arial Unicode MS"/>
-                <a:cs typeface="Arial Unicode MS"/>
-              </a:rPr>
-              <a:t>讓大家看到模型真的是一層一層組起來的：前面看邊，後面看到整個人。
+              <a:rPr sz="900" lang="zh-TW" dirty="0">
+                <a:solidFill>
+                  <a:srgbClr val="000000"/>
+                </a:solidFill>
+                <a:latin typeface="Arial Unicode MS"/>
+                <a:ea typeface="Arial Unicode MS"/>
+                <a:cs typeface="Arial Unicode MS"/>
+              </a:rPr>
+              <a:t>讓大家看到模型真的是一層一層組起來的：前面的層看邊；後面的層把前一層的結果組起來，看到的範圍愈來愈大，最後才認得出人。這一張後面兩張圖，是我刻意挑出來看「人」的。
 </a:t>
             </a:r>
           </a:p>
@@ -3167,41 +3068,41 @@
                 <a:spcPts val="0"/>
               </a:spcBef>
               <a:spcAft>
-                <a:spcPts val="208"/>
+                <a:spcPts val="150"/>
               </a:spcAft>
             </a:pPr>
             <a:r>
-              <a:rPr sz="1250" lang="zh-TW" dirty="0">
-                <a:solidFill>
-                  <a:srgbClr val="000000"/>
-                </a:solidFill>
-                <a:latin typeface="Arial Unicode MS"/>
-                <a:ea typeface="Arial Unicode MS"/>
-                <a:cs typeface="Arial Unicode MS"/>
-              </a:rPr>
-              <a:t>前兩張看的是第一層的濾鏡、和它們各自的反應。這一張把斑馬線那張照片送進去，看</a:t>
-            </a:r>
-            <a:r>
-              <a:rPr sz="1250" b="1" lang="zh-TW" dirty="0">
-                <a:solidFill>
-                  <a:srgbClr val="000000"/>
-                </a:solidFill>
-                <a:latin typeface="Arial Unicode MS"/>
-                <a:ea typeface="Arial Unicode MS"/>
-                <a:cs typeface="Arial Unicode MS"/>
-              </a:rPr>
-              <a:t>再往後幾層真的算出來的結果</a:t>
-            </a:r>
-            <a:r>
-              <a:rPr sz="1250" lang="zh-TW" dirty="0">
-                <a:solidFill>
-                  <a:srgbClr val="000000"/>
-                </a:solidFill>
-                <a:latin typeface="Arial Unicode MS"/>
-                <a:ea typeface="Arial Unicode MS"/>
-                <a:cs typeface="Arial Unicode MS"/>
-              </a:rPr>
-              <a:t>。亮的地方，就是那一層「有反應」的地方。
+              <a:rPr sz="900" lang="zh-TW" dirty="0">
+                <a:solidFill>
+                  <a:srgbClr val="000000"/>
+                </a:solidFill>
+                <a:latin typeface="Arial Unicode MS"/>
+                <a:ea typeface="Arial Unicode MS"/>
+                <a:cs typeface="Arial Unicode MS"/>
+              </a:rPr>
+              <a:t>前兩張看的是第一層的濾鏡，和它們各自的反應。這一張把斑馬線那張照片送進去，看</a:t>
+            </a:r>
+            <a:r>
+              <a:rPr sz="900" b="1" lang="zh-TW" dirty="0">
+                <a:solidFill>
+                  <a:srgbClr val="000000"/>
+                </a:solidFill>
+                <a:latin typeface="Arial Unicode MS"/>
+                <a:ea typeface="Arial Unicode MS"/>
+                <a:cs typeface="Arial Unicode MS"/>
+              </a:rPr>
+              <a:t>再往後的層真的算出來的結果</a:t>
+            </a:r>
+            <a:r>
+              <a:rPr sz="900" lang="zh-TW" dirty="0">
+                <a:solidFill>
+                  <a:srgbClr val="000000"/>
+                </a:solidFill>
+                <a:latin typeface="Arial Unicode MS"/>
+                <a:ea typeface="Arial Unicode MS"/>
+                <a:cs typeface="Arial Unicode MS"/>
+              </a:rPr>
+              <a:t>。亮的地方，就是那一層「有反應」的地方。YOLOX 從照片走到最後的答案，最多要經過五十五層。
 </a:t>
             </a:r>
           </a:p>
@@ -3211,11 +3112,11 @@
                 <a:spcPts val="0"/>
               </a:spcBef>
               <a:spcAft>
-                <a:spcPts val="208"/>
+                <a:spcPts val="150"/>
               </a:spcAft>
             </a:pPr>
             <a:r>
-              <a:rPr sz="1250" b="1" lang="zh-TW" dirty="0">
+              <a:rPr sz="900" b="1" lang="zh-TW" dirty="0">
                 <a:solidFill>
                   <a:srgbClr val="000000"/>
                 </a:solidFill>
@@ -3226,7 +3127,7 @@
               <a:t>最左邊</a:t>
             </a:r>
             <a:r>
-              <a:rPr sz="1250" lang="zh-TW" dirty="0">
+              <a:rPr sz="900" lang="zh-TW" dirty="0">
                 <a:solidFill>
                   <a:srgbClr val="000000"/>
                 </a:solidFill>
@@ -3244,11 +3145,11 @@
                 <a:spcPts val="0"/>
               </a:spcBef>
               <a:spcAft>
-                <a:spcPts val="208"/>
+                <a:spcPts val="150"/>
               </a:spcAft>
             </a:pPr>
             <a:r>
-              <a:rPr sz="1250" b="1" lang="zh-TW" dirty="0">
+              <a:rPr sz="900" b="1" lang="zh-TW" dirty="0">
                 <a:solidFill>
                   <a:srgbClr val="000000"/>
                 </a:solidFill>
@@ -3259,15 +3160,15 @@
               <a:t>第 1 層</a:t>
             </a:r>
             <a:r>
-              <a:rPr sz="1250" lang="zh-TW" dirty="0">
-                <a:solidFill>
-                  <a:srgbClr val="000000"/>
-                </a:solidFill>
-                <a:latin typeface="Arial Unicode MS"/>
-                <a:ea typeface="Arial Unicode MS"/>
-                <a:cs typeface="Arial Unicode MS"/>
-              </a:rPr>
-              <a:t>：整張照片變成線條。斑馬線、人行道的邊、建築物的輪廓，都亮起來。這就是上一張那種「找邊」的濾鏡算出來的。
+              <a:rPr sz="900" lang="zh-TW" dirty="0">
+                <a:solidFill>
+                  <a:srgbClr val="000000"/>
+                </a:solidFill>
+                <a:latin typeface="Arial Unicode MS"/>
+                <a:ea typeface="Arial Unicode MS"/>
+                <a:cs typeface="Arial Unicode MS"/>
+              </a:rPr>
+              <a:t>：整張照片變成線條。斑馬線、人行道的邊、建築物的輪廓都亮起來。這就是第 13 張那種「找邊」的濾鏡算出來的。第 1 層看的是照片的像素。
 </a:t>
             </a:r>
           </a:p>
@@ -3277,30 +3178,63 @@
                 <a:spcPts val="0"/>
               </a:spcBef>
               <a:spcAft>
-                <a:spcPts val="208"/>
+                <a:spcPts val="150"/>
               </a:spcAft>
             </a:pPr>
             <a:r>
-              <a:rPr sz="1250" b="1" lang="zh-TW" dirty="0">
-                <a:solidFill>
-                  <a:srgbClr val="000000"/>
-                </a:solidFill>
-                <a:latin typeface="Arial Unicode MS"/>
-                <a:ea typeface="Arial Unicode MS"/>
-                <a:cs typeface="Arial Unicode MS"/>
-              </a:rPr>
-              <a:t>第 2 段</a:t>
-            </a:r>
-            <a:r>
-              <a:rPr sz="1250" lang="zh-TW" dirty="0">
-                <a:solidFill>
-                  <a:srgbClr val="000000"/>
-                </a:solidFill>
-                <a:latin typeface="Arial Unicode MS"/>
-                <a:ea typeface="Arial Unicode MS"/>
-                <a:cs typeface="Arial Unicode MS"/>
-              </a:rPr>
-              <a:t>：再往後幾層，看到的東西更細、更雜，像紋理、小零件：牆上的格子、人身上衣服的紋路。
+              <a:rPr sz="900" lang="zh-TW" dirty="0">
+                <a:solidFill>
+                  <a:srgbClr val="000000"/>
+                </a:solidFill>
+                <a:latin typeface="Arial Unicode MS"/>
+                <a:ea typeface="Arial Unicode MS"/>
+                <a:cs typeface="Arial Unicode MS"/>
+              </a:rPr>
+              <a:t>那後面的層看什麼？</a:t>
+            </a:r>
+            <a:r>
+              <a:rPr sz="900" b="1" lang="zh-TW" dirty="0">
+                <a:solidFill>
+                  <a:srgbClr val="000000"/>
+                </a:solidFill>
+                <a:latin typeface="Arial Unicode MS"/>
+                <a:ea typeface="Arial Unicode MS"/>
+                <a:cs typeface="Arial Unicode MS"/>
+              </a:rPr>
+              <a:t>從第 2 層開始，看的就不是照片了，而是前一層交出來的那一疊地圖。</a:t>
+            </a:r>
+            <a:r>
+              <a:rPr sz="900" lang="zh-TW" dirty="0">
+                <a:solidFill>
+                  <a:srgbClr val="000000"/>
+                </a:solidFill>
+                <a:latin typeface="Arial Unicode MS"/>
+                <a:ea typeface="Arial Unicode MS"/>
+                <a:cs typeface="Arial Unicode MS"/>
+              </a:rPr>
+              <a:t>第 1 層有 32 個濾鏡，就交出 32 張「哪裡有這種筆畫」的地圖。第 2 層的每一個濾鏡，同時看這 32 張地圖的同一小塊，問的是</a:t>
+            </a:r>
+            <a:r>
+              <a:rPr sz="900" b="1" lang="zh-TW" dirty="0">
+                <a:solidFill>
+                  <a:srgbClr val="000000"/>
+                </a:solidFill>
+                <a:latin typeface="Arial Unicode MS"/>
+                <a:ea typeface="Arial Unicode MS"/>
+                <a:cs typeface="Arial Unicode MS"/>
+              </a:rPr>
+              <a:t>組合題</a:t>
+            </a:r>
+            <a:r>
+              <a:rPr sz="900" lang="zh-TW" dirty="0">
+                <a:solidFill>
+                  <a:srgbClr val="000000"/>
+                </a:solidFill>
+                <a:latin typeface="Arial Unicode MS"/>
+                <a:ea typeface="Arial Unicode MS"/>
+                <a:cs typeface="Arial Unicode MS"/>
+              </a:rPr>
+              <a:t>：例如「這裡有直的邊，右邊又有橫的邊嗎？」兩個都有，就是一個角。很多直邊和橫邊重複排在一起，就是格子紋。就像寫字，先有筆畫，筆畫組成部首，部首再組成字。
 </a:t>
             </a:r>
           </a:p>
@@ -3310,52 +3244,19 @@
                 <a:spcPts val="0"/>
               </a:spcBef>
               <a:spcAft>
-                <a:spcPts val="208"/>
+                <a:spcPts val="150"/>
               </a:spcAft>
             </a:pPr>
             <a:r>
-              <a:rPr sz="1250" b="1" lang="zh-TW" dirty="0">
-                <a:solidFill>
-                  <a:srgbClr val="000000"/>
-                </a:solidFill>
-                <a:latin typeface="Arial Unicode MS"/>
-                <a:ea typeface="Arial Unicode MS"/>
-                <a:cs typeface="Arial Unicode MS"/>
-              </a:rPr>
-              <a:t>後段</a:t>
-            </a:r>
-            <a:r>
-              <a:rPr sz="1250" lang="zh-TW" dirty="0">
-                <a:solidFill>
-                  <a:srgbClr val="000000"/>
-                </a:solidFill>
-                <a:latin typeface="Arial Unicode MS"/>
-                <a:ea typeface="Arial Unicode MS"/>
-                <a:cs typeface="Arial Unicode MS"/>
-              </a:rPr>
-              <a:t>：再往後，畫面變得很粗，一格代表照片上的一大塊。可是請看，</a:t>
-            </a:r>
-            <a:r>
-              <a:rPr sz="1250" b="1" lang="zh-TW" dirty="0">
-                <a:solidFill>
-                  <a:srgbClr val="000000"/>
-                </a:solidFill>
-                <a:latin typeface="Arial Unicode MS"/>
-                <a:ea typeface="Arial Unicode MS"/>
-                <a:cs typeface="Arial Unicode MS"/>
-              </a:rPr>
-              <a:t>五個行人的位置整個亮起來</a:t>
-            </a:r>
-            <a:r>
-              <a:rPr sz="1250" lang="zh-TW" dirty="0">
-                <a:solidFill>
-                  <a:srgbClr val="000000"/>
-                </a:solidFill>
-                <a:latin typeface="Arial Unicode MS"/>
-                <a:ea typeface="Arial Unicode MS"/>
-                <a:cs typeface="Arial Unicode MS"/>
-              </a:rPr>
-              <a:t>，其他地方幾乎全暗。這一層已經不在看邊了，它在看「這裡像不像一個人」。
+              <a:rPr sz="900" lang="zh-TW" dirty="0">
+                <a:solidFill>
+                  <a:srgbClr val="000000"/>
+                </a:solidFill>
+                <a:latin typeface="Arial Unicode MS"/>
+                <a:ea typeface="Arial Unicode MS"/>
+                <a:cs typeface="Arial Unicode MS"/>
+              </a:rPr>
+              <a:t>而且每隔幾層，地圖就縮小一半，所以每一格管的範圍愈來愈大。第 1 層的一格，大約是原來照片的五乘五個像素；第 6 層的一格，大約是十乘十個像素；第 49 層的一格，大約是四十乘四十個像素，一格就蓋住半個人。所以愈後面的層，看到的範圍愈大，才回答得了「這裡是不是一個人」這種大問題。
 </a:t>
             </a:r>
           </a:p>
@@ -3365,41 +3266,30 @@
                 <a:spcPts val="0"/>
               </a:spcBef>
               <a:spcAft>
-                <a:spcPts val="208"/>
+                <a:spcPts val="150"/>
               </a:spcAft>
             </a:pPr>
             <a:r>
-              <a:rPr sz="1250" lang="zh-TW" dirty="0">
-                <a:solidFill>
-                  <a:srgbClr val="000000"/>
-                </a:solidFill>
-                <a:latin typeface="Arial Unicode MS"/>
-                <a:ea typeface="Arial Unicode MS"/>
-                <a:cs typeface="Arial Unicode MS"/>
-              </a:rPr>
-              <a:t>所以「一層一層」不是比喻，是真的：</a:t>
-            </a:r>
-            <a:r>
-              <a:rPr sz="1250" b="1" lang="zh-TW" dirty="0">
-                <a:solidFill>
-                  <a:srgbClr val="000000"/>
-                </a:solidFill>
-                <a:latin typeface="Arial Unicode MS"/>
-                <a:ea typeface="Arial Unicode MS"/>
-                <a:cs typeface="Arial Unicode MS"/>
-              </a:rPr>
-              <a:t>前面的層看簡單的東西，後面的層把前面的結果組起來，看愈來愈完整的東西。</a:t>
-            </a:r>
-            <a:r>
-              <a:rPr sz="1250" lang="zh-TW" dirty="0">
-                <a:solidFill>
-                  <a:srgbClr val="000000"/>
-                </a:solidFill>
-                <a:latin typeface="Arial Unicode MS"/>
-                <a:ea typeface="Arial Unicode MS"/>
-                <a:cs typeface="Arial Unicode MS"/>
-              </a:rPr>
-              <a:t>最後再接上偵測的那一層，就變成下一張的框、類別和分數。
+              <a:rPr sz="900" b="1" lang="zh-TW" dirty="0">
+                <a:solidFill>
+                  <a:srgbClr val="000000"/>
+                </a:solidFill>
+                <a:latin typeface="Arial Unicode MS"/>
+                <a:ea typeface="Arial Unicode MS"/>
+                <a:cs typeface="Arial Unicode MS"/>
+              </a:rPr>
+              <a:t>第 6 層</a:t>
+            </a:r>
+            <a:r>
+              <a:rPr sz="900" lang="zh-TW" dirty="0">
+                <a:solidFill>
+                  <a:srgbClr val="000000"/>
+                </a:solidFill>
+                <a:latin typeface="Arial Unicode MS"/>
+                <a:ea typeface="Arial Unicode MS"/>
+                <a:cs typeface="Arial Unicode MS"/>
+              </a:rPr>
+              <a:t>：邊組成了紋理和輪廓。請看左邊牆上的格子、建築物、路面，還有人的輪廓都亮起來。要注意，這一張雖然是我用「在人身上最亮」的標準挑出來的，可是它對車子、牆壁的反應一樣強，牆上有些地方甚至比人還亮。也就是說，到第 6 層，模型還分不出人和其他東西。
 </a:t>
             </a:r>
           </a:p>
@@ -3409,19 +3299,52 @@
                 <a:spcPts val="0"/>
               </a:spcBef>
               <a:spcAft>
-                <a:spcPts val="208"/>
+                <a:spcPts val="150"/>
               </a:spcAft>
             </a:pPr>
             <a:r>
-              <a:rPr sz="1250" lang="zh-TW" dirty="0">
-                <a:solidFill>
-                  <a:srgbClr val="000000"/>
-                </a:solidFill>
-                <a:latin typeface="Arial Unicode MS"/>
-                <a:ea typeface="Arial Unicode MS"/>
-                <a:cs typeface="Arial Unicode MS"/>
-              </a:rPr>
-              <a:t>要說明一下怎麼挑的：每一層有幾十到一百多個通道，每個通道各看一種東西，不可能全部放上來。第 1 層我挑變化最大的一個；後面兩個，我挑「在行人身上比背景亮最多」的那一個，所以後段那張是刻意挑出來看人的通道，其他通道有的看車、有的看路。
+              <a:rPr sz="900" b="1" lang="zh-TW" dirty="0">
+                <a:solidFill>
+                  <a:srgbClr val="000000"/>
+                </a:solidFill>
+                <a:latin typeface="Arial Unicode MS"/>
+                <a:ea typeface="Arial Unicode MS"/>
+                <a:cs typeface="Arial Unicode MS"/>
+              </a:rPr>
+              <a:t>第 49 層</a:t>
+            </a:r>
+            <a:r>
+              <a:rPr sz="900" lang="zh-TW" dirty="0">
+                <a:solidFill>
+                  <a:srgbClr val="000000"/>
+                </a:solidFill>
+                <a:latin typeface="Arial Unicode MS"/>
+                <a:ea typeface="Arial Unicode MS"/>
+                <a:cs typeface="Arial Unicode MS"/>
+              </a:rPr>
+              <a:t>：畫面變成一格一格的大方塊。可是請看，</a:t>
+            </a:r>
+            <a:r>
+              <a:rPr sz="900" b="1" lang="zh-TW" dirty="0">
+                <a:solidFill>
+                  <a:srgbClr val="000000"/>
+                </a:solidFill>
+                <a:latin typeface="Arial Unicode MS"/>
+                <a:ea typeface="Arial Unicode MS"/>
+                <a:cs typeface="Arial Unicode MS"/>
+              </a:rPr>
+              <a:t>斑馬線上那幾個行人的位置亮起來</a:t>
+            </a:r>
+            <a:r>
+              <a:rPr sz="900" lang="zh-TW" dirty="0">
+                <a:solidFill>
+                  <a:srgbClr val="000000"/>
+                </a:solidFill>
+                <a:latin typeface="Arial Unicode MS"/>
+                <a:ea typeface="Arial Unicode MS"/>
+                <a:cs typeface="Arial Unicode MS"/>
+              </a:rPr>
+              <a:t>，其他地方幾乎全暗。我量過：人身上最亮的地方大約是 3.5 到 4，右邊那台車只有 0.5，背景最亮也不到 1。這一層已經不是在看邊了，它在看「這裡是不是一個人」。
 </a:t>
             </a:r>
           </a:p>
@@ -3431,11 +3354,77 @@
                 <a:spcPts val="0"/>
               </a:spcBef>
               <a:spcAft>
-                <a:spcPts val="208"/>
+                <a:spcPts val="150"/>
               </a:spcAft>
             </a:pPr>
             <a:r>
-              <a:rPr sz="1250" b="1" lang="zh-TW" dirty="0">
+              <a:rPr sz="900" lang="zh-TW" dirty="0">
+                <a:solidFill>
+                  <a:srgbClr val="000000"/>
+                </a:solidFill>
+                <a:latin typeface="Arial Unicode MS"/>
+                <a:ea typeface="Arial Unicode MS"/>
+                <a:cs typeface="Arial Unicode MS"/>
+              </a:rPr>
+              <a:t>所以「一層一層」不是比喻，是真的：</a:t>
+            </a:r>
+            <a:r>
+              <a:rPr sz="900" b="1" lang="zh-TW" dirty="0">
+                <a:solidFill>
+                  <a:srgbClr val="000000"/>
+                </a:solidFill>
+                <a:latin typeface="Arial Unicode MS"/>
+                <a:ea typeface="Arial Unicode MS"/>
+                <a:cs typeface="Arial Unicode MS"/>
+              </a:rPr>
+              <a:t>前面的層看簡單的東西，後面的層把前面的結果組起來，看愈來愈完整的東西。</a:t>
+            </a:r>
+            <a:r>
+              <a:rPr sz="900" lang="zh-TW" dirty="0">
+                <a:solidFill>
+                  <a:srgbClr val="000000"/>
+                </a:solidFill>
+                <a:latin typeface="Arial Unicode MS"/>
+                <a:ea typeface="Arial Unicode MS"/>
+                <a:cs typeface="Arial Unicode MS"/>
+              </a:rPr>
+              <a:t>第 49 層的結果再交給偵測的部分，就變成下一張的框、類別和分數。
+</a:t>
+            </a:r>
+          </a:p>
+          <a:p>
+            <a:pPr algn="l">
+              <a:spcBef>
+                <a:spcPts val="0"/>
+              </a:spcBef>
+              <a:spcAft>
+                <a:spcPts val="150"/>
+              </a:spcAft>
+            </a:pPr>
+            <a:r>
+              <a:rPr sz="900" lang="zh-TW" dirty="0">
+                <a:solidFill>
+                  <a:srgbClr val="000000"/>
+                </a:solidFill>
+                <a:latin typeface="Arial Unicode MS"/>
+                <a:ea typeface="Arial Unicode MS"/>
+                <a:cs typeface="Arial Unicode MS"/>
+              </a:rPr>
+              <a:t>要說明一下怎麼挑的：每一層有幾十到一百多個通道，每個通道各看一種東西，不可能全部放上來。第 1 層，我從 32 個通道裡挑變化最大的一個；第 6 層和第 49 層，我分別從 64 個和 128 個通道裡，挑「在行人身上比背景亮最多」的那一個。所以這一頁是刻意挑出來看「人」的。模型本身會找八十種東西，同一層的其他通道，有的看車、有的看路。
+</a:t>
+            </a:r>
+          </a:p>
+          <a:p>
+            <a:pPr algn="l">
+              <a:spcBef>
+                <a:spcPts val="0"/>
+              </a:spcBef>
+              <a:spcAft>
+                <a:spcPts val="150"/>
+              </a:spcAft>
+            </a:pPr>
+            <a:r>
+              <a:rPr sz="900" b="1" lang="zh-TW" dirty="0">
                 <a:solidFill>
                   <a:srgbClr val="000000"/>
                 </a:solidFill>
@@ -3446,7 +3435,7 @@
               <a:t>影片（3Blue1Brown 第一集，英文）：從 5:32 播到 8:39。</a:t>
             </a:r>
             <a:r>
-              <a:rPr sz="1250" lang="zh-TW" dirty="0">
+              <a:rPr sz="900" lang="zh-TW" dirty="0">
                 <a:solidFill>
                   <a:srgbClr val="000000"/>
                 </a:solidFill>
@@ -15074,7 +15063,7 @@
                 <a:ea typeface="Arial" pitchFamily="34" charset="-122"/>
                 <a:cs typeface="Arial" pitchFamily="34" charset="-120"/>
               </a:rPr>
-              <a:t>YOLOX-s 真的中間結果（亮＝反應強）· 第 1 層 32 個通道挑變化最大的一個；後兩個從 64、128 個通道挑「在人身上比背景亮最多」的一個 · nuScenes scene-0553</a:t>
+              <a:t>YOLOX-s 真的中間結果（亮＝反應強）· 第 1 層從 32 個通道挑變化最大的一個；第 6、49 層從 64、128 個通道挑「在人身上比背景亮最多」的一個 · 層數＝從輸入算起經過幾層卷積（最深 55 層）· nuScenes scene-0553</a:t>
             </a:r>
             <a:endParaRPr lang="en-US" sz="850" dirty="0"/>
           </a:p>

--- a/第八週(10-29)/第八週_第1節_簡報.pptx
+++ b/第八週(10-29)/第八週_第1節_簡報.pptx
@@ -8382,7 +8382,7 @@
                 <a:ea typeface="Arial Unicode MS"/>
                 <a:cs typeface="Arial Unicode MS"/>
               </a:rPr>
-              <a:t>，我們看到的「亮暗和細節」，大部分來自綠色。把一張彩色照片換成黑白時，常用的算法裡綠色就佔了將近六成（紅 0.30、綠 0.59、藍 0.11），左邊第一格就是這樣算的。所以多放一倍的綠，照片的</a:t>
+              <a:t>，我們看到的「亮暗和細節」，大部分來自綠色。把一張彩色照片換成黑白時，常用的算法裡綠色就佔了將近六成（紅 0.30、綠 0.59、藍 0.11），左邊第一格就是這樣算的，算完四捨五入到整數。所以多放一倍的綠，照片的</a:t>
             </a:r>
             <a:r>
               <a:rPr sz="850" b="1" lang="zh-TW" dirty="0">
@@ -8799,11 +8799,11 @@
                 <a:spcPts val="0"/>
               </a:spcBef>
               <a:spcAft>
-                <a:spcPts val="175"/>
+                <a:spcPts val="133"/>
               </a:spcAft>
             </a:pPr>
             <a:r>
-              <a:rPr sz="1050" b="1" lang="zh-TW" dirty="0">
+              <a:rPr sz="800" b="1" lang="zh-TW" dirty="0">
                 <a:solidFill>
                   <a:srgbClr val="000000"/>
                 </a:solidFill>
@@ -8814,7 +8814,7 @@
               <a:t>這一張的目的：</a:t>
             </a:r>
             <a:r>
-              <a:rPr sz="1050" lang="zh-TW" dirty="0">
+              <a:rPr sz="800" lang="zh-TW" dirty="0">
                 <a:solidFill>
                   <a:srgbClr val="000000"/>
                 </a:solidFill>
@@ -8832,11 +8832,11 @@
                 <a:spcPts val="0"/>
               </a:spcBef>
               <a:spcAft>
-                <a:spcPts val="175"/>
+                <a:spcPts val="133"/>
               </a:spcAft>
             </a:pPr>
             <a:r>
-              <a:rPr sz="1050" lang="zh-TW" dirty="0">
+              <a:rPr sz="800" lang="zh-TW" dirty="0">
                 <a:solidFill>
                   <a:srgbClr val="000000"/>
                 </a:solidFill>
@@ -8847,7 +8847,7 @@
               <a:t>上一張說，每個格子只量到一種顏色，缺的兩種用旁邊的格子補。怎麼補？最簡單的方法叫</a:t>
             </a:r>
             <a:r>
-              <a:rPr sz="1050" b="1" lang="zh-TW" dirty="0">
+              <a:rPr sz="800" b="1" lang="zh-TW" dirty="0">
                 <a:solidFill>
                   <a:srgbClr val="000000"/>
                 </a:solidFill>
@@ -8858,7 +8858,7 @@
               <a:t>鄰居平均</a:t>
             </a:r>
             <a:r>
-              <a:rPr sz="1050" lang="zh-TW" dirty="0">
+              <a:rPr sz="800" lang="zh-TW" dirty="0">
                 <a:solidFill>
                   <a:srgbClr val="000000"/>
                 </a:solidFill>
@@ -8869,7 +8869,7 @@
               <a:t>：缺什麼顏色，就找旁邊</a:t>
             </a:r>
             <a:r>
-              <a:rPr sz="1050" b="1" lang="zh-TW" dirty="0">
+              <a:rPr sz="800" b="1" lang="zh-TW" dirty="0">
                 <a:solidFill>
                   <a:srgbClr val="000000"/>
                 </a:solidFill>
@@ -8880,7 +8880,7 @@
               <a:t>同一種顏色</a:t>
             </a:r>
             <a:r>
-              <a:rPr sz="1050" lang="zh-TW" dirty="0">
+              <a:rPr sz="800" lang="zh-TW" dirty="0">
                 <a:solidFill>
                   <a:srgbClr val="000000"/>
                 </a:solidFill>
@@ -8898,11 +8898,11 @@
                 <a:spcPts val="0"/>
               </a:spcBef>
               <a:spcAft>
-                <a:spcPts val="175"/>
+                <a:spcPts val="133"/>
               </a:spcAft>
             </a:pPr>
             <a:r>
-              <a:rPr sz="1050" lang="zh-TW" dirty="0">
+              <a:rPr sz="800" lang="zh-TW" dirty="0">
                 <a:solidFill>
                   <a:srgbClr val="000000"/>
                 </a:solidFill>
@@ -8913,7 +8913,7 @@
               <a:t>看第一格，</a:t>
             </a:r>
             <a:r>
-              <a:rPr sz="1050" b="1" lang="zh-TW" dirty="0">
+              <a:rPr sz="800" b="1" lang="zh-TW" dirty="0">
                 <a:solidFill>
                   <a:srgbClr val="000000"/>
                 </a:solidFill>
@@ -8924,7 +8924,7 @@
               <a:t>紅格</a:t>
             </a:r>
             <a:r>
-              <a:rPr sz="1050" lang="zh-TW" dirty="0">
+              <a:rPr sz="800" lang="zh-TW" dirty="0">
                 <a:solidFill>
                   <a:srgbClr val="000000"/>
                 </a:solidFill>
@@ -8935,7 +8935,7 @@
               <a:t>。中間那一格貼的是紅色濾色片，自己量到 </a:t>
             </a:r>
             <a:r>
-              <a:rPr sz="1050" b="1" lang="zh-TW" dirty="0">
+              <a:rPr sz="800" b="1" lang="zh-TW" dirty="0">
                 <a:solidFill>
                   <a:srgbClr val="000000"/>
                 </a:solidFill>
@@ -8946,7 +8946,7 @@
               <a:t>R 40</a:t>
             </a:r>
             <a:r>
-              <a:rPr sz="1050" lang="zh-TW" dirty="0">
+              <a:rPr sz="800" lang="zh-TW" dirty="0">
                 <a:solidFill>
                   <a:srgbClr val="000000"/>
                 </a:solidFill>
@@ -8964,11 +8964,11 @@
                 <a:spcPts val="0"/>
               </a:spcBef>
               <a:spcAft>
-                <a:spcPts val="175"/>
+                <a:spcPts val="133"/>
               </a:spcAft>
             </a:pPr>
             <a:r>
-              <a:rPr sz="1050" lang="zh-TW" dirty="0">
+              <a:rPr sz="800" lang="zh-TW" dirty="0">
                 <a:solidFill>
                   <a:srgbClr val="000000"/>
                 </a:solidFill>
@@ -8979,7 +8979,7 @@
               <a:t>它缺綠色。看看周圍：</a:t>
             </a:r>
             <a:r>
-              <a:rPr sz="1050" b="1" lang="zh-TW" dirty="0">
+              <a:rPr sz="800" b="1" lang="zh-TW" dirty="0">
                 <a:solidFill>
                   <a:srgbClr val="000000"/>
                 </a:solidFill>
@@ -8990,7 +8990,7 @@
               <a:t>上下左右四個都是綠格</a:t>
             </a:r>
             <a:r>
-              <a:rPr sz="1050" lang="zh-TW" dirty="0">
+              <a:rPr sz="800" lang="zh-TW" dirty="0">
                 <a:solidFill>
                   <a:srgbClr val="000000"/>
                 </a:solidFill>
@@ -9001,7 +9001,7 @@
               <a:t>，41、45、48、36。四個加起來除以 4，</a:t>
             </a:r>
             <a:r>
-              <a:rPr sz="1050" b="1" lang="zh-TW" dirty="0">
+              <a:rPr sz="800" b="1" lang="zh-TW" dirty="0">
                 <a:solidFill>
                   <a:srgbClr val="000000"/>
                 </a:solidFill>
@@ -9012,7 +9012,7 @@
               <a:t>42.5</a:t>
             </a:r>
             <a:r>
-              <a:rPr sz="1050" lang="zh-TW" dirty="0">
+              <a:rPr sz="800" lang="zh-TW" dirty="0">
                 <a:solidFill>
                   <a:srgbClr val="000000"/>
                 </a:solidFill>
@@ -9030,11 +9030,11 @@
                 <a:spcPts val="0"/>
               </a:spcBef>
               <a:spcAft>
-                <a:spcPts val="175"/>
+                <a:spcPts val="133"/>
               </a:spcAft>
             </a:pPr>
             <a:r>
-              <a:rPr sz="1050" lang="zh-TW" dirty="0">
+              <a:rPr sz="800" lang="zh-TW" dirty="0">
                 <a:solidFill>
                   <a:srgbClr val="000000"/>
                 </a:solidFill>
@@ -9045,7 +9045,7 @@
               <a:t>它也缺藍色。藍格在哪裡？在</a:t>
             </a:r>
             <a:r>
-              <a:rPr sz="1050" b="1" lang="zh-TW" dirty="0">
+              <a:rPr sz="800" b="1" lang="zh-TW" dirty="0">
                 <a:solidFill>
                   <a:srgbClr val="000000"/>
                 </a:solidFill>
@@ -9056,7 +9056,7 @@
               <a:t>四個斜角</a:t>
             </a:r>
             <a:r>
-              <a:rPr sz="1050" lang="zh-TW" dirty="0">
+              <a:rPr sz="800" lang="zh-TW" dirty="0">
                 <a:solidFill>
                   <a:srgbClr val="000000"/>
                 </a:solidFill>
@@ -9067,7 +9067,7 @@
               <a:t>：48、33、50、37，平均 </a:t>
             </a:r>
             <a:r>
-              <a:rPr sz="1050" b="1" lang="zh-TW" dirty="0">
+              <a:rPr sz="800" b="1" lang="zh-TW" dirty="0">
                 <a:solidFill>
                   <a:srgbClr val="000000"/>
                 </a:solidFill>
@@ -9078,7 +9078,7 @@
               <a:t>42</a:t>
             </a:r>
             <a:r>
-              <a:rPr sz="1050" lang="zh-TW" dirty="0">
+              <a:rPr sz="800" lang="zh-TW" dirty="0">
                 <a:solidFill>
                   <a:srgbClr val="000000"/>
                 </a:solidFill>
@@ -9096,11 +9096,11 @@
                 <a:spcPts val="0"/>
               </a:spcBef>
               <a:spcAft>
-                <a:spcPts val="175"/>
+                <a:spcPts val="133"/>
               </a:spcAft>
             </a:pPr>
             <a:r>
-              <a:rPr sz="1050" lang="zh-TW" dirty="0">
+              <a:rPr sz="800" lang="zh-TW" dirty="0">
                 <a:solidFill>
                   <a:srgbClr val="000000"/>
                 </a:solidFill>
@@ -9118,11 +9118,11 @@
                 <a:spcPts val="0"/>
               </a:spcBef>
               <a:spcAft>
-                <a:spcPts val="175"/>
+                <a:spcPts val="133"/>
               </a:spcAft>
             </a:pPr>
             <a:r>
-              <a:rPr sz="1050" lang="zh-TW" dirty="0">
+              <a:rPr sz="800" lang="zh-TW" dirty="0">
                 <a:solidFill>
                   <a:srgbClr val="000000"/>
                 </a:solidFill>
@@ -9133,7 +9133,7 @@
               <a:t>第二格，</a:t>
             </a:r>
             <a:r>
-              <a:rPr sz="1050" b="1" lang="zh-TW" dirty="0">
+              <a:rPr sz="800" b="1" lang="zh-TW" dirty="0">
                 <a:solidFill>
                   <a:srgbClr val="000000"/>
                 </a:solidFill>
@@ -9144,7 +9144,7 @@
               <a:t>綠格</a:t>
             </a:r>
             <a:r>
-              <a:rPr sz="1050" lang="zh-TW" dirty="0">
+              <a:rPr sz="800" lang="zh-TW" dirty="0">
                 <a:solidFill>
                   <a:srgbClr val="000000"/>
                 </a:solidFill>
@@ -9155,7 +9155,7 @@
               <a:t>，而且它在有紅色的那一列。自己量到 G 36。紅色在它的</a:t>
             </a:r>
             <a:r>
-              <a:rPr sz="1050" b="1" lang="zh-TW" dirty="0">
+              <a:rPr sz="800" b="1" lang="zh-TW" dirty="0">
                 <a:solidFill>
                   <a:srgbClr val="000000"/>
                 </a:solidFill>
@@ -9166,7 +9166,7 @@
               <a:t>左右兩邊</a:t>
             </a:r>
             <a:r>
-              <a:rPr sz="1050" lang="zh-TW" dirty="0">
+              <a:rPr sz="800" lang="zh-TW" dirty="0">
                 <a:solidFill>
                   <a:srgbClr val="000000"/>
                 </a:solidFill>
@@ -9177,7 +9177,7 @@
               <a:t>：40 和 60，平均 50；藍色在它的</a:t>
             </a:r>
             <a:r>
-              <a:rPr sz="1050" b="1" lang="zh-TW" dirty="0">
+              <a:rPr sz="800" b="1" lang="zh-TW" dirty="0">
                 <a:solidFill>
                   <a:srgbClr val="000000"/>
                 </a:solidFill>
@@ -9188,7 +9188,7 @@
               <a:t>上下</a:t>
             </a:r>
             <a:r>
-              <a:rPr sz="1050" lang="zh-TW" dirty="0">
+              <a:rPr sz="800" lang="zh-TW" dirty="0">
                 <a:solidFill>
                   <a:srgbClr val="000000"/>
                 </a:solidFill>
@@ -9206,11 +9206,11 @@
                 <a:spcPts val="0"/>
               </a:spcBef>
               <a:spcAft>
-                <a:spcPts val="175"/>
+                <a:spcPts val="133"/>
               </a:spcAft>
             </a:pPr>
             <a:r>
-              <a:rPr sz="1050" lang="zh-TW" dirty="0">
+              <a:rPr sz="800" lang="zh-TW" dirty="0">
                 <a:solidFill>
                   <a:srgbClr val="000000"/>
                 </a:solidFill>
@@ -9221,7 +9221,7 @@
               <a:t>第三格，</a:t>
             </a:r>
             <a:r>
-              <a:rPr sz="1050" b="1" lang="zh-TW" dirty="0">
+              <a:rPr sz="800" b="1" lang="zh-TW" dirty="0">
                 <a:solidFill>
                   <a:srgbClr val="000000"/>
                 </a:solidFill>
@@ -9232,7 +9232,7 @@
               <a:t>藍格</a:t>
             </a:r>
             <a:r>
-              <a:rPr sz="1050" lang="zh-TW" dirty="0">
+              <a:rPr sz="800" lang="zh-TW" dirty="0">
                 <a:solidFill>
                   <a:srgbClr val="000000"/>
                 </a:solidFill>
@@ -9250,11 +9250,11 @@
                 <a:spcPts val="0"/>
               </a:spcBef>
               <a:spcAft>
-                <a:spcPts val="175"/>
+                <a:spcPts val="133"/>
               </a:spcAft>
             </a:pPr>
             <a:r>
-              <a:rPr sz="1050" lang="zh-TW" dirty="0">
+              <a:rPr sz="800" lang="zh-TW" dirty="0">
                 <a:solidFill>
                   <a:srgbClr val="000000"/>
                 </a:solidFill>
@@ -9272,63 +9272,30 @@
                 <a:spcPts val="0"/>
               </a:spcBef>
               <a:spcAft>
-                <a:spcPts val="175"/>
+                <a:spcPts val="133"/>
               </a:spcAft>
             </a:pPr>
             <a:r>
-              <a:rPr sz="1050" lang="zh-TW" dirty="0">
-                <a:solidFill>
-                  <a:srgbClr val="000000"/>
-                </a:solidFill>
-                <a:latin typeface="Arial Unicode MS"/>
-                <a:ea typeface="Arial Unicode MS"/>
-                <a:cs typeface="Arial Unicode MS"/>
-              </a:rPr>
-              <a:t>最下面兩行，請比一比「算出」和「相機存的」：差了幾個數。原因有兩個。第一，這張圖每格那一個顏色的數字，是我從已經存好的 JPEG 拿回來的，只是示範，不是相機真正量到的原始值。第二，真的相機不會用這麼簡單的平均：它會先看</a:t>
-            </a:r>
-            <a:r>
-              <a:rPr sz="1050" b="1" lang="zh-TW" dirty="0">
-                <a:solidFill>
-                  <a:srgbClr val="000000"/>
-                </a:solidFill>
-                <a:latin typeface="Arial Unicode MS"/>
-                <a:ea typeface="Arial Unicode MS"/>
-                <a:cs typeface="Arial Unicode MS"/>
-              </a:rPr>
-              <a:t>上下差得多、還是左右差得多</a:t>
-            </a:r>
-            <a:r>
-              <a:rPr sz="1050" lang="zh-TW" dirty="0">
-                <a:solidFill>
-                  <a:srgbClr val="000000"/>
-                </a:solidFill>
-                <a:latin typeface="Arial Unicode MS"/>
-                <a:ea typeface="Arial Unicode MS"/>
-                <a:cs typeface="Arial Unicode MS"/>
-              </a:rPr>
-              <a:t>，順著變化比較小的方向去平均，以免把邊緣兩邊的顏色混在一起；補完以後，還要調</a:t>
-            </a:r>
-            <a:r>
-              <a:rPr sz="1050" b="1" lang="zh-TW" dirty="0">
-                <a:solidFill>
-                  <a:srgbClr val="000000"/>
-                </a:solidFill>
-                <a:latin typeface="Arial Unicode MS"/>
-                <a:ea typeface="Arial Unicode MS"/>
-                <a:cs typeface="Arial Unicode MS"/>
-              </a:rPr>
-              <a:t>白平衡</a:t>
-            </a:r>
-            <a:r>
-              <a:rPr sz="1050" lang="zh-TW" dirty="0">
-                <a:solidFill>
-                  <a:srgbClr val="000000"/>
-                </a:solidFill>
-                <a:latin typeface="Arial Unicode MS"/>
-                <a:ea typeface="Arial Unicode MS"/>
-                <a:cs typeface="Arial Unicode MS"/>
-              </a:rPr>
-              <a:t>（讓白色看起來是白的）、調顏色、調亮度曲線，最後壓縮成 JPEG。每一家相機的做法都不一樣，而且多半不公開。
+              <a:rPr sz="800" b="1" lang="zh-TW" dirty="0">
+                <a:solidFill>
+                  <a:srgbClr val="000000"/>
+                </a:solidFill>
+                <a:latin typeface="Arial Unicode MS"/>
+                <a:ea typeface="Arial Unicode MS"/>
+                <a:cs typeface="Arial Unicode MS"/>
+              </a:rPr>
+              <a:t>照片最外面那一圈的格子，怎麼補？</a:t>
+            </a:r>
+            <a:r>
+              <a:rPr sz="800" lang="zh-TW" dirty="0">
+                <a:solidFill>
+                  <a:srgbClr val="000000"/>
+                </a:solidFill>
+                <a:latin typeface="Arial Unicode MS"/>
+                <a:ea typeface="Arial Unicode MS"/>
+                <a:cs typeface="Arial Unicode MS"/>
+              </a:rPr>
+              <a:t>有同學可能會問：如果這一格在照片的最左邊或最上面，旁邊根本沒有格子，要怎麼平均？先說明，圖上這 8 乘 8 是從照片中間切出來的，最外面那一圈在照片上其實都還有鄰居，只是沒有畫出來；所以我示範的三格都挑在裡面，周圍八格都看得到。真的碰到照片的邊，有四種做法。
 </a:t>
             </a:r>
           </a:p>
@@ -9338,63 +9305,63 @@
                 <a:spcPts val="0"/>
               </a:spcBef>
               <a:spcAft>
-                <a:spcPts val="175"/>
+                <a:spcPts val="133"/>
               </a:spcAft>
             </a:pPr>
             <a:r>
-              <a:rPr sz="1050" lang="zh-TW" dirty="0">
-                <a:solidFill>
-                  <a:srgbClr val="000000"/>
-                </a:solidFill>
-                <a:latin typeface="Arial Unicode MS"/>
-                <a:ea typeface="Arial Unicode MS"/>
-                <a:cs typeface="Arial Unicode MS"/>
-              </a:rPr>
-              <a:t>最簡單的平均有一個毛病：碰到</a:t>
-            </a:r>
-            <a:r>
-              <a:rPr sz="1050" b="1" lang="zh-TW" dirty="0">
-                <a:solidFill>
-                  <a:srgbClr val="000000"/>
-                </a:solidFill>
-                <a:latin typeface="Arial Unicode MS"/>
-                <a:ea typeface="Arial Unicode MS"/>
-                <a:cs typeface="Arial Unicode MS"/>
-              </a:rPr>
-              <a:t>邊緣</a:t>
-            </a:r>
-            <a:r>
-              <a:rPr sz="1050" lang="zh-TW" dirty="0">
-                <a:solidFill>
-                  <a:srgbClr val="000000"/>
-                </a:solidFill>
-                <a:latin typeface="Arial Unicode MS"/>
-                <a:ea typeface="Arial Unicode MS"/>
-                <a:cs typeface="Arial Unicode MS"/>
-              </a:rPr>
-              <a:t>，例如白色斑馬線旁邊就是黑色柏油，平均的時候會把兩邊混在一起，邊緣就冒出一圈原本沒有的顏色，叫做</a:t>
-            </a:r>
-            <a:r>
-              <a:rPr sz="1050" b="1" lang="zh-TW" dirty="0">
-                <a:solidFill>
-                  <a:srgbClr val="000000"/>
-                </a:solidFill>
-                <a:latin typeface="Arial Unicode MS"/>
-                <a:ea typeface="Arial Unicode MS"/>
-                <a:cs typeface="Arial Unicode MS"/>
-              </a:rPr>
-              <a:t>假色</a:t>
-            </a:r>
-            <a:r>
-              <a:rPr sz="1050" lang="zh-TW" dirty="0">
-                <a:solidFill>
-                  <a:srgbClr val="000000"/>
-                </a:solidFill>
-                <a:latin typeface="Arial Unicode MS"/>
-                <a:ea typeface="Arial Unicode MS"/>
-                <a:cs typeface="Arial Unicode MS"/>
-              </a:rPr>
-              <a:t>。這就是上一張講的，紅和藍格子比較少的代價。
+              <a:rPr sz="800" lang="zh-TW" dirty="0">
+                <a:solidFill>
+                  <a:srgbClr val="000000"/>
+                </a:solidFill>
+                <a:latin typeface="Arial Unicode MS"/>
+                <a:ea typeface="Arial Unicode MS"/>
+                <a:cs typeface="Arial Unicode MS"/>
+              </a:rPr>
+              <a:t>第一種最直覺：</a:t>
+            </a:r>
+            <a:r>
+              <a:rPr sz="800" b="1" lang="zh-TW" dirty="0">
+                <a:solidFill>
+                  <a:srgbClr val="000000"/>
+                </a:solidFill>
+                <a:latin typeface="Arial Unicode MS"/>
+                <a:ea typeface="Arial Unicode MS"/>
+                <a:cs typeface="Arial Unicode MS"/>
+              </a:rPr>
+              <a:t>缺的格子不算，用剩下的平均。</a:t>
+            </a:r>
+            <a:r>
+              <a:rPr sz="800" lang="zh-TW" dirty="0">
+                <a:solidFill>
+                  <a:srgbClr val="000000"/>
+                </a:solidFill>
+                <a:latin typeface="Arial Unicode MS"/>
+                <a:ea typeface="Arial Unicode MS"/>
+                <a:cs typeface="Arial Unicode MS"/>
+              </a:rPr>
+              <a:t>例如照片最左上角的紅格，上面和左邊都沒有格子，綠色就只用右邊和下面那兩個綠格平均；藍色本來要用四個斜角，現在只剩右下角一個，就直接用它。第二種是</a:t>
+            </a:r>
+            <a:r>
+              <a:rPr sz="800" b="1" lang="zh-TW" dirty="0">
+                <a:solidFill>
+                  <a:srgbClr val="000000"/>
+                </a:solidFill>
+                <a:latin typeface="Arial Unicode MS"/>
+                <a:ea typeface="Arial Unicode MS"/>
+                <a:cs typeface="Arial Unicode MS"/>
+              </a:rPr>
+              <a:t>照鏡子</a:t>
+            </a:r>
+            <a:r>
+              <a:rPr sz="800" lang="zh-TW" dirty="0">
+                <a:solidFill>
+                  <a:srgbClr val="000000"/>
+                </a:solidFill>
+                <a:latin typeface="Arial Unicode MS"/>
+                <a:ea typeface="Arial Unicode MS"/>
+                <a:cs typeface="Arial Unicode MS"/>
+              </a:rPr>
+              <a:t>：假裝照片外面還有一圈格子，數字照抄裡面對稱位置的那一格，例如左邊外面那一格，就抄右邊那一格。濾色片的排列是每兩格重複一次，所以照過來的顏色剛好對得上，程式就不必分「邊上」和「中間」兩種算法。在角落那一格，照鏡子算出來的結果和第一種完全一樣；在邊上其他格子，因為裡面那一格被算了兩次，結果會有一點點不同。
 </a:t>
             </a:r>
           </a:p>
@@ -9404,11 +9371,209 @@
                 <a:spcPts val="0"/>
               </a:spcBef>
               <a:spcAft>
-                <a:spcPts val="175"/>
+                <a:spcPts val="133"/>
               </a:spcAft>
             </a:pPr>
             <a:r>
-              <a:rPr sz="1050" b="1" lang="zh-TW" dirty="0">
+              <a:rPr sz="800" lang="zh-TW" dirty="0">
+                <a:solidFill>
+                  <a:srgbClr val="000000"/>
+                </a:solidFill>
+                <a:latin typeface="Arial Unicode MS"/>
+                <a:ea typeface="Arial Unicode MS"/>
+                <a:cs typeface="Arial Unicode MS"/>
+              </a:rPr>
+              <a:t>第三種是真的相機常用的：</a:t>
+            </a:r>
+            <a:r>
+              <a:rPr sz="800" b="1" lang="zh-TW" dirty="0">
+                <a:solidFill>
+                  <a:srgbClr val="000000"/>
+                </a:solidFill>
+                <a:latin typeface="Arial Unicode MS"/>
+                <a:ea typeface="Arial Unicode MS"/>
+                <a:cs typeface="Arial Unicode MS"/>
+              </a:rPr>
+              <a:t>感光晶片本來就做得比照片大一圈。</a:t>
+            </a:r>
+            <a:r>
+              <a:rPr sz="800" lang="zh-TW" dirty="0">
+                <a:solidFill>
+                  <a:srgbClr val="000000"/>
+                </a:solidFill>
+                <a:latin typeface="Arial Unicode MS"/>
+                <a:ea typeface="Arial Unicode MS"/>
+                <a:cs typeface="Arial Unicode MS"/>
+              </a:rPr>
+              <a:t>晶片四周多做幾排像素，用來幫忙補顏色，存檔的照片不包含它們，所以照片最外面那一格，在晶片上旁邊其實還有鄰居。規格表上常會同時寫「總像素」和「有效像素」，兩個數字不一樣，有一部分就是這一圈。第四種最簡單：把最外面一兩圈切掉不要。
+</a:t>
+            </a:r>
+          </a:p>
+          <a:p>
+            <a:pPr algn="l">
+              <a:spcBef>
+                <a:spcPts val="0"/>
+              </a:spcBef>
+              <a:spcAft>
+                <a:spcPts val="133"/>
+              </a:spcAft>
+            </a:pPr>
+            <a:r>
+              <a:rPr sz="800" lang="zh-TW" dirty="0">
+                <a:solidFill>
+                  <a:srgbClr val="000000"/>
+                </a:solidFill>
+                <a:latin typeface="Arial Unicode MS"/>
+                <a:ea typeface="Arial Unicode MS"/>
+                <a:cs typeface="Arial Unicode MS"/>
+              </a:rPr>
+              <a:t>不管用哪一種，受影響的只有最外面一兩圈。一千六乘九百的照片，最外面一圈大約五千個格子，只佔全部的千分之三點五左右，而且照片的邊上常常是車身或天空，對找車、找人幾乎沒有影響。nuScenes 的相機用的是哪一種做法，論文沒有寫。
+</a:t>
+            </a:r>
+          </a:p>
+          <a:p>
+            <a:pPr algn="l">
+              <a:spcBef>
+                <a:spcPts val="0"/>
+              </a:spcBef>
+              <a:spcAft>
+                <a:spcPts val="133"/>
+              </a:spcAft>
+            </a:pPr>
+            <a:r>
+              <a:rPr sz="800" lang="zh-TW" dirty="0">
+                <a:solidFill>
+                  <a:srgbClr val="000000"/>
+                </a:solidFill>
+                <a:latin typeface="Arial Unicode MS"/>
+                <a:ea typeface="Arial Unicode MS"/>
+                <a:cs typeface="Arial Unicode MS"/>
+              </a:rPr>
+              <a:t>最下面兩行，請比一比「算出」和「相機存的」：差了幾個數。原因有兩個。第一，這張圖每格那一個顏色的數字，是我從已經存好的 JPEG 拿回來的，只是示範，不是相機真正量到的原始值。第二，真的相機不會用這麼簡單的平均：它會先看</a:t>
+            </a:r>
+            <a:r>
+              <a:rPr sz="800" b="1" lang="zh-TW" dirty="0">
+                <a:solidFill>
+                  <a:srgbClr val="000000"/>
+                </a:solidFill>
+                <a:latin typeface="Arial Unicode MS"/>
+                <a:ea typeface="Arial Unicode MS"/>
+                <a:cs typeface="Arial Unicode MS"/>
+              </a:rPr>
+              <a:t>上下差得多、還是左右差得多</a:t>
+            </a:r>
+            <a:r>
+              <a:rPr sz="800" lang="zh-TW" dirty="0">
+                <a:solidFill>
+                  <a:srgbClr val="000000"/>
+                </a:solidFill>
+                <a:latin typeface="Arial Unicode MS"/>
+                <a:ea typeface="Arial Unicode MS"/>
+                <a:cs typeface="Arial Unicode MS"/>
+              </a:rPr>
+              <a:t>，順著變化比較小的方向去平均，以免把邊緣兩邊的顏色混在一起；補完以後，還要調</a:t>
+            </a:r>
+            <a:r>
+              <a:rPr sz="800" b="1" lang="zh-TW" dirty="0">
+                <a:solidFill>
+                  <a:srgbClr val="000000"/>
+                </a:solidFill>
+                <a:latin typeface="Arial Unicode MS"/>
+                <a:ea typeface="Arial Unicode MS"/>
+                <a:cs typeface="Arial Unicode MS"/>
+              </a:rPr>
+              <a:t>白平衡</a:t>
+            </a:r>
+            <a:r>
+              <a:rPr sz="800" lang="zh-TW" dirty="0">
+                <a:solidFill>
+                  <a:srgbClr val="000000"/>
+                </a:solidFill>
+                <a:latin typeface="Arial Unicode MS"/>
+                <a:ea typeface="Arial Unicode MS"/>
+                <a:cs typeface="Arial Unicode MS"/>
+              </a:rPr>
+              <a:t>（讓白色看起來是白的）、調顏色、調亮度曲線，最後壓縮成 JPEG。每一家相機的做法都不一樣，而且多半不公開。
+</a:t>
+            </a:r>
+          </a:p>
+          <a:p>
+            <a:pPr algn="l">
+              <a:spcBef>
+                <a:spcPts val="0"/>
+              </a:spcBef>
+              <a:spcAft>
+                <a:spcPts val="133"/>
+              </a:spcAft>
+            </a:pPr>
+            <a:r>
+              <a:rPr sz="800" lang="zh-TW" dirty="0">
+                <a:solidFill>
+                  <a:srgbClr val="000000"/>
+                </a:solidFill>
+                <a:latin typeface="Arial Unicode MS"/>
+                <a:ea typeface="Arial Unicode MS"/>
+                <a:cs typeface="Arial Unicode MS"/>
+              </a:rPr>
+              <a:t>最簡單的平均有一個毛病：碰到</a:t>
+            </a:r>
+            <a:r>
+              <a:rPr sz="800" b="1" lang="zh-TW" dirty="0">
+                <a:solidFill>
+                  <a:srgbClr val="000000"/>
+                </a:solidFill>
+                <a:latin typeface="Arial Unicode MS"/>
+                <a:ea typeface="Arial Unicode MS"/>
+                <a:cs typeface="Arial Unicode MS"/>
+              </a:rPr>
+              <a:t>邊緣</a:t>
+            </a:r>
+            <a:r>
+              <a:rPr sz="800" lang="zh-TW" dirty="0">
+                <a:solidFill>
+                  <a:srgbClr val="000000"/>
+                </a:solidFill>
+                <a:latin typeface="Arial Unicode MS"/>
+                <a:ea typeface="Arial Unicode MS"/>
+                <a:cs typeface="Arial Unicode MS"/>
+              </a:rPr>
+              <a:t>，例如白色斑馬線旁邊就是黑色柏油，平均的時候會把兩邊混在一起，邊緣就冒出一圈原本沒有的顏色，叫做</a:t>
+            </a:r>
+            <a:r>
+              <a:rPr sz="800" b="1" lang="zh-TW" dirty="0">
+                <a:solidFill>
+                  <a:srgbClr val="000000"/>
+                </a:solidFill>
+                <a:latin typeface="Arial Unicode MS"/>
+                <a:ea typeface="Arial Unicode MS"/>
+                <a:cs typeface="Arial Unicode MS"/>
+              </a:rPr>
+              <a:t>假色</a:t>
+            </a:r>
+            <a:r>
+              <a:rPr sz="800" lang="zh-TW" dirty="0">
+                <a:solidFill>
+                  <a:srgbClr val="000000"/>
+                </a:solidFill>
+                <a:latin typeface="Arial Unicode MS"/>
+                <a:ea typeface="Arial Unicode MS"/>
+                <a:cs typeface="Arial Unicode MS"/>
+              </a:rPr>
+              <a:t>。這就是上一張講的，紅和藍格子比較少的代價。
+</a:t>
+            </a:r>
+          </a:p>
+          <a:p>
+            <a:pPr algn="l">
+              <a:spcBef>
+                <a:spcPts val="0"/>
+              </a:spcBef>
+              <a:spcAft>
+                <a:spcPts val="133"/>
+              </a:spcAft>
+            </a:pPr>
+            <a:r>
+              <a:rPr sz="800" b="1" lang="zh-TW" dirty="0">
                 <a:solidFill>
                   <a:srgbClr val="000000"/>
                 </a:solidFill>
@@ -9419,7 +9584,7 @@
               <a:t>影片（同一支 Computerphile）：從 3:02 播到 5:46。</a:t>
             </a:r>
             <a:r>
-              <a:rPr sz="1050" lang="zh-TW" dirty="0">
+              <a:rPr sz="800" lang="zh-TW" dirty="0">
                 <a:solidFill>
                   <a:srgbClr val="000000"/>
                 </a:solidFill>

--- a/第八週(10-29)/第八週_第1節_簡報.pptx
+++ b/第八週(10-29)/第八週_第1節_簡報.pptx
@@ -3035,11 +3035,11 @@
                 <a:spcPts val="0"/>
               </a:spcBef>
               <a:spcAft>
-                <a:spcPts val="150"/>
+                <a:spcPts val="133"/>
               </a:spcAft>
             </a:pPr>
             <a:r>
-              <a:rPr sz="900" b="1" lang="zh-TW" dirty="0">
+              <a:rPr sz="800" b="1" lang="zh-TW" dirty="0">
                 <a:solidFill>
                   <a:srgbClr val="000000"/>
                 </a:solidFill>
@@ -3050,7 +3050,7 @@
               <a:t>這一張的目的：</a:t>
             </a:r>
             <a:r>
-              <a:rPr sz="900" lang="zh-TW" dirty="0">
+              <a:rPr sz="800" lang="zh-TW" dirty="0">
                 <a:solidFill>
                   <a:srgbClr val="000000"/>
                 </a:solidFill>
@@ -3068,11 +3068,11 @@
                 <a:spcPts val="0"/>
               </a:spcBef>
               <a:spcAft>
-                <a:spcPts val="150"/>
+                <a:spcPts val="133"/>
               </a:spcAft>
             </a:pPr>
             <a:r>
-              <a:rPr sz="900" lang="zh-TW" dirty="0">
+              <a:rPr sz="800" lang="zh-TW" dirty="0">
                 <a:solidFill>
                   <a:srgbClr val="000000"/>
                 </a:solidFill>
@@ -3083,7 +3083,7 @@
               <a:t>前兩張看的是第一層的濾鏡，和它們各自的反應。這一張把斑馬線那張照片送進去，看</a:t>
             </a:r>
             <a:r>
-              <a:rPr sz="900" b="1" lang="zh-TW" dirty="0">
+              <a:rPr sz="800" b="1" lang="zh-TW" dirty="0">
                 <a:solidFill>
                   <a:srgbClr val="000000"/>
                 </a:solidFill>
@@ -3094,7 +3094,7 @@
               <a:t>再往後的層真的算出來的結果</a:t>
             </a:r>
             <a:r>
-              <a:rPr sz="900" lang="zh-TW" dirty="0">
+              <a:rPr sz="800" lang="zh-TW" dirty="0">
                 <a:solidFill>
                   <a:srgbClr val="000000"/>
                 </a:solidFill>
@@ -3112,11 +3112,11 @@
                 <a:spcPts val="0"/>
               </a:spcBef>
               <a:spcAft>
-                <a:spcPts val="150"/>
+                <a:spcPts val="133"/>
               </a:spcAft>
             </a:pPr>
             <a:r>
-              <a:rPr sz="900" b="1" lang="zh-TW" dirty="0">
+              <a:rPr sz="800" b="1" lang="zh-TW" dirty="0">
                 <a:solidFill>
                   <a:srgbClr val="000000"/>
                 </a:solidFill>
@@ -3127,7 +3127,7 @@
               <a:t>最左邊</a:t>
             </a:r>
             <a:r>
-              <a:rPr sz="900" lang="zh-TW" dirty="0">
+              <a:rPr sz="800" lang="zh-TW" dirty="0">
                 <a:solidFill>
                   <a:srgbClr val="000000"/>
                 </a:solidFill>
@@ -3145,11 +3145,11 @@
                 <a:spcPts val="0"/>
               </a:spcBef>
               <a:spcAft>
-                <a:spcPts val="150"/>
+                <a:spcPts val="133"/>
               </a:spcAft>
             </a:pPr>
             <a:r>
-              <a:rPr sz="900" b="1" lang="zh-TW" dirty="0">
+              <a:rPr sz="800" b="1" lang="zh-TW" dirty="0">
                 <a:solidFill>
                   <a:srgbClr val="000000"/>
                 </a:solidFill>
@@ -3160,7 +3160,7 @@
               <a:t>第 1 層</a:t>
             </a:r>
             <a:r>
-              <a:rPr sz="900" lang="zh-TW" dirty="0">
+              <a:rPr sz="800" lang="zh-TW" dirty="0">
                 <a:solidFill>
                   <a:srgbClr val="000000"/>
                 </a:solidFill>
@@ -3178,11 +3178,11 @@
                 <a:spcPts val="0"/>
               </a:spcBef>
               <a:spcAft>
-                <a:spcPts val="150"/>
+                <a:spcPts val="133"/>
               </a:spcAft>
             </a:pPr>
             <a:r>
-              <a:rPr sz="900" lang="zh-TW" dirty="0">
+              <a:rPr sz="800" lang="zh-TW" dirty="0">
                 <a:solidFill>
                   <a:srgbClr val="000000"/>
                 </a:solidFill>
@@ -3193,7 +3193,7 @@
               <a:t>那後面的層看什麼？</a:t>
             </a:r>
             <a:r>
-              <a:rPr sz="900" b="1" lang="zh-TW" dirty="0">
+              <a:rPr sz="800" b="1" lang="zh-TW" dirty="0">
                 <a:solidFill>
                   <a:srgbClr val="000000"/>
                 </a:solidFill>
@@ -3204,7 +3204,7 @@
               <a:t>從第 2 層開始，看的就不是照片了，而是前一層交出來的那一疊地圖。</a:t>
             </a:r>
             <a:r>
-              <a:rPr sz="900" lang="zh-TW" dirty="0">
+              <a:rPr sz="800" lang="zh-TW" dirty="0">
                 <a:solidFill>
                   <a:srgbClr val="000000"/>
                 </a:solidFill>
@@ -3215,7 +3215,7 @@
               <a:t>第 1 層有 32 個濾鏡，就交出 32 張「哪裡有這種筆畫」的地圖。第 2 層的每一個濾鏡，同時看這 32 張地圖的同一小塊，問的是</a:t>
             </a:r>
             <a:r>
-              <a:rPr sz="900" b="1" lang="zh-TW" dirty="0">
+              <a:rPr sz="800" b="1" lang="zh-TW" dirty="0">
                 <a:solidFill>
                   <a:srgbClr val="000000"/>
                 </a:solidFill>
@@ -3226,7 +3226,7 @@
               <a:t>組合題</a:t>
             </a:r>
             <a:r>
-              <a:rPr sz="900" lang="zh-TW" dirty="0">
+              <a:rPr sz="800" lang="zh-TW" dirty="0">
                 <a:solidFill>
                   <a:srgbClr val="000000"/>
                 </a:solidFill>
@@ -3244,11 +3244,11 @@
                 <a:spcPts val="0"/>
               </a:spcBef>
               <a:spcAft>
-                <a:spcPts val="150"/>
+                <a:spcPts val="133"/>
               </a:spcAft>
             </a:pPr>
             <a:r>
-              <a:rPr sz="900" lang="zh-TW" dirty="0">
+              <a:rPr sz="800" lang="zh-TW" dirty="0">
                 <a:solidFill>
                   <a:srgbClr val="000000"/>
                 </a:solidFill>
@@ -3266,11 +3266,11 @@
                 <a:spcPts val="0"/>
               </a:spcBef>
               <a:spcAft>
-                <a:spcPts val="150"/>
+                <a:spcPts val="133"/>
               </a:spcAft>
             </a:pPr>
             <a:r>
-              <a:rPr sz="900" b="1" lang="zh-TW" dirty="0">
+              <a:rPr sz="800" b="1" lang="zh-TW" dirty="0">
                 <a:solidFill>
                   <a:srgbClr val="000000"/>
                 </a:solidFill>
@@ -3281,7 +3281,7 @@
               <a:t>第 6 層</a:t>
             </a:r>
             <a:r>
-              <a:rPr sz="900" lang="zh-TW" dirty="0">
+              <a:rPr sz="800" lang="zh-TW" dirty="0">
                 <a:solidFill>
                   <a:srgbClr val="000000"/>
                 </a:solidFill>
@@ -3299,11 +3299,11 @@
                 <a:spcPts val="0"/>
               </a:spcBef>
               <a:spcAft>
-                <a:spcPts val="150"/>
+                <a:spcPts val="133"/>
               </a:spcAft>
             </a:pPr>
             <a:r>
-              <a:rPr sz="900" b="1" lang="zh-TW" dirty="0">
+              <a:rPr sz="800" b="1" lang="zh-TW" dirty="0">
                 <a:solidFill>
                   <a:srgbClr val="000000"/>
                 </a:solidFill>
@@ -3314,7 +3314,7 @@
               <a:t>第 49 層</a:t>
             </a:r>
             <a:r>
-              <a:rPr sz="900" lang="zh-TW" dirty="0">
+              <a:rPr sz="800" lang="zh-TW" dirty="0">
                 <a:solidFill>
                   <a:srgbClr val="000000"/>
                 </a:solidFill>
@@ -3325,7 +3325,7 @@
               <a:t>：畫面變成一格一格的大方塊。可是請看，</a:t>
             </a:r>
             <a:r>
-              <a:rPr sz="900" b="1" lang="zh-TW" dirty="0">
+              <a:rPr sz="800" b="1" lang="zh-TW" dirty="0">
                 <a:solidFill>
                   <a:srgbClr val="000000"/>
                 </a:solidFill>
@@ -3336,7 +3336,7 @@
               <a:t>斑馬線上那幾個行人的位置亮起來</a:t>
             </a:r>
             <a:r>
-              <a:rPr sz="900" lang="zh-TW" dirty="0">
+              <a:rPr sz="800" lang="zh-TW" dirty="0">
                 <a:solidFill>
                   <a:srgbClr val="000000"/>
                 </a:solidFill>
@@ -3354,11 +3354,11 @@
                 <a:spcPts val="0"/>
               </a:spcBef>
               <a:spcAft>
-                <a:spcPts val="150"/>
+                <a:spcPts val="133"/>
               </a:spcAft>
             </a:pPr>
             <a:r>
-              <a:rPr sz="900" lang="zh-TW" dirty="0">
+              <a:rPr sz="800" lang="zh-TW" dirty="0">
                 <a:solidFill>
                   <a:srgbClr val="000000"/>
                 </a:solidFill>
@@ -3369,7 +3369,7 @@
               <a:t>所以「一層一層」不是比喻，是真的：</a:t>
             </a:r>
             <a:r>
-              <a:rPr sz="900" b="1" lang="zh-TW" dirty="0">
+              <a:rPr sz="800" b="1" lang="zh-TW" dirty="0">
                 <a:solidFill>
                   <a:srgbClr val="000000"/>
                 </a:solidFill>
@@ -3380,7 +3380,7 @@
               <a:t>前面的層看簡單的東西，後面的層把前面的結果組起來，看愈來愈完整的東西。</a:t>
             </a:r>
             <a:r>
-              <a:rPr sz="900" lang="zh-TW" dirty="0">
+              <a:rPr sz="800" lang="zh-TW" dirty="0">
                 <a:solidFill>
                   <a:srgbClr val="000000"/>
                 </a:solidFill>
@@ -3398,19 +3398,19 @@
                 <a:spcPts val="0"/>
               </a:spcBef>
               <a:spcAft>
-                <a:spcPts val="150"/>
+                <a:spcPts val="133"/>
               </a:spcAft>
             </a:pPr>
             <a:r>
-              <a:rPr sz="900" lang="zh-TW" dirty="0">
-                <a:solidFill>
-                  <a:srgbClr val="000000"/>
-                </a:solidFill>
-                <a:latin typeface="Arial Unicode MS"/>
-                <a:ea typeface="Arial Unicode MS"/>
-                <a:cs typeface="Arial Unicode MS"/>
-              </a:rPr>
-              <a:t>要說明一下怎麼挑的：每一層有幾十到一百多個通道，每個通道各看一種東西，不可能全部放上來。第 1 層，我從 32 個通道裡挑變化最大的一個；第 6 層和第 49 層，我分別從 64 個和 128 個通道裡，挑「在行人身上比背景亮最多」的那一個。所以這一頁是刻意挑出來看「人」的。模型本身會找八十種東西，同一層的其他通道，有的看車、有的看路。
+              <a:rPr sz="800" lang="zh-TW" dirty="0">
+                <a:solidFill>
+                  <a:srgbClr val="000000"/>
+                </a:solidFill>
+                <a:latin typeface="Arial Unicode MS"/>
+                <a:ea typeface="Arial Unicode MS"/>
+                <a:cs typeface="Arial Unicode MS"/>
+              </a:rPr>
+              <a:t>要說明一下怎麼挑的：每一層有幾十到一百多個通道，每個通道各看一種東西，不可能全部放上來。第 1 層，我從 32 個通道裡挑變化最大的一個；第 6 層和第 49 層，我分別從 64 個和 128 個通道裡，挑「在行人身上比背景亮最多」的那一個。所以這一頁是刻意挑出來看「人」的。
 </a:t>
             </a:r>
           </a:p>
@@ -3420,11 +3420,77 @@
                 <a:spcPts val="0"/>
               </a:spcBef>
               <a:spcAft>
-                <a:spcPts val="150"/>
+                <a:spcPts val="133"/>
               </a:spcAft>
             </a:pPr>
             <a:r>
-              <a:rPr sz="900" b="1" lang="zh-TW" dirty="0">
+              <a:rPr sz="800" lang="zh-TW" dirty="0">
+                <a:solidFill>
+                  <a:srgbClr val="000000"/>
+                </a:solidFill>
+                <a:latin typeface="Arial Unicode MS"/>
+                <a:ea typeface="Arial Unicode MS"/>
+                <a:cs typeface="Arial Unicode MS"/>
+              </a:rPr>
+              <a:t>請注意，</a:t>
+            </a:r>
+            <a:r>
+              <a:rPr sz="800" b="1" lang="zh-TW" dirty="0">
+                <a:solidFill>
+                  <a:srgbClr val="000000"/>
+                </a:solidFill>
+                <a:latin typeface="Arial Unicode MS"/>
+                <a:ea typeface="Arial Unicode MS"/>
+                <a:cs typeface="Arial Unicode MS"/>
+              </a:rPr>
+              <a:t>「只有人亮」不是因為我設定模型只找人。</a:t>
+            </a:r>
+            <a:r>
+              <a:rPr sz="800" lang="zh-TW" dirty="0">
+                <a:solidFill>
+                  <a:srgbClr val="000000"/>
+                </a:solidFill>
+                <a:latin typeface="Arial Unicode MS"/>
+                <a:ea typeface="Arial Unicode MS"/>
+                <a:cs typeface="Arial Unicode MS"/>
+              </a:rPr>
+              <a:t>這個模型是用一套叫 COCO 的照片集訓練的，學了八十種東西，跑一張照片就同時找全部八十種，下一張就會看到，同一張照片裡也框出了車和卡車。只有人亮，是因為我從 128 個通道裡，挑了專門對人有反應的那一個；換一個通道，畫面就完全不一樣。這個看人的通道也不是人設定的，是訓練的時候，在「猜、對答案、改一點點」的過程中自己長出來的：COCO 的照片裡，人是最常出現的東西，有一個專門對人有反應的通道，最能讓錯誤變少。
+</a:t>
+            </a:r>
+          </a:p>
+          <a:p>
+            <a:pPr algn="l">
+              <a:spcBef>
+                <a:spcPts val="0"/>
+              </a:spcBef>
+              <a:spcAft>
+                <a:spcPts val="133"/>
+              </a:spcAft>
+            </a:pPr>
+            <a:r>
+              <a:rPr sz="800" lang="zh-TW" dirty="0">
+                <a:solidFill>
+                  <a:srgbClr val="000000"/>
+                </a:solidFill>
+                <a:latin typeface="Arial Unicode MS"/>
+                <a:ea typeface="Arial Unicode MS"/>
+                <a:cs typeface="Arial Unicode MS"/>
+              </a:rPr>
+              <a:t>那其他通道在看什麼？每個通道各自看不同的東西。我也試著找一個只對車亮的通道，在這張照片裡沒有找到：對車反應最強的通道，對人或背景也差不多亮。模型最後確實把那台車框出來了，可是它在中間的層怎麼表示「車」，從單一個通道看不出來。
+</a:t>
+            </a:r>
+          </a:p>
+          <a:p>
+            <a:pPr algn="l">
+              <a:spcBef>
+                <a:spcPts val="0"/>
+              </a:spcBef>
+              <a:spcAft>
+                <a:spcPts val="133"/>
+              </a:spcAft>
+            </a:pPr>
+            <a:r>
+              <a:rPr sz="800" b="1" lang="zh-TW" dirty="0">
                 <a:solidFill>
                   <a:srgbClr val="000000"/>
                 </a:solidFill>
@@ -3435,7 +3501,7 @@
               <a:t>影片（3Blue1Brown 第一集，英文）：從 5:32 播到 8:39。</a:t>
             </a:r>
             <a:r>
-              <a:rPr sz="900" lang="zh-TW" dirty="0">
+              <a:rPr sz="800" lang="zh-TW" dirty="0">
                 <a:solidFill>
                   <a:srgbClr val="000000"/>
                 </a:solidFill>
@@ -5851,11 +5917,11 @@
                 <a:spcPts val="0"/>
               </a:spcBef>
               <a:spcAft>
-                <a:spcPts val="225"/>
+                <a:spcPts val="208"/>
               </a:spcAft>
             </a:pPr>
             <a:r>
-              <a:rPr sz="1350" b="1" lang="zh-TW" dirty="0">
+              <a:rPr sz="1250" b="1" lang="zh-TW" dirty="0">
                 <a:solidFill>
                   <a:srgbClr val="000000"/>
                 </a:solidFill>
@@ -5866,7 +5932,7 @@
               <a:t>這一張的目的：</a:t>
             </a:r>
             <a:r>
-              <a:rPr sz="1350" lang="zh-TW" dirty="0">
+              <a:rPr sz="1250" lang="zh-TW" dirty="0">
                 <a:solidFill>
                   <a:srgbClr val="000000"/>
                 </a:solidFill>
@@ -5884,11 +5950,11 @@
                 <a:spcPts val="0"/>
               </a:spcBef>
               <a:spcAft>
-                <a:spcPts val="225"/>
+                <a:spcPts val="208"/>
               </a:spcAft>
             </a:pPr>
             <a:r>
-              <a:rPr sz="1350" lang="zh-TW" dirty="0">
+              <a:rPr sz="1250" lang="zh-TW" dirty="0">
                 <a:solidFill>
                   <a:srgbClr val="000000"/>
                 </a:solidFill>
@@ -5899,7 +5965,7 @@
               <a:t>這一張是晚上，新加坡，剛下過雨。框是模型抓到的，</a:t>
             </a:r>
             <a:r>
-              <a:rPr sz="1350" b="1" lang="zh-TW" dirty="0">
+              <a:rPr sz="1250" b="1" lang="zh-TW" dirty="0">
                 <a:solidFill>
                   <a:srgbClr val="000000"/>
                 </a:solidFill>
@@ -5910,7 +5976,7 @@
               <a:t>白色虛線</a:t>
             </a:r>
             <a:r>
-              <a:rPr sz="1350" lang="zh-TW" dirty="0">
+              <a:rPr sz="1250" lang="zh-TW" dirty="0">
                 <a:solidFill>
                   <a:srgbClr val="000000"/>
                 </a:solidFill>
@@ -5928,11 +5994,11 @@
                 <a:spcPts val="0"/>
               </a:spcBef>
               <a:spcAft>
-                <a:spcPts val="225"/>
+                <a:spcPts val="208"/>
               </a:spcAft>
             </a:pPr>
             <a:r>
-              <a:rPr sz="1350" lang="zh-TW" dirty="0">
+              <a:rPr sz="1250" lang="zh-TW" dirty="0">
                 <a:solidFill>
                   <a:srgbClr val="000000"/>
                 </a:solidFill>
@@ -5950,11 +6016,11 @@
                 <a:spcPts val="0"/>
               </a:spcBef>
               <a:spcAft>
-                <a:spcPts val="225"/>
+                <a:spcPts val="208"/>
               </a:spcAft>
             </a:pPr>
             <a:r>
-              <a:rPr sz="1350" lang="zh-TW" dirty="0">
+              <a:rPr sz="1250" lang="zh-TW" dirty="0">
                 <a:solidFill>
                   <a:srgbClr val="000000"/>
                 </a:solidFill>
@@ -5972,11 +6038,11 @@
                 <a:spcPts val="0"/>
               </a:spcBef>
               <a:spcAft>
-                <a:spcPts val="225"/>
+                <a:spcPts val="208"/>
               </a:spcAft>
             </a:pPr>
             <a:r>
-              <a:rPr sz="1350" lang="zh-TW" dirty="0">
+              <a:rPr sz="1250" lang="zh-TW" dirty="0">
                 <a:solidFill>
                   <a:srgbClr val="000000"/>
                 </a:solidFill>
@@ -5994,11 +6060,11 @@
                 <a:spcPts val="0"/>
               </a:spcBef>
               <a:spcAft>
-                <a:spcPts val="225"/>
+                <a:spcPts val="208"/>
               </a:spcAft>
             </a:pPr>
             <a:r>
-              <a:rPr sz="1350" lang="zh-TW" dirty="0">
+              <a:rPr sz="1250" lang="zh-TW" dirty="0">
                 <a:solidFill>
                   <a:srgbClr val="000000"/>
                 </a:solidFill>
@@ -6016,11 +6082,11 @@
                 <a:spcPts val="0"/>
               </a:spcBef>
               <a:spcAft>
-                <a:spcPts val="225"/>
+                <a:spcPts val="208"/>
               </a:spcAft>
             </a:pPr>
             <a:r>
-              <a:rPr sz="1350" b="1" lang="zh-TW" dirty="0">
+              <a:rPr sz="1250" b="1" lang="zh-TW" dirty="0">
                 <a:solidFill>
                   <a:srgbClr val="000000"/>
                 </a:solidFill>
@@ -6031,7 +6097,7 @@
               <a:t>影片（NVIDIA DRIVE Labs 第 19 集，英文，1 分 51 秒，整支播）：</a:t>
             </a:r>
             <a:r>
-              <a:rPr sz="1350" lang="zh-TW" dirty="0">
+              <a:rPr sz="1250" lang="zh-TW" dirty="0">
                 <a:solidFill>
                   <a:srgbClr val="000000"/>
                 </a:solidFill>
@@ -6042,7 +6108,7 @@
               <a:t>主題剛好是「晚上偵測行人」。0:16 到 0:47 的熱度圖，是幾個模型對「這裡有沒有人」意見不一致的地方，紅色最不確定，例如撐傘的人；他們把這些最沒把握的畫面挑出來，請人標好，再加進訓練資料，這叫</a:t>
             </a:r>
             <a:r>
-              <a:rPr sz="1350" b="1" lang="zh-TW" dirty="0">
+              <a:rPr sz="1250" b="1" lang="zh-TW" dirty="0">
                 <a:solidFill>
                   <a:srgbClr val="000000"/>
                 </a:solidFill>
@@ -6053,15 +6119,37 @@
               <a:t>主動學習</a:t>
             </a:r>
             <a:r>
-              <a:rPr sz="1350" lang="zh-TW" dirty="0">
-                <a:solidFill>
-                  <a:srgbClr val="000000"/>
-                </a:solidFill>
-                <a:latin typeface="Arial Unicode MS"/>
-                <a:ea typeface="Arial Unicode MS"/>
-                <a:cs typeface="Arial Unicode MS"/>
-              </a:rPr>
-              <a:t>。0:48 之後左右對照：左邊是人工挑資料訓練的模型，右邊是主動學習訓練的；鏡頭上一滴雨，左邊撐傘的人就不見了，右邊還在（0:58）；左邊把一張卡通人像當成行人，右邊沒有（1:13）；最後一段，右邊在很暗的地方同時抓到機車和騎士（1:26）。這也接到第二節：要標哪些照片，也是一門學問。</a:t>
+              <a:rPr sz="1250" lang="zh-TW" dirty="0">
+                <a:solidFill>
+                  <a:srgbClr val="000000"/>
+                </a:solidFill>
+                <a:latin typeface="Arial Unicode MS"/>
+                <a:ea typeface="Arial Unicode MS"/>
+                <a:cs typeface="Arial Unicode MS"/>
+              </a:rPr>
+              <a:t>。0:48 之後左右對照：左邊是人工挑資料訓練的模型，右邊是主動學習訓練的；鏡頭上一滴雨，左邊撐傘的人就不見了，右邊還在（0:58）；左邊把一張卡通人像當成行人，右邊沒有（1:13）；最後一段，右邊在很暗的地方同時抓到機車和騎士（1:26）。要注意，主動學習不是另一種學法。模型還是用</a:t>
+            </a:r>
+            <a:r>
+              <a:rPr sz="1250" b="1" lang="zh-TW" dirty="0">
+                <a:solidFill>
+                  <a:srgbClr val="000000"/>
+                </a:solidFill>
+                <a:latin typeface="Arial Unicode MS"/>
+                <a:ea typeface="Arial Unicode MS"/>
+                <a:cs typeface="Arial Unicode MS"/>
+              </a:rPr>
+              <a:t>監督式學習</a:t>
+            </a:r>
+            <a:r>
+              <a:rPr sz="1250" lang="zh-TW" dirty="0">
+                <a:solidFill>
+                  <a:srgbClr val="000000"/>
+                </a:solidFill>
+                <a:latin typeface="Arial Unicode MS"/>
+                <a:ea typeface="Arial Unicode MS"/>
+                <a:cs typeface="Arial Unicode MS"/>
+              </a:rPr>
+              <a:t>在學，也就是第 10 張講的，從有標準答案的例子學：猜、對答案、改一點點。主動學習管的是前面那一步：標註很花錢、很花時間，所以讓模型自己指出它最沒把握的照片，優先請人標，不要一直標它已經會的。就像準備考試，挑自己最不會的題目來寫，比一直寫已經會的題目有效。這也接到第二節：要標哪些照片，也是一門學問。</a:t>
             </a:r>
           </a:p>
         </p:txBody>
@@ -6325,7 +6413,7 @@
                 <a:ea typeface="Arial Unicode MS"/>
                 <a:cs typeface="Arial Unicode MS"/>
               </a:rPr>
-              <a:t>可是框裡的點，不一定全部打在那個人身上。框是長方形，人不是，框的角落會有背後的路面、遠處的建築。所以我的算法是：框裡的點，找出</a:t>
+              <a:t>可是框裡的點，不一定全部打在那個人身上。框是長方形，人不是，框的角落會有背後的路面、遠處的建築。所以我的做法是：框裡的點，找出</a:t>
             </a:r>
             <a:r>
               <a:rPr sz="1500" b="1" lang="zh-TW" dirty="0">
@@ -8382,7 +8470,7 @@
                 <a:ea typeface="Arial Unicode MS"/>
                 <a:cs typeface="Arial Unicode MS"/>
               </a:rPr>
-              <a:t>，我們看到的「亮暗和細節」，大部分來自綠色。把一張彩色照片換成黑白時，常用的算法裡綠色就佔了將近六成（紅 0.30、綠 0.59、藍 0.11），左邊第一格就是這樣算的，算完四捨五入到整數。所以多放一倍的綠，照片的</a:t>
+              <a:t>，我們看到的「亮暗和細節」，大部分來自綠色。把一張彩色照片換成黑白時，常用的公式裡綠色就佔了將近六成（紅 0.30、綠 0.59、藍 0.11），左邊第一格就是這樣算的，算完四捨五入到整數。所以多放一倍的綠，照片的</a:t>
             </a:r>
             <a:r>
               <a:rPr sz="850" b="1" lang="zh-TW" dirty="0">
@@ -9361,7 +9449,7 @@
                 <a:ea typeface="Arial Unicode MS"/>
                 <a:cs typeface="Arial Unicode MS"/>
               </a:rPr>
-              <a:t>：假裝照片外面還有一圈格子，數字照抄裡面對稱位置的那一格，例如左邊外面那一格，就抄右邊那一格。濾色片的排列是每兩格重複一次，所以照過來的顏色剛好對得上，程式就不必分「邊上」和「中間」兩種算法。在角落那一格，照鏡子算出來的結果和第一種完全一樣；在邊上其他格子，因為裡面那一格被算了兩次，結果會有一點點不同。
+              <a:t>：假裝照片外面還有一圈格子，數字照抄裡面對稱位置的那一格，例如左邊外面那一格，就抄右邊那一格。濾色片的排列是每兩格重複一次，所以照過來的顏色剛好對得上，程式就不必分「邊上」和「中間」兩種算的方式。在角落那一格，照鏡子算出來的結果和第一種完全一樣；在邊上其他格子，因為裡面那一格被算了兩次，結果會有一點點不同。
 </a:t>
             </a:r>
           </a:p>
@@ -26581,7 +26669,7 @@
                 <a:ea typeface="Arial" pitchFamily="34" charset="-122"/>
                 <a:cs typeface="Arial" pitchFamily="34" charset="-120"/>
               </a:rPr>
-              <a:t>同一塊 8×8 像素裡的三格 · 每格只有一種顏色的數字取自 JPEG（示意）· 最簡單的「鄰居平均」算法 · nuScenes scene-0553 · CC BY-NC-SA 4.0</a:t>
+              <a:t>同一塊 8×8 像素裡的三格 · 每格只有一種顏色的數字取自 JPEG（示意）· 最簡單的「鄰居平均」做法 · nuScenes scene-0553 · CC BY-NC-SA 4.0</a:t>
             </a:r>
             <a:endParaRPr lang="en-US" sz="850" dirty="0"/>
           </a:p>

--- a/第八週(10-29)/第八週_第1節_簡報.pptx
+++ b/第八週(10-29)/第八週_第1節_簡報.pptx
@@ -5147,11 +5147,11 @@
                 <a:spcPts val="0"/>
               </a:spcBef>
               <a:spcAft>
-                <a:spcPts val="233"/>
+                <a:spcPts val="200"/>
               </a:spcAft>
             </a:pPr>
             <a:r>
-              <a:rPr sz="1400" b="1" lang="zh-TW" dirty="0">
+              <a:rPr sz="1200" b="1" lang="zh-TW" dirty="0">
                 <a:solidFill>
                   <a:srgbClr val="000000"/>
                 </a:solidFill>
@@ -5162,7 +5162,7 @@
               <a:t>這一張的目的：</a:t>
             </a:r>
             <a:r>
-              <a:rPr sz="1400" lang="zh-TW" dirty="0">
+              <a:rPr sz="1200" lang="zh-TW" dirty="0">
                 <a:solidFill>
                   <a:srgbClr val="000000"/>
                 </a:solidFill>
@@ -5180,11 +5180,11 @@
                 <a:spcPts val="0"/>
               </a:spcBef>
               <a:spcAft>
-                <a:spcPts val="233"/>
+                <a:spcPts val="200"/>
               </a:spcAft>
             </a:pPr>
             <a:r>
-              <a:rPr sz="1400" lang="zh-TW" dirty="0">
+              <a:rPr sz="1200" lang="zh-TW" dirty="0">
                 <a:solidFill>
                   <a:srgbClr val="000000"/>
                 </a:solidFill>
@@ -5202,11 +5202,11 @@
                 <a:spcPts val="0"/>
               </a:spcBef>
               <a:spcAft>
-                <a:spcPts val="233"/>
+                <a:spcPts val="200"/>
               </a:spcAft>
             </a:pPr>
             <a:r>
-              <a:rPr sz="1400" b="1" lang="zh-TW" dirty="0">
+              <a:rPr sz="1200" b="1" lang="zh-TW" dirty="0">
                 <a:solidFill>
                   <a:srgbClr val="000000"/>
                 </a:solidFill>
@@ -5217,7 +5217,7 @@
               <a:t>綠色是車</a:t>
             </a:r>
             <a:r>
-              <a:rPr sz="1400" lang="zh-TW" dirty="0">
+              <a:rPr sz="1200" lang="zh-TW" dirty="0">
                 <a:solidFill>
                   <a:srgbClr val="000000"/>
                 </a:solidFill>
@@ -5235,11 +5235,11 @@
                 <a:spcPts val="0"/>
               </a:spcBef>
               <a:spcAft>
-                <a:spcPts val="233"/>
+                <a:spcPts val="200"/>
               </a:spcAft>
             </a:pPr>
             <a:r>
-              <a:rPr sz="1400" b="1" lang="zh-TW" dirty="0">
+              <a:rPr sz="1200" b="1" lang="zh-TW" dirty="0">
                 <a:solidFill>
                   <a:srgbClr val="000000"/>
                 </a:solidFill>
@@ -5250,7 +5250,7 @@
               <a:t>紅色是行人</a:t>
             </a:r>
             <a:r>
-              <a:rPr sz="1400" lang="zh-TW" dirty="0">
+              <a:rPr sz="1200" lang="zh-TW" dirty="0">
                 <a:solidFill>
                   <a:srgbClr val="000000"/>
                 </a:solidFill>
@@ -5261,7 +5261,7 @@
               <a:t>：十公尺內 82%，然後一路往下：66%、60%、37%，到四十到五十公尺，</a:t>
             </a:r>
             <a:r>
-              <a:rPr sz="1400" b="1" lang="zh-TW" dirty="0">
+              <a:rPr sz="1200" b="1" lang="zh-TW" dirty="0">
                 <a:solidFill>
                   <a:srgbClr val="000000"/>
                 </a:solidFill>
@@ -5272,7 +5272,7 @@
               <a:t>只剩 3%</a:t>
             </a:r>
             <a:r>
-              <a:rPr sz="1400" lang="zh-TW" dirty="0">
+              <a:rPr sz="1200" lang="zh-TW" dirty="0">
                 <a:solidFill>
                   <a:srgbClr val="000000"/>
                 </a:solidFill>
@@ -5290,11 +5290,11 @@
                 <a:spcPts val="0"/>
               </a:spcBef>
               <a:spcAft>
-                <a:spcPts val="233"/>
+                <a:spcPts val="200"/>
               </a:spcAft>
             </a:pPr>
             <a:r>
-              <a:rPr sz="1400" b="1" lang="zh-TW" dirty="0">
+              <a:rPr sz="1200" b="1" lang="zh-TW" dirty="0">
                 <a:solidFill>
                   <a:srgbClr val="000000"/>
                 </a:solidFill>
@@ -5305,15 +5305,37 @@
               <a:t>黃色是機車和腳踏車</a:t>
             </a:r>
             <a:r>
-              <a:rPr sz="1400" lang="zh-TW" dirty="0">
-                <a:solidFill>
-                  <a:srgbClr val="000000"/>
-                </a:solidFill>
-                <a:latin typeface="Arial Unicode MS"/>
-                <a:ea typeface="Arial Unicode MS"/>
-                <a:cs typeface="Arial Unicode MS"/>
-              </a:rPr>
-              <a:t>，比行人還差：二十到三十公尺就只剩 21%。
+              <a:rPr sz="1200" lang="zh-TW" dirty="0">
+                <a:solidFill>
+                  <a:srgbClr val="000000"/>
+                </a:solidFill>
+                <a:latin typeface="Arial Unicode MS"/>
+                <a:ea typeface="Arial Unicode MS"/>
+                <a:cs typeface="Arial Unicode MS"/>
+              </a:rPr>
+              <a:t>，比行人還差：二十到三十公尺就只剩 21%。黃色最左邊那一格只有一條橫線，不是 0%，是</a:t>
+            </a:r>
+            <a:r>
+              <a:rPr sz="1200" b="1" lang="zh-TW" dirty="0">
+                <a:solidFill>
+                  <a:srgbClr val="000000"/>
+                </a:solidFill>
+                <a:latin typeface="Arial Unicode MS"/>
+                <a:ea typeface="Arial Unicode MS"/>
+                <a:cs typeface="Arial Unicode MS"/>
+              </a:rPr>
+              <a:t>沒有資料</a:t>
+            </a:r>
+            <a:r>
+              <a:rPr sz="1200" lang="zh-TW" dirty="0">
+                <a:solidFill>
+                  <a:srgbClr val="000000"/>
+                </a:solidFill>
+                <a:latin typeface="Arial Unicode MS"/>
+                <a:ea typeface="Arial Unicode MS"/>
+                <a:cs typeface="Arial Unicode MS"/>
+              </a:rPr>
+              <a:t>：白天的前方照片裡，十公尺內一台機車、腳踏車都沒有。我查過整份 mini 資料，車子四周十公尺內的機車和腳踏車有四十幾個框，幾乎都在左右兩邊或後面；前方相機拍得到的範圍裡只有一台，而且是晚上。一組不到五個，我們就不算比例，因為只有一台的時候，抓到就是 100%，沒抓到就是 0%，這個數字沒有意義。這也跟資料的來源有關：nuScenes 是在波士頓和新加坡收的，機車本來就少，第 2 節會看到機車的框只有汽車的十六分之一。
 </a:t>
             </a:r>
           </a:p>
@@ -5323,11 +5345,11 @@
                 <a:spcPts val="0"/>
               </a:spcBef>
               <a:spcAft>
-                <a:spcPts val="233"/>
+                <a:spcPts val="200"/>
               </a:spcAft>
             </a:pPr>
             <a:r>
-              <a:rPr sz="1400" lang="zh-TW" dirty="0">
+              <a:rPr sz="1200" lang="zh-TW" dirty="0">
                 <a:solidFill>
                   <a:srgbClr val="000000"/>
                 </a:solidFill>
@@ -5338,7 +5360,7 @@
               <a:t>為什麼？算一下。一個一點七公尺高的人，用這台相機拍，十公尺外在照片上大約兩百多個像素高；四十五公尺外，</a:t>
             </a:r>
             <a:r>
-              <a:rPr sz="1400" b="1" lang="zh-TW" dirty="0">
+              <a:rPr sz="1200" b="1" lang="zh-TW" dirty="0">
                 <a:solidFill>
                   <a:srgbClr val="000000"/>
                 </a:solidFill>
@@ -5349,7 +5371,7 @@
               <a:t>只剩四十七個像素</a:t>
             </a:r>
             <a:r>
-              <a:rPr sz="1400" lang="zh-TW" dirty="0">
+              <a:rPr sz="1200" lang="zh-TW" dirty="0">
                 <a:solidFill>
                   <a:srgbClr val="000000"/>
                 </a:solidFill>
@@ -5360,7 +5382,7 @@
               <a:t>。而且這個模型為了算得快，會先把照片縮成六百四十個像素寬，大約變成原來的四成，四十七個像素就只剩</a:t>
             </a:r>
             <a:r>
-              <a:rPr sz="1400" b="1" lang="zh-TW" dirty="0">
+              <a:rPr sz="1200" b="1" lang="zh-TW" dirty="0">
                 <a:solidFill>
                   <a:srgbClr val="000000"/>
                 </a:solidFill>
@@ -5371,7 +5393,7 @@
               <a:t>十九個</a:t>
             </a:r>
             <a:r>
-              <a:rPr sz="1400" lang="zh-TW" dirty="0">
+              <a:rPr sz="1200" lang="zh-TW" dirty="0">
                 <a:solidFill>
                   <a:srgbClr val="000000"/>
                 </a:solidFill>
@@ -5389,11 +5411,11 @@
                 <a:spcPts val="0"/>
               </a:spcBef>
               <a:spcAft>
-                <a:spcPts val="233"/>
+                <a:spcPts val="200"/>
               </a:spcAft>
             </a:pPr>
             <a:r>
-              <a:rPr sz="1400" lang="zh-TW" dirty="0">
+              <a:rPr sz="1200" lang="zh-TW" dirty="0">
                 <a:solidFill>
                   <a:srgbClr val="000000"/>
                 </a:solidFill>
@@ -5411,11 +5433,11 @@
                 <a:spcPts val="0"/>
               </a:spcBef>
               <a:spcAft>
-                <a:spcPts val="233"/>
+                <a:spcPts val="200"/>
               </a:spcAft>
             </a:pPr>
             <a:r>
-              <a:rPr sz="1400" lang="zh-TW" dirty="0">
+              <a:rPr sz="1200" lang="zh-TW" dirty="0">
                 <a:solidFill>
                   <a:srgbClr val="000000"/>
                 </a:solidFill>
@@ -5426,7 +5448,7 @@
               <a:t>跟上週比一下：上週看到，雷達和光達打在物體上的點，距離愈遠就愈稀疏；今天看到，相機的偵測也一樣。</a:t>
             </a:r>
             <a:r>
-              <a:rPr sz="1400" b="1" lang="zh-TW" dirty="0">
+              <a:rPr sz="1200" b="1" lang="zh-TW" dirty="0">
                 <a:solidFill>
                   <a:srgbClr val="000000"/>
                 </a:solidFill>
@@ -5437,7 +5459,7 @@
               <a:t>每一種感測器都是距離愈遠，表現就愈差</a:t>
             </a:r>
             <a:r>
-              <a:rPr sz="1400" lang="zh-TW" dirty="0">
+              <a:rPr sz="1200" lang="zh-TW" dirty="0">
                 <a:solidFill>
                   <a:srgbClr val="000000"/>
                 </a:solidFill>

--- a/第八週(10-29)/第八週_第1節_簡報.pptx
+++ b/第八週(10-29)/第八週_第1節_簡報.pptx
@@ -6610,11 +6610,11 @@
                 <a:spcPts val="0"/>
               </a:spcBef>
               <a:spcAft>
-                <a:spcPts val="267"/>
+                <a:spcPts val="158"/>
               </a:spcAft>
             </a:pPr>
             <a:r>
-              <a:rPr sz="1600" b="1" lang="zh-TW" dirty="0">
+              <a:rPr sz="950" b="1" lang="zh-TW" dirty="0">
                 <a:solidFill>
                   <a:srgbClr val="000000"/>
                 </a:solidFill>
@@ -6625,7 +6625,7 @@
               <a:t>這一張的目的：</a:t>
             </a:r>
             <a:r>
-              <a:rPr sz="1600" lang="zh-TW" dirty="0">
+              <a:rPr sz="950" lang="zh-TW" dirty="0">
                 <a:solidFill>
                   <a:srgbClr val="000000"/>
                 </a:solidFill>
@@ -6643,11 +6643,11 @@
                 <a:spcPts val="0"/>
               </a:spcBef>
               <a:spcAft>
-                <a:spcPts val="267"/>
+                <a:spcPts val="158"/>
               </a:spcAft>
             </a:pPr>
             <a:r>
-              <a:rPr sz="1600" lang="zh-TW" dirty="0">
+              <a:rPr sz="950" lang="zh-TW" dirty="0">
                 <a:solidFill>
                   <a:srgbClr val="000000"/>
                 </a:solidFill>
@@ -6658,7 +6658,7 @@
               <a:t>這張是同一個路口，畫的是 nuScenes 官方標註的</a:t>
             </a:r>
             <a:r>
-              <a:rPr sz="1600" b="1" lang="zh-TW" dirty="0">
+              <a:rPr sz="950" b="1" lang="zh-TW" dirty="0">
                 <a:solidFill>
                   <a:srgbClr val="000000"/>
                 </a:solidFill>
@@ -6669,7 +6669,7 @@
               <a:t>立體框</a:t>
             </a:r>
             <a:r>
-              <a:rPr sz="1600" lang="zh-TW" dirty="0">
+              <a:rPr sz="950" lang="zh-TW" dirty="0">
                 <a:solidFill>
                   <a:srgbClr val="000000"/>
                 </a:solidFill>
@@ -6687,11 +6687,11 @@
                 <a:spcPts val="0"/>
               </a:spcBef>
               <a:spcAft>
-                <a:spcPts val="267"/>
+                <a:spcPts val="158"/>
               </a:spcAft>
             </a:pPr>
             <a:r>
-              <a:rPr sz="1600" lang="zh-TW" dirty="0">
+              <a:rPr sz="950" lang="zh-TW" dirty="0">
                 <a:solidFill>
                   <a:srgbClr val="000000"/>
                 </a:solidFill>
@@ -6702,7 +6702,7 @@
               <a:t>上週第三節講過，官方每個框記了七個數字：</a:t>
             </a:r>
             <a:r>
-              <a:rPr sz="1600" b="1" lang="zh-TW" dirty="0">
+              <a:rPr sz="950" b="1" lang="zh-TW" dirty="0">
                 <a:solidFill>
                   <a:srgbClr val="000000"/>
                 </a:solidFill>
@@ -6713,7 +6713,7 @@
               <a:t>位置</a:t>
             </a:r>
             <a:r>
-              <a:rPr sz="1600" lang="zh-TW" dirty="0">
+              <a:rPr sz="950" lang="zh-TW" dirty="0">
                 <a:solidFill>
                   <a:srgbClr val="000000"/>
                 </a:solidFill>
@@ -6724,7 +6724,7 @@
               <a:t>三個，前後、左右、高低；</a:t>
             </a:r>
             <a:r>
-              <a:rPr sz="1600" b="1" lang="zh-TW" dirty="0">
+              <a:rPr sz="950" b="1" lang="zh-TW" dirty="0">
                 <a:solidFill>
                   <a:srgbClr val="000000"/>
                 </a:solidFill>
@@ -6735,7 +6735,7 @@
               <a:t>大小</a:t>
             </a:r>
             <a:r>
-              <a:rPr sz="1600" lang="zh-TW" dirty="0">
+              <a:rPr sz="950" lang="zh-TW" dirty="0">
                 <a:solidFill>
                   <a:srgbClr val="000000"/>
                 </a:solidFill>
@@ -6746,7 +6746,7 @@
               <a:t>三個，長、寬、高；還有一個</a:t>
             </a:r>
             <a:r>
-              <a:rPr sz="1600" b="1" lang="zh-TW" dirty="0">
+              <a:rPr sz="950" b="1" lang="zh-TW" dirty="0">
                 <a:solidFill>
                   <a:srgbClr val="000000"/>
                 </a:solidFill>
@@ -6757,7 +6757,7 @@
               <a:t>朝向</a:t>
             </a:r>
             <a:r>
-              <a:rPr sz="1600" lang="zh-TW" dirty="0">
+              <a:rPr sz="950" lang="zh-TW" dirty="0">
                 <a:solidFill>
                   <a:srgbClr val="000000"/>
                 </a:solidFill>
@@ -6775,11 +6775,11 @@
                 <a:spcPts val="0"/>
               </a:spcBef>
               <a:spcAft>
-                <a:spcPts val="267"/>
+                <a:spcPts val="158"/>
               </a:spcAft>
             </a:pPr>
             <a:r>
-              <a:rPr sz="1600" lang="zh-TW" dirty="0">
+              <a:rPr sz="950" lang="zh-TW" dirty="0">
                 <a:solidFill>
                   <a:srgbClr val="000000"/>
                 </a:solidFill>
@@ -6797,19 +6797,19 @@
                 <a:spcPts val="0"/>
               </a:spcBef>
               <a:spcAft>
-                <a:spcPts val="267"/>
+                <a:spcPts val="158"/>
               </a:spcAft>
             </a:pPr>
             <a:r>
-              <a:rPr sz="1600" lang="zh-TW" dirty="0">
-                <a:solidFill>
-                  <a:srgbClr val="000000"/>
-                </a:solidFill>
-                <a:latin typeface="Arial Unicode MS"/>
-                <a:ea typeface="Arial Unicode MS"/>
-                <a:cs typeface="Arial Unicode MS"/>
-              </a:rPr>
-              <a:t>那立體框怎麼來？兩種做法。第一種就是上一張：照片的框加上光達的點，把它「撐」成立體的。第二種是直接拿光達的點雲去找，光達的點本來就是立體的，有現成的模型專門做這件事，例如 nuScenes 那家公司自己做的 PointPillars，把點雲切成一根一根柱子來看。
+              <a:rPr sz="950" lang="zh-TW" dirty="0">
+                <a:solidFill>
+                  <a:srgbClr val="000000"/>
+                </a:solidFill>
+                <a:latin typeface="Arial Unicode MS"/>
+                <a:ea typeface="Arial Unicode MS"/>
+                <a:cs typeface="Arial Unicode MS"/>
+              </a:rPr>
+              <a:t>那立體框怎麼來？有兩種做法。
 </a:t>
             </a:r>
           </a:p>
@@ -6819,11 +6819,264 @@
                 <a:spcPts val="0"/>
               </a:spcBef>
               <a:spcAft>
-                <a:spcPts val="267"/>
+                <a:spcPts val="158"/>
               </a:spcAft>
             </a:pPr>
             <a:r>
-              <a:rPr sz="1600" lang="zh-TW" dirty="0">
+              <a:rPr sz="950" b="1" lang="zh-TW" dirty="0">
+                <a:solidFill>
+                  <a:srgbClr val="000000"/>
+                </a:solidFill>
+                <a:latin typeface="Arial Unicode MS"/>
+                <a:ea typeface="Arial Unicode MS"/>
+                <a:cs typeface="Arial Unicode MS"/>
+              </a:rPr>
+              <a:t>第一種，從照片的框開始，分四步。</a:t>
+            </a:r>
+            <a:r>
+              <a:rPr sz="950" lang="zh-TW" dirty="0">
+                <a:solidFill>
+                  <a:srgbClr val="000000"/>
+                </a:solidFill>
+                <a:latin typeface="Arial Unicode MS"/>
+                <a:ea typeface="Arial Unicode MS"/>
+                <a:cs typeface="Arial Unicode MS"/>
+              </a:rPr>
+              <a:t>
+</a:t>
+            </a:r>
+          </a:p>
+          <a:p>
+            <a:pPr algn="l">
+              <a:spcBef>
+                <a:spcPts val="0"/>
+              </a:spcBef>
+              <a:spcAft>
+                <a:spcPts val="158"/>
+              </a:spcAft>
+            </a:pPr>
+            <a:r>
+              <a:rPr sz="950" lang="zh-TW" dirty="0">
+                <a:solidFill>
+                  <a:srgbClr val="000000"/>
+                </a:solidFill>
+                <a:latin typeface="Arial Unicode MS"/>
+                <a:ea typeface="Arial Unicode MS"/>
+                <a:cs typeface="Arial Unicode MS"/>
+              </a:rPr>
+              <a:t>第一步，</a:t>
+            </a:r>
+            <a:r>
+              <a:rPr sz="950" b="1" lang="zh-TW" dirty="0">
+                <a:solidFill>
+                  <a:srgbClr val="000000"/>
+                </a:solidFill>
+                <a:latin typeface="Arial Unicode MS"/>
+                <a:ea typeface="Arial Unicode MS"/>
+                <a:cs typeface="Arial Unicode MS"/>
+              </a:rPr>
+              <a:t>把照片的框往前延伸。</a:t>
+            </a:r>
+            <a:r>
+              <a:rPr sz="950" lang="zh-TW" dirty="0">
+                <a:solidFill>
+                  <a:srgbClr val="000000"/>
+                </a:solidFill>
+                <a:latin typeface="Arial Unicode MS"/>
+                <a:ea typeface="Arial Unicode MS"/>
+                <a:cs typeface="Arial Unicode MS"/>
+              </a:rPr>
+              <a:t>相機框住的範圍，在真的空間裡是一根愈遠愈粗的光柱，就像拿手電筒往前照。光達的點只要落在這根光柱裡，投到照片上就會在框裡面。
+</a:t>
+            </a:r>
+          </a:p>
+          <a:p>
+            <a:pPr algn="l">
+              <a:spcBef>
+                <a:spcPts val="0"/>
+              </a:spcBef>
+              <a:spcAft>
+                <a:spcPts val="158"/>
+              </a:spcAft>
+            </a:pPr>
+            <a:r>
+              <a:rPr sz="950" lang="zh-TW" dirty="0">
+                <a:solidFill>
+                  <a:srgbClr val="000000"/>
+                </a:solidFill>
+                <a:latin typeface="Arial Unicode MS"/>
+                <a:ea typeface="Arial Unicode MS"/>
+                <a:cs typeface="Arial Unicode MS"/>
+              </a:rPr>
+              <a:t>第二步，</a:t>
+            </a:r>
+            <a:r>
+              <a:rPr sz="950" b="1" lang="zh-TW" dirty="0">
+                <a:solidFill>
+                  <a:srgbClr val="000000"/>
+                </a:solidFill>
+                <a:latin typeface="Arial Unicode MS"/>
+                <a:ea typeface="Arial Unicode MS"/>
+                <a:cs typeface="Arial Unicode MS"/>
+              </a:rPr>
+              <a:t>挑出真的打在那個人身上的點。</a:t>
+            </a:r>
+            <a:r>
+              <a:rPr sz="950" lang="zh-TW" dirty="0">
+                <a:solidFill>
+                  <a:srgbClr val="000000"/>
+                </a:solidFill>
+                <a:latin typeface="Arial Unicode MS"/>
+                <a:ea typeface="Arial Unicode MS"/>
+                <a:cs typeface="Arial Unicode MS"/>
+              </a:rPr>
+              <a:t>光柱裡也有後面的牆和腳下的地面。上一張的做法就是挑點最密的那一群：人站在那裡，打在他身上的點會集中在差不多同一個距離。
+</a:t>
+            </a:r>
+          </a:p>
+          <a:p>
+            <a:pPr algn="l">
+              <a:spcBef>
+                <a:spcPts val="0"/>
+              </a:spcBef>
+              <a:spcAft>
+                <a:spcPts val="158"/>
+              </a:spcAft>
+            </a:pPr>
+            <a:r>
+              <a:rPr sz="950" lang="zh-TW" dirty="0">
+                <a:solidFill>
+                  <a:srgbClr val="000000"/>
+                </a:solidFill>
+                <a:latin typeface="Arial Unicode MS"/>
+                <a:ea typeface="Arial Unicode MS"/>
+                <a:cs typeface="Arial Unicode MS"/>
+              </a:rPr>
+              <a:t>第三步，</a:t>
+            </a:r>
+            <a:r>
+              <a:rPr sz="950" b="1" lang="zh-TW" dirty="0">
+                <a:solidFill>
+                  <a:srgbClr val="000000"/>
+                </a:solidFill>
+                <a:latin typeface="Arial Unicode MS"/>
+                <a:ea typeface="Arial Unicode MS"/>
+                <a:cs typeface="Arial Unicode MS"/>
+              </a:rPr>
+              <a:t>用這群點量位置和大小。</a:t>
+            </a:r>
+            <a:r>
+              <a:rPr sz="950" lang="zh-TW" dirty="0">
+                <a:solidFill>
+                  <a:srgbClr val="000000"/>
+                </a:solidFill>
+                <a:latin typeface="Arial Unicode MS"/>
+                <a:ea typeface="Arial Unicode MS"/>
+                <a:cs typeface="Arial Unicode MS"/>
+              </a:rPr>
+              <a:t>點群的中心，就是人站的位置；最高的點到最低的點，就是身高；點散開的範圍，就是寬度。上一張圖上標著「人・8.9 m」的那個人，框裡有 137 個光達點，挑出最密的 51 個，量到高 1.53 公尺，中心跟官方立體框只差 0.1 公尺。官方的框是寬 0.68、長 0.83、高 1.66 公尺，差不多。
+</a:t>
+            </a:r>
+          </a:p>
+          <a:p>
+            <a:pPr algn="l">
+              <a:spcBef>
+                <a:spcPts val="0"/>
+              </a:spcBef>
+              <a:spcAft>
+                <a:spcPts val="158"/>
+              </a:spcAft>
+            </a:pPr>
+            <a:r>
+              <a:rPr sz="950" lang="zh-TW" dirty="0">
+                <a:solidFill>
+                  <a:srgbClr val="000000"/>
+                </a:solidFill>
+                <a:latin typeface="Arial Unicode MS"/>
+                <a:ea typeface="Arial Unicode MS"/>
+                <a:cs typeface="Arial Unicode MS"/>
+              </a:rPr>
+              <a:t>第四步，</a:t>
+            </a:r>
+            <a:r>
+              <a:rPr sz="950" b="1" lang="zh-TW" dirty="0">
+                <a:solidFill>
+                  <a:srgbClr val="000000"/>
+                </a:solidFill>
+                <a:latin typeface="Arial Unicode MS"/>
+                <a:ea typeface="Arial Unicode MS"/>
+                <a:cs typeface="Arial Unicode MS"/>
+              </a:rPr>
+              <a:t>把看不到的那一半補起來。</a:t>
+            </a:r>
+            <a:r>
+              <a:rPr sz="950" lang="zh-TW" dirty="0">
+                <a:solidFill>
+                  <a:srgbClr val="000000"/>
+                </a:solidFill>
+                <a:latin typeface="Arial Unicode MS"/>
+                <a:ea typeface="Arial Unicode MS"/>
+                <a:cs typeface="Arial Unicode MS"/>
+              </a:rPr>
+              <a:t>光達只打得到朝向我們的那一面，背面沒有點。人很薄，影響不大；車子就差很多。上一張圖右邊標著「車・21.4 m」的那台車，框裡只有 32 個點，而且只打在靠我們的這一側，量出來只有 0.48 公尺高；可是官方的框是長 4.72、高 1.47 公尺，中心也偏了大約 1 公尺。所以要用「這一類東西通常多大」來補：知道它是車，就照一般車的大小，往後補出整台車。朝向則是看點排出來的形狀，例如車子的一角會排成 L 形，或是看它在前後幾個畫面裡往哪裡移動。
+</a:t>
+            </a:r>
+          </a:p>
+          <a:p>
+            <a:pPr algn="l">
+              <a:spcBef>
+                <a:spcPts val="0"/>
+              </a:spcBef>
+              <a:spcAft>
+                <a:spcPts val="158"/>
+              </a:spcAft>
+            </a:pPr>
+            <a:r>
+              <a:rPr sz="950" lang="zh-TW" dirty="0">
+                <a:solidFill>
+                  <a:srgbClr val="000000"/>
+                </a:solidFill>
+                <a:latin typeface="Arial Unicode MS"/>
+                <a:ea typeface="Arial Unicode MS"/>
+                <a:cs typeface="Arial Unicode MS"/>
+              </a:rPr>
+              <a:t>實際的自駕車，這四步大多不是由人一條一條寫規則，而是讓模型從標好立體框的資料裡學出來，例如 Frustum PointNets 就是這種做法，frustum 就是那根光柱的英文。
+</a:t>
+            </a:r>
+          </a:p>
+          <a:p>
+            <a:pPr algn="l">
+              <a:spcBef>
+                <a:spcPts val="0"/>
+              </a:spcBef>
+              <a:spcAft>
+                <a:spcPts val="158"/>
+              </a:spcAft>
+            </a:pPr>
+            <a:r>
+              <a:rPr sz="950" b="1" lang="zh-TW" dirty="0">
+                <a:solidFill>
+                  <a:srgbClr val="000000"/>
+                </a:solidFill>
+                <a:latin typeface="Arial Unicode MS"/>
+                <a:ea typeface="Arial Unicode MS"/>
+                <a:cs typeface="Arial Unicode MS"/>
+              </a:rPr>
+              <a:t>第二種，是直接拿光達的點雲去找，光達的點本來就是立體的，有現成的模型專門做這件事，例如 nuScenes 那家公司自己做的 PointPillars，把點雲切成一根一根柱子來看。
+</a:t>
+            </a:r>
+          </a:p>
+          <a:p>
+            <a:pPr algn="l">
+              <a:spcBef>
+                <a:spcPts val="0"/>
+              </a:spcBef>
+              <a:spcAft>
+                <a:spcPts val="158"/>
+              </a:spcAft>
+            </a:pPr>
+            <a:r>
+              <a:rPr sz="950" lang="zh-TW" dirty="0">
                 <a:solidFill>
                   <a:srgbClr val="000000"/>
                 </a:solidFill>
